--- a/Arquitectura de Sistemas Computacionales/Clases/Clase 11 - Avance del proyecto final/Presentacion.pptx
+++ b/Arquitectura de Sistemas Computacionales/Clases/Clase 11 - Avance del proyecto final/Presentacion.pptx
@@ -17,6 +17,17 @@
     <p:sldId id="265" r:id="rId16"/>
     <p:sldId id="266" r:id="rId17"/>
     <p:sldId id="267" r:id="rId18"/>
+    <p:sldId id="268" r:id="rId19"/>
+    <p:sldId id="269" r:id="rId20"/>
+    <p:sldId id="270" r:id="rId21"/>
+    <p:sldId id="271" r:id="rId22"/>
+    <p:sldId id="272" r:id="rId23"/>
+    <p:sldId id="273" r:id="rId24"/>
+    <p:sldId id="274" r:id="rId25"/>
+    <p:sldId id="275" r:id="rId26"/>
+    <p:sldId id="276" r:id="rId27"/>
+    <p:sldId id="277" r:id="rId28"/>
+    <p:sldId id="278" r:id="rId29"/>
   </p:sldIdLst>
   <p:sldSz cx="12191695" cy="6858000" type="screen4x3"/>
   <p:notesSz cx="6858000" cy="9144000"/>
@@ -3575,7 +3586,7 @@
                 </a:solidFill>
                 <a:latin typeface="Calibri"/>
               </a:rPr>
-              <a:t>Manos a la obra (paso a paso)</a:t>
+              <a:t>Las cinco preguntas de coherencia, en orden (2/2)</a:t>
             </a:r>
           </a:p>
         </p:txBody>
@@ -3608,22 +3619,13 @@
               </a:spcAft>
             </a:pPr>
             <a:r>
-              <a:rPr sz="1700" b="1" i="0">
+              <a:rPr sz="2000" b="0" i="0">
                 <a:solidFill>
                   <a:srgbClr val="333333"/>
                 </a:solidFill>
                 <a:latin typeface="Calibri"/>
               </a:rPr>
-              <a:t>1.</a:t>
-            </a:r>
-            <a:r>
-              <a:rPr sz="1700" b="0" i="0">
-                <a:solidFill>
-                  <a:srgbClr val="333333"/>
-                </a:solidFill>
-                <a:latin typeface="Calibri"/>
-              </a:rPr>
-              <a:t> Paso 1: completen el checklist de 10 filas del paquete v1 marcando cada evidencia como si, no o parcial y pegando la ruta o el enlace exacto de cada una, verificando que ninguna fila marcada como si quede sin ruta verificable, porque una fila sin enlace se califica como no.</a:t>
+              <a:t>–   Tercera: cada amenaza del modelo STRIDE de la Clase 6 tiene un control visible en el despliegue; si la amenaza es acceso no autorizado a la base de datos y el diagrama la muestra en la subred publica, el control existe en el documento y no en el diseno.</a:t>
             </a:r>
           </a:p>
           <a:p>
@@ -3633,31 +3635,13 @@
               </a:spcAft>
             </a:pPr>
             <a:r>
-              <a:rPr sz="1700" b="0" i="0">
+              <a:rPr sz="2000" b="0" i="0">
                 <a:solidFill>
                   <a:srgbClr val="333333"/>
                 </a:solidFill>
                 <a:latin typeface="Calibri"/>
               </a:rPr>
-              <a:t>–   </a:t>
-            </a:r>
-            <a:r>
-              <a:rPr sz="1700" b="1" i="0">
-                <a:solidFill>
-                  <a:srgbClr val="333333"/>
-                </a:solidFill>
-                <a:latin typeface="Calibri"/>
-              </a:rPr>
-              <a:t>2.</a:t>
-            </a:r>
-            <a:r>
-              <a:rPr sz="1700" b="0" i="0">
-                <a:solidFill>
-                  <a:srgbClr val="333333"/>
-                </a:solidFill>
-                <a:latin typeface="Calibri"/>
-              </a:rPr>
-              <a:t> Paso 2: hagan la reconciliacion de nombres llenando la tabla de 5 filas que compara como se llama cada elemento en el C4Container, en el C4Deployment, en el Dockerfile o el ci.yml y en el informe, verificando que la columna de nombre canonico sea identica en las cuatro y aplicando la correccion en el artefacto que este desalineado.</a:t>
+              <a:t>–   Cuarta: los componentes de la tabla de costos de la Clase 10 son los mismos contenedores, no una lista inventada.</a:t>
             </a:r>
           </a:p>
           <a:p>
@@ -3667,31 +3651,13 @@
               </a:spcAft>
             </a:pPr>
             <a:r>
-              <a:rPr sz="1700" b="0" i="0">
+              <a:rPr sz="2000" b="0" i="0">
                 <a:solidFill>
                   <a:srgbClr val="333333"/>
                 </a:solidFill>
                 <a:latin typeface="Calibri"/>
               </a:rPr>
-              <a:t>–   </a:t>
-            </a:r>
-            <a:r>
-              <a:rPr sz="1700" b="1" i="0">
-                <a:solidFill>
-                  <a:srgbClr val="333333"/>
-                </a:solidFill>
-                <a:latin typeface="Calibri"/>
-              </a:rPr>
-              <a:t>3.</a:t>
-            </a:r>
-            <a:r>
-              <a:rPr sz="1700" b="0" i="0">
-                <a:solidFill>
-                  <a:srgbClr val="333333"/>
-                </a:solidFill>
-                <a:latin typeface="Calibri"/>
-              </a:rPr>
-              <a:t> Paso 3: escriban en la plataforma del curso el diagrama C4Component del interior de la API con 5 componentes y sus relaciones hacia la base de datos, la cola y el proveedor de identidad, verificando al renderizar que ningun componente sea un contenedor de la Clase 4 disfrazado y que el contenedor contenedor de la frontera se llame igual que en el C4Container.</a:t>
+              <a:t>–   Quinta: el workflow de Actions se ejecuto al menos una vez con resultado visible, porque un archivo YAML que nunca corrio es una intencion, no evidencia.</a:t>
             </a:r>
           </a:p>
           <a:p>
@@ -3701,65 +3667,13 @@
               </a:spcAft>
             </a:pPr>
             <a:r>
-              <a:rPr sz="1700" b="0" i="0">
+              <a:rPr sz="2000" b="0" i="0">
                 <a:solidFill>
                   <a:srgbClr val="333333"/>
                 </a:solidFill>
                 <a:latin typeface="Calibri"/>
               </a:rPr>
-              <a:t>–   </a:t>
-            </a:r>
-            <a:r>
-              <a:rPr sz="1700" b="1" i="0">
-                <a:solidFill>
-                  <a:srgbClr val="333333"/>
-                </a:solidFill>
-                <a:latin typeface="Calibri"/>
-              </a:rPr>
-              <a:t>4.</a:t>
-            </a:r>
-            <a:r>
-              <a:rPr sz="1700" b="0" i="0">
-                <a:solidFill>
-                  <a:srgbClr val="333333"/>
-                </a:solidFill>
-                <a:latin typeface="Calibri"/>
-              </a:rPr>
-              <a:t> Paso 4: escriban el backlog de 5 items priorizados hacia la Clase 12 con hueco detectado, accion, responsable y fecha, verificando que cada item se pueda cerrar en una semana y que al menos uno provenga del feedback del docente recibido hoy en la cola de revision.</a:t>
-            </a:r>
-          </a:p>
-          <a:p>
-            <a:pPr>
-              <a:spcAft>
-                <a:spcPts val="800"/>
-              </a:spcAft>
-            </a:pPr>
-            <a:r>
-              <a:rPr sz="1700" b="0" i="0">
-                <a:solidFill>
-                  <a:srgbClr val="333333"/>
-                </a:solidFill>
-                <a:latin typeface="Calibri"/>
-              </a:rPr>
-              <a:t>–   </a:t>
-            </a:r>
-            <a:r>
-              <a:rPr sz="1700" b="1" i="0">
-                <a:solidFill>
-                  <a:srgbClr val="333333"/>
-                </a:solidFill>
-                <a:latin typeface="Calibri"/>
-              </a:rPr>
-              <a:t>5.</a:t>
-            </a:r>
-            <a:r>
-              <a:rPr sz="1700" b="0" i="0">
-                <a:solidFill>
-                  <a:srgbClr val="333333"/>
-                </a:solidFill>
-                <a:latin typeface="Calibri"/>
-              </a:rPr>
-              <a:t> Paso 5: empaqueten el ZIP o el repositorio con los diagramas, el Dockerfile, el ci.yml y el informe al 60 por ciento, y suban las 5 preguntas a la plataforma del curso (modulo Talleres) antes del en la fecha que indique el docente, verificando que el paquete se pueda abrir en otra maquina y que el informe enlace cada evidencia por su ruta dentro del paquete.</a:t>
+              <a:t>–   Ese es el nucleo del acta: no una nota, sino cuales de estas cinco cadenas estan rotas en cada proyecto.</a:t>
             </a:r>
           </a:p>
         </p:txBody>
@@ -3940,109 +3854,21 @@
                 </a:solidFill>
                 <a:latin typeface="Calibri"/>
               </a:rPr>
-              <a:t>Para continuar (PI)</a:t>
-            </a:r>
-          </a:p>
-        </p:txBody>
-      </p:sp>
-      <p:sp>
-        <p:nvSpPr>
-          <p:cNvPr id="5" name="Rounded Rectangle 4"/>
-          <p:cNvSpPr/>
-          <p:nvPr/>
-        </p:nvSpPr>
-        <p:spPr>
-          <a:xfrm>
-            <a:off x="457200" y="1261872"/>
-            <a:ext cx="11277295" cy="1051560"/>
-          </a:xfrm>
-          <a:prstGeom prst="roundRect">
-            <a:avLst>
-              <a:gd name="adj" fmla="val 12000"/>
-            </a:avLst>
-          </a:prstGeom>
-          <a:solidFill>
-            <a:srgbClr val="E8F4FA"/>
-          </a:solidFill>
-          <a:ln>
-            <a:noFill/>
-          </a:ln>
-        </p:spPr>
-        <p:style>
-          <a:lnRef idx="1">
-            <a:schemeClr val="accent1"/>
-          </a:lnRef>
-          <a:fillRef idx="3">
-            <a:schemeClr val="accent1"/>
-          </a:fillRef>
-          <a:effectRef idx="2">
-            <a:schemeClr val="accent1"/>
-          </a:effectRef>
-          <a:fontRef idx="minor">
-            <a:schemeClr val="lt1"/>
-          </a:fontRef>
-        </p:style>
-        <p:txBody>
-          <a:bodyPr rtlCol="0" anchor="ctr"/>
-          <a:lstStyle/>
-          <a:p>
-            <a:pPr algn="ctr"/>
-          </a:p>
-        </p:txBody>
-      </p:sp>
-      <p:sp>
-        <p:nvSpPr>
-          <p:cNvPr id="6" name="Rectangle 5"/>
-          <p:cNvSpPr/>
-          <p:nvPr/>
-        </p:nvSpPr>
-        <p:spPr>
-          <a:xfrm>
-            <a:off x="457200" y="1261872"/>
-            <a:ext cx="128016" cy="1051560"/>
-          </a:xfrm>
-          <a:prstGeom prst="rect">
-            <a:avLst/>
-          </a:prstGeom>
-          <a:solidFill>
-            <a:srgbClr val="269CCB"/>
-          </a:solidFill>
-          <a:ln>
-            <a:noFill/>
-          </a:ln>
-        </p:spPr>
-        <p:style>
-          <a:lnRef idx="1">
-            <a:schemeClr val="accent1"/>
-          </a:lnRef>
-          <a:fillRef idx="3">
-            <a:schemeClr val="accent1"/>
-          </a:fillRef>
-          <a:effectRef idx="2">
-            <a:schemeClr val="accent1"/>
-          </a:effectRef>
-          <a:fontRef idx="minor">
-            <a:schemeClr val="lt1"/>
-          </a:fontRef>
-        </p:style>
-        <p:txBody>
-          <a:bodyPr rtlCol="0" anchor="ctr"/>
-          <a:lstStyle/>
-          <a:p>
-            <a:pPr algn="ctr"/>
-          </a:p>
-        </p:txBody>
-      </p:sp>
-      <p:sp>
-        <p:nvSpPr>
-          <p:cNvPr id="7" name="TextBox 6"/>
+              <a:t>Scope creep y arquitectura de papel: las dos patologias con nombre propio (1/2)</a:t>
+            </a:r>
+          </a:p>
+        </p:txBody>
+      </p:sp>
+      <p:sp>
+        <p:nvSpPr>
+          <p:cNvPr id="5" name="TextBox 4"/>
           <p:cNvSpPr txBox="1"/>
           <p:nvPr/>
         </p:nvSpPr>
         <p:spPr>
           <a:xfrm>
-            <a:off x="777240" y="1399031"/>
-            <a:ext cx="10774375" cy="822959"/>
+            <a:off x="457200" y="1170432"/>
+            <a:ext cx="11277295" cy="5230368"/>
           </a:xfrm>
           <a:prstGeom prst="rect">
             <a:avLst/>
@@ -4055,313 +3881,106 @@
           </a:bodyPr>
           <a:lstStyle/>
           <a:p>
-            <a:r>
-              <a:rPr sz="1200" b="1" i="0">
-                <a:solidFill>
-                  <a:srgbClr val="269CCB"/>
-                </a:solidFill>
-                <a:latin typeface="Calibri"/>
-              </a:rPr>
-              <a:t>Info</a:t>
-            </a:r>
-          </a:p>
-          <a:p>
             <a:pPr>
-              <a:spcBef>
-                <a:spcPts val="400"/>
-              </a:spcBef>
+              <a:spcAft>
+                <a:spcPts val="800"/>
+              </a:spcAft>
             </a:pPr>
             <a:r>
-              <a:rPr sz="1400" b="0" i="0">
+              <a:rPr sz="2000" b="0" i="0">
                 <a:solidFill>
                   <a:srgbClr val="333333"/>
                 </a:solidFill>
                 <a:latin typeface="Calibri"/>
               </a:rPr>
-              <a:t>Entregable: Paquete v1: Context + Containers + Deployment + Dockerfile + Actions + informe 60%+</a:t>
-            </a:r>
-          </a:p>
-        </p:txBody>
-      </p:sp>
-      <p:sp>
-        <p:nvSpPr>
-          <p:cNvPr id="8" name="Rounded Rectangle 7"/>
-          <p:cNvSpPr/>
-          <p:nvPr/>
-        </p:nvSpPr>
-        <p:spPr>
-          <a:xfrm>
-            <a:off x="457200" y="2478024"/>
-            <a:ext cx="11277295" cy="1051560"/>
-          </a:xfrm>
-          <a:prstGeom prst="roundRect">
-            <a:avLst>
-              <a:gd name="adj" fmla="val 12000"/>
-            </a:avLst>
-          </a:prstGeom>
-          <a:solidFill>
-            <a:srgbClr val="FFF8E1"/>
-          </a:solidFill>
-          <a:ln>
-            <a:noFill/>
-          </a:ln>
-        </p:spPr>
-        <p:style>
-          <a:lnRef idx="1">
-            <a:schemeClr val="accent1"/>
-          </a:lnRef>
-          <a:fillRef idx="3">
-            <a:schemeClr val="accent1"/>
-          </a:fillRef>
-          <a:effectRef idx="2">
-            <a:schemeClr val="accent1"/>
-          </a:effectRef>
-          <a:fontRef idx="minor">
-            <a:schemeClr val="lt1"/>
-          </a:fontRef>
-        </p:style>
-        <p:txBody>
-          <a:bodyPr rtlCol="0" anchor="ctr"/>
-          <a:lstStyle/>
-          <a:p>
-            <a:pPr algn="ctr"/>
-          </a:p>
-        </p:txBody>
-      </p:sp>
-      <p:sp>
-        <p:nvSpPr>
-          <p:cNvPr id="9" name="Rectangle 8"/>
-          <p:cNvSpPr/>
-          <p:nvPr/>
-        </p:nvSpPr>
-        <p:spPr>
-          <a:xfrm>
-            <a:off x="457200" y="2478024"/>
-            <a:ext cx="128016" cy="1051560"/>
-          </a:xfrm>
-          <a:prstGeom prst="rect">
-            <a:avLst/>
-          </a:prstGeom>
-          <a:solidFill>
-            <a:srgbClr val="FFD000"/>
-          </a:solidFill>
-          <a:ln>
-            <a:noFill/>
-          </a:ln>
-        </p:spPr>
-        <p:style>
-          <a:lnRef idx="1">
-            <a:schemeClr val="accent1"/>
-          </a:lnRef>
-          <a:fillRef idx="3">
-            <a:schemeClr val="accent1"/>
-          </a:fillRef>
-          <a:effectRef idx="2">
-            <a:schemeClr val="accent1"/>
-          </a:effectRef>
-          <a:fontRef idx="minor">
-            <a:schemeClr val="lt1"/>
-          </a:fontRef>
-        </p:style>
-        <p:txBody>
-          <a:bodyPr rtlCol="0" anchor="ctr"/>
-          <a:lstStyle/>
-          <a:p>
-            <a:pPr algn="ctr"/>
-          </a:p>
-        </p:txBody>
-      </p:sp>
-      <p:sp>
-        <p:nvSpPr>
-          <p:cNvPr id="10" name="TextBox 9"/>
-          <p:cNvSpPr txBox="1"/>
-          <p:nvPr/>
-        </p:nvSpPr>
-        <p:spPr>
-          <a:xfrm>
-            <a:off x="777240" y="2615184"/>
-            <a:ext cx="10774375" cy="822959"/>
-          </a:xfrm>
-          <a:prstGeom prst="rect">
-            <a:avLst/>
-          </a:prstGeom>
-          <a:noFill/>
-        </p:spPr>
-        <p:txBody>
-          <a:bodyPr wrap="square">
-            <a:spAutoFit/>
-          </a:bodyPr>
-          <a:lstStyle/>
-          <a:p>
-            <a:r>
-              <a:rPr sz="1200" b="1" i="0">
-                <a:solidFill>
-                  <a:srgbClr val="FFD000"/>
-                </a:solidFill>
-                <a:latin typeface="Calibri"/>
-              </a:rPr>
-              <a:t>Aclaración</a:t>
+              <a:t>–   Hay dos patologias con nombre propio que arruinan las sustentaciones.</a:t>
             </a:r>
           </a:p>
           <a:p>
             <a:pPr>
-              <a:spcBef>
-                <a:spcPts val="400"/>
-              </a:spcBef>
+              <a:spcAft>
+                <a:spcPts val="800"/>
+              </a:spcAft>
             </a:pPr>
             <a:r>
-              <a:rPr sz="1400" b="0" i="0">
+              <a:rPr sz="2000" b="0" i="0">
                 <a:solidFill>
                   <a:srgbClr val="333333"/>
                 </a:solidFill>
                 <a:latin typeface="Calibri"/>
               </a:rPr>
-              <a:t>Subir evidencias al paquete CloudLite (Drive/repo) y a la plataforma del curso en la fecha que indique el docente.</a:t>
-            </a:r>
-          </a:p>
-        </p:txBody>
-      </p:sp>
-      <p:sp>
-        <p:nvSpPr>
-          <p:cNvPr id="11" name="Rounded Rectangle 10"/>
-          <p:cNvSpPr/>
-          <p:nvPr/>
-        </p:nvSpPr>
-        <p:spPr>
-          <a:xfrm>
-            <a:off x="457200" y="3694176"/>
-            <a:ext cx="11277295" cy="1051560"/>
-          </a:xfrm>
-          <a:prstGeom prst="roundRect">
-            <a:avLst>
-              <a:gd name="adj" fmla="val 12000"/>
-            </a:avLst>
-          </a:prstGeom>
-          <a:solidFill>
-            <a:srgbClr val="FBE4E4"/>
-          </a:solidFill>
-          <a:ln>
-            <a:noFill/>
-          </a:ln>
-        </p:spPr>
-        <p:style>
-          <a:lnRef idx="1">
-            <a:schemeClr val="accent1"/>
-          </a:lnRef>
-          <a:fillRef idx="3">
-            <a:schemeClr val="accent1"/>
-          </a:fillRef>
-          <a:effectRef idx="2">
-            <a:schemeClr val="accent1"/>
-          </a:effectRef>
-          <a:fontRef idx="minor">
-            <a:schemeClr val="lt1"/>
-          </a:fontRef>
-        </p:style>
-        <p:txBody>
-          <a:bodyPr rtlCol="0" anchor="ctr"/>
-          <a:lstStyle/>
-          <a:p>
-            <a:pPr algn="ctr"/>
-          </a:p>
-        </p:txBody>
-      </p:sp>
-      <p:sp>
-        <p:nvSpPr>
-          <p:cNvPr id="12" name="Rectangle 11"/>
-          <p:cNvSpPr/>
-          <p:nvPr/>
-        </p:nvSpPr>
-        <p:spPr>
-          <a:xfrm>
-            <a:off x="457200" y="3694176"/>
-            <a:ext cx="128016" cy="1051560"/>
-          </a:xfrm>
-          <a:prstGeom prst="rect">
-            <a:avLst/>
-          </a:prstGeom>
-          <a:solidFill>
-            <a:srgbClr val="A02030"/>
-          </a:solidFill>
-          <a:ln>
-            <a:noFill/>
-          </a:ln>
-        </p:spPr>
-        <p:style>
-          <a:lnRef idx="1">
-            <a:schemeClr val="accent1"/>
-          </a:lnRef>
-          <a:fillRef idx="3">
-            <a:schemeClr val="accent1"/>
-          </a:fillRef>
-          <a:effectRef idx="2">
-            <a:schemeClr val="accent1"/>
-          </a:effectRef>
-          <a:fontRef idx="minor">
-            <a:schemeClr val="lt1"/>
-          </a:fontRef>
-        </p:style>
-        <p:txBody>
-          <a:bodyPr rtlCol="0" anchor="ctr"/>
-          <a:lstStyle/>
-          <a:p>
-            <a:pPr algn="ctr"/>
-          </a:p>
-        </p:txBody>
-      </p:sp>
-      <p:sp>
-        <p:nvSpPr>
-          <p:cNvPr id="13" name="TextBox 12"/>
-          <p:cNvSpPr txBox="1"/>
-          <p:nvPr/>
-        </p:nvSpPr>
-        <p:spPr>
-          <a:xfrm>
-            <a:off x="777240" y="3831336"/>
-            <a:ext cx="10774375" cy="822959"/>
-          </a:xfrm>
-          <a:prstGeom prst="rect">
-            <a:avLst/>
-          </a:prstGeom>
-          <a:noFill/>
-        </p:spPr>
-        <p:txBody>
-          <a:bodyPr wrap="square">
-            <a:spAutoFit/>
-          </a:bodyPr>
-          <a:lstStyle/>
-          <a:p>
-            <a:r>
-              <a:rPr sz="1200" b="1" i="0">
-                <a:solidFill>
-                  <a:srgbClr val="A02030"/>
-                </a:solidFill>
-                <a:latin typeface="Calibri"/>
-              </a:rPr>
-              <a:t>Atención</a:t>
+              <a:t>–   La primera es el scope creep, el crecimiento no controlado del alcance: el sistema suma capacidades clase por clase, cada una razonable por si misma, hasta que el proyecto tiene un alcance que no se puede documentar ni defender en el tiempo restante.</a:t>
             </a:r>
           </a:p>
           <a:p>
             <a:pPr>
-              <a:spcBef>
-                <a:spcPts val="400"/>
-              </a:spcBef>
+              <a:spcAft>
+                <a:spcPts val="800"/>
+              </a:spcAft>
             </a:pPr>
             <a:r>
-              <a:rPr sz="1400" b="0" i="0">
+              <a:rPr sz="2000" b="0" i="0">
                 <a:solidFill>
                   <a:srgbClr val="333333"/>
                 </a:solidFill>
                 <a:latin typeface="Calibri"/>
               </a:rPr>
-              <a:t>Sin cloud de pago ni instalaciones obligatorias de hipervisores/Docker Desktop.</a:t>
-            </a:r>
-          </a:p>
-        </p:txBody>
-      </p:sp>
-      <p:sp>
-        <p:nvSpPr>
-          <p:cNvPr id="14" name="TextBox 13"/>
+              <a:t>–   Se detecta con un dato objetivo, no con intuicion: en la Clase 1 cada estudiante definio entre tres y cinco capacidades para CloudLite, asi que basta contar las de hoy y compararlas con esa linea base</a:t>
+            </a:r>
+          </a:p>
+          <a:p>
+            <a:pPr>
+              <a:spcAft>
+                <a:spcPts val="800"/>
+              </a:spcAft>
+            </a:pPr>
+            <a:r>
+              <a:rPr sz="2000" b="0" i="0">
+                <a:solidFill>
+                  <a:srgbClr val="333333"/>
+                </a:solidFill>
+                <a:latin typeface="Calibri"/>
+              </a:rPr>
+              <a:t>–   Si eran cuatro y hoy son nueve, hay scope creep, y da igual que las nuevas suenen interesantes.</a:t>
+            </a:r>
+          </a:p>
+          <a:p>
+            <a:pPr>
+              <a:spcAft>
+                <a:spcPts val="800"/>
+              </a:spcAft>
+            </a:pPr>
+            <a:r>
+              <a:rPr sz="2000" b="0" i="0">
+                <a:solidFill>
+                  <a:srgbClr val="333333"/>
+                </a:solidFill>
+                <a:latin typeface="Calibri"/>
+              </a:rPr>
+              <a:t>–   La respuesta correcta no es prohibir ideas sino congelar el alcance y abrir una lista de aparcamiento, un anexo donde las capacidades extra quedan escritas como "fuera de alcance v1</a:t>
+            </a:r>
+          </a:p>
+          <a:p>
+            <a:pPr>
+              <a:spcAft>
+                <a:spcPts val="800"/>
+              </a:spcAft>
+            </a:pPr>
+            <a:r>
+              <a:rPr sz="2000" b="0" i="0">
+                <a:solidFill>
+                  <a:srgbClr val="333333"/>
+                </a:solidFill>
+                <a:latin typeface="Calibri"/>
+              </a:rPr>
+              <a:t>–   Candidatas a v2": preserva la idea, protege el cronograma y es lo que hace un equipo profesional al cerrar un release.</a:t>
+            </a:r>
+          </a:p>
+        </p:txBody>
+      </p:sp>
+      <p:sp>
+        <p:nvSpPr>
+          <p:cNvPr id="6" name="TextBox 5"/>
           <p:cNvSpPr txBox="1"/>
           <p:nvPr/>
         </p:nvSpPr>
@@ -4429,13 +4048,13 @@
         <p:spPr>
           <a:xfrm>
             <a:off x="0" y="0"/>
-            <a:ext cx="12191695" cy="164592"/>
+            <a:ext cx="12191695" cy="960120"/>
           </a:xfrm>
           <a:prstGeom prst="rect">
             <a:avLst/>
           </a:prstGeom>
           <a:solidFill>
-            <a:srgbClr val="269CCB"/>
+            <a:srgbClr val="095292"/>
           </a:solidFill>
           <a:ln>
             <a:noFill/>
@@ -4463,9 +4082,1971 @@
           </a:p>
         </p:txBody>
       </p:sp>
+      <p:sp>
+        <p:nvSpPr>
+          <p:cNvPr id="3" name="Rectangle 2"/>
+          <p:cNvSpPr/>
+          <p:nvPr/>
+        </p:nvSpPr>
+        <p:spPr>
+          <a:xfrm>
+            <a:off x="0" y="960120"/>
+            <a:ext cx="12191695" cy="41148"/>
+          </a:xfrm>
+          <a:prstGeom prst="rect">
+            <a:avLst/>
+          </a:prstGeom>
+          <a:solidFill>
+            <a:srgbClr val="FFD000"/>
+          </a:solidFill>
+          <a:ln>
+            <a:noFill/>
+          </a:ln>
+        </p:spPr>
+        <p:style>
+          <a:lnRef idx="1">
+            <a:schemeClr val="accent1"/>
+          </a:lnRef>
+          <a:fillRef idx="3">
+            <a:schemeClr val="accent1"/>
+          </a:fillRef>
+          <a:effectRef idx="2">
+            <a:schemeClr val="accent1"/>
+          </a:effectRef>
+          <a:fontRef idx="minor">
+            <a:schemeClr val="lt1"/>
+          </a:fontRef>
+        </p:style>
+        <p:txBody>
+          <a:bodyPr rtlCol="0" anchor="ctr"/>
+          <a:lstStyle/>
+          <a:p>
+            <a:pPr algn="ctr"/>
+          </a:p>
+        </p:txBody>
+      </p:sp>
+      <p:sp>
+        <p:nvSpPr>
+          <p:cNvPr id="4" name="TextBox 3"/>
+          <p:cNvSpPr txBox="1"/>
+          <p:nvPr/>
+        </p:nvSpPr>
+        <p:spPr>
+          <a:xfrm>
+            <a:off x="457200" y="164592"/>
+            <a:ext cx="11277295" cy="502920"/>
+          </a:xfrm>
+          <a:prstGeom prst="rect">
+            <a:avLst/>
+          </a:prstGeom>
+          <a:noFill/>
+        </p:spPr>
+        <p:txBody>
+          <a:bodyPr wrap="square">
+            <a:spAutoFit/>
+          </a:bodyPr>
+          <a:lstStyle/>
+          <a:p>
+            <a:r>
+              <a:rPr sz="2600" b="1" i="0">
+                <a:solidFill>
+                  <a:srgbClr val="FFFFFF"/>
+                </a:solidFill>
+                <a:latin typeface="Calibri"/>
+              </a:rPr>
+              <a:t>Scope creep y arquitectura de papel: las dos patologias con nombre propio (2/2)</a:t>
+            </a:r>
+          </a:p>
+        </p:txBody>
+      </p:sp>
+      <p:sp>
+        <p:nvSpPr>
+          <p:cNvPr id="5" name="TextBox 4"/>
+          <p:cNvSpPr txBox="1"/>
+          <p:nvPr/>
+        </p:nvSpPr>
+        <p:spPr>
+          <a:xfrm>
+            <a:off x="457200" y="1170432"/>
+            <a:ext cx="11277295" cy="5230368"/>
+          </a:xfrm>
+          <a:prstGeom prst="rect">
+            <a:avLst/>
+          </a:prstGeom>
+          <a:noFill/>
+        </p:spPr>
+        <p:txBody>
+          <a:bodyPr wrap="square">
+            <a:spAutoFit/>
+          </a:bodyPr>
+          <a:lstStyle/>
+          <a:p>
+            <a:pPr>
+              <a:spcAft>
+                <a:spcPts val="800"/>
+              </a:spcAft>
+            </a:pPr>
+            <a:r>
+              <a:rPr sz="2000" b="0" i="0">
+                <a:solidFill>
+                  <a:srgbClr val="333333"/>
+                </a:solidFill>
+                <a:latin typeface="Calibri"/>
+              </a:rPr>
+              <a:t>–   La segunda patologia es el teatro de microservicios: servicios separados en el diagrama que en la practica no son unidades independientes.</a:t>
+            </a:r>
+          </a:p>
+          <a:p>
+            <a:pPr>
+              <a:spcAft>
+                <a:spcPts val="800"/>
+              </a:spcAft>
+            </a:pPr>
+            <a:r>
+              <a:rPr sz="2000" b="0" i="0">
+                <a:solidFill>
+                  <a:srgbClr val="333333"/>
+                </a:solidFill>
+                <a:latin typeface="Calibri"/>
+              </a:rPr>
+              <a:t>–   Se detecta con cuatro preguntas de una linea, todas respondibles por el estudiante: se puede desplegar ese servicio sin desplegar los otros, tiene sus propios datos o comparte tablas con el vecino, puede fallar sin tumbar a los demas</a:t>
+            </a:r>
+          </a:p>
+          <a:p>
+            <a:pPr>
+              <a:spcAft>
+                <a:spcPts val="800"/>
+              </a:spcAft>
+            </a:pPr>
+            <a:r>
+              <a:rPr sz="2000" b="0" i="0">
+                <a:solidFill>
+                  <a:srgbClr val="333333"/>
+                </a:solidFill>
+                <a:latin typeface="Calibri"/>
+              </a:rPr>
+              <a:t>–   Y existe una razon de negocio por la que cambiaria en un momento distinto al resto.</a:t>
+            </a:r>
+          </a:p>
+          <a:p>
+            <a:pPr>
+              <a:spcAft>
+                <a:spcPts val="800"/>
+              </a:spcAft>
+            </a:pPr>
+            <a:r>
+              <a:rPr sz="2000" b="0" i="0">
+                <a:solidFill>
+                  <a:srgbClr val="333333"/>
+                </a:solidFill>
+                <a:latin typeface="Calibri"/>
+              </a:rPr>
+              <a:t>–   En CloudLite el caso clasico es el "servicio de autenticacion" dibujado como caja aparte que en el repositorio es un modulo dentro de la misma API, escribe en las mismas tablas y se despliega en el mismo contenedor.</a:t>
+            </a:r>
+          </a:p>
+          <a:p>
+            <a:pPr>
+              <a:spcAft>
+                <a:spcPts val="800"/>
+              </a:spcAft>
+            </a:pPr>
+            <a:r>
+              <a:rPr sz="2000" b="0" i="0">
+                <a:solidFill>
+                  <a:srgbClr val="333333"/>
+                </a:solidFill>
+                <a:latin typeface="Calibri"/>
+              </a:rPr>
+              <a:t>–   No es un microservicio, es un modulo, y decirlo no castiga al estudiante: corrige el vocabulario antes del Parcial 3, donde esa distincion se evalua.</a:t>
+            </a:r>
+          </a:p>
+        </p:txBody>
+      </p:sp>
+      <p:sp>
+        <p:nvSpPr>
+          <p:cNvPr id="6" name="TextBox 5"/>
+          <p:cNvSpPr txBox="1"/>
+          <p:nvPr/>
+        </p:nvSpPr>
+        <p:spPr>
+          <a:xfrm>
+            <a:off x="11185855" y="6473952"/>
+            <a:ext cx="640080" cy="274320"/>
+          </a:xfrm>
+          <a:prstGeom prst="rect">
+            <a:avLst/>
+          </a:prstGeom>
+          <a:noFill/>
+        </p:spPr>
+        <p:txBody>
+          <a:bodyPr wrap="square">
+            <a:spAutoFit/>
+          </a:bodyPr>
+          <a:lstStyle/>
+          <a:p>
+            <a:pPr algn="r"/>
+            <a:r>
+              <a:rPr sz="1100" b="0" i="0">
+                <a:solidFill>
+                  <a:srgbClr val="666666"/>
+                </a:solidFill>
+                <a:latin typeface="Calibri"/>
+              </a:rPr>
+              <a:t>12</a:t>
+            </a:r>
+          </a:p>
+        </p:txBody>
+      </p:sp>
+    </p:spTree>
+  </p:cSld>
+  <p:clrMapOvr>
+    <a:masterClrMapping/>
+  </p:clrMapOvr>
+</p:sld>
+</file>
+
+<file path=ppt/slides/slide13.xml><?xml version="1.0" encoding="utf-8"?>
+<p:sld xmlns:a="http://schemas.openxmlformats.org/drawingml/2006/main" xmlns:p="http://schemas.openxmlformats.org/presentationml/2006/main" xmlns:r="http://schemas.openxmlformats.org/officeDocument/2006/relationships">
+  <p:cSld>
+    <p:bg>
+      <p:bgPr>
+        <a:solidFill>
+          <a:srgbClr val="FFFFFF"/>
+        </a:solidFill>
+        <a:effectLst/>
+      </p:bgPr>
+    </p:bg>
+    <p:spTree>
+      <p:nvGrpSpPr>
+        <p:cNvPr id="1" name=""/>
+        <p:cNvGrpSpPr/>
+        <p:nvPr/>
+      </p:nvGrpSpPr>
+      <p:grpSpPr/>
+      <p:sp>
+        <p:nvSpPr>
+          <p:cNvPr id="2" name="Rectangle 1"/>
+          <p:cNvSpPr/>
+          <p:nvPr/>
+        </p:nvSpPr>
+        <p:spPr>
+          <a:xfrm>
+            <a:off x="0" y="0"/>
+            <a:ext cx="12191695" cy="960120"/>
+          </a:xfrm>
+          <a:prstGeom prst="rect">
+            <a:avLst/>
+          </a:prstGeom>
+          <a:solidFill>
+            <a:srgbClr val="095292"/>
+          </a:solidFill>
+          <a:ln>
+            <a:noFill/>
+          </a:ln>
+        </p:spPr>
+        <p:style>
+          <a:lnRef idx="1">
+            <a:schemeClr val="accent1"/>
+          </a:lnRef>
+          <a:fillRef idx="3">
+            <a:schemeClr val="accent1"/>
+          </a:fillRef>
+          <a:effectRef idx="2">
+            <a:schemeClr val="accent1"/>
+          </a:effectRef>
+          <a:fontRef idx="minor">
+            <a:schemeClr val="lt1"/>
+          </a:fontRef>
+        </p:style>
+        <p:txBody>
+          <a:bodyPr rtlCol="0" anchor="ctr"/>
+          <a:lstStyle/>
+          <a:p>
+            <a:pPr algn="ctr"/>
+          </a:p>
+        </p:txBody>
+      </p:sp>
+      <p:sp>
+        <p:nvSpPr>
+          <p:cNvPr id="3" name="Rectangle 2"/>
+          <p:cNvSpPr/>
+          <p:nvPr/>
+        </p:nvSpPr>
+        <p:spPr>
+          <a:xfrm>
+            <a:off x="0" y="960120"/>
+            <a:ext cx="12191695" cy="41148"/>
+          </a:xfrm>
+          <a:prstGeom prst="rect">
+            <a:avLst/>
+          </a:prstGeom>
+          <a:solidFill>
+            <a:srgbClr val="FFD000"/>
+          </a:solidFill>
+          <a:ln>
+            <a:noFill/>
+          </a:ln>
+        </p:spPr>
+        <p:style>
+          <a:lnRef idx="1">
+            <a:schemeClr val="accent1"/>
+          </a:lnRef>
+          <a:fillRef idx="3">
+            <a:schemeClr val="accent1"/>
+          </a:fillRef>
+          <a:effectRef idx="2">
+            <a:schemeClr val="accent1"/>
+          </a:effectRef>
+          <a:fontRef idx="minor">
+            <a:schemeClr val="lt1"/>
+          </a:fontRef>
+        </p:style>
+        <p:txBody>
+          <a:bodyPr rtlCol="0" anchor="ctr"/>
+          <a:lstStyle/>
+          <a:p>
+            <a:pPr algn="ctr"/>
+          </a:p>
+        </p:txBody>
+      </p:sp>
+      <p:sp>
+        <p:nvSpPr>
+          <p:cNvPr id="4" name="TextBox 3"/>
+          <p:cNvSpPr txBox="1"/>
+          <p:nvPr/>
+        </p:nvSpPr>
+        <p:spPr>
+          <a:xfrm>
+            <a:off x="457200" y="164592"/>
+            <a:ext cx="11277295" cy="502920"/>
+          </a:xfrm>
+          <a:prstGeom prst="rect">
+            <a:avLst/>
+          </a:prstGeom>
+          <a:noFill/>
+        </p:spPr>
+        <p:txBody>
+          <a:bodyPr wrap="square">
+            <a:spAutoFit/>
+          </a:bodyPr>
+          <a:lstStyle/>
+          <a:p>
+            <a:r>
+              <a:rPr sz="2600" b="1" i="0">
+                <a:solidFill>
+                  <a:srgbClr val="FFFFFF"/>
+                </a:solidFill>
+                <a:latin typeface="Calibri"/>
+              </a:rPr>
+              <a:t>Retroalimentacion accionable: observacion, evidencia, impacto y accion con fecha</a:t>
+            </a:r>
+          </a:p>
+        </p:txBody>
+      </p:sp>
+      <p:sp>
+        <p:nvSpPr>
+          <p:cNvPr id="5" name="TextBox 4"/>
+          <p:cNvSpPr txBox="1"/>
+          <p:nvPr/>
+        </p:nvSpPr>
+        <p:spPr>
+          <a:xfrm>
+            <a:off x="457200" y="1170432"/>
+            <a:ext cx="11277295" cy="5230368"/>
+          </a:xfrm>
+          <a:prstGeom prst="rect">
+            <a:avLst/>
+          </a:prstGeom>
+          <a:noFill/>
+        </p:spPr>
+        <p:txBody>
+          <a:bodyPr wrap="square">
+            <a:spAutoFit/>
+          </a:bodyPr>
+          <a:lstStyle/>
+          <a:p>
+            <a:pPr>
+              <a:spcAft>
+                <a:spcPts val="800"/>
+              </a:spcAft>
+            </a:pPr>
+            <a:r>
+              <a:rPr sz="2000" b="0" i="0">
+                <a:solidFill>
+                  <a:srgbClr val="333333"/>
+                </a:solidFill>
+                <a:latin typeface="Calibri"/>
+              </a:rPr>
+              <a:t>–   La retroalimentacion es la mitad del valor del dia y tiene tecnica propia.</a:t>
+            </a:r>
+          </a:p>
+          <a:p>
+            <a:pPr>
+              <a:spcAft>
+                <a:spcPts val="800"/>
+              </a:spcAft>
+            </a:pPr>
+            <a:r>
+              <a:rPr sz="2000" b="0" i="0">
+                <a:solidFill>
+                  <a:srgbClr val="333333"/>
+                </a:solidFill>
+                <a:latin typeface="Calibri"/>
+              </a:rPr>
+              <a:t>–   Una retroalimentacion accionable tiene cuatro partes: observacion, evidencia, impacto y accion con fecha. "Falta seguridad" no cumple ninguna. "En el diagrama de despliegue la base de datos esta en la subred publica</a:t>
+            </a:r>
+          </a:p>
+          <a:p>
+            <a:pPr>
+              <a:spcAft>
+                <a:spcPts val="800"/>
+              </a:spcAft>
+            </a:pPr>
+            <a:r>
+              <a:rPr sz="2000" b="0" i="0">
+                <a:solidFill>
+                  <a:srgbClr val="333333"/>
+                </a:solidFill>
+                <a:latin typeface="Calibri"/>
+              </a:rPr>
+              <a:t>–   Contradice el control que ustedes escribieron para la amenaza de acceso no autorizado</a:t>
+            </a:r>
+          </a:p>
+          <a:p>
+            <a:pPr>
+              <a:spcAft>
+                <a:spcPts val="800"/>
+              </a:spcAft>
+            </a:pPr>
+            <a:r>
+              <a:rPr sz="2000" b="0" i="0">
+                <a:solidFill>
+                  <a:srgbClr val="333333"/>
+                </a:solidFill>
+                <a:latin typeface="Calibri"/>
+              </a:rPr>
+              <a:t>–   Si lo sustentan asi en la Clase 15 el evaluador concluira que el modelo de amenazas se escribio sin mirar el diagrama; muevanla a subred privada y dejen solo la API expuesta, antes de la Clase 12" cumple las cuatro.</a:t>
+            </a:r>
+          </a:p>
+          <a:p>
+            <a:pPr>
+              <a:spcAft>
+                <a:spcPts val="800"/>
+              </a:spcAft>
+            </a:pPr>
+            <a:r>
+              <a:rPr sz="2000" b="0" i="0">
+                <a:solidFill>
+                  <a:srgbClr val="333333"/>
+                </a:solidFill>
+                <a:latin typeface="Calibri"/>
+              </a:rPr>
+              <a:t>–   Y la revision entre pares cumple una funcion que la del docente no puede: explicarle el sistema a otro estudiante obliga a verbalizar decisiones que nunca se dijeron en voz alta, y ahi el propio autor descubre sus huecos.</a:t>
+            </a:r>
+          </a:p>
+          <a:p>
+            <a:pPr>
+              <a:spcAft>
+                <a:spcPts val="800"/>
+              </a:spcAft>
+            </a:pPr>
+            <a:r>
+              <a:rPr sz="2000" b="0" i="0">
+                <a:solidFill>
+                  <a:srgbClr val="333333"/>
+                </a:solidFill>
+                <a:latin typeface="Calibri"/>
+              </a:rPr>
+              <a:t>–   El formato eficiente es de siete a ocho minutos por proyecto, con reloj visible, y el revisor asignado (otro estudiante, u otro equipo si el docente los autorizo) entregando por escrito una observacion y una pregunta.</a:t>
+            </a:r>
+          </a:p>
+        </p:txBody>
+      </p:sp>
+      <p:sp>
+        <p:nvSpPr>
+          <p:cNvPr id="6" name="TextBox 5"/>
+          <p:cNvSpPr txBox="1"/>
+          <p:nvPr/>
+        </p:nvSpPr>
+        <p:spPr>
+          <a:xfrm>
+            <a:off x="11185855" y="6473952"/>
+            <a:ext cx="640080" cy="274320"/>
+          </a:xfrm>
+          <a:prstGeom prst="rect">
+            <a:avLst/>
+          </a:prstGeom>
+          <a:noFill/>
+        </p:spPr>
+        <p:txBody>
+          <a:bodyPr wrap="square">
+            <a:spAutoFit/>
+          </a:bodyPr>
+          <a:lstStyle/>
+          <a:p>
+            <a:pPr algn="r"/>
+            <a:r>
+              <a:rPr sz="1100" b="0" i="0">
+                <a:solidFill>
+                  <a:srgbClr val="666666"/>
+                </a:solidFill>
+                <a:latin typeface="Calibri"/>
+              </a:rPr>
+              <a:t>13</a:t>
+            </a:r>
+          </a:p>
+        </p:txBody>
+      </p:sp>
+    </p:spTree>
+  </p:cSld>
+  <p:clrMapOvr>
+    <a:masterClrMapping/>
+  </p:clrMapOvr>
+</p:sld>
+</file>
+
+<file path=ppt/slides/slide14.xml><?xml version="1.0" encoding="utf-8"?>
+<p:sld xmlns:a="http://schemas.openxmlformats.org/drawingml/2006/main" xmlns:p="http://schemas.openxmlformats.org/presentationml/2006/main" xmlns:r="http://schemas.openxmlformats.org/officeDocument/2006/relationships">
+  <p:cSld>
+    <p:bg>
+      <p:bgPr>
+        <a:solidFill>
+          <a:srgbClr val="FFFFFF"/>
+        </a:solidFill>
+        <a:effectLst/>
+      </p:bgPr>
+    </p:bg>
+    <p:spTree>
+      <p:nvGrpSpPr>
+        <p:cNvPr id="1" name=""/>
+        <p:cNvGrpSpPr/>
+        <p:nvPr/>
+      </p:nvGrpSpPr>
+      <p:grpSpPr/>
+      <p:sp>
+        <p:nvSpPr>
+          <p:cNvPr id="2" name="Rectangle 1"/>
+          <p:cNvSpPr/>
+          <p:nvPr/>
+        </p:nvSpPr>
+        <p:spPr>
+          <a:xfrm>
+            <a:off x="0" y="0"/>
+            <a:ext cx="12191695" cy="960120"/>
+          </a:xfrm>
+          <a:prstGeom prst="rect">
+            <a:avLst/>
+          </a:prstGeom>
+          <a:solidFill>
+            <a:srgbClr val="095292"/>
+          </a:solidFill>
+          <a:ln>
+            <a:noFill/>
+          </a:ln>
+        </p:spPr>
+        <p:style>
+          <a:lnRef idx="1">
+            <a:schemeClr val="accent1"/>
+          </a:lnRef>
+          <a:fillRef idx="3">
+            <a:schemeClr val="accent1"/>
+          </a:fillRef>
+          <a:effectRef idx="2">
+            <a:schemeClr val="accent1"/>
+          </a:effectRef>
+          <a:fontRef idx="minor">
+            <a:schemeClr val="lt1"/>
+          </a:fontRef>
+        </p:style>
+        <p:txBody>
+          <a:bodyPr rtlCol="0" anchor="ctr"/>
+          <a:lstStyle/>
+          <a:p>
+            <a:pPr algn="ctr"/>
+          </a:p>
+        </p:txBody>
+      </p:sp>
+      <p:sp>
+        <p:nvSpPr>
+          <p:cNvPr id="3" name="Rectangle 2"/>
+          <p:cNvSpPr/>
+          <p:nvPr/>
+        </p:nvSpPr>
+        <p:spPr>
+          <a:xfrm>
+            <a:off x="0" y="960120"/>
+            <a:ext cx="12191695" cy="41148"/>
+          </a:xfrm>
+          <a:prstGeom prst="rect">
+            <a:avLst/>
+          </a:prstGeom>
+          <a:solidFill>
+            <a:srgbClr val="FFD000"/>
+          </a:solidFill>
+          <a:ln>
+            <a:noFill/>
+          </a:ln>
+        </p:spPr>
+        <p:style>
+          <a:lnRef idx="1">
+            <a:schemeClr val="accent1"/>
+          </a:lnRef>
+          <a:fillRef idx="3">
+            <a:schemeClr val="accent1"/>
+          </a:fillRef>
+          <a:effectRef idx="2">
+            <a:schemeClr val="accent1"/>
+          </a:effectRef>
+          <a:fontRef idx="minor">
+            <a:schemeClr val="lt1"/>
+          </a:fontRef>
+        </p:style>
+        <p:txBody>
+          <a:bodyPr rtlCol="0" anchor="ctr"/>
+          <a:lstStyle/>
+          <a:p>
+            <a:pPr algn="ctr"/>
+          </a:p>
+        </p:txBody>
+      </p:sp>
+      <p:sp>
+        <p:nvSpPr>
+          <p:cNvPr id="4" name="TextBox 3"/>
+          <p:cNvSpPr txBox="1"/>
+          <p:nvPr/>
+        </p:nvSpPr>
+        <p:spPr>
+          <a:xfrm>
+            <a:off x="457200" y="164592"/>
+            <a:ext cx="11277295" cy="502920"/>
+          </a:xfrm>
+          <a:prstGeom prst="rect">
+            <a:avLst/>
+          </a:prstGeom>
+          <a:noFill/>
+        </p:spPr>
+        <p:txBody>
+          <a:bodyPr wrap="square">
+            <a:spAutoFit/>
+          </a:bodyPr>
+          <a:lstStyle/>
+          <a:p>
+            <a:r>
+              <a:rPr sz="2600" b="1" i="0">
+                <a:solidFill>
+                  <a:srgbClr val="FFFFFF"/>
+                </a:solidFill>
+                <a:latin typeface="Calibri"/>
+              </a:rPr>
+              <a:t>El semaforo: el umbral que decide si el proyecto va a tiempo (1/2)</a:t>
+            </a:r>
+          </a:p>
+        </p:txBody>
+      </p:sp>
+      <p:sp>
+        <p:nvSpPr>
+          <p:cNvPr id="5" name="TextBox 4"/>
+          <p:cNvSpPr txBox="1"/>
+          <p:nvPr/>
+        </p:nvSpPr>
+        <p:spPr>
+          <a:xfrm>
+            <a:off x="457200" y="1170432"/>
+            <a:ext cx="11277295" cy="5230368"/>
+          </a:xfrm>
+          <a:prstGeom prst="rect">
+            <a:avLst/>
+          </a:prstGeom>
+          <a:noFill/>
+        </p:spPr>
+        <p:txBody>
+          <a:bodyPr wrap="square">
+            <a:spAutoFit/>
+          </a:bodyPr>
+          <a:lstStyle/>
+          <a:p>
+            <a:pPr>
+              <a:spcAft>
+                <a:spcPts val="800"/>
+              </a:spcAft>
+            </a:pPr>
+            <a:r>
+              <a:rPr sz="2000" b="0" i="0">
+                <a:solidFill>
+                  <a:srgbClr val="333333"/>
+                </a:solidFill>
+                <a:latin typeface="Calibri"/>
+              </a:rPr>
+              <a:t>–   Falta el criterio para decidir si un proyecto va a tiempo, y aqui el docente necesita un umbral y no una impresion.</a:t>
+            </a:r>
+          </a:p>
+          <a:p>
+            <a:pPr>
+              <a:spcAft>
+                <a:spcPts val="800"/>
+              </a:spcAft>
+            </a:pPr>
+            <a:r>
+              <a:rPr sz="2000" b="0" i="0">
+                <a:solidFill>
+                  <a:srgbClr val="333333"/>
+                </a:solidFill>
+                <a:latin typeface="Calibri"/>
+              </a:rPr>
+              <a:t>–   Con seis artefactos esperados la regla practica es un semaforo: verde si estan los seis y a lo sumo una cadena de trazabilidad rota</a:t>
+            </a:r>
+          </a:p>
+          <a:p>
+            <a:pPr>
+              <a:spcAft>
+                <a:spcPts val="800"/>
+              </a:spcAft>
+            </a:pPr>
+            <a:r>
+              <a:rPr sz="2000" b="0" i="0">
+                <a:solidFill>
+                  <a:srgbClr val="333333"/>
+                </a:solidFill>
+                <a:latin typeface="Calibri"/>
+              </a:rPr>
+              <a:t>–   Amarillo si hay cinco de seis, o dos o tres cadenas rotas pero corregibles editando documentos; rojo si falta el C4 de Contenedores o el diagrama de despliegue</a:t>
+            </a:r>
+          </a:p>
+          <a:p>
+            <a:pPr>
+              <a:spcAft>
+                <a:spcPts val="800"/>
+              </a:spcAft>
+            </a:pPr>
+            <a:r>
+              <a:rPr sz="2000" b="0" i="0">
+                <a:solidFill>
+                  <a:srgbClr val="333333"/>
+                </a:solidFill>
+                <a:latin typeface="Calibri"/>
+              </a:rPr>
+              <a:t>–   Que son la columna vertebral y sin los cuales el resto no se puede evaluar, o si el repositorio no existe.</a:t>
+            </a:r>
+          </a:p>
+          <a:p>
+            <a:pPr>
+              <a:spcAft>
+                <a:spcPts val="800"/>
+              </a:spcAft>
+            </a:pPr>
+            <a:r>
+              <a:rPr sz="2000" b="0" i="0">
+                <a:solidFill>
+                  <a:srgbClr val="333333"/>
+                </a:solidFill>
+                <a:latin typeface="Calibri"/>
+              </a:rPr>
+              <a:t>–   El umbral de seis no es una ley de la ingenieria, es la contabilidad de este curso, y decirlo asi evita que el estudiante lo memorice como estandar internacional.</a:t>
+            </a:r>
+          </a:p>
+        </p:txBody>
+      </p:sp>
+      <p:sp>
+        <p:nvSpPr>
+          <p:cNvPr id="6" name="TextBox 5"/>
+          <p:cNvSpPr txBox="1"/>
+          <p:nvPr/>
+        </p:nvSpPr>
+        <p:spPr>
+          <a:xfrm>
+            <a:off x="11185855" y="6473952"/>
+            <a:ext cx="640080" cy="274320"/>
+          </a:xfrm>
+          <a:prstGeom prst="rect">
+            <a:avLst/>
+          </a:prstGeom>
+          <a:noFill/>
+        </p:spPr>
+        <p:txBody>
+          <a:bodyPr wrap="square">
+            <a:spAutoFit/>
+          </a:bodyPr>
+          <a:lstStyle/>
+          <a:p>
+            <a:pPr algn="r"/>
+            <a:r>
+              <a:rPr sz="1100" b="0" i="0">
+                <a:solidFill>
+                  <a:srgbClr val="666666"/>
+                </a:solidFill>
+                <a:latin typeface="Calibri"/>
+              </a:rPr>
+              <a:t>14</a:t>
+            </a:r>
+          </a:p>
+        </p:txBody>
+      </p:sp>
+    </p:spTree>
+  </p:cSld>
+  <p:clrMapOvr>
+    <a:masterClrMapping/>
+  </p:clrMapOvr>
+</p:sld>
+</file>
+
+<file path=ppt/slides/slide15.xml><?xml version="1.0" encoding="utf-8"?>
+<p:sld xmlns:a="http://schemas.openxmlformats.org/drawingml/2006/main" xmlns:p="http://schemas.openxmlformats.org/presentationml/2006/main" xmlns:r="http://schemas.openxmlformats.org/officeDocument/2006/relationships">
+  <p:cSld>
+    <p:bg>
+      <p:bgPr>
+        <a:solidFill>
+          <a:srgbClr val="FFFFFF"/>
+        </a:solidFill>
+        <a:effectLst/>
+      </p:bgPr>
+    </p:bg>
+    <p:spTree>
+      <p:nvGrpSpPr>
+        <p:cNvPr id="1" name=""/>
+        <p:cNvGrpSpPr/>
+        <p:nvPr/>
+      </p:nvGrpSpPr>
+      <p:grpSpPr/>
+      <p:sp>
+        <p:nvSpPr>
+          <p:cNvPr id="2" name="Rectangle 1"/>
+          <p:cNvSpPr/>
+          <p:nvPr/>
+        </p:nvSpPr>
+        <p:spPr>
+          <a:xfrm>
+            <a:off x="0" y="0"/>
+            <a:ext cx="12191695" cy="960120"/>
+          </a:xfrm>
+          <a:prstGeom prst="rect">
+            <a:avLst/>
+          </a:prstGeom>
+          <a:solidFill>
+            <a:srgbClr val="095292"/>
+          </a:solidFill>
+          <a:ln>
+            <a:noFill/>
+          </a:ln>
+        </p:spPr>
+        <p:style>
+          <a:lnRef idx="1">
+            <a:schemeClr val="accent1"/>
+          </a:lnRef>
+          <a:fillRef idx="3">
+            <a:schemeClr val="accent1"/>
+          </a:fillRef>
+          <a:effectRef idx="2">
+            <a:schemeClr val="accent1"/>
+          </a:effectRef>
+          <a:fontRef idx="minor">
+            <a:schemeClr val="lt1"/>
+          </a:fontRef>
+        </p:style>
+        <p:txBody>
+          <a:bodyPr rtlCol="0" anchor="ctr"/>
+          <a:lstStyle/>
+          <a:p>
+            <a:pPr algn="ctr"/>
+          </a:p>
+        </p:txBody>
+      </p:sp>
+      <p:sp>
+        <p:nvSpPr>
+          <p:cNvPr id="3" name="Rectangle 2"/>
+          <p:cNvSpPr/>
+          <p:nvPr/>
+        </p:nvSpPr>
+        <p:spPr>
+          <a:xfrm>
+            <a:off x="0" y="960120"/>
+            <a:ext cx="12191695" cy="41148"/>
+          </a:xfrm>
+          <a:prstGeom prst="rect">
+            <a:avLst/>
+          </a:prstGeom>
+          <a:solidFill>
+            <a:srgbClr val="FFD000"/>
+          </a:solidFill>
+          <a:ln>
+            <a:noFill/>
+          </a:ln>
+        </p:spPr>
+        <p:style>
+          <a:lnRef idx="1">
+            <a:schemeClr val="accent1"/>
+          </a:lnRef>
+          <a:fillRef idx="3">
+            <a:schemeClr val="accent1"/>
+          </a:fillRef>
+          <a:effectRef idx="2">
+            <a:schemeClr val="accent1"/>
+          </a:effectRef>
+          <a:fontRef idx="minor">
+            <a:schemeClr val="lt1"/>
+          </a:fontRef>
+        </p:style>
+        <p:txBody>
+          <a:bodyPr rtlCol="0" anchor="ctr"/>
+          <a:lstStyle/>
+          <a:p>
+            <a:pPr algn="ctr"/>
+          </a:p>
+        </p:txBody>
+      </p:sp>
+      <p:sp>
+        <p:nvSpPr>
+          <p:cNvPr id="4" name="TextBox 3"/>
+          <p:cNvSpPr txBox="1"/>
+          <p:nvPr/>
+        </p:nvSpPr>
+        <p:spPr>
+          <a:xfrm>
+            <a:off x="457200" y="164592"/>
+            <a:ext cx="11277295" cy="502920"/>
+          </a:xfrm>
+          <a:prstGeom prst="rect">
+            <a:avLst/>
+          </a:prstGeom>
+          <a:noFill/>
+        </p:spPr>
+        <p:txBody>
+          <a:bodyPr wrap="square">
+            <a:spAutoFit/>
+          </a:bodyPr>
+          <a:lstStyle/>
+          <a:p>
+            <a:r>
+              <a:rPr sz="2600" b="1" i="0">
+                <a:solidFill>
+                  <a:srgbClr val="FFFFFF"/>
+                </a:solidFill>
+                <a:latin typeface="Calibri"/>
+              </a:rPr>
+              <a:t>El semaforo: el umbral que decide si el proyecto va a tiempo (2/2)</a:t>
+            </a:r>
+          </a:p>
+        </p:txBody>
+      </p:sp>
+      <p:sp>
+        <p:nvSpPr>
+          <p:cNvPr id="5" name="TextBox 4"/>
+          <p:cNvSpPr txBox="1"/>
+          <p:nvPr/>
+        </p:nvSpPr>
+        <p:spPr>
+          <a:xfrm>
+            <a:off x="457200" y="1170432"/>
+            <a:ext cx="11277295" cy="5230368"/>
+          </a:xfrm>
+          <a:prstGeom prst="rect">
+            <a:avLst/>
+          </a:prstGeom>
+          <a:noFill/>
+        </p:spPr>
+        <p:txBody>
+          <a:bodyPr wrap="square">
+            <a:spAutoFit/>
+          </a:bodyPr>
+          <a:lstStyle/>
+          <a:p>
+            <a:pPr>
+              <a:spcAft>
+                <a:spcPts val="800"/>
+              </a:spcAft>
+            </a:pPr>
+            <a:r>
+              <a:rPr sz="2000" b="0" i="0">
+                <a:solidFill>
+                  <a:srgbClr val="333333"/>
+                </a:solidFill>
+                <a:latin typeface="Calibri"/>
+              </a:rPr>
+              <a:t>–   Lo transferible es la idea de fondo: un checkpoint se evalua por evidencia presente, no por promesas.</a:t>
+            </a:r>
+          </a:p>
+          <a:p>
+            <a:pPr>
+              <a:spcAft>
+                <a:spcPts val="800"/>
+              </a:spcAft>
+            </a:pPr>
+            <a:r>
+              <a:rPr sz="2000" b="0" i="0">
+                <a:solidFill>
+                  <a:srgbClr val="333333"/>
+                </a:solidFill>
+                <a:latin typeface="Calibri"/>
+              </a:rPr>
+              <a:t>–   Cuando un estudiante dice "eso ya lo tenemos, solo falta subirlo", el estado es amarillo y el acta lo registra con fecha de cierre; no es desconfianza, es que en un proyecto lo que no esta en el repositorio no existe.</a:t>
+            </a:r>
+          </a:p>
+          <a:p>
+            <a:pPr>
+              <a:spcAft>
+                <a:spcPts val="800"/>
+              </a:spcAft>
+            </a:pPr>
+            <a:r>
+              <a:rPr sz="2000" b="0" i="0">
+                <a:solidFill>
+                  <a:srgbClr val="333333"/>
+                </a:solidFill>
+                <a:latin typeface="Calibri"/>
+              </a:rPr>
+              <a:t>–   Para un proyecto en rojo el plan de recuperacion debe reducir alcance, nunca agregar trabajo: menos capacidades, menos servicios, y toda la energia en las dos piezas que faltan.</a:t>
+            </a:r>
+          </a:p>
+        </p:txBody>
+      </p:sp>
+      <p:sp>
+        <p:nvSpPr>
+          <p:cNvPr id="6" name="TextBox 5"/>
+          <p:cNvSpPr txBox="1"/>
+          <p:nvPr/>
+        </p:nvSpPr>
+        <p:spPr>
+          <a:xfrm>
+            <a:off x="11185855" y="6473952"/>
+            <a:ext cx="640080" cy="274320"/>
+          </a:xfrm>
+          <a:prstGeom prst="rect">
+            <a:avLst/>
+          </a:prstGeom>
+          <a:noFill/>
+        </p:spPr>
+        <p:txBody>
+          <a:bodyPr wrap="square">
+            <a:spAutoFit/>
+          </a:bodyPr>
+          <a:lstStyle/>
+          <a:p>
+            <a:pPr algn="r"/>
+            <a:r>
+              <a:rPr sz="1100" b="0" i="0">
+                <a:solidFill>
+                  <a:srgbClr val="666666"/>
+                </a:solidFill>
+                <a:latin typeface="Calibri"/>
+              </a:rPr>
+              <a:t>15</a:t>
+            </a:r>
+          </a:p>
+        </p:txBody>
+      </p:sp>
+    </p:spTree>
+  </p:cSld>
+  <p:clrMapOvr>
+    <a:masterClrMapping/>
+  </p:clrMapOvr>
+</p:sld>
+</file>
+
+<file path=ppt/slides/slide16.xml><?xml version="1.0" encoding="utf-8"?>
+<p:sld xmlns:a="http://schemas.openxmlformats.org/drawingml/2006/main" xmlns:p="http://schemas.openxmlformats.org/presentationml/2006/main" xmlns:r="http://schemas.openxmlformats.org/officeDocument/2006/relationships">
+  <p:cSld>
+    <p:bg>
+      <p:bgPr>
+        <a:solidFill>
+          <a:srgbClr val="FFFFFF"/>
+        </a:solidFill>
+        <a:effectLst/>
+      </p:bgPr>
+    </p:bg>
+    <p:spTree>
+      <p:nvGrpSpPr>
+        <p:cNvPr id="1" name=""/>
+        <p:cNvGrpSpPr/>
+        <p:nvPr/>
+      </p:nvGrpSpPr>
+      <p:grpSpPr/>
+      <p:sp>
+        <p:nvSpPr>
+          <p:cNvPr id="2" name="Rectangle 1"/>
+          <p:cNvSpPr/>
+          <p:nvPr/>
+        </p:nvSpPr>
+        <p:spPr>
+          <a:xfrm>
+            <a:off x="0" y="0"/>
+            <a:ext cx="12191695" cy="960120"/>
+          </a:xfrm>
+          <a:prstGeom prst="rect">
+            <a:avLst/>
+          </a:prstGeom>
+          <a:solidFill>
+            <a:srgbClr val="095292"/>
+          </a:solidFill>
+          <a:ln>
+            <a:noFill/>
+          </a:ln>
+        </p:spPr>
+        <p:style>
+          <a:lnRef idx="1">
+            <a:schemeClr val="accent1"/>
+          </a:lnRef>
+          <a:fillRef idx="3">
+            <a:schemeClr val="accent1"/>
+          </a:fillRef>
+          <a:effectRef idx="2">
+            <a:schemeClr val="accent1"/>
+          </a:effectRef>
+          <a:fontRef idx="minor">
+            <a:schemeClr val="lt1"/>
+          </a:fontRef>
+        </p:style>
+        <p:txBody>
+          <a:bodyPr rtlCol="0" anchor="ctr"/>
+          <a:lstStyle/>
+          <a:p>
+            <a:pPr algn="ctr"/>
+          </a:p>
+        </p:txBody>
+      </p:sp>
+      <p:sp>
+        <p:nvSpPr>
+          <p:cNvPr id="3" name="Rectangle 2"/>
+          <p:cNvSpPr/>
+          <p:nvPr/>
+        </p:nvSpPr>
+        <p:spPr>
+          <a:xfrm>
+            <a:off x="0" y="960120"/>
+            <a:ext cx="12191695" cy="41148"/>
+          </a:xfrm>
+          <a:prstGeom prst="rect">
+            <a:avLst/>
+          </a:prstGeom>
+          <a:solidFill>
+            <a:srgbClr val="FFD000"/>
+          </a:solidFill>
+          <a:ln>
+            <a:noFill/>
+          </a:ln>
+        </p:spPr>
+        <p:style>
+          <a:lnRef idx="1">
+            <a:schemeClr val="accent1"/>
+          </a:lnRef>
+          <a:fillRef idx="3">
+            <a:schemeClr val="accent1"/>
+          </a:fillRef>
+          <a:effectRef idx="2">
+            <a:schemeClr val="accent1"/>
+          </a:effectRef>
+          <a:fontRef idx="minor">
+            <a:schemeClr val="lt1"/>
+          </a:fontRef>
+        </p:style>
+        <p:txBody>
+          <a:bodyPr rtlCol="0" anchor="ctr"/>
+          <a:lstStyle/>
+          <a:p>
+            <a:pPr algn="ctr"/>
+          </a:p>
+        </p:txBody>
+      </p:sp>
+      <p:sp>
+        <p:nvSpPr>
+          <p:cNvPr id="4" name="TextBox 3"/>
+          <p:cNvSpPr txBox="1"/>
+          <p:nvPr/>
+        </p:nvSpPr>
+        <p:spPr>
+          <a:xfrm>
+            <a:off x="457200" y="164592"/>
+            <a:ext cx="11277295" cy="502920"/>
+          </a:xfrm>
+          <a:prstGeom prst="rect">
+            <a:avLst/>
+          </a:prstGeom>
+          <a:noFill/>
+        </p:spPr>
+        <p:txBody>
+          <a:bodyPr wrap="square">
+            <a:spAutoFit/>
+          </a:bodyPr>
+          <a:lstStyle/>
+          <a:p>
+            <a:r>
+              <a:rPr sz="2600" b="1" i="0">
+                <a:solidFill>
+                  <a:srgbClr val="FFFFFF"/>
+                </a:solidFill>
+                <a:latin typeface="Calibri"/>
+              </a:rPr>
+              <a:t>Preguntas frecuentes y cierre conceptual () (1/2)</a:t>
+            </a:r>
+          </a:p>
+        </p:txBody>
+      </p:sp>
+      <p:sp>
+        <p:nvSpPr>
+          <p:cNvPr id="5" name="TextBox 4"/>
+          <p:cNvSpPr txBox="1"/>
+          <p:nvPr/>
+        </p:nvSpPr>
+        <p:spPr>
+          <a:xfrm>
+            <a:off x="457200" y="1170432"/>
+            <a:ext cx="11277295" cy="5230368"/>
+          </a:xfrm>
+          <a:prstGeom prst="rect">
+            <a:avLst/>
+          </a:prstGeom>
+          <a:noFill/>
+        </p:spPr>
+        <p:txBody>
+          <a:bodyPr wrap="square">
+            <a:spAutoFit/>
+          </a:bodyPr>
+          <a:lstStyle/>
+          <a:p>
+            <a:pPr>
+              <a:spcAft>
+                <a:spcPts val="800"/>
+              </a:spcAft>
+            </a:pPr>
+            <a:r>
+              <a:rPr sz="2000" b="0" i="0">
+                <a:solidFill>
+                  <a:srgbClr val="333333"/>
+                </a:solidFill>
+                <a:latin typeface="Calibri"/>
+              </a:rPr>
+              <a:t>–   La primera es si esto se califica; la respuesta honesta es que este checkpoint no es la sustentacion final, que ocurre en la Clase 15, ni el Parcial 3, que es la evaluacion escrita de la Clase 14</a:t>
+            </a:r>
+          </a:p>
+          <a:p>
+            <a:pPr>
+              <a:spcAft>
+                <a:spcPts val="800"/>
+              </a:spcAft>
+            </a:pPr>
+            <a:r>
+              <a:rPr sz="2000" b="0" i="0">
+                <a:solidFill>
+                  <a:srgbClr val="333333"/>
+                </a:solidFill>
+                <a:latin typeface="Calibri"/>
+              </a:rPr>
+              <a:t>–   Y que hoy se registra estado y compromisos, pero el acta es el insumo con el que se mirara la entrega final: un gap senalado hoy y no cerrado pesa mucho mas que uno que aparecio despues.</a:t>
+            </a:r>
+          </a:p>
+          <a:p>
+            <a:pPr>
+              <a:spcAft>
+                <a:spcPts val="800"/>
+              </a:spcAft>
+            </a:pPr>
+            <a:r>
+              <a:rPr sz="2000" b="0" i="0">
+                <a:solidFill>
+                  <a:srgbClr val="333333"/>
+                </a:solidFill>
+                <a:latin typeface="Calibri"/>
+              </a:rPr>
+              <a:t>–   La segunda es por que revisa un companero si el que califica es el docente, y la respuesta es que la revision por pares es practica estandar en la industria y que su valor no esta en el juicio del par sino en la obligacion de explicar</a:t>
+            </a:r>
+          </a:p>
+          <a:p>
+            <a:pPr>
+              <a:spcAft>
+                <a:spcPts val="800"/>
+              </a:spcAft>
+            </a:pPr>
+            <a:r>
+              <a:rPr sz="2000" b="0" i="0">
+                <a:solidFill>
+                  <a:srgbClr val="333333"/>
+                </a:solidFill>
+                <a:latin typeface="Calibri"/>
+              </a:rPr>
+              <a:t>–   Ademas el par pregunta lo que el docente ya asume, y esas son justo las preguntas que llegan en un Q&amp;A real.</a:t>
+            </a:r>
+          </a:p>
+          <a:p>
+            <a:pPr>
+              <a:spcAft>
+                <a:spcPts val="800"/>
+              </a:spcAft>
+            </a:pPr>
+            <a:r>
+              <a:rPr sz="2000" b="0" i="0">
+                <a:solidFill>
+                  <a:srgbClr val="333333"/>
+                </a:solidFill>
+                <a:latin typeface="Calibri"/>
+              </a:rPr>
+              <a:t>–   La tercera, la mas delicada, es si cambiar el diagrama ahora significa perder el trabajo hecho</a:t>
+            </a:r>
+          </a:p>
+          <a:p>
+            <a:pPr>
+              <a:spcAft>
+                <a:spcPts val="800"/>
+              </a:spcAft>
+            </a:pPr>
+            <a:r>
+              <a:rPr sz="2000" b="0" i="0">
+                <a:solidFill>
+                  <a:srgbClr val="333333"/>
+                </a:solidFill>
+                <a:latin typeface="Calibri"/>
+              </a:rPr>
+              <a:t>–   Y la respuesta debe ser tajante: no, porque el artefacto no es el entregable, la decision documentada lo es; un diagrama corregido con una nota de por que cambio vale mas que uno intacto, y ese cambio justificado es exactamente lo que un ADR registra.</a:t>
+            </a:r>
+          </a:p>
+        </p:txBody>
+      </p:sp>
+      <p:sp>
+        <p:nvSpPr>
+          <p:cNvPr id="6" name="TextBox 5"/>
+          <p:cNvSpPr txBox="1"/>
+          <p:nvPr/>
+        </p:nvSpPr>
+        <p:spPr>
+          <a:xfrm>
+            <a:off x="11185855" y="6473952"/>
+            <a:ext cx="640080" cy="274320"/>
+          </a:xfrm>
+          <a:prstGeom prst="rect">
+            <a:avLst/>
+          </a:prstGeom>
+          <a:noFill/>
+        </p:spPr>
+        <p:txBody>
+          <a:bodyPr wrap="square">
+            <a:spAutoFit/>
+          </a:bodyPr>
+          <a:lstStyle/>
+          <a:p>
+            <a:pPr algn="r"/>
+            <a:r>
+              <a:rPr sz="1100" b="0" i="0">
+                <a:solidFill>
+                  <a:srgbClr val="666666"/>
+                </a:solidFill>
+                <a:latin typeface="Calibri"/>
+              </a:rPr>
+              <a:t>16</a:t>
+            </a:r>
+          </a:p>
+        </p:txBody>
+      </p:sp>
+    </p:spTree>
+  </p:cSld>
+  <p:clrMapOvr>
+    <a:masterClrMapping/>
+  </p:clrMapOvr>
+</p:sld>
+</file>
+
+<file path=ppt/slides/slide17.xml><?xml version="1.0" encoding="utf-8"?>
+<p:sld xmlns:a="http://schemas.openxmlformats.org/drawingml/2006/main" xmlns:p="http://schemas.openxmlformats.org/presentationml/2006/main" xmlns:r="http://schemas.openxmlformats.org/officeDocument/2006/relationships">
+  <p:cSld>
+    <p:bg>
+      <p:bgPr>
+        <a:solidFill>
+          <a:srgbClr val="FFFFFF"/>
+        </a:solidFill>
+        <a:effectLst/>
+      </p:bgPr>
+    </p:bg>
+    <p:spTree>
+      <p:nvGrpSpPr>
+        <p:cNvPr id="1" name=""/>
+        <p:cNvGrpSpPr/>
+        <p:nvPr/>
+      </p:nvGrpSpPr>
+      <p:grpSpPr/>
+      <p:sp>
+        <p:nvSpPr>
+          <p:cNvPr id="2" name="Rectangle 1"/>
+          <p:cNvSpPr/>
+          <p:nvPr/>
+        </p:nvSpPr>
+        <p:spPr>
+          <a:xfrm>
+            <a:off x="0" y="0"/>
+            <a:ext cx="12191695" cy="960120"/>
+          </a:xfrm>
+          <a:prstGeom prst="rect">
+            <a:avLst/>
+          </a:prstGeom>
+          <a:solidFill>
+            <a:srgbClr val="095292"/>
+          </a:solidFill>
+          <a:ln>
+            <a:noFill/>
+          </a:ln>
+        </p:spPr>
+        <p:style>
+          <a:lnRef idx="1">
+            <a:schemeClr val="accent1"/>
+          </a:lnRef>
+          <a:fillRef idx="3">
+            <a:schemeClr val="accent1"/>
+          </a:fillRef>
+          <a:effectRef idx="2">
+            <a:schemeClr val="accent1"/>
+          </a:effectRef>
+          <a:fontRef idx="minor">
+            <a:schemeClr val="lt1"/>
+          </a:fontRef>
+        </p:style>
+        <p:txBody>
+          <a:bodyPr rtlCol="0" anchor="ctr"/>
+          <a:lstStyle/>
+          <a:p>
+            <a:pPr algn="ctr"/>
+          </a:p>
+        </p:txBody>
+      </p:sp>
+      <p:sp>
+        <p:nvSpPr>
+          <p:cNvPr id="3" name="Rectangle 2"/>
+          <p:cNvSpPr/>
+          <p:nvPr/>
+        </p:nvSpPr>
+        <p:spPr>
+          <a:xfrm>
+            <a:off x="0" y="960120"/>
+            <a:ext cx="12191695" cy="41148"/>
+          </a:xfrm>
+          <a:prstGeom prst="rect">
+            <a:avLst/>
+          </a:prstGeom>
+          <a:solidFill>
+            <a:srgbClr val="FFD000"/>
+          </a:solidFill>
+          <a:ln>
+            <a:noFill/>
+          </a:ln>
+        </p:spPr>
+        <p:style>
+          <a:lnRef idx="1">
+            <a:schemeClr val="accent1"/>
+          </a:lnRef>
+          <a:fillRef idx="3">
+            <a:schemeClr val="accent1"/>
+          </a:fillRef>
+          <a:effectRef idx="2">
+            <a:schemeClr val="accent1"/>
+          </a:effectRef>
+          <a:fontRef idx="minor">
+            <a:schemeClr val="lt1"/>
+          </a:fontRef>
+        </p:style>
+        <p:txBody>
+          <a:bodyPr rtlCol="0" anchor="ctr"/>
+          <a:lstStyle/>
+          <a:p>
+            <a:pPr algn="ctr"/>
+          </a:p>
+        </p:txBody>
+      </p:sp>
+      <p:sp>
+        <p:nvSpPr>
+          <p:cNvPr id="4" name="TextBox 3"/>
+          <p:cNvSpPr txBox="1"/>
+          <p:nvPr/>
+        </p:nvSpPr>
+        <p:spPr>
+          <a:xfrm>
+            <a:off x="457200" y="164592"/>
+            <a:ext cx="11277295" cy="502920"/>
+          </a:xfrm>
+          <a:prstGeom prst="rect">
+            <a:avLst/>
+          </a:prstGeom>
+          <a:noFill/>
+        </p:spPr>
+        <p:txBody>
+          <a:bodyPr wrap="square">
+            <a:spAutoFit/>
+          </a:bodyPr>
+          <a:lstStyle/>
+          <a:p>
+            <a:r>
+              <a:rPr sz="2600" b="1" i="0">
+                <a:solidFill>
+                  <a:srgbClr val="FFFFFF"/>
+                </a:solidFill>
+                <a:latin typeface="Calibri"/>
+              </a:rPr>
+              <a:t>Preguntas frecuentes y cierre conceptual () (2/2)</a:t>
+            </a:r>
+          </a:p>
+        </p:txBody>
+      </p:sp>
+      <p:sp>
+        <p:nvSpPr>
+          <p:cNvPr id="5" name="TextBox 4"/>
+          <p:cNvSpPr txBox="1"/>
+          <p:nvPr/>
+        </p:nvSpPr>
+        <p:spPr>
+          <a:xfrm>
+            <a:off x="457200" y="1170432"/>
+            <a:ext cx="11277295" cy="5230368"/>
+          </a:xfrm>
+          <a:prstGeom prst="rect">
+            <a:avLst/>
+          </a:prstGeom>
+          <a:noFill/>
+        </p:spPr>
+        <p:txBody>
+          <a:bodyPr wrap="square">
+            <a:spAutoFit/>
+          </a:bodyPr>
+          <a:lstStyle/>
+          <a:p>
+            <a:pPr>
+              <a:spcAft>
+                <a:spcPts val="800"/>
+              </a:spcAft>
+            </a:pPr>
+            <a:r>
+              <a:rPr sz="2000" b="0" i="0">
+                <a:solidFill>
+                  <a:srgbClr val="333333"/>
+                </a:solidFill>
+                <a:latin typeface="Calibri"/>
+              </a:rPr>
+              <a:t>–   Error tipico del docente que no domina el tema: dejar pasar el checkpoint con un "todo bien, sigan asi".</a:t>
+            </a:r>
+          </a:p>
+          <a:p>
+            <a:pPr>
+              <a:spcAft>
+                <a:spcPts val="800"/>
+              </a:spcAft>
+            </a:pPr>
+            <a:r>
+              <a:rPr sz="2000" b="0" i="0">
+                <a:solidFill>
+                  <a:srgbClr val="333333"/>
+                </a:solidFill>
+                <a:latin typeface="Calibri"/>
+              </a:rPr>
+              <a:t>–   La consecuencia no se ve hoy, se ve en la Clase 15, cuando varios estudiantes sustentan con la base de datos expuesta, con servicios que no son servicios y con nueve capacidades que nunca cerraron</a:t>
+            </a:r>
+          </a:p>
+          <a:p>
+            <a:pPr>
+              <a:spcAft>
+                <a:spcPts val="800"/>
+              </a:spcAft>
+            </a:pPr>
+            <a:r>
+              <a:rPr sz="2000" b="0" i="0">
+                <a:solidFill>
+                  <a:srgbClr val="333333"/>
+                </a:solidFill>
+                <a:latin typeface="Calibri"/>
+              </a:rPr>
+              <a:t>–   Y el docente descubre que las tenia todas a la vista un mes antes; ademas el estudiante interpreta el silencio como aprobacion, asi que el error queda ratificado y luego reclama con razon que nadie se lo advirtio.</a:t>
+            </a:r>
+          </a:p>
+          <a:p>
+            <a:pPr>
+              <a:spcAft>
+                <a:spcPts val="800"/>
+              </a:spcAft>
+            </a:pPr>
+            <a:r>
+              <a:rPr sz="2000" b="0" i="0">
+                <a:solidFill>
+                  <a:srgbClr val="333333"/>
+                </a:solidFill>
+                <a:latin typeface="Calibri"/>
+              </a:rPr>
+              <a:t>–   El segundo error es convertir el checkpoint en clase magistral: cuando el docente detecta un vacio conceptual y se pone a reexplicar contenedores o STRIDE durante veinte minutos</a:t>
+            </a:r>
+          </a:p>
+          <a:p>
+            <a:pPr>
+              <a:spcAft>
+                <a:spcPts val="800"/>
+              </a:spcAft>
+            </a:pPr>
+            <a:r>
+              <a:rPr sz="2000" b="0" i="0">
+                <a:solidFill>
+                  <a:srgbClr val="333333"/>
+                </a:solidFill>
+                <a:latin typeface="Calibri"/>
+              </a:rPr>
+              <a:t>–   Se consume el tiempo de los estudiantes que faltan, la mitad del curso queda sin retroalimentacion y el acta sale a medias.</a:t>
+            </a:r>
+          </a:p>
+          <a:p>
+            <a:pPr>
+              <a:spcAft>
+                <a:spcPts val="800"/>
+              </a:spcAft>
+            </a:pPr>
+            <a:r>
+              <a:rPr sz="2000" b="0" i="0">
+                <a:solidFill>
+                  <a:srgbClr val="333333"/>
+                </a:solidFill>
+                <a:latin typeface="Calibri"/>
+              </a:rPr>
+              <a:t>–   Lo correcto es anotar el vacio, dar la accion concreta con fecha y seguir; si el vacio es general al grupo, se atiende en cinco minutos al cierre para todos, no proyecto por proyecto.</a:t>
+            </a:r>
+          </a:p>
+        </p:txBody>
+      </p:sp>
+      <p:sp>
+        <p:nvSpPr>
+          <p:cNvPr id="6" name="TextBox 5"/>
+          <p:cNvSpPr txBox="1"/>
+          <p:nvPr/>
+        </p:nvSpPr>
+        <p:spPr>
+          <a:xfrm>
+            <a:off x="11185855" y="6473952"/>
+            <a:ext cx="640080" cy="274320"/>
+          </a:xfrm>
+          <a:prstGeom prst="rect">
+            <a:avLst/>
+          </a:prstGeom>
+          <a:noFill/>
+        </p:spPr>
+        <p:txBody>
+          <a:bodyPr wrap="square">
+            <a:spAutoFit/>
+          </a:bodyPr>
+          <a:lstStyle/>
+          <a:p>
+            <a:pPr algn="r"/>
+            <a:r>
+              <a:rPr sz="1100" b="0" i="0">
+                <a:solidFill>
+                  <a:srgbClr val="666666"/>
+                </a:solidFill>
+                <a:latin typeface="Calibri"/>
+              </a:rPr>
+              <a:t>17</a:t>
+            </a:r>
+          </a:p>
+        </p:txBody>
+      </p:sp>
+    </p:spTree>
+  </p:cSld>
+  <p:clrMapOvr>
+    <a:masterClrMapping/>
+  </p:clrMapOvr>
+</p:sld>
+</file>
+
+<file path=ppt/slides/slide18.xml><?xml version="1.0" encoding="utf-8"?>
+<p:sld xmlns:a="http://schemas.openxmlformats.org/drawingml/2006/main" xmlns:p="http://schemas.openxmlformats.org/presentationml/2006/main" xmlns:r="http://schemas.openxmlformats.org/officeDocument/2006/relationships">
+  <p:cSld>
+    <p:bg>
+      <p:bgPr>
+        <a:solidFill>
+          <a:srgbClr val="FFFFFF"/>
+        </a:solidFill>
+        <a:effectLst/>
+      </p:bgPr>
+    </p:bg>
+    <p:spTree>
+      <p:nvGrpSpPr>
+        <p:cNvPr id="1" name=""/>
+        <p:cNvGrpSpPr/>
+        <p:nvPr/>
+      </p:nvGrpSpPr>
+      <p:grpSpPr/>
+      <p:sp>
+        <p:nvSpPr>
+          <p:cNvPr id="2" name="Rectangle 1"/>
+          <p:cNvSpPr/>
+          <p:nvPr/>
+        </p:nvSpPr>
+        <p:spPr>
+          <a:xfrm>
+            <a:off x="0" y="0"/>
+            <a:ext cx="12191695" cy="1170432"/>
+          </a:xfrm>
+          <a:prstGeom prst="rect">
+            <a:avLst/>
+          </a:prstGeom>
+          <a:solidFill>
+            <a:srgbClr val="095292"/>
+          </a:solidFill>
+          <a:ln>
+            <a:noFill/>
+          </a:ln>
+        </p:spPr>
+        <p:style>
+          <a:lnRef idx="1">
+            <a:schemeClr val="accent1"/>
+          </a:lnRef>
+          <a:fillRef idx="3">
+            <a:schemeClr val="accent1"/>
+          </a:fillRef>
+          <a:effectRef idx="2">
+            <a:schemeClr val="accent1"/>
+          </a:effectRef>
+          <a:fontRef idx="minor">
+            <a:schemeClr val="lt1"/>
+          </a:fontRef>
+        </p:style>
+        <p:txBody>
+          <a:bodyPr rtlCol="0" anchor="ctr"/>
+          <a:lstStyle/>
+          <a:p>
+            <a:pPr algn="ctr"/>
+          </a:p>
+        </p:txBody>
+      </p:sp>
+      <p:sp>
+        <p:nvSpPr>
+          <p:cNvPr id="3" name="Rectangle 2"/>
+          <p:cNvSpPr/>
+          <p:nvPr/>
+        </p:nvSpPr>
+        <p:spPr>
+          <a:xfrm>
+            <a:off x="0" y="1170432"/>
+            <a:ext cx="12191695" cy="41148"/>
+          </a:xfrm>
+          <a:prstGeom prst="rect">
+            <a:avLst/>
+          </a:prstGeom>
+          <a:solidFill>
+            <a:srgbClr val="FFD000"/>
+          </a:solidFill>
+          <a:ln>
+            <a:noFill/>
+          </a:ln>
+        </p:spPr>
+        <p:style>
+          <a:lnRef idx="1">
+            <a:schemeClr val="accent1"/>
+          </a:lnRef>
+          <a:fillRef idx="3">
+            <a:schemeClr val="accent1"/>
+          </a:fillRef>
+          <a:effectRef idx="2">
+            <a:schemeClr val="accent1"/>
+          </a:effectRef>
+          <a:fontRef idx="minor">
+            <a:schemeClr val="lt1"/>
+          </a:fontRef>
+        </p:style>
+        <p:txBody>
+          <a:bodyPr rtlCol="0" anchor="ctr"/>
+          <a:lstStyle/>
+          <a:p>
+            <a:pPr algn="ctr"/>
+          </a:p>
+        </p:txBody>
+      </p:sp>
+      <p:sp>
+        <p:nvSpPr>
+          <p:cNvPr id="4" name="TextBox 3"/>
+          <p:cNvSpPr txBox="1"/>
+          <p:nvPr/>
+        </p:nvSpPr>
+        <p:spPr>
+          <a:xfrm>
+            <a:off x="457200" y="164592"/>
+            <a:ext cx="11277295" cy="384048"/>
+          </a:xfrm>
+          <a:prstGeom prst="rect">
+            <a:avLst/>
+          </a:prstGeom>
+          <a:noFill/>
+        </p:spPr>
+        <p:txBody>
+          <a:bodyPr wrap="square">
+            <a:spAutoFit/>
+          </a:bodyPr>
+          <a:lstStyle/>
+          <a:p>
+            <a:r>
+              <a:rPr sz="2600" b="1" i="0">
+                <a:solidFill>
+                  <a:srgbClr val="FFFFFF"/>
+                </a:solidFill>
+                <a:latin typeface="Calibri"/>
+              </a:rPr>
+              <a:t>Herramientas de hoy</a:t>
+            </a:r>
+          </a:p>
+        </p:txBody>
+      </p:sp>
+      <p:sp>
+        <p:nvSpPr>
+          <p:cNvPr id="5" name="TextBox 4"/>
+          <p:cNvSpPr txBox="1"/>
+          <p:nvPr/>
+        </p:nvSpPr>
+        <p:spPr>
+          <a:xfrm>
+            <a:off x="457200" y="566928"/>
+            <a:ext cx="11277295" cy="411480"/>
+          </a:xfrm>
+          <a:prstGeom prst="rect">
+            <a:avLst/>
+          </a:prstGeom>
+          <a:noFill/>
+        </p:spPr>
+        <p:txBody>
+          <a:bodyPr wrap="square">
+            <a:spAutoFit/>
+          </a:bodyPr>
+          <a:lstStyle/>
+          <a:p>
+            <a:r>
+              <a:rPr sz="1400" b="0" i="0">
+                <a:solidFill>
+                  <a:srgbClr val="B8D8EE"/>
+                </a:solidFill>
+                <a:latin typeface="Calibri"/>
+              </a:rPr>
+              <a:t>Gratis · navegador o free tier · sin cuenta de pago</a:t>
+            </a:r>
+          </a:p>
+        </p:txBody>
+      </p:sp>
+      <p:sp>
+        <p:nvSpPr>
+          <p:cNvPr id="6" name="Rounded Rectangle 5"/>
+          <p:cNvSpPr/>
+          <p:nvPr/>
+        </p:nvSpPr>
+        <p:spPr>
+          <a:xfrm>
+            <a:off x="457200" y="1591056"/>
+            <a:ext cx="3624986" cy="2299716"/>
+          </a:xfrm>
+          <a:prstGeom prst="roundRect">
+            <a:avLst>
+              <a:gd name="adj" fmla="val 12000"/>
+            </a:avLst>
+          </a:prstGeom>
+          <a:solidFill>
+            <a:srgbClr val="F2F2F2"/>
+          </a:solidFill>
+          <a:ln>
+            <a:noFill/>
+          </a:ln>
+        </p:spPr>
+        <p:style>
+          <a:lnRef idx="1">
+            <a:schemeClr val="accent1"/>
+          </a:lnRef>
+          <a:fillRef idx="3">
+            <a:schemeClr val="accent1"/>
+          </a:fillRef>
+          <a:effectRef idx="2">
+            <a:schemeClr val="accent1"/>
+          </a:effectRef>
+          <a:fontRef idx="minor">
+            <a:schemeClr val="lt1"/>
+          </a:fontRef>
+        </p:style>
+        <p:txBody>
+          <a:bodyPr rtlCol="0" anchor="ctr"/>
+          <a:lstStyle/>
+          <a:p>
+            <a:pPr algn="ctr"/>
+          </a:p>
+        </p:txBody>
+      </p:sp>
+      <p:sp>
+        <p:nvSpPr>
+          <p:cNvPr id="7" name="Rectangle 6"/>
+          <p:cNvSpPr/>
+          <p:nvPr/>
+        </p:nvSpPr>
+        <p:spPr>
+          <a:xfrm>
+            <a:off x="457200" y="1591056"/>
+            <a:ext cx="3624986" cy="64008"/>
+          </a:xfrm>
+          <a:prstGeom prst="rect">
+            <a:avLst/>
+          </a:prstGeom>
+          <a:solidFill>
+            <a:srgbClr val="095292"/>
+          </a:solidFill>
+          <a:ln>
+            <a:noFill/>
+          </a:ln>
+        </p:spPr>
+        <p:style>
+          <a:lnRef idx="1">
+            <a:schemeClr val="accent1"/>
+          </a:lnRef>
+          <a:fillRef idx="3">
+            <a:schemeClr val="accent1"/>
+          </a:fillRef>
+          <a:effectRef idx="2">
+            <a:schemeClr val="accent1"/>
+          </a:effectRef>
+          <a:fontRef idx="minor">
+            <a:schemeClr val="lt1"/>
+          </a:fontRef>
+        </p:style>
+        <p:txBody>
+          <a:bodyPr rtlCol="0" anchor="ctr"/>
+          <a:lstStyle/>
+          <a:p>
+            <a:pPr algn="ctr"/>
+          </a:p>
+        </p:txBody>
+      </p:sp>
+      <p:sp>
+        <p:nvSpPr>
+          <p:cNvPr id="8" name="Rectangle 7"/>
+          <p:cNvSpPr/>
+          <p:nvPr/>
+        </p:nvSpPr>
+        <p:spPr>
+          <a:xfrm>
+            <a:off x="457200" y="1655064"/>
+            <a:ext cx="3624986" cy="27432"/>
+          </a:xfrm>
+          <a:prstGeom prst="rect">
+            <a:avLst/>
+          </a:prstGeom>
+          <a:solidFill>
+            <a:srgbClr val="FFD000"/>
+          </a:solidFill>
+          <a:ln>
+            <a:noFill/>
+          </a:ln>
+        </p:spPr>
+        <p:style>
+          <a:lnRef idx="1">
+            <a:schemeClr val="accent1"/>
+          </a:lnRef>
+          <a:fillRef idx="3">
+            <a:schemeClr val="accent1"/>
+          </a:fillRef>
+          <a:effectRef idx="2">
+            <a:schemeClr val="accent1"/>
+          </a:effectRef>
+          <a:fontRef idx="minor">
+            <a:schemeClr val="lt1"/>
+          </a:fontRef>
+        </p:style>
+        <p:txBody>
+          <a:bodyPr rtlCol="0" anchor="ctr"/>
+          <a:lstStyle/>
+          <a:p>
+            <a:pPr algn="ctr"/>
+          </a:p>
+        </p:txBody>
+      </p:sp>
       <p:pic>
         <p:nvPicPr>
-          <p:cNvPr id="3" name="Picture 2" descr="logo_uniajc_color.png"/>
+          <p:cNvPr id="9" name="Picture 8" descr="drawio.png"/>
           <p:cNvPicPr>
             <a:picLocks noChangeAspect="1"/>
           </p:cNvPicPr>
@@ -4479,8 +6060,8 @@
         </p:blipFill>
         <p:spPr>
           <a:xfrm>
-            <a:off x="10271455" y="5998464"/>
-            <a:ext cx="1463040" cy="643233"/>
+            <a:off x="1659331" y="1847087"/>
+            <a:ext cx="1220724" cy="1220724"/>
           </a:xfrm>
           <a:prstGeom prst="rect">
             <a:avLst/>
@@ -4489,14 +6070,14 @@
       </p:pic>
       <p:sp>
         <p:nvSpPr>
-          <p:cNvPr id="4" name="TextBox 3"/>
+          <p:cNvPr id="10" name="TextBox 9"/>
           <p:cNvSpPr txBox="1"/>
           <p:nvPr/>
         </p:nvSpPr>
         <p:spPr>
           <a:xfrm>
-            <a:off x="457200" y="1737360"/>
-            <a:ext cx="11277295" cy="1097280"/>
+            <a:off x="530352" y="3159251"/>
+            <a:ext cx="3478682" cy="621792"/>
           </a:xfrm>
           <a:prstGeom prst="rect">
             <a:avLst/>
@@ -4504,32 +6085,864 @@
           <a:noFill/>
         </p:spPr>
         <p:txBody>
-          <a:bodyPr wrap="square" anchor="ctr"/>
+          <a:bodyPr wrap="square" anchor="t"/>
           <a:lstStyle/>
           <a:p>
             <a:pPr algn="ctr"/>
             <a:r>
-              <a:rPr sz="3400" b="1" i="0">
+              <a:rPr sz="1300" b="1" i="0">
                 <a:solidFill>
                   <a:srgbClr val="095292"/>
                 </a:solidFill>
                 <a:latin typeface="Calibri"/>
               </a:rPr>
-              <a:t>Clase 11 · PI en movimiento</a:t>
-            </a:r>
-          </a:p>
-        </p:txBody>
-      </p:sp>
-      <p:sp>
-        <p:nvSpPr>
-          <p:cNvPr id="5" name="TextBox 4"/>
+              <a:t>draw.io</a:t>
+            </a:r>
+          </a:p>
+          <a:p>
+            <a:pPr algn="ctr">
+              <a:spcBef>
+                <a:spcPts val="200"/>
+              </a:spcBef>
+            </a:pPr>
+            <a:r>
+              <a:rPr sz="1000" b="0" i="0">
+                <a:solidFill>
+                  <a:srgbClr val="666666"/>
+                </a:solidFill>
+                <a:latin typeface="Calibri"/>
+              </a:rPr>
+              <a:t>Auditoria del paquete</a:t>
+            </a:r>
+          </a:p>
+        </p:txBody>
+      </p:sp>
+      <p:sp>
+        <p:nvSpPr>
+          <p:cNvPr id="11" name="Rounded Rectangle 10"/>
+          <p:cNvSpPr/>
+          <p:nvPr/>
+        </p:nvSpPr>
+        <p:spPr>
+          <a:xfrm>
+            <a:off x="4283354" y="1591056"/>
+            <a:ext cx="3624986" cy="2299716"/>
+          </a:xfrm>
+          <a:prstGeom prst="roundRect">
+            <a:avLst>
+              <a:gd name="adj" fmla="val 12000"/>
+            </a:avLst>
+          </a:prstGeom>
+          <a:solidFill>
+            <a:srgbClr val="F2F2F2"/>
+          </a:solidFill>
+          <a:ln>
+            <a:noFill/>
+          </a:ln>
+        </p:spPr>
+        <p:style>
+          <a:lnRef idx="1">
+            <a:schemeClr val="accent1"/>
+          </a:lnRef>
+          <a:fillRef idx="3">
+            <a:schemeClr val="accent1"/>
+          </a:fillRef>
+          <a:effectRef idx="2">
+            <a:schemeClr val="accent1"/>
+          </a:effectRef>
+          <a:fontRef idx="minor">
+            <a:schemeClr val="lt1"/>
+          </a:fontRef>
+        </p:style>
+        <p:txBody>
+          <a:bodyPr rtlCol="0" anchor="ctr"/>
+          <a:lstStyle/>
+          <a:p>
+            <a:pPr algn="ctr"/>
+          </a:p>
+        </p:txBody>
+      </p:sp>
+      <p:sp>
+        <p:nvSpPr>
+          <p:cNvPr id="12" name="Rectangle 11"/>
+          <p:cNvSpPr/>
+          <p:nvPr/>
+        </p:nvSpPr>
+        <p:spPr>
+          <a:xfrm>
+            <a:off x="4283354" y="1591056"/>
+            <a:ext cx="3624986" cy="64008"/>
+          </a:xfrm>
+          <a:prstGeom prst="rect">
+            <a:avLst/>
+          </a:prstGeom>
+          <a:solidFill>
+            <a:srgbClr val="095292"/>
+          </a:solidFill>
+          <a:ln>
+            <a:noFill/>
+          </a:ln>
+        </p:spPr>
+        <p:style>
+          <a:lnRef idx="1">
+            <a:schemeClr val="accent1"/>
+          </a:lnRef>
+          <a:fillRef idx="3">
+            <a:schemeClr val="accent1"/>
+          </a:fillRef>
+          <a:effectRef idx="2">
+            <a:schemeClr val="accent1"/>
+          </a:effectRef>
+          <a:fontRef idx="minor">
+            <a:schemeClr val="lt1"/>
+          </a:fontRef>
+        </p:style>
+        <p:txBody>
+          <a:bodyPr rtlCol="0" anchor="ctr"/>
+          <a:lstStyle/>
+          <a:p>
+            <a:pPr algn="ctr"/>
+          </a:p>
+        </p:txBody>
+      </p:sp>
+      <p:sp>
+        <p:nvSpPr>
+          <p:cNvPr id="13" name="Rectangle 12"/>
+          <p:cNvSpPr/>
+          <p:nvPr/>
+        </p:nvSpPr>
+        <p:spPr>
+          <a:xfrm>
+            <a:off x="4283354" y="1655064"/>
+            <a:ext cx="3624986" cy="27432"/>
+          </a:xfrm>
+          <a:prstGeom prst="rect">
+            <a:avLst/>
+          </a:prstGeom>
+          <a:solidFill>
+            <a:srgbClr val="FFD000"/>
+          </a:solidFill>
+          <a:ln>
+            <a:noFill/>
+          </a:ln>
+        </p:spPr>
+        <p:style>
+          <a:lnRef idx="1">
+            <a:schemeClr val="accent1"/>
+          </a:lnRef>
+          <a:fillRef idx="3">
+            <a:schemeClr val="accent1"/>
+          </a:fillRef>
+          <a:effectRef idx="2">
+            <a:schemeClr val="accent1"/>
+          </a:effectRef>
+          <a:fontRef idx="minor">
+            <a:schemeClr val="lt1"/>
+          </a:fontRef>
+        </p:style>
+        <p:txBody>
+          <a:bodyPr rtlCol="0" anchor="ctr"/>
+          <a:lstStyle/>
+          <a:p>
+            <a:pPr algn="ctr"/>
+          </a:p>
+        </p:txBody>
+      </p:sp>
+      <p:pic>
+        <p:nvPicPr>
+          <p:cNvPr id="14" name="Picture 13" descr="github_actions.png"/>
+          <p:cNvPicPr>
+            <a:picLocks noChangeAspect="1"/>
+          </p:cNvPicPr>
+          <p:nvPr/>
+        </p:nvPicPr>
+        <p:blipFill>
+          <a:blip r:embed="rId3"/>
+          <a:stretch>
+            <a:fillRect/>
+          </a:stretch>
+        </p:blipFill>
+        <p:spPr>
+          <a:xfrm>
+            <a:off x="5485485" y="1847087"/>
+            <a:ext cx="1220724" cy="1220724"/>
+          </a:xfrm>
+          <a:prstGeom prst="rect">
+            <a:avLst/>
+          </a:prstGeom>
+        </p:spPr>
+      </p:pic>
+      <p:sp>
+        <p:nvSpPr>
+          <p:cNvPr id="15" name="TextBox 14"/>
           <p:cNvSpPr txBox="1"/>
           <p:nvPr/>
         </p:nvSpPr>
         <p:spPr>
           <a:xfrm>
-            <a:off x="457200" y="3017520"/>
-            <a:ext cx="11277295" cy="1645920"/>
+            <a:off x="4356506" y="3159251"/>
+            <a:ext cx="3478682" cy="621792"/>
+          </a:xfrm>
+          <a:prstGeom prst="rect">
+            <a:avLst/>
+          </a:prstGeom>
+          <a:noFill/>
+        </p:spPr>
+        <p:txBody>
+          <a:bodyPr wrap="square" anchor="t"/>
+          <a:lstStyle/>
+          <a:p>
+            <a:pPr algn="ctr"/>
+            <a:r>
+              <a:rPr sz="1300" b="1" i="0">
+                <a:solidFill>
+                  <a:srgbClr val="095292"/>
+                </a:solidFill>
+                <a:latin typeface="Calibri"/>
+              </a:rPr>
+              <a:t>GitHub Actions</a:t>
+            </a:r>
+          </a:p>
+          <a:p>
+            <a:pPr algn="ctr">
+              <a:spcBef>
+                <a:spcPts val="200"/>
+              </a:spcBef>
+            </a:pPr>
+            <a:r>
+              <a:rPr sz="1000" b="0" i="0">
+                <a:solidFill>
+                  <a:srgbClr val="666666"/>
+                </a:solidFill>
+                <a:latin typeface="Calibri"/>
+              </a:rPr>
+              <a:t>Evidencia CI</a:t>
+            </a:r>
+          </a:p>
+        </p:txBody>
+      </p:sp>
+      <p:sp>
+        <p:nvSpPr>
+          <p:cNvPr id="16" name="Rounded Rectangle 15"/>
+          <p:cNvSpPr/>
+          <p:nvPr/>
+        </p:nvSpPr>
+        <p:spPr>
+          <a:xfrm>
+            <a:off x="8109508" y="1591056"/>
+            <a:ext cx="3624986" cy="2299716"/>
+          </a:xfrm>
+          <a:prstGeom prst="roundRect">
+            <a:avLst>
+              <a:gd name="adj" fmla="val 12000"/>
+            </a:avLst>
+          </a:prstGeom>
+          <a:solidFill>
+            <a:srgbClr val="F2F2F2"/>
+          </a:solidFill>
+          <a:ln>
+            <a:noFill/>
+          </a:ln>
+        </p:spPr>
+        <p:style>
+          <a:lnRef idx="1">
+            <a:schemeClr val="accent1"/>
+          </a:lnRef>
+          <a:fillRef idx="3">
+            <a:schemeClr val="accent1"/>
+          </a:fillRef>
+          <a:effectRef idx="2">
+            <a:schemeClr val="accent1"/>
+          </a:effectRef>
+          <a:fontRef idx="minor">
+            <a:schemeClr val="lt1"/>
+          </a:fontRef>
+        </p:style>
+        <p:txBody>
+          <a:bodyPr rtlCol="0" anchor="ctr"/>
+          <a:lstStyle/>
+          <a:p>
+            <a:pPr algn="ctr"/>
+          </a:p>
+        </p:txBody>
+      </p:sp>
+      <p:sp>
+        <p:nvSpPr>
+          <p:cNvPr id="17" name="Rectangle 16"/>
+          <p:cNvSpPr/>
+          <p:nvPr/>
+        </p:nvSpPr>
+        <p:spPr>
+          <a:xfrm>
+            <a:off x="8109508" y="1591056"/>
+            <a:ext cx="3624986" cy="64008"/>
+          </a:xfrm>
+          <a:prstGeom prst="rect">
+            <a:avLst/>
+          </a:prstGeom>
+          <a:solidFill>
+            <a:srgbClr val="095292"/>
+          </a:solidFill>
+          <a:ln>
+            <a:noFill/>
+          </a:ln>
+        </p:spPr>
+        <p:style>
+          <a:lnRef idx="1">
+            <a:schemeClr val="accent1"/>
+          </a:lnRef>
+          <a:fillRef idx="3">
+            <a:schemeClr val="accent1"/>
+          </a:fillRef>
+          <a:effectRef idx="2">
+            <a:schemeClr val="accent1"/>
+          </a:effectRef>
+          <a:fontRef idx="minor">
+            <a:schemeClr val="lt1"/>
+          </a:fontRef>
+        </p:style>
+        <p:txBody>
+          <a:bodyPr rtlCol="0" anchor="ctr"/>
+          <a:lstStyle/>
+          <a:p>
+            <a:pPr algn="ctr"/>
+          </a:p>
+        </p:txBody>
+      </p:sp>
+      <p:sp>
+        <p:nvSpPr>
+          <p:cNvPr id="18" name="Rectangle 17"/>
+          <p:cNvSpPr/>
+          <p:nvPr/>
+        </p:nvSpPr>
+        <p:spPr>
+          <a:xfrm>
+            <a:off x="8109508" y="1655064"/>
+            <a:ext cx="3624986" cy="27432"/>
+          </a:xfrm>
+          <a:prstGeom prst="rect">
+            <a:avLst/>
+          </a:prstGeom>
+          <a:solidFill>
+            <a:srgbClr val="FFD000"/>
+          </a:solidFill>
+          <a:ln>
+            <a:noFill/>
+          </a:ln>
+        </p:spPr>
+        <p:style>
+          <a:lnRef idx="1">
+            <a:schemeClr val="accent1"/>
+          </a:lnRef>
+          <a:fillRef idx="3">
+            <a:schemeClr val="accent1"/>
+          </a:fillRef>
+          <a:effectRef idx="2">
+            <a:schemeClr val="accent1"/>
+          </a:effectRef>
+          <a:fontRef idx="minor">
+            <a:schemeClr val="lt1"/>
+          </a:fontRef>
+        </p:style>
+        <p:txBody>
+          <a:bodyPr rtlCol="0" anchor="ctr"/>
+          <a:lstStyle/>
+          <a:p>
+            <a:pPr algn="ctr"/>
+          </a:p>
+        </p:txBody>
+      </p:sp>
+      <p:pic>
+        <p:nvPicPr>
+          <p:cNvPr id="19" name="Picture 18" descr="google_docs.png"/>
+          <p:cNvPicPr>
+            <a:picLocks noChangeAspect="1"/>
+          </p:cNvPicPr>
+          <p:nvPr/>
+        </p:nvPicPr>
+        <p:blipFill>
+          <a:blip r:embed="rId4"/>
+          <a:stretch>
+            <a:fillRect/>
+          </a:stretch>
+        </p:blipFill>
+        <p:spPr>
+          <a:xfrm>
+            <a:off x="9311640" y="1847087"/>
+            <a:ext cx="1220724" cy="1220724"/>
+          </a:xfrm>
+          <a:prstGeom prst="rect">
+            <a:avLst/>
+          </a:prstGeom>
+        </p:spPr>
+      </p:pic>
+      <p:sp>
+        <p:nvSpPr>
+          <p:cNvPr id="20" name="TextBox 19"/>
+          <p:cNvSpPr txBox="1"/>
+          <p:nvPr/>
+        </p:nvSpPr>
+        <p:spPr>
+          <a:xfrm>
+            <a:off x="8182660" y="3159251"/>
+            <a:ext cx="3478682" cy="621792"/>
+          </a:xfrm>
+          <a:prstGeom prst="rect">
+            <a:avLst/>
+          </a:prstGeom>
+          <a:noFill/>
+        </p:spPr>
+        <p:txBody>
+          <a:bodyPr wrap="square" anchor="t"/>
+          <a:lstStyle/>
+          <a:p>
+            <a:pPr algn="ctr"/>
+            <a:r>
+              <a:rPr sz="1300" b="1" i="0">
+                <a:solidFill>
+                  <a:srgbClr val="095292"/>
+                </a:solidFill>
+                <a:latin typeface="Calibri"/>
+              </a:rPr>
+              <a:t>Google Docs</a:t>
+            </a:r>
+          </a:p>
+          <a:p>
+            <a:pPr algn="ctr">
+              <a:spcBef>
+                <a:spcPts val="200"/>
+              </a:spcBef>
+            </a:pPr>
+            <a:r>
+              <a:rPr sz="1000" b="0" i="0">
+                <a:solidFill>
+                  <a:srgbClr val="666666"/>
+                </a:solidFill>
+                <a:latin typeface="Calibri"/>
+              </a:rPr>
+              <a:t>Informe PI</a:t>
+            </a:r>
+          </a:p>
+        </p:txBody>
+      </p:sp>
+      <p:sp>
+        <p:nvSpPr>
+          <p:cNvPr id="21" name="Rounded Rectangle 20"/>
+          <p:cNvSpPr/>
+          <p:nvPr/>
+        </p:nvSpPr>
+        <p:spPr>
+          <a:xfrm>
+            <a:off x="2370277" y="4055364"/>
+            <a:ext cx="3624986" cy="2299716"/>
+          </a:xfrm>
+          <a:prstGeom prst="roundRect">
+            <a:avLst>
+              <a:gd name="adj" fmla="val 12000"/>
+            </a:avLst>
+          </a:prstGeom>
+          <a:solidFill>
+            <a:srgbClr val="F2F2F2"/>
+          </a:solidFill>
+          <a:ln>
+            <a:noFill/>
+          </a:ln>
+        </p:spPr>
+        <p:style>
+          <a:lnRef idx="1">
+            <a:schemeClr val="accent1"/>
+          </a:lnRef>
+          <a:fillRef idx="3">
+            <a:schemeClr val="accent1"/>
+          </a:fillRef>
+          <a:effectRef idx="2">
+            <a:schemeClr val="accent1"/>
+          </a:effectRef>
+          <a:fontRef idx="minor">
+            <a:schemeClr val="lt1"/>
+          </a:fontRef>
+        </p:style>
+        <p:txBody>
+          <a:bodyPr rtlCol="0" anchor="ctr"/>
+          <a:lstStyle/>
+          <a:p>
+            <a:pPr algn="ctr"/>
+          </a:p>
+        </p:txBody>
+      </p:sp>
+      <p:sp>
+        <p:nvSpPr>
+          <p:cNvPr id="22" name="Rectangle 21"/>
+          <p:cNvSpPr/>
+          <p:nvPr/>
+        </p:nvSpPr>
+        <p:spPr>
+          <a:xfrm>
+            <a:off x="2370277" y="4055364"/>
+            <a:ext cx="3624986" cy="64008"/>
+          </a:xfrm>
+          <a:prstGeom prst="rect">
+            <a:avLst/>
+          </a:prstGeom>
+          <a:solidFill>
+            <a:srgbClr val="095292"/>
+          </a:solidFill>
+          <a:ln>
+            <a:noFill/>
+          </a:ln>
+        </p:spPr>
+        <p:style>
+          <a:lnRef idx="1">
+            <a:schemeClr val="accent1"/>
+          </a:lnRef>
+          <a:fillRef idx="3">
+            <a:schemeClr val="accent1"/>
+          </a:fillRef>
+          <a:effectRef idx="2">
+            <a:schemeClr val="accent1"/>
+          </a:effectRef>
+          <a:fontRef idx="minor">
+            <a:schemeClr val="lt1"/>
+          </a:fontRef>
+        </p:style>
+        <p:txBody>
+          <a:bodyPr rtlCol="0" anchor="ctr"/>
+          <a:lstStyle/>
+          <a:p>
+            <a:pPr algn="ctr"/>
+          </a:p>
+        </p:txBody>
+      </p:sp>
+      <p:sp>
+        <p:nvSpPr>
+          <p:cNvPr id="23" name="Rectangle 22"/>
+          <p:cNvSpPr/>
+          <p:nvPr/>
+        </p:nvSpPr>
+        <p:spPr>
+          <a:xfrm>
+            <a:off x="2370277" y="4119372"/>
+            <a:ext cx="3624986" cy="27432"/>
+          </a:xfrm>
+          <a:prstGeom prst="rect">
+            <a:avLst/>
+          </a:prstGeom>
+          <a:solidFill>
+            <a:srgbClr val="FFD000"/>
+          </a:solidFill>
+          <a:ln>
+            <a:noFill/>
+          </a:ln>
+        </p:spPr>
+        <p:style>
+          <a:lnRef idx="1">
+            <a:schemeClr val="accent1"/>
+          </a:lnRef>
+          <a:fillRef idx="3">
+            <a:schemeClr val="accent1"/>
+          </a:fillRef>
+          <a:effectRef idx="2">
+            <a:schemeClr val="accent1"/>
+          </a:effectRef>
+          <a:fontRef idx="minor">
+            <a:schemeClr val="lt1"/>
+          </a:fontRef>
+        </p:style>
+        <p:txBody>
+          <a:bodyPr rtlCol="0" anchor="ctr"/>
+          <a:lstStyle/>
+          <a:p>
+            <a:pPr algn="ctr"/>
+          </a:p>
+        </p:txBody>
+      </p:sp>
+      <p:pic>
+        <p:nvPicPr>
+          <p:cNvPr id="24" name="Picture 23" descr="mermaid.png"/>
+          <p:cNvPicPr>
+            <a:picLocks noChangeAspect="1"/>
+          </p:cNvPicPr>
+          <p:nvPr/>
+        </p:nvPicPr>
+        <p:blipFill>
+          <a:blip r:embed="rId5"/>
+          <a:stretch>
+            <a:fillRect/>
+          </a:stretch>
+        </p:blipFill>
+        <p:spPr>
+          <a:xfrm>
+            <a:off x="3572408" y="4311396"/>
+            <a:ext cx="1220724" cy="1220724"/>
+          </a:xfrm>
+          <a:prstGeom prst="rect">
+            <a:avLst/>
+          </a:prstGeom>
+        </p:spPr>
+      </p:pic>
+      <p:sp>
+        <p:nvSpPr>
+          <p:cNvPr id="25" name="TextBox 24"/>
+          <p:cNvSpPr txBox="1"/>
+          <p:nvPr/>
+        </p:nvSpPr>
+        <p:spPr>
+          <a:xfrm>
+            <a:off x="2443429" y="5623560"/>
+            <a:ext cx="3478682" cy="621792"/>
+          </a:xfrm>
+          <a:prstGeom prst="rect">
+            <a:avLst/>
+          </a:prstGeom>
+          <a:noFill/>
+        </p:spPr>
+        <p:txBody>
+          <a:bodyPr wrap="square" anchor="t"/>
+          <a:lstStyle/>
+          <a:p>
+            <a:pPr algn="ctr"/>
+            <a:r>
+              <a:rPr sz="1300" b="1" i="0">
+                <a:solidFill>
+                  <a:srgbClr val="095292"/>
+                </a:solidFill>
+                <a:latin typeface="Calibri"/>
+              </a:rPr>
+              <a:t>Mermaid</a:t>
+            </a:r>
+          </a:p>
+          <a:p>
+            <a:pPr algn="ctr">
+              <a:spcBef>
+                <a:spcPts val="200"/>
+              </a:spcBef>
+            </a:pPr>
+            <a:r>
+              <a:rPr sz="1000" b="0" i="0">
+                <a:solidFill>
+                  <a:srgbClr val="666666"/>
+                </a:solidFill>
+                <a:latin typeface="Calibri"/>
+              </a:rPr>
+              <a:t>Codigo del diagrama</a:t>
+            </a:r>
+          </a:p>
+        </p:txBody>
+      </p:sp>
+      <p:sp>
+        <p:nvSpPr>
+          <p:cNvPr id="26" name="Rounded Rectangle 25"/>
+          <p:cNvSpPr/>
+          <p:nvPr/>
+        </p:nvSpPr>
+        <p:spPr>
+          <a:xfrm>
+            <a:off x="6196431" y="4055364"/>
+            <a:ext cx="3624986" cy="2299716"/>
+          </a:xfrm>
+          <a:prstGeom prst="roundRect">
+            <a:avLst>
+              <a:gd name="adj" fmla="val 12000"/>
+            </a:avLst>
+          </a:prstGeom>
+          <a:solidFill>
+            <a:srgbClr val="F2F2F2"/>
+          </a:solidFill>
+          <a:ln>
+            <a:noFill/>
+          </a:ln>
+        </p:spPr>
+        <p:style>
+          <a:lnRef idx="1">
+            <a:schemeClr val="accent1"/>
+          </a:lnRef>
+          <a:fillRef idx="3">
+            <a:schemeClr val="accent1"/>
+          </a:fillRef>
+          <a:effectRef idx="2">
+            <a:schemeClr val="accent1"/>
+          </a:effectRef>
+          <a:fontRef idx="minor">
+            <a:schemeClr val="lt1"/>
+          </a:fontRef>
+        </p:style>
+        <p:txBody>
+          <a:bodyPr rtlCol="0" anchor="ctr"/>
+          <a:lstStyle/>
+          <a:p>
+            <a:pPr algn="ctr"/>
+          </a:p>
+        </p:txBody>
+      </p:sp>
+      <p:sp>
+        <p:nvSpPr>
+          <p:cNvPr id="27" name="Rectangle 26"/>
+          <p:cNvSpPr/>
+          <p:nvPr/>
+        </p:nvSpPr>
+        <p:spPr>
+          <a:xfrm>
+            <a:off x="6196431" y="4055364"/>
+            <a:ext cx="3624986" cy="64008"/>
+          </a:xfrm>
+          <a:prstGeom prst="rect">
+            <a:avLst/>
+          </a:prstGeom>
+          <a:solidFill>
+            <a:srgbClr val="095292"/>
+          </a:solidFill>
+          <a:ln>
+            <a:noFill/>
+          </a:ln>
+        </p:spPr>
+        <p:style>
+          <a:lnRef idx="1">
+            <a:schemeClr val="accent1"/>
+          </a:lnRef>
+          <a:fillRef idx="3">
+            <a:schemeClr val="accent1"/>
+          </a:fillRef>
+          <a:effectRef idx="2">
+            <a:schemeClr val="accent1"/>
+          </a:effectRef>
+          <a:fontRef idx="minor">
+            <a:schemeClr val="lt1"/>
+          </a:fontRef>
+        </p:style>
+        <p:txBody>
+          <a:bodyPr rtlCol="0" anchor="ctr"/>
+          <a:lstStyle/>
+          <a:p>
+            <a:pPr algn="ctr"/>
+          </a:p>
+        </p:txBody>
+      </p:sp>
+      <p:sp>
+        <p:nvSpPr>
+          <p:cNvPr id="28" name="Rectangle 27"/>
+          <p:cNvSpPr/>
+          <p:nvPr/>
+        </p:nvSpPr>
+        <p:spPr>
+          <a:xfrm>
+            <a:off x="6196431" y="4119372"/>
+            <a:ext cx="3624986" cy="27432"/>
+          </a:xfrm>
+          <a:prstGeom prst="rect">
+            <a:avLst/>
+          </a:prstGeom>
+          <a:solidFill>
+            <a:srgbClr val="FFD000"/>
+          </a:solidFill>
+          <a:ln>
+            <a:noFill/>
+          </a:ln>
+        </p:spPr>
+        <p:style>
+          <a:lnRef idx="1">
+            <a:schemeClr val="accent1"/>
+          </a:lnRef>
+          <a:fillRef idx="3">
+            <a:schemeClr val="accent1"/>
+          </a:fillRef>
+          <a:effectRef idx="2">
+            <a:schemeClr val="accent1"/>
+          </a:effectRef>
+          <a:fontRef idx="minor">
+            <a:schemeClr val="lt1"/>
+          </a:fontRef>
+        </p:style>
+        <p:txBody>
+          <a:bodyPr rtlCol="0" anchor="ctr"/>
+          <a:lstStyle/>
+          <a:p>
+            <a:pPr algn="ctr"/>
+          </a:p>
+        </p:txBody>
+      </p:sp>
+      <p:pic>
+        <p:nvPicPr>
+          <p:cNvPr id="29" name="Picture 28" descr="examlab.png"/>
+          <p:cNvPicPr>
+            <a:picLocks noChangeAspect="1"/>
+          </p:cNvPicPr>
+          <p:nvPr/>
+        </p:nvPicPr>
+        <p:blipFill>
+          <a:blip r:embed="rId6"/>
+          <a:stretch>
+            <a:fillRect/>
+          </a:stretch>
+        </p:blipFill>
+        <p:spPr>
+          <a:xfrm>
+            <a:off x="7398562" y="4311396"/>
+            <a:ext cx="1220724" cy="1220724"/>
+          </a:xfrm>
+          <a:prstGeom prst="rect">
+            <a:avLst/>
+          </a:prstGeom>
+        </p:spPr>
+      </p:pic>
+      <p:sp>
+        <p:nvSpPr>
+          <p:cNvPr id="30" name="TextBox 29"/>
+          <p:cNvSpPr txBox="1"/>
+          <p:nvPr/>
+        </p:nvSpPr>
+        <p:spPr>
+          <a:xfrm>
+            <a:off x="6269583" y="5623560"/>
+            <a:ext cx="3478682" cy="621792"/>
+          </a:xfrm>
+          <a:prstGeom prst="rect">
+            <a:avLst/>
+          </a:prstGeom>
+          <a:noFill/>
+        </p:spPr>
+        <p:txBody>
+          <a:bodyPr wrap="square" anchor="t"/>
+          <a:lstStyle/>
+          <a:p>
+            <a:pPr algn="ctr"/>
+            <a:r>
+              <a:rPr sz="1300" b="1" i="0">
+                <a:solidFill>
+                  <a:srgbClr val="095292"/>
+                </a:solidFill>
+                <a:latin typeface="Calibri"/>
+              </a:rPr>
+              <a:t>la plataforma del curso</a:t>
+            </a:r>
+          </a:p>
+          <a:p>
+            <a:pPr algn="ctr">
+              <a:spcBef>
+                <a:spcPts val="200"/>
+              </a:spcBef>
+            </a:pPr>
+            <a:r>
+              <a:rPr sz="1000" b="0" i="0">
+                <a:solidFill>
+                  <a:srgbClr val="666666"/>
+                </a:solidFill>
+                <a:latin typeface="Calibri"/>
+              </a:rPr>
+              <a:t>Donde se entrega</a:t>
+            </a:r>
+          </a:p>
+        </p:txBody>
+      </p:sp>
+      <p:sp>
+        <p:nvSpPr>
+          <p:cNvPr id="31" name="TextBox 30"/>
+          <p:cNvSpPr txBox="1"/>
+          <p:nvPr/>
+        </p:nvSpPr>
+        <p:spPr>
+          <a:xfrm>
+            <a:off x="11185855" y="6473952"/>
+            <a:ext cx="640080" cy="274320"/>
           </a:xfrm>
           <a:prstGeom prst="rect">
             <a:avLst/>
@@ -4542,65 +6955,141 @@
           </a:bodyPr>
           <a:lstStyle/>
           <a:p>
-            <a:pPr algn="ctr">
-              <a:spcAft>
-                <a:spcPts val="600"/>
-              </a:spcAft>
-            </a:pPr>
-            <a:r>
-              <a:rPr sz="1600" b="0" i="0">
-                <a:solidFill>
-                  <a:srgbClr val="333333"/>
-                </a:solidFill>
-                <a:latin typeface="Calibri"/>
-              </a:rPr>
-              <a:t>Integrar diagramas v1 + checklist de avance PI</a:t>
-            </a:r>
-          </a:p>
-          <a:p>
-            <a:pPr algn="ctr">
-              <a:spcAft>
-                <a:spcPts val="600"/>
-              </a:spcAft>
-            </a:pPr>
-            <a:r>
-              <a:rPr sz="1600" b="0" i="0">
-                <a:solidFill>
-                  <a:srgbClr val="333333"/>
-                </a:solidFill>
-                <a:latin typeface="Calibri"/>
-              </a:rPr>
-              <a:t>Evidencia: Paquete v1: Context + Containers + Deployment + Dockerfile + Actions + informe 60%+</a:t>
-            </a:r>
-          </a:p>
-          <a:p>
-            <a:pPr algn="ctr">
-              <a:spcAft>
-                <a:spcPts val="600"/>
-              </a:spcAft>
-            </a:pPr>
-            <a:r>
-              <a:rPr sz="1600" b="0" i="0">
-                <a:solidFill>
-                  <a:srgbClr val="333333"/>
-                </a:solidFill>
-                <a:latin typeface="Calibri"/>
-              </a:rPr>
-              <a:t>Siguiente paso = siguiente hito del PI CloudLite</a:t>
-            </a:r>
-          </a:p>
-        </p:txBody>
-      </p:sp>
-      <p:sp>
-        <p:nvSpPr>
-          <p:cNvPr id="6" name="TextBox 5"/>
+            <a:pPr algn="r"/>
+            <a:r>
+              <a:rPr sz="1100" b="0" i="0">
+                <a:solidFill>
+                  <a:srgbClr val="666666"/>
+                </a:solidFill>
+                <a:latin typeface="Calibri"/>
+              </a:rPr>
+              <a:t>18</a:t>
+            </a:r>
+          </a:p>
+        </p:txBody>
+      </p:sp>
+    </p:spTree>
+  </p:cSld>
+  <p:clrMapOvr>
+    <a:masterClrMapping/>
+  </p:clrMapOvr>
+</p:sld>
+</file>
+
+<file path=ppt/slides/slide19.xml><?xml version="1.0" encoding="utf-8"?>
+<p:sld xmlns:a="http://schemas.openxmlformats.org/drawingml/2006/main" xmlns:p="http://schemas.openxmlformats.org/presentationml/2006/main" xmlns:r="http://schemas.openxmlformats.org/officeDocument/2006/relationships">
+  <p:cSld>
+    <p:bg>
+      <p:bgPr>
+        <a:solidFill>
+          <a:srgbClr val="FFFFFF"/>
+        </a:solidFill>
+        <a:effectLst/>
+      </p:bgPr>
+    </p:bg>
+    <p:spTree>
+      <p:nvGrpSpPr>
+        <p:cNvPr id="1" name=""/>
+        <p:cNvGrpSpPr/>
+        <p:nvPr/>
+      </p:nvGrpSpPr>
+      <p:grpSpPr/>
+      <p:sp>
+        <p:nvSpPr>
+          <p:cNvPr id="2" name="Rectangle 1"/>
+          <p:cNvSpPr/>
+          <p:nvPr/>
+        </p:nvSpPr>
+        <p:spPr>
+          <a:xfrm>
+            <a:off x="0" y="0"/>
+            <a:ext cx="12191695" cy="1170432"/>
+          </a:xfrm>
+          <a:prstGeom prst="rect">
+            <a:avLst/>
+          </a:prstGeom>
+          <a:solidFill>
+            <a:srgbClr val="095292"/>
+          </a:solidFill>
+          <a:ln>
+            <a:noFill/>
+          </a:ln>
+        </p:spPr>
+        <p:style>
+          <a:lnRef idx="1">
+            <a:schemeClr val="accent1"/>
+          </a:lnRef>
+          <a:fillRef idx="3">
+            <a:schemeClr val="accent1"/>
+          </a:fillRef>
+          <a:effectRef idx="2">
+            <a:schemeClr val="accent1"/>
+          </a:effectRef>
+          <a:fontRef idx="minor">
+            <a:schemeClr val="lt1"/>
+          </a:fontRef>
+        </p:style>
+        <p:txBody>
+          <a:bodyPr rtlCol="0" anchor="ctr"/>
+          <a:lstStyle/>
+          <a:p>
+            <a:pPr algn="ctr"/>
+          </a:p>
+        </p:txBody>
+      </p:sp>
+      <p:sp>
+        <p:nvSpPr>
+          <p:cNvPr id="3" name="Rectangle 2"/>
+          <p:cNvSpPr/>
+          <p:nvPr/>
+        </p:nvSpPr>
+        <p:spPr>
+          <a:xfrm>
+            <a:off x="0" y="1170432"/>
+            <a:ext cx="12191695" cy="41148"/>
+          </a:xfrm>
+          <a:prstGeom prst="rect">
+            <a:avLst/>
+          </a:prstGeom>
+          <a:solidFill>
+            <a:srgbClr val="FFD000"/>
+          </a:solidFill>
+          <a:ln>
+            <a:noFill/>
+          </a:ln>
+        </p:spPr>
+        <p:style>
+          <a:lnRef idx="1">
+            <a:schemeClr val="accent1"/>
+          </a:lnRef>
+          <a:fillRef idx="3">
+            <a:schemeClr val="accent1"/>
+          </a:fillRef>
+          <a:effectRef idx="2">
+            <a:schemeClr val="accent1"/>
+          </a:effectRef>
+          <a:fontRef idx="minor">
+            <a:schemeClr val="lt1"/>
+          </a:fontRef>
+        </p:style>
+        <p:txBody>
+          <a:bodyPr rtlCol="0" anchor="ctr"/>
+          <a:lstStyle/>
+          <a:p>
+            <a:pPr algn="ctr"/>
+          </a:p>
+        </p:txBody>
+      </p:sp>
+      <p:sp>
+        <p:nvSpPr>
+          <p:cNvPr id="4" name="TextBox 3"/>
           <p:cNvSpPr txBox="1"/>
           <p:nvPr/>
         </p:nvSpPr>
         <p:spPr>
           <a:xfrm>
-            <a:off x="457200" y="4754880"/>
-            <a:ext cx="11277295" cy="640080"/>
+            <a:off x="457200" y="164592"/>
+            <a:ext cx="11277295" cy="384048"/>
           </a:xfrm>
           <a:prstGeom prst="rect">
             <a:avLst/>
@@ -4613,15 +7102,767 @@
           </a:bodyPr>
           <a:lstStyle/>
           <a:p>
+            <a:r>
+              <a:rPr sz="2600" b="1" i="0">
+                <a:solidFill>
+                  <a:srgbClr val="FFFFFF"/>
+                </a:solidFill>
+                <a:latin typeface="Calibri"/>
+              </a:rPr>
+              <a:t>Del boceto a la plataforma del curso (diagrama)</a:t>
+            </a:r>
+          </a:p>
+        </p:txBody>
+      </p:sp>
+      <p:sp>
+        <p:nvSpPr>
+          <p:cNvPr id="5" name="TextBox 4"/>
+          <p:cNvSpPr txBox="1"/>
+          <p:nvPr/>
+        </p:nvSpPr>
+        <p:spPr>
+          <a:xfrm>
+            <a:off x="457200" y="566928"/>
+            <a:ext cx="11277295" cy="411480"/>
+          </a:xfrm>
+          <a:prstGeom prst="rect">
+            <a:avLst/>
+          </a:prstGeom>
+          <a:noFill/>
+        </p:spPr>
+        <p:txBody>
+          <a:bodyPr wrap="square">
+            <a:spAutoFit/>
+          </a:bodyPr>
+          <a:lstStyle/>
+          <a:p>
+            <a:r>
+              <a:rPr sz="1400" b="0" i="0">
+                <a:solidFill>
+                  <a:srgbClr val="B8D8EE"/>
+                </a:solidFill>
+                <a:latin typeface="Calibri"/>
+              </a:rPr>
+              <a:t>El diagrama se entrega como código Mermaid dentro de la plataforma del curso, no como imagen</a:t>
+            </a:r>
+          </a:p>
+        </p:txBody>
+      </p:sp>
+      <p:sp>
+        <p:nvSpPr>
+          <p:cNvPr id="6" name="Rounded Rectangle 5"/>
+          <p:cNvSpPr/>
+          <p:nvPr/>
+        </p:nvSpPr>
+        <p:spPr>
+          <a:xfrm>
+            <a:off x="457200" y="1659636"/>
+            <a:ext cx="11277295" cy="1051560"/>
+          </a:xfrm>
+          <a:prstGeom prst="roundRect">
+            <a:avLst>
+              <a:gd name="adj" fmla="val 12000"/>
+            </a:avLst>
+          </a:prstGeom>
+          <a:solidFill>
+            <a:srgbClr val="F2F2F2"/>
+          </a:solidFill>
+          <a:ln>
+            <a:noFill/>
+          </a:ln>
+        </p:spPr>
+        <p:style>
+          <a:lnRef idx="1">
+            <a:schemeClr val="accent1"/>
+          </a:lnRef>
+          <a:fillRef idx="3">
+            <a:schemeClr val="accent1"/>
+          </a:fillRef>
+          <a:effectRef idx="2">
+            <a:schemeClr val="accent1"/>
+          </a:effectRef>
+          <a:fontRef idx="minor">
+            <a:schemeClr val="lt1"/>
+          </a:fontRef>
+        </p:style>
+        <p:txBody>
+          <a:bodyPr rtlCol="0" anchor="ctr"/>
+          <a:lstStyle/>
+          <a:p>
             <a:pPr algn="ctr"/>
-            <a:r>
-              <a:rPr sz="2000" b="1" i="0">
-                <a:solidFill>
-                  <a:srgbClr val="269CCB"/>
-                </a:solidFill>
-                <a:latin typeface="Calibri"/>
-              </a:rPr>
-              <a:t>Teoría al servicio del proyecto</a:t>
+          </a:p>
+        </p:txBody>
+      </p:sp>
+      <p:sp>
+        <p:nvSpPr>
+          <p:cNvPr id="7" name="Rounded Rectangle 6"/>
+          <p:cNvSpPr/>
+          <p:nvPr/>
+        </p:nvSpPr>
+        <p:spPr>
+          <a:xfrm>
+            <a:off x="594360" y="1965960"/>
+            <a:ext cx="438912" cy="438912"/>
+          </a:xfrm>
+          <a:prstGeom prst="roundRect">
+            <a:avLst>
+              <a:gd name="adj" fmla="val 12000"/>
+            </a:avLst>
+          </a:prstGeom>
+          <a:solidFill>
+            <a:srgbClr val="095292"/>
+          </a:solidFill>
+          <a:ln>
+            <a:noFill/>
+          </a:ln>
+        </p:spPr>
+        <p:style>
+          <a:lnRef idx="1">
+            <a:schemeClr val="accent1"/>
+          </a:lnRef>
+          <a:fillRef idx="3">
+            <a:schemeClr val="accent1"/>
+          </a:fillRef>
+          <a:effectRef idx="2">
+            <a:schemeClr val="accent1"/>
+          </a:effectRef>
+          <a:fontRef idx="minor">
+            <a:schemeClr val="lt1"/>
+          </a:fontRef>
+        </p:style>
+        <p:txBody>
+          <a:bodyPr rtlCol="0" anchor="ctr"/>
+          <a:lstStyle/>
+          <a:p>
+            <a:pPr algn="ctr"/>
+          </a:p>
+        </p:txBody>
+      </p:sp>
+      <p:sp>
+        <p:nvSpPr>
+          <p:cNvPr id="8" name="TextBox 7"/>
+          <p:cNvSpPr txBox="1"/>
+          <p:nvPr/>
+        </p:nvSpPr>
+        <p:spPr>
+          <a:xfrm>
+            <a:off x="594360" y="1965960"/>
+            <a:ext cx="438912" cy="438912"/>
+          </a:xfrm>
+          <a:prstGeom prst="rect">
+            <a:avLst/>
+          </a:prstGeom>
+          <a:noFill/>
+        </p:spPr>
+        <p:txBody>
+          <a:bodyPr wrap="square" anchor="ctr"/>
+          <a:lstStyle/>
+          <a:p>
+            <a:pPr algn="ctr"/>
+            <a:r>
+              <a:rPr sz="1600" b="1" i="0">
+                <a:solidFill>
+                  <a:srgbClr val="FFFFFF"/>
+                </a:solidFill>
+                <a:latin typeface="Calibri"/>
+              </a:rPr>
+              <a:t>1</a:t>
+            </a:r>
+          </a:p>
+        </p:txBody>
+      </p:sp>
+      <p:sp>
+        <p:nvSpPr>
+          <p:cNvPr id="9" name="TextBox 8"/>
+          <p:cNvSpPr txBox="1"/>
+          <p:nvPr/>
+        </p:nvSpPr>
+        <p:spPr>
+          <a:xfrm>
+            <a:off x="1188720" y="1751076"/>
+            <a:ext cx="10271455" cy="886968"/>
+          </a:xfrm>
+          <a:prstGeom prst="rect">
+            <a:avLst/>
+          </a:prstGeom>
+          <a:noFill/>
+        </p:spPr>
+        <p:txBody>
+          <a:bodyPr wrap="square" anchor="ctr"/>
+          <a:lstStyle/>
+          <a:p>
+            <a:r>
+              <a:rPr sz="1500" b="1" i="0">
+                <a:solidFill>
+                  <a:srgbClr val="095292"/>
+                </a:solidFill>
+                <a:latin typeface="Calibri"/>
+              </a:rPr>
+              <a:t>Disena visual</a:t>
+            </a:r>
+          </a:p>
+          <a:p>
+            <a:pPr>
+              <a:spcBef>
+                <a:spcPts val="200"/>
+              </a:spcBef>
+            </a:pPr>
+            <a:r>
+              <a:rPr sz="1300" b="0" i="0">
+                <a:solidFill>
+                  <a:srgbClr val="333333"/>
+                </a:solidFill>
+                <a:latin typeface="Calibri"/>
+              </a:rPr>
+              <a:t>Dibuja el diagrama como quieras en Excalidraw o draw.io: es mas rapido arrastrar cajas que escribir codigo, y ahi es donde piensas el modelo.</a:t>
+            </a:r>
+          </a:p>
+        </p:txBody>
+      </p:sp>
+      <p:sp>
+        <p:nvSpPr>
+          <p:cNvPr id="10" name="Rounded Rectangle 9"/>
+          <p:cNvSpPr/>
+          <p:nvPr/>
+        </p:nvSpPr>
+        <p:spPr>
+          <a:xfrm>
+            <a:off x="457200" y="2802636"/>
+            <a:ext cx="11277295" cy="1051560"/>
+          </a:xfrm>
+          <a:prstGeom prst="roundRect">
+            <a:avLst>
+              <a:gd name="adj" fmla="val 12000"/>
+            </a:avLst>
+          </a:prstGeom>
+          <a:solidFill>
+            <a:srgbClr val="E8F4FA"/>
+          </a:solidFill>
+          <a:ln>
+            <a:noFill/>
+          </a:ln>
+        </p:spPr>
+        <p:style>
+          <a:lnRef idx="1">
+            <a:schemeClr val="accent1"/>
+          </a:lnRef>
+          <a:fillRef idx="3">
+            <a:schemeClr val="accent1"/>
+          </a:fillRef>
+          <a:effectRef idx="2">
+            <a:schemeClr val="accent1"/>
+          </a:effectRef>
+          <a:fontRef idx="minor">
+            <a:schemeClr val="lt1"/>
+          </a:fontRef>
+        </p:style>
+        <p:txBody>
+          <a:bodyPr rtlCol="0" anchor="ctr"/>
+          <a:lstStyle/>
+          <a:p>
+            <a:pPr algn="ctr"/>
+          </a:p>
+        </p:txBody>
+      </p:sp>
+      <p:sp>
+        <p:nvSpPr>
+          <p:cNvPr id="11" name="Rounded Rectangle 10"/>
+          <p:cNvSpPr/>
+          <p:nvPr/>
+        </p:nvSpPr>
+        <p:spPr>
+          <a:xfrm>
+            <a:off x="594360" y="3108960"/>
+            <a:ext cx="438912" cy="438912"/>
+          </a:xfrm>
+          <a:prstGeom prst="roundRect">
+            <a:avLst>
+              <a:gd name="adj" fmla="val 12000"/>
+            </a:avLst>
+          </a:prstGeom>
+          <a:solidFill>
+            <a:srgbClr val="095292"/>
+          </a:solidFill>
+          <a:ln>
+            <a:noFill/>
+          </a:ln>
+        </p:spPr>
+        <p:style>
+          <a:lnRef idx="1">
+            <a:schemeClr val="accent1"/>
+          </a:lnRef>
+          <a:fillRef idx="3">
+            <a:schemeClr val="accent1"/>
+          </a:fillRef>
+          <a:effectRef idx="2">
+            <a:schemeClr val="accent1"/>
+          </a:effectRef>
+          <a:fontRef idx="minor">
+            <a:schemeClr val="lt1"/>
+          </a:fontRef>
+        </p:style>
+        <p:txBody>
+          <a:bodyPr rtlCol="0" anchor="ctr"/>
+          <a:lstStyle/>
+          <a:p>
+            <a:pPr algn="ctr"/>
+          </a:p>
+        </p:txBody>
+      </p:sp>
+      <p:sp>
+        <p:nvSpPr>
+          <p:cNvPr id="12" name="TextBox 11"/>
+          <p:cNvSpPr txBox="1"/>
+          <p:nvPr/>
+        </p:nvSpPr>
+        <p:spPr>
+          <a:xfrm>
+            <a:off x="594360" y="3108960"/>
+            <a:ext cx="438912" cy="438912"/>
+          </a:xfrm>
+          <a:prstGeom prst="rect">
+            <a:avLst/>
+          </a:prstGeom>
+          <a:noFill/>
+        </p:spPr>
+        <p:txBody>
+          <a:bodyPr wrap="square" anchor="ctr"/>
+          <a:lstStyle/>
+          <a:p>
+            <a:pPr algn="ctr"/>
+            <a:r>
+              <a:rPr sz="1600" b="1" i="0">
+                <a:solidFill>
+                  <a:srgbClr val="FFFFFF"/>
+                </a:solidFill>
+                <a:latin typeface="Calibri"/>
+              </a:rPr>
+              <a:t>2</a:t>
+            </a:r>
+          </a:p>
+        </p:txBody>
+      </p:sp>
+      <p:sp>
+        <p:nvSpPr>
+          <p:cNvPr id="13" name="TextBox 12"/>
+          <p:cNvSpPr txBox="1"/>
+          <p:nvPr/>
+        </p:nvSpPr>
+        <p:spPr>
+          <a:xfrm>
+            <a:off x="1188720" y="2894076"/>
+            <a:ext cx="10271455" cy="886968"/>
+          </a:xfrm>
+          <a:prstGeom prst="rect">
+            <a:avLst/>
+          </a:prstGeom>
+          <a:noFill/>
+        </p:spPr>
+        <p:txBody>
+          <a:bodyPr wrap="square" anchor="ctr"/>
+          <a:lstStyle/>
+          <a:p>
+            <a:r>
+              <a:rPr sz="1500" b="1" i="0">
+                <a:solidFill>
+                  <a:srgbClr val="095292"/>
+                </a:solidFill>
+                <a:latin typeface="Calibri"/>
+              </a:rPr>
+              <a:t>Traduce con IA</a:t>
+            </a:r>
+          </a:p>
+          <a:p>
+            <a:pPr>
+              <a:spcBef>
+                <a:spcPts val="200"/>
+              </a:spcBef>
+            </a:pPr>
+            <a:r>
+              <a:rPr sz="1300" b="0" i="0">
+                <a:solidFill>
+                  <a:srgbClr val="333333"/>
+                </a:solidFill>
+                <a:latin typeface="Calibri"/>
+              </a:rPr>
+              <a:t>Copia o describe tu boceto a una IA y pidele el codigo Mermaid: «convierte este diagrama a Mermaid usando C4Component». Revisa el resultado: la IA acierta la sintaxis, no tu modelo.</a:t>
+            </a:r>
+          </a:p>
+        </p:txBody>
+      </p:sp>
+      <p:sp>
+        <p:nvSpPr>
+          <p:cNvPr id="14" name="Rounded Rectangle 13"/>
+          <p:cNvSpPr/>
+          <p:nvPr/>
+        </p:nvSpPr>
+        <p:spPr>
+          <a:xfrm>
+            <a:off x="457200" y="3945636"/>
+            <a:ext cx="11277295" cy="1051560"/>
+          </a:xfrm>
+          <a:prstGeom prst="roundRect">
+            <a:avLst>
+              <a:gd name="adj" fmla="val 12000"/>
+            </a:avLst>
+          </a:prstGeom>
+          <a:solidFill>
+            <a:srgbClr val="F2F2F2"/>
+          </a:solidFill>
+          <a:ln>
+            <a:noFill/>
+          </a:ln>
+        </p:spPr>
+        <p:style>
+          <a:lnRef idx="1">
+            <a:schemeClr val="accent1"/>
+          </a:lnRef>
+          <a:fillRef idx="3">
+            <a:schemeClr val="accent1"/>
+          </a:fillRef>
+          <a:effectRef idx="2">
+            <a:schemeClr val="accent1"/>
+          </a:effectRef>
+          <a:fontRef idx="minor">
+            <a:schemeClr val="lt1"/>
+          </a:fontRef>
+        </p:style>
+        <p:txBody>
+          <a:bodyPr rtlCol="0" anchor="ctr"/>
+          <a:lstStyle/>
+          <a:p>
+            <a:pPr algn="ctr"/>
+          </a:p>
+        </p:txBody>
+      </p:sp>
+      <p:sp>
+        <p:nvSpPr>
+          <p:cNvPr id="15" name="Rounded Rectangle 14"/>
+          <p:cNvSpPr/>
+          <p:nvPr/>
+        </p:nvSpPr>
+        <p:spPr>
+          <a:xfrm>
+            <a:off x="594360" y="4251960"/>
+            <a:ext cx="438912" cy="438912"/>
+          </a:xfrm>
+          <a:prstGeom prst="roundRect">
+            <a:avLst>
+              <a:gd name="adj" fmla="val 12000"/>
+            </a:avLst>
+          </a:prstGeom>
+          <a:solidFill>
+            <a:srgbClr val="095292"/>
+          </a:solidFill>
+          <a:ln>
+            <a:noFill/>
+          </a:ln>
+        </p:spPr>
+        <p:style>
+          <a:lnRef idx="1">
+            <a:schemeClr val="accent1"/>
+          </a:lnRef>
+          <a:fillRef idx="3">
+            <a:schemeClr val="accent1"/>
+          </a:fillRef>
+          <a:effectRef idx="2">
+            <a:schemeClr val="accent1"/>
+          </a:effectRef>
+          <a:fontRef idx="minor">
+            <a:schemeClr val="lt1"/>
+          </a:fontRef>
+        </p:style>
+        <p:txBody>
+          <a:bodyPr rtlCol="0" anchor="ctr"/>
+          <a:lstStyle/>
+          <a:p>
+            <a:pPr algn="ctr"/>
+          </a:p>
+        </p:txBody>
+      </p:sp>
+      <p:sp>
+        <p:nvSpPr>
+          <p:cNvPr id="16" name="TextBox 15"/>
+          <p:cNvSpPr txBox="1"/>
+          <p:nvPr/>
+        </p:nvSpPr>
+        <p:spPr>
+          <a:xfrm>
+            <a:off x="594360" y="4251960"/>
+            <a:ext cx="438912" cy="438912"/>
+          </a:xfrm>
+          <a:prstGeom prst="rect">
+            <a:avLst/>
+          </a:prstGeom>
+          <a:noFill/>
+        </p:spPr>
+        <p:txBody>
+          <a:bodyPr wrap="square" anchor="ctr"/>
+          <a:lstStyle/>
+          <a:p>
+            <a:pPr algn="ctr"/>
+            <a:r>
+              <a:rPr sz="1600" b="1" i="0">
+                <a:solidFill>
+                  <a:srgbClr val="FFFFFF"/>
+                </a:solidFill>
+                <a:latin typeface="Calibri"/>
+              </a:rPr>
+              <a:t>3</a:t>
+            </a:r>
+          </a:p>
+        </p:txBody>
+      </p:sp>
+      <p:sp>
+        <p:nvSpPr>
+          <p:cNvPr id="17" name="TextBox 16"/>
+          <p:cNvSpPr txBox="1"/>
+          <p:nvPr/>
+        </p:nvSpPr>
+        <p:spPr>
+          <a:xfrm>
+            <a:off x="1188720" y="4037076"/>
+            <a:ext cx="10271455" cy="886968"/>
+          </a:xfrm>
+          <a:prstGeom prst="rect">
+            <a:avLst/>
+          </a:prstGeom>
+          <a:noFill/>
+        </p:spPr>
+        <p:txBody>
+          <a:bodyPr wrap="square" anchor="ctr"/>
+          <a:lstStyle/>
+          <a:p>
+            <a:r>
+              <a:rPr sz="1500" b="1" i="0">
+                <a:solidFill>
+                  <a:srgbClr val="095292"/>
+                </a:solidFill>
+                <a:latin typeface="Calibri"/>
+              </a:rPr>
+              <a:t>Pega y renderiza en la plataforma del curso</a:t>
+            </a:r>
+          </a:p>
+          <a:p>
+            <a:pPr>
+              <a:spcBef>
+                <a:spcPts val="200"/>
+              </a:spcBef>
+            </a:pPr>
+            <a:r>
+              <a:rPr sz="1300" b="0" i="0">
+                <a:solidFill>
+                  <a:srgbClr val="333333"/>
+                </a:solidFill>
+                <a:latin typeface="Calibri"/>
+              </a:rPr>
+              <a:t>Pega ese codigo en la caja de texto de la pregunta y mira como lo dibuja la plataforma. Si no renderiza, corrige ahi mismo: lo que se califica es el diagrama renderizado dentro de la plataforma del curso.</a:t>
+            </a:r>
+          </a:p>
+        </p:txBody>
+      </p:sp>
+      <p:sp>
+        <p:nvSpPr>
+          <p:cNvPr id="18" name="Rounded Rectangle 17"/>
+          <p:cNvSpPr/>
+          <p:nvPr/>
+        </p:nvSpPr>
+        <p:spPr>
+          <a:xfrm>
+            <a:off x="457200" y="5088636"/>
+            <a:ext cx="11277295" cy="1051560"/>
+          </a:xfrm>
+          <a:prstGeom prst="roundRect">
+            <a:avLst>
+              <a:gd name="adj" fmla="val 12000"/>
+            </a:avLst>
+          </a:prstGeom>
+          <a:solidFill>
+            <a:srgbClr val="E8F4FA"/>
+          </a:solidFill>
+          <a:ln>
+            <a:noFill/>
+          </a:ln>
+        </p:spPr>
+        <p:style>
+          <a:lnRef idx="1">
+            <a:schemeClr val="accent1"/>
+          </a:lnRef>
+          <a:fillRef idx="3">
+            <a:schemeClr val="accent1"/>
+          </a:fillRef>
+          <a:effectRef idx="2">
+            <a:schemeClr val="accent1"/>
+          </a:effectRef>
+          <a:fontRef idx="minor">
+            <a:schemeClr val="lt1"/>
+          </a:fontRef>
+        </p:style>
+        <p:txBody>
+          <a:bodyPr rtlCol="0" anchor="ctr"/>
+          <a:lstStyle/>
+          <a:p>
+            <a:pPr algn="ctr"/>
+          </a:p>
+        </p:txBody>
+      </p:sp>
+      <p:sp>
+        <p:nvSpPr>
+          <p:cNvPr id="19" name="Rounded Rectangle 18"/>
+          <p:cNvSpPr/>
+          <p:nvPr/>
+        </p:nvSpPr>
+        <p:spPr>
+          <a:xfrm>
+            <a:off x="594360" y="5394960"/>
+            <a:ext cx="438912" cy="438912"/>
+          </a:xfrm>
+          <a:prstGeom prst="roundRect">
+            <a:avLst>
+              <a:gd name="adj" fmla="val 12000"/>
+            </a:avLst>
+          </a:prstGeom>
+          <a:solidFill>
+            <a:srgbClr val="095292"/>
+          </a:solidFill>
+          <a:ln>
+            <a:noFill/>
+          </a:ln>
+        </p:spPr>
+        <p:style>
+          <a:lnRef idx="1">
+            <a:schemeClr val="accent1"/>
+          </a:lnRef>
+          <a:fillRef idx="3">
+            <a:schemeClr val="accent1"/>
+          </a:fillRef>
+          <a:effectRef idx="2">
+            <a:schemeClr val="accent1"/>
+          </a:effectRef>
+          <a:fontRef idx="minor">
+            <a:schemeClr val="lt1"/>
+          </a:fontRef>
+        </p:style>
+        <p:txBody>
+          <a:bodyPr rtlCol="0" anchor="ctr"/>
+          <a:lstStyle/>
+          <a:p>
+            <a:pPr algn="ctr"/>
+          </a:p>
+        </p:txBody>
+      </p:sp>
+      <p:sp>
+        <p:nvSpPr>
+          <p:cNvPr id="20" name="TextBox 19"/>
+          <p:cNvSpPr txBox="1"/>
+          <p:nvPr/>
+        </p:nvSpPr>
+        <p:spPr>
+          <a:xfrm>
+            <a:off x="594360" y="5394960"/>
+            <a:ext cx="438912" cy="438912"/>
+          </a:xfrm>
+          <a:prstGeom prst="rect">
+            <a:avLst/>
+          </a:prstGeom>
+          <a:noFill/>
+        </p:spPr>
+        <p:txBody>
+          <a:bodyPr wrap="square" anchor="ctr"/>
+          <a:lstStyle/>
+          <a:p>
+            <a:pPr algn="ctr"/>
+            <a:r>
+              <a:rPr sz="1600" b="1" i="0">
+                <a:solidFill>
+                  <a:srgbClr val="FFFFFF"/>
+                </a:solidFill>
+                <a:latin typeface="Calibri"/>
+              </a:rPr>
+              <a:t>4</a:t>
+            </a:r>
+          </a:p>
+        </p:txBody>
+      </p:sp>
+      <p:sp>
+        <p:nvSpPr>
+          <p:cNvPr id="21" name="TextBox 20"/>
+          <p:cNvSpPr txBox="1"/>
+          <p:nvPr/>
+        </p:nvSpPr>
+        <p:spPr>
+          <a:xfrm>
+            <a:off x="1188720" y="5180076"/>
+            <a:ext cx="10271455" cy="886968"/>
+          </a:xfrm>
+          <a:prstGeom prst="rect">
+            <a:avLst/>
+          </a:prstGeom>
+          <a:noFill/>
+        </p:spPr>
+        <p:txBody>
+          <a:bodyPr wrap="square" anchor="ctr"/>
+          <a:lstStyle/>
+          <a:p>
+            <a:r>
+              <a:rPr sz="1500" b="1" i="0">
+                <a:solidFill>
+                  <a:srgbClr val="095292"/>
+                </a:solidFill>
+                <a:latin typeface="Calibri"/>
+              </a:rPr>
+              <a:t>Guarda el PNG para tu PI</a:t>
+            </a:r>
+          </a:p>
+          <a:p>
+            <a:pPr>
+              <a:spcBef>
+                <a:spcPts val="200"/>
+              </a:spcBef>
+            </a:pPr>
+            <a:r>
+              <a:rPr sz="1300" b="0" i="0">
+                <a:solidFill>
+                  <a:srgbClr val="333333"/>
+                </a:solidFill>
+                <a:latin typeface="Calibri"/>
+              </a:rPr>
+              <a:t>Exporta tambien la imagen a la carpeta de tu Proyecto Integrador. Esa copia es para tu informe; no reemplaza la respuesta en la plataforma.</a:t>
+            </a:r>
+          </a:p>
+        </p:txBody>
+      </p:sp>
+      <p:sp>
+        <p:nvSpPr>
+          <p:cNvPr id="22" name="TextBox 21"/>
+          <p:cNvSpPr txBox="1"/>
+          <p:nvPr/>
+        </p:nvSpPr>
+        <p:spPr>
+          <a:xfrm>
+            <a:off x="11185855" y="6473952"/>
+            <a:ext cx="640080" cy="274320"/>
+          </a:xfrm>
+          <a:prstGeom prst="rect">
+            <a:avLst/>
+          </a:prstGeom>
+          <a:noFill/>
+        </p:spPr>
+        <p:txBody>
+          <a:bodyPr wrap="square">
+            <a:spAutoFit/>
+          </a:bodyPr>
+          <a:lstStyle/>
+          <a:p>
+            <a:pPr algn="r"/>
+            <a:r>
+              <a:rPr sz="1100" b="0" i="0">
+                <a:solidFill>
+                  <a:srgbClr val="666666"/>
+                </a:solidFill>
+                <a:latin typeface="Calibri"/>
+              </a:rPr>
+              <a:t>19</a:t>
             </a:r>
           </a:p>
         </p:txBody>
@@ -4981,6 +8222,1511 @@
 </p:sld>
 </file>
 
+<file path=ppt/slides/slide20.xml><?xml version="1.0" encoding="utf-8"?>
+<p:sld xmlns:a="http://schemas.openxmlformats.org/drawingml/2006/main" xmlns:p="http://schemas.openxmlformats.org/presentationml/2006/main" xmlns:r="http://schemas.openxmlformats.org/officeDocument/2006/relationships">
+  <p:cSld>
+    <p:bg>
+      <p:bgPr>
+        <a:solidFill>
+          <a:srgbClr val="FFFFFF"/>
+        </a:solidFill>
+        <a:effectLst/>
+      </p:bgPr>
+    </p:bg>
+    <p:spTree>
+      <p:nvGrpSpPr>
+        <p:cNvPr id="1" name=""/>
+        <p:cNvGrpSpPr/>
+        <p:nvPr/>
+      </p:nvGrpSpPr>
+      <p:grpSpPr/>
+      <p:sp>
+        <p:nvSpPr>
+          <p:cNvPr id="2" name="Rectangle 1"/>
+          <p:cNvSpPr/>
+          <p:nvPr/>
+        </p:nvSpPr>
+        <p:spPr>
+          <a:xfrm>
+            <a:off x="0" y="0"/>
+            <a:ext cx="12191695" cy="960120"/>
+          </a:xfrm>
+          <a:prstGeom prst="rect">
+            <a:avLst/>
+          </a:prstGeom>
+          <a:solidFill>
+            <a:srgbClr val="095292"/>
+          </a:solidFill>
+          <a:ln>
+            <a:noFill/>
+          </a:ln>
+        </p:spPr>
+        <p:style>
+          <a:lnRef idx="1">
+            <a:schemeClr val="accent1"/>
+          </a:lnRef>
+          <a:fillRef idx="3">
+            <a:schemeClr val="accent1"/>
+          </a:fillRef>
+          <a:effectRef idx="2">
+            <a:schemeClr val="accent1"/>
+          </a:effectRef>
+          <a:fontRef idx="minor">
+            <a:schemeClr val="lt1"/>
+          </a:fontRef>
+        </p:style>
+        <p:txBody>
+          <a:bodyPr rtlCol="0" anchor="ctr"/>
+          <a:lstStyle/>
+          <a:p>
+            <a:pPr algn="ctr"/>
+          </a:p>
+        </p:txBody>
+      </p:sp>
+      <p:sp>
+        <p:nvSpPr>
+          <p:cNvPr id="3" name="Rectangle 2"/>
+          <p:cNvSpPr/>
+          <p:nvPr/>
+        </p:nvSpPr>
+        <p:spPr>
+          <a:xfrm>
+            <a:off x="0" y="960120"/>
+            <a:ext cx="12191695" cy="41148"/>
+          </a:xfrm>
+          <a:prstGeom prst="rect">
+            <a:avLst/>
+          </a:prstGeom>
+          <a:solidFill>
+            <a:srgbClr val="FFD000"/>
+          </a:solidFill>
+          <a:ln>
+            <a:noFill/>
+          </a:ln>
+        </p:spPr>
+        <p:style>
+          <a:lnRef idx="1">
+            <a:schemeClr val="accent1"/>
+          </a:lnRef>
+          <a:fillRef idx="3">
+            <a:schemeClr val="accent1"/>
+          </a:fillRef>
+          <a:effectRef idx="2">
+            <a:schemeClr val="accent1"/>
+          </a:effectRef>
+          <a:fontRef idx="minor">
+            <a:schemeClr val="lt1"/>
+          </a:fontRef>
+        </p:style>
+        <p:txBody>
+          <a:bodyPr rtlCol="0" anchor="ctr"/>
+          <a:lstStyle/>
+          <a:p>
+            <a:pPr algn="ctr"/>
+          </a:p>
+        </p:txBody>
+      </p:sp>
+      <p:sp>
+        <p:nvSpPr>
+          <p:cNvPr id="4" name="TextBox 3"/>
+          <p:cNvSpPr txBox="1"/>
+          <p:nvPr/>
+        </p:nvSpPr>
+        <p:spPr>
+          <a:xfrm>
+            <a:off x="457200" y="164592"/>
+            <a:ext cx="11277295" cy="502920"/>
+          </a:xfrm>
+          <a:prstGeom prst="rect">
+            <a:avLst/>
+          </a:prstGeom>
+          <a:noFill/>
+        </p:spPr>
+        <p:txBody>
+          <a:bodyPr wrap="square">
+            <a:spAutoFit/>
+          </a:bodyPr>
+          <a:lstStyle/>
+          <a:p>
+            <a:r>
+              <a:rPr sz="2600" b="1" i="0">
+                <a:solidFill>
+                  <a:srgbClr val="FFFFFF"/>
+                </a:solidFill>
+                <a:latin typeface="Calibri"/>
+              </a:rPr>
+              <a:t>PI CloudLite — entregable de hoy</a:t>
+            </a:r>
+          </a:p>
+        </p:txBody>
+      </p:sp>
+      <p:sp>
+        <p:nvSpPr>
+          <p:cNvPr id="5" name="TextBox 4"/>
+          <p:cNvSpPr txBox="1"/>
+          <p:nvPr/>
+        </p:nvSpPr>
+        <p:spPr>
+          <a:xfrm>
+            <a:off x="457200" y="1170432"/>
+            <a:ext cx="11277295" cy="5230368"/>
+          </a:xfrm>
+          <a:prstGeom prst="rect">
+            <a:avLst/>
+          </a:prstGeom>
+          <a:noFill/>
+        </p:spPr>
+        <p:txBody>
+          <a:bodyPr wrap="square">
+            <a:spAutoFit/>
+          </a:bodyPr>
+          <a:lstStyle/>
+          <a:p>
+            <a:pPr>
+              <a:spcAft>
+                <a:spcPts val="800"/>
+              </a:spcAft>
+            </a:pPr>
+            <a:r>
+              <a:rPr sz="2000" b="0" i="0">
+                <a:solidFill>
+                  <a:srgbClr val="333333"/>
+                </a:solidFill>
+                <a:latin typeface="Calibri"/>
+              </a:rPr>
+              <a:t>–   </a:t>
+            </a:r>
+            <a:r>
+              <a:rPr sz="2000" b="1" i="0">
+                <a:solidFill>
+                  <a:srgbClr val="333333"/>
+                </a:solidFill>
+                <a:latin typeface="Calibri"/>
+              </a:rPr>
+              <a:t>Entregable:</a:t>
+            </a:r>
+            <a:r>
+              <a:rPr sz="2000" b="0" i="0">
+                <a:solidFill>
+                  <a:srgbClr val="333333"/>
+                </a:solidFill>
+                <a:latin typeface="Calibri"/>
+              </a:rPr>
+              <a:t> Paquete v1: Context + Containers + Deployment + Dockerfile + Actions + informe 60%+</a:t>
+            </a:r>
+          </a:p>
+          <a:p>
+            <a:pPr>
+              <a:spcAft>
+                <a:spcPts val="800"/>
+              </a:spcAft>
+            </a:pPr>
+            <a:r>
+              <a:rPr sz="2000" b="0" i="0">
+                <a:solidFill>
+                  <a:srgbClr val="333333"/>
+                </a:solidFill>
+                <a:latin typeface="Calibri"/>
+              </a:rPr>
+              <a:t>–   Herramienta: </a:t>
+            </a:r>
+            <a:r>
+              <a:rPr sz="2000" b="1" i="0">
+                <a:solidFill>
+                  <a:srgbClr val="333333"/>
+                </a:solidFill>
+                <a:latin typeface="Calibri"/>
+              </a:rPr>
+              <a:t>draw.io · GitHub · Google Docs</a:t>
+            </a:r>
+          </a:p>
+          <a:p>
+            <a:pPr>
+              <a:spcAft>
+                <a:spcPts val="800"/>
+              </a:spcAft>
+            </a:pPr>
+            <a:r>
+              <a:rPr sz="2000" b="0" i="0">
+                <a:solidFill>
+                  <a:srgbClr val="333333"/>
+                </a:solidFill>
+                <a:latin typeface="Calibri"/>
+              </a:rPr>
+              <a:t>–   Todo lo que construyan hoy entra al </a:t>
+            </a:r>
+            <a:r>
+              <a:rPr sz="2000" b="1" i="0">
+                <a:solidFill>
+                  <a:srgbClr val="333333"/>
+                </a:solidFill>
+                <a:latin typeface="Calibri"/>
+              </a:rPr>
+              <a:t>informe/repo del PI</a:t>
+            </a:r>
+            <a:r>
+              <a:rPr sz="2000" b="0" i="0">
+                <a:solidFill>
+                  <a:srgbClr val="333333"/>
+                </a:solidFill>
+                <a:latin typeface="Calibri"/>
+              </a:rPr>
+              <a:t> (no es lab suelto).</a:t>
+            </a:r>
+          </a:p>
+          <a:p>
+            <a:pPr>
+              <a:spcAft>
+                <a:spcPts val="800"/>
+              </a:spcAft>
+            </a:pPr>
+            <a:r>
+              <a:rPr sz="2000" b="0" i="0">
+                <a:solidFill>
+                  <a:srgbClr val="333333"/>
+                </a:solidFill>
+                <a:latin typeface="Calibri"/>
+              </a:rPr>
+              <a:t>–   Individual por defecto · el docente puede autorizar equipos de 2–3; la entrega en la plataforma del curso siempre es individual.</a:t>
+            </a:r>
+          </a:p>
+        </p:txBody>
+      </p:sp>
+      <p:sp>
+        <p:nvSpPr>
+          <p:cNvPr id="6" name="TextBox 5"/>
+          <p:cNvSpPr txBox="1"/>
+          <p:nvPr/>
+        </p:nvSpPr>
+        <p:spPr>
+          <a:xfrm>
+            <a:off x="11185855" y="6473952"/>
+            <a:ext cx="640080" cy="274320"/>
+          </a:xfrm>
+          <a:prstGeom prst="rect">
+            <a:avLst/>
+          </a:prstGeom>
+          <a:noFill/>
+        </p:spPr>
+        <p:txBody>
+          <a:bodyPr wrap="square">
+            <a:spAutoFit/>
+          </a:bodyPr>
+          <a:lstStyle/>
+          <a:p>
+            <a:pPr algn="r"/>
+            <a:r>
+              <a:rPr sz="1100" b="0" i="0">
+                <a:solidFill>
+                  <a:srgbClr val="666666"/>
+                </a:solidFill>
+                <a:latin typeface="Calibri"/>
+              </a:rPr>
+              <a:t>20</a:t>
+            </a:r>
+          </a:p>
+        </p:txBody>
+      </p:sp>
+    </p:spTree>
+  </p:cSld>
+  <p:clrMapOvr>
+    <a:masterClrMapping/>
+  </p:clrMapOvr>
+</p:sld>
+</file>
+
+<file path=ppt/slides/slide21.xml><?xml version="1.0" encoding="utf-8"?>
+<p:sld xmlns:a="http://schemas.openxmlformats.org/drawingml/2006/main" xmlns:p="http://schemas.openxmlformats.org/presentationml/2006/main" xmlns:r="http://schemas.openxmlformats.org/officeDocument/2006/relationships">
+  <p:cSld>
+    <p:bg>
+      <p:bgPr>
+        <a:solidFill>
+          <a:srgbClr val="FFFFFF"/>
+        </a:solidFill>
+        <a:effectLst/>
+      </p:bgPr>
+    </p:bg>
+    <p:spTree>
+      <p:nvGrpSpPr>
+        <p:cNvPr id="1" name=""/>
+        <p:cNvGrpSpPr/>
+        <p:nvPr/>
+      </p:nvGrpSpPr>
+      <p:grpSpPr/>
+      <p:sp>
+        <p:nvSpPr>
+          <p:cNvPr id="2" name="Rectangle 1"/>
+          <p:cNvSpPr/>
+          <p:nvPr/>
+        </p:nvSpPr>
+        <p:spPr>
+          <a:xfrm>
+            <a:off x="0" y="0"/>
+            <a:ext cx="12191695" cy="960120"/>
+          </a:xfrm>
+          <a:prstGeom prst="rect">
+            <a:avLst/>
+          </a:prstGeom>
+          <a:solidFill>
+            <a:srgbClr val="095292"/>
+          </a:solidFill>
+          <a:ln>
+            <a:noFill/>
+          </a:ln>
+        </p:spPr>
+        <p:style>
+          <a:lnRef idx="1">
+            <a:schemeClr val="accent1"/>
+          </a:lnRef>
+          <a:fillRef idx="3">
+            <a:schemeClr val="accent1"/>
+          </a:fillRef>
+          <a:effectRef idx="2">
+            <a:schemeClr val="accent1"/>
+          </a:effectRef>
+          <a:fontRef idx="minor">
+            <a:schemeClr val="lt1"/>
+          </a:fontRef>
+        </p:style>
+        <p:txBody>
+          <a:bodyPr rtlCol="0" anchor="ctr"/>
+          <a:lstStyle/>
+          <a:p>
+            <a:pPr algn="ctr"/>
+          </a:p>
+        </p:txBody>
+      </p:sp>
+      <p:sp>
+        <p:nvSpPr>
+          <p:cNvPr id="3" name="Rectangle 2"/>
+          <p:cNvSpPr/>
+          <p:nvPr/>
+        </p:nvSpPr>
+        <p:spPr>
+          <a:xfrm>
+            <a:off x="0" y="960120"/>
+            <a:ext cx="12191695" cy="41148"/>
+          </a:xfrm>
+          <a:prstGeom prst="rect">
+            <a:avLst/>
+          </a:prstGeom>
+          <a:solidFill>
+            <a:srgbClr val="FFD000"/>
+          </a:solidFill>
+          <a:ln>
+            <a:noFill/>
+          </a:ln>
+        </p:spPr>
+        <p:style>
+          <a:lnRef idx="1">
+            <a:schemeClr val="accent1"/>
+          </a:lnRef>
+          <a:fillRef idx="3">
+            <a:schemeClr val="accent1"/>
+          </a:fillRef>
+          <a:effectRef idx="2">
+            <a:schemeClr val="accent1"/>
+          </a:effectRef>
+          <a:fontRef idx="minor">
+            <a:schemeClr val="lt1"/>
+          </a:fontRef>
+        </p:style>
+        <p:txBody>
+          <a:bodyPr rtlCol="0" anchor="ctr"/>
+          <a:lstStyle/>
+          <a:p>
+            <a:pPr algn="ctr"/>
+          </a:p>
+        </p:txBody>
+      </p:sp>
+      <p:sp>
+        <p:nvSpPr>
+          <p:cNvPr id="4" name="TextBox 3"/>
+          <p:cNvSpPr txBox="1"/>
+          <p:nvPr/>
+        </p:nvSpPr>
+        <p:spPr>
+          <a:xfrm>
+            <a:off x="457200" y="164592"/>
+            <a:ext cx="11277295" cy="502920"/>
+          </a:xfrm>
+          <a:prstGeom prst="rect">
+            <a:avLst/>
+          </a:prstGeom>
+          <a:noFill/>
+        </p:spPr>
+        <p:txBody>
+          <a:bodyPr wrap="square">
+            <a:spAutoFit/>
+          </a:bodyPr>
+          <a:lstStyle/>
+          <a:p>
+            <a:r>
+              <a:rPr sz="2600" b="1" i="0">
+                <a:solidFill>
+                  <a:srgbClr val="FFFFFF"/>
+                </a:solidFill>
+                <a:latin typeface="Calibri"/>
+              </a:rPr>
+              <a:t>Manos a la obra (paso a paso)</a:t>
+            </a:r>
+          </a:p>
+        </p:txBody>
+      </p:sp>
+      <p:sp>
+        <p:nvSpPr>
+          <p:cNvPr id="5" name="TextBox 4"/>
+          <p:cNvSpPr txBox="1"/>
+          <p:nvPr/>
+        </p:nvSpPr>
+        <p:spPr>
+          <a:xfrm>
+            <a:off x="457200" y="1170432"/>
+            <a:ext cx="11277295" cy="5230368"/>
+          </a:xfrm>
+          <a:prstGeom prst="rect">
+            <a:avLst/>
+          </a:prstGeom>
+          <a:noFill/>
+        </p:spPr>
+        <p:txBody>
+          <a:bodyPr wrap="square">
+            <a:spAutoFit/>
+          </a:bodyPr>
+          <a:lstStyle/>
+          <a:p>
+            <a:pPr>
+              <a:spcAft>
+                <a:spcPts val="800"/>
+              </a:spcAft>
+            </a:pPr>
+            <a:r>
+              <a:rPr sz="1700" b="1" i="0">
+                <a:solidFill>
+                  <a:srgbClr val="333333"/>
+                </a:solidFill>
+                <a:latin typeface="Calibri"/>
+              </a:rPr>
+              <a:t>1.</a:t>
+            </a:r>
+            <a:r>
+              <a:rPr sz="1700" b="0" i="0">
+                <a:solidFill>
+                  <a:srgbClr val="333333"/>
+                </a:solidFill>
+                <a:latin typeface="Calibri"/>
+              </a:rPr>
+              <a:t> Paso 1: completen el checklist de 10 filas del paquete v1 marcando cada evidencia como si, no o parcial y pegando la ruta o el enlace exacto de cada una, verificando que ninguna fila marcada como si quede sin ruta verificable, porque una fila sin enlace se califica como no.</a:t>
+            </a:r>
+          </a:p>
+          <a:p>
+            <a:pPr>
+              <a:spcAft>
+                <a:spcPts val="800"/>
+              </a:spcAft>
+            </a:pPr>
+            <a:r>
+              <a:rPr sz="1700" b="0" i="0">
+                <a:solidFill>
+                  <a:srgbClr val="333333"/>
+                </a:solidFill>
+                <a:latin typeface="Calibri"/>
+              </a:rPr>
+              <a:t>–   </a:t>
+            </a:r>
+            <a:r>
+              <a:rPr sz="1700" b="1" i="0">
+                <a:solidFill>
+                  <a:srgbClr val="333333"/>
+                </a:solidFill>
+                <a:latin typeface="Calibri"/>
+              </a:rPr>
+              <a:t>2.</a:t>
+            </a:r>
+            <a:r>
+              <a:rPr sz="1700" b="0" i="0">
+                <a:solidFill>
+                  <a:srgbClr val="333333"/>
+                </a:solidFill>
+                <a:latin typeface="Calibri"/>
+              </a:rPr>
+              <a:t> Paso 2: hagan la reconciliacion de nombres llenando la tabla de 5 filas que compara como se llama cada elemento en el C4Container, en el C4Deployment, en el Dockerfile o el ci.yml y en el informe, verificando que la columna de nombre canonico sea identica en las cuatro y aplicando la correccion en el artefacto que este desalineado.</a:t>
+            </a:r>
+          </a:p>
+          <a:p>
+            <a:pPr>
+              <a:spcAft>
+                <a:spcPts val="800"/>
+              </a:spcAft>
+            </a:pPr>
+            <a:r>
+              <a:rPr sz="1700" b="0" i="0">
+                <a:solidFill>
+                  <a:srgbClr val="333333"/>
+                </a:solidFill>
+                <a:latin typeface="Calibri"/>
+              </a:rPr>
+              <a:t>–   </a:t>
+            </a:r>
+            <a:r>
+              <a:rPr sz="1700" b="1" i="0">
+                <a:solidFill>
+                  <a:srgbClr val="333333"/>
+                </a:solidFill>
+                <a:latin typeface="Calibri"/>
+              </a:rPr>
+              <a:t>3.</a:t>
+            </a:r>
+            <a:r>
+              <a:rPr sz="1700" b="0" i="0">
+                <a:solidFill>
+                  <a:srgbClr val="333333"/>
+                </a:solidFill>
+                <a:latin typeface="Calibri"/>
+              </a:rPr>
+              <a:t> Paso 3: escriban en la plataforma del curso el diagrama C4Component del interior de la API con 5 componentes y sus relaciones hacia la base de datos, la cola y el proveedor de identidad, verificando al renderizar que ningun componente sea un contenedor de la Clase 4 disfrazado y que el contenedor contenedor de la frontera se llame igual que en el C4Container.</a:t>
+            </a:r>
+          </a:p>
+          <a:p>
+            <a:pPr>
+              <a:spcAft>
+                <a:spcPts val="800"/>
+              </a:spcAft>
+            </a:pPr>
+            <a:r>
+              <a:rPr sz="1700" b="0" i="0">
+                <a:solidFill>
+                  <a:srgbClr val="333333"/>
+                </a:solidFill>
+                <a:latin typeface="Calibri"/>
+              </a:rPr>
+              <a:t>–   </a:t>
+            </a:r>
+            <a:r>
+              <a:rPr sz="1700" b="1" i="0">
+                <a:solidFill>
+                  <a:srgbClr val="333333"/>
+                </a:solidFill>
+                <a:latin typeface="Calibri"/>
+              </a:rPr>
+              <a:t>4.</a:t>
+            </a:r>
+            <a:r>
+              <a:rPr sz="1700" b="0" i="0">
+                <a:solidFill>
+                  <a:srgbClr val="333333"/>
+                </a:solidFill>
+                <a:latin typeface="Calibri"/>
+              </a:rPr>
+              <a:t> Paso 4: escriban el backlog de 5 items priorizados hacia la Clase 12 con hueco detectado, accion, responsable y fecha, verificando que cada item se pueda cerrar en una semana y que al menos uno provenga del feedback del docente recibido hoy en la cola de revision.</a:t>
+            </a:r>
+          </a:p>
+          <a:p>
+            <a:pPr>
+              <a:spcAft>
+                <a:spcPts val="800"/>
+              </a:spcAft>
+            </a:pPr>
+            <a:r>
+              <a:rPr sz="1700" b="0" i="0">
+                <a:solidFill>
+                  <a:srgbClr val="333333"/>
+                </a:solidFill>
+                <a:latin typeface="Calibri"/>
+              </a:rPr>
+              <a:t>–   </a:t>
+            </a:r>
+            <a:r>
+              <a:rPr sz="1700" b="1" i="0">
+                <a:solidFill>
+                  <a:srgbClr val="333333"/>
+                </a:solidFill>
+                <a:latin typeface="Calibri"/>
+              </a:rPr>
+              <a:t>5.</a:t>
+            </a:r>
+            <a:r>
+              <a:rPr sz="1700" b="0" i="0">
+                <a:solidFill>
+                  <a:srgbClr val="333333"/>
+                </a:solidFill>
+                <a:latin typeface="Calibri"/>
+              </a:rPr>
+              <a:t> Paso 5: empaqueten el ZIP o el repositorio con los diagramas, el Dockerfile, el ci.yml y el informe al 60 por ciento, y suban las 5 preguntas a la plataforma del curso (modulo Talleres) antes del en la fecha que indique el docente, verificando que el paquete se pueda abrir en otra maquina y que el informe enlace cada evidencia por su ruta dentro del paquete.</a:t>
+            </a:r>
+          </a:p>
+        </p:txBody>
+      </p:sp>
+      <p:sp>
+        <p:nvSpPr>
+          <p:cNvPr id="6" name="TextBox 5"/>
+          <p:cNvSpPr txBox="1"/>
+          <p:nvPr/>
+        </p:nvSpPr>
+        <p:spPr>
+          <a:xfrm>
+            <a:off x="11185855" y="6473952"/>
+            <a:ext cx="640080" cy="274320"/>
+          </a:xfrm>
+          <a:prstGeom prst="rect">
+            <a:avLst/>
+          </a:prstGeom>
+          <a:noFill/>
+        </p:spPr>
+        <p:txBody>
+          <a:bodyPr wrap="square">
+            <a:spAutoFit/>
+          </a:bodyPr>
+          <a:lstStyle/>
+          <a:p>
+            <a:pPr algn="r"/>
+            <a:r>
+              <a:rPr sz="1100" b="0" i="0">
+                <a:solidFill>
+                  <a:srgbClr val="666666"/>
+                </a:solidFill>
+                <a:latin typeface="Calibri"/>
+              </a:rPr>
+              <a:t>21</a:t>
+            </a:r>
+          </a:p>
+        </p:txBody>
+      </p:sp>
+    </p:spTree>
+  </p:cSld>
+  <p:clrMapOvr>
+    <a:masterClrMapping/>
+  </p:clrMapOvr>
+</p:sld>
+</file>
+
+<file path=ppt/slides/slide22.xml><?xml version="1.0" encoding="utf-8"?>
+<p:sld xmlns:a="http://schemas.openxmlformats.org/drawingml/2006/main" xmlns:p="http://schemas.openxmlformats.org/presentationml/2006/main" xmlns:r="http://schemas.openxmlformats.org/officeDocument/2006/relationships">
+  <p:cSld>
+    <p:bg>
+      <p:bgPr>
+        <a:solidFill>
+          <a:srgbClr val="FFFFFF"/>
+        </a:solidFill>
+        <a:effectLst/>
+      </p:bgPr>
+    </p:bg>
+    <p:spTree>
+      <p:nvGrpSpPr>
+        <p:cNvPr id="1" name=""/>
+        <p:cNvGrpSpPr/>
+        <p:nvPr/>
+      </p:nvGrpSpPr>
+      <p:grpSpPr/>
+      <p:sp>
+        <p:nvSpPr>
+          <p:cNvPr id="2" name="Rectangle 1"/>
+          <p:cNvSpPr/>
+          <p:nvPr/>
+        </p:nvSpPr>
+        <p:spPr>
+          <a:xfrm>
+            <a:off x="0" y="0"/>
+            <a:ext cx="12191695" cy="960120"/>
+          </a:xfrm>
+          <a:prstGeom prst="rect">
+            <a:avLst/>
+          </a:prstGeom>
+          <a:solidFill>
+            <a:srgbClr val="095292"/>
+          </a:solidFill>
+          <a:ln>
+            <a:noFill/>
+          </a:ln>
+        </p:spPr>
+        <p:style>
+          <a:lnRef idx="1">
+            <a:schemeClr val="accent1"/>
+          </a:lnRef>
+          <a:fillRef idx="3">
+            <a:schemeClr val="accent1"/>
+          </a:fillRef>
+          <a:effectRef idx="2">
+            <a:schemeClr val="accent1"/>
+          </a:effectRef>
+          <a:fontRef idx="minor">
+            <a:schemeClr val="lt1"/>
+          </a:fontRef>
+        </p:style>
+        <p:txBody>
+          <a:bodyPr rtlCol="0" anchor="ctr"/>
+          <a:lstStyle/>
+          <a:p>
+            <a:pPr algn="ctr"/>
+          </a:p>
+        </p:txBody>
+      </p:sp>
+      <p:sp>
+        <p:nvSpPr>
+          <p:cNvPr id="3" name="Rectangle 2"/>
+          <p:cNvSpPr/>
+          <p:nvPr/>
+        </p:nvSpPr>
+        <p:spPr>
+          <a:xfrm>
+            <a:off x="0" y="960120"/>
+            <a:ext cx="12191695" cy="41148"/>
+          </a:xfrm>
+          <a:prstGeom prst="rect">
+            <a:avLst/>
+          </a:prstGeom>
+          <a:solidFill>
+            <a:srgbClr val="FFD000"/>
+          </a:solidFill>
+          <a:ln>
+            <a:noFill/>
+          </a:ln>
+        </p:spPr>
+        <p:style>
+          <a:lnRef idx="1">
+            <a:schemeClr val="accent1"/>
+          </a:lnRef>
+          <a:fillRef idx="3">
+            <a:schemeClr val="accent1"/>
+          </a:fillRef>
+          <a:effectRef idx="2">
+            <a:schemeClr val="accent1"/>
+          </a:effectRef>
+          <a:fontRef idx="minor">
+            <a:schemeClr val="lt1"/>
+          </a:fontRef>
+        </p:style>
+        <p:txBody>
+          <a:bodyPr rtlCol="0" anchor="ctr"/>
+          <a:lstStyle/>
+          <a:p>
+            <a:pPr algn="ctr"/>
+          </a:p>
+        </p:txBody>
+      </p:sp>
+      <p:sp>
+        <p:nvSpPr>
+          <p:cNvPr id="4" name="TextBox 3"/>
+          <p:cNvSpPr txBox="1"/>
+          <p:nvPr/>
+        </p:nvSpPr>
+        <p:spPr>
+          <a:xfrm>
+            <a:off x="457200" y="164592"/>
+            <a:ext cx="11277295" cy="502920"/>
+          </a:xfrm>
+          <a:prstGeom prst="rect">
+            <a:avLst/>
+          </a:prstGeom>
+          <a:noFill/>
+        </p:spPr>
+        <p:txBody>
+          <a:bodyPr wrap="square">
+            <a:spAutoFit/>
+          </a:bodyPr>
+          <a:lstStyle/>
+          <a:p>
+            <a:r>
+              <a:rPr sz="2600" b="1" i="0">
+                <a:solidFill>
+                  <a:srgbClr val="FFFFFF"/>
+                </a:solidFill>
+                <a:latin typeface="Calibri"/>
+              </a:rPr>
+              <a:t>Para continuar (PI)</a:t>
+            </a:r>
+          </a:p>
+        </p:txBody>
+      </p:sp>
+      <p:sp>
+        <p:nvSpPr>
+          <p:cNvPr id="5" name="Rounded Rectangle 4"/>
+          <p:cNvSpPr/>
+          <p:nvPr/>
+        </p:nvSpPr>
+        <p:spPr>
+          <a:xfrm>
+            <a:off x="457200" y="1261872"/>
+            <a:ext cx="11277295" cy="1051560"/>
+          </a:xfrm>
+          <a:prstGeom prst="roundRect">
+            <a:avLst>
+              <a:gd name="adj" fmla="val 12000"/>
+            </a:avLst>
+          </a:prstGeom>
+          <a:solidFill>
+            <a:srgbClr val="E8F4FA"/>
+          </a:solidFill>
+          <a:ln>
+            <a:noFill/>
+          </a:ln>
+        </p:spPr>
+        <p:style>
+          <a:lnRef idx="1">
+            <a:schemeClr val="accent1"/>
+          </a:lnRef>
+          <a:fillRef idx="3">
+            <a:schemeClr val="accent1"/>
+          </a:fillRef>
+          <a:effectRef idx="2">
+            <a:schemeClr val="accent1"/>
+          </a:effectRef>
+          <a:fontRef idx="minor">
+            <a:schemeClr val="lt1"/>
+          </a:fontRef>
+        </p:style>
+        <p:txBody>
+          <a:bodyPr rtlCol="0" anchor="ctr"/>
+          <a:lstStyle/>
+          <a:p>
+            <a:pPr algn="ctr"/>
+          </a:p>
+        </p:txBody>
+      </p:sp>
+      <p:sp>
+        <p:nvSpPr>
+          <p:cNvPr id="6" name="Rectangle 5"/>
+          <p:cNvSpPr/>
+          <p:nvPr/>
+        </p:nvSpPr>
+        <p:spPr>
+          <a:xfrm>
+            <a:off x="457200" y="1261872"/>
+            <a:ext cx="128016" cy="1051560"/>
+          </a:xfrm>
+          <a:prstGeom prst="rect">
+            <a:avLst/>
+          </a:prstGeom>
+          <a:solidFill>
+            <a:srgbClr val="269CCB"/>
+          </a:solidFill>
+          <a:ln>
+            <a:noFill/>
+          </a:ln>
+        </p:spPr>
+        <p:style>
+          <a:lnRef idx="1">
+            <a:schemeClr val="accent1"/>
+          </a:lnRef>
+          <a:fillRef idx="3">
+            <a:schemeClr val="accent1"/>
+          </a:fillRef>
+          <a:effectRef idx="2">
+            <a:schemeClr val="accent1"/>
+          </a:effectRef>
+          <a:fontRef idx="minor">
+            <a:schemeClr val="lt1"/>
+          </a:fontRef>
+        </p:style>
+        <p:txBody>
+          <a:bodyPr rtlCol="0" anchor="ctr"/>
+          <a:lstStyle/>
+          <a:p>
+            <a:pPr algn="ctr"/>
+          </a:p>
+        </p:txBody>
+      </p:sp>
+      <p:sp>
+        <p:nvSpPr>
+          <p:cNvPr id="7" name="TextBox 6"/>
+          <p:cNvSpPr txBox="1"/>
+          <p:nvPr/>
+        </p:nvSpPr>
+        <p:spPr>
+          <a:xfrm>
+            <a:off x="777240" y="1399031"/>
+            <a:ext cx="10774375" cy="822959"/>
+          </a:xfrm>
+          <a:prstGeom prst="rect">
+            <a:avLst/>
+          </a:prstGeom>
+          <a:noFill/>
+        </p:spPr>
+        <p:txBody>
+          <a:bodyPr wrap="square">
+            <a:spAutoFit/>
+          </a:bodyPr>
+          <a:lstStyle/>
+          <a:p>
+            <a:r>
+              <a:rPr sz="1200" b="1" i="0">
+                <a:solidFill>
+                  <a:srgbClr val="269CCB"/>
+                </a:solidFill>
+                <a:latin typeface="Calibri"/>
+              </a:rPr>
+              <a:t>Info</a:t>
+            </a:r>
+          </a:p>
+          <a:p>
+            <a:pPr>
+              <a:spcBef>
+                <a:spcPts val="400"/>
+              </a:spcBef>
+            </a:pPr>
+            <a:r>
+              <a:rPr sz="1400" b="0" i="0">
+                <a:solidFill>
+                  <a:srgbClr val="333333"/>
+                </a:solidFill>
+                <a:latin typeface="Calibri"/>
+              </a:rPr>
+              <a:t>Entregable: Paquete v1: Context + Containers + Deployment + Dockerfile + Actions + informe 60%+</a:t>
+            </a:r>
+          </a:p>
+        </p:txBody>
+      </p:sp>
+      <p:sp>
+        <p:nvSpPr>
+          <p:cNvPr id="8" name="Rounded Rectangle 7"/>
+          <p:cNvSpPr/>
+          <p:nvPr/>
+        </p:nvSpPr>
+        <p:spPr>
+          <a:xfrm>
+            <a:off x="457200" y="2478024"/>
+            <a:ext cx="11277295" cy="1051560"/>
+          </a:xfrm>
+          <a:prstGeom prst="roundRect">
+            <a:avLst>
+              <a:gd name="adj" fmla="val 12000"/>
+            </a:avLst>
+          </a:prstGeom>
+          <a:solidFill>
+            <a:srgbClr val="FFF8E1"/>
+          </a:solidFill>
+          <a:ln>
+            <a:noFill/>
+          </a:ln>
+        </p:spPr>
+        <p:style>
+          <a:lnRef idx="1">
+            <a:schemeClr val="accent1"/>
+          </a:lnRef>
+          <a:fillRef idx="3">
+            <a:schemeClr val="accent1"/>
+          </a:fillRef>
+          <a:effectRef idx="2">
+            <a:schemeClr val="accent1"/>
+          </a:effectRef>
+          <a:fontRef idx="minor">
+            <a:schemeClr val="lt1"/>
+          </a:fontRef>
+        </p:style>
+        <p:txBody>
+          <a:bodyPr rtlCol="0" anchor="ctr"/>
+          <a:lstStyle/>
+          <a:p>
+            <a:pPr algn="ctr"/>
+          </a:p>
+        </p:txBody>
+      </p:sp>
+      <p:sp>
+        <p:nvSpPr>
+          <p:cNvPr id="9" name="Rectangle 8"/>
+          <p:cNvSpPr/>
+          <p:nvPr/>
+        </p:nvSpPr>
+        <p:spPr>
+          <a:xfrm>
+            <a:off x="457200" y="2478024"/>
+            <a:ext cx="128016" cy="1051560"/>
+          </a:xfrm>
+          <a:prstGeom prst="rect">
+            <a:avLst/>
+          </a:prstGeom>
+          <a:solidFill>
+            <a:srgbClr val="FFD000"/>
+          </a:solidFill>
+          <a:ln>
+            <a:noFill/>
+          </a:ln>
+        </p:spPr>
+        <p:style>
+          <a:lnRef idx="1">
+            <a:schemeClr val="accent1"/>
+          </a:lnRef>
+          <a:fillRef idx="3">
+            <a:schemeClr val="accent1"/>
+          </a:fillRef>
+          <a:effectRef idx="2">
+            <a:schemeClr val="accent1"/>
+          </a:effectRef>
+          <a:fontRef idx="minor">
+            <a:schemeClr val="lt1"/>
+          </a:fontRef>
+        </p:style>
+        <p:txBody>
+          <a:bodyPr rtlCol="0" anchor="ctr"/>
+          <a:lstStyle/>
+          <a:p>
+            <a:pPr algn="ctr"/>
+          </a:p>
+        </p:txBody>
+      </p:sp>
+      <p:sp>
+        <p:nvSpPr>
+          <p:cNvPr id="10" name="TextBox 9"/>
+          <p:cNvSpPr txBox="1"/>
+          <p:nvPr/>
+        </p:nvSpPr>
+        <p:spPr>
+          <a:xfrm>
+            <a:off x="777240" y="2615184"/>
+            <a:ext cx="10774375" cy="822959"/>
+          </a:xfrm>
+          <a:prstGeom prst="rect">
+            <a:avLst/>
+          </a:prstGeom>
+          <a:noFill/>
+        </p:spPr>
+        <p:txBody>
+          <a:bodyPr wrap="square">
+            <a:spAutoFit/>
+          </a:bodyPr>
+          <a:lstStyle/>
+          <a:p>
+            <a:r>
+              <a:rPr sz="1200" b="1" i="0">
+                <a:solidFill>
+                  <a:srgbClr val="FFD000"/>
+                </a:solidFill>
+                <a:latin typeface="Calibri"/>
+              </a:rPr>
+              <a:t>Aclaración</a:t>
+            </a:r>
+          </a:p>
+          <a:p>
+            <a:pPr>
+              <a:spcBef>
+                <a:spcPts val="400"/>
+              </a:spcBef>
+            </a:pPr>
+            <a:r>
+              <a:rPr sz="1400" b="0" i="0">
+                <a:solidFill>
+                  <a:srgbClr val="333333"/>
+                </a:solidFill>
+                <a:latin typeface="Calibri"/>
+              </a:rPr>
+              <a:t>Subir evidencias al paquete CloudLite (Drive/repo) y a la plataforma del curso en la fecha que indique el docente.</a:t>
+            </a:r>
+          </a:p>
+        </p:txBody>
+      </p:sp>
+      <p:sp>
+        <p:nvSpPr>
+          <p:cNvPr id="11" name="Rounded Rectangle 10"/>
+          <p:cNvSpPr/>
+          <p:nvPr/>
+        </p:nvSpPr>
+        <p:spPr>
+          <a:xfrm>
+            <a:off x="457200" y="3694176"/>
+            <a:ext cx="11277295" cy="1051560"/>
+          </a:xfrm>
+          <a:prstGeom prst="roundRect">
+            <a:avLst>
+              <a:gd name="adj" fmla="val 12000"/>
+            </a:avLst>
+          </a:prstGeom>
+          <a:solidFill>
+            <a:srgbClr val="FBE4E4"/>
+          </a:solidFill>
+          <a:ln>
+            <a:noFill/>
+          </a:ln>
+        </p:spPr>
+        <p:style>
+          <a:lnRef idx="1">
+            <a:schemeClr val="accent1"/>
+          </a:lnRef>
+          <a:fillRef idx="3">
+            <a:schemeClr val="accent1"/>
+          </a:fillRef>
+          <a:effectRef idx="2">
+            <a:schemeClr val="accent1"/>
+          </a:effectRef>
+          <a:fontRef idx="minor">
+            <a:schemeClr val="lt1"/>
+          </a:fontRef>
+        </p:style>
+        <p:txBody>
+          <a:bodyPr rtlCol="0" anchor="ctr"/>
+          <a:lstStyle/>
+          <a:p>
+            <a:pPr algn="ctr"/>
+          </a:p>
+        </p:txBody>
+      </p:sp>
+      <p:sp>
+        <p:nvSpPr>
+          <p:cNvPr id="12" name="Rectangle 11"/>
+          <p:cNvSpPr/>
+          <p:nvPr/>
+        </p:nvSpPr>
+        <p:spPr>
+          <a:xfrm>
+            <a:off x="457200" y="3694176"/>
+            <a:ext cx="128016" cy="1051560"/>
+          </a:xfrm>
+          <a:prstGeom prst="rect">
+            <a:avLst/>
+          </a:prstGeom>
+          <a:solidFill>
+            <a:srgbClr val="A02030"/>
+          </a:solidFill>
+          <a:ln>
+            <a:noFill/>
+          </a:ln>
+        </p:spPr>
+        <p:style>
+          <a:lnRef idx="1">
+            <a:schemeClr val="accent1"/>
+          </a:lnRef>
+          <a:fillRef idx="3">
+            <a:schemeClr val="accent1"/>
+          </a:fillRef>
+          <a:effectRef idx="2">
+            <a:schemeClr val="accent1"/>
+          </a:effectRef>
+          <a:fontRef idx="minor">
+            <a:schemeClr val="lt1"/>
+          </a:fontRef>
+        </p:style>
+        <p:txBody>
+          <a:bodyPr rtlCol="0" anchor="ctr"/>
+          <a:lstStyle/>
+          <a:p>
+            <a:pPr algn="ctr"/>
+          </a:p>
+        </p:txBody>
+      </p:sp>
+      <p:sp>
+        <p:nvSpPr>
+          <p:cNvPr id="13" name="TextBox 12"/>
+          <p:cNvSpPr txBox="1"/>
+          <p:nvPr/>
+        </p:nvSpPr>
+        <p:spPr>
+          <a:xfrm>
+            <a:off x="777240" y="3831336"/>
+            <a:ext cx="10774375" cy="822959"/>
+          </a:xfrm>
+          <a:prstGeom prst="rect">
+            <a:avLst/>
+          </a:prstGeom>
+          <a:noFill/>
+        </p:spPr>
+        <p:txBody>
+          <a:bodyPr wrap="square">
+            <a:spAutoFit/>
+          </a:bodyPr>
+          <a:lstStyle/>
+          <a:p>
+            <a:r>
+              <a:rPr sz="1200" b="1" i="0">
+                <a:solidFill>
+                  <a:srgbClr val="A02030"/>
+                </a:solidFill>
+                <a:latin typeface="Calibri"/>
+              </a:rPr>
+              <a:t>Atención</a:t>
+            </a:r>
+          </a:p>
+          <a:p>
+            <a:pPr>
+              <a:spcBef>
+                <a:spcPts val="400"/>
+              </a:spcBef>
+            </a:pPr>
+            <a:r>
+              <a:rPr sz="1400" b="0" i="0">
+                <a:solidFill>
+                  <a:srgbClr val="333333"/>
+                </a:solidFill>
+                <a:latin typeface="Calibri"/>
+              </a:rPr>
+              <a:t>Sin cloud de pago ni instalaciones obligatorias de hipervisores/Docker Desktop.</a:t>
+            </a:r>
+          </a:p>
+        </p:txBody>
+      </p:sp>
+      <p:sp>
+        <p:nvSpPr>
+          <p:cNvPr id="14" name="TextBox 13"/>
+          <p:cNvSpPr txBox="1"/>
+          <p:nvPr/>
+        </p:nvSpPr>
+        <p:spPr>
+          <a:xfrm>
+            <a:off x="11185855" y="6473952"/>
+            <a:ext cx="640080" cy="274320"/>
+          </a:xfrm>
+          <a:prstGeom prst="rect">
+            <a:avLst/>
+          </a:prstGeom>
+          <a:noFill/>
+        </p:spPr>
+        <p:txBody>
+          <a:bodyPr wrap="square">
+            <a:spAutoFit/>
+          </a:bodyPr>
+          <a:lstStyle/>
+          <a:p>
+            <a:pPr algn="r"/>
+            <a:r>
+              <a:rPr sz="1100" b="0" i="0">
+                <a:solidFill>
+                  <a:srgbClr val="666666"/>
+                </a:solidFill>
+                <a:latin typeface="Calibri"/>
+              </a:rPr>
+              <a:t>22</a:t>
+            </a:r>
+          </a:p>
+        </p:txBody>
+      </p:sp>
+    </p:spTree>
+  </p:cSld>
+  <p:clrMapOvr>
+    <a:masterClrMapping/>
+  </p:clrMapOvr>
+</p:sld>
+</file>
+
+<file path=ppt/slides/slide23.xml><?xml version="1.0" encoding="utf-8"?>
+<p:sld xmlns:a="http://schemas.openxmlformats.org/drawingml/2006/main" xmlns:p="http://schemas.openxmlformats.org/presentationml/2006/main" xmlns:r="http://schemas.openxmlformats.org/officeDocument/2006/relationships">
+  <p:cSld>
+    <p:bg>
+      <p:bgPr>
+        <a:solidFill>
+          <a:srgbClr val="FFFFFF"/>
+        </a:solidFill>
+        <a:effectLst/>
+      </p:bgPr>
+    </p:bg>
+    <p:spTree>
+      <p:nvGrpSpPr>
+        <p:cNvPr id="1" name=""/>
+        <p:cNvGrpSpPr/>
+        <p:nvPr/>
+      </p:nvGrpSpPr>
+      <p:grpSpPr/>
+      <p:sp>
+        <p:nvSpPr>
+          <p:cNvPr id="2" name="Rectangle 1"/>
+          <p:cNvSpPr/>
+          <p:nvPr/>
+        </p:nvSpPr>
+        <p:spPr>
+          <a:xfrm>
+            <a:off x="0" y="0"/>
+            <a:ext cx="12191695" cy="164592"/>
+          </a:xfrm>
+          <a:prstGeom prst="rect">
+            <a:avLst/>
+          </a:prstGeom>
+          <a:solidFill>
+            <a:srgbClr val="269CCB"/>
+          </a:solidFill>
+          <a:ln>
+            <a:noFill/>
+          </a:ln>
+        </p:spPr>
+        <p:style>
+          <a:lnRef idx="1">
+            <a:schemeClr val="accent1"/>
+          </a:lnRef>
+          <a:fillRef idx="3">
+            <a:schemeClr val="accent1"/>
+          </a:fillRef>
+          <a:effectRef idx="2">
+            <a:schemeClr val="accent1"/>
+          </a:effectRef>
+          <a:fontRef idx="minor">
+            <a:schemeClr val="lt1"/>
+          </a:fontRef>
+        </p:style>
+        <p:txBody>
+          <a:bodyPr rtlCol="0" anchor="ctr"/>
+          <a:lstStyle/>
+          <a:p>
+            <a:pPr algn="ctr"/>
+          </a:p>
+        </p:txBody>
+      </p:sp>
+      <p:pic>
+        <p:nvPicPr>
+          <p:cNvPr id="3" name="Picture 2" descr="logo_uniajc_color.png"/>
+          <p:cNvPicPr>
+            <a:picLocks noChangeAspect="1"/>
+          </p:cNvPicPr>
+          <p:nvPr/>
+        </p:nvPicPr>
+        <p:blipFill>
+          <a:blip r:embed="rId2"/>
+          <a:stretch>
+            <a:fillRect/>
+          </a:stretch>
+        </p:blipFill>
+        <p:spPr>
+          <a:xfrm>
+            <a:off x="10271455" y="5998464"/>
+            <a:ext cx="1463040" cy="643233"/>
+          </a:xfrm>
+          <a:prstGeom prst="rect">
+            <a:avLst/>
+          </a:prstGeom>
+        </p:spPr>
+      </p:pic>
+      <p:sp>
+        <p:nvSpPr>
+          <p:cNvPr id="4" name="TextBox 3"/>
+          <p:cNvSpPr txBox="1"/>
+          <p:nvPr/>
+        </p:nvSpPr>
+        <p:spPr>
+          <a:xfrm>
+            <a:off x="457200" y="1737360"/>
+            <a:ext cx="11277295" cy="1097280"/>
+          </a:xfrm>
+          <a:prstGeom prst="rect">
+            <a:avLst/>
+          </a:prstGeom>
+          <a:noFill/>
+        </p:spPr>
+        <p:txBody>
+          <a:bodyPr wrap="square" anchor="ctr"/>
+          <a:lstStyle/>
+          <a:p>
+            <a:pPr algn="ctr"/>
+            <a:r>
+              <a:rPr sz="3400" b="1" i="0">
+                <a:solidFill>
+                  <a:srgbClr val="095292"/>
+                </a:solidFill>
+                <a:latin typeface="Calibri"/>
+              </a:rPr>
+              <a:t>Clase 11 · PI en movimiento</a:t>
+            </a:r>
+          </a:p>
+        </p:txBody>
+      </p:sp>
+      <p:sp>
+        <p:nvSpPr>
+          <p:cNvPr id="5" name="TextBox 4"/>
+          <p:cNvSpPr txBox="1"/>
+          <p:nvPr/>
+        </p:nvSpPr>
+        <p:spPr>
+          <a:xfrm>
+            <a:off x="457200" y="3017520"/>
+            <a:ext cx="11277295" cy="1645920"/>
+          </a:xfrm>
+          <a:prstGeom prst="rect">
+            <a:avLst/>
+          </a:prstGeom>
+          <a:noFill/>
+        </p:spPr>
+        <p:txBody>
+          <a:bodyPr wrap="square">
+            <a:spAutoFit/>
+          </a:bodyPr>
+          <a:lstStyle/>
+          <a:p>
+            <a:pPr algn="ctr">
+              <a:spcAft>
+                <a:spcPts val="600"/>
+              </a:spcAft>
+            </a:pPr>
+            <a:r>
+              <a:rPr sz="1600" b="0" i="0">
+                <a:solidFill>
+                  <a:srgbClr val="333333"/>
+                </a:solidFill>
+                <a:latin typeface="Calibri"/>
+              </a:rPr>
+              <a:t>Integrar diagramas v1 + checklist de avance PI</a:t>
+            </a:r>
+          </a:p>
+          <a:p>
+            <a:pPr algn="ctr">
+              <a:spcAft>
+                <a:spcPts val="600"/>
+              </a:spcAft>
+            </a:pPr>
+            <a:r>
+              <a:rPr sz="1600" b="0" i="0">
+                <a:solidFill>
+                  <a:srgbClr val="333333"/>
+                </a:solidFill>
+                <a:latin typeface="Calibri"/>
+              </a:rPr>
+              <a:t>Evidencia: Paquete v1: Context + Containers + Deployment + Dockerfile + Actions + informe 60%+</a:t>
+            </a:r>
+          </a:p>
+          <a:p>
+            <a:pPr algn="ctr">
+              <a:spcAft>
+                <a:spcPts val="600"/>
+              </a:spcAft>
+            </a:pPr>
+            <a:r>
+              <a:rPr sz="1600" b="0" i="0">
+                <a:solidFill>
+                  <a:srgbClr val="333333"/>
+                </a:solidFill>
+                <a:latin typeface="Calibri"/>
+              </a:rPr>
+              <a:t>Siguiente paso = siguiente hito del PI CloudLite</a:t>
+            </a:r>
+          </a:p>
+        </p:txBody>
+      </p:sp>
+      <p:sp>
+        <p:nvSpPr>
+          <p:cNvPr id="6" name="TextBox 5"/>
+          <p:cNvSpPr txBox="1"/>
+          <p:nvPr/>
+        </p:nvSpPr>
+        <p:spPr>
+          <a:xfrm>
+            <a:off x="457200" y="4754880"/>
+            <a:ext cx="11277295" cy="640080"/>
+          </a:xfrm>
+          <a:prstGeom prst="rect">
+            <a:avLst/>
+          </a:prstGeom>
+          <a:noFill/>
+        </p:spPr>
+        <p:txBody>
+          <a:bodyPr wrap="square">
+            <a:spAutoFit/>
+          </a:bodyPr>
+          <a:lstStyle/>
+          <a:p>
+            <a:pPr algn="ctr"/>
+            <a:r>
+              <a:rPr sz="2000" b="1" i="0">
+                <a:solidFill>
+                  <a:srgbClr val="269CCB"/>
+                </a:solidFill>
+                <a:latin typeface="Calibri"/>
+              </a:rPr>
+              <a:t>Teoría al servicio del proyecto</a:t>
+            </a:r>
+          </a:p>
+        </p:txBody>
+      </p:sp>
+    </p:spTree>
+  </p:cSld>
+  <p:clrMapOvr>
+    <a:masterClrMapping/>
+  </p:clrMapOvr>
+</p:sld>
+</file>
+
 <file path=ppt/slides/slide3.xml><?xml version="1.0" encoding="utf-8"?>
 <p:sld xmlns:a="http://schemas.openxmlformats.org/drawingml/2006/main" xmlns:p="http://schemas.openxmlformats.org/presentationml/2006/main" xmlns:r="http://schemas.openxmlformats.org/officeDocument/2006/relationships">
   <p:cSld>
@@ -5984,7 +10730,7 @@
         <p:spPr>
           <a:xfrm>
             <a:off x="0" y="0"/>
-            <a:ext cx="12191695" cy="1170432"/>
+            <a:ext cx="12191695" cy="960120"/>
           </a:xfrm>
           <a:prstGeom prst="rect">
             <a:avLst/>
@@ -6026,7 +10772,7 @@
         </p:nvSpPr>
         <p:spPr>
           <a:xfrm>
-            <a:off x="0" y="1170432"/>
+            <a:off x="0" y="960120"/>
             <a:ext cx="12191695" cy="41148"/>
           </a:xfrm>
           <a:prstGeom prst="rect">
@@ -6070,7 +10816,7 @@
         <p:spPr>
           <a:xfrm>
             <a:off x="457200" y="164592"/>
-            <a:ext cx="11277295" cy="384048"/>
+            <a:ext cx="11277295" cy="502920"/>
           </a:xfrm>
           <a:prstGeom prst="rect">
             <a:avLst/>
@@ -6090,7 +10836,7 @@
                 </a:solidFill>
                 <a:latin typeface="Calibri"/>
               </a:rPr>
-              <a:t>Herramientas de hoy</a:t>
+              <a:t>La teoria propia del dia: que es una revision de arquitectura</a:t>
             </a:r>
           </a:p>
         </p:txBody>
@@ -6103,8 +10849,8 @@
         </p:nvSpPr>
         <p:spPr>
           <a:xfrm>
-            <a:off x="457200" y="566928"/>
-            <a:ext cx="11277295" cy="411480"/>
+            <a:off x="457200" y="1170432"/>
+            <a:ext cx="11277295" cy="5230368"/>
           </a:xfrm>
           <a:prstGeom prst="rect">
             <a:avLst/>
@@ -6117,1041 +10863,106 @@
           </a:bodyPr>
           <a:lstStyle/>
           <a:p>
-            <a:r>
-              <a:rPr sz="1400" b="0" i="0">
-                <a:solidFill>
-                  <a:srgbClr val="B8D8EE"/>
-                </a:solidFill>
-                <a:latin typeface="Calibri"/>
-              </a:rPr>
-              <a:t>Gratis · navegador o free tier · sin cuenta de pago</a:t>
-            </a:r>
-          </a:p>
-        </p:txBody>
-      </p:sp>
-      <p:sp>
-        <p:nvSpPr>
-          <p:cNvPr id="6" name="Rounded Rectangle 5"/>
-          <p:cNvSpPr/>
-          <p:nvPr/>
-        </p:nvSpPr>
-        <p:spPr>
-          <a:xfrm>
-            <a:off x="457200" y="1591056"/>
-            <a:ext cx="3624986" cy="2299716"/>
-          </a:xfrm>
-          <a:prstGeom prst="roundRect">
-            <a:avLst>
-              <a:gd name="adj" fmla="val 12000"/>
-            </a:avLst>
-          </a:prstGeom>
-          <a:solidFill>
-            <a:srgbClr val="F2F2F2"/>
-          </a:solidFill>
-          <a:ln>
-            <a:noFill/>
-          </a:ln>
-        </p:spPr>
-        <p:style>
-          <a:lnRef idx="1">
-            <a:schemeClr val="accent1"/>
-          </a:lnRef>
-          <a:fillRef idx="3">
-            <a:schemeClr val="accent1"/>
-          </a:fillRef>
-          <a:effectRef idx="2">
-            <a:schemeClr val="accent1"/>
-          </a:effectRef>
-          <a:fontRef idx="minor">
-            <a:schemeClr val="lt1"/>
-          </a:fontRef>
-        </p:style>
-        <p:txBody>
-          <a:bodyPr rtlCol="0" anchor="ctr"/>
-          <a:lstStyle/>
-          <a:p>
-            <a:pPr algn="ctr"/>
-          </a:p>
-        </p:txBody>
-      </p:sp>
-      <p:sp>
-        <p:nvSpPr>
-          <p:cNvPr id="7" name="Rectangle 6"/>
-          <p:cNvSpPr/>
-          <p:nvPr/>
-        </p:nvSpPr>
-        <p:spPr>
-          <a:xfrm>
-            <a:off x="457200" y="1591056"/>
-            <a:ext cx="3624986" cy="64008"/>
-          </a:xfrm>
-          <a:prstGeom prst="rect">
-            <a:avLst/>
-          </a:prstGeom>
-          <a:solidFill>
-            <a:srgbClr val="095292"/>
-          </a:solidFill>
-          <a:ln>
-            <a:noFill/>
-          </a:ln>
-        </p:spPr>
-        <p:style>
-          <a:lnRef idx="1">
-            <a:schemeClr val="accent1"/>
-          </a:lnRef>
-          <a:fillRef idx="3">
-            <a:schemeClr val="accent1"/>
-          </a:fillRef>
-          <a:effectRef idx="2">
-            <a:schemeClr val="accent1"/>
-          </a:effectRef>
-          <a:fontRef idx="minor">
-            <a:schemeClr val="lt1"/>
-          </a:fontRef>
-        </p:style>
-        <p:txBody>
-          <a:bodyPr rtlCol="0" anchor="ctr"/>
-          <a:lstStyle/>
-          <a:p>
-            <a:pPr algn="ctr"/>
-          </a:p>
-        </p:txBody>
-      </p:sp>
-      <p:sp>
-        <p:nvSpPr>
-          <p:cNvPr id="8" name="Rectangle 7"/>
-          <p:cNvSpPr/>
-          <p:nvPr/>
-        </p:nvSpPr>
-        <p:spPr>
-          <a:xfrm>
-            <a:off x="457200" y="1655064"/>
-            <a:ext cx="3624986" cy="27432"/>
-          </a:xfrm>
-          <a:prstGeom prst="rect">
-            <a:avLst/>
-          </a:prstGeom>
-          <a:solidFill>
-            <a:srgbClr val="FFD000"/>
-          </a:solidFill>
-          <a:ln>
-            <a:noFill/>
-          </a:ln>
-        </p:spPr>
-        <p:style>
-          <a:lnRef idx="1">
-            <a:schemeClr val="accent1"/>
-          </a:lnRef>
-          <a:fillRef idx="3">
-            <a:schemeClr val="accent1"/>
-          </a:fillRef>
-          <a:effectRef idx="2">
-            <a:schemeClr val="accent1"/>
-          </a:effectRef>
-          <a:fontRef idx="minor">
-            <a:schemeClr val="lt1"/>
-          </a:fontRef>
-        </p:style>
-        <p:txBody>
-          <a:bodyPr rtlCol="0" anchor="ctr"/>
-          <a:lstStyle/>
-          <a:p>
-            <a:pPr algn="ctr"/>
-          </a:p>
-        </p:txBody>
-      </p:sp>
-      <p:pic>
-        <p:nvPicPr>
-          <p:cNvPr id="9" name="Picture 8" descr="drawio.png"/>
-          <p:cNvPicPr>
-            <a:picLocks noChangeAspect="1"/>
-          </p:cNvPicPr>
-          <p:nvPr/>
-        </p:nvPicPr>
-        <p:blipFill>
-          <a:blip r:embed="rId2"/>
-          <a:stretch>
-            <a:fillRect/>
-          </a:stretch>
-        </p:blipFill>
-        <p:spPr>
-          <a:xfrm>
-            <a:off x="1659331" y="1847087"/>
-            <a:ext cx="1220724" cy="1220724"/>
-          </a:xfrm>
-          <a:prstGeom prst="rect">
-            <a:avLst/>
-          </a:prstGeom>
-        </p:spPr>
-      </p:pic>
-      <p:sp>
-        <p:nvSpPr>
-          <p:cNvPr id="10" name="TextBox 9"/>
-          <p:cNvSpPr txBox="1"/>
-          <p:nvPr/>
-        </p:nvSpPr>
-        <p:spPr>
-          <a:xfrm>
-            <a:off x="530352" y="3159251"/>
-            <a:ext cx="3478682" cy="621792"/>
-          </a:xfrm>
-          <a:prstGeom prst="rect">
-            <a:avLst/>
-          </a:prstGeom>
-          <a:noFill/>
-        </p:spPr>
-        <p:txBody>
-          <a:bodyPr wrap="square" anchor="t"/>
-          <a:lstStyle/>
-          <a:p>
-            <a:pPr algn="ctr"/>
-            <a:r>
-              <a:rPr sz="1300" b="1" i="0">
-                <a:solidFill>
-                  <a:srgbClr val="095292"/>
-                </a:solidFill>
-                <a:latin typeface="Calibri"/>
-              </a:rPr>
-              <a:t>draw.io</a:t>
-            </a:r>
-          </a:p>
-          <a:p>
-            <a:pPr algn="ctr">
-              <a:spcBef>
-                <a:spcPts val="200"/>
-              </a:spcBef>
+            <a:pPr>
+              <a:spcAft>
+                <a:spcPts val="800"/>
+              </a:spcAft>
             </a:pPr>
             <a:r>
-              <a:rPr sz="1000" b="0" i="0">
-                <a:solidFill>
-                  <a:srgbClr val="666666"/>
-                </a:solidFill>
-                <a:latin typeface="Calibri"/>
-              </a:rPr>
-              <a:t>Auditoria del paquete</a:t>
-            </a:r>
-          </a:p>
-        </p:txBody>
-      </p:sp>
-      <p:sp>
-        <p:nvSpPr>
-          <p:cNvPr id="11" name="Rounded Rectangle 10"/>
-          <p:cNvSpPr/>
-          <p:nvPr/>
-        </p:nvSpPr>
-        <p:spPr>
-          <a:xfrm>
-            <a:off x="4283354" y="1591056"/>
-            <a:ext cx="3624986" cy="2299716"/>
-          </a:xfrm>
-          <a:prstGeom prst="roundRect">
-            <a:avLst>
-              <a:gd name="adj" fmla="val 12000"/>
-            </a:avLst>
-          </a:prstGeom>
-          <a:solidFill>
-            <a:srgbClr val="F2F2F2"/>
-          </a:solidFill>
-          <a:ln>
-            <a:noFill/>
-          </a:ln>
-        </p:spPr>
-        <p:style>
-          <a:lnRef idx="1">
-            <a:schemeClr val="accent1"/>
-          </a:lnRef>
-          <a:fillRef idx="3">
-            <a:schemeClr val="accent1"/>
-          </a:fillRef>
-          <a:effectRef idx="2">
-            <a:schemeClr val="accent1"/>
-          </a:effectRef>
-          <a:fontRef idx="minor">
-            <a:schemeClr val="lt1"/>
-          </a:fontRef>
-        </p:style>
-        <p:txBody>
-          <a:bodyPr rtlCol="0" anchor="ctr"/>
-          <a:lstStyle/>
-          <a:p>
-            <a:pPr algn="ctr"/>
-          </a:p>
-        </p:txBody>
-      </p:sp>
-      <p:sp>
-        <p:nvSpPr>
-          <p:cNvPr id="12" name="Rectangle 11"/>
-          <p:cNvSpPr/>
-          <p:nvPr/>
-        </p:nvSpPr>
-        <p:spPr>
-          <a:xfrm>
-            <a:off x="4283354" y="1591056"/>
-            <a:ext cx="3624986" cy="64008"/>
-          </a:xfrm>
-          <a:prstGeom prst="rect">
-            <a:avLst/>
-          </a:prstGeom>
-          <a:solidFill>
-            <a:srgbClr val="095292"/>
-          </a:solidFill>
-          <a:ln>
-            <a:noFill/>
-          </a:ln>
-        </p:spPr>
-        <p:style>
-          <a:lnRef idx="1">
-            <a:schemeClr val="accent1"/>
-          </a:lnRef>
-          <a:fillRef idx="3">
-            <a:schemeClr val="accent1"/>
-          </a:fillRef>
-          <a:effectRef idx="2">
-            <a:schemeClr val="accent1"/>
-          </a:effectRef>
-          <a:fontRef idx="minor">
-            <a:schemeClr val="lt1"/>
-          </a:fontRef>
-        </p:style>
-        <p:txBody>
-          <a:bodyPr rtlCol="0" anchor="ctr"/>
-          <a:lstStyle/>
-          <a:p>
-            <a:pPr algn="ctr"/>
-          </a:p>
-        </p:txBody>
-      </p:sp>
-      <p:sp>
-        <p:nvSpPr>
-          <p:cNvPr id="13" name="Rectangle 12"/>
-          <p:cNvSpPr/>
-          <p:nvPr/>
-        </p:nvSpPr>
-        <p:spPr>
-          <a:xfrm>
-            <a:off x="4283354" y="1655064"/>
-            <a:ext cx="3624986" cy="27432"/>
-          </a:xfrm>
-          <a:prstGeom prst="rect">
-            <a:avLst/>
-          </a:prstGeom>
-          <a:solidFill>
-            <a:srgbClr val="FFD000"/>
-          </a:solidFill>
-          <a:ln>
-            <a:noFill/>
-          </a:ln>
-        </p:spPr>
-        <p:style>
-          <a:lnRef idx="1">
-            <a:schemeClr val="accent1"/>
-          </a:lnRef>
-          <a:fillRef idx="3">
-            <a:schemeClr val="accent1"/>
-          </a:fillRef>
-          <a:effectRef idx="2">
-            <a:schemeClr val="accent1"/>
-          </a:effectRef>
-          <a:fontRef idx="minor">
-            <a:schemeClr val="lt1"/>
-          </a:fontRef>
-        </p:style>
-        <p:txBody>
-          <a:bodyPr rtlCol="0" anchor="ctr"/>
-          <a:lstStyle/>
-          <a:p>
-            <a:pPr algn="ctr"/>
-          </a:p>
-        </p:txBody>
-      </p:sp>
-      <p:pic>
-        <p:nvPicPr>
-          <p:cNvPr id="14" name="Picture 13" descr="github_actions.png"/>
-          <p:cNvPicPr>
-            <a:picLocks noChangeAspect="1"/>
-          </p:cNvPicPr>
-          <p:nvPr/>
-        </p:nvPicPr>
-        <p:blipFill>
-          <a:blip r:embed="rId3"/>
-          <a:stretch>
-            <a:fillRect/>
-          </a:stretch>
-        </p:blipFill>
-        <p:spPr>
-          <a:xfrm>
-            <a:off x="5485485" y="1847087"/>
-            <a:ext cx="1220724" cy="1220724"/>
-          </a:xfrm>
-          <a:prstGeom prst="rect">
-            <a:avLst/>
-          </a:prstGeom>
-        </p:spPr>
-      </p:pic>
-      <p:sp>
-        <p:nvSpPr>
-          <p:cNvPr id="15" name="TextBox 14"/>
-          <p:cNvSpPr txBox="1"/>
-          <p:nvPr/>
-        </p:nvSpPr>
-        <p:spPr>
-          <a:xfrm>
-            <a:off x="4356506" y="3159251"/>
-            <a:ext cx="3478682" cy="621792"/>
-          </a:xfrm>
-          <a:prstGeom prst="rect">
-            <a:avLst/>
-          </a:prstGeom>
-          <a:noFill/>
-        </p:spPr>
-        <p:txBody>
-          <a:bodyPr wrap="square" anchor="t"/>
-          <a:lstStyle/>
-          <a:p>
-            <a:pPr algn="ctr"/>
-            <a:r>
-              <a:rPr sz="1300" b="1" i="0">
-                <a:solidFill>
-                  <a:srgbClr val="095292"/>
-                </a:solidFill>
-                <a:latin typeface="Calibri"/>
-              </a:rPr>
-              <a:t>GitHub Actions</a:t>
-            </a:r>
-          </a:p>
-          <a:p>
-            <a:pPr algn="ctr">
-              <a:spcBef>
-                <a:spcPts val="200"/>
-              </a:spcBef>
+              <a:rPr sz="2000" b="0" i="0">
+                <a:solidFill>
+                  <a:srgbClr val="333333"/>
+                </a:solidFill>
+                <a:latin typeface="Calibri"/>
+              </a:rPr>
+              <a:t>–   Esta clase no introduce teoria de un tema tecnico nuevo, y eso es deliberado, pero si tiene teoria propia: la teoria de la revision y la evaluacion.</a:t>
+            </a:r>
+          </a:p>
+          <a:p>
+            <a:pPr>
+              <a:spcAft>
+                <a:spcPts val="800"/>
+              </a:spcAft>
             </a:pPr>
             <a:r>
-              <a:rPr sz="1000" b="0" i="0">
-                <a:solidFill>
-                  <a:srgbClr val="666666"/>
-                </a:solidFill>
-                <a:latin typeface="Calibri"/>
-              </a:rPr>
-              <a:t>Evidencia CI</a:t>
-            </a:r>
-          </a:p>
-        </p:txBody>
-      </p:sp>
-      <p:sp>
-        <p:nvSpPr>
-          <p:cNvPr id="16" name="Rounded Rectangle 15"/>
-          <p:cNvSpPr/>
-          <p:nvPr/>
-        </p:nvSpPr>
-        <p:spPr>
-          <a:xfrm>
-            <a:off x="8109508" y="1591056"/>
-            <a:ext cx="3624986" cy="2299716"/>
-          </a:xfrm>
-          <a:prstGeom prst="roundRect">
-            <a:avLst>
-              <a:gd name="adj" fmla="val 12000"/>
-            </a:avLst>
-          </a:prstGeom>
-          <a:solidFill>
-            <a:srgbClr val="F2F2F2"/>
-          </a:solidFill>
-          <a:ln>
-            <a:noFill/>
-          </a:ln>
-        </p:spPr>
-        <p:style>
-          <a:lnRef idx="1">
-            <a:schemeClr val="accent1"/>
-          </a:lnRef>
-          <a:fillRef idx="3">
-            <a:schemeClr val="accent1"/>
-          </a:fillRef>
-          <a:effectRef idx="2">
-            <a:schemeClr val="accent1"/>
-          </a:effectRef>
-          <a:fontRef idx="minor">
-            <a:schemeClr val="lt1"/>
-          </a:fontRef>
-        </p:style>
-        <p:txBody>
-          <a:bodyPr rtlCol="0" anchor="ctr"/>
-          <a:lstStyle/>
-          <a:p>
-            <a:pPr algn="ctr"/>
-          </a:p>
-        </p:txBody>
-      </p:sp>
-      <p:sp>
-        <p:nvSpPr>
-          <p:cNvPr id="17" name="Rectangle 16"/>
-          <p:cNvSpPr/>
-          <p:nvPr/>
-        </p:nvSpPr>
-        <p:spPr>
-          <a:xfrm>
-            <a:off x="8109508" y="1591056"/>
-            <a:ext cx="3624986" cy="64008"/>
-          </a:xfrm>
-          <a:prstGeom prst="rect">
-            <a:avLst/>
-          </a:prstGeom>
-          <a:solidFill>
-            <a:srgbClr val="095292"/>
-          </a:solidFill>
-          <a:ln>
-            <a:noFill/>
-          </a:ln>
-        </p:spPr>
-        <p:style>
-          <a:lnRef idx="1">
-            <a:schemeClr val="accent1"/>
-          </a:lnRef>
-          <a:fillRef idx="3">
-            <a:schemeClr val="accent1"/>
-          </a:fillRef>
-          <a:effectRef idx="2">
-            <a:schemeClr val="accent1"/>
-          </a:effectRef>
-          <a:fontRef idx="minor">
-            <a:schemeClr val="lt1"/>
-          </a:fontRef>
-        </p:style>
-        <p:txBody>
-          <a:bodyPr rtlCol="0" anchor="ctr"/>
-          <a:lstStyle/>
-          <a:p>
-            <a:pPr algn="ctr"/>
-          </a:p>
-        </p:txBody>
-      </p:sp>
-      <p:sp>
-        <p:nvSpPr>
-          <p:cNvPr id="18" name="Rectangle 17"/>
-          <p:cNvSpPr/>
-          <p:nvPr/>
-        </p:nvSpPr>
-        <p:spPr>
-          <a:xfrm>
-            <a:off x="8109508" y="1655064"/>
-            <a:ext cx="3624986" cy="27432"/>
-          </a:xfrm>
-          <a:prstGeom prst="rect">
-            <a:avLst/>
-          </a:prstGeom>
-          <a:solidFill>
-            <a:srgbClr val="FFD000"/>
-          </a:solidFill>
-          <a:ln>
-            <a:noFill/>
-          </a:ln>
-        </p:spPr>
-        <p:style>
-          <a:lnRef idx="1">
-            <a:schemeClr val="accent1"/>
-          </a:lnRef>
-          <a:fillRef idx="3">
-            <a:schemeClr val="accent1"/>
-          </a:fillRef>
-          <a:effectRef idx="2">
-            <a:schemeClr val="accent1"/>
-          </a:effectRef>
-          <a:fontRef idx="minor">
-            <a:schemeClr val="lt1"/>
-          </a:fontRef>
-        </p:style>
-        <p:txBody>
-          <a:bodyPr rtlCol="0" anchor="ctr"/>
-          <a:lstStyle/>
-          <a:p>
-            <a:pPr algn="ctr"/>
-          </a:p>
-        </p:txBody>
-      </p:sp>
-      <p:pic>
-        <p:nvPicPr>
-          <p:cNvPr id="19" name="Picture 18" descr="google_docs.png"/>
-          <p:cNvPicPr>
-            <a:picLocks noChangeAspect="1"/>
-          </p:cNvPicPr>
-          <p:nvPr/>
-        </p:nvPicPr>
-        <p:blipFill>
-          <a:blip r:embed="rId4"/>
-          <a:stretch>
-            <a:fillRect/>
-          </a:stretch>
-        </p:blipFill>
-        <p:spPr>
-          <a:xfrm>
-            <a:off x="9311640" y="1847087"/>
-            <a:ext cx="1220724" cy="1220724"/>
-          </a:xfrm>
-          <a:prstGeom prst="rect">
-            <a:avLst/>
-          </a:prstGeom>
-        </p:spPr>
-      </p:pic>
-      <p:sp>
-        <p:nvSpPr>
-          <p:cNvPr id="20" name="TextBox 19"/>
-          <p:cNvSpPr txBox="1"/>
-          <p:nvPr/>
-        </p:nvSpPr>
-        <p:spPr>
-          <a:xfrm>
-            <a:off x="8182660" y="3159251"/>
-            <a:ext cx="3478682" cy="621792"/>
-          </a:xfrm>
-          <a:prstGeom prst="rect">
-            <a:avLst/>
-          </a:prstGeom>
-          <a:noFill/>
-        </p:spPr>
-        <p:txBody>
-          <a:bodyPr wrap="square" anchor="t"/>
-          <a:lstStyle/>
-          <a:p>
-            <a:pPr algn="ctr"/>
-            <a:r>
-              <a:rPr sz="1300" b="1" i="0">
-                <a:solidFill>
-                  <a:srgbClr val="095292"/>
-                </a:solidFill>
-                <a:latin typeface="Calibri"/>
-              </a:rPr>
-              <a:t>Google Docs</a:t>
-            </a:r>
-          </a:p>
-          <a:p>
-            <a:pPr algn="ctr">
-              <a:spcBef>
-                <a:spcPts val="200"/>
-              </a:spcBef>
+              <a:rPr sz="2000" b="0" i="0">
+                <a:solidFill>
+                  <a:srgbClr val="333333"/>
+                </a:solidFill>
+                <a:latin typeface="Calibri"/>
+              </a:rPr>
+              <a:t>–   Una revision de arquitectura, en ingles architecture review, es una practica profesional formal en la que alguien distinto de quien diseno el sistema examina el diseno antes de que este construido, buscando riesgos y decisiones sin justificar.</a:t>
+            </a:r>
+          </a:p>
+          <a:p>
+            <a:pPr>
+              <a:spcAft>
+                <a:spcPts val="800"/>
+              </a:spcAft>
             </a:pPr>
             <a:r>
-              <a:rPr sz="1000" b="0" i="0">
-                <a:solidFill>
-                  <a:srgbClr val="666666"/>
-                </a:solidFill>
-                <a:latin typeface="Calibri"/>
-              </a:rPr>
-              <a:t>Informe PI</a:t>
-            </a:r>
-          </a:p>
-        </p:txBody>
-      </p:sp>
-      <p:sp>
-        <p:nvSpPr>
-          <p:cNvPr id="21" name="Rounded Rectangle 20"/>
-          <p:cNvSpPr/>
-          <p:nvPr/>
-        </p:nvSpPr>
-        <p:spPr>
-          <a:xfrm>
-            <a:off x="2370277" y="4055364"/>
-            <a:ext cx="3624986" cy="2299716"/>
-          </a:xfrm>
-          <a:prstGeom prst="roundRect">
-            <a:avLst>
-              <a:gd name="adj" fmla="val 12000"/>
-            </a:avLst>
-          </a:prstGeom>
-          <a:solidFill>
-            <a:srgbClr val="F2F2F2"/>
-          </a:solidFill>
-          <a:ln>
-            <a:noFill/>
-          </a:ln>
-        </p:spPr>
-        <p:style>
-          <a:lnRef idx="1">
-            <a:schemeClr val="accent1"/>
-          </a:lnRef>
-          <a:fillRef idx="3">
-            <a:schemeClr val="accent1"/>
-          </a:fillRef>
-          <a:effectRef idx="2">
-            <a:schemeClr val="accent1"/>
-          </a:effectRef>
-          <a:fontRef idx="minor">
-            <a:schemeClr val="lt1"/>
-          </a:fontRef>
-        </p:style>
-        <p:txBody>
-          <a:bodyPr rtlCol="0" anchor="ctr"/>
-          <a:lstStyle/>
-          <a:p>
-            <a:pPr algn="ctr"/>
-          </a:p>
-        </p:txBody>
-      </p:sp>
-      <p:sp>
-        <p:nvSpPr>
-          <p:cNvPr id="22" name="Rectangle 21"/>
-          <p:cNvSpPr/>
-          <p:nvPr/>
-        </p:nvSpPr>
-        <p:spPr>
-          <a:xfrm>
-            <a:off x="2370277" y="4055364"/>
-            <a:ext cx="3624986" cy="64008"/>
-          </a:xfrm>
-          <a:prstGeom prst="rect">
-            <a:avLst/>
-          </a:prstGeom>
-          <a:solidFill>
-            <a:srgbClr val="095292"/>
-          </a:solidFill>
-          <a:ln>
-            <a:noFill/>
-          </a:ln>
-        </p:spPr>
-        <p:style>
-          <a:lnRef idx="1">
-            <a:schemeClr val="accent1"/>
-          </a:lnRef>
-          <a:fillRef idx="3">
-            <a:schemeClr val="accent1"/>
-          </a:fillRef>
-          <a:effectRef idx="2">
-            <a:schemeClr val="accent1"/>
-          </a:effectRef>
-          <a:fontRef idx="minor">
-            <a:schemeClr val="lt1"/>
-          </a:fontRef>
-        </p:style>
-        <p:txBody>
-          <a:bodyPr rtlCol="0" anchor="ctr"/>
-          <a:lstStyle/>
-          <a:p>
-            <a:pPr algn="ctr"/>
-          </a:p>
-        </p:txBody>
-      </p:sp>
-      <p:sp>
-        <p:nvSpPr>
-          <p:cNvPr id="23" name="Rectangle 22"/>
-          <p:cNvSpPr/>
-          <p:nvPr/>
-        </p:nvSpPr>
-        <p:spPr>
-          <a:xfrm>
-            <a:off x="2370277" y="4119372"/>
-            <a:ext cx="3624986" cy="27432"/>
-          </a:xfrm>
-          <a:prstGeom prst="rect">
-            <a:avLst/>
-          </a:prstGeom>
-          <a:solidFill>
-            <a:srgbClr val="FFD000"/>
-          </a:solidFill>
-          <a:ln>
-            <a:noFill/>
-          </a:ln>
-        </p:spPr>
-        <p:style>
-          <a:lnRef idx="1">
-            <a:schemeClr val="accent1"/>
-          </a:lnRef>
-          <a:fillRef idx="3">
-            <a:schemeClr val="accent1"/>
-          </a:fillRef>
-          <a:effectRef idx="2">
-            <a:schemeClr val="accent1"/>
-          </a:effectRef>
-          <a:fontRef idx="minor">
-            <a:schemeClr val="lt1"/>
-          </a:fontRef>
-        </p:style>
-        <p:txBody>
-          <a:bodyPr rtlCol="0" anchor="ctr"/>
-          <a:lstStyle/>
-          <a:p>
-            <a:pPr algn="ctr"/>
-          </a:p>
-        </p:txBody>
-      </p:sp>
-      <p:pic>
-        <p:nvPicPr>
-          <p:cNvPr id="24" name="Picture 23" descr="mermaid.png"/>
-          <p:cNvPicPr>
-            <a:picLocks noChangeAspect="1"/>
-          </p:cNvPicPr>
-          <p:nvPr/>
-        </p:nvPicPr>
-        <p:blipFill>
-          <a:blip r:embed="rId5"/>
-          <a:stretch>
-            <a:fillRect/>
-          </a:stretch>
-        </p:blipFill>
-        <p:spPr>
-          <a:xfrm>
-            <a:off x="3572408" y="4311396"/>
-            <a:ext cx="1220724" cy="1220724"/>
-          </a:xfrm>
-          <a:prstGeom prst="rect">
-            <a:avLst/>
-          </a:prstGeom>
-        </p:spPr>
-      </p:pic>
-      <p:sp>
-        <p:nvSpPr>
-          <p:cNvPr id="25" name="TextBox 24"/>
-          <p:cNvSpPr txBox="1"/>
-          <p:nvPr/>
-        </p:nvSpPr>
-        <p:spPr>
-          <a:xfrm>
-            <a:off x="2443429" y="5623560"/>
-            <a:ext cx="3478682" cy="621792"/>
-          </a:xfrm>
-          <a:prstGeom prst="rect">
-            <a:avLst/>
-          </a:prstGeom>
-          <a:noFill/>
-        </p:spPr>
-        <p:txBody>
-          <a:bodyPr wrap="square" anchor="t"/>
-          <a:lstStyle/>
-          <a:p>
-            <a:pPr algn="ctr"/>
-            <a:r>
-              <a:rPr sz="1300" b="1" i="0">
-                <a:solidFill>
-                  <a:srgbClr val="095292"/>
-                </a:solidFill>
-                <a:latin typeface="Calibri"/>
-              </a:rPr>
-              <a:t>Mermaid</a:t>
-            </a:r>
-          </a:p>
-          <a:p>
-            <a:pPr algn="ctr">
-              <a:spcBef>
-                <a:spcPts val="200"/>
-              </a:spcBef>
+              <a:rPr sz="2000" b="0" i="0">
+                <a:solidFill>
+                  <a:srgbClr val="333333"/>
+                </a:solidFill>
+                <a:latin typeface="Calibri"/>
+              </a:rPr>
+              <a:t>–   Existe en la industria con nombres concretos: ATAM en su version academica, design review o RFC review en empresas de producto, comite de arquitectura en organizaciones grandes.</a:t>
+            </a:r>
+          </a:p>
+          <a:p>
+            <a:pPr>
+              <a:spcAft>
+                <a:spcPts val="800"/>
+              </a:spcAft>
             </a:pPr>
             <a:r>
-              <a:rPr sz="1000" b="0" i="0">
-                <a:solidFill>
-                  <a:srgbClr val="666666"/>
-                </a:solidFill>
-                <a:latin typeface="Calibri"/>
-              </a:rPr>
-              <a:t>Codigo del diagrama</a:t>
-            </a:r>
-          </a:p>
-        </p:txBody>
-      </p:sp>
-      <p:sp>
-        <p:nvSpPr>
-          <p:cNvPr id="26" name="Rounded Rectangle 25"/>
-          <p:cNvSpPr/>
-          <p:nvPr/>
-        </p:nvSpPr>
-        <p:spPr>
-          <a:xfrm>
-            <a:off x="6196431" y="4055364"/>
-            <a:ext cx="3624986" cy="2299716"/>
-          </a:xfrm>
-          <a:prstGeom prst="roundRect">
-            <a:avLst>
-              <a:gd name="adj" fmla="val 12000"/>
-            </a:avLst>
-          </a:prstGeom>
-          <a:solidFill>
-            <a:srgbClr val="F2F2F2"/>
-          </a:solidFill>
-          <a:ln>
-            <a:noFill/>
-          </a:ln>
-        </p:spPr>
-        <p:style>
-          <a:lnRef idx="1">
-            <a:schemeClr val="accent1"/>
-          </a:lnRef>
-          <a:fillRef idx="3">
-            <a:schemeClr val="accent1"/>
-          </a:fillRef>
-          <a:effectRef idx="2">
-            <a:schemeClr val="accent1"/>
-          </a:effectRef>
-          <a:fontRef idx="minor">
-            <a:schemeClr val="lt1"/>
-          </a:fontRef>
-        </p:style>
-        <p:txBody>
-          <a:bodyPr rtlCol="0" anchor="ctr"/>
-          <a:lstStyle/>
-          <a:p>
-            <a:pPr algn="ctr"/>
-          </a:p>
-        </p:txBody>
-      </p:sp>
-      <p:sp>
-        <p:nvSpPr>
-          <p:cNvPr id="27" name="Rectangle 26"/>
-          <p:cNvSpPr/>
-          <p:nvPr/>
-        </p:nvSpPr>
-        <p:spPr>
-          <a:xfrm>
-            <a:off x="6196431" y="4055364"/>
-            <a:ext cx="3624986" cy="64008"/>
-          </a:xfrm>
-          <a:prstGeom prst="rect">
-            <a:avLst/>
-          </a:prstGeom>
-          <a:solidFill>
-            <a:srgbClr val="095292"/>
-          </a:solidFill>
-          <a:ln>
-            <a:noFill/>
-          </a:ln>
-        </p:spPr>
-        <p:style>
-          <a:lnRef idx="1">
-            <a:schemeClr val="accent1"/>
-          </a:lnRef>
-          <a:fillRef idx="3">
-            <a:schemeClr val="accent1"/>
-          </a:fillRef>
-          <a:effectRef idx="2">
-            <a:schemeClr val="accent1"/>
-          </a:effectRef>
-          <a:fontRef idx="minor">
-            <a:schemeClr val="lt1"/>
-          </a:fontRef>
-        </p:style>
-        <p:txBody>
-          <a:bodyPr rtlCol="0" anchor="ctr"/>
-          <a:lstStyle/>
-          <a:p>
-            <a:pPr algn="ctr"/>
-          </a:p>
-        </p:txBody>
-      </p:sp>
-      <p:sp>
-        <p:nvSpPr>
-          <p:cNvPr id="28" name="Rectangle 27"/>
-          <p:cNvSpPr/>
-          <p:nvPr/>
-        </p:nvSpPr>
-        <p:spPr>
-          <a:xfrm>
-            <a:off x="6196431" y="4119372"/>
-            <a:ext cx="3624986" cy="27432"/>
-          </a:xfrm>
-          <a:prstGeom prst="rect">
-            <a:avLst/>
-          </a:prstGeom>
-          <a:solidFill>
-            <a:srgbClr val="FFD000"/>
-          </a:solidFill>
-          <a:ln>
-            <a:noFill/>
-          </a:ln>
-        </p:spPr>
-        <p:style>
-          <a:lnRef idx="1">
-            <a:schemeClr val="accent1"/>
-          </a:lnRef>
-          <a:fillRef idx="3">
-            <a:schemeClr val="accent1"/>
-          </a:fillRef>
-          <a:effectRef idx="2">
-            <a:schemeClr val="accent1"/>
-          </a:effectRef>
-          <a:fontRef idx="minor">
-            <a:schemeClr val="lt1"/>
-          </a:fontRef>
-        </p:style>
-        <p:txBody>
-          <a:bodyPr rtlCol="0" anchor="ctr"/>
-          <a:lstStyle/>
-          <a:p>
-            <a:pPr algn="ctr"/>
-          </a:p>
-        </p:txBody>
-      </p:sp>
-      <p:pic>
-        <p:nvPicPr>
-          <p:cNvPr id="29" name="Picture 28" descr="examlab.png"/>
-          <p:cNvPicPr>
-            <a:picLocks noChangeAspect="1"/>
-          </p:cNvPicPr>
-          <p:nvPr/>
-        </p:nvPicPr>
-        <p:blipFill>
-          <a:blip r:embed="rId6"/>
-          <a:stretch>
-            <a:fillRect/>
-          </a:stretch>
-        </p:blipFill>
-        <p:spPr>
-          <a:xfrm>
-            <a:off x="7398562" y="4311396"/>
-            <a:ext cx="1220724" cy="1220724"/>
-          </a:xfrm>
-          <a:prstGeom prst="rect">
-            <a:avLst/>
-          </a:prstGeom>
-        </p:spPr>
-      </p:pic>
-      <p:sp>
-        <p:nvSpPr>
-          <p:cNvPr id="30" name="TextBox 29"/>
-          <p:cNvSpPr txBox="1"/>
-          <p:nvPr/>
-        </p:nvSpPr>
-        <p:spPr>
-          <a:xfrm>
-            <a:off x="6269583" y="5623560"/>
-            <a:ext cx="3478682" cy="621792"/>
-          </a:xfrm>
-          <a:prstGeom prst="rect">
-            <a:avLst/>
-          </a:prstGeom>
-          <a:noFill/>
-        </p:spPr>
-        <p:txBody>
-          <a:bodyPr wrap="square" anchor="t"/>
-          <a:lstStyle/>
-          <a:p>
-            <a:pPr algn="ctr"/>
-            <a:r>
-              <a:rPr sz="1300" b="1" i="0">
-                <a:solidFill>
-                  <a:srgbClr val="095292"/>
-                </a:solidFill>
-                <a:latin typeface="Calibri"/>
-              </a:rPr>
-              <a:t>la plataforma del curso</a:t>
-            </a:r>
-          </a:p>
-          <a:p>
-            <a:pPr algn="ctr">
-              <a:spcBef>
-                <a:spcPts val="200"/>
-              </a:spcBef>
+              <a:rPr sz="2000" b="0" i="0">
+                <a:solidFill>
+                  <a:srgbClr val="333333"/>
+                </a:solidFill>
+                <a:latin typeface="Calibri"/>
+              </a:rPr>
+              <a:t>–   Todas comparten la premisa economica que sostiene el curso: un riesgo detectado en el diseno cuesta una fraccion de lo que cuesta cuando ya esta implementado y con usuarios encima.</a:t>
+            </a:r>
+          </a:p>
+          <a:p>
+            <a:pPr>
+              <a:spcAft>
+                <a:spcPts val="800"/>
+              </a:spcAft>
             </a:pPr>
             <a:r>
-              <a:rPr sz="1000" b="0" i="0">
-                <a:solidFill>
-                  <a:srgbClr val="666666"/>
-                </a:solidFill>
-                <a:latin typeface="Calibri"/>
-              </a:rPr>
-              <a:t>Donde se entrega</a:t>
-            </a:r>
-          </a:p>
-        </p:txBody>
-      </p:sp>
-      <p:sp>
-        <p:nvSpPr>
-          <p:cNvPr id="31" name="TextBox 30"/>
+              <a:rPr sz="2000" b="0" i="0">
+                <a:solidFill>
+                  <a:srgbClr val="333333"/>
+                </a:solidFill>
+                <a:latin typeface="Calibri"/>
+              </a:rPr>
+              <a:t>–   La revision no juzga si el diagrama es bonito; busca tres cosas: decisiones sin argumento, incoherencias entre artefactos y riesgos que nadie ha nombrado.</a:t>
+            </a:r>
+          </a:p>
+          <a:p>
+            <a:pPr>
+              <a:spcAft>
+                <a:spcPts val="800"/>
+              </a:spcAft>
+            </a:pPr>
+            <a:r>
+              <a:rPr sz="2000" b="0" i="0">
+                <a:solidFill>
+                  <a:srgbClr val="333333"/>
+                </a:solidFill>
+                <a:latin typeface="Calibri"/>
+              </a:rPr>
+              <a:t>–   Hoy el docente no dicta, audita, y el estudiante no aprende un concepto, demuestra que los que ya tiene forman un sistema.</a:t>
+            </a:r>
+          </a:p>
+        </p:txBody>
+      </p:sp>
+      <p:sp>
+        <p:nvSpPr>
+          <p:cNvPr id="6" name="TextBox 5"/>
           <p:cNvSpPr txBox="1"/>
           <p:nvPr/>
         </p:nvSpPr>
@@ -7219,7 +11030,7 @@
         <p:spPr>
           <a:xfrm>
             <a:off x="0" y="0"/>
-            <a:ext cx="12191695" cy="1170432"/>
+            <a:ext cx="12191695" cy="960120"/>
           </a:xfrm>
           <a:prstGeom prst="rect">
             <a:avLst/>
@@ -7261,7 +11072,7 @@
         </p:nvSpPr>
         <p:spPr>
           <a:xfrm>
-            <a:off x="0" y="1170432"/>
+            <a:off x="0" y="960120"/>
             <a:ext cx="12191695" cy="41148"/>
           </a:xfrm>
           <a:prstGeom prst="rect">
@@ -7305,7 +11116,7 @@
         <p:spPr>
           <a:xfrm>
             <a:off x="457200" y="164592"/>
-            <a:ext cx="11277295" cy="384048"/>
+            <a:ext cx="11277295" cy="502920"/>
           </a:xfrm>
           <a:prstGeom prst="rect">
             <a:avLst/>
@@ -7325,7 +11136,7 @@
                 </a:solidFill>
                 <a:latin typeface="Calibri"/>
               </a:rPr>
-              <a:t>Del boceto a la plataforma del curso (diagrama)</a:t>
+              <a:t>El insumo: las seis piezas del paquete CloudLite v1</a:t>
             </a:r>
           </a:p>
         </p:txBody>
@@ -7338,8 +11149,8 @@
         </p:nvSpPr>
         <p:spPr>
           <a:xfrm>
-            <a:off x="457200" y="566928"/>
-            <a:ext cx="11277295" cy="411480"/>
+            <a:off x="457200" y="1170432"/>
+            <a:ext cx="11277295" cy="5230368"/>
           </a:xfrm>
           <a:prstGeom prst="rect">
             <a:avLst/>
@@ -7352,705 +11163,90 @@
           </a:bodyPr>
           <a:lstStyle/>
           <a:p>
-            <a:r>
-              <a:rPr sz="1400" b="0" i="0">
-                <a:solidFill>
-                  <a:srgbClr val="B8D8EE"/>
-                </a:solidFill>
-                <a:latin typeface="Calibri"/>
-              </a:rPr>
-              <a:t>El diagrama se entrega como código Mermaid dentro de la plataforma del curso, no como imagen</a:t>
-            </a:r>
-          </a:p>
-        </p:txBody>
-      </p:sp>
-      <p:sp>
-        <p:nvSpPr>
-          <p:cNvPr id="6" name="Rounded Rectangle 5"/>
-          <p:cNvSpPr/>
-          <p:nvPr/>
-        </p:nvSpPr>
-        <p:spPr>
-          <a:xfrm>
-            <a:off x="457200" y="1659636"/>
-            <a:ext cx="11277295" cy="1051560"/>
-          </a:xfrm>
-          <a:prstGeom prst="roundRect">
-            <a:avLst>
-              <a:gd name="adj" fmla="val 12000"/>
-            </a:avLst>
-          </a:prstGeom>
-          <a:solidFill>
-            <a:srgbClr val="F2F2F2"/>
-          </a:solidFill>
-          <a:ln>
-            <a:noFill/>
-          </a:ln>
-        </p:spPr>
-        <p:style>
-          <a:lnRef idx="1">
-            <a:schemeClr val="accent1"/>
-          </a:lnRef>
-          <a:fillRef idx="3">
-            <a:schemeClr val="accent1"/>
-          </a:fillRef>
-          <a:effectRef idx="2">
-            <a:schemeClr val="accent1"/>
-          </a:effectRef>
-          <a:fontRef idx="minor">
-            <a:schemeClr val="lt1"/>
-          </a:fontRef>
-        </p:style>
-        <p:txBody>
-          <a:bodyPr rtlCol="0" anchor="ctr"/>
-          <a:lstStyle/>
-          <a:p>
-            <a:pPr algn="ctr"/>
-          </a:p>
-        </p:txBody>
-      </p:sp>
-      <p:sp>
-        <p:nvSpPr>
-          <p:cNvPr id="7" name="Rounded Rectangle 6"/>
-          <p:cNvSpPr/>
-          <p:nvPr/>
-        </p:nvSpPr>
-        <p:spPr>
-          <a:xfrm>
-            <a:off x="594360" y="1965960"/>
-            <a:ext cx="438912" cy="438912"/>
-          </a:xfrm>
-          <a:prstGeom prst="roundRect">
-            <a:avLst>
-              <a:gd name="adj" fmla="val 12000"/>
-            </a:avLst>
-          </a:prstGeom>
-          <a:solidFill>
-            <a:srgbClr val="095292"/>
-          </a:solidFill>
-          <a:ln>
-            <a:noFill/>
-          </a:ln>
-        </p:spPr>
-        <p:style>
-          <a:lnRef idx="1">
-            <a:schemeClr val="accent1"/>
-          </a:lnRef>
-          <a:fillRef idx="3">
-            <a:schemeClr val="accent1"/>
-          </a:fillRef>
-          <a:effectRef idx="2">
-            <a:schemeClr val="accent1"/>
-          </a:effectRef>
-          <a:fontRef idx="minor">
-            <a:schemeClr val="lt1"/>
-          </a:fontRef>
-        </p:style>
-        <p:txBody>
-          <a:bodyPr rtlCol="0" anchor="ctr"/>
-          <a:lstStyle/>
-          <a:p>
-            <a:pPr algn="ctr"/>
-          </a:p>
-        </p:txBody>
-      </p:sp>
-      <p:sp>
-        <p:nvSpPr>
-          <p:cNvPr id="8" name="TextBox 7"/>
-          <p:cNvSpPr txBox="1"/>
-          <p:nvPr/>
-        </p:nvSpPr>
-        <p:spPr>
-          <a:xfrm>
-            <a:off x="594360" y="1965960"/>
-            <a:ext cx="438912" cy="438912"/>
-          </a:xfrm>
-          <a:prstGeom prst="rect">
-            <a:avLst/>
-          </a:prstGeom>
-          <a:noFill/>
-        </p:spPr>
-        <p:txBody>
-          <a:bodyPr wrap="square" anchor="ctr"/>
-          <a:lstStyle/>
-          <a:p>
-            <a:pPr algn="ctr"/>
-            <a:r>
-              <a:rPr sz="1600" b="1" i="0">
-                <a:solidFill>
-                  <a:srgbClr val="FFFFFF"/>
-                </a:solidFill>
-                <a:latin typeface="Calibri"/>
-              </a:rPr>
-              <a:t>1</a:t>
-            </a:r>
-          </a:p>
-        </p:txBody>
-      </p:sp>
-      <p:sp>
-        <p:nvSpPr>
-          <p:cNvPr id="9" name="TextBox 8"/>
-          <p:cNvSpPr txBox="1"/>
-          <p:nvPr/>
-        </p:nvSpPr>
-        <p:spPr>
-          <a:xfrm>
-            <a:off x="1188720" y="1751076"/>
-            <a:ext cx="10271455" cy="886968"/>
-          </a:xfrm>
-          <a:prstGeom prst="rect">
-            <a:avLst/>
-          </a:prstGeom>
-          <a:noFill/>
-        </p:spPr>
-        <p:txBody>
-          <a:bodyPr wrap="square" anchor="ctr"/>
-          <a:lstStyle/>
-          <a:p>
-            <a:r>
-              <a:rPr sz="1500" b="1" i="0">
-                <a:solidFill>
-                  <a:srgbClr val="095292"/>
-                </a:solidFill>
-                <a:latin typeface="Calibri"/>
-              </a:rPr>
-              <a:t>Disena visual</a:t>
-            </a:r>
-          </a:p>
-          <a:p>
             <a:pPr>
-              <a:spcBef>
-                <a:spcPts val="200"/>
-              </a:spcBef>
+              <a:spcAft>
+                <a:spcPts val="800"/>
+              </a:spcAft>
             </a:pPr>
             <a:r>
-              <a:rPr sz="1300" b="0" i="0">
+              <a:rPr sz="2000" b="0" i="0">
                 <a:solidFill>
                   <a:srgbClr val="333333"/>
                 </a:solidFill>
                 <a:latin typeface="Calibri"/>
               </a:rPr>
-              <a:t>Dibuja el diagrama como quieras en Excalidraw o draw.io: es mas rapido arrastrar cajas que escribir codigo, y ahi es donde piensas el modelo.</a:t>
-            </a:r>
-          </a:p>
-        </p:txBody>
-      </p:sp>
-      <p:sp>
-        <p:nvSpPr>
-          <p:cNvPr id="10" name="Rounded Rectangle 9"/>
-          <p:cNvSpPr/>
-          <p:nvPr/>
-        </p:nvSpPr>
-        <p:spPr>
-          <a:xfrm>
-            <a:off x="457200" y="2802636"/>
-            <a:ext cx="11277295" cy="1051560"/>
-          </a:xfrm>
-          <a:prstGeom prst="roundRect">
-            <a:avLst>
-              <a:gd name="adj" fmla="val 12000"/>
-            </a:avLst>
-          </a:prstGeom>
-          <a:solidFill>
-            <a:srgbClr val="E8F4FA"/>
-          </a:solidFill>
-          <a:ln>
-            <a:noFill/>
-          </a:ln>
-        </p:spPr>
-        <p:style>
-          <a:lnRef idx="1">
-            <a:schemeClr val="accent1"/>
-          </a:lnRef>
-          <a:fillRef idx="3">
-            <a:schemeClr val="accent1"/>
-          </a:fillRef>
-          <a:effectRef idx="2">
-            <a:schemeClr val="accent1"/>
-          </a:effectRef>
-          <a:fontRef idx="minor">
-            <a:schemeClr val="lt1"/>
-          </a:fontRef>
-        </p:style>
-        <p:txBody>
-          <a:bodyPr rtlCol="0" anchor="ctr"/>
-          <a:lstStyle/>
-          <a:p>
-            <a:pPr algn="ctr"/>
-          </a:p>
-        </p:txBody>
-      </p:sp>
-      <p:sp>
-        <p:nvSpPr>
-          <p:cNvPr id="11" name="Rounded Rectangle 10"/>
-          <p:cNvSpPr/>
-          <p:nvPr/>
-        </p:nvSpPr>
-        <p:spPr>
-          <a:xfrm>
-            <a:off x="594360" y="3108960"/>
-            <a:ext cx="438912" cy="438912"/>
-          </a:xfrm>
-          <a:prstGeom prst="roundRect">
-            <a:avLst>
-              <a:gd name="adj" fmla="val 12000"/>
-            </a:avLst>
-          </a:prstGeom>
-          <a:solidFill>
-            <a:srgbClr val="095292"/>
-          </a:solidFill>
-          <a:ln>
-            <a:noFill/>
-          </a:ln>
-        </p:spPr>
-        <p:style>
-          <a:lnRef idx="1">
-            <a:schemeClr val="accent1"/>
-          </a:lnRef>
-          <a:fillRef idx="3">
-            <a:schemeClr val="accent1"/>
-          </a:fillRef>
-          <a:effectRef idx="2">
-            <a:schemeClr val="accent1"/>
-          </a:effectRef>
-          <a:fontRef idx="minor">
-            <a:schemeClr val="lt1"/>
-          </a:fontRef>
-        </p:style>
-        <p:txBody>
-          <a:bodyPr rtlCol="0" anchor="ctr"/>
-          <a:lstStyle/>
-          <a:p>
-            <a:pPr algn="ctr"/>
-          </a:p>
-        </p:txBody>
-      </p:sp>
-      <p:sp>
-        <p:nvSpPr>
-          <p:cNvPr id="12" name="TextBox 11"/>
-          <p:cNvSpPr txBox="1"/>
-          <p:nvPr/>
-        </p:nvSpPr>
-        <p:spPr>
-          <a:xfrm>
-            <a:off x="594360" y="3108960"/>
-            <a:ext cx="438912" cy="438912"/>
-          </a:xfrm>
-          <a:prstGeom prst="rect">
-            <a:avLst/>
-          </a:prstGeom>
-          <a:noFill/>
-        </p:spPr>
-        <p:txBody>
-          <a:bodyPr wrap="square" anchor="ctr"/>
-          <a:lstStyle/>
-          <a:p>
-            <a:pPr algn="ctr"/>
-            <a:r>
-              <a:rPr sz="1600" b="1" i="0">
-                <a:solidFill>
-                  <a:srgbClr val="FFFFFF"/>
-                </a:solidFill>
-                <a:latin typeface="Calibri"/>
-              </a:rPr>
-              <a:t>2</a:t>
-            </a:r>
-          </a:p>
-        </p:txBody>
-      </p:sp>
-      <p:sp>
-        <p:nvSpPr>
-          <p:cNvPr id="13" name="TextBox 12"/>
-          <p:cNvSpPr txBox="1"/>
-          <p:nvPr/>
-        </p:nvSpPr>
-        <p:spPr>
-          <a:xfrm>
-            <a:off x="1188720" y="2894076"/>
-            <a:ext cx="10271455" cy="886968"/>
-          </a:xfrm>
-          <a:prstGeom prst="rect">
-            <a:avLst/>
-          </a:prstGeom>
-          <a:noFill/>
-        </p:spPr>
-        <p:txBody>
-          <a:bodyPr wrap="square" anchor="ctr"/>
-          <a:lstStyle/>
-          <a:p>
-            <a:r>
-              <a:rPr sz="1500" b="1" i="0">
-                <a:solidFill>
-                  <a:srgbClr val="095292"/>
-                </a:solidFill>
-                <a:latin typeface="Calibri"/>
-              </a:rPr>
-              <a:t>Traduce con IA</a:t>
+              <a:t>–   El insumo es el paquete CloudLite v1, que a estas alturas debe tener seis piezas producidas antes: el C4 de Contexto de la Clase 1, el C4 de Contenedores de la Clase 4, el modelo de amenazas con controles de la Clase 6</a:t>
             </a:r>
           </a:p>
           <a:p>
             <a:pPr>
-              <a:spcBef>
-                <a:spcPts val="200"/>
-              </a:spcBef>
+              <a:spcAft>
+                <a:spcPts val="800"/>
+              </a:spcAft>
             </a:pPr>
             <a:r>
-              <a:rPr sz="1300" b="0" i="0">
+              <a:rPr sz="2000" b="0" i="0">
                 <a:solidFill>
                   <a:srgbClr val="333333"/>
                 </a:solidFill>
                 <a:latin typeface="Calibri"/>
               </a:rPr>
-              <a:t>Copia o describe tu boceto a una IA y pidele el codigo Mermaid: «convierte este diagrama a Mermaid usando C4Component». Revisa el resultado: la IA acierta la sintaxis, no tu modelo.</a:t>
-            </a:r>
-          </a:p>
-        </p:txBody>
-      </p:sp>
-      <p:sp>
-        <p:nvSpPr>
-          <p:cNvPr id="14" name="Rounded Rectangle 13"/>
-          <p:cNvSpPr/>
-          <p:nvPr/>
-        </p:nvSpPr>
-        <p:spPr>
-          <a:xfrm>
-            <a:off x="457200" y="3945636"/>
-            <a:ext cx="11277295" cy="1051560"/>
-          </a:xfrm>
-          <a:prstGeom prst="roundRect">
-            <a:avLst>
-              <a:gd name="adj" fmla="val 12000"/>
-            </a:avLst>
-          </a:prstGeom>
-          <a:solidFill>
-            <a:srgbClr val="F2F2F2"/>
-          </a:solidFill>
-          <a:ln>
-            <a:noFill/>
-          </a:ln>
-        </p:spPr>
-        <p:style>
-          <a:lnRef idx="1">
-            <a:schemeClr val="accent1"/>
-          </a:lnRef>
-          <a:fillRef idx="3">
-            <a:schemeClr val="accent1"/>
-          </a:fillRef>
-          <a:effectRef idx="2">
-            <a:schemeClr val="accent1"/>
-          </a:effectRef>
-          <a:fontRef idx="minor">
-            <a:schemeClr val="lt1"/>
-          </a:fontRef>
-        </p:style>
-        <p:txBody>
-          <a:bodyPr rtlCol="0" anchor="ctr"/>
-          <a:lstStyle/>
-          <a:p>
-            <a:pPr algn="ctr"/>
-          </a:p>
-        </p:txBody>
-      </p:sp>
-      <p:sp>
-        <p:nvSpPr>
-          <p:cNvPr id="15" name="Rounded Rectangle 14"/>
-          <p:cNvSpPr/>
-          <p:nvPr/>
-        </p:nvSpPr>
-        <p:spPr>
-          <a:xfrm>
-            <a:off x="594360" y="4251960"/>
-            <a:ext cx="438912" cy="438912"/>
-          </a:xfrm>
-          <a:prstGeom prst="roundRect">
-            <a:avLst>
-              <a:gd name="adj" fmla="val 12000"/>
-            </a:avLst>
-          </a:prstGeom>
-          <a:solidFill>
-            <a:srgbClr val="095292"/>
-          </a:solidFill>
-          <a:ln>
-            <a:noFill/>
-          </a:ln>
-        </p:spPr>
-        <p:style>
-          <a:lnRef idx="1">
-            <a:schemeClr val="accent1"/>
-          </a:lnRef>
-          <a:fillRef idx="3">
-            <a:schemeClr val="accent1"/>
-          </a:fillRef>
-          <a:effectRef idx="2">
-            <a:schemeClr val="accent1"/>
-          </a:effectRef>
-          <a:fontRef idx="minor">
-            <a:schemeClr val="lt1"/>
-          </a:fontRef>
-        </p:style>
-        <p:txBody>
-          <a:bodyPr rtlCol="0" anchor="ctr"/>
-          <a:lstStyle/>
-          <a:p>
-            <a:pPr algn="ctr"/>
-          </a:p>
-        </p:txBody>
-      </p:sp>
-      <p:sp>
-        <p:nvSpPr>
-          <p:cNvPr id="16" name="TextBox 15"/>
-          <p:cNvSpPr txBox="1"/>
-          <p:nvPr/>
-        </p:nvSpPr>
-        <p:spPr>
-          <a:xfrm>
-            <a:off x="594360" y="4251960"/>
-            <a:ext cx="438912" cy="438912"/>
-          </a:xfrm>
-          <a:prstGeom prst="rect">
-            <a:avLst/>
-          </a:prstGeom>
-          <a:noFill/>
-        </p:spPr>
-        <p:txBody>
-          <a:bodyPr wrap="square" anchor="ctr"/>
-          <a:lstStyle/>
-          <a:p>
-            <a:pPr algn="ctr"/>
-            <a:r>
-              <a:rPr sz="1600" b="1" i="0">
-                <a:solidFill>
-                  <a:srgbClr val="FFFFFF"/>
-                </a:solidFill>
-                <a:latin typeface="Calibri"/>
-              </a:rPr>
-              <a:t>3</a:t>
-            </a:r>
-          </a:p>
-        </p:txBody>
-      </p:sp>
-      <p:sp>
-        <p:nvSpPr>
-          <p:cNvPr id="17" name="TextBox 16"/>
-          <p:cNvSpPr txBox="1"/>
-          <p:nvPr/>
-        </p:nvSpPr>
-        <p:spPr>
-          <a:xfrm>
-            <a:off x="1188720" y="4037076"/>
-            <a:ext cx="10271455" cy="886968"/>
-          </a:xfrm>
-          <a:prstGeom prst="rect">
-            <a:avLst/>
-          </a:prstGeom>
-          <a:noFill/>
-        </p:spPr>
-        <p:txBody>
-          <a:bodyPr wrap="square" anchor="ctr"/>
-          <a:lstStyle/>
-          <a:p>
-            <a:r>
-              <a:rPr sz="1500" b="1" i="0">
-                <a:solidFill>
-                  <a:srgbClr val="095292"/>
-                </a:solidFill>
-                <a:latin typeface="Calibri"/>
-              </a:rPr>
-              <a:t>Pega y renderiza en la plataforma del curso</a:t>
+              <a:t>–   El diagrama de despliegue con zonas publica y privada de la Clase 7, el workflow de GitHub Actions y las metricas de monitoreo de la Clase 8, y la tabla de costos con drivers y right-sizing de la Clase 10.</a:t>
             </a:r>
           </a:p>
           <a:p>
             <a:pPr>
-              <a:spcBef>
-                <a:spcPts val="200"/>
-              </a:spcBef>
+              <a:spcAft>
+                <a:spcPts val="800"/>
+              </a:spcAft>
             </a:pPr>
             <a:r>
-              <a:rPr sz="1300" b="0" i="0">
+              <a:rPr sz="2000" b="0" i="0">
                 <a:solidFill>
                   <a:srgbClr val="333333"/>
                 </a:solidFill>
                 <a:latin typeface="Calibri"/>
               </a:rPr>
-              <a:t>Pega ese codigo en la caja de texto de la pregunta y mira como lo dibuja la plataforma. Si no renderiza, corrige ahi mismo: lo que se califica es el diagrama renderizado dentro de la plataforma del curso.</a:t>
-            </a:r>
-          </a:p>
-        </p:txBody>
-      </p:sp>
-      <p:sp>
-        <p:nvSpPr>
-          <p:cNvPr id="18" name="Rounded Rectangle 17"/>
-          <p:cNvSpPr/>
-          <p:nvPr/>
-        </p:nvSpPr>
-        <p:spPr>
-          <a:xfrm>
-            <a:off x="457200" y="5088636"/>
-            <a:ext cx="11277295" cy="1051560"/>
-          </a:xfrm>
-          <a:prstGeom prst="roundRect">
-            <a:avLst>
-              <a:gd name="adj" fmla="val 12000"/>
-            </a:avLst>
-          </a:prstGeom>
-          <a:solidFill>
-            <a:srgbClr val="E8F4FA"/>
-          </a:solidFill>
-          <a:ln>
-            <a:noFill/>
-          </a:ln>
-        </p:spPr>
-        <p:style>
-          <a:lnRef idx="1">
-            <a:schemeClr val="accent1"/>
-          </a:lnRef>
-          <a:fillRef idx="3">
-            <a:schemeClr val="accent1"/>
-          </a:fillRef>
-          <a:effectRef idx="2">
-            <a:schemeClr val="accent1"/>
-          </a:effectRef>
-          <a:fontRef idx="minor">
-            <a:schemeClr val="lt1"/>
-          </a:fontRef>
-        </p:style>
-        <p:txBody>
-          <a:bodyPr rtlCol="0" anchor="ctr"/>
-          <a:lstStyle/>
-          <a:p>
-            <a:pPr algn="ctr"/>
-          </a:p>
-        </p:txBody>
-      </p:sp>
-      <p:sp>
-        <p:nvSpPr>
-          <p:cNvPr id="19" name="Rounded Rectangle 18"/>
-          <p:cNvSpPr/>
-          <p:nvPr/>
-        </p:nvSpPr>
-        <p:spPr>
-          <a:xfrm>
-            <a:off x="594360" y="5394960"/>
-            <a:ext cx="438912" cy="438912"/>
-          </a:xfrm>
-          <a:prstGeom prst="roundRect">
-            <a:avLst>
-              <a:gd name="adj" fmla="val 12000"/>
-            </a:avLst>
-          </a:prstGeom>
-          <a:solidFill>
-            <a:srgbClr val="095292"/>
-          </a:solidFill>
-          <a:ln>
-            <a:noFill/>
-          </a:ln>
-        </p:spPr>
-        <p:style>
-          <a:lnRef idx="1">
-            <a:schemeClr val="accent1"/>
-          </a:lnRef>
-          <a:fillRef idx="3">
-            <a:schemeClr val="accent1"/>
-          </a:fillRef>
-          <a:effectRef idx="2">
-            <a:schemeClr val="accent1"/>
-          </a:effectRef>
-          <a:fontRef idx="minor">
-            <a:schemeClr val="lt1"/>
-          </a:fontRef>
-        </p:style>
-        <p:txBody>
-          <a:bodyPr rtlCol="0" anchor="ctr"/>
-          <a:lstStyle/>
-          <a:p>
-            <a:pPr algn="ctr"/>
-          </a:p>
-        </p:txBody>
-      </p:sp>
-      <p:sp>
-        <p:nvSpPr>
-          <p:cNvPr id="20" name="TextBox 19"/>
-          <p:cNvSpPr txBox="1"/>
-          <p:nvPr/>
-        </p:nvSpPr>
-        <p:spPr>
-          <a:xfrm>
-            <a:off x="594360" y="5394960"/>
-            <a:ext cx="438912" cy="438912"/>
-          </a:xfrm>
-          <a:prstGeom prst="rect">
-            <a:avLst/>
-          </a:prstGeom>
-          <a:noFill/>
-        </p:spPr>
-        <p:txBody>
-          <a:bodyPr wrap="square" anchor="ctr"/>
-          <a:lstStyle/>
-          <a:p>
-            <a:pPr algn="ctr"/>
-            <a:r>
-              <a:rPr sz="1600" b="1" i="0">
-                <a:solidFill>
-                  <a:srgbClr val="FFFFFF"/>
-                </a:solidFill>
-                <a:latin typeface="Calibri"/>
-              </a:rPr>
-              <a:t>4</a:t>
-            </a:r>
-          </a:p>
-        </p:txBody>
-      </p:sp>
-      <p:sp>
-        <p:nvSpPr>
-          <p:cNvPr id="21" name="TextBox 20"/>
-          <p:cNvSpPr txBox="1"/>
-          <p:nvPr/>
-        </p:nvSpPr>
-        <p:spPr>
-          <a:xfrm>
-            <a:off x="1188720" y="5180076"/>
-            <a:ext cx="10271455" cy="886968"/>
-          </a:xfrm>
-          <a:prstGeom prst="rect">
-            <a:avLst/>
-          </a:prstGeom>
-          <a:noFill/>
-        </p:spPr>
-        <p:txBody>
-          <a:bodyPr wrap="square" anchor="ctr"/>
-          <a:lstStyle/>
-          <a:p>
-            <a:r>
-              <a:rPr sz="1500" b="1" i="0">
-                <a:solidFill>
-                  <a:srgbClr val="095292"/>
-                </a:solidFill>
-                <a:latin typeface="Calibri"/>
-              </a:rPr>
-              <a:t>Guarda el PNG para tu PI</a:t>
+              <a:t>–   El criterio central de auditoria se llama trazabilidad: la propiedad de que un elemento se pueda seguir de un artefacto al siguiente sin cambiar de nombre ni desaparecer.</a:t>
             </a:r>
           </a:p>
           <a:p>
             <a:pPr>
-              <a:spcBef>
-                <a:spcPts val="200"/>
-              </a:spcBef>
+              <a:spcAft>
+                <a:spcPts val="800"/>
+              </a:spcAft>
             </a:pPr>
             <a:r>
-              <a:rPr sz="1300" b="0" i="0">
+              <a:rPr sz="2000" b="0" i="0">
                 <a:solidFill>
                   <a:srgbClr val="333333"/>
                 </a:solidFill>
                 <a:latin typeface="Calibri"/>
               </a:rPr>
-              <a:t>Exporta tambien la imagen a la carpeta de tu Proyecto Integrador. Esa copia es para tu informe; no reemplaza la respuesta en la plataforma.</a:t>
-            </a:r>
-          </a:p>
-        </p:txBody>
-      </p:sp>
-      <p:sp>
-        <p:nvSpPr>
-          <p:cNvPr id="22" name="TextBox 21"/>
+              <a:t>–   No es una formalidad burocratica, es el unico detector confiable de que el estudiante penso el sistema en vez de producir seis tareas independientes para seis notas distintas.</a:t>
+            </a:r>
+          </a:p>
+          <a:p>
+            <a:pPr>
+              <a:spcAft>
+                <a:spcPts val="800"/>
+              </a:spcAft>
+            </a:pPr>
+            <a:r>
+              <a:rPr sz="2000" b="0" i="0">
+                <a:solidFill>
+                  <a:srgbClr val="333333"/>
+                </a:solidFill>
+                <a:latin typeface="Calibri"/>
+              </a:rPr>
+              <a:t>–   Y se audita con preguntas mecanicas que cualquier docente puede hacer sin ser experto en el dominio del proyecto, lo que hace esta tecnica ensenable.</a:t>
+            </a:r>
+          </a:p>
+        </p:txBody>
+      </p:sp>
+      <p:sp>
+        <p:nvSpPr>
+          <p:cNvPr id="6" name="TextBox 5"/>
           <p:cNvSpPr txBox="1"/>
           <p:nvPr/>
         </p:nvSpPr>
@@ -8224,7 +11420,7 @@
                 </a:solidFill>
                 <a:latin typeface="Calibri"/>
               </a:rPr>
-              <a:t>PI CloudLite — entregable de hoy</a:t>
+              <a:t>Las cinco preguntas de coherencia, en orden (1/2)</a:t>
             </a:r>
           </a:p>
         </p:txBody>
@@ -8263,25 +11459,7 @@
                 </a:solidFill>
                 <a:latin typeface="Calibri"/>
               </a:rPr>
-              <a:t>–   </a:t>
-            </a:r>
-            <a:r>
-              <a:rPr sz="2000" b="1" i="0">
-                <a:solidFill>
-                  <a:srgbClr val="333333"/>
-                </a:solidFill>
-                <a:latin typeface="Calibri"/>
-              </a:rPr>
-              <a:t>Entregable:</a:t>
-            </a:r>
-            <a:r>
-              <a:rPr sz="2000" b="0" i="0">
-                <a:solidFill>
-                  <a:srgbClr val="333333"/>
-                </a:solidFill>
-                <a:latin typeface="Calibri"/>
-              </a:rPr>
-              <a:t> Paquete v1: Context + Containers + Deployment + Dockerfile + Actions + informe 60%+</a:t>
+              <a:t>–   Las preguntas de coherencia, aplicadas a CloudLite, son cinco y conviene hacerlas en orden.</a:t>
             </a:r>
           </a:p>
           <a:p>
@@ -8297,16 +11475,7 @@
                 </a:solidFill>
                 <a:latin typeface="Calibri"/>
               </a:rPr>
-              <a:t>–   Herramienta: </a:t>
-            </a:r>
-            <a:r>
-              <a:rPr sz="2000" b="1" i="0">
-                <a:solidFill>
-                  <a:srgbClr val="333333"/>
-                </a:solidFill>
-                <a:latin typeface="Calibri"/>
-              </a:rPr>
-              <a:t>draw.io · GitHub · Google Docs</a:t>
+              <a:t>–   Primera: cada contenedor del C4 de la Clase 4 aparece en el diagrama de despliegue de la Clase 7 y con el mismo nombre</a:t>
             </a:r>
           </a:p>
           <a:p>
@@ -8322,25 +11491,7 @@
                 </a:solidFill>
                 <a:latin typeface="Calibri"/>
               </a:rPr>
-              <a:t>–   Todo lo que construyan hoy entra al </a:t>
-            </a:r>
-            <a:r>
-              <a:rPr sz="2000" b="1" i="0">
-                <a:solidFill>
-                  <a:srgbClr val="333333"/>
-                </a:solidFill>
-                <a:latin typeface="Calibri"/>
-              </a:rPr>
-              <a:t>informe/repo del PI</a:t>
-            </a:r>
-            <a:r>
-              <a:rPr sz="2000" b="0" i="0">
-                <a:solidFill>
-                  <a:srgbClr val="333333"/>
-                </a:solidFill>
-                <a:latin typeface="Calibri"/>
-              </a:rPr>
-              <a:t> (no es lab suelto).</a:t>
+              <a:t>–   Si el C4 dice "servicio de notificaciones" y el despliegue dice "worker de correos", o son la misma cosa mal nombrada o son dos cosas y falta una.</a:t>
             </a:r>
           </a:p>
           <a:p>
@@ -8356,7 +11507,23 @@
                 </a:solidFill>
                 <a:latin typeface="Calibri"/>
               </a:rPr>
-              <a:t>–   Individual por defecto · el docente puede autorizar equipos de 2–3; la entrega en la plataforma del curso siempre es individual.</a:t>
+              <a:t>–   Segunda: cada actor y sistema externo del diagrama de Contexto sigue existiendo</a:t>
+            </a:r>
+          </a:p>
+          <a:p>
+            <a:pPr>
+              <a:spcAft>
+                <a:spcPts val="800"/>
+              </a:spcAft>
+            </a:pPr>
+            <a:r>
+              <a:rPr sz="2000" b="0" i="0">
+                <a:solidFill>
+                  <a:srgbClr val="333333"/>
+                </a:solidFill>
+                <a:latin typeface="Calibri"/>
+              </a:rPr>
+              <a:t>–   El caso frecuente es que el estudiante dibujo en la Clase 1 una pasarela de pagos y hoy ningun contenedor habla con ella, asi que o desaparecio del alcance y hay que borrarla o esta olvidada y es un hueco.</a:t>
             </a:r>
           </a:p>
         </p:txBody>

--- a/Arquitectura de Sistemas Computacionales/Clases/Clase 11 - Avance del proyecto final/Presentacion.pptx
+++ b/Arquitectura de Sistemas Computacionales/Clases/Clase 11 - Avance del proyecto final/Presentacion.pptx
@@ -28,6 +28,9 @@
     <p:sldId id="276" r:id="rId27"/>
     <p:sldId id="277" r:id="rId28"/>
     <p:sldId id="278" r:id="rId29"/>
+    <p:sldId id="279" r:id="rId30"/>
+    <p:sldId id="280" r:id="rId31"/>
+    <p:sldId id="281" r:id="rId32"/>
   </p:sldIdLst>
   <p:sldSz cx="12191695" cy="6858000" type="screen4x3"/>
   <p:notesSz cx="6858000" cy="9144000"/>
@@ -3586,7 +3589,7 @@
                 </a:solidFill>
                 <a:latin typeface="Calibri"/>
               </a:rPr>
-              <a:t>Las cinco preguntas de coherencia, en orden (2/2)</a:t>
+              <a:t>Las cinco preguntas de coherencia, en orden (1/2)</a:t>
             </a:r>
           </a:p>
         </p:txBody>
@@ -3625,7 +3628,7 @@
                 </a:solidFill>
                 <a:latin typeface="Calibri"/>
               </a:rPr>
-              <a:t>–   Tercera: cada amenaza del modelo STRIDE de la Clase 6 tiene un control visible en el despliegue; si la amenaza es acceso no autorizado a la base de datos y el diagrama la muestra en la subred publica, el control existe en el documento y no en el diseno.</a:t>
+              <a:t>–   Las preguntas de coherencia, aplicadas a CloudLite, son cinco y conviene hacerlas en orden.</a:t>
             </a:r>
           </a:p>
           <a:p>
@@ -3641,7 +3644,7 @@
                 </a:solidFill>
                 <a:latin typeface="Calibri"/>
               </a:rPr>
-              <a:t>–   Cuarta: los componentes de la tabla de costos de la Clase 10 son los mismos contenedores, no una lista inventada.</a:t>
+              <a:t>–   Primera: cada contenedor del C4 de la Clase 4 aparece en el diagrama de despliegue de la Clase 7 y con el mismo nombre</a:t>
             </a:r>
           </a:p>
           <a:p>
@@ -3657,7 +3660,7 @@
                 </a:solidFill>
                 <a:latin typeface="Calibri"/>
               </a:rPr>
-              <a:t>–   Quinta: el workflow de Actions se ejecuto al menos una vez con resultado visible, porque un archivo YAML que nunca corrio es una intencion, no evidencia.</a:t>
+              <a:t>–   Si el C4 dice "servicio de notificaciones" y el despliegue dice "worker de correos", o son la misma cosa mal nombrada o son dos cosas y falta una.</a:t>
             </a:r>
           </a:p>
           <a:p>
@@ -3673,7 +3676,23 @@
                 </a:solidFill>
                 <a:latin typeface="Calibri"/>
               </a:rPr>
-              <a:t>–   Ese es el nucleo del acta: no una nota, sino cuales de estas cinco cadenas estan rotas en cada proyecto.</a:t>
+              <a:t>–   Segunda: cada actor y sistema externo del diagrama de Contexto sigue existiendo</a:t>
+            </a:r>
+          </a:p>
+          <a:p>
+            <a:pPr>
+              <a:spcAft>
+                <a:spcPts val="800"/>
+              </a:spcAft>
+            </a:pPr>
+            <a:r>
+              <a:rPr sz="2000" b="0" i="0">
+                <a:solidFill>
+                  <a:srgbClr val="333333"/>
+                </a:solidFill>
+                <a:latin typeface="Calibri"/>
+              </a:rPr>
+              <a:t>–   El caso frecuente es que el estudiante dibujo en la Clase 1 una pasarela de pagos y hoy ningun contenedor habla con ella, asi que o desaparecio del alcance y hay que borrarla o esta olvidada y es un hueco.</a:t>
             </a:r>
           </a:p>
         </p:txBody>
@@ -3854,7 +3873,7 @@
                 </a:solidFill>
                 <a:latin typeface="Calibri"/>
               </a:rPr>
-              <a:t>Scope creep y arquitectura de papel: las dos patologias con nombre propio (1/2)</a:t>
+              <a:t>Las cinco preguntas de coherencia, en orden (2/2)</a:t>
             </a:r>
           </a:p>
         </p:txBody>
@@ -3893,7 +3912,7 @@
                 </a:solidFill>
                 <a:latin typeface="Calibri"/>
               </a:rPr>
-              <a:t>–   Hay dos patologias con nombre propio que arruinan las sustentaciones.</a:t>
+              <a:t>–   Tercera: cada amenaza del modelo STRIDE de la Clase 6 tiene un control visible en el despliegue; si la amenaza es acceso no autorizado a la base de datos y el diagrama la muestra en la subred publica, el control existe en el documento y no en el diseno.</a:t>
             </a:r>
           </a:p>
           <a:p>
@@ -3909,7 +3928,7 @@
                 </a:solidFill>
                 <a:latin typeface="Calibri"/>
               </a:rPr>
-              <a:t>–   La primera es el scope creep, el crecimiento no controlado del alcance: el sistema suma capacidades clase por clase, cada una razonable por si misma, hasta que el proyecto tiene un alcance que no se puede documentar ni defender en el tiempo restante.</a:t>
+              <a:t>–   Cuarta: los componentes de la tabla de costos de la Clase 10 son los mismos contenedores, no una lista inventada.</a:t>
             </a:r>
           </a:p>
           <a:p>
@@ -3925,7 +3944,7 @@
                 </a:solidFill>
                 <a:latin typeface="Calibri"/>
               </a:rPr>
-              <a:t>–   Se detecta con un dato objetivo, no con intuicion: en la Clase 1 cada estudiante definio entre tres y cinco capacidades para CloudLite, asi que basta contar las de hoy y compararlas con esa linea base</a:t>
+              <a:t>–   Quinta: el workflow de Actions se ejecuto al menos una vez con resultado visible, porque un archivo YAML que nunca corrio es una intencion, no evidencia.</a:t>
             </a:r>
           </a:p>
           <a:p>
@@ -3941,39 +3960,7 @@
                 </a:solidFill>
                 <a:latin typeface="Calibri"/>
               </a:rPr>
-              <a:t>–   Si eran cuatro y hoy son nueve, hay scope creep, y da igual que las nuevas suenen interesantes.</a:t>
-            </a:r>
-          </a:p>
-          <a:p>
-            <a:pPr>
-              <a:spcAft>
-                <a:spcPts val="800"/>
-              </a:spcAft>
-            </a:pPr>
-            <a:r>
-              <a:rPr sz="2000" b="0" i="0">
-                <a:solidFill>
-                  <a:srgbClr val="333333"/>
-                </a:solidFill>
-                <a:latin typeface="Calibri"/>
-              </a:rPr>
-              <a:t>–   La respuesta correcta no es prohibir ideas sino congelar el alcance y abrir una lista de aparcamiento, un anexo donde las capacidades extra quedan escritas como "fuera de alcance v1</a:t>
-            </a:r>
-          </a:p>
-          <a:p>
-            <a:pPr>
-              <a:spcAft>
-                <a:spcPts val="800"/>
-              </a:spcAft>
-            </a:pPr>
-            <a:r>
-              <a:rPr sz="2000" b="0" i="0">
-                <a:solidFill>
-                  <a:srgbClr val="333333"/>
-                </a:solidFill>
-                <a:latin typeface="Calibri"/>
-              </a:rPr>
-              <a:t>–   Candidatas a v2": preserva la idea, protege el cronograma y es lo que hace un equipo profesional al cerrar un release.</a:t>
+              <a:t>–   Ese es el nucleo del acta: no una nota, sino cuales de estas cinco cadenas estan rotas en cada proyecto.</a:t>
             </a:r>
           </a:p>
         </p:txBody>
@@ -4154,7 +4141,7 @@
                 </a:solidFill>
                 <a:latin typeface="Calibri"/>
               </a:rPr>
-              <a:t>Scope creep y arquitectura de papel: las dos patologias con nombre propio (2/2)</a:t>
+              <a:t>Scope creep y arquitectura de papel: las dos patologias con nombre propio (1/2)</a:t>
             </a:r>
           </a:p>
         </p:txBody>
@@ -4193,7 +4180,7 @@
                 </a:solidFill>
                 <a:latin typeface="Calibri"/>
               </a:rPr>
-              <a:t>–   La segunda patologia es el teatro de microservicios: servicios separados en el diagrama que en la practica no son unidades independientes.</a:t>
+              <a:t>–   La primera es el scope creep, el crecimiento no controlado del alcance: el sistema suma capacidades clase por clase, cada una razonable por si misma, hasta que el proyecto tiene un alcance que no se puede documentar ni defender en el tiempo restante.</a:t>
             </a:r>
           </a:p>
           <a:p>
@@ -4209,7 +4196,7 @@
                 </a:solidFill>
                 <a:latin typeface="Calibri"/>
               </a:rPr>
-              <a:t>–   Se detecta con cuatro preguntas de una linea, todas respondibles por el estudiante: se puede desplegar ese servicio sin desplegar los otros, tiene sus propios datos o comparte tablas con el vecino, puede fallar sin tumbar a los demas</a:t>
+              <a:t>–   Se detecta con un dato objetivo, no con intuicion: en la Clase 1 cada estudiante definio entre tres y cinco capacidades para CloudLite, asi que basta contar las de hoy y compararlas con esa linea base</a:t>
             </a:r>
           </a:p>
           <a:p>
@@ -4225,7 +4212,7 @@
                 </a:solidFill>
                 <a:latin typeface="Calibri"/>
               </a:rPr>
-              <a:t>–   Y existe una razon de negocio por la que cambiaria en un momento distinto al resto.</a:t>
+              <a:t>–   Si eran cuatro y hoy son nueve, hay scope creep, y da igual que las nuevas suenen interesantes.</a:t>
             </a:r>
           </a:p>
           <a:p>
@@ -4241,23 +4228,7 @@
                 </a:solidFill>
                 <a:latin typeface="Calibri"/>
               </a:rPr>
-              <a:t>–   En CloudLite el caso clasico es el "servicio de autenticacion" dibujado como caja aparte que en el repositorio es un modulo dentro de la misma API, escribe en las mismas tablas y se despliega en el mismo contenedor.</a:t>
-            </a:r>
-          </a:p>
-          <a:p>
-            <a:pPr>
-              <a:spcAft>
-                <a:spcPts val="800"/>
-              </a:spcAft>
-            </a:pPr>
-            <a:r>
-              <a:rPr sz="2000" b="0" i="0">
-                <a:solidFill>
-                  <a:srgbClr val="333333"/>
-                </a:solidFill>
-                <a:latin typeface="Calibri"/>
-              </a:rPr>
-              <a:t>–   No es un microservicio, es un modulo, y decirlo no castiga al estudiante: corrige el vocabulario antes del Parcial 3, donde esa distincion se evalua.</a:t>
+              <a:t>–   La segunda patologia es el teatro de microservicios: servicios separados en el diagrama que en la practica no son unidades independientes.</a:t>
             </a:r>
           </a:p>
         </p:txBody>
@@ -4438,7 +4409,7 @@
                 </a:solidFill>
                 <a:latin typeface="Calibri"/>
               </a:rPr>
-              <a:t>Retroalimentacion accionable: observacion, evidencia, impacto y accion con fecha</a:t>
+              <a:t>Scope creep y arquitectura de papel: las dos patologias con nombre propio (2/2)</a:t>
             </a:r>
           </a:p>
         </p:txBody>
@@ -4477,7 +4448,7 @@
                 </a:solidFill>
                 <a:latin typeface="Calibri"/>
               </a:rPr>
-              <a:t>–   La retroalimentacion es la mitad del valor del dia y tiene tecnica propia.</a:t>
+              <a:t>–   Se detecta con cuatro preguntas de una linea, todas respondibles por el estudiante: se puede desplegar ese servicio sin desplegar los otros, tiene sus propios datos o comparte tablas con el vecino, puede fallar sin tumbar a los demas</a:t>
             </a:r>
           </a:p>
           <a:p>
@@ -4493,7 +4464,7 @@
                 </a:solidFill>
                 <a:latin typeface="Calibri"/>
               </a:rPr>
-              <a:t>–   Una retroalimentacion accionable tiene cuatro partes: observacion, evidencia, impacto y accion con fecha. "Falta seguridad" no cumple ninguna. "En el diagrama de despliegue la base de datos esta en la subred publica</a:t>
+              <a:t>–   Y existe una razon de negocio por la que cambiaria en un momento distinto al resto.</a:t>
             </a:r>
           </a:p>
           <a:p>
@@ -4509,7 +4480,7 @@
                 </a:solidFill>
                 <a:latin typeface="Calibri"/>
               </a:rPr>
-              <a:t>–   Contradice el control que ustedes escribieron para la amenaza de acceso no autorizado</a:t>
+              <a:t>–   En CloudLite el caso clasico es el "servicio de autenticacion" dibujado como caja aparte que en el repositorio es un modulo dentro de la misma API, escribe en las mismas tablas y se despliega en el mismo contenedor.</a:t>
             </a:r>
           </a:p>
           <a:p>
@@ -4525,39 +4496,7 @@
                 </a:solidFill>
                 <a:latin typeface="Calibri"/>
               </a:rPr>
-              <a:t>–   Si lo sustentan asi en la Clase 15 el evaluador concluira que el modelo de amenazas se escribio sin mirar el diagrama; muevanla a subred privada y dejen solo la API expuesta, antes de la Clase 12" cumple las cuatro.</a:t>
-            </a:r>
-          </a:p>
-          <a:p>
-            <a:pPr>
-              <a:spcAft>
-                <a:spcPts val="800"/>
-              </a:spcAft>
-            </a:pPr>
-            <a:r>
-              <a:rPr sz="2000" b="0" i="0">
-                <a:solidFill>
-                  <a:srgbClr val="333333"/>
-                </a:solidFill>
-                <a:latin typeface="Calibri"/>
-              </a:rPr>
-              <a:t>–   Y la revision entre pares cumple una funcion que la del docente no puede: explicarle el sistema a otro estudiante obliga a verbalizar decisiones que nunca se dijeron en voz alta, y ahi el propio autor descubre sus huecos.</a:t>
-            </a:r>
-          </a:p>
-          <a:p>
-            <a:pPr>
-              <a:spcAft>
-                <a:spcPts val="800"/>
-              </a:spcAft>
-            </a:pPr>
-            <a:r>
-              <a:rPr sz="2000" b="0" i="0">
-                <a:solidFill>
-                  <a:srgbClr val="333333"/>
-                </a:solidFill>
-                <a:latin typeface="Calibri"/>
-              </a:rPr>
-              <a:t>–   El formato eficiente es de siete a ocho minutos por proyecto, con reloj visible, y el revisor asignado (otro estudiante, u otro equipo si el docente los autorizo) entregando por escrito una observacion y una pregunta.</a:t>
+              <a:t>–   No es un microservicio, es un modulo, y decirlo no castiga al estudiante: corrige el vocabulario antes del Parcial 3, donde esa distincion se evalua.</a:t>
             </a:r>
           </a:p>
         </p:txBody>
@@ -4738,7 +4677,7 @@
                 </a:solidFill>
                 <a:latin typeface="Calibri"/>
               </a:rPr>
-              <a:t>El semaforo: el umbral que decide si el proyecto va a tiempo (1/2)</a:t>
+              <a:t>Retroalimentacion accionable: observacion, evidencia, impacto y accion con fecha (1/2)</a:t>
             </a:r>
           </a:p>
         </p:txBody>
@@ -4777,7 +4716,7 @@
                 </a:solidFill>
                 <a:latin typeface="Calibri"/>
               </a:rPr>
-              <a:t>–   Falta el criterio para decidir si un proyecto va a tiempo, y aqui el docente necesita un umbral y no una impresion.</a:t>
+              <a:t>–   La retroalimentacion es la mitad del valor del dia y tiene tecnica propia.</a:t>
             </a:r>
           </a:p>
           <a:p>
@@ -4793,7 +4732,7 @@
                 </a:solidFill>
                 <a:latin typeface="Calibri"/>
               </a:rPr>
-              <a:t>–   Con seis artefactos esperados la regla practica es un semaforo: verde si estan los seis y a lo sumo una cadena de trazabilidad rota</a:t>
+              <a:t>–   Una retroalimentacion accionable tiene cuatro partes: observacion, evidencia, impacto y accion con fecha. "Falta seguridad" no cumple ninguna. "En el diagrama de despliegue la base de datos esta en la subred publica</a:t>
             </a:r>
           </a:p>
           <a:p>
@@ -4809,7 +4748,7 @@
                 </a:solidFill>
                 <a:latin typeface="Calibri"/>
               </a:rPr>
-              <a:t>–   Amarillo si hay cinco de seis, o dos o tres cadenas rotas pero corregibles editando documentos; rojo si falta el C4 de Contenedores o el diagrama de despliegue</a:t>
+              <a:t>–   Contradice el control que ustedes escribieron para la amenaza de acceso no autorizado</a:t>
             </a:r>
           </a:p>
           <a:p>
@@ -4825,23 +4764,7 @@
                 </a:solidFill>
                 <a:latin typeface="Calibri"/>
               </a:rPr>
-              <a:t>–   Que son la columna vertebral y sin los cuales el resto no se puede evaluar, o si el repositorio no existe.</a:t>
-            </a:r>
-          </a:p>
-          <a:p>
-            <a:pPr>
-              <a:spcAft>
-                <a:spcPts val="800"/>
-              </a:spcAft>
-            </a:pPr>
-            <a:r>
-              <a:rPr sz="2000" b="0" i="0">
-                <a:solidFill>
-                  <a:srgbClr val="333333"/>
-                </a:solidFill>
-                <a:latin typeface="Calibri"/>
-              </a:rPr>
-              <a:t>–   El umbral de seis no es una ley de la ingenieria, es la contabilidad de este curso, y decirlo asi evita que el estudiante lo memorice como estandar internacional.</a:t>
+              <a:t>–   Si lo sustentan asi en la Clase 15 el evaluador concluira que el modelo de amenazas se escribio sin mirar el diagrama; muevanla a subred privada y dejen solo la API expuesta, antes de la Clase 12" cumple las cuatro.</a:t>
             </a:r>
           </a:p>
         </p:txBody>
@@ -5022,7 +4945,7 @@
                 </a:solidFill>
                 <a:latin typeface="Calibri"/>
               </a:rPr>
-              <a:t>El semaforo: el umbral que decide si el proyecto va a tiempo (2/2)</a:t>
+              <a:t>Retroalimentacion accionable: observacion, evidencia, impacto y accion con fecha (2/2)</a:t>
             </a:r>
           </a:p>
         </p:txBody>
@@ -5061,7 +4984,7 @@
                 </a:solidFill>
                 <a:latin typeface="Calibri"/>
               </a:rPr>
-              <a:t>–   Lo transferible es la idea de fondo: un checkpoint se evalua por evidencia presente, no por promesas.</a:t>
+              <a:t>–   Y la revision entre pares cumple una funcion que la del docente no puede: explicarle el sistema a otro estudiante obliga a verbalizar decisiones que nunca se dijeron en voz alta, y ahi el propio autor descubre sus huecos.</a:t>
             </a:r>
           </a:p>
           <a:p>
@@ -5077,23 +5000,7 @@
                 </a:solidFill>
                 <a:latin typeface="Calibri"/>
               </a:rPr>
-              <a:t>–   Cuando un estudiante dice "eso ya lo tenemos, solo falta subirlo", el estado es amarillo y el acta lo registra con fecha de cierre; no es desconfianza, es que en un proyecto lo que no esta en el repositorio no existe.</a:t>
-            </a:r>
-          </a:p>
-          <a:p>
-            <a:pPr>
-              <a:spcAft>
-                <a:spcPts val="800"/>
-              </a:spcAft>
-            </a:pPr>
-            <a:r>
-              <a:rPr sz="2000" b="0" i="0">
-                <a:solidFill>
-                  <a:srgbClr val="333333"/>
-                </a:solidFill>
-                <a:latin typeface="Calibri"/>
-              </a:rPr>
-              <a:t>–   Para un proyecto en rojo el plan de recuperacion debe reducir alcance, nunca agregar trabajo: menos capacidades, menos servicios, y toda la energia en las dos piezas que faltan.</a:t>
+              <a:t>–   El formato eficiente es de siete a ocho minutos por proyecto, con reloj visible, y el revisor asignado (otro estudiante, u otro equipo si el docente los autorizo) entregando por escrito una observacion y una pregunta.</a:t>
             </a:r>
           </a:p>
         </p:txBody>
@@ -5274,7 +5181,7 @@
                 </a:solidFill>
                 <a:latin typeface="Calibri"/>
               </a:rPr>
-              <a:t>Preguntas frecuentes y cierre conceptual () (1/2)</a:t>
+              <a:t>El semaforo: el umbral que decide si el proyecto va a tiempo (1/2)</a:t>
             </a:r>
           </a:p>
         </p:txBody>
@@ -5313,7 +5220,7 @@
                 </a:solidFill>
                 <a:latin typeface="Calibri"/>
               </a:rPr>
-              <a:t>–   La primera es si esto se califica; la respuesta honesta es que este checkpoint no es la sustentacion final, que ocurre en la Clase 15, ni el Parcial 3, que es la evaluacion escrita de la Clase 14</a:t>
+              <a:t>–   Falta el criterio para decidir si un proyecto va a tiempo, y aqui el docente necesita un umbral y no una impresion.</a:t>
             </a:r>
           </a:p>
           <a:p>
@@ -5329,7 +5236,7 @@
                 </a:solidFill>
                 <a:latin typeface="Calibri"/>
               </a:rPr>
-              <a:t>–   Y que hoy se registra estado y compromisos, pero el acta es el insumo con el que se mirara la entrega final: un gap senalado hoy y no cerrado pesa mucho mas que uno que aparecio despues.</a:t>
+              <a:t>–   Con seis artefactos esperados la regla practica es un semaforo: verde si estan los seis y a lo sumo una cadena de trazabilidad rota</a:t>
             </a:r>
           </a:p>
           <a:p>
@@ -5345,7 +5252,7 @@
                 </a:solidFill>
                 <a:latin typeface="Calibri"/>
               </a:rPr>
-              <a:t>–   La segunda es por que revisa un companero si el que califica es el docente, y la respuesta es que la revision por pares es practica estandar en la industria y que su valor no esta en el juicio del par sino en la obligacion de explicar</a:t>
+              <a:t>–   Amarillo si hay cinco de seis, o dos o tres cadenas rotas pero corregibles editando documentos; rojo si falta el C4 de Contenedores o el diagrama de despliegue</a:t>
             </a:r>
           </a:p>
           <a:p>
@@ -5361,7 +5268,7 @@
                 </a:solidFill>
                 <a:latin typeface="Calibri"/>
               </a:rPr>
-              <a:t>–   Ademas el par pregunta lo que el docente ya asume, y esas son justo las preguntas que llegan en un Q&amp;A real.</a:t>
+              <a:t>–   Que son la columna vertebral y sin los cuales el resto no se puede evaluar, o si el repositorio no existe.</a:t>
             </a:r>
           </a:p>
           <a:p>
@@ -5377,23 +5284,7 @@
                 </a:solidFill>
                 <a:latin typeface="Calibri"/>
               </a:rPr>
-              <a:t>–   La tercera, la mas delicada, es si cambiar el diagrama ahora significa perder el trabajo hecho</a:t>
-            </a:r>
-          </a:p>
-          <a:p>
-            <a:pPr>
-              <a:spcAft>
-                <a:spcPts val="800"/>
-              </a:spcAft>
-            </a:pPr>
-            <a:r>
-              <a:rPr sz="2000" b="0" i="0">
-                <a:solidFill>
-                  <a:srgbClr val="333333"/>
-                </a:solidFill>
-                <a:latin typeface="Calibri"/>
-              </a:rPr>
-              <a:t>–   Y la respuesta debe ser tajante: no, porque el artefacto no es el entregable, la decision documentada lo es; un diagrama corregido con una nota de por que cambio vale mas que uno intacto, y ese cambio justificado es exactamente lo que un ADR registra.</a:t>
+              <a:t>–   El umbral de seis no es una ley de la ingenieria, es la contabilidad de este curso, y decirlo asi evita que el estudiante lo memorice como estandar internacional.</a:t>
             </a:r>
           </a:p>
         </p:txBody>
@@ -5574,7 +5465,7 @@
                 </a:solidFill>
                 <a:latin typeface="Calibri"/>
               </a:rPr>
-              <a:t>Preguntas frecuentes y cierre conceptual () (2/2)</a:t>
+              <a:t>El semaforo: el umbral que decide si el proyecto va a tiempo (2/2)</a:t>
             </a:r>
           </a:p>
         </p:txBody>
@@ -5613,7 +5504,7 @@
                 </a:solidFill>
                 <a:latin typeface="Calibri"/>
               </a:rPr>
-              <a:t>–   Error tipico del docente que no domina el tema: dejar pasar el checkpoint con un "todo bien, sigan asi".</a:t>
+              <a:t>–   Lo transferible es la idea de fondo: un checkpoint se evalua por evidencia presente, no por promesas.</a:t>
             </a:r>
           </a:p>
           <a:p>
@@ -5629,7 +5520,7 @@
                 </a:solidFill>
                 <a:latin typeface="Calibri"/>
               </a:rPr>
-              <a:t>–   La consecuencia no se ve hoy, se ve en la Clase 15, cuando varios estudiantes sustentan con la base de datos expuesta, con servicios que no son servicios y con nueve capacidades que nunca cerraron</a:t>
+              <a:t>–   Cuando un estudiante dice "eso ya lo tenemos, solo falta subirlo", el estado es amarillo y el acta lo registra con fecha de cierre; no es desconfianza, es que en un proyecto lo que no esta en el repositorio no existe.</a:t>
             </a:r>
           </a:p>
           <a:p>
@@ -5645,55 +5536,7 @@
                 </a:solidFill>
                 <a:latin typeface="Calibri"/>
               </a:rPr>
-              <a:t>–   Y el docente descubre que las tenia todas a la vista un mes antes; ademas el estudiante interpreta el silencio como aprobacion, asi que el error queda ratificado y luego reclama con razon que nadie se lo advirtio.</a:t>
-            </a:r>
-          </a:p>
-          <a:p>
-            <a:pPr>
-              <a:spcAft>
-                <a:spcPts val="800"/>
-              </a:spcAft>
-            </a:pPr>
-            <a:r>
-              <a:rPr sz="2000" b="0" i="0">
-                <a:solidFill>
-                  <a:srgbClr val="333333"/>
-                </a:solidFill>
-                <a:latin typeface="Calibri"/>
-              </a:rPr>
-              <a:t>–   El segundo error es convertir el checkpoint en clase magistral: cuando el docente detecta un vacio conceptual y se pone a reexplicar contenedores o STRIDE durante veinte minutos</a:t>
-            </a:r>
-          </a:p>
-          <a:p>
-            <a:pPr>
-              <a:spcAft>
-                <a:spcPts val="800"/>
-              </a:spcAft>
-            </a:pPr>
-            <a:r>
-              <a:rPr sz="2000" b="0" i="0">
-                <a:solidFill>
-                  <a:srgbClr val="333333"/>
-                </a:solidFill>
-                <a:latin typeface="Calibri"/>
-              </a:rPr>
-              <a:t>–   Se consume el tiempo de los estudiantes que faltan, la mitad del curso queda sin retroalimentacion y el acta sale a medias.</a:t>
-            </a:r>
-          </a:p>
-          <a:p>
-            <a:pPr>
-              <a:spcAft>
-                <a:spcPts val="800"/>
-              </a:spcAft>
-            </a:pPr>
-            <a:r>
-              <a:rPr sz="2000" b="0" i="0">
-                <a:solidFill>
-                  <a:srgbClr val="333333"/>
-                </a:solidFill>
-                <a:latin typeface="Calibri"/>
-              </a:rPr>
-              <a:t>–   Lo correcto es anotar el vacio, dar la accion concreta con fecha y seguir; si el vacio es general al grupo, se atiende en cinco minutos al cierre para todos, no proyecto por proyecto.</a:t>
+              <a:t>–   Para un proyecto en rojo el plan de recuperacion debe reducir alcance, nunca agregar trabajo: menos capacidades, menos servicios, y toda la energia en las dos piezas que faltan.</a:t>
             </a:r>
           </a:p>
         </p:txBody>
@@ -5768,7 +5611,7 @@
         <p:spPr>
           <a:xfrm>
             <a:off x="0" y="0"/>
-            <a:ext cx="12191695" cy="1170432"/>
+            <a:ext cx="12191695" cy="960120"/>
           </a:xfrm>
           <a:prstGeom prst="rect">
             <a:avLst/>
@@ -5810,7 +5653,7 @@
         </p:nvSpPr>
         <p:spPr>
           <a:xfrm>
-            <a:off x="0" y="1170432"/>
+            <a:off x="0" y="960120"/>
             <a:ext cx="12191695" cy="41148"/>
           </a:xfrm>
           <a:prstGeom prst="rect">
@@ -5854,7 +5697,7 @@
         <p:spPr>
           <a:xfrm>
             <a:off x="457200" y="164592"/>
-            <a:ext cx="11277295" cy="384048"/>
+            <a:ext cx="11277295" cy="502920"/>
           </a:xfrm>
           <a:prstGeom prst="rect">
             <a:avLst/>
@@ -5874,7 +5717,7 @@
                 </a:solidFill>
                 <a:latin typeface="Calibri"/>
               </a:rPr>
-              <a:t>Herramientas de hoy</a:t>
+              <a:t>Preguntas frecuentes y cierre conceptual () (1/3)</a:t>
             </a:r>
           </a:p>
         </p:txBody>
@@ -5887,8 +5730,8 @@
         </p:nvSpPr>
         <p:spPr>
           <a:xfrm>
-            <a:off x="457200" y="566928"/>
-            <a:ext cx="11277295" cy="411480"/>
+            <a:off x="457200" y="1170432"/>
+            <a:ext cx="11277295" cy="5230368"/>
           </a:xfrm>
           <a:prstGeom prst="rect">
             <a:avLst/>
@@ -5901,1041 +5744,74 @@
           </a:bodyPr>
           <a:lstStyle/>
           <a:p>
-            <a:r>
-              <a:rPr sz="1400" b="0" i="0">
-                <a:solidFill>
-                  <a:srgbClr val="B8D8EE"/>
-                </a:solidFill>
-                <a:latin typeface="Calibri"/>
-              </a:rPr>
-              <a:t>Gratis · navegador o free tier · sin cuenta de pago</a:t>
-            </a:r>
-          </a:p>
-        </p:txBody>
-      </p:sp>
-      <p:sp>
-        <p:nvSpPr>
-          <p:cNvPr id="6" name="Rounded Rectangle 5"/>
-          <p:cNvSpPr/>
-          <p:nvPr/>
-        </p:nvSpPr>
-        <p:spPr>
-          <a:xfrm>
-            <a:off x="457200" y="1591056"/>
-            <a:ext cx="3624986" cy="2299716"/>
-          </a:xfrm>
-          <a:prstGeom prst="roundRect">
-            <a:avLst>
-              <a:gd name="adj" fmla="val 12000"/>
-            </a:avLst>
-          </a:prstGeom>
-          <a:solidFill>
-            <a:srgbClr val="F2F2F2"/>
-          </a:solidFill>
-          <a:ln>
-            <a:noFill/>
-          </a:ln>
-        </p:spPr>
-        <p:style>
-          <a:lnRef idx="1">
-            <a:schemeClr val="accent1"/>
-          </a:lnRef>
-          <a:fillRef idx="3">
-            <a:schemeClr val="accent1"/>
-          </a:fillRef>
-          <a:effectRef idx="2">
-            <a:schemeClr val="accent1"/>
-          </a:effectRef>
-          <a:fontRef idx="minor">
-            <a:schemeClr val="lt1"/>
-          </a:fontRef>
-        </p:style>
-        <p:txBody>
-          <a:bodyPr rtlCol="0" anchor="ctr"/>
-          <a:lstStyle/>
-          <a:p>
-            <a:pPr algn="ctr"/>
-          </a:p>
-        </p:txBody>
-      </p:sp>
-      <p:sp>
-        <p:nvSpPr>
-          <p:cNvPr id="7" name="Rectangle 6"/>
-          <p:cNvSpPr/>
-          <p:nvPr/>
-        </p:nvSpPr>
-        <p:spPr>
-          <a:xfrm>
-            <a:off x="457200" y="1591056"/>
-            <a:ext cx="3624986" cy="64008"/>
-          </a:xfrm>
-          <a:prstGeom prst="rect">
-            <a:avLst/>
-          </a:prstGeom>
-          <a:solidFill>
-            <a:srgbClr val="095292"/>
-          </a:solidFill>
-          <a:ln>
-            <a:noFill/>
-          </a:ln>
-        </p:spPr>
-        <p:style>
-          <a:lnRef idx="1">
-            <a:schemeClr val="accent1"/>
-          </a:lnRef>
-          <a:fillRef idx="3">
-            <a:schemeClr val="accent1"/>
-          </a:fillRef>
-          <a:effectRef idx="2">
-            <a:schemeClr val="accent1"/>
-          </a:effectRef>
-          <a:fontRef idx="minor">
-            <a:schemeClr val="lt1"/>
-          </a:fontRef>
-        </p:style>
-        <p:txBody>
-          <a:bodyPr rtlCol="0" anchor="ctr"/>
-          <a:lstStyle/>
-          <a:p>
-            <a:pPr algn="ctr"/>
-          </a:p>
-        </p:txBody>
-      </p:sp>
-      <p:sp>
-        <p:nvSpPr>
-          <p:cNvPr id="8" name="Rectangle 7"/>
-          <p:cNvSpPr/>
-          <p:nvPr/>
-        </p:nvSpPr>
-        <p:spPr>
-          <a:xfrm>
-            <a:off x="457200" y="1655064"/>
-            <a:ext cx="3624986" cy="27432"/>
-          </a:xfrm>
-          <a:prstGeom prst="rect">
-            <a:avLst/>
-          </a:prstGeom>
-          <a:solidFill>
-            <a:srgbClr val="FFD000"/>
-          </a:solidFill>
-          <a:ln>
-            <a:noFill/>
-          </a:ln>
-        </p:spPr>
-        <p:style>
-          <a:lnRef idx="1">
-            <a:schemeClr val="accent1"/>
-          </a:lnRef>
-          <a:fillRef idx="3">
-            <a:schemeClr val="accent1"/>
-          </a:fillRef>
-          <a:effectRef idx="2">
-            <a:schemeClr val="accent1"/>
-          </a:effectRef>
-          <a:fontRef idx="minor">
-            <a:schemeClr val="lt1"/>
-          </a:fontRef>
-        </p:style>
-        <p:txBody>
-          <a:bodyPr rtlCol="0" anchor="ctr"/>
-          <a:lstStyle/>
-          <a:p>
-            <a:pPr algn="ctr"/>
-          </a:p>
-        </p:txBody>
-      </p:sp>
-      <p:pic>
-        <p:nvPicPr>
-          <p:cNvPr id="9" name="Picture 8" descr="drawio.png"/>
-          <p:cNvPicPr>
-            <a:picLocks noChangeAspect="1"/>
-          </p:cNvPicPr>
-          <p:nvPr/>
-        </p:nvPicPr>
-        <p:blipFill>
-          <a:blip r:embed="rId2"/>
-          <a:stretch>
-            <a:fillRect/>
-          </a:stretch>
-        </p:blipFill>
-        <p:spPr>
-          <a:xfrm>
-            <a:off x="1659331" y="1847087"/>
-            <a:ext cx="1220724" cy="1220724"/>
-          </a:xfrm>
-          <a:prstGeom prst="rect">
-            <a:avLst/>
-          </a:prstGeom>
-        </p:spPr>
-      </p:pic>
-      <p:sp>
-        <p:nvSpPr>
-          <p:cNvPr id="10" name="TextBox 9"/>
-          <p:cNvSpPr txBox="1"/>
-          <p:nvPr/>
-        </p:nvSpPr>
-        <p:spPr>
-          <a:xfrm>
-            <a:off x="530352" y="3159251"/>
-            <a:ext cx="3478682" cy="621792"/>
-          </a:xfrm>
-          <a:prstGeom prst="rect">
-            <a:avLst/>
-          </a:prstGeom>
-          <a:noFill/>
-        </p:spPr>
-        <p:txBody>
-          <a:bodyPr wrap="square" anchor="t"/>
-          <a:lstStyle/>
-          <a:p>
-            <a:pPr algn="ctr"/>
-            <a:r>
-              <a:rPr sz="1300" b="1" i="0">
-                <a:solidFill>
-                  <a:srgbClr val="095292"/>
-                </a:solidFill>
-                <a:latin typeface="Calibri"/>
-              </a:rPr>
-              <a:t>draw.io</a:t>
-            </a:r>
-          </a:p>
-          <a:p>
-            <a:pPr algn="ctr">
-              <a:spcBef>
-                <a:spcPts val="200"/>
-              </a:spcBef>
+            <a:pPr>
+              <a:spcAft>
+                <a:spcPts val="800"/>
+              </a:spcAft>
             </a:pPr>
             <a:r>
-              <a:rPr sz="1000" b="0" i="0">
-                <a:solidFill>
-                  <a:srgbClr val="666666"/>
-                </a:solidFill>
-                <a:latin typeface="Calibri"/>
-              </a:rPr>
-              <a:t>Auditoria del paquete</a:t>
-            </a:r>
-          </a:p>
-        </p:txBody>
-      </p:sp>
-      <p:sp>
-        <p:nvSpPr>
-          <p:cNvPr id="11" name="Rounded Rectangle 10"/>
-          <p:cNvSpPr/>
-          <p:nvPr/>
-        </p:nvSpPr>
-        <p:spPr>
-          <a:xfrm>
-            <a:off x="4283354" y="1591056"/>
-            <a:ext cx="3624986" cy="2299716"/>
-          </a:xfrm>
-          <a:prstGeom prst="roundRect">
-            <a:avLst>
-              <a:gd name="adj" fmla="val 12000"/>
-            </a:avLst>
-          </a:prstGeom>
-          <a:solidFill>
-            <a:srgbClr val="F2F2F2"/>
-          </a:solidFill>
-          <a:ln>
-            <a:noFill/>
-          </a:ln>
-        </p:spPr>
-        <p:style>
-          <a:lnRef idx="1">
-            <a:schemeClr val="accent1"/>
-          </a:lnRef>
-          <a:fillRef idx="3">
-            <a:schemeClr val="accent1"/>
-          </a:fillRef>
-          <a:effectRef idx="2">
-            <a:schemeClr val="accent1"/>
-          </a:effectRef>
-          <a:fontRef idx="minor">
-            <a:schemeClr val="lt1"/>
-          </a:fontRef>
-        </p:style>
-        <p:txBody>
-          <a:bodyPr rtlCol="0" anchor="ctr"/>
-          <a:lstStyle/>
-          <a:p>
-            <a:pPr algn="ctr"/>
-          </a:p>
-        </p:txBody>
-      </p:sp>
-      <p:sp>
-        <p:nvSpPr>
-          <p:cNvPr id="12" name="Rectangle 11"/>
-          <p:cNvSpPr/>
-          <p:nvPr/>
-        </p:nvSpPr>
-        <p:spPr>
-          <a:xfrm>
-            <a:off x="4283354" y="1591056"/>
-            <a:ext cx="3624986" cy="64008"/>
-          </a:xfrm>
-          <a:prstGeom prst="rect">
-            <a:avLst/>
-          </a:prstGeom>
-          <a:solidFill>
-            <a:srgbClr val="095292"/>
-          </a:solidFill>
-          <a:ln>
-            <a:noFill/>
-          </a:ln>
-        </p:spPr>
-        <p:style>
-          <a:lnRef idx="1">
-            <a:schemeClr val="accent1"/>
-          </a:lnRef>
-          <a:fillRef idx="3">
-            <a:schemeClr val="accent1"/>
-          </a:fillRef>
-          <a:effectRef idx="2">
-            <a:schemeClr val="accent1"/>
-          </a:effectRef>
-          <a:fontRef idx="minor">
-            <a:schemeClr val="lt1"/>
-          </a:fontRef>
-        </p:style>
-        <p:txBody>
-          <a:bodyPr rtlCol="0" anchor="ctr"/>
-          <a:lstStyle/>
-          <a:p>
-            <a:pPr algn="ctr"/>
-          </a:p>
-        </p:txBody>
-      </p:sp>
-      <p:sp>
-        <p:nvSpPr>
-          <p:cNvPr id="13" name="Rectangle 12"/>
-          <p:cNvSpPr/>
-          <p:nvPr/>
-        </p:nvSpPr>
-        <p:spPr>
-          <a:xfrm>
-            <a:off x="4283354" y="1655064"/>
-            <a:ext cx="3624986" cy="27432"/>
-          </a:xfrm>
-          <a:prstGeom prst="rect">
-            <a:avLst/>
-          </a:prstGeom>
-          <a:solidFill>
-            <a:srgbClr val="FFD000"/>
-          </a:solidFill>
-          <a:ln>
-            <a:noFill/>
-          </a:ln>
-        </p:spPr>
-        <p:style>
-          <a:lnRef idx="1">
-            <a:schemeClr val="accent1"/>
-          </a:lnRef>
-          <a:fillRef idx="3">
-            <a:schemeClr val="accent1"/>
-          </a:fillRef>
-          <a:effectRef idx="2">
-            <a:schemeClr val="accent1"/>
-          </a:effectRef>
-          <a:fontRef idx="minor">
-            <a:schemeClr val="lt1"/>
-          </a:fontRef>
-        </p:style>
-        <p:txBody>
-          <a:bodyPr rtlCol="0" anchor="ctr"/>
-          <a:lstStyle/>
-          <a:p>
-            <a:pPr algn="ctr"/>
-          </a:p>
-        </p:txBody>
-      </p:sp>
-      <p:pic>
-        <p:nvPicPr>
-          <p:cNvPr id="14" name="Picture 13" descr="github_actions.png"/>
-          <p:cNvPicPr>
-            <a:picLocks noChangeAspect="1"/>
-          </p:cNvPicPr>
-          <p:nvPr/>
-        </p:nvPicPr>
-        <p:blipFill>
-          <a:blip r:embed="rId3"/>
-          <a:stretch>
-            <a:fillRect/>
-          </a:stretch>
-        </p:blipFill>
-        <p:spPr>
-          <a:xfrm>
-            <a:off x="5485485" y="1847087"/>
-            <a:ext cx="1220724" cy="1220724"/>
-          </a:xfrm>
-          <a:prstGeom prst="rect">
-            <a:avLst/>
-          </a:prstGeom>
-        </p:spPr>
-      </p:pic>
-      <p:sp>
-        <p:nvSpPr>
-          <p:cNvPr id="15" name="TextBox 14"/>
-          <p:cNvSpPr txBox="1"/>
-          <p:nvPr/>
-        </p:nvSpPr>
-        <p:spPr>
-          <a:xfrm>
-            <a:off x="4356506" y="3159251"/>
-            <a:ext cx="3478682" cy="621792"/>
-          </a:xfrm>
-          <a:prstGeom prst="rect">
-            <a:avLst/>
-          </a:prstGeom>
-          <a:noFill/>
-        </p:spPr>
-        <p:txBody>
-          <a:bodyPr wrap="square" anchor="t"/>
-          <a:lstStyle/>
-          <a:p>
-            <a:pPr algn="ctr"/>
-            <a:r>
-              <a:rPr sz="1300" b="1" i="0">
-                <a:solidFill>
-                  <a:srgbClr val="095292"/>
-                </a:solidFill>
-                <a:latin typeface="Calibri"/>
-              </a:rPr>
-              <a:t>GitHub Actions</a:t>
-            </a:r>
-          </a:p>
-          <a:p>
-            <a:pPr algn="ctr">
-              <a:spcBef>
-                <a:spcPts val="200"/>
-              </a:spcBef>
+              <a:rPr sz="2000" b="0" i="0">
+                <a:solidFill>
+                  <a:srgbClr val="333333"/>
+                </a:solidFill>
+                <a:latin typeface="Calibri"/>
+              </a:rPr>
+              <a:t>–   La primera es si esto se califica; la respuesta honesta es que este checkpoint no es la sustentacion final, que ocurre en la Clase 15, ni el Parcial 3, que es la evaluacion escrita de la Clase 14</a:t>
+            </a:r>
+          </a:p>
+          <a:p>
+            <a:pPr>
+              <a:spcAft>
+                <a:spcPts val="800"/>
+              </a:spcAft>
             </a:pPr>
             <a:r>
-              <a:rPr sz="1000" b="0" i="0">
-                <a:solidFill>
-                  <a:srgbClr val="666666"/>
-                </a:solidFill>
-                <a:latin typeface="Calibri"/>
-              </a:rPr>
-              <a:t>Evidencia CI</a:t>
-            </a:r>
-          </a:p>
-        </p:txBody>
-      </p:sp>
-      <p:sp>
-        <p:nvSpPr>
-          <p:cNvPr id="16" name="Rounded Rectangle 15"/>
-          <p:cNvSpPr/>
-          <p:nvPr/>
-        </p:nvSpPr>
-        <p:spPr>
-          <a:xfrm>
-            <a:off x="8109508" y="1591056"/>
-            <a:ext cx="3624986" cy="2299716"/>
-          </a:xfrm>
-          <a:prstGeom prst="roundRect">
-            <a:avLst>
-              <a:gd name="adj" fmla="val 12000"/>
-            </a:avLst>
-          </a:prstGeom>
-          <a:solidFill>
-            <a:srgbClr val="F2F2F2"/>
-          </a:solidFill>
-          <a:ln>
-            <a:noFill/>
-          </a:ln>
-        </p:spPr>
-        <p:style>
-          <a:lnRef idx="1">
-            <a:schemeClr val="accent1"/>
-          </a:lnRef>
-          <a:fillRef idx="3">
-            <a:schemeClr val="accent1"/>
-          </a:fillRef>
-          <a:effectRef idx="2">
-            <a:schemeClr val="accent1"/>
-          </a:effectRef>
-          <a:fontRef idx="minor">
-            <a:schemeClr val="lt1"/>
-          </a:fontRef>
-        </p:style>
-        <p:txBody>
-          <a:bodyPr rtlCol="0" anchor="ctr"/>
-          <a:lstStyle/>
-          <a:p>
-            <a:pPr algn="ctr"/>
-          </a:p>
-        </p:txBody>
-      </p:sp>
-      <p:sp>
-        <p:nvSpPr>
-          <p:cNvPr id="17" name="Rectangle 16"/>
-          <p:cNvSpPr/>
-          <p:nvPr/>
-        </p:nvSpPr>
-        <p:spPr>
-          <a:xfrm>
-            <a:off x="8109508" y="1591056"/>
-            <a:ext cx="3624986" cy="64008"/>
-          </a:xfrm>
-          <a:prstGeom prst="rect">
-            <a:avLst/>
-          </a:prstGeom>
-          <a:solidFill>
-            <a:srgbClr val="095292"/>
-          </a:solidFill>
-          <a:ln>
-            <a:noFill/>
-          </a:ln>
-        </p:spPr>
-        <p:style>
-          <a:lnRef idx="1">
-            <a:schemeClr val="accent1"/>
-          </a:lnRef>
-          <a:fillRef idx="3">
-            <a:schemeClr val="accent1"/>
-          </a:fillRef>
-          <a:effectRef idx="2">
-            <a:schemeClr val="accent1"/>
-          </a:effectRef>
-          <a:fontRef idx="minor">
-            <a:schemeClr val="lt1"/>
-          </a:fontRef>
-        </p:style>
-        <p:txBody>
-          <a:bodyPr rtlCol="0" anchor="ctr"/>
-          <a:lstStyle/>
-          <a:p>
-            <a:pPr algn="ctr"/>
-          </a:p>
-        </p:txBody>
-      </p:sp>
-      <p:sp>
-        <p:nvSpPr>
-          <p:cNvPr id="18" name="Rectangle 17"/>
-          <p:cNvSpPr/>
-          <p:nvPr/>
-        </p:nvSpPr>
-        <p:spPr>
-          <a:xfrm>
-            <a:off x="8109508" y="1655064"/>
-            <a:ext cx="3624986" cy="27432"/>
-          </a:xfrm>
-          <a:prstGeom prst="rect">
-            <a:avLst/>
-          </a:prstGeom>
-          <a:solidFill>
-            <a:srgbClr val="FFD000"/>
-          </a:solidFill>
-          <a:ln>
-            <a:noFill/>
-          </a:ln>
-        </p:spPr>
-        <p:style>
-          <a:lnRef idx="1">
-            <a:schemeClr val="accent1"/>
-          </a:lnRef>
-          <a:fillRef idx="3">
-            <a:schemeClr val="accent1"/>
-          </a:fillRef>
-          <a:effectRef idx="2">
-            <a:schemeClr val="accent1"/>
-          </a:effectRef>
-          <a:fontRef idx="minor">
-            <a:schemeClr val="lt1"/>
-          </a:fontRef>
-        </p:style>
-        <p:txBody>
-          <a:bodyPr rtlCol="0" anchor="ctr"/>
-          <a:lstStyle/>
-          <a:p>
-            <a:pPr algn="ctr"/>
-          </a:p>
-        </p:txBody>
-      </p:sp>
-      <p:pic>
-        <p:nvPicPr>
-          <p:cNvPr id="19" name="Picture 18" descr="google_docs.png"/>
-          <p:cNvPicPr>
-            <a:picLocks noChangeAspect="1"/>
-          </p:cNvPicPr>
-          <p:nvPr/>
-        </p:nvPicPr>
-        <p:blipFill>
-          <a:blip r:embed="rId4"/>
-          <a:stretch>
-            <a:fillRect/>
-          </a:stretch>
-        </p:blipFill>
-        <p:spPr>
-          <a:xfrm>
-            <a:off x="9311640" y="1847087"/>
-            <a:ext cx="1220724" cy="1220724"/>
-          </a:xfrm>
-          <a:prstGeom prst="rect">
-            <a:avLst/>
-          </a:prstGeom>
-        </p:spPr>
-      </p:pic>
-      <p:sp>
-        <p:nvSpPr>
-          <p:cNvPr id="20" name="TextBox 19"/>
-          <p:cNvSpPr txBox="1"/>
-          <p:nvPr/>
-        </p:nvSpPr>
-        <p:spPr>
-          <a:xfrm>
-            <a:off x="8182660" y="3159251"/>
-            <a:ext cx="3478682" cy="621792"/>
-          </a:xfrm>
-          <a:prstGeom prst="rect">
-            <a:avLst/>
-          </a:prstGeom>
-          <a:noFill/>
-        </p:spPr>
-        <p:txBody>
-          <a:bodyPr wrap="square" anchor="t"/>
-          <a:lstStyle/>
-          <a:p>
-            <a:pPr algn="ctr"/>
-            <a:r>
-              <a:rPr sz="1300" b="1" i="0">
-                <a:solidFill>
-                  <a:srgbClr val="095292"/>
-                </a:solidFill>
-                <a:latin typeface="Calibri"/>
-              </a:rPr>
-              <a:t>Google Docs</a:t>
-            </a:r>
-          </a:p>
-          <a:p>
-            <a:pPr algn="ctr">
-              <a:spcBef>
-                <a:spcPts val="200"/>
-              </a:spcBef>
+              <a:rPr sz="2000" b="0" i="0">
+                <a:solidFill>
+                  <a:srgbClr val="333333"/>
+                </a:solidFill>
+                <a:latin typeface="Calibri"/>
+              </a:rPr>
+              <a:t>–   Y que hoy se registra estado y compromisos, pero el acta es el insumo con el que se mirara la entrega final: un gap senalado hoy y no cerrado pesa mucho mas que uno que aparecio despues.</a:t>
+            </a:r>
+          </a:p>
+          <a:p>
+            <a:pPr>
+              <a:spcAft>
+                <a:spcPts val="800"/>
+              </a:spcAft>
             </a:pPr>
             <a:r>
-              <a:rPr sz="1000" b="0" i="0">
-                <a:solidFill>
-                  <a:srgbClr val="666666"/>
-                </a:solidFill>
-                <a:latin typeface="Calibri"/>
-              </a:rPr>
-              <a:t>Informe PI</a:t>
-            </a:r>
-          </a:p>
-        </p:txBody>
-      </p:sp>
-      <p:sp>
-        <p:nvSpPr>
-          <p:cNvPr id="21" name="Rounded Rectangle 20"/>
-          <p:cNvSpPr/>
-          <p:nvPr/>
-        </p:nvSpPr>
-        <p:spPr>
-          <a:xfrm>
-            <a:off x="2370277" y="4055364"/>
-            <a:ext cx="3624986" cy="2299716"/>
-          </a:xfrm>
-          <a:prstGeom prst="roundRect">
-            <a:avLst>
-              <a:gd name="adj" fmla="val 12000"/>
-            </a:avLst>
-          </a:prstGeom>
-          <a:solidFill>
-            <a:srgbClr val="F2F2F2"/>
-          </a:solidFill>
-          <a:ln>
-            <a:noFill/>
-          </a:ln>
-        </p:spPr>
-        <p:style>
-          <a:lnRef idx="1">
-            <a:schemeClr val="accent1"/>
-          </a:lnRef>
-          <a:fillRef idx="3">
-            <a:schemeClr val="accent1"/>
-          </a:fillRef>
-          <a:effectRef idx="2">
-            <a:schemeClr val="accent1"/>
-          </a:effectRef>
-          <a:fontRef idx="minor">
-            <a:schemeClr val="lt1"/>
-          </a:fontRef>
-        </p:style>
-        <p:txBody>
-          <a:bodyPr rtlCol="0" anchor="ctr"/>
-          <a:lstStyle/>
-          <a:p>
-            <a:pPr algn="ctr"/>
-          </a:p>
-        </p:txBody>
-      </p:sp>
-      <p:sp>
-        <p:nvSpPr>
-          <p:cNvPr id="22" name="Rectangle 21"/>
-          <p:cNvSpPr/>
-          <p:nvPr/>
-        </p:nvSpPr>
-        <p:spPr>
-          <a:xfrm>
-            <a:off x="2370277" y="4055364"/>
-            <a:ext cx="3624986" cy="64008"/>
-          </a:xfrm>
-          <a:prstGeom prst="rect">
-            <a:avLst/>
-          </a:prstGeom>
-          <a:solidFill>
-            <a:srgbClr val="095292"/>
-          </a:solidFill>
-          <a:ln>
-            <a:noFill/>
-          </a:ln>
-        </p:spPr>
-        <p:style>
-          <a:lnRef idx="1">
-            <a:schemeClr val="accent1"/>
-          </a:lnRef>
-          <a:fillRef idx="3">
-            <a:schemeClr val="accent1"/>
-          </a:fillRef>
-          <a:effectRef idx="2">
-            <a:schemeClr val="accent1"/>
-          </a:effectRef>
-          <a:fontRef idx="minor">
-            <a:schemeClr val="lt1"/>
-          </a:fontRef>
-        </p:style>
-        <p:txBody>
-          <a:bodyPr rtlCol="0" anchor="ctr"/>
-          <a:lstStyle/>
-          <a:p>
-            <a:pPr algn="ctr"/>
-          </a:p>
-        </p:txBody>
-      </p:sp>
-      <p:sp>
-        <p:nvSpPr>
-          <p:cNvPr id="23" name="Rectangle 22"/>
-          <p:cNvSpPr/>
-          <p:nvPr/>
-        </p:nvSpPr>
-        <p:spPr>
-          <a:xfrm>
-            <a:off x="2370277" y="4119372"/>
-            <a:ext cx="3624986" cy="27432"/>
-          </a:xfrm>
-          <a:prstGeom prst="rect">
-            <a:avLst/>
-          </a:prstGeom>
-          <a:solidFill>
-            <a:srgbClr val="FFD000"/>
-          </a:solidFill>
-          <a:ln>
-            <a:noFill/>
-          </a:ln>
-        </p:spPr>
-        <p:style>
-          <a:lnRef idx="1">
-            <a:schemeClr val="accent1"/>
-          </a:lnRef>
-          <a:fillRef idx="3">
-            <a:schemeClr val="accent1"/>
-          </a:fillRef>
-          <a:effectRef idx="2">
-            <a:schemeClr val="accent1"/>
-          </a:effectRef>
-          <a:fontRef idx="minor">
-            <a:schemeClr val="lt1"/>
-          </a:fontRef>
-        </p:style>
-        <p:txBody>
-          <a:bodyPr rtlCol="0" anchor="ctr"/>
-          <a:lstStyle/>
-          <a:p>
-            <a:pPr algn="ctr"/>
-          </a:p>
-        </p:txBody>
-      </p:sp>
-      <p:pic>
-        <p:nvPicPr>
-          <p:cNvPr id="24" name="Picture 23" descr="mermaid.png"/>
-          <p:cNvPicPr>
-            <a:picLocks noChangeAspect="1"/>
-          </p:cNvPicPr>
-          <p:nvPr/>
-        </p:nvPicPr>
-        <p:blipFill>
-          <a:blip r:embed="rId5"/>
-          <a:stretch>
-            <a:fillRect/>
-          </a:stretch>
-        </p:blipFill>
-        <p:spPr>
-          <a:xfrm>
-            <a:off x="3572408" y="4311396"/>
-            <a:ext cx="1220724" cy="1220724"/>
-          </a:xfrm>
-          <a:prstGeom prst="rect">
-            <a:avLst/>
-          </a:prstGeom>
-        </p:spPr>
-      </p:pic>
-      <p:sp>
-        <p:nvSpPr>
-          <p:cNvPr id="25" name="TextBox 24"/>
-          <p:cNvSpPr txBox="1"/>
-          <p:nvPr/>
-        </p:nvSpPr>
-        <p:spPr>
-          <a:xfrm>
-            <a:off x="2443429" y="5623560"/>
-            <a:ext cx="3478682" cy="621792"/>
-          </a:xfrm>
-          <a:prstGeom prst="rect">
-            <a:avLst/>
-          </a:prstGeom>
-          <a:noFill/>
-        </p:spPr>
-        <p:txBody>
-          <a:bodyPr wrap="square" anchor="t"/>
-          <a:lstStyle/>
-          <a:p>
-            <a:pPr algn="ctr"/>
-            <a:r>
-              <a:rPr sz="1300" b="1" i="0">
-                <a:solidFill>
-                  <a:srgbClr val="095292"/>
-                </a:solidFill>
-                <a:latin typeface="Calibri"/>
-              </a:rPr>
-              <a:t>Mermaid</a:t>
-            </a:r>
-          </a:p>
-          <a:p>
-            <a:pPr algn="ctr">
-              <a:spcBef>
-                <a:spcPts val="200"/>
-              </a:spcBef>
+              <a:rPr sz="2000" b="0" i="0">
+                <a:solidFill>
+                  <a:srgbClr val="333333"/>
+                </a:solidFill>
+                <a:latin typeface="Calibri"/>
+              </a:rPr>
+              <a:t>–   La segunda es por que revisa un companero si el que califica es el docente, y la respuesta es que la revision por pares es practica estandar en la industria y que su valor no esta en el juicio del par sino en la obligacion de explicar</a:t>
+            </a:r>
+          </a:p>
+          <a:p>
+            <a:pPr>
+              <a:spcAft>
+                <a:spcPts val="800"/>
+              </a:spcAft>
             </a:pPr>
             <a:r>
-              <a:rPr sz="1000" b="0" i="0">
-                <a:solidFill>
-                  <a:srgbClr val="666666"/>
-                </a:solidFill>
-                <a:latin typeface="Calibri"/>
-              </a:rPr>
-              <a:t>Codigo del diagrama</a:t>
-            </a:r>
-          </a:p>
-        </p:txBody>
-      </p:sp>
-      <p:sp>
-        <p:nvSpPr>
-          <p:cNvPr id="26" name="Rounded Rectangle 25"/>
-          <p:cNvSpPr/>
-          <p:nvPr/>
-        </p:nvSpPr>
-        <p:spPr>
-          <a:xfrm>
-            <a:off x="6196431" y="4055364"/>
-            <a:ext cx="3624986" cy="2299716"/>
-          </a:xfrm>
-          <a:prstGeom prst="roundRect">
-            <a:avLst>
-              <a:gd name="adj" fmla="val 12000"/>
-            </a:avLst>
-          </a:prstGeom>
-          <a:solidFill>
-            <a:srgbClr val="F2F2F2"/>
-          </a:solidFill>
-          <a:ln>
-            <a:noFill/>
-          </a:ln>
-        </p:spPr>
-        <p:style>
-          <a:lnRef idx="1">
-            <a:schemeClr val="accent1"/>
-          </a:lnRef>
-          <a:fillRef idx="3">
-            <a:schemeClr val="accent1"/>
-          </a:fillRef>
-          <a:effectRef idx="2">
-            <a:schemeClr val="accent1"/>
-          </a:effectRef>
-          <a:fontRef idx="minor">
-            <a:schemeClr val="lt1"/>
-          </a:fontRef>
-        </p:style>
-        <p:txBody>
-          <a:bodyPr rtlCol="0" anchor="ctr"/>
-          <a:lstStyle/>
-          <a:p>
-            <a:pPr algn="ctr"/>
-          </a:p>
-        </p:txBody>
-      </p:sp>
-      <p:sp>
-        <p:nvSpPr>
-          <p:cNvPr id="27" name="Rectangle 26"/>
-          <p:cNvSpPr/>
-          <p:nvPr/>
-        </p:nvSpPr>
-        <p:spPr>
-          <a:xfrm>
-            <a:off x="6196431" y="4055364"/>
-            <a:ext cx="3624986" cy="64008"/>
-          </a:xfrm>
-          <a:prstGeom prst="rect">
-            <a:avLst/>
-          </a:prstGeom>
-          <a:solidFill>
-            <a:srgbClr val="095292"/>
-          </a:solidFill>
-          <a:ln>
-            <a:noFill/>
-          </a:ln>
-        </p:spPr>
-        <p:style>
-          <a:lnRef idx="1">
-            <a:schemeClr val="accent1"/>
-          </a:lnRef>
-          <a:fillRef idx="3">
-            <a:schemeClr val="accent1"/>
-          </a:fillRef>
-          <a:effectRef idx="2">
-            <a:schemeClr val="accent1"/>
-          </a:effectRef>
-          <a:fontRef idx="minor">
-            <a:schemeClr val="lt1"/>
-          </a:fontRef>
-        </p:style>
-        <p:txBody>
-          <a:bodyPr rtlCol="0" anchor="ctr"/>
-          <a:lstStyle/>
-          <a:p>
-            <a:pPr algn="ctr"/>
-          </a:p>
-        </p:txBody>
-      </p:sp>
-      <p:sp>
-        <p:nvSpPr>
-          <p:cNvPr id="28" name="Rectangle 27"/>
-          <p:cNvSpPr/>
-          <p:nvPr/>
-        </p:nvSpPr>
-        <p:spPr>
-          <a:xfrm>
-            <a:off x="6196431" y="4119372"/>
-            <a:ext cx="3624986" cy="27432"/>
-          </a:xfrm>
-          <a:prstGeom prst="rect">
-            <a:avLst/>
-          </a:prstGeom>
-          <a:solidFill>
-            <a:srgbClr val="FFD000"/>
-          </a:solidFill>
-          <a:ln>
-            <a:noFill/>
-          </a:ln>
-        </p:spPr>
-        <p:style>
-          <a:lnRef idx="1">
-            <a:schemeClr val="accent1"/>
-          </a:lnRef>
-          <a:fillRef idx="3">
-            <a:schemeClr val="accent1"/>
-          </a:fillRef>
-          <a:effectRef idx="2">
-            <a:schemeClr val="accent1"/>
-          </a:effectRef>
-          <a:fontRef idx="minor">
-            <a:schemeClr val="lt1"/>
-          </a:fontRef>
-        </p:style>
-        <p:txBody>
-          <a:bodyPr rtlCol="0" anchor="ctr"/>
-          <a:lstStyle/>
-          <a:p>
-            <a:pPr algn="ctr"/>
-          </a:p>
-        </p:txBody>
-      </p:sp>
-      <p:pic>
-        <p:nvPicPr>
-          <p:cNvPr id="29" name="Picture 28" descr="examlab.png"/>
-          <p:cNvPicPr>
-            <a:picLocks noChangeAspect="1"/>
-          </p:cNvPicPr>
-          <p:nvPr/>
-        </p:nvPicPr>
-        <p:blipFill>
-          <a:blip r:embed="rId6"/>
-          <a:stretch>
-            <a:fillRect/>
-          </a:stretch>
-        </p:blipFill>
-        <p:spPr>
-          <a:xfrm>
-            <a:off x="7398562" y="4311396"/>
-            <a:ext cx="1220724" cy="1220724"/>
-          </a:xfrm>
-          <a:prstGeom prst="rect">
-            <a:avLst/>
-          </a:prstGeom>
-        </p:spPr>
-      </p:pic>
-      <p:sp>
-        <p:nvSpPr>
-          <p:cNvPr id="30" name="TextBox 29"/>
-          <p:cNvSpPr txBox="1"/>
-          <p:nvPr/>
-        </p:nvSpPr>
-        <p:spPr>
-          <a:xfrm>
-            <a:off x="6269583" y="5623560"/>
-            <a:ext cx="3478682" cy="621792"/>
-          </a:xfrm>
-          <a:prstGeom prst="rect">
-            <a:avLst/>
-          </a:prstGeom>
-          <a:noFill/>
-        </p:spPr>
-        <p:txBody>
-          <a:bodyPr wrap="square" anchor="t"/>
-          <a:lstStyle/>
-          <a:p>
-            <a:pPr algn="ctr"/>
-            <a:r>
-              <a:rPr sz="1300" b="1" i="0">
-                <a:solidFill>
-                  <a:srgbClr val="095292"/>
-                </a:solidFill>
-                <a:latin typeface="Calibri"/>
-              </a:rPr>
-              <a:t>la plataforma del curso</a:t>
-            </a:r>
-          </a:p>
-          <a:p>
-            <a:pPr algn="ctr">
-              <a:spcBef>
-                <a:spcPts val="200"/>
-              </a:spcBef>
-            </a:pPr>
-            <a:r>
-              <a:rPr sz="1000" b="0" i="0">
-                <a:solidFill>
-                  <a:srgbClr val="666666"/>
-                </a:solidFill>
-                <a:latin typeface="Calibri"/>
-              </a:rPr>
-              <a:t>Donde se entrega</a:t>
-            </a:r>
-          </a:p>
-        </p:txBody>
-      </p:sp>
-      <p:sp>
-        <p:nvSpPr>
-          <p:cNvPr id="31" name="TextBox 30"/>
+              <a:rPr sz="2000" b="0" i="0">
+                <a:solidFill>
+                  <a:srgbClr val="333333"/>
+                </a:solidFill>
+                <a:latin typeface="Calibri"/>
+              </a:rPr>
+              <a:t>–   Ademas el par pregunta lo que el docente ya asume, y esas son justo las preguntas que llegan en un Q&amp;A real.</a:t>
+            </a:r>
+          </a:p>
+        </p:txBody>
+      </p:sp>
+      <p:sp>
+        <p:nvSpPr>
+          <p:cNvPr id="6" name="TextBox 5"/>
           <p:cNvSpPr txBox="1"/>
           <p:nvPr/>
         </p:nvSpPr>
@@ -7003,7 +5879,7 @@
         <p:spPr>
           <a:xfrm>
             <a:off x="0" y="0"/>
-            <a:ext cx="12191695" cy="1170432"/>
+            <a:ext cx="12191695" cy="960120"/>
           </a:xfrm>
           <a:prstGeom prst="rect">
             <a:avLst/>
@@ -7045,7 +5921,7 @@
         </p:nvSpPr>
         <p:spPr>
           <a:xfrm>
-            <a:off x="0" y="1170432"/>
+            <a:off x="0" y="960120"/>
             <a:ext cx="12191695" cy="41148"/>
           </a:xfrm>
           <a:prstGeom prst="rect">
@@ -7089,7 +5965,7 @@
         <p:spPr>
           <a:xfrm>
             <a:off x="457200" y="164592"/>
-            <a:ext cx="11277295" cy="384048"/>
+            <a:ext cx="11277295" cy="502920"/>
           </a:xfrm>
           <a:prstGeom prst="rect">
             <a:avLst/>
@@ -7109,7 +5985,7 @@
                 </a:solidFill>
                 <a:latin typeface="Calibri"/>
               </a:rPr>
-              <a:t>Del boceto a la plataforma del curso (diagrama)</a:t>
+              <a:t>Preguntas frecuentes y cierre conceptual () (2/3)</a:t>
             </a:r>
           </a:p>
         </p:txBody>
@@ -7122,8 +5998,8 @@
         </p:nvSpPr>
         <p:spPr>
           <a:xfrm>
-            <a:off x="457200" y="566928"/>
-            <a:ext cx="11277295" cy="411480"/>
+            <a:off x="457200" y="1170432"/>
+            <a:ext cx="11277295" cy="5230368"/>
           </a:xfrm>
           <a:prstGeom prst="rect">
             <a:avLst/>
@@ -7136,705 +6012,90 @@
           </a:bodyPr>
           <a:lstStyle/>
           <a:p>
-            <a:r>
-              <a:rPr sz="1400" b="0" i="0">
-                <a:solidFill>
-                  <a:srgbClr val="B8D8EE"/>
-                </a:solidFill>
-                <a:latin typeface="Calibri"/>
-              </a:rPr>
-              <a:t>El diagrama se entrega como código Mermaid dentro de la plataforma del curso, no como imagen</a:t>
-            </a:r>
-          </a:p>
-        </p:txBody>
-      </p:sp>
-      <p:sp>
-        <p:nvSpPr>
-          <p:cNvPr id="6" name="Rounded Rectangle 5"/>
-          <p:cNvSpPr/>
-          <p:nvPr/>
-        </p:nvSpPr>
-        <p:spPr>
-          <a:xfrm>
-            <a:off x="457200" y="1659636"/>
-            <a:ext cx="11277295" cy="1051560"/>
-          </a:xfrm>
-          <a:prstGeom prst="roundRect">
-            <a:avLst>
-              <a:gd name="adj" fmla="val 12000"/>
-            </a:avLst>
-          </a:prstGeom>
-          <a:solidFill>
-            <a:srgbClr val="F2F2F2"/>
-          </a:solidFill>
-          <a:ln>
-            <a:noFill/>
-          </a:ln>
-        </p:spPr>
-        <p:style>
-          <a:lnRef idx="1">
-            <a:schemeClr val="accent1"/>
-          </a:lnRef>
-          <a:fillRef idx="3">
-            <a:schemeClr val="accent1"/>
-          </a:fillRef>
-          <a:effectRef idx="2">
-            <a:schemeClr val="accent1"/>
-          </a:effectRef>
-          <a:fontRef idx="minor">
-            <a:schemeClr val="lt1"/>
-          </a:fontRef>
-        </p:style>
-        <p:txBody>
-          <a:bodyPr rtlCol="0" anchor="ctr"/>
-          <a:lstStyle/>
-          <a:p>
-            <a:pPr algn="ctr"/>
-          </a:p>
-        </p:txBody>
-      </p:sp>
-      <p:sp>
-        <p:nvSpPr>
-          <p:cNvPr id="7" name="Rounded Rectangle 6"/>
-          <p:cNvSpPr/>
-          <p:nvPr/>
-        </p:nvSpPr>
-        <p:spPr>
-          <a:xfrm>
-            <a:off x="594360" y="1965960"/>
-            <a:ext cx="438912" cy="438912"/>
-          </a:xfrm>
-          <a:prstGeom prst="roundRect">
-            <a:avLst>
-              <a:gd name="adj" fmla="val 12000"/>
-            </a:avLst>
-          </a:prstGeom>
-          <a:solidFill>
-            <a:srgbClr val="095292"/>
-          </a:solidFill>
-          <a:ln>
-            <a:noFill/>
-          </a:ln>
-        </p:spPr>
-        <p:style>
-          <a:lnRef idx="1">
-            <a:schemeClr val="accent1"/>
-          </a:lnRef>
-          <a:fillRef idx="3">
-            <a:schemeClr val="accent1"/>
-          </a:fillRef>
-          <a:effectRef idx="2">
-            <a:schemeClr val="accent1"/>
-          </a:effectRef>
-          <a:fontRef idx="minor">
-            <a:schemeClr val="lt1"/>
-          </a:fontRef>
-        </p:style>
-        <p:txBody>
-          <a:bodyPr rtlCol="0" anchor="ctr"/>
-          <a:lstStyle/>
-          <a:p>
-            <a:pPr algn="ctr"/>
-          </a:p>
-        </p:txBody>
-      </p:sp>
-      <p:sp>
-        <p:nvSpPr>
-          <p:cNvPr id="8" name="TextBox 7"/>
-          <p:cNvSpPr txBox="1"/>
-          <p:nvPr/>
-        </p:nvSpPr>
-        <p:spPr>
-          <a:xfrm>
-            <a:off x="594360" y="1965960"/>
-            <a:ext cx="438912" cy="438912"/>
-          </a:xfrm>
-          <a:prstGeom prst="rect">
-            <a:avLst/>
-          </a:prstGeom>
-          <a:noFill/>
-        </p:spPr>
-        <p:txBody>
-          <a:bodyPr wrap="square" anchor="ctr"/>
-          <a:lstStyle/>
-          <a:p>
-            <a:pPr algn="ctr"/>
-            <a:r>
-              <a:rPr sz="1600" b="1" i="0">
-                <a:solidFill>
-                  <a:srgbClr val="FFFFFF"/>
-                </a:solidFill>
-                <a:latin typeface="Calibri"/>
-              </a:rPr>
-              <a:t>1</a:t>
-            </a:r>
-          </a:p>
-        </p:txBody>
-      </p:sp>
-      <p:sp>
-        <p:nvSpPr>
-          <p:cNvPr id="9" name="TextBox 8"/>
-          <p:cNvSpPr txBox="1"/>
-          <p:nvPr/>
-        </p:nvSpPr>
-        <p:spPr>
-          <a:xfrm>
-            <a:off x="1188720" y="1751076"/>
-            <a:ext cx="10271455" cy="886968"/>
-          </a:xfrm>
-          <a:prstGeom prst="rect">
-            <a:avLst/>
-          </a:prstGeom>
-          <a:noFill/>
-        </p:spPr>
-        <p:txBody>
-          <a:bodyPr wrap="square" anchor="ctr"/>
-          <a:lstStyle/>
-          <a:p>
-            <a:r>
-              <a:rPr sz="1500" b="1" i="0">
-                <a:solidFill>
-                  <a:srgbClr val="095292"/>
-                </a:solidFill>
-                <a:latin typeface="Calibri"/>
-              </a:rPr>
-              <a:t>Disena visual</a:t>
-            </a:r>
-          </a:p>
-          <a:p>
             <a:pPr>
-              <a:spcBef>
-                <a:spcPts val="200"/>
-              </a:spcBef>
+              <a:spcAft>
+                <a:spcPts val="800"/>
+              </a:spcAft>
             </a:pPr>
             <a:r>
-              <a:rPr sz="1300" b="0" i="0">
+              <a:rPr sz="2000" b="0" i="0">
                 <a:solidFill>
                   <a:srgbClr val="333333"/>
                 </a:solidFill>
                 <a:latin typeface="Calibri"/>
               </a:rPr>
-              <a:t>Dibuja el diagrama como quieras en Excalidraw o draw.io: es mas rapido arrastrar cajas que escribir codigo, y ahi es donde piensas el modelo.</a:t>
-            </a:r>
-          </a:p>
-        </p:txBody>
-      </p:sp>
-      <p:sp>
-        <p:nvSpPr>
-          <p:cNvPr id="10" name="Rounded Rectangle 9"/>
-          <p:cNvSpPr/>
-          <p:nvPr/>
-        </p:nvSpPr>
-        <p:spPr>
-          <a:xfrm>
-            <a:off x="457200" y="2802636"/>
-            <a:ext cx="11277295" cy="1051560"/>
-          </a:xfrm>
-          <a:prstGeom prst="roundRect">
-            <a:avLst>
-              <a:gd name="adj" fmla="val 12000"/>
-            </a:avLst>
-          </a:prstGeom>
-          <a:solidFill>
-            <a:srgbClr val="E8F4FA"/>
-          </a:solidFill>
-          <a:ln>
-            <a:noFill/>
-          </a:ln>
-        </p:spPr>
-        <p:style>
-          <a:lnRef idx="1">
-            <a:schemeClr val="accent1"/>
-          </a:lnRef>
-          <a:fillRef idx="3">
-            <a:schemeClr val="accent1"/>
-          </a:fillRef>
-          <a:effectRef idx="2">
-            <a:schemeClr val="accent1"/>
-          </a:effectRef>
-          <a:fontRef idx="minor">
-            <a:schemeClr val="lt1"/>
-          </a:fontRef>
-        </p:style>
-        <p:txBody>
-          <a:bodyPr rtlCol="0" anchor="ctr"/>
-          <a:lstStyle/>
-          <a:p>
-            <a:pPr algn="ctr"/>
-          </a:p>
-        </p:txBody>
-      </p:sp>
-      <p:sp>
-        <p:nvSpPr>
-          <p:cNvPr id="11" name="Rounded Rectangle 10"/>
-          <p:cNvSpPr/>
-          <p:nvPr/>
-        </p:nvSpPr>
-        <p:spPr>
-          <a:xfrm>
-            <a:off x="594360" y="3108960"/>
-            <a:ext cx="438912" cy="438912"/>
-          </a:xfrm>
-          <a:prstGeom prst="roundRect">
-            <a:avLst>
-              <a:gd name="adj" fmla="val 12000"/>
-            </a:avLst>
-          </a:prstGeom>
-          <a:solidFill>
-            <a:srgbClr val="095292"/>
-          </a:solidFill>
-          <a:ln>
-            <a:noFill/>
-          </a:ln>
-        </p:spPr>
-        <p:style>
-          <a:lnRef idx="1">
-            <a:schemeClr val="accent1"/>
-          </a:lnRef>
-          <a:fillRef idx="3">
-            <a:schemeClr val="accent1"/>
-          </a:fillRef>
-          <a:effectRef idx="2">
-            <a:schemeClr val="accent1"/>
-          </a:effectRef>
-          <a:fontRef idx="minor">
-            <a:schemeClr val="lt1"/>
-          </a:fontRef>
-        </p:style>
-        <p:txBody>
-          <a:bodyPr rtlCol="0" anchor="ctr"/>
-          <a:lstStyle/>
-          <a:p>
-            <a:pPr algn="ctr"/>
-          </a:p>
-        </p:txBody>
-      </p:sp>
-      <p:sp>
-        <p:nvSpPr>
-          <p:cNvPr id="12" name="TextBox 11"/>
-          <p:cNvSpPr txBox="1"/>
-          <p:nvPr/>
-        </p:nvSpPr>
-        <p:spPr>
-          <a:xfrm>
-            <a:off x="594360" y="3108960"/>
-            <a:ext cx="438912" cy="438912"/>
-          </a:xfrm>
-          <a:prstGeom prst="rect">
-            <a:avLst/>
-          </a:prstGeom>
-          <a:noFill/>
-        </p:spPr>
-        <p:txBody>
-          <a:bodyPr wrap="square" anchor="ctr"/>
-          <a:lstStyle/>
-          <a:p>
-            <a:pPr algn="ctr"/>
-            <a:r>
-              <a:rPr sz="1600" b="1" i="0">
-                <a:solidFill>
-                  <a:srgbClr val="FFFFFF"/>
-                </a:solidFill>
-                <a:latin typeface="Calibri"/>
-              </a:rPr>
-              <a:t>2</a:t>
-            </a:r>
-          </a:p>
-        </p:txBody>
-      </p:sp>
-      <p:sp>
-        <p:nvSpPr>
-          <p:cNvPr id="13" name="TextBox 12"/>
-          <p:cNvSpPr txBox="1"/>
-          <p:nvPr/>
-        </p:nvSpPr>
-        <p:spPr>
-          <a:xfrm>
-            <a:off x="1188720" y="2894076"/>
-            <a:ext cx="10271455" cy="886968"/>
-          </a:xfrm>
-          <a:prstGeom prst="rect">
-            <a:avLst/>
-          </a:prstGeom>
-          <a:noFill/>
-        </p:spPr>
-        <p:txBody>
-          <a:bodyPr wrap="square" anchor="ctr"/>
-          <a:lstStyle/>
-          <a:p>
-            <a:r>
-              <a:rPr sz="1500" b="1" i="0">
-                <a:solidFill>
-                  <a:srgbClr val="095292"/>
-                </a:solidFill>
-                <a:latin typeface="Calibri"/>
-              </a:rPr>
-              <a:t>Traduce con IA</a:t>
+              <a:t>–   La tercera, la mas delicada, es si cambiar el diagrama ahora significa perder el trabajo hecho</a:t>
             </a:r>
           </a:p>
           <a:p>
             <a:pPr>
-              <a:spcBef>
-                <a:spcPts val="200"/>
-              </a:spcBef>
+              <a:spcAft>
+                <a:spcPts val="800"/>
+              </a:spcAft>
             </a:pPr>
             <a:r>
-              <a:rPr sz="1300" b="0" i="0">
+              <a:rPr sz="2000" b="0" i="0">
                 <a:solidFill>
                   <a:srgbClr val="333333"/>
                 </a:solidFill>
                 <a:latin typeface="Calibri"/>
               </a:rPr>
-              <a:t>Copia o describe tu boceto a una IA y pidele el codigo Mermaid: «convierte este diagrama a Mermaid usando C4Component». Revisa el resultado: la IA acierta la sintaxis, no tu modelo.</a:t>
-            </a:r>
-          </a:p>
-        </p:txBody>
-      </p:sp>
-      <p:sp>
-        <p:nvSpPr>
-          <p:cNvPr id="14" name="Rounded Rectangle 13"/>
-          <p:cNvSpPr/>
-          <p:nvPr/>
-        </p:nvSpPr>
-        <p:spPr>
-          <a:xfrm>
-            <a:off x="457200" y="3945636"/>
-            <a:ext cx="11277295" cy="1051560"/>
-          </a:xfrm>
-          <a:prstGeom prst="roundRect">
-            <a:avLst>
-              <a:gd name="adj" fmla="val 12000"/>
-            </a:avLst>
-          </a:prstGeom>
-          <a:solidFill>
-            <a:srgbClr val="F2F2F2"/>
-          </a:solidFill>
-          <a:ln>
-            <a:noFill/>
-          </a:ln>
-        </p:spPr>
-        <p:style>
-          <a:lnRef idx="1">
-            <a:schemeClr val="accent1"/>
-          </a:lnRef>
-          <a:fillRef idx="3">
-            <a:schemeClr val="accent1"/>
-          </a:fillRef>
-          <a:effectRef idx="2">
-            <a:schemeClr val="accent1"/>
-          </a:effectRef>
-          <a:fontRef idx="minor">
-            <a:schemeClr val="lt1"/>
-          </a:fontRef>
-        </p:style>
-        <p:txBody>
-          <a:bodyPr rtlCol="0" anchor="ctr"/>
-          <a:lstStyle/>
-          <a:p>
-            <a:pPr algn="ctr"/>
-          </a:p>
-        </p:txBody>
-      </p:sp>
-      <p:sp>
-        <p:nvSpPr>
-          <p:cNvPr id="15" name="Rounded Rectangle 14"/>
-          <p:cNvSpPr/>
-          <p:nvPr/>
-        </p:nvSpPr>
-        <p:spPr>
-          <a:xfrm>
-            <a:off x="594360" y="4251960"/>
-            <a:ext cx="438912" cy="438912"/>
-          </a:xfrm>
-          <a:prstGeom prst="roundRect">
-            <a:avLst>
-              <a:gd name="adj" fmla="val 12000"/>
-            </a:avLst>
-          </a:prstGeom>
-          <a:solidFill>
-            <a:srgbClr val="095292"/>
-          </a:solidFill>
-          <a:ln>
-            <a:noFill/>
-          </a:ln>
-        </p:spPr>
-        <p:style>
-          <a:lnRef idx="1">
-            <a:schemeClr val="accent1"/>
-          </a:lnRef>
-          <a:fillRef idx="3">
-            <a:schemeClr val="accent1"/>
-          </a:fillRef>
-          <a:effectRef idx="2">
-            <a:schemeClr val="accent1"/>
-          </a:effectRef>
-          <a:fontRef idx="minor">
-            <a:schemeClr val="lt1"/>
-          </a:fontRef>
-        </p:style>
-        <p:txBody>
-          <a:bodyPr rtlCol="0" anchor="ctr"/>
-          <a:lstStyle/>
-          <a:p>
-            <a:pPr algn="ctr"/>
-          </a:p>
-        </p:txBody>
-      </p:sp>
-      <p:sp>
-        <p:nvSpPr>
-          <p:cNvPr id="16" name="TextBox 15"/>
-          <p:cNvSpPr txBox="1"/>
-          <p:nvPr/>
-        </p:nvSpPr>
-        <p:spPr>
-          <a:xfrm>
-            <a:off x="594360" y="4251960"/>
-            <a:ext cx="438912" cy="438912"/>
-          </a:xfrm>
-          <a:prstGeom prst="rect">
-            <a:avLst/>
-          </a:prstGeom>
-          <a:noFill/>
-        </p:spPr>
-        <p:txBody>
-          <a:bodyPr wrap="square" anchor="ctr"/>
-          <a:lstStyle/>
-          <a:p>
-            <a:pPr algn="ctr"/>
-            <a:r>
-              <a:rPr sz="1600" b="1" i="0">
-                <a:solidFill>
-                  <a:srgbClr val="FFFFFF"/>
-                </a:solidFill>
-                <a:latin typeface="Calibri"/>
-              </a:rPr>
-              <a:t>3</a:t>
-            </a:r>
-          </a:p>
-        </p:txBody>
-      </p:sp>
-      <p:sp>
-        <p:nvSpPr>
-          <p:cNvPr id="17" name="TextBox 16"/>
-          <p:cNvSpPr txBox="1"/>
-          <p:nvPr/>
-        </p:nvSpPr>
-        <p:spPr>
-          <a:xfrm>
-            <a:off x="1188720" y="4037076"/>
-            <a:ext cx="10271455" cy="886968"/>
-          </a:xfrm>
-          <a:prstGeom prst="rect">
-            <a:avLst/>
-          </a:prstGeom>
-          <a:noFill/>
-        </p:spPr>
-        <p:txBody>
-          <a:bodyPr wrap="square" anchor="ctr"/>
-          <a:lstStyle/>
-          <a:p>
-            <a:r>
-              <a:rPr sz="1500" b="1" i="0">
-                <a:solidFill>
-                  <a:srgbClr val="095292"/>
-                </a:solidFill>
-                <a:latin typeface="Calibri"/>
-              </a:rPr>
-              <a:t>Pega y renderiza en la plataforma del curso</a:t>
+              <a:t>–   Y la respuesta debe ser tajante: no, porque el artefacto no es el entregable, la decision documentada lo es; un diagrama corregido con una nota de por que cambio vale mas que uno intacto, y ese cambio justificado es exactamente lo que un ADR registra.</a:t>
             </a:r>
           </a:p>
           <a:p>
             <a:pPr>
-              <a:spcBef>
-                <a:spcPts val="200"/>
-              </a:spcBef>
+              <a:spcAft>
+                <a:spcPts val="800"/>
+              </a:spcAft>
             </a:pPr>
             <a:r>
-              <a:rPr sz="1300" b="0" i="0">
+              <a:rPr sz="2000" b="0" i="0">
                 <a:solidFill>
                   <a:srgbClr val="333333"/>
                 </a:solidFill>
                 <a:latin typeface="Calibri"/>
               </a:rPr>
-              <a:t>Pega ese codigo en la caja de texto de la pregunta y mira como lo dibuja la plataforma. Si no renderiza, corrige ahi mismo: lo que se califica es el diagrama renderizado dentro de la plataforma del curso.</a:t>
-            </a:r>
-          </a:p>
-        </p:txBody>
-      </p:sp>
-      <p:sp>
-        <p:nvSpPr>
-          <p:cNvPr id="18" name="Rounded Rectangle 17"/>
-          <p:cNvSpPr/>
-          <p:nvPr/>
-        </p:nvSpPr>
-        <p:spPr>
-          <a:xfrm>
-            <a:off x="457200" y="5088636"/>
-            <a:ext cx="11277295" cy="1051560"/>
-          </a:xfrm>
-          <a:prstGeom prst="roundRect">
-            <a:avLst>
-              <a:gd name="adj" fmla="val 12000"/>
-            </a:avLst>
-          </a:prstGeom>
-          <a:solidFill>
-            <a:srgbClr val="E8F4FA"/>
-          </a:solidFill>
-          <a:ln>
-            <a:noFill/>
-          </a:ln>
-        </p:spPr>
-        <p:style>
-          <a:lnRef idx="1">
-            <a:schemeClr val="accent1"/>
-          </a:lnRef>
-          <a:fillRef idx="3">
-            <a:schemeClr val="accent1"/>
-          </a:fillRef>
-          <a:effectRef idx="2">
-            <a:schemeClr val="accent1"/>
-          </a:effectRef>
-          <a:fontRef idx="minor">
-            <a:schemeClr val="lt1"/>
-          </a:fontRef>
-        </p:style>
-        <p:txBody>
-          <a:bodyPr rtlCol="0" anchor="ctr"/>
-          <a:lstStyle/>
-          <a:p>
-            <a:pPr algn="ctr"/>
-          </a:p>
-        </p:txBody>
-      </p:sp>
-      <p:sp>
-        <p:nvSpPr>
-          <p:cNvPr id="19" name="Rounded Rectangle 18"/>
-          <p:cNvSpPr/>
-          <p:nvPr/>
-        </p:nvSpPr>
-        <p:spPr>
-          <a:xfrm>
-            <a:off x="594360" y="5394960"/>
-            <a:ext cx="438912" cy="438912"/>
-          </a:xfrm>
-          <a:prstGeom prst="roundRect">
-            <a:avLst>
-              <a:gd name="adj" fmla="val 12000"/>
-            </a:avLst>
-          </a:prstGeom>
-          <a:solidFill>
-            <a:srgbClr val="095292"/>
-          </a:solidFill>
-          <a:ln>
-            <a:noFill/>
-          </a:ln>
-        </p:spPr>
-        <p:style>
-          <a:lnRef idx="1">
-            <a:schemeClr val="accent1"/>
-          </a:lnRef>
-          <a:fillRef idx="3">
-            <a:schemeClr val="accent1"/>
-          </a:fillRef>
-          <a:effectRef idx="2">
-            <a:schemeClr val="accent1"/>
-          </a:effectRef>
-          <a:fontRef idx="minor">
-            <a:schemeClr val="lt1"/>
-          </a:fontRef>
-        </p:style>
-        <p:txBody>
-          <a:bodyPr rtlCol="0" anchor="ctr"/>
-          <a:lstStyle/>
-          <a:p>
-            <a:pPr algn="ctr"/>
-          </a:p>
-        </p:txBody>
-      </p:sp>
-      <p:sp>
-        <p:nvSpPr>
-          <p:cNvPr id="20" name="TextBox 19"/>
-          <p:cNvSpPr txBox="1"/>
-          <p:nvPr/>
-        </p:nvSpPr>
-        <p:spPr>
-          <a:xfrm>
-            <a:off x="594360" y="5394960"/>
-            <a:ext cx="438912" cy="438912"/>
-          </a:xfrm>
-          <a:prstGeom prst="rect">
-            <a:avLst/>
-          </a:prstGeom>
-          <a:noFill/>
-        </p:spPr>
-        <p:txBody>
-          <a:bodyPr wrap="square" anchor="ctr"/>
-          <a:lstStyle/>
-          <a:p>
-            <a:pPr algn="ctr"/>
-            <a:r>
-              <a:rPr sz="1600" b="1" i="0">
-                <a:solidFill>
-                  <a:srgbClr val="FFFFFF"/>
-                </a:solidFill>
-                <a:latin typeface="Calibri"/>
-              </a:rPr>
-              <a:t>4</a:t>
-            </a:r>
-          </a:p>
-        </p:txBody>
-      </p:sp>
-      <p:sp>
-        <p:nvSpPr>
-          <p:cNvPr id="21" name="TextBox 20"/>
-          <p:cNvSpPr txBox="1"/>
-          <p:nvPr/>
-        </p:nvSpPr>
-        <p:spPr>
-          <a:xfrm>
-            <a:off x="1188720" y="5180076"/>
-            <a:ext cx="10271455" cy="886968"/>
-          </a:xfrm>
-          <a:prstGeom prst="rect">
-            <a:avLst/>
-          </a:prstGeom>
-          <a:noFill/>
-        </p:spPr>
-        <p:txBody>
-          <a:bodyPr wrap="square" anchor="ctr"/>
-          <a:lstStyle/>
-          <a:p>
-            <a:r>
-              <a:rPr sz="1500" b="1" i="0">
-                <a:solidFill>
-                  <a:srgbClr val="095292"/>
-                </a:solidFill>
-                <a:latin typeface="Calibri"/>
-              </a:rPr>
-              <a:t>Guarda el PNG para tu PI</a:t>
+              <a:t>–   Error tipico del docente que no domina el tema: dejar pasar el checkpoint con un "todo bien, sigan asi".</a:t>
             </a:r>
           </a:p>
           <a:p>
             <a:pPr>
-              <a:spcBef>
-                <a:spcPts val="200"/>
-              </a:spcBef>
+              <a:spcAft>
+                <a:spcPts val="800"/>
+              </a:spcAft>
             </a:pPr>
             <a:r>
-              <a:rPr sz="1300" b="0" i="0">
+              <a:rPr sz="2000" b="0" i="0">
                 <a:solidFill>
                   <a:srgbClr val="333333"/>
                 </a:solidFill>
                 <a:latin typeface="Calibri"/>
               </a:rPr>
-              <a:t>Exporta tambien la imagen a la carpeta de tu Proyecto Integrador. Esa copia es para tu informe; no reemplaza la respuesta en la plataforma.</a:t>
-            </a:r>
-          </a:p>
-        </p:txBody>
-      </p:sp>
-      <p:sp>
-        <p:nvSpPr>
-          <p:cNvPr id="22" name="TextBox 21"/>
+              <a:t>–   La consecuencia no se ve hoy, se ve en la Clase 15, cuando varios estudiantes sustentan con la base de datos expuesta, con servicios que no son servicios y con nueve capacidades que nunca cerraron</a:t>
+            </a:r>
+          </a:p>
+          <a:p>
+            <a:pPr>
+              <a:spcAft>
+                <a:spcPts val="800"/>
+              </a:spcAft>
+            </a:pPr>
+            <a:r>
+              <a:rPr sz="2000" b="0" i="0">
+                <a:solidFill>
+                  <a:srgbClr val="333333"/>
+                </a:solidFill>
+                <a:latin typeface="Calibri"/>
+              </a:rPr>
+              <a:t>–   Y el docente descubre que las tenia todas a la vista un mes antes; ademas el estudiante interpreta el silencio como aprobacion, asi que el error queda ratificado y luego reclama con razon que nadie se lo advirtio.</a:t>
+            </a:r>
+          </a:p>
+        </p:txBody>
+      </p:sp>
+      <p:sp>
+        <p:nvSpPr>
+          <p:cNvPr id="6" name="TextBox 5"/>
           <p:cNvSpPr txBox="1"/>
           <p:nvPr/>
         </p:nvSpPr>
@@ -8355,7 +6616,7 @@
                 </a:solidFill>
                 <a:latin typeface="Calibri"/>
               </a:rPr>
-              <a:t>PI CloudLite — entregable de hoy</a:t>
+              <a:t>Preguntas frecuentes y cierre conceptual () (3/3)</a:t>
             </a:r>
           </a:p>
         </p:txBody>
@@ -8394,25 +6655,7 @@
                 </a:solidFill>
                 <a:latin typeface="Calibri"/>
               </a:rPr>
-              <a:t>–   </a:t>
-            </a:r>
-            <a:r>
-              <a:rPr sz="2000" b="1" i="0">
-                <a:solidFill>
-                  <a:srgbClr val="333333"/>
-                </a:solidFill>
-                <a:latin typeface="Calibri"/>
-              </a:rPr>
-              <a:t>Entregable:</a:t>
-            </a:r>
-            <a:r>
-              <a:rPr sz="2000" b="0" i="0">
-                <a:solidFill>
-                  <a:srgbClr val="333333"/>
-                </a:solidFill>
-                <a:latin typeface="Calibri"/>
-              </a:rPr>
-              <a:t> Paquete v1: Context + Containers + Deployment + Dockerfile + Actions + informe 60%+</a:t>
+              <a:t>–   El segundo error es convertir el checkpoint en clase magistral: cuando el docente detecta un vacio conceptual y se pone a reexplicar contenedores o STRIDE durante veinte minutos</a:t>
             </a:r>
           </a:p>
           <a:p>
@@ -8428,16 +6671,7 @@
                 </a:solidFill>
                 <a:latin typeface="Calibri"/>
               </a:rPr>
-              <a:t>–   Herramienta: </a:t>
-            </a:r>
-            <a:r>
-              <a:rPr sz="2000" b="1" i="0">
-                <a:solidFill>
-                  <a:srgbClr val="333333"/>
-                </a:solidFill>
-                <a:latin typeface="Calibri"/>
-              </a:rPr>
-              <a:t>draw.io · GitHub · Google Docs</a:t>
+              <a:t>–   Se consume el tiempo de los estudiantes que faltan, la mitad del curso queda sin retroalimentacion y el acta sale a medias.</a:t>
             </a:r>
           </a:p>
           <a:p>
@@ -8453,41 +6687,7 @@
                 </a:solidFill>
                 <a:latin typeface="Calibri"/>
               </a:rPr>
-              <a:t>–   Todo lo que construyan hoy entra al </a:t>
-            </a:r>
-            <a:r>
-              <a:rPr sz="2000" b="1" i="0">
-                <a:solidFill>
-                  <a:srgbClr val="333333"/>
-                </a:solidFill>
-                <a:latin typeface="Calibri"/>
-              </a:rPr>
-              <a:t>informe/repo del PI</a:t>
-            </a:r>
-            <a:r>
-              <a:rPr sz="2000" b="0" i="0">
-                <a:solidFill>
-                  <a:srgbClr val="333333"/>
-                </a:solidFill>
-                <a:latin typeface="Calibri"/>
-              </a:rPr>
-              <a:t> (no es lab suelto).</a:t>
-            </a:r>
-          </a:p>
-          <a:p>
-            <a:pPr>
-              <a:spcAft>
-                <a:spcPts val="800"/>
-              </a:spcAft>
-            </a:pPr>
-            <a:r>
-              <a:rPr sz="2000" b="0" i="0">
-                <a:solidFill>
-                  <a:srgbClr val="333333"/>
-                </a:solidFill>
-                <a:latin typeface="Calibri"/>
-              </a:rPr>
-              <a:t>–   Individual por defecto · el docente puede autorizar equipos de 2–3; la entrega en la plataforma del curso siempre es individual.</a:t>
+              <a:t>–   Lo correcto es anotar el vacio, dar la accion concreta con fecha y seguir; si el vacio es general al grupo, se atiende en cinco minutos al cierre para todos, no proyecto por proyecto.</a:t>
             </a:r>
           </a:p>
         </p:txBody>
@@ -8562,7 +6762,7 @@
         <p:spPr>
           <a:xfrm>
             <a:off x="0" y="0"/>
-            <a:ext cx="12191695" cy="960120"/>
+            <a:ext cx="12191695" cy="1170432"/>
           </a:xfrm>
           <a:prstGeom prst="rect">
             <a:avLst/>
@@ -8604,7 +6804,7 @@
         </p:nvSpPr>
         <p:spPr>
           <a:xfrm>
-            <a:off x="0" y="960120"/>
+            <a:off x="0" y="1170432"/>
             <a:ext cx="12191695" cy="41148"/>
           </a:xfrm>
           <a:prstGeom prst="rect">
@@ -8648,7 +6848,7 @@
         <p:spPr>
           <a:xfrm>
             <a:off x="457200" y="164592"/>
-            <a:ext cx="11277295" cy="502920"/>
+            <a:ext cx="11277295" cy="384048"/>
           </a:xfrm>
           <a:prstGeom prst="rect">
             <a:avLst/>
@@ -8668,7 +6868,7 @@
                 </a:solidFill>
                 <a:latin typeface="Calibri"/>
               </a:rPr>
-              <a:t>Manos a la obra (paso a paso)</a:t>
+              <a:t>Herramientas de hoy</a:t>
             </a:r>
           </a:p>
         </p:txBody>
@@ -8681,8 +6881,8 @@
         </p:nvSpPr>
         <p:spPr>
           <a:xfrm>
-            <a:off x="457200" y="1170432"/>
-            <a:ext cx="11277295" cy="5230368"/>
+            <a:off x="457200" y="566928"/>
+            <a:ext cx="11277295" cy="411480"/>
           </a:xfrm>
           <a:prstGeom prst="rect">
             <a:avLst/>
@@ -8695,171 +6895,1041 @@
           </a:bodyPr>
           <a:lstStyle/>
           <a:p>
-            <a:pPr>
-              <a:spcAft>
-                <a:spcPts val="800"/>
-              </a:spcAft>
+            <a:r>
+              <a:rPr sz="1400" b="0" i="0">
+                <a:solidFill>
+                  <a:srgbClr val="B8D8EE"/>
+                </a:solidFill>
+                <a:latin typeface="Calibri"/>
+              </a:rPr>
+              <a:t>Gratis · navegador o free tier · sin cuenta de pago</a:t>
+            </a:r>
+          </a:p>
+        </p:txBody>
+      </p:sp>
+      <p:sp>
+        <p:nvSpPr>
+          <p:cNvPr id="6" name="Rounded Rectangle 5"/>
+          <p:cNvSpPr/>
+          <p:nvPr/>
+        </p:nvSpPr>
+        <p:spPr>
+          <a:xfrm>
+            <a:off x="457200" y="1591056"/>
+            <a:ext cx="3624986" cy="2299716"/>
+          </a:xfrm>
+          <a:prstGeom prst="roundRect">
+            <a:avLst>
+              <a:gd name="adj" fmla="val 12000"/>
+            </a:avLst>
+          </a:prstGeom>
+          <a:solidFill>
+            <a:srgbClr val="F2F2F2"/>
+          </a:solidFill>
+          <a:ln>
+            <a:noFill/>
+          </a:ln>
+        </p:spPr>
+        <p:style>
+          <a:lnRef idx="1">
+            <a:schemeClr val="accent1"/>
+          </a:lnRef>
+          <a:fillRef idx="3">
+            <a:schemeClr val="accent1"/>
+          </a:fillRef>
+          <a:effectRef idx="2">
+            <a:schemeClr val="accent1"/>
+          </a:effectRef>
+          <a:fontRef idx="minor">
+            <a:schemeClr val="lt1"/>
+          </a:fontRef>
+        </p:style>
+        <p:txBody>
+          <a:bodyPr rtlCol="0" anchor="ctr"/>
+          <a:lstStyle/>
+          <a:p>
+            <a:pPr algn="ctr"/>
+          </a:p>
+        </p:txBody>
+      </p:sp>
+      <p:sp>
+        <p:nvSpPr>
+          <p:cNvPr id="7" name="Rectangle 6"/>
+          <p:cNvSpPr/>
+          <p:nvPr/>
+        </p:nvSpPr>
+        <p:spPr>
+          <a:xfrm>
+            <a:off x="457200" y="1591056"/>
+            <a:ext cx="3624986" cy="64008"/>
+          </a:xfrm>
+          <a:prstGeom prst="rect">
+            <a:avLst/>
+          </a:prstGeom>
+          <a:solidFill>
+            <a:srgbClr val="095292"/>
+          </a:solidFill>
+          <a:ln>
+            <a:noFill/>
+          </a:ln>
+        </p:spPr>
+        <p:style>
+          <a:lnRef idx="1">
+            <a:schemeClr val="accent1"/>
+          </a:lnRef>
+          <a:fillRef idx="3">
+            <a:schemeClr val="accent1"/>
+          </a:fillRef>
+          <a:effectRef idx="2">
+            <a:schemeClr val="accent1"/>
+          </a:effectRef>
+          <a:fontRef idx="minor">
+            <a:schemeClr val="lt1"/>
+          </a:fontRef>
+        </p:style>
+        <p:txBody>
+          <a:bodyPr rtlCol="0" anchor="ctr"/>
+          <a:lstStyle/>
+          <a:p>
+            <a:pPr algn="ctr"/>
+          </a:p>
+        </p:txBody>
+      </p:sp>
+      <p:sp>
+        <p:nvSpPr>
+          <p:cNvPr id="8" name="Rectangle 7"/>
+          <p:cNvSpPr/>
+          <p:nvPr/>
+        </p:nvSpPr>
+        <p:spPr>
+          <a:xfrm>
+            <a:off x="457200" y="1655064"/>
+            <a:ext cx="3624986" cy="27432"/>
+          </a:xfrm>
+          <a:prstGeom prst="rect">
+            <a:avLst/>
+          </a:prstGeom>
+          <a:solidFill>
+            <a:srgbClr val="FFD000"/>
+          </a:solidFill>
+          <a:ln>
+            <a:noFill/>
+          </a:ln>
+        </p:spPr>
+        <p:style>
+          <a:lnRef idx="1">
+            <a:schemeClr val="accent1"/>
+          </a:lnRef>
+          <a:fillRef idx="3">
+            <a:schemeClr val="accent1"/>
+          </a:fillRef>
+          <a:effectRef idx="2">
+            <a:schemeClr val="accent1"/>
+          </a:effectRef>
+          <a:fontRef idx="minor">
+            <a:schemeClr val="lt1"/>
+          </a:fontRef>
+        </p:style>
+        <p:txBody>
+          <a:bodyPr rtlCol="0" anchor="ctr"/>
+          <a:lstStyle/>
+          <a:p>
+            <a:pPr algn="ctr"/>
+          </a:p>
+        </p:txBody>
+      </p:sp>
+      <p:pic>
+        <p:nvPicPr>
+          <p:cNvPr id="9" name="Picture 8" descr="drawio.png"/>
+          <p:cNvPicPr>
+            <a:picLocks noChangeAspect="1"/>
+          </p:cNvPicPr>
+          <p:nvPr/>
+        </p:nvPicPr>
+        <p:blipFill>
+          <a:blip r:embed="rId2"/>
+          <a:stretch>
+            <a:fillRect/>
+          </a:stretch>
+        </p:blipFill>
+        <p:spPr>
+          <a:xfrm>
+            <a:off x="1659331" y="1847087"/>
+            <a:ext cx="1220724" cy="1220724"/>
+          </a:xfrm>
+          <a:prstGeom prst="rect">
+            <a:avLst/>
+          </a:prstGeom>
+        </p:spPr>
+      </p:pic>
+      <p:sp>
+        <p:nvSpPr>
+          <p:cNvPr id="10" name="TextBox 9"/>
+          <p:cNvSpPr txBox="1"/>
+          <p:nvPr/>
+        </p:nvSpPr>
+        <p:spPr>
+          <a:xfrm>
+            <a:off x="530352" y="3159251"/>
+            <a:ext cx="3478682" cy="621792"/>
+          </a:xfrm>
+          <a:prstGeom prst="rect">
+            <a:avLst/>
+          </a:prstGeom>
+          <a:noFill/>
+        </p:spPr>
+        <p:txBody>
+          <a:bodyPr wrap="square" anchor="t"/>
+          <a:lstStyle/>
+          <a:p>
+            <a:pPr algn="ctr"/>
+            <a:r>
+              <a:rPr sz="1300" b="1" i="0">
+                <a:solidFill>
+                  <a:srgbClr val="095292"/>
+                </a:solidFill>
+                <a:latin typeface="Calibri"/>
+              </a:rPr>
+              <a:t>draw.io</a:t>
+            </a:r>
+          </a:p>
+          <a:p>
+            <a:pPr algn="ctr">
+              <a:spcBef>
+                <a:spcPts val="200"/>
+              </a:spcBef>
             </a:pPr>
             <a:r>
-              <a:rPr sz="1700" b="1" i="0">
-                <a:solidFill>
-                  <a:srgbClr val="333333"/>
-                </a:solidFill>
-                <a:latin typeface="Calibri"/>
-              </a:rPr>
-              <a:t>1.</a:t>
-            </a:r>
-            <a:r>
-              <a:rPr sz="1700" b="0" i="0">
-                <a:solidFill>
-                  <a:srgbClr val="333333"/>
-                </a:solidFill>
-                <a:latin typeface="Calibri"/>
-              </a:rPr>
-              <a:t> Paso 1: completen el checklist de 10 filas del paquete v1 marcando cada evidencia como si, no o parcial y pegando la ruta o el enlace exacto de cada una, verificando que ninguna fila marcada como si quede sin ruta verificable, porque una fila sin enlace se califica como no.</a:t>
-            </a:r>
-          </a:p>
-          <a:p>
-            <a:pPr>
-              <a:spcAft>
-                <a:spcPts val="800"/>
-              </a:spcAft>
+              <a:rPr sz="1000" b="0" i="0">
+                <a:solidFill>
+                  <a:srgbClr val="666666"/>
+                </a:solidFill>
+                <a:latin typeface="Calibri"/>
+              </a:rPr>
+              <a:t>Auditoria del paquete</a:t>
+            </a:r>
+          </a:p>
+        </p:txBody>
+      </p:sp>
+      <p:sp>
+        <p:nvSpPr>
+          <p:cNvPr id="11" name="Rounded Rectangle 10"/>
+          <p:cNvSpPr/>
+          <p:nvPr/>
+        </p:nvSpPr>
+        <p:spPr>
+          <a:xfrm>
+            <a:off x="4283354" y="1591056"/>
+            <a:ext cx="3624986" cy="2299716"/>
+          </a:xfrm>
+          <a:prstGeom prst="roundRect">
+            <a:avLst>
+              <a:gd name="adj" fmla="val 12000"/>
+            </a:avLst>
+          </a:prstGeom>
+          <a:solidFill>
+            <a:srgbClr val="F2F2F2"/>
+          </a:solidFill>
+          <a:ln>
+            <a:noFill/>
+          </a:ln>
+        </p:spPr>
+        <p:style>
+          <a:lnRef idx="1">
+            <a:schemeClr val="accent1"/>
+          </a:lnRef>
+          <a:fillRef idx="3">
+            <a:schemeClr val="accent1"/>
+          </a:fillRef>
+          <a:effectRef idx="2">
+            <a:schemeClr val="accent1"/>
+          </a:effectRef>
+          <a:fontRef idx="minor">
+            <a:schemeClr val="lt1"/>
+          </a:fontRef>
+        </p:style>
+        <p:txBody>
+          <a:bodyPr rtlCol="0" anchor="ctr"/>
+          <a:lstStyle/>
+          <a:p>
+            <a:pPr algn="ctr"/>
+          </a:p>
+        </p:txBody>
+      </p:sp>
+      <p:sp>
+        <p:nvSpPr>
+          <p:cNvPr id="12" name="Rectangle 11"/>
+          <p:cNvSpPr/>
+          <p:nvPr/>
+        </p:nvSpPr>
+        <p:spPr>
+          <a:xfrm>
+            <a:off x="4283354" y="1591056"/>
+            <a:ext cx="3624986" cy="64008"/>
+          </a:xfrm>
+          <a:prstGeom prst="rect">
+            <a:avLst/>
+          </a:prstGeom>
+          <a:solidFill>
+            <a:srgbClr val="095292"/>
+          </a:solidFill>
+          <a:ln>
+            <a:noFill/>
+          </a:ln>
+        </p:spPr>
+        <p:style>
+          <a:lnRef idx="1">
+            <a:schemeClr val="accent1"/>
+          </a:lnRef>
+          <a:fillRef idx="3">
+            <a:schemeClr val="accent1"/>
+          </a:fillRef>
+          <a:effectRef idx="2">
+            <a:schemeClr val="accent1"/>
+          </a:effectRef>
+          <a:fontRef idx="minor">
+            <a:schemeClr val="lt1"/>
+          </a:fontRef>
+        </p:style>
+        <p:txBody>
+          <a:bodyPr rtlCol="0" anchor="ctr"/>
+          <a:lstStyle/>
+          <a:p>
+            <a:pPr algn="ctr"/>
+          </a:p>
+        </p:txBody>
+      </p:sp>
+      <p:sp>
+        <p:nvSpPr>
+          <p:cNvPr id="13" name="Rectangle 12"/>
+          <p:cNvSpPr/>
+          <p:nvPr/>
+        </p:nvSpPr>
+        <p:spPr>
+          <a:xfrm>
+            <a:off x="4283354" y="1655064"/>
+            <a:ext cx="3624986" cy="27432"/>
+          </a:xfrm>
+          <a:prstGeom prst="rect">
+            <a:avLst/>
+          </a:prstGeom>
+          <a:solidFill>
+            <a:srgbClr val="FFD000"/>
+          </a:solidFill>
+          <a:ln>
+            <a:noFill/>
+          </a:ln>
+        </p:spPr>
+        <p:style>
+          <a:lnRef idx="1">
+            <a:schemeClr val="accent1"/>
+          </a:lnRef>
+          <a:fillRef idx="3">
+            <a:schemeClr val="accent1"/>
+          </a:fillRef>
+          <a:effectRef idx="2">
+            <a:schemeClr val="accent1"/>
+          </a:effectRef>
+          <a:fontRef idx="minor">
+            <a:schemeClr val="lt1"/>
+          </a:fontRef>
+        </p:style>
+        <p:txBody>
+          <a:bodyPr rtlCol="0" anchor="ctr"/>
+          <a:lstStyle/>
+          <a:p>
+            <a:pPr algn="ctr"/>
+          </a:p>
+        </p:txBody>
+      </p:sp>
+      <p:pic>
+        <p:nvPicPr>
+          <p:cNvPr id="14" name="Picture 13" descr="github_actions.png"/>
+          <p:cNvPicPr>
+            <a:picLocks noChangeAspect="1"/>
+          </p:cNvPicPr>
+          <p:nvPr/>
+        </p:nvPicPr>
+        <p:blipFill>
+          <a:blip r:embed="rId3"/>
+          <a:stretch>
+            <a:fillRect/>
+          </a:stretch>
+        </p:blipFill>
+        <p:spPr>
+          <a:xfrm>
+            <a:off x="5485485" y="1847087"/>
+            <a:ext cx="1220724" cy="1220724"/>
+          </a:xfrm>
+          <a:prstGeom prst="rect">
+            <a:avLst/>
+          </a:prstGeom>
+        </p:spPr>
+      </p:pic>
+      <p:sp>
+        <p:nvSpPr>
+          <p:cNvPr id="15" name="TextBox 14"/>
+          <p:cNvSpPr txBox="1"/>
+          <p:nvPr/>
+        </p:nvSpPr>
+        <p:spPr>
+          <a:xfrm>
+            <a:off x="4356506" y="3159251"/>
+            <a:ext cx="3478682" cy="621792"/>
+          </a:xfrm>
+          <a:prstGeom prst="rect">
+            <a:avLst/>
+          </a:prstGeom>
+          <a:noFill/>
+        </p:spPr>
+        <p:txBody>
+          <a:bodyPr wrap="square" anchor="t"/>
+          <a:lstStyle/>
+          <a:p>
+            <a:pPr algn="ctr"/>
+            <a:r>
+              <a:rPr sz="1300" b="1" i="0">
+                <a:solidFill>
+                  <a:srgbClr val="095292"/>
+                </a:solidFill>
+                <a:latin typeface="Calibri"/>
+              </a:rPr>
+              <a:t>GitHub Actions</a:t>
+            </a:r>
+          </a:p>
+          <a:p>
+            <a:pPr algn="ctr">
+              <a:spcBef>
+                <a:spcPts val="200"/>
+              </a:spcBef>
             </a:pPr>
             <a:r>
-              <a:rPr sz="1700" b="0" i="0">
-                <a:solidFill>
-                  <a:srgbClr val="333333"/>
-                </a:solidFill>
-                <a:latin typeface="Calibri"/>
-              </a:rPr>
-              <a:t>–   </a:t>
-            </a:r>
-            <a:r>
-              <a:rPr sz="1700" b="1" i="0">
-                <a:solidFill>
-                  <a:srgbClr val="333333"/>
-                </a:solidFill>
-                <a:latin typeface="Calibri"/>
-              </a:rPr>
-              <a:t>2.</a:t>
-            </a:r>
-            <a:r>
-              <a:rPr sz="1700" b="0" i="0">
-                <a:solidFill>
-                  <a:srgbClr val="333333"/>
-                </a:solidFill>
-                <a:latin typeface="Calibri"/>
-              </a:rPr>
-              <a:t> Paso 2: hagan la reconciliacion de nombres llenando la tabla de 5 filas que compara como se llama cada elemento en el C4Container, en el C4Deployment, en el Dockerfile o el ci.yml y en el informe, verificando que la columna de nombre canonico sea identica en las cuatro y aplicando la correccion en el artefacto que este desalineado.</a:t>
-            </a:r>
-          </a:p>
-          <a:p>
-            <a:pPr>
-              <a:spcAft>
-                <a:spcPts val="800"/>
-              </a:spcAft>
+              <a:rPr sz="1000" b="0" i="0">
+                <a:solidFill>
+                  <a:srgbClr val="666666"/>
+                </a:solidFill>
+                <a:latin typeface="Calibri"/>
+              </a:rPr>
+              <a:t>Evidencia CI</a:t>
+            </a:r>
+          </a:p>
+        </p:txBody>
+      </p:sp>
+      <p:sp>
+        <p:nvSpPr>
+          <p:cNvPr id="16" name="Rounded Rectangle 15"/>
+          <p:cNvSpPr/>
+          <p:nvPr/>
+        </p:nvSpPr>
+        <p:spPr>
+          <a:xfrm>
+            <a:off x="8109508" y="1591056"/>
+            <a:ext cx="3624986" cy="2299716"/>
+          </a:xfrm>
+          <a:prstGeom prst="roundRect">
+            <a:avLst>
+              <a:gd name="adj" fmla="val 12000"/>
+            </a:avLst>
+          </a:prstGeom>
+          <a:solidFill>
+            <a:srgbClr val="F2F2F2"/>
+          </a:solidFill>
+          <a:ln>
+            <a:noFill/>
+          </a:ln>
+        </p:spPr>
+        <p:style>
+          <a:lnRef idx="1">
+            <a:schemeClr val="accent1"/>
+          </a:lnRef>
+          <a:fillRef idx="3">
+            <a:schemeClr val="accent1"/>
+          </a:fillRef>
+          <a:effectRef idx="2">
+            <a:schemeClr val="accent1"/>
+          </a:effectRef>
+          <a:fontRef idx="minor">
+            <a:schemeClr val="lt1"/>
+          </a:fontRef>
+        </p:style>
+        <p:txBody>
+          <a:bodyPr rtlCol="0" anchor="ctr"/>
+          <a:lstStyle/>
+          <a:p>
+            <a:pPr algn="ctr"/>
+          </a:p>
+        </p:txBody>
+      </p:sp>
+      <p:sp>
+        <p:nvSpPr>
+          <p:cNvPr id="17" name="Rectangle 16"/>
+          <p:cNvSpPr/>
+          <p:nvPr/>
+        </p:nvSpPr>
+        <p:spPr>
+          <a:xfrm>
+            <a:off x="8109508" y="1591056"/>
+            <a:ext cx="3624986" cy="64008"/>
+          </a:xfrm>
+          <a:prstGeom prst="rect">
+            <a:avLst/>
+          </a:prstGeom>
+          <a:solidFill>
+            <a:srgbClr val="095292"/>
+          </a:solidFill>
+          <a:ln>
+            <a:noFill/>
+          </a:ln>
+        </p:spPr>
+        <p:style>
+          <a:lnRef idx="1">
+            <a:schemeClr val="accent1"/>
+          </a:lnRef>
+          <a:fillRef idx="3">
+            <a:schemeClr val="accent1"/>
+          </a:fillRef>
+          <a:effectRef idx="2">
+            <a:schemeClr val="accent1"/>
+          </a:effectRef>
+          <a:fontRef idx="minor">
+            <a:schemeClr val="lt1"/>
+          </a:fontRef>
+        </p:style>
+        <p:txBody>
+          <a:bodyPr rtlCol="0" anchor="ctr"/>
+          <a:lstStyle/>
+          <a:p>
+            <a:pPr algn="ctr"/>
+          </a:p>
+        </p:txBody>
+      </p:sp>
+      <p:sp>
+        <p:nvSpPr>
+          <p:cNvPr id="18" name="Rectangle 17"/>
+          <p:cNvSpPr/>
+          <p:nvPr/>
+        </p:nvSpPr>
+        <p:spPr>
+          <a:xfrm>
+            <a:off x="8109508" y="1655064"/>
+            <a:ext cx="3624986" cy="27432"/>
+          </a:xfrm>
+          <a:prstGeom prst="rect">
+            <a:avLst/>
+          </a:prstGeom>
+          <a:solidFill>
+            <a:srgbClr val="FFD000"/>
+          </a:solidFill>
+          <a:ln>
+            <a:noFill/>
+          </a:ln>
+        </p:spPr>
+        <p:style>
+          <a:lnRef idx="1">
+            <a:schemeClr val="accent1"/>
+          </a:lnRef>
+          <a:fillRef idx="3">
+            <a:schemeClr val="accent1"/>
+          </a:fillRef>
+          <a:effectRef idx="2">
+            <a:schemeClr val="accent1"/>
+          </a:effectRef>
+          <a:fontRef idx="minor">
+            <a:schemeClr val="lt1"/>
+          </a:fontRef>
+        </p:style>
+        <p:txBody>
+          <a:bodyPr rtlCol="0" anchor="ctr"/>
+          <a:lstStyle/>
+          <a:p>
+            <a:pPr algn="ctr"/>
+          </a:p>
+        </p:txBody>
+      </p:sp>
+      <p:pic>
+        <p:nvPicPr>
+          <p:cNvPr id="19" name="Picture 18" descr="google_docs.png"/>
+          <p:cNvPicPr>
+            <a:picLocks noChangeAspect="1"/>
+          </p:cNvPicPr>
+          <p:nvPr/>
+        </p:nvPicPr>
+        <p:blipFill>
+          <a:blip r:embed="rId4"/>
+          <a:stretch>
+            <a:fillRect/>
+          </a:stretch>
+        </p:blipFill>
+        <p:spPr>
+          <a:xfrm>
+            <a:off x="9311640" y="1847087"/>
+            <a:ext cx="1220724" cy="1220724"/>
+          </a:xfrm>
+          <a:prstGeom prst="rect">
+            <a:avLst/>
+          </a:prstGeom>
+        </p:spPr>
+      </p:pic>
+      <p:sp>
+        <p:nvSpPr>
+          <p:cNvPr id="20" name="TextBox 19"/>
+          <p:cNvSpPr txBox="1"/>
+          <p:nvPr/>
+        </p:nvSpPr>
+        <p:spPr>
+          <a:xfrm>
+            <a:off x="8182660" y="3159251"/>
+            <a:ext cx="3478682" cy="621792"/>
+          </a:xfrm>
+          <a:prstGeom prst="rect">
+            <a:avLst/>
+          </a:prstGeom>
+          <a:noFill/>
+        </p:spPr>
+        <p:txBody>
+          <a:bodyPr wrap="square" anchor="t"/>
+          <a:lstStyle/>
+          <a:p>
+            <a:pPr algn="ctr"/>
+            <a:r>
+              <a:rPr sz="1300" b="1" i="0">
+                <a:solidFill>
+                  <a:srgbClr val="095292"/>
+                </a:solidFill>
+                <a:latin typeface="Calibri"/>
+              </a:rPr>
+              <a:t>Google Docs</a:t>
+            </a:r>
+          </a:p>
+          <a:p>
+            <a:pPr algn="ctr">
+              <a:spcBef>
+                <a:spcPts val="200"/>
+              </a:spcBef>
             </a:pPr>
             <a:r>
-              <a:rPr sz="1700" b="0" i="0">
-                <a:solidFill>
-                  <a:srgbClr val="333333"/>
-                </a:solidFill>
-                <a:latin typeface="Calibri"/>
-              </a:rPr>
-              <a:t>–   </a:t>
-            </a:r>
-            <a:r>
-              <a:rPr sz="1700" b="1" i="0">
-                <a:solidFill>
-                  <a:srgbClr val="333333"/>
-                </a:solidFill>
-                <a:latin typeface="Calibri"/>
-              </a:rPr>
-              <a:t>3.</a:t>
-            </a:r>
-            <a:r>
-              <a:rPr sz="1700" b="0" i="0">
-                <a:solidFill>
-                  <a:srgbClr val="333333"/>
-                </a:solidFill>
-                <a:latin typeface="Calibri"/>
-              </a:rPr>
-              <a:t> Paso 3: escriban en la plataforma del curso el diagrama C4Component del interior de la API con 5 componentes y sus relaciones hacia la base de datos, la cola y el proveedor de identidad, verificando al renderizar que ningun componente sea un contenedor de la Clase 4 disfrazado y que el contenedor contenedor de la frontera se llame igual que en el C4Container.</a:t>
-            </a:r>
-          </a:p>
-          <a:p>
-            <a:pPr>
-              <a:spcAft>
-                <a:spcPts val="800"/>
-              </a:spcAft>
+              <a:rPr sz="1000" b="0" i="0">
+                <a:solidFill>
+                  <a:srgbClr val="666666"/>
+                </a:solidFill>
+                <a:latin typeface="Calibri"/>
+              </a:rPr>
+              <a:t>Informe PI</a:t>
+            </a:r>
+          </a:p>
+        </p:txBody>
+      </p:sp>
+      <p:sp>
+        <p:nvSpPr>
+          <p:cNvPr id="21" name="Rounded Rectangle 20"/>
+          <p:cNvSpPr/>
+          <p:nvPr/>
+        </p:nvSpPr>
+        <p:spPr>
+          <a:xfrm>
+            <a:off x="2370277" y="4055364"/>
+            <a:ext cx="3624986" cy="2299716"/>
+          </a:xfrm>
+          <a:prstGeom prst="roundRect">
+            <a:avLst>
+              <a:gd name="adj" fmla="val 12000"/>
+            </a:avLst>
+          </a:prstGeom>
+          <a:solidFill>
+            <a:srgbClr val="F2F2F2"/>
+          </a:solidFill>
+          <a:ln>
+            <a:noFill/>
+          </a:ln>
+        </p:spPr>
+        <p:style>
+          <a:lnRef idx="1">
+            <a:schemeClr val="accent1"/>
+          </a:lnRef>
+          <a:fillRef idx="3">
+            <a:schemeClr val="accent1"/>
+          </a:fillRef>
+          <a:effectRef idx="2">
+            <a:schemeClr val="accent1"/>
+          </a:effectRef>
+          <a:fontRef idx="minor">
+            <a:schemeClr val="lt1"/>
+          </a:fontRef>
+        </p:style>
+        <p:txBody>
+          <a:bodyPr rtlCol="0" anchor="ctr"/>
+          <a:lstStyle/>
+          <a:p>
+            <a:pPr algn="ctr"/>
+          </a:p>
+        </p:txBody>
+      </p:sp>
+      <p:sp>
+        <p:nvSpPr>
+          <p:cNvPr id="22" name="Rectangle 21"/>
+          <p:cNvSpPr/>
+          <p:nvPr/>
+        </p:nvSpPr>
+        <p:spPr>
+          <a:xfrm>
+            <a:off x="2370277" y="4055364"/>
+            <a:ext cx="3624986" cy="64008"/>
+          </a:xfrm>
+          <a:prstGeom prst="rect">
+            <a:avLst/>
+          </a:prstGeom>
+          <a:solidFill>
+            <a:srgbClr val="095292"/>
+          </a:solidFill>
+          <a:ln>
+            <a:noFill/>
+          </a:ln>
+        </p:spPr>
+        <p:style>
+          <a:lnRef idx="1">
+            <a:schemeClr val="accent1"/>
+          </a:lnRef>
+          <a:fillRef idx="3">
+            <a:schemeClr val="accent1"/>
+          </a:fillRef>
+          <a:effectRef idx="2">
+            <a:schemeClr val="accent1"/>
+          </a:effectRef>
+          <a:fontRef idx="minor">
+            <a:schemeClr val="lt1"/>
+          </a:fontRef>
+        </p:style>
+        <p:txBody>
+          <a:bodyPr rtlCol="0" anchor="ctr"/>
+          <a:lstStyle/>
+          <a:p>
+            <a:pPr algn="ctr"/>
+          </a:p>
+        </p:txBody>
+      </p:sp>
+      <p:sp>
+        <p:nvSpPr>
+          <p:cNvPr id="23" name="Rectangle 22"/>
+          <p:cNvSpPr/>
+          <p:nvPr/>
+        </p:nvSpPr>
+        <p:spPr>
+          <a:xfrm>
+            <a:off x="2370277" y="4119372"/>
+            <a:ext cx="3624986" cy="27432"/>
+          </a:xfrm>
+          <a:prstGeom prst="rect">
+            <a:avLst/>
+          </a:prstGeom>
+          <a:solidFill>
+            <a:srgbClr val="FFD000"/>
+          </a:solidFill>
+          <a:ln>
+            <a:noFill/>
+          </a:ln>
+        </p:spPr>
+        <p:style>
+          <a:lnRef idx="1">
+            <a:schemeClr val="accent1"/>
+          </a:lnRef>
+          <a:fillRef idx="3">
+            <a:schemeClr val="accent1"/>
+          </a:fillRef>
+          <a:effectRef idx="2">
+            <a:schemeClr val="accent1"/>
+          </a:effectRef>
+          <a:fontRef idx="minor">
+            <a:schemeClr val="lt1"/>
+          </a:fontRef>
+        </p:style>
+        <p:txBody>
+          <a:bodyPr rtlCol="0" anchor="ctr"/>
+          <a:lstStyle/>
+          <a:p>
+            <a:pPr algn="ctr"/>
+          </a:p>
+        </p:txBody>
+      </p:sp>
+      <p:pic>
+        <p:nvPicPr>
+          <p:cNvPr id="24" name="Picture 23" descr="mermaid.png"/>
+          <p:cNvPicPr>
+            <a:picLocks noChangeAspect="1"/>
+          </p:cNvPicPr>
+          <p:nvPr/>
+        </p:nvPicPr>
+        <p:blipFill>
+          <a:blip r:embed="rId5"/>
+          <a:stretch>
+            <a:fillRect/>
+          </a:stretch>
+        </p:blipFill>
+        <p:spPr>
+          <a:xfrm>
+            <a:off x="3572408" y="4311396"/>
+            <a:ext cx="1220724" cy="1220724"/>
+          </a:xfrm>
+          <a:prstGeom prst="rect">
+            <a:avLst/>
+          </a:prstGeom>
+        </p:spPr>
+      </p:pic>
+      <p:sp>
+        <p:nvSpPr>
+          <p:cNvPr id="25" name="TextBox 24"/>
+          <p:cNvSpPr txBox="1"/>
+          <p:nvPr/>
+        </p:nvSpPr>
+        <p:spPr>
+          <a:xfrm>
+            <a:off x="2443429" y="5623560"/>
+            <a:ext cx="3478682" cy="621792"/>
+          </a:xfrm>
+          <a:prstGeom prst="rect">
+            <a:avLst/>
+          </a:prstGeom>
+          <a:noFill/>
+        </p:spPr>
+        <p:txBody>
+          <a:bodyPr wrap="square" anchor="t"/>
+          <a:lstStyle/>
+          <a:p>
+            <a:pPr algn="ctr"/>
+            <a:r>
+              <a:rPr sz="1300" b="1" i="0">
+                <a:solidFill>
+                  <a:srgbClr val="095292"/>
+                </a:solidFill>
+                <a:latin typeface="Calibri"/>
+              </a:rPr>
+              <a:t>Mermaid</a:t>
+            </a:r>
+          </a:p>
+          <a:p>
+            <a:pPr algn="ctr">
+              <a:spcBef>
+                <a:spcPts val="200"/>
+              </a:spcBef>
             </a:pPr>
             <a:r>
-              <a:rPr sz="1700" b="0" i="0">
-                <a:solidFill>
-                  <a:srgbClr val="333333"/>
-                </a:solidFill>
-                <a:latin typeface="Calibri"/>
-              </a:rPr>
-              <a:t>–   </a:t>
-            </a:r>
-            <a:r>
-              <a:rPr sz="1700" b="1" i="0">
-                <a:solidFill>
-                  <a:srgbClr val="333333"/>
-                </a:solidFill>
-                <a:latin typeface="Calibri"/>
-              </a:rPr>
-              <a:t>4.</a:t>
-            </a:r>
-            <a:r>
-              <a:rPr sz="1700" b="0" i="0">
-                <a:solidFill>
-                  <a:srgbClr val="333333"/>
-                </a:solidFill>
-                <a:latin typeface="Calibri"/>
-              </a:rPr>
-              <a:t> Paso 4: escriban el backlog de 5 items priorizados hacia la Clase 12 con hueco detectado, accion, responsable y fecha, verificando que cada item se pueda cerrar en una semana y que al menos uno provenga del feedback del docente recibido hoy en la cola de revision.</a:t>
-            </a:r>
-          </a:p>
-          <a:p>
-            <a:pPr>
-              <a:spcAft>
-                <a:spcPts val="800"/>
-              </a:spcAft>
+              <a:rPr sz="1000" b="0" i="0">
+                <a:solidFill>
+                  <a:srgbClr val="666666"/>
+                </a:solidFill>
+                <a:latin typeface="Calibri"/>
+              </a:rPr>
+              <a:t>Codigo del diagrama</a:t>
+            </a:r>
+          </a:p>
+        </p:txBody>
+      </p:sp>
+      <p:sp>
+        <p:nvSpPr>
+          <p:cNvPr id="26" name="Rounded Rectangle 25"/>
+          <p:cNvSpPr/>
+          <p:nvPr/>
+        </p:nvSpPr>
+        <p:spPr>
+          <a:xfrm>
+            <a:off x="6196431" y="4055364"/>
+            <a:ext cx="3624986" cy="2299716"/>
+          </a:xfrm>
+          <a:prstGeom prst="roundRect">
+            <a:avLst>
+              <a:gd name="adj" fmla="val 12000"/>
+            </a:avLst>
+          </a:prstGeom>
+          <a:solidFill>
+            <a:srgbClr val="F2F2F2"/>
+          </a:solidFill>
+          <a:ln>
+            <a:noFill/>
+          </a:ln>
+        </p:spPr>
+        <p:style>
+          <a:lnRef idx="1">
+            <a:schemeClr val="accent1"/>
+          </a:lnRef>
+          <a:fillRef idx="3">
+            <a:schemeClr val="accent1"/>
+          </a:fillRef>
+          <a:effectRef idx="2">
+            <a:schemeClr val="accent1"/>
+          </a:effectRef>
+          <a:fontRef idx="minor">
+            <a:schemeClr val="lt1"/>
+          </a:fontRef>
+        </p:style>
+        <p:txBody>
+          <a:bodyPr rtlCol="0" anchor="ctr"/>
+          <a:lstStyle/>
+          <a:p>
+            <a:pPr algn="ctr"/>
+          </a:p>
+        </p:txBody>
+      </p:sp>
+      <p:sp>
+        <p:nvSpPr>
+          <p:cNvPr id="27" name="Rectangle 26"/>
+          <p:cNvSpPr/>
+          <p:nvPr/>
+        </p:nvSpPr>
+        <p:spPr>
+          <a:xfrm>
+            <a:off x="6196431" y="4055364"/>
+            <a:ext cx="3624986" cy="64008"/>
+          </a:xfrm>
+          <a:prstGeom prst="rect">
+            <a:avLst/>
+          </a:prstGeom>
+          <a:solidFill>
+            <a:srgbClr val="095292"/>
+          </a:solidFill>
+          <a:ln>
+            <a:noFill/>
+          </a:ln>
+        </p:spPr>
+        <p:style>
+          <a:lnRef idx="1">
+            <a:schemeClr val="accent1"/>
+          </a:lnRef>
+          <a:fillRef idx="3">
+            <a:schemeClr val="accent1"/>
+          </a:fillRef>
+          <a:effectRef idx="2">
+            <a:schemeClr val="accent1"/>
+          </a:effectRef>
+          <a:fontRef idx="minor">
+            <a:schemeClr val="lt1"/>
+          </a:fontRef>
+        </p:style>
+        <p:txBody>
+          <a:bodyPr rtlCol="0" anchor="ctr"/>
+          <a:lstStyle/>
+          <a:p>
+            <a:pPr algn="ctr"/>
+          </a:p>
+        </p:txBody>
+      </p:sp>
+      <p:sp>
+        <p:nvSpPr>
+          <p:cNvPr id="28" name="Rectangle 27"/>
+          <p:cNvSpPr/>
+          <p:nvPr/>
+        </p:nvSpPr>
+        <p:spPr>
+          <a:xfrm>
+            <a:off x="6196431" y="4119372"/>
+            <a:ext cx="3624986" cy="27432"/>
+          </a:xfrm>
+          <a:prstGeom prst="rect">
+            <a:avLst/>
+          </a:prstGeom>
+          <a:solidFill>
+            <a:srgbClr val="FFD000"/>
+          </a:solidFill>
+          <a:ln>
+            <a:noFill/>
+          </a:ln>
+        </p:spPr>
+        <p:style>
+          <a:lnRef idx="1">
+            <a:schemeClr val="accent1"/>
+          </a:lnRef>
+          <a:fillRef idx="3">
+            <a:schemeClr val="accent1"/>
+          </a:fillRef>
+          <a:effectRef idx="2">
+            <a:schemeClr val="accent1"/>
+          </a:effectRef>
+          <a:fontRef idx="minor">
+            <a:schemeClr val="lt1"/>
+          </a:fontRef>
+        </p:style>
+        <p:txBody>
+          <a:bodyPr rtlCol="0" anchor="ctr"/>
+          <a:lstStyle/>
+          <a:p>
+            <a:pPr algn="ctr"/>
+          </a:p>
+        </p:txBody>
+      </p:sp>
+      <p:pic>
+        <p:nvPicPr>
+          <p:cNvPr id="29" name="Picture 28" descr="examlab.png"/>
+          <p:cNvPicPr>
+            <a:picLocks noChangeAspect="1"/>
+          </p:cNvPicPr>
+          <p:nvPr/>
+        </p:nvPicPr>
+        <p:blipFill>
+          <a:blip r:embed="rId6"/>
+          <a:stretch>
+            <a:fillRect/>
+          </a:stretch>
+        </p:blipFill>
+        <p:spPr>
+          <a:xfrm>
+            <a:off x="7398562" y="4311396"/>
+            <a:ext cx="1220724" cy="1220724"/>
+          </a:xfrm>
+          <a:prstGeom prst="rect">
+            <a:avLst/>
+          </a:prstGeom>
+        </p:spPr>
+      </p:pic>
+      <p:sp>
+        <p:nvSpPr>
+          <p:cNvPr id="30" name="TextBox 29"/>
+          <p:cNvSpPr txBox="1"/>
+          <p:nvPr/>
+        </p:nvSpPr>
+        <p:spPr>
+          <a:xfrm>
+            <a:off x="6269583" y="5623560"/>
+            <a:ext cx="3478682" cy="621792"/>
+          </a:xfrm>
+          <a:prstGeom prst="rect">
+            <a:avLst/>
+          </a:prstGeom>
+          <a:noFill/>
+        </p:spPr>
+        <p:txBody>
+          <a:bodyPr wrap="square" anchor="t"/>
+          <a:lstStyle/>
+          <a:p>
+            <a:pPr algn="ctr"/>
+            <a:r>
+              <a:rPr sz="1300" b="1" i="0">
+                <a:solidFill>
+                  <a:srgbClr val="095292"/>
+                </a:solidFill>
+                <a:latin typeface="Calibri"/>
+              </a:rPr>
+              <a:t>la plataforma del curso</a:t>
+            </a:r>
+          </a:p>
+          <a:p>
+            <a:pPr algn="ctr">
+              <a:spcBef>
+                <a:spcPts val="200"/>
+              </a:spcBef>
             </a:pPr>
             <a:r>
-              <a:rPr sz="1700" b="0" i="0">
-                <a:solidFill>
-                  <a:srgbClr val="333333"/>
-                </a:solidFill>
-                <a:latin typeface="Calibri"/>
-              </a:rPr>
-              <a:t>–   </a:t>
-            </a:r>
-            <a:r>
-              <a:rPr sz="1700" b="1" i="0">
-                <a:solidFill>
-                  <a:srgbClr val="333333"/>
-                </a:solidFill>
-                <a:latin typeface="Calibri"/>
-              </a:rPr>
-              <a:t>5.</a:t>
-            </a:r>
-            <a:r>
-              <a:rPr sz="1700" b="0" i="0">
-                <a:solidFill>
-                  <a:srgbClr val="333333"/>
-                </a:solidFill>
-                <a:latin typeface="Calibri"/>
-              </a:rPr>
-              <a:t> Paso 5: empaqueten el ZIP o el repositorio con los diagramas, el Dockerfile, el ci.yml y el informe al 60 por ciento, y suban las 5 preguntas a la plataforma del curso (modulo Talleres) antes del en la fecha que indique el docente, verificando que el paquete se pueda abrir en otra maquina y que el informe enlace cada evidencia por su ruta dentro del paquete.</a:t>
-            </a:r>
-          </a:p>
-        </p:txBody>
-      </p:sp>
-      <p:sp>
-        <p:nvSpPr>
-          <p:cNvPr id="6" name="TextBox 5"/>
+              <a:rPr sz="1000" b="0" i="0">
+                <a:solidFill>
+                  <a:srgbClr val="666666"/>
+                </a:solidFill>
+                <a:latin typeface="Calibri"/>
+              </a:rPr>
+              <a:t>Donde se entrega</a:t>
+            </a:r>
+          </a:p>
+        </p:txBody>
+      </p:sp>
+      <p:sp>
+        <p:nvSpPr>
+          <p:cNvPr id="31" name="TextBox 30"/>
           <p:cNvSpPr txBox="1"/>
           <p:nvPr/>
         </p:nvSpPr>
@@ -8927,7 +7997,7 @@
         <p:spPr>
           <a:xfrm>
             <a:off x="0" y="0"/>
-            <a:ext cx="12191695" cy="960120"/>
+            <a:ext cx="12191695" cy="1170432"/>
           </a:xfrm>
           <a:prstGeom prst="rect">
             <a:avLst/>
@@ -8969,7 +8039,7 @@
         </p:nvSpPr>
         <p:spPr>
           <a:xfrm>
-            <a:off x="0" y="960120"/>
+            <a:off x="0" y="1170432"/>
             <a:ext cx="12191695" cy="41148"/>
           </a:xfrm>
           <a:prstGeom prst="rect">
@@ -9013,7 +8083,7 @@
         <p:spPr>
           <a:xfrm>
             <a:off x="457200" y="164592"/>
-            <a:ext cx="11277295" cy="502920"/>
+            <a:ext cx="11277295" cy="384048"/>
           </a:xfrm>
           <a:prstGeom prst="rect">
             <a:avLst/>
@@ -9033,20 +8103,225 @@
                 </a:solidFill>
                 <a:latin typeface="Calibri"/>
               </a:rPr>
-              <a:t>Para continuar (PI)</a:t>
-            </a:r>
-          </a:p>
-        </p:txBody>
-      </p:sp>
-      <p:sp>
-        <p:nvSpPr>
-          <p:cNvPr id="5" name="Rounded Rectangle 4"/>
+              <a:t>Del boceto a la plataforma del curso (diagrama)</a:t>
+            </a:r>
+          </a:p>
+        </p:txBody>
+      </p:sp>
+      <p:sp>
+        <p:nvSpPr>
+          <p:cNvPr id="5" name="TextBox 4"/>
+          <p:cNvSpPr txBox="1"/>
+          <p:nvPr/>
+        </p:nvSpPr>
+        <p:spPr>
+          <a:xfrm>
+            <a:off x="457200" y="566928"/>
+            <a:ext cx="11277295" cy="411480"/>
+          </a:xfrm>
+          <a:prstGeom prst="rect">
+            <a:avLst/>
+          </a:prstGeom>
+          <a:noFill/>
+        </p:spPr>
+        <p:txBody>
+          <a:bodyPr wrap="square">
+            <a:spAutoFit/>
+          </a:bodyPr>
+          <a:lstStyle/>
+          <a:p>
+            <a:r>
+              <a:rPr sz="1400" b="0" i="0">
+                <a:solidFill>
+                  <a:srgbClr val="B8D8EE"/>
+                </a:solidFill>
+                <a:latin typeface="Calibri"/>
+              </a:rPr>
+              <a:t>El diagrama se entrega como código Mermaid dentro de la plataforma del curso, no como imagen</a:t>
+            </a:r>
+          </a:p>
+        </p:txBody>
+      </p:sp>
+      <p:sp>
+        <p:nvSpPr>
+          <p:cNvPr id="6" name="Rounded Rectangle 5"/>
           <p:cNvSpPr/>
           <p:nvPr/>
         </p:nvSpPr>
         <p:spPr>
           <a:xfrm>
-            <a:off x="457200" y="1261872"/>
+            <a:off x="457200" y="1659636"/>
+            <a:ext cx="11277295" cy="1051560"/>
+          </a:xfrm>
+          <a:prstGeom prst="roundRect">
+            <a:avLst>
+              <a:gd name="adj" fmla="val 12000"/>
+            </a:avLst>
+          </a:prstGeom>
+          <a:solidFill>
+            <a:srgbClr val="F2F2F2"/>
+          </a:solidFill>
+          <a:ln>
+            <a:noFill/>
+          </a:ln>
+        </p:spPr>
+        <p:style>
+          <a:lnRef idx="1">
+            <a:schemeClr val="accent1"/>
+          </a:lnRef>
+          <a:fillRef idx="3">
+            <a:schemeClr val="accent1"/>
+          </a:fillRef>
+          <a:effectRef idx="2">
+            <a:schemeClr val="accent1"/>
+          </a:effectRef>
+          <a:fontRef idx="minor">
+            <a:schemeClr val="lt1"/>
+          </a:fontRef>
+        </p:style>
+        <p:txBody>
+          <a:bodyPr rtlCol="0" anchor="ctr"/>
+          <a:lstStyle/>
+          <a:p>
+            <a:pPr algn="ctr"/>
+          </a:p>
+        </p:txBody>
+      </p:sp>
+      <p:sp>
+        <p:nvSpPr>
+          <p:cNvPr id="7" name="Rounded Rectangle 6"/>
+          <p:cNvSpPr/>
+          <p:nvPr/>
+        </p:nvSpPr>
+        <p:spPr>
+          <a:xfrm>
+            <a:off x="594360" y="1965960"/>
+            <a:ext cx="438912" cy="438912"/>
+          </a:xfrm>
+          <a:prstGeom prst="roundRect">
+            <a:avLst>
+              <a:gd name="adj" fmla="val 12000"/>
+            </a:avLst>
+          </a:prstGeom>
+          <a:solidFill>
+            <a:srgbClr val="095292"/>
+          </a:solidFill>
+          <a:ln>
+            <a:noFill/>
+          </a:ln>
+        </p:spPr>
+        <p:style>
+          <a:lnRef idx="1">
+            <a:schemeClr val="accent1"/>
+          </a:lnRef>
+          <a:fillRef idx="3">
+            <a:schemeClr val="accent1"/>
+          </a:fillRef>
+          <a:effectRef idx="2">
+            <a:schemeClr val="accent1"/>
+          </a:effectRef>
+          <a:fontRef idx="minor">
+            <a:schemeClr val="lt1"/>
+          </a:fontRef>
+        </p:style>
+        <p:txBody>
+          <a:bodyPr rtlCol="0" anchor="ctr"/>
+          <a:lstStyle/>
+          <a:p>
+            <a:pPr algn="ctr"/>
+          </a:p>
+        </p:txBody>
+      </p:sp>
+      <p:sp>
+        <p:nvSpPr>
+          <p:cNvPr id="8" name="TextBox 7"/>
+          <p:cNvSpPr txBox="1"/>
+          <p:nvPr/>
+        </p:nvSpPr>
+        <p:spPr>
+          <a:xfrm>
+            <a:off x="594360" y="1965960"/>
+            <a:ext cx="438912" cy="438912"/>
+          </a:xfrm>
+          <a:prstGeom prst="rect">
+            <a:avLst/>
+          </a:prstGeom>
+          <a:noFill/>
+        </p:spPr>
+        <p:txBody>
+          <a:bodyPr wrap="square" anchor="ctr"/>
+          <a:lstStyle/>
+          <a:p>
+            <a:pPr algn="ctr"/>
+            <a:r>
+              <a:rPr sz="1600" b="1" i="0">
+                <a:solidFill>
+                  <a:srgbClr val="FFFFFF"/>
+                </a:solidFill>
+                <a:latin typeface="Calibri"/>
+              </a:rPr>
+              <a:t>1</a:t>
+            </a:r>
+          </a:p>
+        </p:txBody>
+      </p:sp>
+      <p:sp>
+        <p:nvSpPr>
+          <p:cNvPr id="9" name="TextBox 8"/>
+          <p:cNvSpPr txBox="1"/>
+          <p:nvPr/>
+        </p:nvSpPr>
+        <p:spPr>
+          <a:xfrm>
+            <a:off x="1188720" y="1751076"/>
+            <a:ext cx="10271455" cy="886968"/>
+          </a:xfrm>
+          <a:prstGeom prst="rect">
+            <a:avLst/>
+          </a:prstGeom>
+          <a:noFill/>
+        </p:spPr>
+        <p:txBody>
+          <a:bodyPr wrap="square" anchor="ctr"/>
+          <a:lstStyle/>
+          <a:p>
+            <a:r>
+              <a:rPr sz="1500" b="1" i="0">
+                <a:solidFill>
+                  <a:srgbClr val="095292"/>
+                </a:solidFill>
+                <a:latin typeface="Calibri"/>
+              </a:rPr>
+              <a:t>Disena visual</a:t>
+            </a:r>
+          </a:p>
+          <a:p>
+            <a:pPr>
+              <a:spcBef>
+                <a:spcPts val="200"/>
+              </a:spcBef>
+            </a:pPr>
+            <a:r>
+              <a:rPr sz="1300" b="0" i="0">
+                <a:solidFill>
+                  <a:srgbClr val="333333"/>
+                </a:solidFill>
+                <a:latin typeface="Calibri"/>
+              </a:rPr>
+              <a:t>Dibuja el diagrama como quieras en Excalidraw o draw.io: es mas rapido arrastrar cajas que escribir codigo, y ahi es donde piensas el modelo.</a:t>
+            </a:r>
+          </a:p>
+        </p:txBody>
+      </p:sp>
+      <p:sp>
+        <p:nvSpPr>
+          <p:cNvPr id="10" name="Rounded Rectangle 9"/>
+          <p:cNvSpPr/>
+          <p:nvPr/>
+        </p:nvSpPr>
+        <p:spPr>
+          <a:xfrm>
+            <a:off x="457200" y="2802636"/>
             <a:ext cx="11277295" cy="1051560"/>
           </a:xfrm>
           <a:prstGeom prst="roundRect">
@@ -9085,20 +8360,22 @@
       </p:sp>
       <p:sp>
         <p:nvSpPr>
-          <p:cNvPr id="6" name="Rectangle 5"/>
+          <p:cNvPr id="11" name="Rounded Rectangle 10"/>
           <p:cNvSpPr/>
           <p:nvPr/>
         </p:nvSpPr>
         <p:spPr>
           <a:xfrm>
-            <a:off x="457200" y="1261872"/>
-            <a:ext cx="128016" cy="1051560"/>
-          </a:xfrm>
-          <a:prstGeom prst="rect">
-            <a:avLst/>
+            <a:off x="594360" y="3108960"/>
+            <a:ext cx="438912" cy="438912"/>
+          </a:xfrm>
+          <a:prstGeom prst="roundRect">
+            <a:avLst>
+              <a:gd name="adj" fmla="val 12000"/>
+            </a:avLst>
           </a:prstGeom>
           <a:solidFill>
-            <a:srgbClr val="269CCB"/>
+            <a:srgbClr val="095292"/>
           </a:solidFill>
           <a:ln>
             <a:noFill/>
@@ -9128,14 +8405,14 @@
       </p:sp>
       <p:sp>
         <p:nvSpPr>
-          <p:cNvPr id="7" name="TextBox 6"/>
+          <p:cNvPr id="12" name="TextBox 11"/>
           <p:cNvSpPr txBox="1"/>
           <p:nvPr/>
         </p:nvSpPr>
         <p:spPr>
           <a:xfrm>
-            <a:off x="777240" y="1399031"/>
-            <a:ext cx="10774375" cy="822959"/>
+            <a:off x="594360" y="3108960"/>
+            <a:ext cx="438912" cy="438912"/>
           </a:xfrm>
           <a:prstGeom prst="rect">
             <a:avLst/>
@@ -9143,48 +8420,79 @@
           <a:noFill/>
         </p:spPr>
         <p:txBody>
-          <a:bodyPr wrap="square">
-            <a:spAutoFit/>
-          </a:bodyPr>
-          <a:lstStyle/>
-          <a:p>
-            <a:r>
-              <a:rPr sz="1200" b="1" i="0">
-                <a:solidFill>
-                  <a:srgbClr val="269CCB"/>
-                </a:solidFill>
-                <a:latin typeface="Calibri"/>
-              </a:rPr>
-              <a:t>Info</a:t>
+          <a:bodyPr wrap="square" anchor="ctr"/>
+          <a:lstStyle/>
+          <a:p>
+            <a:pPr algn="ctr"/>
+            <a:r>
+              <a:rPr sz="1600" b="1" i="0">
+                <a:solidFill>
+                  <a:srgbClr val="FFFFFF"/>
+                </a:solidFill>
+                <a:latin typeface="Calibri"/>
+              </a:rPr>
+              <a:t>2</a:t>
+            </a:r>
+          </a:p>
+        </p:txBody>
+      </p:sp>
+      <p:sp>
+        <p:nvSpPr>
+          <p:cNvPr id="13" name="TextBox 12"/>
+          <p:cNvSpPr txBox="1"/>
+          <p:nvPr/>
+        </p:nvSpPr>
+        <p:spPr>
+          <a:xfrm>
+            <a:off x="1188720" y="2894076"/>
+            <a:ext cx="10271455" cy="886968"/>
+          </a:xfrm>
+          <a:prstGeom prst="rect">
+            <a:avLst/>
+          </a:prstGeom>
+          <a:noFill/>
+        </p:spPr>
+        <p:txBody>
+          <a:bodyPr wrap="square" anchor="ctr"/>
+          <a:lstStyle/>
+          <a:p>
+            <a:r>
+              <a:rPr sz="1500" b="1" i="0">
+                <a:solidFill>
+                  <a:srgbClr val="095292"/>
+                </a:solidFill>
+                <a:latin typeface="Calibri"/>
+              </a:rPr>
+              <a:t>Traduce con IA</a:t>
             </a:r>
           </a:p>
           <a:p>
             <a:pPr>
               <a:spcBef>
-                <a:spcPts val="400"/>
+                <a:spcPts val="200"/>
               </a:spcBef>
             </a:pPr>
             <a:r>
-              <a:rPr sz="1400" b="0" i="0">
+              <a:rPr sz="1300" b="0" i="0">
                 <a:solidFill>
                   <a:srgbClr val="333333"/>
                 </a:solidFill>
                 <a:latin typeface="Calibri"/>
               </a:rPr>
-              <a:t>Entregable: Paquete v1: Context + Containers + Deployment + Dockerfile + Actions + informe 60%+</a:t>
-            </a:r>
-          </a:p>
-        </p:txBody>
-      </p:sp>
-      <p:sp>
-        <p:nvSpPr>
-          <p:cNvPr id="8" name="Rounded Rectangle 7"/>
+              <a:t>Copia o describe tu boceto a una IA y pidele el codigo Mermaid: «convierte este diagrama a Mermaid usando C4Component». Revisa el resultado: la IA acierta la sintaxis, no tu modelo.</a:t>
+            </a:r>
+          </a:p>
+        </p:txBody>
+      </p:sp>
+      <p:sp>
+        <p:nvSpPr>
+          <p:cNvPr id="14" name="Rounded Rectangle 13"/>
           <p:cNvSpPr/>
           <p:nvPr/>
         </p:nvSpPr>
         <p:spPr>
           <a:xfrm>
-            <a:off x="457200" y="2478024"/>
+            <a:off x="457200" y="3945636"/>
             <a:ext cx="11277295" cy="1051560"/>
           </a:xfrm>
           <a:prstGeom prst="roundRect">
@@ -9193,7 +8501,7 @@
             </a:avLst>
           </a:prstGeom>
           <a:solidFill>
-            <a:srgbClr val="FFF8E1"/>
+            <a:srgbClr val="F2F2F2"/>
           </a:solidFill>
           <a:ln>
             <a:noFill/>
@@ -9223,20 +8531,22 @@
       </p:sp>
       <p:sp>
         <p:nvSpPr>
-          <p:cNvPr id="9" name="Rectangle 8"/>
+          <p:cNvPr id="15" name="Rounded Rectangle 14"/>
           <p:cNvSpPr/>
           <p:nvPr/>
         </p:nvSpPr>
         <p:spPr>
           <a:xfrm>
-            <a:off x="457200" y="2478024"/>
-            <a:ext cx="128016" cy="1051560"/>
-          </a:xfrm>
-          <a:prstGeom prst="rect">
-            <a:avLst/>
+            <a:off x="594360" y="4251960"/>
+            <a:ext cx="438912" cy="438912"/>
+          </a:xfrm>
+          <a:prstGeom prst="roundRect">
+            <a:avLst>
+              <a:gd name="adj" fmla="val 12000"/>
+            </a:avLst>
           </a:prstGeom>
           <a:solidFill>
-            <a:srgbClr val="FFD000"/>
+            <a:srgbClr val="095292"/>
           </a:solidFill>
           <a:ln>
             <a:noFill/>
@@ -9266,14 +8576,14 @@
       </p:sp>
       <p:sp>
         <p:nvSpPr>
-          <p:cNvPr id="10" name="TextBox 9"/>
+          <p:cNvPr id="16" name="TextBox 15"/>
           <p:cNvSpPr txBox="1"/>
           <p:nvPr/>
         </p:nvSpPr>
         <p:spPr>
           <a:xfrm>
-            <a:off x="777240" y="2615184"/>
-            <a:ext cx="10774375" cy="822959"/>
+            <a:off x="594360" y="4251960"/>
+            <a:ext cx="438912" cy="438912"/>
           </a:xfrm>
           <a:prstGeom prst="rect">
             <a:avLst/>
@@ -9281,48 +8591,79 @@
           <a:noFill/>
         </p:spPr>
         <p:txBody>
-          <a:bodyPr wrap="square">
-            <a:spAutoFit/>
-          </a:bodyPr>
-          <a:lstStyle/>
-          <a:p>
-            <a:r>
-              <a:rPr sz="1200" b="1" i="0">
-                <a:solidFill>
-                  <a:srgbClr val="FFD000"/>
-                </a:solidFill>
-                <a:latin typeface="Calibri"/>
-              </a:rPr>
-              <a:t>Aclaración</a:t>
+          <a:bodyPr wrap="square" anchor="ctr"/>
+          <a:lstStyle/>
+          <a:p>
+            <a:pPr algn="ctr"/>
+            <a:r>
+              <a:rPr sz="1600" b="1" i="0">
+                <a:solidFill>
+                  <a:srgbClr val="FFFFFF"/>
+                </a:solidFill>
+                <a:latin typeface="Calibri"/>
+              </a:rPr>
+              <a:t>3</a:t>
+            </a:r>
+          </a:p>
+        </p:txBody>
+      </p:sp>
+      <p:sp>
+        <p:nvSpPr>
+          <p:cNvPr id="17" name="TextBox 16"/>
+          <p:cNvSpPr txBox="1"/>
+          <p:nvPr/>
+        </p:nvSpPr>
+        <p:spPr>
+          <a:xfrm>
+            <a:off x="1188720" y="4037076"/>
+            <a:ext cx="10271455" cy="886968"/>
+          </a:xfrm>
+          <a:prstGeom prst="rect">
+            <a:avLst/>
+          </a:prstGeom>
+          <a:noFill/>
+        </p:spPr>
+        <p:txBody>
+          <a:bodyPr wrap="square" anchor="ctr"/>
+          <a:lstStyle/>
+          <a:p>
+            <a:r>
+              <a:rPr sz="1500" b="1" i="0">
+                <a:solidFill>
+                  <a:srgbClr val="095292"/>
+                </a:solidFill>
+                <a:latin typeface="Calibri"/>
+              </a:rPr>
+              <a:t>Pega y renderiza en la plataforma del curso</a:t>
             </a:r>
           </a:p>
           <a:p>
             <a:pPr>
               <a:spcBef>
-                <a:spcPts val="400"/>
+                <a:spcPts val="200"/>
               </a:spcBef>
             </a:pPr>
             <a:r>
-              <a:rPr sz="1400" b="0" i="0">
+              <a:rPr sz="1300" b="0" i="0">
                 <a:solidFill>
                   <a:srgbClr val="333333"/>
                 </a:solidFill>
                 <a:latin typeface="Calibri"/>
               </a:rPr>
-              <a:t>Subir evidencias al paquete CloudLite (Drive/repo) y a la plataforma del curso en la fecha que indique el docente.</a:t>
-            </a:r>
-          </a:p>
-        </p:txBody>
-      </p:sp>
-      <p:sp>
-        <p:nvSpPr>
-          <p:cNvPr id="11" name="Rounded Rectangle 10"/>
+              <a:t>Pega ese codigo en la caja de texto de la pregunta y mira como lo dibuja la plataforma. Si no renderiza, corrige ahi mismo: lo que se califica es el diagrama renderizado dentro de la plataforma del curso.</a:t>
+            </a:r>
+          </a:p>
+        </p:txBody>
+      </p:sp>
+      <p:sp>
+        <p:nvSpPr>
+          <p:cNvPr id="18" name="Rounded Rectangle 17"/>
           <p:cNvSpPr/>
           <p:nvPr/>
         </p:nvSpPr>
         <p:spPr>
           <a:xfrm>
-            <a:off x="457200" y="3694176"/>
+            <a:off x="457200" y="5088636"/>
             <a:ext cx="11277295" cy="1051560"/>
           </a:xfrm>
           <a:prstGeom prst="roundRect">
@@ -9331,7 +8672,7 @@
             </a:avLst>
           </a:prstGeom>
           <a:solidFill>
-            <a:srgbClr val="FBE4E4"/>
+            <a:srgbClr val="E8F4FA"/>
           </a:solidFill>
           <a:ln>
             <a:noFill/>
@@ -9361,20 +8702,22 @@
       </p:sp>
       <p:sp>
         <p:nvSpPr>
-          <p:cNvPr id="12" name="Rectangle 11"/>
+          <p:cNvPr id="19" name="Rounded Rectangle 18"/>
           <p:cNvSpPr/>
           <p:nvPr/>
         </p:nvSpPr>
         <p:spPr>
           <a:xfrm>
-            <a:off x="457200" y="3694176"/>
-            <a:ext cx="128016" cy="1051560"/>
-          </a:xfrm>
-          <a:prstGeom prst="rect">
-            <a:avLst/>
+            <a:off x="594360" y="5394960"/>
+            <a:ext cx="438912" cy="438912"/>
+          </a:xfrm>
+          <a:prstGeom prst="roundRect">
+            <a:avLst>
+              <a:gd name="adj" fmla="val 12000"/>
+            </a:avLst>
           </a:prstGeom>
           <a:solidFill>
-            <a:srgbClr val="A02030"/>
+            <a:srgbClr val="095292"/>
           </a:solidFill>
           <a:ln>
             <a:noFill/>
@@ -9404,14 +8747,14 @@
       </p:sp>
       <p:sp>
         <p:nvSpPr>
-          <p:cNvPr id="13" name="TextBox 12"/>
+          <p:cNvPr id="20" name="TextBox 19"/>
           <p:cNvSpPr txBox="1"/>
           <p:nvPr/>
         </p:nvSpPr>
         <p:spPr>
           <a:xfrm>
-            <a:off x="777240" y="3831336"/>
-            <a:ext cx="10774375" cy="822959"/>
+            <a:off x="594360" y="5394960"/>
+            <a:ext cx="438912" cy="438912"/>
           </a:xfrm>
           <a:prstGeom prst="rect">
             <a:avLst/>
@@ -9419,42 +8762,73 @@
           <a:noFill/>
         </p:spPr>
         <p:txBody>
-          <a:bodyPr wrap="square">
-            <a:spAutoFit/>
-          </a:bodyPr>
-          <a:lstStyle/>
-          <a:p>
-            <a:r>
-              <a:rPr sz="1200" b="1" i="0">
-                <a:solidFill>
-                  <a:srgbClr val="A02030"/>
-                </a:solidFill>
-                <a:latin typeface="Calibri"/>
-              </a:rPr>
-              <a:t>Atención</a:t>
+          <a:bodyPr wrap="square" anchor="ctr"/>
+          <a:lstStyle/>
+          <a:p>
+            <a:pPr algn="ctr"/>
+            <a:r>
+              <a:rPr sz="1600" b="1" i="0">
+                <a:solidFill>
+                  <a:srgbClr val="FFFFFF"/>
+                </a:solidFill>
+                <a:latin typeface="Calibri"/>
+              </a:rPr>
+              <a:t>4</a:t>
+            </a:r>
+          </a:p>
+        </p:txBody>
+      </p:sp>
+      <p:sp>
+        <p:nvSpPr>
+          <p:cNvPr id="21" name="TextBox 20"/>
+          <p:cNvSpPr txBox="1"/>
+          <p:nvPr/>
+        </p:nvSpPr>
+        <p:spPr>
+          <a:xfrm>
+            <a:off x="1188720" y="5180076"/>
+            <a:ext cx="10271455" cy="886968"/>
+          </a:xfrm>
+          <a:prstGeom prst="rect">
+            <a:avLst/>
+          </a:prstGeom>
+          <a:noFill/>
+        </p:spPr>
+        <p:txBody>
+          <a:bodyPr wrap="square" anchor="ctr"/>
+          <a:lstStyle/>
+          <a:p>
+            <a:r>
+              <a:rPr sz="1500" b="1" i="0">
+                <a:solidFill>
+                  <a:srgbClr val="095292"/>
+                </a:solidFill>
+                <a:latin typeface="Calibri"/>
+              </a:rPr>
+              <a:t>Guarda el PNG para tu PI</a:t>
             </a:r>
           </a:p>
           <a:p>
             <a:pPr>
               <a:spcBef>
-                <a:spcPts val="400"/>
+                <a:spcPts val="200"/>
               </a:spcBef>
             </a:pPr>
             <a:r>
-              <a:rPr sz="1400" b="0" i="0">
+              <a:rPr sz="1300" b="0" i="0">
                 <a:solidFill>
                   <a:srgbClr val="333333"/>
                 </a:solidFill>
                 <a:latin typeface="Calibri"/>
               </a:rPr>
-              <a:t>Sin cloud de pago ni instalaciones obligatorias de hipervisores/Docker Desktop.</a:t>
-            </a:r>
-          </a:p>
-        </p:txBody>
-      </p:sp>
-      <p:sp>
-        <p:nvSpPr>
-          <p:cNvPr id="14" name="TextBox 13"/>
+              <a:t>Exporta tambien la imagen a la carpeta de tu Proyecto Integrador. Esa copia es para tu informe; no reemplaza la respuesta en la plataforma.</a:t>
+            </a:r>
+          </a:p>
+        </p:txBody>
+      </p:sp>
+      <p:sp>
+        <p:nvSpPr>
+          <p:cNvPr id="22" name="TextBox 21"/>
           <p:cNvSpPr txBox="1"/>
           <p:nvPr/>
         </p:nvSpPr>
@@ -9522,6 +8896,1279 @@
         <p:spPr>
           <a:xfrm>
             <a:off x="0" y="0"/>
+            <a:ext cx="12191695" cy="960120"/>
+          </a:xfrm>
+          <a:prstGeom prst="rect">
+            <a:avLst/>
+          </a:prstGeom>
+          <a:solidFill>
+            <a:srgbClr val="095292"/>
+          </a:solidFill>
+          <a:ln>
+            <a:noFill/>
+          </a:ln>
+        </p:spPr>
+        <p:style>
+          <a:lnRef idx="1">
+            <a:schemeClr val="accent1"/>
+          </a:lnRef>
+          <a:fillRef idx="3">
+            <a:schemeClr val="accent1"/>
+          </a:fillRef>
+          <a:effectRef idx="2">
+            <a:schemeClr val="accent1"/>
+          </a:effectRef>
+          <a:fontRef idx="minor">
+            <a:schemeClr val="lt1"/>
+          </a:fontRef>
+        </p:style>
+        <p:txBody>
+          <a:bodyPr rtlCol="0" anchor="ctr"/>
+          <a:lstStyle/>
+          <a:p>
+            <a:pPr algn="ctr"/>
+          </a:p>
+        </p:txBody>
+      </p:sp>
+      <p:sp>
+        <p:nvSpPr>
+          <p:cNvPr id="3" name="Rectangle 2"/>
+          <p:cNvSpPr/>
+          <p:nvPr/>
+        </p:nvSpPr>
+        <p:spPr>
+          <a:xfrm>
+            <a:off x="0" y="960120"/>
+            <a:ext cx="12191695" cy="41148"/>
+          </a:xfrm>
+          <a:prstGeom prst="rect">
+            <a:avLst/>
+          </a:prstGeom>
+          <a:solidFill>
+            <a:srgbClr val="FFD000"/>
+          </a:solidFill>
+          <a:ln>
+            <a:noFill/>
+          </a:ln>
+        </p:spPr>
+        <p:style>
+          <a:lnRef idx="1">
+            <a:schemeClr val="accent1"/>
+          </a:lnRef>
+          <a:fillRef idx="3">
+            <a:schemeClr val="accent1"/>
+          </a:fillRef>
+          <a:effectRef idx="2">
+            <a:schemeClr val="accent1"/>
+          </a:effectRef>
+          <a:fontRef idx="minor">
+            <a:schemeClr val="lt1"/>
+          </a:fontRef>
+        </p:style>
+        <p:txBody>
+          <a:bodyPr rtlCol="0" anchor="ctr"/>
+          <a:lstStyle/>
+          <a:p>
+            <a:pPr algn="ctr"/>
+          </a:p>
+        </p:txBody>
+      </p:sp>
+      <p:sp>
+        <p:nvSpPr>
+          <p:cNvPr id="4" name="TextBox 3"/>
+          <p:cNvSpPr txBox="1"/>
+          <p:nvPr/>
+        </p:nvSpPr>
+        <p:spPr>
+          <a:xfrm>
+            <a:off x="457200" y="164592"/>
+            <a:ext cx="11277295" cy="502920"/>
+          </a:xfrm>
+          <a:prstGeom prst="rect">
+            <a:avLst/>
+          </a:prstGeom>
+          <a:noFill/>
+        </p:spPr>
+        <p:txBody>
+          <a:bodyPr wrap="square">
+            <a:spAutoFit/>
+          </a:bodyPr>
+          <a:lstStyle/>
+          <a:p>
+            <a:r>
+              <a:rPr sz="2600" b="1" i="0">
+                <a:solidFill>
+                  <a:srgbClr val="FFFFFF"/>
+                </a:solidFill>
+                <a:latin typeface="Calibri"/>
+              </a:rPr>
+              <a:t>PI CloudLite — entregable de hoy</a:t>
+            </a:r>
+          </a:p>
+        </p:txBody>
+      </p:sp>
+      <p:sp>
+        <p:nvSpPr>
+          <p:cNvPr id="5" name="TextBox 4"/>
+          <p:cNvSpPr txBox="1"/>
+          <p:nvPr/>
+        </p:nvSpPr>
+        <p:spPr>
+          <a:xfrm>
+            <a:off x="457200" y="1170432"/>
+            <a:ext cx="11277295" cy="5230368"/>
+          </a:xfrm>
+          <a:prstGeom prst="rect">
+            <a:avLst/>
+          </a:prstGeom>
+          <a:noFill/>
+        </p:spPr>
+        <p:txBody>
+          <a:bodyPr wrap="square">
+            <a:spAutoFit/>
+          </a:bodyPr>
+          <a:lstStyle/>
+          <a:p>
+            <a:pPr>
+              <a:spcAft>
+                <a:spcPts val="800"/>
+              </a:spcAft>
+            </a:pPr>
+            <a:r>
+              <a:rPr sz="2000" b="0" i="0">
+                <a:solidFill>
+                  <a:srgbClr val="333333"/>
+                </a:solidFill>
+                <a:latin typeface="Calibri"/>
+              </a:rPr>
+              <a:t>–   </a:t>
+            </a:r>
+            <a:r>
+              <a:rPr sz="2000" b="1" i="0">
+                <a:solidFill>
+                  <a:srgbClr val="333333"/>
+                </a:solidFill>
+                <a:latin typeface="Calibri"/>
+              </a:rPr>
+              <a:t>Entregable:</a:t>
+            </a:r>
+            <a:r>
+              <a:rPr sz="2000" b="0" i="0">
+                <a:solidFill>
+                  <a:srgbClr val="333333"/>
+                </a:solidFill>
+                <a:latin typeface="Calibri"/>
+              </a:rPr>
+              <a:t> Paquete v1: Context + Containers + Deployment + Dockerfile + Actions + informe 60%+</a:t>
+            </a:r>
+          </a:p>
+          <a:p>
+            <a:pPr>
+              <a:spcAft>
+                <a:spcPts val="800"/>
+              </a:spcAft>
+            </a:pPr>
+            <a:r>
+              <a:rPr sz="2000" b="0" i="0">
+                <a:solidFill>
+                  <a:srgbClr val="333333"/>
+                </a:solidFill>
+                <a:latin typeface="Calibri"/>
+              </a:rPr>
+              <a:t>–   Herramienta: </a:t>
+            </a:r>
+            <a:r>
+              <a:rPr sz="2000" b="1" i="0">
+                <a:solidFill>
+                  <a:srgbClr val="333333"/>
+                </a:solidFill>
+                <a:latin typeface="Calibri"/>
+              </a:rPr>
+              <a:t>draw.io · GitHub · Google Docs</a:t>
+            </a:r>
+          </a:p>
+          <a:p>
+            <a:pPr>
+              <a:spcAft>
+                <a:spcPts val="800"/>
+              </a:spcAft>
+            </a:pPr>
+            <a:r>
+              <a:rPr sz="2000" b="0" i="0">
+                <a:solidFill>
+                  <a:srgbClr val="333333"/>
+                </a:solidFill>
+                <a:latin typeface="Calibri"/>
+              </a:rPr>
+              <a:t>–   Todo lo que construyan hoy entra al </a:t>
+            </a:r>
+            <a:r>
+              <a:rPr sz="2000" b="1" i="0">
+                <a:solidFill>
+                  <a:srgbClr val="333333"/>
+                </a:solidFill>
+                <a:latin typeface="Calibri"/>
+              </a:rPr>
+              <a:t>informe/repo del PI</a:t>
+            </a:r>
+            <a:r>
+              <a:rPr sz="2000" b="0" i="0">
+                <a:solidFill>
+                  <a:srgbClr val="333333"/>
+                </a:solidFill>
+                <a:latin typeface="Calibri"/>
+              </a:rPr>
+              <a:t> (no es lab suelto).</a:t>
+            </a:r>
+          </a:p>
+          <a:p>
+            <a:pPr>
+              <a:spcAft>
+                <a:spcPts val="800"/>
+              </a:spcAft>
+            </a:pPr>
+            <a:r>
+              <a:rPr sz="2000" b="0" i="0">
+                <a:solidFill>
+                  <a:srgbClr val="333333"/>
+                </a:solidFill>
+                <a:latin typeface="Calibri"/>
+              </a:rPr>
+              <a:t>–   Individual por defecto · el docente puede autorizar equipos de 2–3; la entrega en la plataforma del curso siempre es individual.</a:t>
+            </a:r>
+          </a:p>
+        </p:txBody>
+      </p:sp>
+      <p:sp>
+        <p:nvSpPr>
+          <p:cNvPr id="6" name="TextBox 5"/>
+          <p:cNvSpPr txBox="1"/>
+          <p:nvPr/>
+        </p:nvSpPr>
+        <p:spPr>
+          <a:xfrm>
+            <a:off x="11185855" y="6473952"/>
+            <a:ext cx="640080" cy="274320"/>
+          </a:xfrm>
+          <a:prstGeom prst="rect">
+            <a:avLst/>
+          </a:prstGeom>
+          <a:noFill/>
+        </p:spPr>
+        <p:txBody>
+          <a:bodyPr wrap="square">
+            <a:spAutoFit/>
+          </a:bodyPr>
+          <a:lstStyle/>
+          <a:p>
+            <a:pPr algn="r"/>
+            <a:r>
+              <a:rPr sz="1100" b="0" i="0">
+                <a:solidFill>
+                  <a:srgbClr val="666666"/>
+                </a:solidFill>
+                <a:latin typeface="Calibri"/>
+              </a:rPr>
+              <a:t>23</a:t>
+            </a:r>
+          </a:p>
+        </p:txBody>
+      </p:sp>
+    </p:spTree>
+  </p:cSld>
+  <p:clrMapOvr>
+    <a:masterClrMapping/>
+  </p:clrMapOvr>
+</p:sld>
+</file>
+
+<file path=ppt/slides/slide24.xml><?xml version="1.0" encoding="utf-8"?>
+<p:sld xmlns:a="http://schemas.openxmlformats.org/drawingml/2006/main" xmlns:p="http://schemas.openxmlformats.org/presentationml/2006/main" xmlns:r="http://schemas.openxmlformats.org/officeDocument/2006/relationships">
+  <p:cSld>
+    <p:bg>
+      <p:bgPr>
+        <a:solidFill>
+          <a:srgbClr val="FFFFFF"/>
+        </a:solidFill>
+        <a:effectLst/>
+      </p:bgPr>
+    </p:bg>
+    <p:spTree>
+      <p:nvGrpSpPr>
+        <p:cNvPr id="1" name=""/>
+        <p:cNvGrpSpPr/>
+        <p:nvPr/>
+      </p:nvGrpSpPr>
+      <p:grpSpPr/>
+      <p:sp>
+        <p:nvSpPr>
+          <p:cNvPr id="2" name="Rectangle 1"/>
+          <p:cNvSpPr/>
+          <p:nvPr/>
+        </p:nvSpPr>
+        <p:spPr>
+          <a:xfrm>
+            <a:off x="0" y="0"/>
+            <a:ext cx="12191695" cy="960120"/>
+          </a:xfrm>
+          <a:prstGeom prst="rect">
+            <a:avLst/>
+          </a:prstGeom>
+          <a:solidFill>
+            <a:srgbClr val="095292"/>
+          </a:solidFill>
+          <a:ln>
+            <a:noFill/>
+          </a:ln>
+        </p:spPr>
+        <p:style>
+          <a:lnRef idx="1">
+            <a:schemeClr val="accent1"/>
+          </a:lnRef>
+          <a:fillRef idx="3">
+            <a:schemeClr val="accent1"/>
+          </a:fillRef>
+          <a:effectRef idx="2">
+            <a:schemeClr val="accent1"/>
+          </a:effectRef>
+          <a:fontRef idx="minor">
+            <a:schemeClr val="lt1"/>
+          </a:fontRef>
+        </p:style>
+        <p:txBody>
+          <a:bodyPr rtlCol="0" anchor="ctr"/>
+          <a:lstStyle/>
+          <a:p>
+            <a:pPr algn="ctr"/>
+          </a:p>
+        </p:txBody>
+      </p:sp>
+      <p:sp>
+        <p:nvSpPr>
+          <p:cNvPr id="3" name="Rectangle 2"/>
+          <p:cNvSpPr/>
+          <p:nvPr/>
+        </p:nvSpPr>
+        <p:spPr>
+          <a:xfrm>
+            <a:off x="0" y="960120"/>
+            <a:ext cx="12191695" cy="41148"/>
+          </a:xfrm>
+          <a:prstGeom prst="rect">
+            <a:avLst/>
+          </a:prstGeom>
+          <a:solidFill>
+            <a:srgbClr val="FFD000"/>
+          </a:solidFill>
+          <a:ln>
+            <a:noFill/>
+          </a:ln>
+        </p:spPr>
+        <p:style>
+          <a:lnRef idx="1">
+            <a:schemeClr val="accent1"/>
+          </a:lnRef>
+          <a:fillRef idx="3">
+            <a:schemeClr val="accent1"/>
+          </a:fillRef>
+          <a:effectRef idx="2">
+            <a:schemeClr val="accent1"/>
+          </a:effectRef>
+          <a:fontRef idx="minor">
+            <a:schemeClr val="lt1"/>
+          </a:fontRef>
+        </p:style>
+        <p:txBody>
+          <a:bodyPr rtlCol="0" anchor="ctr"/>
+          <a:lstStyle/>
+          <a:p>
+            <a:pPr algn="ctr"/>
+          </a:p>
+        </p:txBody>
+      </p:sp>
+      <p:sp>
+        <p:nvSpPr>
+          <p:cNvPr id="4" name="TextBox 3"/>
+          <p:cNvSpPr txBox="1"/>
+          <p:nvPr/>
+        </p:nvSpPr>
+        <p:spPr>
+          <a:xfrm>
+            <a:off x="457200" y="164592"/>
+            <a:ext cx="11277295" cy="502920"/>
+          </a:xfrm>
+          <a:prstGeom prst="rect">
+            <a:avLst/>
+          </a:prstGeom>
+          <a:noFill/>
+        </p:spPr>
+        <p:txBody>
+          <a:bodyPr wrap="square">
+            <a:spAutoFit/>
+          </a:bodyPr>
+          <a:lstStyle/>
+          <a:p>
+            <a:r>
+              <a:rPr sz="2600" b="1" i="0">
+                <a:solidFill>
+                  <a:srgbClr val="FFFFFF"/>
+                </a:solidFill>
+                <a:latin typeface="Calibri"/>
+              </a:rPr>
+              <a:t>Manos a la obra (paso a paso)</a:t>
+            </a:r>
+          </a:p>
+        </p:txBody>
+      </p:sp>
+      <p:sp>
+        <p:nvSpPr>
+          <p:cNvPr id="5" name="TextBox 4"/>
+          <p:cNvSpPr txBox="1"/>
+          <p:nvPr/>
+        </p:nvSpPr>
+        <p:spPr>
+          <a:xfrm>
+            <a:off x="457200" y="1170432"/>
+            <a:ext cx="11277295" cy="5230368"/>
+          </a:xfrm>
+          <a:prstGeom prst="rect">
+            <a:avLst/>
+          </a:prstGeom>
+          <a:noFill/>
+        </p:spPr>
+        <p:txBody>
+          <a:bodyPr wrap="square">
+            <a:spAutoFit/>
+          </a:bodyPr>
+          <a:lstStyle/>
+          <a:p>
+            <a:pPr>
+              <a:spcAft>
+                <a:spcPts val="800"/>
+              </a:spcAft>
+            </a:pPr>
+            <a:r>
+              <a:rPr sz="1700" b="1" i="0">
+                <a:solidFill>
+                  <a:srgbClr val="333333"/>
+                </a:solidFill>
+                <a:latin typeface="Calibri"/>
+              </a:rPr>
+              <a:t>1.</a:t>
+            </a:r>
+            <a:r>
+              <a:rPr sz="1700" b="0" i="0">
+                <a:solidFill>
+                  <a:srgbClr val="333333"/>
+                </a:solidFill>
+                <a:latin typeface="Calibri"/>
+              </a:rPr>
+              <a:t> Paso 1: completen el checklist de 10 filas del paquete v1 marcando cada evidencia como si, no o parcial y pegando la ruta o el enlace exacto de cada una, verificando que ninguna fila marcada como si quede sin ruta verificable, porque una fila sin enlace se califica como no.</a:t>
+            </a:r>
+          </a:p>
+          <a:p>
+            <a:pPr>
+              <a:spcAft>
+                <a:spcPts val="800"/>
+              </a:spcAft>
+            </a:pPr>
+            <a:r>
+              <a:rPr sz="1700" b="0" i="0">
+                <a:solidFill>
+                  <a:srgbClr val="333333"/>
+                </a:solidFill>
+                <a:latin typeface="Calibri"/>
+              </a:rPr>
+              <a:t>–   </a:t>
+            </a:r>
+            <a:r>
+              <a:rPr sz="1700" b="1" i="0">
+                <a:solidFill>
+                  <a:srgbClr val="333333"/>
+                </a:solidFill>
+                <a:latin typeface="Calibri"/>
+              </a:rPr>
+              <a:t>2.</a:t>
+            </a:r>
+            <a:r>
+              <a:rPr sz="1700" b="0" i="0">
+                <a:solidFill>
+                  <a:srgbClr val="333333"/>
+                </a:solidFill>
+                <a:latin typeface="Calibri"/>
+              </a:rPr>
+              <a:t> Paso 2: hagan la reconciliacion de nombres llenando la tabla de 5 filas que compara como se llama cada elemento en el C4Container, en el C4Deployment, en el Dockerfile o el ci.yml y en el informe, verificando que la columna de nombre canonico sea identica en las cuatro y aplicando la correccion en el artefacto que este desalineado.</a:t>
+            </a:r>
+          </a:p>
+          <a:p>
+            <a:pPr>
+              <a:spcAft>
+                <a:spcPts val="800"/>
+              </a:spcAft>
+            </a:pPr>
+            <a:r>
+              <a:rPr sz="1700" b="0" i="0">
+                <a:solidFill>
+                  <a:srgbClr val="333333"/>
+                </a:solidFill>
+                <a:latin typeface="Calibri"/>
+              </a:rPr>
+              <a:t>–   </a:t>
+            </a:r>
+            <a:r>
+              <a:rPr sz="1700" b="1" i="0">
+                <a:solidFill>
+                  <a:srgbClr val="333333"/>
+                </a:solidFill>
+                <a:latin typeface="Calibri"/>
+              </a:rPr>
+              <a:t>3.</a:t>
+            </a:r>
+            <a:r>
+              <a:rPr sz="1700" b="0" i="0">
+                <a:solidFill>
+                  <a:srgbClr val="333333"/>
+                </a:solidFill>
+                <a:latin typeface="Calibri"/>
+              </a:rPr>
+              <a:t> Paso 3: escriban en la plataforma del curso el diagrama C4Component del interior de la API con 5 componentes y sus relaciones hacia la base de datos, la cola y el proveedor de identidad, verificando al renderizar que ningun componente sea un contenedor de la Clase 4 disfrazado y que el contenedor contenedor de la frontera se llame igual que en el C4Container.</a:t>
+            </a:r>
+          </a:p>
+          <a:p>
+            <a:pPr>
+              <a:spcAft>
+                <a:spcPts val="800"/>
+              </a:spcAft>
+            </a:pPr>
+            <a:r>
+              <a:rPr sz="1700" b="0" i="0">
+                <a:solidFill>
+                  <a:srgbClr val="333333"/>
+                </a:solidFill>
+                <a:latin typeface="Calibri"/>
+              </a:rPr>
+              <a:t>–   </a:t>
+            </a:r>
+            <a:r>
+              <a:rPr sz="1700" b="1" i="0">
+                <a:solidFill>
+                  <a:srgbClr val="333333"/>
+                </a:solidFill>
+                <a:latin typeface="Calibri"/>
+              </a:rPr>
+              <a:t>4.</a:t>
+            </a:r>
+            <a:r>
+              <a:rPr sz="1700" b="0" i="0">
+                <a:solidFill>
+                  <a:srgbClr val="333333"/>
+                </a:solidFill>
+                <a:latin typeface="Calibri"/>
+              </a:rPr>
+              <a:t> Paso 4: escriban el backlog de 5 items priorizados hacia la Clase 12 con hueco detectado, accion, responsable y fecha, verificando que cada item se pueda cerrar en una semana y que al menos uno provenga del feedback del docente recibido hoy en la cola de revision.</a:t>
+            </a:r>
+          </a:p>
+          <a:p>
+            <a:pPr>
+              <a:spcAft>
+                <a:spcPts val="800"/>
+              </a:spcAft>
+            </a:pPr>
+            <a:r>
+              <a:rPr sz="1700" b="0" i="0">
+                <a:solidFill>
+                  <a:srgbClr val="333333"/>
+                </a:solidFill>
+                <a:latin typeface="Calibri"/>
+              </a:rPr>
+              <a:t>–   </a:t>
+            </a:r>
+            <a:r>
+              <a:rPr sz="1700" b="1" i="0">
+                <a:solidFill>
+                  <a:srgbClr val="333333"/>
+                </a:solidFill>
+                <a:latin typeface="Calibri"/>
+              </a:rPr>
+              <a:t>5.</a:t>
+            </a:r>
+            <a:r>
+              <a:rPr sz="1700" b="0" i="0">
+                <a:solidFill>
+                  <a:srgbClr val="333333"/>
+                </a:solidFill>
+                <a:latin typeface="Calibri"/>
+              </a:rPr>
+              <a:t> Paso 5: empaqueten el ZIP o el repositorio con los diagramas, el Dockerfile, el ci.yml y el informe al 60 por ciento, y suban las 5 preguntas a la plataforma del curso (modulo Talleres) antes del en la fecha que indique el docente, verificando que el paquete se pueda abrir en otra maquina y que el informe enlace cada evidencia por su ruta dentro del paquete.</a:t>
+            </a:r>
+          </a:p>
+        </p:txBody>
+      </p:sp>
+      <p:sp>
+        <p:nvSpPr>
+          <p:cNvPr id="6" name="TextBox 5"/>
+          <p:cNvSpPr txBox="1"/>
+          <p:nvPr/>
+        </p:nvSpPr>
+        <p:spPr>
+          <a:xfrm>
+            <a:off x="11185855" y="6473952"/>
+            <a:ext cx="640080" cy="274320"/>
+          </a:xfrm>
+          <a:prstGeom prst="rect">
+            <a:avLst/>
+          </a:prstGeom>
+          <a:noFill/>
+        </p:spPr>
+        <p:txBody>
+          <a:bodyPr wrap="square">
+            <a:spAutoFit/>
+          </a:bodyPr>
+          <a:lstStyle/>
+          <a:p>
+            <a:pPr algn="r"/>
+            <a:r>
+              <a:rPr sz="1100" b="0" i="0">
+                <a:solidFill>
+                  <a:srgbClr val="666666"/>
+                </a:solidFill>
+                <a:latin typeface="Calibri"/>
+              </a:rPr>
+              <a:t>24</a:t>
+            </a:r>
+          </a:p>
+        </p:txBody>
+      </p:sp>
+    </p:spTree>
+  </p:cSld>
+  <p:clrMapOvr>
+    <a:masterClrMapping/>
+  </p:clrMapOvr>
+</p:sld>
+</file>
+
+<file path=ppt/slides/slide25.xml><?xml version="1.0" encoding="utf-8"?>
+<p:sld xmlns:a="http://schemas.openxmlformats.org/drawingml/2006/main" xmlns:p="http://schemas.openxmlformats.org/presentationml/2006/main" xmlns:r="http://schemas.openxmlformats.org/officeDocument/2006/relationships">
+  <p:cSld>
+    <p:bg>
+      <p:bgPr>
+        <a:solidFill>
+          <a:srgbClr val="FFFFFF"/>
+        </a:solidFill>
+        <a:effectLst/>
+      </p:bgPr>
+    </p:bg>
+    <p:spTree>
+      <p:nvGrpSpPr>
+        <p:cNvPr id="1" name=""/>
+        <p:cNvGrpSpPr/>
+        <p:nvPr/>
+      </p:nvGrpSpPr>
+      <p:grpSpPr/>
+      <p:sp>
+        <p:nvSpPr>
+          <p:cNvPr id="2" name="Rectangle 1"/>
+          <p:cNvSpPr/>
+          <p:nvPr/>
+        </p:nvSpPr>
+        <p:spPr>
+          <a:xfrm>
+            <a:off x="0" y="0"/>
+            <a:ext cx="12191695" cy="960120"/>
+          </a:xfrm>
+          <a:prstGeom prst="rect">
+            <a:avLst/>
+          </a:prstGeom>
+          <a:solidFill>
+            <a:srgbClr val="095292"/>
+          </a:solidFill>
+          <a:ln>
+            <a:noFill/>
+          </a:ln>
+        </p:spPr>
+        <p:style>
+          <a:lnRef idx="1">
+            <a:schemeClr val="accent1"/>
+          </a:lnRef>
+          <a:fillRef idx="3">
+            <a:schemeClr val="accent1"/>
+          </a:fillRef>
+          <a:effectRef idx="2">
+            <a:schemeClr val="accent1"/>
+          </a:effectRef>
+          <a:fontRef idx="minor">
+            <a:schemeClr val="lt1"/>
+          </a:fontRef>
+        </p:style>
+        <p:txBody>
+          <a:bodyPr rtlCol="0" anchor="ctr"/>
+          <a:lstStyle/>
+          <a:p>
+            <a:pPr algn="ctr"/>
+          </a:p>
+        </p:txBody>
+      </p:sp>
+      <p:sp>
+        <p:nvSpPr>
+          <p:cNvPr id="3" name="Rectangle 2"/>
+          <p:cNvSpPr/>
+          <p:nvPr/>
+        </p:nvSpPr>
+        <p:spPr>
+          <a:xfrm>
+            <a:off x="0" y="960120"/>
+            <a:ext cx="12191695" cy="41148"/>
+          </a:xfrm>
+          <a:prstGeom prst="rect">
+            <a:avLst/>
+          </a:prstGeom>
+          <a:solidFill>
+            <a:srgbClr val="FFD000"/>
+          </a:solidFill>
+          <a:ln>
+            <a:noFill/>
+          </a:ln>
+        </p:spPr>
+        <p:style>
+          <a:lnRef idx="1">
+            <a:schemeClr val="accent1"/>
+          </a:lnRef>
+          <a:fillRef idx="3">
+            <a:schemeClr val="accent1"/>
+          </a:fillRef>
+          <a:effectRef idx="2">
+            <a:schemeClr val="accent1"/>
+          </a:effectRef>
+          <a:fontRef idx="minor">
+            <a:schemeClr val="lt1"/>
+          </a:fontRef>
+        </p:style>
+        <p:txBody>
+          <a:bodyPr rtlCol="0" anchor="ctr"/>
+          <a:lstStyle/>
+          <a:p>
+            <a:pPr algn="ctr"/>
+          </a:p>
+        </p:txBody>
+      </p:sp>
+      <p:sp>
+        <p:nvSpPr>
+          <p:cNvPr id="4" name="TextBox 3"/>
+          <p:cNvSpPr txBox="1"/>
+          <p:nvPr/>
+        </p:nvSpPr>
+        <p:spPr>
+          <a:xfrm>
+            <a:off x="457200" y="164592"/>
+            <a:ext cx="11277295" cy="502920"/>
+          </a:xfrm>
+          <a:prstGeom prst="rect">
+            <a:avLst/>
+          </a:prstGeom>
+          <a:noFill/>
+        </p:spPr>
+        <p:txBody>
+          <a:bodyPr wrap="square">
+            <a:spAutoFit/>
+          </a:bodyPr>
+          <a:lstStyle/>
+          <a:p>
+            <a:r>
+              <a:rPr sz="2600" b="1" i="0">
+                <a:solidFill>
+                  <a:srgbClr val="FFFFFF"/>
+                </a:solidFill>
+                <a:latin typeface="Calibri"/>
+              </a:rPr>
+              <a:t>Para continuar (PI)</a:t>
+            </a:r>
+          </a:p>
+        </p:txBody>
+      </p:sp>
+      <p:sp>
+        <p:nvSpPr>
+          <p:cNvPr id="5" name="Rounded Rectangle 4"/>
+          <p:cNvSpPr/>
+          <p:nvPr/>
+        </p:nvSpPr>
+        <p:spPr>
+          <a:xfrm>
+            <a:off x="457200" y="1261872"/>
+            <a:ext cx="11277295" cy="1051560"/>
+          </a:xfrm>
+          <a:prstGeom prst="roundRect">
+            <a:avLst>
+              <a:gd name="adj" fmla="val 12000"/>
+            </a:avLst>
+          </a:prstGeom>
+          <a:solidFill>
+            <a:srgbClr val="E8F4FA"/>
+          </a:solidFill>
+          <a:ln>
+            <a:noFill/>
+          </a:ln>
+        </p:spPr>
+        <p:style>
+          <a:lnRef idx="1">
+            <a:schemeClr val="accent1"/>
+          </a:lnRef>
+          <a:fillRef idx="3">
+            <a:schemeClr val="accent1"/>
+          </a:fillRef>
+          <a:effectRef idx="2">
+            <a:schemeClr val="accent1"/>
+          </a:effectRef>
+          <a:fontRef idx="minor">
+            <a:schemeClr val="lt1"/>
+          </a:fontRef>
+        </p:style>
+        <p:txBody>
+          <a:bodyPr rtlCol="0" anchor="ctr"/>
+          <a:lstStyle/>
+          <a:p>
+            <a:pPr algn="ctr"/>
+          </a:p>
+        </p:txBody>
+      </p:sp>
+      <p:sp>
+        <p:nvSpPr>
+          <p:cNvPr id="6" name="Rectangle 5"/>
+          <p:cNvSpPr/>
+          <p:nvPr/>
+        </p:nvSpPr>
+        <p:spPr>
+          <a:xfrm>
+            <a:off x="457200" y="1261872"/>
+            <a:ext cx="128016" cy="1051560"/>
+          </a:xfrm>
+          <a:prstGeom prst="rect">
+            <a:avLst/>
+          </a:prstGeom>
+          <a:solidFill>
+            <a:srgbClr val="269CCB"/>
+          </a:solidFill>
+          <a:ln>
+            <a:noFill/>
+          </a:ln>
+        </p:spPr>
+        <p:style>
+          <a:lnRef idx="1">
+            <a:schemeClr val="accent1"/>
+          </a:lnRef>
+          <a:fillRef idx="3">
+            <a:schemeClr val="accent1"/>
+          </a:fillRef>
+          <a:effectRef idx="2">
+            <a:schemeClr val="accent1"/>
+          </a:effectRef>
+          <a:fontRef idx="minor">
+            <a:schemeClr val="lt1"/>
+          </a:fontRef>
+        </p:style>
+        <p:txBody>
+          <a:bodyPr rtlCol="0" anchor="ctr"/>
+          <a:lstStyle/>
+          <a:p>
+            <a:pPr algn="ctr"/>
+          </a:p>
+        </p:txBody>
+      </p:sp>
+      <p:sp>
+        <p:nvSpPr>
+          <p:cNvPr id="7" name="TextBox 6"/>
+          <p:cNvSpPr txBox="1"/>
+          <p:nvPr/>
+        </p:nvSpPr>
+        <p:spPr>
+          <a:xfrm>
+            <a:off x="777240" y="1399031"/>
+            <a:ext cx="10774375" cy="822959"/>
+          </a:xfrm>
+          <a:prstGeom prst="rect">
+            <a:avLst/>
+          </a:prstGeom>
+          <a:noFill/>
+        </p:spPr>
+        <p:txBody>
+          <a:bodyPr wrap="square">
+            <a:spAutoFit/>
+          </a:bodyPr>
+          <a:lstStyle/>
+          <a:p>
+            <a:r>
+              <a:rPr sz="1200" b="1" i="0">
+                <a:solidFill>
+                  <a:srgbClr val="269CCB"/>
+                </a:solidFill>
+                <a:latin typeface="Calibri"/>
+              </a:rPr>
+              <a:t>Info</a:t>
+            </a:r>
+          </a:p>
+          <a:p>
+            <a:pPr>
+              <a:spcBef>
+                <a:spcPts val="400"/>
+              </a:spcBef>
+            </a:pPr>
+            <a:r>
+              <a:rPr sz="1400" b="0" i="0">
+                <a:solidFill>
+                  <a:srgbClr val="333333"/>
+                </a:solidFill>
+                <a:latin typeface="Calibri"/>
+              </a:rPr>
+              <a:t>Entregable: Paquete v1: Context + Containers + Deployment + Dockerfile + Actions + informe 60%+</a:t>
+            </a:r>
+          </a:p>
+        </p:txBody>
+      </p:sp>
+      <p:sp>
+        <p:nvSpPr>
+          <p:cNvPr id="8" name="Rounded Rectangle 7"/>
+          <p:cNvSpPr/>
+          <p:nvPr/>
+        </p:nvSpPr>
+        <p:spPr>
+          <a:xfrm>
+            <a:off x="457200" y="2478024"/>
+            <a:ext cx="11277295" cy="1051560"/>
+          </a:xfrm>
+          <a:prstGeom prst="roundRect">
+            <a:avLst>
+              <a:gd name="adj" fmla="val 12000"/>
+            </a:avLst>
+          </a:prstGeom>
+          <a:solidFill>
+            <a:srgbClr val="FFF8E1"/>
+          </a:solidFill>
+          <a:ln>
+            <a:noFill/>
+          </a:ln>
+        </p:spPr>
+        <p:style>
+          <a:lnRef idx="1">
+            <a:schemeClr val="accent1"/>
+          </a:lnRef>
+          <a:fillRef idx="3">
+            <a:schemeClr val="accent1"/>
+          </a:fillRef>
+          <a:effectRef idx="2">
+            <a:schemeClr val="accent1"/>
+          </a:effectRef>
+          <a:fontRef idx="minor">
+            <a:schemeClr val="lt1"/>
+          </a:fontRef>
+        </p:style>
+        <p:txBody>
+          <a:bodyPr rtlCol="0" anchor="ctr"/>
+          <a:lstStyle/>
+          <a:p>
+            <a:pPr algn="ctr"/>
+          </a:p>
+        </p:txBody>
+      </p:sp>
+      <p:sp>
+        <p:nvSpPr>
+          <p:cNvPr id="9" name="Rectangle 8"/>
+          <p:cNvSpPr/>
+          <p:nvPr/>
+        </p:nvSpPr>
+        <p:spPr>
+          <a:xfrm>
+            <a:off x="457200" y="2478024"/>
+            <a:ext cx="128016" cy="1051560"/>
+          </a:xfrm>
+          <a:prstGeom prst="rect">
+            <a:avLst/>
+          </a:prstGeom>
+          <a:solidFill>
+            <a:srgbClr val="FFD000"/>
+          </a:solidFill>
+          <a:ln>
+            <a:noFill/>
+          </a:ln>
+        </p:spPr>
+        <p:style>
+          <a:lnRef idx="1">
+            <a:schemeClr val="accent1"/>
+          </a:lnRef>
+          <a:fillRef idx="3">
+            <a:schemeClr val="accent1"/>
+          </a:fillRef>
+          <a:effectRef idx="2">
+            <a:schemeClr val="accent1"/>
+          </a:effectRef>
+          <a:fontRef idx="minor">
+            <a:schemeClr val="lt1"/>
+          </a:fontRef>
+        </p:style>
+        <p:txBody>
+          <a:bodyPr rtlCol="0" anchor="ctr"/>
+          <a:lstStyle/>
+          <a:p>
+            <a:pPr algn="ctr"/>
+          </a:p>
+        </p:txBody>
+      </p:sp>
+      <p:sp>
+        <p:nvSpPr>
+          <p:cNvPr id="10" name="TextBox 9"/>
+          <p:cNvSpPr txBox="1"/>
+          <p:nvPr/>
+        </p:nvSpPr>
+        <p:spPr>
+          <a:xfrm>
+            <a:off x="777240" y="2615184"/>
+            <a:ext cx="10774375" cy="822959"/>
+          </a:xfrm>
+          <a:prstGeom prst="rect">
+            <a:avLst/>
+          </a:prstGeom>
+          <a:noFill/>
+        </p:spPr>
+        <p:txBody>
+          <a:bodyPr wrap="square">
+            <a:spAutoFit/>
+          </a:bodyPr>
+          <a:lstStyle/>
+          <a:p>
+            <a:r>
+              <a:rPr sz="1200" b="1" i="0">
+                <a:solidFill>
+                  <a:srgbClr val="FFD000"/>
+                </a:solidFill>
+                <a:latin typeface="Calibri"/>
+              </a:rPr>
+              <a:t>Aclaración</a:t>
+            </a:r>
+          </a:p>
+          <a:p>
+            <a:pPr>
+              <a:spcBef>
+                <a:spcPts val="400"/>
+              </a:spcBef>
+            </a:pPr>
+            <a:r>
+              <a:rPr sz="1400" b="0" i="0">
+                <a:solidFill>
+                  <a:srgbClr val="333333"/>
+                </a:solidFill>
+                <a:latin typeface="Calibri"/>
+              </a:rPr>
+              <a:t>Subir evidencias al paquete CloudLite (Drive/repo) y a la plataforma del curso en la fecha que indique el docente.</a:t>
+            </a:r>
+          </a:p>
+        </p:txBody>
+      </p:sp>
+      <p:sp>
+        <p:nvSpPr>
+          <p:cNvPr id="11" name="Rounded Rectangle 10"/>
+          <p:cNvSpPr/>
+          <p:nvPr/>
+        </p:nvSpPr>
+        <p:spPr>
+          <a:xfrm>
+            <a:off x="457200" y="3694176"/>
+            <a:ext cx="11277295" cy="1051560"/>
+          </a:xfrm>
+          <a:prstGeom prst="roundRect">
+            <a:avLst>
+              <a:gd name="adj" fmla="val 12000"/>
+            </a:avLst>
+          </a:prstGeom>
+          <a:solidFill>
+            <a:srgbClr val="FBE4E4"/>
+          </a:solidFill>
+          <a:ln>
+            <a:noFill/>
+          </a:ln>
+        </p:spPr>
+        <p:style>
+          <a:lnRef idx="1">
+            <a:schemeClr val="accent1"/>
+          </a:lnRef>
+          <a:fillRef idx="3">
+            <a:schemeClr val="accent1"/>
+          </a:fillRef>
+          <a:effectRef idx="2">
+            <a:schemeClr val="accent1"/>
+          </a:effectRef>
+          <a:fontRef idx="minor">
+            <a:schemeClr val="lt1"/>
+          </a:fontRef>
+        </p:style>
+        <p:txBody>
+          <a:bodyPr rtlCol="0" anchor="ctr"/>
+          <a:lstStyle/>
+          <a:p>
+            <a:pPr algn="ctr"/>
+          </a:p>
+        </p:txBody>
+      </p:sp>
+      <p:sp>
+        <p:nvSpPr>
+          <p:cNvPr id="12" name="Rectangle 11"/>
+          <p:cNvSpPr/>
+          <p:nvPr/>
+        </p:nvSpPr>
+        <p:spPr>
+          <a:xfrm>
+            <a:off x="457200" y="3694176"/>
+            <a:ext cx="128016" cy="1051560"/>
+          </a:xfrm>
+          <a:prstGeom prst="rect">
+            <a:avLst/>
+          </a:prstGeom>
+          <a:solidFill>
+            <a:srgbClr val="A02030"/>
+          </a:solidFill>
+          <a:ln>
+            <a:noFill/>
+          </a:ln>
+        </p:spPr>
+        <p:style>
+          <a:lnRef idx="1">
+            <a:schemeClr val="accent1"/>
+          </a:lnRef>
+          <a:fillRef idx="3">
+            <a:schemeClr val="accent1"/>
+          </a:fillRef>
+          <a:effectRef idx="2">
+            <a:schemeClr val="accent1"/>
+          </a:effectRef>
+          <a:fontRef idx="minor">
+            <a:schemeClr val="lt1"/>
+          </a:fontRef>
+        </p:style>
+        <p:txBody>
+          <a:bodyPr rtlCol="0" anchor="ctr"/>
+          <a:lstStyle/>
+          <a:p>
+            <a:pPr algn="ctr"/>
+          </a:p>
+        </p:txBody>
+      </p:sp>
+      <p:sp>
+        <p:nvSpPr>
+          <p:cNvPr id="13" name="TextBox 12"/>
+          <p:cNvSpPr txBox="1"/>
+          <p:nvPr/>
+        </p:nvSpPr>
+        <p:spPr>
+          <a:xfrm>
+            <a:off x="777240" y="3831336"/>
+            <a:ext cx="10774375" cy="822959"/>
+          </a:xfrm>
+          <a:prstGeom prst="rect">
+            <a:avLst/>
+          </a:prstGeom>
+          <a:noFill/>
+        </p:spPr>
+        <p:txBody>
+          <a:bodyPr wrap="square">
+            <a:spAutoFit/>
+          </a:bodyPr>
+          <a:lstStyle/>
+          <a:p>
+            <a:r>
+              <a:rPr sz="1200" b="1" i="0">
+                <a:solidFill>
+                  <a:srgbClr val="A02030"/>
+                </a:solidFill>
+                <a:latin typeface="Calibri"/>
+              </a:rPr>
+              <a:t>Atención</a:t>
+            </a:r>
+          </a:p>
+          <a:p>
+            <a:pPr>
+              <a:spcBef>
+                <a:spcPts val="400"/>
+              </a:spcBef>
+            </a:pPr>
+            <a:r>
+              <a:rPr sz="1400" b="0" i="0">
+                <a:solidFill>
+                  <a:srgbClr val="333333"/>
+                </a:solidFill>
+                <a:latin typeface="Calibri"/>
+              </a:rPr>
+              <a:t>Sin cloud de pago ni instalaciones obligatorias de hipervisores/Docker Desktop.</a:t>
+            </a:r>
+          </a:p>
+        </p:txBody>
+      </p:sp>
+      <p:sp>
+        <p:nvSpPr>
+          <p:cNvPr id="14" name="TextBox 13"/>
+          <p:cNvSpPr txBox="1"/>
+          <p:nvPr/>
+        </p:nvSpPr>
+        <p:spPr>
+          <a:xfrm>
+            <a:off x="11185855" y="6473952"/>
+            <a:ext cx="640080" cy="274320"/>
+          </a:xfrm>
+          <a:prstGeom prst="rect">
+            <a:avLst/>
+          </a:prstGeom>
+          <a:noFill/>
+        </p:spPr>
+        <p:txBody>
+          <a:bodyPr wrap="square">
+            <a:spAutoFit/>
+          </a:bodyPr>
+          <a:lstStyle/>
+          <a:p>
+            <a:pPr algn="r"/>
+            <a:r>
+              <a:rPr sz="1100" b="0" i="0">
+                <a:solidFill>
+                  <a:srgbClr val="666666"/>
+                </a:solidFill>
+                <a:latin typeface="Calibri"/>
+              </a:rPr>
+              <a:t>25</a:t>
+            </a:r>
+          </a:p>
+        </p:txBody>
+      </p:sp>
+    </p:spTree>
+  </p:cSld>
+  <p:clrMapOvr>
+    <a:masterClrMapping/>
+  </p:clrMapOvr>
+</p:sld>
+</file>
+
+<file path=ppt/slides/slide26.xml><?xml version="1.0" encoding="utf-8"?>
+<p:sld xmlns:a="http://schemas.openxmlformats.org/drawingml/2006/main" xmlns:p="http://schemas.openxmlformats.org/presentationml/2006/main" xmlns:r="http://schemas.openxmlformats.org/officeDocument/2006/relationships">
+  <p:cSld>
+    <p:bg>
+      <p:bgPr>
+        <a:solidFill>
+          <a:srgbClr val="FFFFFF"/>
+        </a:solidFill>
+        <a:effectLst/>
+      </p:bgPr>
+    </p:bg>
+    <p:spTree>
+      <p:nvGrpSpPr>
+        <p:cNvPr id="1" name=""/>
+        <p:cNvGrpSpPr/>
+        <p:nvPr/>
+      </p:nvGrpSpPr>
+      <p:grpSpPr/>
+      <p:sp>
+        <p:nvSpPr>
+          <p:cNvPr id="2" name="Rectangle 1"/>
+          <p:cNvSpPr/>
+          <p:nvPr/>
+        </p:nvSpPr>
+        <p:spPr>
+          <a:xfrm>
+            <a:off x="0" y="0"/>
             <a:ext cx="12191695" cy="164592"/>
           </a:xfrm>
           <a:prstGeom prst="rect">
@@ -10836,7 +11483,7 @@
                 </a:solidFill>
                 <a:latin typeface="Calibri"/>
               </a:rPr>
-              <a:t>La teoria propia del dia: que es una revision de arquitectura</a:t>
+              <a:t>La teoria propia del dia: que es una revision de arquitectura (1/2)</a:t>
             </a:r>
           </a:p>
         </p:txBody>
@@ -10908,54 +11555,6 @@
                 <a:latin typeface="Calibri"/>
               </a:rPr>
               <a:t>–   Existe en la industria con nombres concretos: ATAM en su version academica, design review o RFC review en empresas de producto, comite de arquitectura en organizaciones grandes.</a:t>
-            </a:r>
-          </a:p>
-          <a:p>
-            <a:pPr>
-              <a:spcAft>
-                <a:spcPts val="800"/>
-              </a:spcAft>
-            </a:pPr>
-            <a:r>
-              <a:rPr sz="2000" b="0" i="0">
-                <a:solidFill>
-                  <a:srgbClr val="333333"/>
-                </a:solidFill>
-                <a:latin typeface="Calibri"/>
-              </a:rPr>
-              <a:t>–   Todas comparten la premisa economica que sostiene el curso: un riesgo detectado en el diseno cuesta una fraccion de lo que cuesta cuando ya esta implementado y con usuarios encima.</a:t>
-            </a:r>
-          </a:p>
-          <a:p>
-            <a:pPr>
-              <a:spcAft>
-                <a:spcPts val="800"/>
-              </a:spcAft>
-            </a:pPr>
-            <a:r>
-              <a:rPr sz="2000" b="0" i="0">
-                <a:solidFill>
-                  <a:srgbClr val="333333"/>
-                </a:solidFill>
-                <a:latin typeface="Calibri"/>
-              </a:rPr>
-              <a:t>–   La revision no juzga si el diagrama es bonito; busca tres cosas: decisiones sin argumento, incoherencias entre artefactos y riesgos que nadie ha nombrado.</a:t>
-            </a:r>
-          </a:p>
-          <a:p>
-            <a:pPr>
-              <a:spcAft>
-                <a:spcPts val="800"/>
-              </a:spcAft>
-            </a:pPr>
-            <a:r>
-              <a:rPr sz="2000" b="0" i="0">
-                <a:solidFill>
-                  <a:srgbClr val="333333"/>
-                </a:solidFill>
-                <a:latin typeface="Calibri"/>
-              </a:rPr>
-              <a:t>–   Hoy el docente no dicta, audita, y el estudiante no aprende un concepto, demuestra que los que ya tiene forman un sistema.</a:t>
             </a:r>
           </a:p>
         </p:txBody>
@@ -11136,7 +11735,7 @@
                 </a:solidFill>
                 <a:latin typeface="Calibri"/>
               </a:rPr>
-              <a:t>El insumo: las seis piezas del paquete CloudLite v1</a:t>
+              <a:t>La teoria propia del dia: que es una revision de arquitectura (2/2)</a:t>
             </a:r>
           </a:p>
         </p:txBody>
@@ -11175,7 +11774,7 @@
                 </a:solidFill>
                 <a:latin typeface="Calibri"/>
               </a:rPr>
-              <a:t>–   El insumo es el paquete CloudLite v1, que a estas alturas debe tener seis piezas producidas antes: el C4 de Contexto de la Clase 1, el C4 de Contenedores de la Clase 4, el modelo de amenazas con controles de la Clase 6</a:t>
+              <a:t>–   Todas comparten la premisa economica que sostiene el curso: un riesgo detectado en el diseno cuesta una fraccion de lo que cuesta cuando ya esta implementado y con usuarios encima.</a:t>
             </a:r>
           </a:p>
           <a:p>
@@ -11191,55 +11790,7 @@
                 </a:solidFill>
                 <a:latin typeface="Calibri"/>
               </a:rPr>
-              <a:t>–   El diagrama de despliegue con zonas publica y privada de la Clase 7, el workflow de GitHub Actions y las metricas de monitoreo de la Clase 8, y la tabla de costos con drivers y right-sizing de la Clase 10.</a:t>
-            </a:r>
-          </a:p>
-          <a:p>
-            <a:pPr>
-              <a:spcAft>
-                <a:spcPts val="800"/>
-              </a:spcAft>
-            </a:pPr>
-            <a:r>
-              <a:rPr sz="2000" b="0" i="0">
-                <a:solidFill>
-                  <a:srgbClr val="333333"/>
-                </a:solidFill>
-                <a:latin typeface="Calibri"/>
-              </a:rPr>
-              <a:t>–   El criterio central de auditoria se llama trazabilidad: la propiedad de que un elemento se pueda seguir de un artefacto al siguiente sin cambiar de nombre ni desaparecer.</a:t>
-            </a:r>
-          </a:p>
-          <a:p>
-            <a:pPr>
-              <a:spcAft>
-                <a:spcPts val="800"/>
-              </a:spcAft>
-            </a:pPr>
-            <a:r>
-              <a:rPr sz="2000" b="0" i="0">
-                <a:solidFill>
-                  <a:srgbClr val="333333"/>
-                </a:solidFill>
-                <a:latin typeface="Calibri"/>
-              </a:rPr>
-              <a:t>–   No es una formalidad burocratica, es el unico detector confiable de que el estudiante penso el sistema en vez de producir seis tareas independientes para seis notas distintas.</a:t>
-            </a:r>
-          </a:p>
-          <a:p>
-            <a:pPr>
-              <a:spcAft>
-                <a:spcPts val="800"/>
-              </a:spcAft>
-            </a:pPr>
-            <a:r>
-              <a:rPr sz="2000" b="0" i="0">
-                <a:solidFill>
-                  <a:srgbClr val="333333"/>
-                </a:solidFill>
-                <a:latin typeface="Calibri"/>
-              </a:rPr>
-              <a:t>–   Y se audita con preguntas mecanicas que cualquier docente puede hacer sin ser experto en el dominio del proyecto, lo que hace esta tecnica ensenable.</a:t>
+              <a:t>–   La revision no juzga si el diagrama es bonito; busca tres cosas: decisiones sin argumento, incoherencias entre artefactos y riesgos que nadie ha nombrado.</a:t>
             </a:r>
           </a:p>
         </p:txBody>
@@ -11420,7 +11971,7 @@
                 </a:solidFill>
                 <a:latin typeface="Calibri"/>
               </a:rPr>
-              <a:t>Las cinco preguntas de coherencia, en orden (1/2)</a:t>
+              <a:t>El insumo: las seis piezas del paquete CloudLite v1</a:t>
             </a:r>
           </a:p>
         </p:txBody>
@@ -11459,7 +12010,7 @@
                 </a:solidFill>
                 <a:latin typeface="Calibri"/>
               </a:rPr>
-              <a:t>–   Las preguntas de coherencia, aplicadas a CloudLite, son cinco y conviene hacerlas en orden.</a:t>
+              <a:t>–   El insumo es el paquete CloudLite v1, que a estas alturas debe tener seis piezas producidas antes: el C4 de Contexto de la Clase 1, el C4 de Contenedores de la Clase 4, el modelo de amenazas con controles de la Clase 6</a:t>
             </a:r>
           </a:p>
           <a:p>
@@ -11475,7 +12026,7 @@
                 </a:solidFill>
                 <a:latin typeface="Calibri"/>
               </a:rPr>
-              <a:t>–   Primera: cada contenedor del C4 de la Clase 4 aparece en el diagrama de despliegue de la Clase 7 y con el mismo nombre</a:t>
+              <a:t>–   El diagrama de despliegue con zonas publica y privada de la Clase 7, el workflow de GitHub Actions y las metricas de monitoreo de la Clase 8, y la tabla de costos con drivers y right-sizing de la Clase 10.</a:t>
             </a:r>
           </a:p>
           <a:p>
@@ -11491,7 +12042,7 @@
                 </a:solidFill>
                 <a:latin typeface="Calibri"/>
               </a:rPr>
-              <a:t>–   Si el C4 dice "servicio de notificaciones" y el despliegue dice "worker de correos", o son la misma cosa mal nombrada o son dos cosas y falta una.</a:t>
+              <a:t>–   El criterio central de auditoria se llama trazabilidad: la propiedad de que un elemento se pueda seguir de un artefacto al siguiente sin cambiar de nombre ni desaparecer.</a:t>
             </a:r>
           </a:p>
           <a:p>
@@ -11507,23 +12058,7 @@
                 </a:solidFill>
                 <a:latin typeface="Calibri"/>
               </a:rPr>
-              <a:t>–   Segunda: cada actor y sistema externo del diagrama de Contexto sigue existiendo</a:t>
-            </a:r>
-          </a:p>
-          <a:p>
-            <a:pPr>
-              <a:spcAft>
-                <a:spcPts val="800"/>
-              </a:spcAft>
-            </a:pPr>
-            <a:r>
-              <a:rPr sz="2000" b="0" i="0">
-                <a:solidFill>
-                  <a:srgbClr val="333333"/>
-                </a:solidFill>
-                <a:latin typeface="Calibri"/>
-              </a:rPr>
-              <a:t>–   El caso frecuente es que el estudiante dibujo en la Clase 1 una pasarela de pagos y hoy ningun contenedor habla con ella, asi que o desaparecio del alcance y hay que borrarla o esta olvidada y es un hueco.</a:t>
+              <a:t>–   No es una formalidad burocratica, es el unico detector confiable de que el estudiante penso el sistema en vez de producir seis tareas independientes para seis notas distintas.</a:t>
             </a:r>
           </a:p>
         </p:txBody>

--- a/Arquitectura de Sistemas Computacionales/Clases/Clase 11 - Avance del proyecto final/Presentacion.pptx
+++ b/Arquitectura de Sistemas Computacionales/Clases/Clase 11 - Avance del proyecto final/Presentacion.pptx
@@ -31,6 +31,7 @@
     <p:sldId id="279" r:id="rId30"/>
     <p:sldId id="280" r:id="rId31"/>
     <p:sldId id="281" r:id="rId32"/>
+    <p:sldId id="282" r:id="rId33"/>
   </p:sldIdLst>
   <p:sldSz cx="12191695" cy="6858000" type="screen4x3"/>
   <p:notesSz cx="6858000" cy="9144000"/>
@@ -6762,7 +6763,7 @@
         <p:spPr>
           <a:xfrm>
             <a:off x="0" y="0"/>
-            <a:ext cx="12191695" cy="1170432"/>
+            <a:ext cx="12191695" cy="960120"/>
           </a:xfrm>
           <a:prstGeom prst="rect">
             <a:avLst/>
@@ -6804,7 +6805,7 @@
         </p:nvSpPr>
         <p:spPr>
           <a:xfrm>
-            <a:off x="0" y="1170432"/>
+            <a:off x="0" y="960120"/>
             <a:ext cx="12191695" cy="41148"/>
           </a:xfrm>
           <a:prstGeom prst="rect">
@@ -6848,7 +6849,7 @@
         <p:spPr>
           <a:xfrm>
             <a:off x="457200" y="164592"/>
-            <a:ext cx="11277295" cy="384048"/>
+            <a:ext cx="11277295" cy="502920"/>
           </a:xfrm>
           <a:prstGeom prst="rect">
             <a:avLst/>
@@ -6868,55 +6869,21 @@
                 </a:solidFill>
                 <a:latin typeface="Calibri"/>
               </a:rPr>
-              <a:t>Herramientas de hoy</a:t>
-            </a:r>
-          </a:p>
-        </p:txBody>
-      </p:sp>
-      <p:sp>
-        <p:nvSpPr>
-          <p:cNvPr id="5" name="TextBox 4"/>
-          <p:cNvSpPr txBox="1"/>
-          <p:nvPr/>
-        </p:nvSpPr>
-        <p:spPr>
-          <a:xfrm>
-            <a:off x="457200" y="566928"/>
-            <a:ext cx="11277295" cy="411480"/>
-          </a:xfrm>
-          <a:prstGeom prst="rect">
-            <a:avLst/>
-          </a:prstGeom>
-          <a:noFill/>
-        </p:spPr>
-        <p:txBody>
-          <a:bodyPr wrap="square">
-            <a:spAutoFit/>
-          </a:bodyPr>
-          <a:lstStyle/>
-          <a:p>
-            <a:r>
-              <a:rPr sz="1400" b="0" i="0">
-                <a:solidFill>
-                  <a:srgbClr val="B8D8EE"/>
-                </a:solidFill>
-                <a:latin typeface="Calibri"/>
-              </a:rPr>
-              <a:t>Gratis · navegador o free tier · sin cuenta de pago</a:t>
-            </a:r>
-          </a:p>
-        </p:txBody>
-      </p:sp>
-      <p:sp>
-        <p:nvSpPr>
-          <p:cNvPr id="6" name="Rounded Rectangle 5"/>
+              <a:t>El C4 Component: por dentro de la API</a:t>
+            </a:r>
+          </a:p>
+        </p:txBody>
+      </p:sp>
+      <p:sp>
+        <p:nvSpPr>
+          <p:cNvPr id="5" name="Rounded Rectangle 4"/>
           <p:cNvSpPr/>
           <p:nvPr/>
         </p:nvSpPr>
         <p:spPr>
           <a:xfrm>
-            <a:off x="457200" y="1591056"/>
-            <a:ext cx="3624986" cy="2299716"/>
+            <a:off x="457200" y="1261872"/>
+            <a:ext cx="11277295" cy="5093208"/>
           </a:xfrm>
           <a:prstGeom prst="roundRect">
             <a:avLst>
@@ -6924,7 +6891,7 @@
             </a:avLst>
           </a:prstGeom>
           <a:solidFill>
-            <a:srgbClr val="F2F2F2"/>
+            <a:srgbClr val="1E2A38"/>
           </a:solidFill>
           <a:ln>
             <a:noFill/>
@@ -6954,14 +6921,14 @@
       </p:sp>
       <p:sp>
         <p:nvSpPr>
-          <p:cNvPr id="7" name="Rectangle 6"/>
+          <p:cNvPr id="6" name="Rectangle 5"/>
           <p:cNvSpPr/>
           <p:nvPr/>
         </p:nvSpPr>
         <p:spPr>
           <a:xfrm>
-            <a:off x="457200" y="1591056"/>
-            <a:ext cx="3624986" cy="64008"/>
+            <a:off x="457200" y="1261872"/>
+            <a:ext cx="11277295" cy="320040"/>
           </a:xfrm>
           <a:prstGeom prst="rect">
             <a:avLst/>
@@ -6997,81 +6964,14 @@
       </p:sp>
       <p:sp>
         <p:nvSpPr>
-          <p:cNvPr id="8" name="Rectangle 7"/>
-          <p:cNvSpPr/>
-          <p:nvPr/>
-        </p:nvSpPr>
-        <p:spPr>
-          <a:xfrm>
-            <a:off x="457200" y="1655064"/>
-            <a:ext cx="3624986" cy="27432"/>
-          </a:xfrm>
-          <a:prstGeom prst="rect">
-            <a:avLst/>
-          </a:prstGeom>
-          <a:solidFill>
-            <a:srgbClr val="FFD000"/>
-          </a:solidFill>
-          <a:ln>
-            <a:noFill/>
-          </a:ln>
-        </p:spPr>
-        <p:style>
-          <a:lnRef idx="1">
-            <a:schemeClr val="accent1"/>
-          </a:lnRef>
-          <a:fillRef idx="3">
-            <a:schemeClr val="accent1"/>
-          </a:fillRef>
-          <a:effectRef idx="2">
-            <a:schemeClr val="accent1"/>
-          </a:effectRef>
-          <a:fontRef idx="minor">
-            <a:schemeClr val="lt1"/>
-          </a:fontRef>
-        </p:style>
-        <p:txBody>
-          <a:bodyPr rtlCol="0" anchor="ctr"/>
-          <a:lstStyle/>
-          <a:p>
-            <a:pPr algn="ctr"/>
-          </a:p>
-        </p:txBody>
-      </p:sp>
-      <p:pic>
-        <p:nvPicPr>
-          <p:cNvPr id="9" name="Picture 8" descr="drawio.png"/>
-          <p:cNvPicPr>
-            <a:picLocks noChangeAspect="1"/>
-          </p:cNvPicPr>
-          <p:nvPr/>
-        </p:nvPicPr>
-        <p:blipFill>
-          <a:blip r:embed="rId2"/>
-          <a:stretch>
-            <a:fillRect/>
-          </a:stretch>
-        </p:blipFill>
-        <p:spPr>
-          <a:xfrm>
-            <a:off x="1659331" y="1847087"/>
-            <a:ext cx="1220724" cy="1220724"/>
-          </a:xfrm>
-          <a:prstGeom prst="rect">
-            <a:avLst/>
-          </a:prstGeom>
-        </p:spPr>
-      </p:pic>
-      <p:sp>
-        <p:nvSpPr>
-          <p:cNvPr id="10" name="TextBox 9"/>
+          <p:cNvPr id="7" name="TextBox 6"/>
           <p:cNvSpPr txBox="1"/>
           <p:nvPr/>
         </p:nvSpPr>
         <p:spPr>
           <a:xfrm>
-            <a:off x="530352" y="3159251"/>
-            <a:ext cx="3478682" cy="621792"/>
+            <a:off x="685800" y="1307592"/>
+            <a:ext cx="10820095" cy="256032"/>
           </a:xfrm>
           <a:prstGeom prst="rect">
             <a:avLst/>
@@ -7079,857 +6979,319 @@
           <a:noFill/>
         </p:spPr>
         <p:txBody>
-          <a:bodyPr wrap="square" anchor="t"/>
-          <a:lstStyle/>
-          <a:p>
-            <a:pPr algn="ctr"/>
-            <a:r>
-              <a:rPr sz="1300" b="1" i="0">
-                <a:solidFill>
-                  <a:srgbClr val="095292"/>
-                </a:solidFill>
-                <a:latin typeface="Calibri"/>
-              </a:rPr>
-              <a:t>draw.io</a:t>
-            </a:r>
-          </a:p>
-          <a:p>
-            <a:pPr algn="ctr">
-              <a:spcBef>
-                <a:spcPts val="200"/>
-              </a:spcBef>
+          <a:bodyPr wrap="square" anchor="ctr"/>
+          <a:lstStyle/>
+          <a:p>
+            <a:r>
+              <a:rPr sz="1000" b="1" i="0">
+                <a:solidFill>
+                  <a:srgbClr val="269CCB"/>
+                </a:solidFill>
+                <a:latin typeface="Calibri"/>
+              </a:rPr>
+              <a:t>● ● ●</a:t>
+            </a:r>
+          </a:p>
+        </p:txBody>
+      </p:sp>
+      <p:sp>
+        <p:nvSpPr>
+          <p:cNvPr id="8" name="TextBox 7"/>
+          <p:cNvSpPr txBox="1"/>
+          <p:nvPr/>
+        </p:nvSpPr>
+        <p:spPr>
+          <a:xfrm>
+            <a:off x="777240" y="1719072"/>
+            <a:ext cx="10637215" cy="4453128"/>
+          </a:xfrm>
+          <a:prstGeom prst="rect">
+            <a:avLst/>
+          </a:prstGeom>
+          <a:noFill/>
+        </p:spPr>
+        <p:txBody>
+          <a:bodyPr wrap="square">
+            <a:spAutoFit/>
+          </a:bodyPr>
+          <a:lstStyle/>
+          <a:p>
+            <a:pPr>
+              <a:spcAft>
+                <a:spcPts val="371"/>
+              </a:spcAft>
             </a:pPr>
             <a:r>
-              <a:rPr sz="1000" b="0" i="0">
-                <a:solidFill>
-                  <a:srgbClr val="666666"/>
-                </a:solidFill>
-                <a:latin typeface="Calibri"/>
-              </a:rPr>
-              <a:t>Auditoria del paquete</a:t>
-            </a:r>
-          </a:p>
-        </p:txBody>
-      </p:sp>
-      <p:sp>
-        <p:nvSpPr>
-          <p:cNvPr id="11" name="Rounded Rectangle 10"/>
-          <p:cNvSpPr/>
-          <p:nvPr/>
-        </p:nvSpPr>
-        <p:spPr>
-          <a:xfrm>
-            <a:off x="4283354" y="1591056"/>
-            <a:ext cx="3624986" cy="2299716"/>
-          </a:xfrm>
-          <a:prstGeom prst="roundRect">
-            <a:avLst>
-              <a:gd name="adj" fmla="val 12000"/>
-            </a:avLst>
-          </a:prstGeom>
-          <a:solidFill>
-            <a:srgbClr val="F2F2F2"/>
-          </a:solidFill>
-          <a:ln>
-            <a:noFill/>
-          </a:ln>
-        </p:spPr>
-        <p:style>
-          <a:lnRef idx="1">
-            <a:schemeClr val="accent1"/>
-          </a:lnRef>
-          <a:fillRef idx="3">
-            <a:schemeClr val="accent1"/>
-          </a:fillRef>
-          <a:effectRef idx="2">
-            <a:schemeClr val="accent1"/>
-          </a:effectRef>
-          <a:fontRef idx="minor">
-            <a:schemeClr val="lt1"/>
-          </a:fontRef>
-        </p:style>
-        <p:txBody>
-          <a:bodyPr rtlCol="0" anchor="ctr"/>
-          <a:lstStyle/>
-          <a:p>
-            <a:pPr algn="ctr"/>
-          </a:p>
-        </p:txBody>
-      </p:sp>
-      <p:sp>
-        <p:nvSpPr>
-          <p:cNvPr id="12" name="Rectangle 11"/>
-          <p:cNvSpPr/>
-          <p:nvPr/>
-        </p:nvSpPr>
-        <p:spPr>
-          <a:xfrm>
-            <a:off x="4283354" y="1591056"/>
-            <a:ext cx="3624986" cy="64008"/>
-          </a:xfrm>
-          <a:prstGeom prst="rect">
-            <a:avLst/>
-          </a:prstGeom>
-          <a:solidFill>
-            <a:srgbClr val="095292"/>
-          </a:solidFill>
-          <a:ln>
-            <a:noFill/>
-          </a:ln>
-        </p:spPr>
-        <p:style>
-          <a:lnRef idx="1">
-            <a:schemeClr val="accent1"/>
-          </a:lnRef>
-          <a:fillRef idx="3">
-            <a:schemeClr val="accent1"/>
-          </a:fillRef>
-          <a:effectRef idx="2">
-            <a:schemeClr val="accent1"/>
-          </a:effectRef>
-          <a:fontRef idx="minor">
-            <a:schemeClr val="lt1"/>
-          </a:fontRef>
-        </p:style>
-        <p:txBody>
-          <a:bodyPr rtlCol="0" anchor="ctr"/>
-          <a:lstStyle/>
-          <a:p>
-            <a:pPr algn="ctr"/>
-          </a:p>
-        </p:txBody>
-      </p:sp>
-      <p:sp>
-        <p:nvSpPr>
-          <p:cNvPr id="13" name="Rectangle 12"/>
-          <p:cNvSpPr/>
-          <p:nvPr/>
-        </p:nvSpPr>
-        <p:spPr>
-          <a:xfrm>
-            <a:off x="4283354" y="1655064"/>
-            <a:ext cx="3624986" cy="27432"/>
-          </a:xfrm>
-          <a:prstGeom prst="rect">
-            <a:avLst/>
-          </a:prstGeom>
-          <a:solidFill>
-            <a:srgbClr val="FFD000"/>
-          </a:solidFill>
-          <a:ln>
-            <a:noFill/>
-          </a:ln>
-        </p:spPr>
-        <p:style>
-          <a:lnRef idx="1">
-            <a:schemeClr val="accent1"/>
-          </a:lnRef>
-          <a:fillRef idx="3">
-            <a:schemeClr val="accent1"/>
-          </a:fillRef>
-          <a:effectRef idx="2">
-            <a:schemeClr val="accent1"/>
-          </a:effectRef>
-          <a:fontRef idx="minor">
-            <a:schemeClr val="lt1"/>
-          </a:fontRef>
-        </p:style>
-        <p:txBody>
-          <a:bodyPr rtlCol="0" anchor="ctr"/>
-          <a:lstStyle/>
-          <a:p>
-            <a:pPr algn="ctr"/>
-          </a:p>
-        </p:txBody>
-      </p:sp>
-      <p:pic>
-        <p:nvPicPr>
-          <p:cNvPr id="14" name="Picture 13" descr="github_actions.png"/>
-          <p:cNvPicPr>
-            <a:picLocks noChangeAspect="1"/>
-          </p:cNvPicPr>
-          <p:nvPr/>
-        </p:nvPicPr>
-        <p:blipFill>
-          <a:blip r:embed="rId3"/>
-          <a:stretch>
-            <a:fillRect/>
-          </a:stretch>
-        </p:blipFill>
-        <p:spPr>
-          <a:xfrm>
-            <a:off x="5485485" y="1847087"/>
-            <a:ext cx="1220724" cy="1220724"/>
-          </a:xfrm>
-          <a:prstGeom prst="rect">
-            <a:avLst/>
-          </a:prstGeom>
-        </p:spPr>
-      </p:pic>
-      <p:sp>
-        <p:nvSpPr>
-          <p:cNvPr id="15" name="TextBox 14"/>
-          <p:cNvSpPr txBox="1"/>
-          <p:nvPr/>
-        </p:nvSpPr>
-        <p:spPr>
-          <a:xfrm>
-            <a:off x="4356506" y="3159251"/>
-            <a:ext cx="3478682" cy="621792"/>
-          </a:xfrm>
-          <a:prstGeom prst="rect">
-            <a:avLst/>
-          </a:prstGeom>
-          <a:noFill/>
-        </p:spPr>
-        <p:txBody>
-          <a:bodyPr wrap="square" anchor="t"/>
-          <a:lstStyle/>
-          <a:p>
-            <a:pPr algn="ctr"/>
-            <a:r>
-              <a:rPr sz="1300" b="1" i="0">
-                <a:solidFill>
-                  <a:srgbClr val="095292"/>
-                </a:solidFill>
-                <a:latin typeface="Calibri"/>
-              </a:rPr>
-              <a:t>GitHub Actions</a:t>
-            </a:r>
-          </a:p>
-          <a:p>
-            <a:pPr algn="ctr">
-              <a:spcBef>
-                <a:spcPts val="200"/>
-              </a:spcBef>
+              <a:rPr sz="1300" b="0" i="0">
+                <a:solidFill>
+                  <a:srgbClr val="FFFFFF"/>
+                </a:solidFill>
+                <a:latin typeface="Calibri"/>
+              </a:rPr>
+              <a:t>flowchart TB</a:t>
+            </a:r>
+          </a:p>
+          <a:p>
+            <a:pPr>
+              <a:spcAft>
+                <a:spcPts val="371"/>
+              </a:spcAft>
             </a:pPr>
             <a:r>
-              <a:rPr sz="1000" b="0" i="0">
-                <a:solidFill>
-                  <a:srgbClr val="666666"/>
-                </a:solidFill>
-                <a:latin typeface="Calibri"/>
-              </a:rPr>
-              <a:t>Evidencia CI</a:t>
-            </a:r>
-          </a:p>
-        </p:txBody>
-      </p:sp>
-      <p:sp>
-        <p:nvSpPr>
-          <p:cNvPr id="16" name="Rounded Rectangle 15"/>
-          <p:cNvSpPr/>
-          <p:nvPr/>
-        </p:nvSpPr>
-        <p:spPr>
-          <a:xfrm>
-            <a:off x="8109508" y="1591056"/>
-            <a:ext cx="3624986" cy="2299716"/>
-          </a:xfrm>
-          <a:prstGeom prst="roundRect">
-            <a:avLst>
-              <a:gd name="adj" fmla="val 12000"/>
-            </a:avLst>
-          </a:prstGeom>
-          <a:solidFill>
-            <a:srgbClr val="F2F2F2"/>
-          </a:solidFill>
-          <a:ln>
-            <a:noFill/>
-          </a:ln>
-        </p:spPr>
-        <p:style>
-          <a:lnRef idx="1">
-            <a:schemeClr val="accent1"/>
-          </a:lnRef>
-          <a:fillRef idx="3">
-            <a:schemeClr val="accent1"/>
-          </a:fillRef>
-          <a:effectRef idx="2">
-            <a:schemeClr val="accent1"/>
-          </a:effectRef>
-          <a:fontRef idx="minor">
-            <a:schemeClr val="lt1"/>
-          </a:fontRef>
-        </p:style>
-        <p:txBody>
-          <a:bodyPr rtlCol="0" anchor="ctr"/>
-          <a:lstStyle/>
-          <a:p>
-            <a:pPr algn="ctr"/>
-          </a:p>
-        </p:txBody>
-      </p:sp>
-      <p:sp>
-        <p:nvSpPr>
-          <p:cNvPr id="17" name="Rectangle 16"/>
-          <p:cNvSpPr/>
-          <p:nvPr/>
-        </p:nvSpPr>
-        <p:spPr>
-          <a:xfrm>
-            <a:off x="8109508" y="1591056"/>
-            <a:ext cx="3624986" cy="64008"/>
-          </a:xfrm>
-          <a:prstGeom prst="rect">
-            <a:avLst/>
-          </a:prstGeom>
-          <a:solidFill>
-            <a:srgbClr val="095292"/>
-          </a:solidFill>
-          <a:ln>
-            <a:noFill/>
-          </a:ln>
-        </p:spPr>
-        <p:style>
-          <a:lnRef idx="1">
-            <a:schemeClr val="accent1"/>
-          </a:lnRef>
-          <a:fillRef idx="3">
-            <a:schemeClr val="accent1"/>
-          </a:fillRef>
-          <a:effectRef idx="2">
-            <a:schemeClr val="accent1"/>
-          </a:effectRef>
-          <a:fontRef idx="minor">
-            <a:schemeClr val="lt1"/>
-          </a:fontRef>
-        </p:style>
-        <p:txBody>
-          <a:bodyPr rtlCol="0" anchor="ctr"/>
-          <a:lstStyle/>
-          <a:p>
-            <a:pPr algn="ctr"/>
-          </a:p>
-        </p:txBody>
-      </p:sp>
-      <p:sp>
-        <p:nvSpPr>
-          <p:cNvPr id="18" name="Rectangle 17"/>
-          <p:cNvSpPr/>
-          <p:nvPr/>
-        </p:nvSpPr>
-        <p:spPr>
-          <a:xfrm>
-            <a:off x="8109508" y="1655064"/>
-            <a:ext cx="3624986" cy="27432"/>
-          </a:xfrm>
-          <a:prstGeom prst="rect">
-            <a:avLst/>
-          </a:prstGeom>
-          <a:solidFill>
-            <a:srgbClr val="FFD000"/>
-          </a:solidFill>
-          <a:ln>
-            <a:noFill/>
-          </a:ln>
-        </p:spPr>
-        <p:style>
-          <a:lnRef idx="1">
-            <a:schemeClr val="accent1"/>
-          </a:lnRef>
-          <a:fillRef idx="3">
-            <a:schemeClr val="accent1"/>
-          </a:fillRef>
-          <a:effectRef idx="2">
-            <a:schemeClr val="accent1"/>
-          </a:effectRef>
-          <a:fontRef idx="minor">
-            <a:schemeClr val="lt1"/>
-          </a:fontRef>
-        </p:style>
-        <p:txBody>
-          <a:bodyPr rtlCol="0" anchor="ctr"/>
-          <a:lstStyle/>
-          <a:p>
-            <a:pPr algn="ctr"/>
-          </a:p>
-        </p:txBody>
-      </p:sp>
-      <p:pic>
-        <p:nvPicPr>
-          <p:cNvPr id="19" name="Picture 18" descr="google_docs.png"/>
-          <p:cNvPicPr>
-            <a:picLocks noChangeAspect="1"/>
-          </p:cNvPicPr>
-          <p:nvPr/>
-        </p:nvPicPr>
-        <p:blipFill>
-          <a:blip r:embed="rId4"/>
-          <a:stretch>
-            <a:fillRect/>
-          </a:stretch>
-        </p:blipFill>
-        <p:spPr>
-          <a:xfrm>
-            <a:off x="9311640" y="1847087"/>
-            <a:ext cx="1220724" cy="1220724"/>
-          </a:xfrm>
-          <a:prstGeom prst="rect">
-            <a:avLst/>
-          </a:prstGeom>
-        </p:spPr>
-      </p:pic>
-      <p:sp>
-        <p:nvSpPr>
-          <p:cNvPr id="20" name="TextBox 19"/>
-          <p:cNvSpPr txBox="1"/>
-          <p:nvPr/>
-        </p:nvSpPr>
-        <p:spPr>
-          <a:xfrm>
-            <a:off x="8182660" y="3159251"/>
-            <a:ext cx="3478682" cy="621792"/>
-          </a:xfrm>
-          <a:prstGeom prst="rect">
-            <a:avLst/>
-          </a:prstGeom>
-          <a:noFill/>
-        </p:spPr>
-        <p:txBody>
-          <a:bodyPr wrap="square" anchor="t"/>
-          <a:lstStyle/>
-          <a:p>
-            <a:pPr algn="ctr"/>
-            <a:r>
-              <a:rPr sz="1300" b="1" i="0">
-                <a:solidFill>
-                  <a:srgbClr val="095292"/>
-                </a:solidFill>
-                <a:latin typeface="Calibri"/>
-              </a:rPr>
-              <a:t>Google Docs</a:t>
-            </a:r>
-          </a:p>
-          <a:p>
-            <a:pPr algn="ctr">
-              <a:spcBef>
-                <a:spcPts val="200"/>
-              </a:spcBef>
+              <a:rPr sz="1300" b="0" i="0">
+                <a:solidFill>
+                  <a:srgbClr val="FFFFFF"/>
+                </a:solidFill>
+                <a:latin typeface="Calibri"/>
+              </a:rPr>
+              <a:t>  subgraph api[API REST de CloudLite - Node + Express]</a:t>
+            </a:r>
+          </a:p>
+          <a:p>
+            <a:pPr>
+              <a:spcAft>
+                <a:spcPts val="371"/>
+              </a:spcAft>
             </a:pPr>
             <a:r>
-              <a:rPr sz="1000" b="0" i="0">
-                <a:solidFill>
-                  <a:srgbClr val="666666"/>
-                </a:solidFill>
-                <a:latin typeface="Calibri"/>
-              </a:rPr>
-              <a:t>Informe PI</a:t>
-            </a:r>
-          </a:p>
-        </p:txBody>
-      </p:sp>
-      <p:sp>
-        <p:nvSpPr>
-          <p:cNvPr id="21" name="Rounded Rectangle 20"/>
-          <p:cNvSpPr/>
-          <p:nvPr/>
-        </p:nvSpPr>
-        <p:spPr>
-          <a:xfrm>
-            <a:off x="2370277" y="4055364"/>
-            <a:ext cx="3624986" cy="2299716"/>
-          </a:xfrm>
-          <a:prstGeom prst="roundRect">
-            <a:avLst>
-              <a:gd name="adj" fmla="val 12000"/>
-            </a:avLst>
-          </a:prstGeom>
-          <a:solidFill>
-            <a:srgbClr val="F2F2F2"/>
-          </a:solidFill>
-          <a:ln>
-            <a:noFill/>
-          </a:ln>
-        </p:spPr>
-        <p:style>
-          <a:lnRef idx="1">
-            <a:schemeClr val="accent1"/>
-          </a:lnRef>
-          <a:fillRef idx="3">
-            <a:schemeClr val="accent1"/>
-          </a:fillRef>
-          <a:effectRef idx="2">
-            <a:schemeClr val="accent1"/>
-          </a:effectRef>
-          <a:fontRef idx="minor">
-            <a:schemeClr val="lt1"/>
-          </a:fontRef>
-        </p:style>
-        <p:txBody>
-          <a:bodyPr rtlCol="0" anchor="ctr"/>
-          <a:lstStyle/>
-          <a:p>
-            <a:pPr algn="ctr"/>
-          </a:p>
-        </p:txBody>
-      </p:sp>
-      <p:sp>
-        <p:nvSpPr>
-          <p:cNvPr id="22" name="Rectangle 21"/>
-          <p:cNvSpPr/>
-          <p:nvPr/>
-        </p:nvSpPr>
-        <p:spPr>
-          <a:xfrm>
-            <a:off x="2370277" y="4055364"/>
-            <a:ext cx="3624986" cy="64008"/>
-          </a:xfrm>
-          <a:prstGeom prst="rect">
-            <a:avLst/>
-          </a:prstGeom>
-          <a:solidFill>
-            <a:srgbClr val="095292"/>
-          </a:solidFill>
-          <a:ln>
-            <a:noFill/>
-          </a:ln>
-        </p:spPr>
-        <p:style>
-          <a:lnRef idx="1">
-            <a:schemeClr val="accent1"/>
-          </a:lnRef>
-          <a:fillRef idx="3">
-            <a:schemeClr val="accent1"/>
-          </a:fillRef>
-          <a:effectRef idx="2">
-            <a:schemeClr val="accent1"/>
-          </a:effectRef>
-          <a:fontRef idx="minor">
-            <a:schemeClr val="lt1"/>
-          </a:fontRef>
-        </p:style>
-        <p:txBody>
-          <a:bodyPr rtlCol="0" anchor="ctr"/>
-          <a:lstStyle/>
-          <a:p>
-            <a:pPr algn="ctr"/>
-          </a:p>
-        </p:txBody>
-      </p:sp>
-      <p:sp>
-        <p:nvSpPr>
-          <p:cNvPr id="23" name="Rectangle 22"/>
-          <p:cNvSpPr/>
-          <p:nvPr/>
-        </p:nvSpPr>
-        <p:spPr>
-          <a:xfrm>
-            <a:off x="2370277" y="4119372"/>
-            <a:ext cx="3624986" cy="27432"/>
-          </a:xfrm>
-          <a:prstGeom prst="rect">
-            <a:avLst/>
-          </a:prstGeom>
-          <a:solidFill>
-            <a:srgbClr val="FFD000"/>
-          </a:solidFill>
-          <a:ln>
-            <a:noFill/>
-          </a:ln>
-        </p:spPr>
-        <p:style>
-          <a:lnRef idx="1">
-            <a:schemeClr val="accent1"/>
-          </a:lnRef>
-          <a:fillRef idx="3">
-            <a:schemeClr val="accent1"/>
-          </a:fillRef>
-          <a:effectRef idx="2">
-            <a:schemeClr val="accent1"/>
-          </a:effectRef>
-          <a:fontRef idx="minor">
-            <a:schemeClr val="lt1"/>
-          </a:fontRef>
-        </p:style>
-        <p:txBody>
-          <a:bodyPr rtlCol="0" anchor="ctr"/>
-          <a:lstStyle/>
-          <a:p>
-            <a:pPr algn="ctr"/>
-          </a:p>
-        </p:txBody>
-      </p:sp>
-      <p:pic>
-        <p:nvPicPr>
-          <p:cNvPr id="24" name="Picture 23" descr="mermaid.png"/>
-          <p:cNvPicPr>
-            <a:picLocks noChangeAspect="1"/>
-          </p:cNvPicPr>
-          <p:nvPr/>
-        </p:nvPicPr>
-        <p:blipFill>
-          <a:blip r:embed="rId5"/>
-          <a:stretch>
-            <a:fillRect/>
-          </a:stretch>
-        </p:blipFill>
-        <p:spPr>
-          <a:xfrm>
-            <a:off x="3572408" y="4311396"/>
-            <a:ext cx="1220724" cy="1220724"/>
-          </a:xfrm>
-          <a:prstGeom prst="rect">
-            <a:avLst/>
-          </a:prstGeom>
-        </p:spPr>
-      </p:pic>
-      <p:sp>
-        <p:nvSpPr>
-          <p:cNvPr id="25" name="TextBox 24"/>
-          <p:cNvSpPr txBox="1"/>
-          <p:nvPr/>
-        </p:nvSpPr>
-        <p:spPr>
-          <a:xfrm>
-            <a:off x="2443429" y="5623560"/>
-            <a:ext cx="3478682" cy="621792"/>
-          </a:xfrm>
-          <a:prstGeom prst="rect">
-            <a:avLst/>
-          </a:prstGeom>
-          <a:noFill/>
-        </p:spPr>
-        <p:txBody>
-          <a:bodyPr wrap="square" anchor="t"/>
-          <a:lstStyle/>
-          <a:p>
-            <a:pPr algn="ctr"/>
-            <a:r>
-              <a:rPr sz="1300" b="1" i="0">
-                <a:solidFill>
-                  <a:srgbClr val="095292"/>
-                </a:solidFill>
-                <a:latin typeface="Calibri"/>
-              </a:rPr>
-              <a:t>Mermaid</a:t>
-            </a:r>
-          </a:p>
-          <a:p>
-            <a:pPr algn="ctr">
-              <a:spcBef>
-                <a:spcPts val="200"/>
-              </a:spcBef>
+              <a:rPr sz="1300" b="0" i="0">
+                <a:solidFill>
+                  <a:srgbClr val="FFFFFF"/>
+                </a:solidFill>
+                <a:latin typeface="Calibri"/>
+              </a:rPr>
+              <a:t>    rutas[Capa de rutas&lt;br/&gt;valida entrada y responde HTTP]</a:t>
+            </a:r>
+          </a:p>
+          <a:p>
+            <a:pPr>
+              <a:spcAft>
+                <a:spcPts val="371"/>
+              </a:spcAft>
             </a:pPr>
             <a:r>
-              <a:rPr sz="1000" b="0" i="0">
-                <a:solidFill>
-                  <a:srgbClr val="666666"/>
-                </a:solidFill>
-                <a:latin typeface="Calibri"/>
-              </a:rPr>
-              <a:t>Codigo del diagrama</a:t>
-            </a:r>
-          </a:p>
-        </p:txBody>
-      </p:sp>
-      <p:sp>
-        <p:nvSpPr>
-          <p:cNvPr id="26" name="Rounded Rectangle 25"/>
-          <p:cNvSpPr/>
-          <p:nvPr/>
-        </p:nvSpPr>
-        <p:spPr>
-          <a:xfrm>
-            <a:off x="6196431" y="4055364"/>
-            <a:ext cx="3624986" cy="2299716"/>
-          </a:xfrm>
-          <a:prstGeom prst="roundRect">
-            <a:avLst>
-              <a:gd name="adj" fmla="val 12000"/>
-            </a:avLst>
-          </a:prstGeom>
-          <a:solidFill>
-            <a:srgbClr val="F2F2F2"/>
-          </a:solidFill>
-          <a:ln>
-            <a:noFill/>
-          </a:ln>
-        </p:spPr>
-        <p:style>
-          <a:lnRef idx="1">
-            <a:schemeClr val="accent1"/>
-          </a:lnRef>
-          <a:fillRef idx="3">
-            <a:schemeClr val="accent1"/>
-          </a:fillRef>
-          <a:effectRef idx="2">
-            <a:schemeClr val="accent1"/>
-          </a:effectRef>
-          <a:fontRef idx="minor">
-            <a:schemeClr val="lt1"/>
-          </a:fontRef>
-        </p:style>
-        <p:txBody>
-          <a:bodyPr rtlCol="0" anchor="ctr"/>
-          <a:lstStyle/>
-          <a:p>
-            <a:pPr algn="ctr"/>
-          </a:p>
-        </p:txBody>
-      </p:sp>
-      <p:sp>
-        <p:nvSpPr>
-          <p:cNvPr id="27" name="Rectangle 26"/>
-          <p:cNvSpPr/>
-          <p:nvPr/>
-        </p:nvSpPr>
-        <p:spPr>
-          <a:xfrm>
-            <a:off x="6196431" y="4055364"/>
-            <a:ext cx="3624986" cy="64008"/>
-          </a:xfrm>
-          <a:prstGeom prst="rect">
-            <a:avLst/>
-          </a:prstGeom>
-          <a:solidFill>
-            <a:srgbClr val="095292"/>
-          </a:solidFill>
-          <a:ln>
-            <a:noFill/>
-          </a:ln>
-        </p:spPr>
-        <p:style>
-          <a:lnRef idx="1">
-            <a:schemeClr val="accent1"/>
-          </a:lnRef>
-          <a:fillRef idx="3">
-            <a:schemeClr val="accent1"/>
-          </a:fillRef>
-          <a:effectRef idx="2">
-            <a:schemeClr val="accent1"/>
-          </a:effectRef>
-          <a:fontRef idx="minor">
-            <a:schemeClr val="lt1"/>
-          </a:fontRef>
-        </p:style>
-        <p:txBody>
-          <a:bodyPr rtlCol="0" anchor="ctr"/>
-          <a:lstStyle/>
-          <a:p>
-            <a:pPr algn="ctr"/>
-          </a:p>
-        </p:txBody>
-      </p:sp>
-      <p:sp>
-        <p:nvSpPr>
-          <p:cNvPr id="28" name="Rectangle 27"/>
-          <p:cNvSpPr/>
-          <p:nvPr/>
-        </p:nvSpPr>
-        <p:spPr>
-          <a:xfrm>
-            <a:off x="6196431" y="4119372"/>
-            <a:ext cx="3624986" cy="27432"/>
-          </a:xfrm>
-          <a:prstGeom prst="rect">
-            <a:avLst/>
-          </a:prstGeom>
-          <a:solidFill>
-            <a:srgbClr val="FFD000"/>
-          </a:solidFill>
-          <a:ln>
-            <a:noFill/>
-          </a:ln>
-        </p:spPr>
-        <p:style>
-          <a:lnRef idx="1">
-            <a:schemeClr val="accent1"/>
-          </a:lnRef>
-          <a:fillRef idx="3">
-            <a:schemeClr val="accent1"/>
-          </a:fillRef>
-          <a:effectRef idx="2">
-            <a:schemeClr val="accent1"/>
-          </a:effectRef>
-          <a:fontRef idx="minor">
-            <a:schemeClr val="lt1"/>
-          </a:fontRef>
-        </p:style>
-        <p:txBody>
-          <a:bodyPr rtlCol="0" anchor="ctr"/>
-          <a:lstStyle/>
-          <a:p>
-            <a:pPr algn="ctr"/>
-          </a:p>
-        </p:txBody>
-      </p:sp>
-      <p:pic>
-        <p:nvPicPr>
-          <p:cNvPr id="29" name="Picture 28" descr="examlab.png"/>
-          <p:cNvPicPr>
-            <a:picLocks noChangeAspect="1"/>
-          </p:cNvPicPr>
-          <p:nvPr/>
-        </p:nvPicPr>
-        <p:blipFill>
-          <a:blip r:embed="rId6"/>
-          <a:stretch>
-            <a:fillRect/>
-          </a:stretch>
-        </p:blipFill>
-        <p:spPr>
-          <a:xfrm>
-            <a:off x="7398562" y="4311396"/>
-            <a:ext cx="1220724" cy="1220724"/>
-          </a:xfrm>
-          <a:prstGeom prst="rect">
-            <a:avLst/>
-          </a:prstGeom>
-        </p:spPr>
-      </p:pic>
-      <p:sp>
-        <p:nvSpPr>
-          <p:cNvPr id="30" name="TextBox 29"/>
-          <p:cNvSpPr txBox="1"/>
-          <p:nvPr/>
-        </p:nvSpPr>
-        <p:spPr>
-          <a:xfrm>
-            <a:off x="6269583" y="5623560"/>
-            <a:ext cx="3478682" cy="621792"/>
-          </a:xfrm>
-          <a:prstGeom prst="rect">
-            <a:avLst/>
-          </a:prstGeom>
-          <a:noFill/>
-        </p:spPr>
-        <p:txBody>
-          <a:bodyPr wrap="square" anchor="t"/>
-          <a:lstStyle/>
-          <a:p>
-            <a:pPr algn="ctr"/>
-            <a:r>
-              <a:rPr sz="1300" b="1" i="0">
-                <a:solidFill>
-                  <a:srgbClr val="095292"/>
-                </a:solidFill>
-                <a:latin typeface="Calibri"/>
-              </a:rPr>
-              <a:t>la plataforma del curso</a:t>
-            </a:r>
-          </a:p>
-          <a:p>
-            <a:pPr algn="ctr">
-              <a:spcBef>
-                <a:spcPts val="200"/>
-              </a:spcBef>
+              <a:rPr sz="1300" b="0" i="0">
+                <a:solidFill>
+                  <a:srgbClr val="FFFFFF"/>
+                </a:solidFill>
+                <a:latin typeface="Calibri"/>
+              </a:rPr>
+              <a:t>    servicio[Servicio de dominio&lt;br/&gt;reglas de &lt;su dominio&gt;]</a:t>
+            </a:r>
+          </a:p>
+          <a:p>
+            <a:pPr>
+              <a:spcAft>
+                <a:spcPts val="371"/>
+              </a:spcAft>
             </a:pPr>
             <a:r>
-              <a:rPr sz="1000" b="0" i="0">
-                <a:solidFill>
-                  <a:srgbClr val="666666"/>
-                </a:solidFill>
-                <a:latin typeface="Calibri"/>
-              </a:rPr>
-              <a:t>Donde se entrega</a:t>
-            </a:r>
-          </a:p>
-        </p:txBody>
-      </p:sp>
-      <p:sp>
-        <p:nvSpPr>
-          <p:cNvPr id="31" name="TextBox 30"/>
+              <a:rPr sz="1300" b="0" i="0">
+                <a:solidFill>
+                  <a:srgbClr val="FFFFFF"/>
+                </a:solidFill>
+                <a:latin typeface="Calibri"/>
+              </a:rPr>
+              <a:t>    repo[Repositorio&lt;br/&gt;consultas SQL]</a:t>
+            </a:r>
+          </a:p>
+          <a:p>
+            <a:pPr>
+              <a:spcAft>
+                <a:spcPts val="371"/>
+              </a:spcAft>
+            </a:pPr>
+            <a:r>
+              <a:rPr sz="1300" b="0" i="0">
+                <a:solidFill>
+                  <a:srgbClr val="FFFFFF"/>
+                </a:solidFill>
+                <a:latin typeface="Calibri"/>
+              </a:rPr>
+              <a:t>    auth[Autenticacion&lt;br/&gt;verifica el token]</a:t>
+            </a:r>
+          </a:p>
+          <a:p>
+            <a:pPr>
+              <a:spcAft>
+                <a:spcPts val="371"/>
+              </a:spcAft>
+            </a:pPr>
+            <a:r>
+              <a:rPr sz="1300" b="0" i="0">
+                <a:solidFill>
+                  <a:srgbClr val="FFFFFF"/>
+                </a:solidFill>
+                <a:latin typeface="Calibri"/>
+              </a:rPr>
+              <a:t>  end</a:t>
+            </a:r>
+          </a:p>
+          <a:p>
+            <a:pPr>
+              <a:spcAft>
+                <a:spcPts val="371"/>
+              </a:spcAft>
+            </a:pPr>
+            <a:r>
+              <a:rPr sz="1300" b="0" i="0">
+                <a:solidFill>
+                  <a:srgbClr val="FFFFFF"/>
+                </a:solidFill>
+                <a:latin typeface="Calibri"/>
+              </a:rPr>
+              <a:t/>
+            </a:r>
+          </a:p>
+          <a:p>
+            <a:pPr>
+              <a:spcAft>
+                <a:spcPts val="371"/>
+              </a:spcAft>
+            </a:pPr>
+            <a:r>
+              <a:rPr sz="1300" b="0" i="0">
+                <a:solidFill>
+                  <a:srgbClr val="FFFFFF"/>
+                </a:solidFill>
+                <a:latin typeface="Calibri"/>
+              </a:rPr>
+              <a:t>  web[Web SPA] --&gt;|JSON/HTTPS| rutas</a:t>
+            </a:r>
+          </a:p>
+          <a:p>
+            <a:pPr>
+              <a:spcAft>
+                <a:spcPts val="371"/>
+              </a:spcAft>
+            </a:pPr>
+            <a:r>
+              <a:rPr sz="1300" b="0" i="0">
+                <a:solidFill>
+                  <a:srgbClr val="FFFFFF"/>
+                </a:solidFill>
+                <a:latin typeface="Calibri"/>
+              </a:rPr>
+              <a:t>  rutas --&gt; auth</a:t>
+            </a:r>
+          </a:p>
+          <a:p>
+            <a:pPr>
+              <a:spcAft>
+                <a:spcPts val="371"/>
+              </a:spcAft>
+            </a:pPr>
+            <a:r>
+              <a:rPr sz="1300" b="0" i="0">
+                <a:solidFill>
+                  <a:srgbClr val="FFFFFF"/>
+                </a:solidFill>
+                <a:latin typeface="Calibri"/>
+              </a:rPr>
+              <a:t>  rutas --&gt; servicio</a:t>
+            </a:r>
+          </a:p>
+          <a:p>
+            <a:pPr>
+              <a:spcAft>
+                <a:spcPts val="371"/>
+              </a:spcAft>
+            </a:pPr>
+            <a:r>
+              <a:rPr sz="1300" b="0" i="0">
+                <a:solidFill>
+                  <a:srgbClr val="FFFFFF"/>
+                </a:solidFill>
+                <a:latin typeface="Calibri"/>
+              </a:rPr>
+              <a:t>  servicio --&gt; repo</a:t>
+            </a:r>
+          </a:p>
+          <a:p>
+            <a:pPr>
+              <a:spcAft>
+                <a:spcPts val="371"/>
+              </a:spcAft>
+            </a:pPr>
+            <a:r>
+              <a:rPr sz="1300" b="0" i="0">
+                <a:solidFill>
+                  <a:srgbClr val="FFFFFF"/>
+                </a:solidFill>
+                <a:latin typeface="Calibri"/>
+              </a:rPr>
+              <a:t>  repo --&gt;|SQL| db[(PostgreSQL)]</a:t>
+            </a:r>
+          </a:p>
+          <a:p>
+            <a:pPr>
+              <a:spcAft>
+                <a:spcPts val="371"/>
+              </a:spcAft>
+            </a:pPr>
+            <a:r>
+              <a:rPr sz="1300" b="0" i="0">
+                <a:solidFill>
+                  <a:srgbClr val="FFFFFF"/>
+                </a:solidFill>
+                <a:latin typeface="Calibri"/>
+              </a:rPr>
+              <a:t/>
+            </a:r>
+          </a:p>
+          <a:p>
+            <a:pPr>
+              <a:spcAft>
+                <a:spcPts val="371"/>
+              </a:spcAft>
+            </a:pPr>
+            <a:r>
+              <a:rPr sz="1300" b="0" i="0">
+                <a:solidFill>
+                  <a:srgbClr val="FFFFFF"/>
+                </a:solidFill>
+                <a:latin typeface="Calibri"/>
+              </a:rPr>
+              <a:t>%% La regla del nivel Component: las cajas son piezas de CODIGO dentro</a:t>
+            </a:r>
+          </a:p>
+          <a:p>
+            <a:pPr>
+              <a:spcAft>
+                <a:spcPts val="371"/>
+              </a:spcAft>
+            </a:pPr>
+            <a:r>
+              <a:rPr sz="1300" b="0" i="0">
+                <a:solidFill>
+                  <a:srgbClr val="FFFFFF"/>
+                </a:solidFill>
+                <a:latin typeface="Calibri"/>
+              </a:rPr>
+              <a:t>%% de UN container, no servicios nuevos. Si le pone un puerto, es un</a:t>
+            </a:r>
+          </a:p>
+          <a:p>
+            <a:pPr>
+              <a:spcAft>
+                <a:spcPts val="371"/>
+              </a:spcAft>
+            </a:pPr>
+            <a:r>
+              <a:rPr sz="1300" b="0" i="0">
+                <a:solidFill>
+                  <a:srgbClr val="FFFFFF"/>
+                </a:solidFill>
+                <a:latin typeface="Calibri"/>
+              </a:rPr>
+              <a:t>%% container y va en el diagrama de la Clase 4.</a:t>
+            </a:r>
+          </a:p>
+        </p:txBody>
+      </p:sp>
+      <p:sp>
+        <p:nvSpPr>
+          <p:cNvPr id="9" name="TextBox 8"/>
           <p:cNvSpPr txBox="1"/>
           <p:nvPr/>
         </p:nvSpPr>
@@ -8103,7 +7465,7 @@
                 </a:solidFill>
                 <a:latin typeface="Calibri"/>
               </a:rPr>
-              <a:t>Del boceto a la plataforma del curso (diagrama)</a:t>
+              <a:t>Herramientas de hoy</a:t>
             </a:r>
           </a:p>
         </p:txBody>
@@ -8137,7 +7499,7 @@
                 </a:solidFill>
                 <a:latin typeface="Calibri"/>
               </a:rPr>
-              <a:t>El diagrama se entrega como código Mermaid dentro de la plataforma del curso, no como imagen</a:t>
+              <a:t>Gratis · navegador o free tier · sin cuenta de pago</a:t>
             </a:r>
           </a:p>
         </p:txBody>
@@ -8150,8 +7512,8 @@
         </p:nvSpPr>
         <p:spPr>
           <a:xfrm>
-            <a:off x="457200" y="1659636"/>
-            <a:ext cx="11277295" cy="1051560"/>
+            <a:off x="457200" y="1591056"/>
+            <a:ext cx="3624986" cy="2299716"/>
           </a:xfrm>
           <a:prstGeom prst="roundRect">
             <a:avLst>
@@ -8189,19 +7551,17 @@
       </p:sp>
       <p:sp>
         <p:nvSpPr>
-          <p:cNvPr id="7" name="Rounded Rectangle 6"/>
+          <p:cNvPr id="7" name="Rectangle 6"/>
           <p:cNvSpPr/>
           <p:nvPr/>
         </p:nvSpPr>
         <p:spPr>
           <a:xfrm>
-            <a:off x="594360" y="1965960"/>
-            <a:ext cx="438912" cy="438912"/>
-          </a:xfrm>
-          <a:prstGeom prst="roundRect">
-            <a:avLst>
-              <a:gd name="adj" fmla="val 12000"/>
-            </a:avLst>
+            <a:off x="457200" y="1591056"/>
+            <a:ext cx="3624986" cy="64008"/>
+          </a:xfrm>
+          <a:prstGeom prst="rect">
+            <a:avLst/>
           </a:prstGeom>
           <a:solidFill>
             <a:srgbClr val="095292"/>
@@ -8234,103 +7594,20 @@
       </p:sp>
       <p:sp>
         <p:nvSpPr>
-          <p:cNvPr id="8" name="TextBox 7"/>
-          <p:cNvSpPr txBox="1"/>
-          <p:nvPr/>
-        </p:nvSpPr>
-        <p:spPr>
-          <a:xfrm>
-            <a:off x="594360" y="1965960"/>
-            <a:ext cx="438912" cy="438912"/>
-          </a:xfrm>
-          <a:prstGeom prst="rect">
-            <a:avLst/>
-          </a:prstGeom>
-          <a:noFill/>
-        </p:spPr>
-        <p:txBody>
-          <a:bodyPr wrap="square" anchor="ctr"/>
-          <a:lstStyle/>
-          <a:p>
-            <a:pPr algn="ctr"/>
-            <a:r>
-              <a:rPr sz="1600" b="1" i="0">
-                <a:solidFill>
-                  <a:srgbClr val="FFFFFF"/>
-                </a:solidFill>
-                <a:latin typeface="Calibri"/>
-              </a:rPr>
-              <a:t>1</a:t>
-            </a:r>
-          </a:p>
-        </p:txBody>
-      </p:sp>
-      <p:sp>
-        <p:nvSpPr>
-          <p:cNvPr id="9" name="TextBox 8"/>
-          <p:cNvSpPr txBox="1"/>
-          <p:nvPr/>
-        </p:nvSpPr>
-        <p:spPr>
-          <a:xfrm>
-            <a:off x="1188720" y="1751076"/>
-            <a:ext cx="10271455" cy="886968"/>
-          </a:xfrm>
-          <a:prstGeom prst="rect">
-            <a:avLst/>
-          </a:prstGeom>
-          <a:noFill/>
-        </p:spPr>
-        <p:txBody>
-          <a:bodyPr wrap="square" anchor="ctr"/>
-          <a:lstStyle/>
-          <a:p>
-            <a:r>
-              <a:rPr sz="1500" b="1" i="0">
-                <a:solidFill>
-                  <a:srgbClr val="095292"/>
-                </a:solidFill>
-                <a:latin typeface="Calibri"/>
-              </a:rPr>
-              <a:t>Disena visual</a:t>
-            </a:r>
-          </a:p>
-          <a:p>
-            <a:pPr>
-              <a:spcBef>
-                <a:spcPts val="200"/>
-              </a:spcBef>
-            </a:pPr>
-            <a:r>
-              <a:rPr sz="1300" b="0" i="0">
-                <a:solidFill>
-                  <a:srgbClr val="333333"/>
-                </a:solidFill>
-                <a:latin typeface="Calibri"/>
-              </a:rPr>
-              <a:t>Dibuja el diagrama como quieras en Excalidraw o draw.io: es mas rapido arrastrar cajas que escribir codigo, y ahi es donde piensas el modelo.</a:t>
-            </a:r>
-          </a:p>
-        </p:txBody>
-      </p:sp>
-      <p:sp>
-        <p:nvSpPr>
-          <p:cNvPr id="10" name="Rounded Rectangle 9"/>
+          <p:cNvPr id="8" name="Rectangle 7"/>
           <p:cNvSpPr/>
           <p:nvPr/>
         </p:nvSpPr>
         <p:spPr>
           <a:xfrm>
-            <a:off x="457200" y="2802636"/>
-            <a:ext cx="11277295" cy="1051560"/>
-          </a:xfrm>
-          <a:prstGeom prst="roundRect">
-            <a:avLst>
-              <a:gd name="adj" fmla="val 12000"/>
-            </a:avLst>
+            <a:off x="457200" y="1655064"/>
+            <a:ext cx="3624986" cy="27432"/>
+          </a:xfrm>
+          <a:prstGeom prst="rect">
+            <a:avLst/>
           </a:prstGeom>
           <a:solidFill>
-            <a:srgbClr val="E8F4FA"/>
+            <a:srgbClr val="FFD000"/>
           </a:solidFill>
           <a:ln>
             <a:noFill/>
@@ -8358,6 +7635,79 @@
           </a:p>
         </p:txBody>
       </p:sp>
+      <p:pic>
+        <p:nvPicPr>
+          <p:cNvPr id="9" name="Picture 8" descr="drawio.png"/>
+          <p:cNvPicPr>
+            <a:picLocks noChangeAspect="1"/>
+          </p:cNvPicPr>
+          <p:nvPr/>
+        </p:nvPicPr>
+        <p:blipFill>
+          <a:blip r:embed="rId2"/>
+          <a:stretch>
+            <a:fillRect/>
+          </a:stretch>
+        </p:blipFill>
+        <p:spPr>
+          <a:xfrm>
+            <a:off x="1659331" y="1847087"/>
+            <a:ext cx="1220724" cy="1220724"/>
+          </a:xfrm>
+          <a:prstGeom prst="rect">
+            <a:avLst/>
+          </a:prstGeom>
+        </p:spPr>
+      </p:pic>
+      <p:sp>
+        <p:nvSpPr>
+          <p:cNvPr id="10" name="TextBox 9"/>
+          <p:cNvSpPr txBox="1"/>
+          <p:nvPr/>
+        </p:nvSpPr>
+        <p:spPr>
+          <a:xfrm>
+            <a:off x="530352" y="3159251"/>
+            <a:ext cx="3478682" cy="621792"/>
+          </a:xfrm>
+          <a:prstGeom prst="rect">
+            <a:avLst/>
+          </a:prstGeom>
+          <a:noFill/>
+        </p:spPr>
+        <p:txBody>
+          <a:bodyPr wrap="square" anchor="t"/>
+          <a:lstStyle/>
+          <a:p>
+            <a:pPr algn="ctr"/>
+            <a:r>
+              <a:rPr sz="1300" b="1" i="0">
+                <a:solidFill>
+                  <a:srgbClr val="095292"/>
+                </a:solidFill>
+                <a:latin typeface="Calibri"/>
+              </a:rPr>
+              <a:t>draw.io</a:t>
+            </a:r>
+          </a:p>
+          <a:p>
+            <a:pPr algn="ctr">
+              <a:spcBef>
+                <a:spcPts val="200"/>
+              </a:spcBef>
+            </a:pPr>
+            <a:r>
+              <a:rPr sz="1000" b="0" i="0">
+                <a:solidFill>
+                  <a:srgbClr val="666666"/>
+                </a:solidFill>
+                <a:latin typeface="Calibri"/>
+              </a:rPr>
+              <a:t>Auditoria del paquete</a:t>
+            </a:r>
+          </a:p>
+        </p:txBody>
+      </p:sp>
       <p:sp>
         <p:nvSpPr>
           <p:cNvPr id="11" name="Rounded Rectangle 10"/>
@@ -8366,13 +7716,56 @@
         </p:nvSpPr>
         <p:spPr>
           <a:xfrm>
-            <a:off x="594360" y="3108960"/>
-            <a:ext cx="438912" cy="438912"/>
+            <a:off x="4283354" y="1591056"/>
+            <a:ext cx="3624986" cy="2299716"/>
           </a:xfrm>
           <a:prstGeom prst="roundRect">
             <a:avLst>
               <a:gd name="adj" fmla="val 12000"/>
             </a:avLst>
+          </a:prstGeom>
+          <a:solidFill>
+            <a:srgbClr val="F2F2F2"/>
+          </a:solidFill>
+          <a:ln>
+            <a:noFill/>
+          </a:ln>
+        </p:spPr>
+        <p:style>
+          <a:lnRef idx="1">
+            <a:schemeClr val="accent1"/>
+          </a:lnRef>
+          <a:fillRef idx="3">
+            <a:schemeClr val="accent1"/>
+          </a:fillRef>
+          <a:effectRef idx="2">
+            <a:schemeClr val="accent1"/>
+          </a:effectRef>
+          <a:fontRef idx="minor">
+            <a:schemeClr val="lt1"/>
+          </a:fontRef>
+        </p:style>
+        <p:txBody>
+          <a:bodyPr rtlCol="0" anchor="ctr"/>
+          <a:lstStyle/>
+          <a:p>
+            <a:pPr algn="ctr"/>
+          </a:p>
+        </p:txBody>
+      </p:sp>
+      <p:sp>
+        <p:nvSpPr>
+          <p:cNvPr id="12" name="Rectangle 11"/>
+          <p:cNvSpPr/>
+          <p:nvPr/>
+        </p:nvSpPr>
+        <p:spPr>
+          <a:xfrm>
+            <a:off x="4283354" y="1591056"/>
+            <a:ext cx="3624986" cy="64008"/>
+          </a:xfrm>
+          <a:prstGeom prst="rect">
+            <a:avLst/>
           </a:prstGeom>
           <a:solidFill>
             <a:srgbClr val="095292"/>
@@ -8405,14 +7798,81 @@
       </p:sp>
       <p:sp>
         <p:nvSpPr>
-          <p:cNvPr id="12" name="TextBox 11"/>
+          <p:cNvPr id="13" name="Rectangle 12"/>
+          <p:cNvSpPr/>
+          <p:nvPr/>
+        </p:nvSpPr>
+        <p:spPr>
+          <a:xfrm>
+            <a:off x="4283354" y="1655064"/>
+            <a:ext cx="3624986" cy="27432"/>
+          </a:xfrm>
+          <a:prstGeom prst="rect">
+            <a:avLst/>
+          </a:prstGeom>
+          <a:solidFill>
+            <a:srgbClr val="FFD000"/>
+          </a:solidFill>
+          <a:ln>
+            <a:noFill/>
+          </a:ln>
+        </p:spPr>
+        <p:style>
+          <a:lnRef idx="1">
+            <a:schemeClr val="accent1"/>
+          </a:lnRef>
+          <a:fillRef idx="3">
+            <a:schemeClr val="accent1"/>
+          </a:fillRef>
+          <a:effectRef idx="2">
+            <a:schemeClr val="accent1"/>
+          </a:effectRef>
+          <a:fontRef idx="minor">
+            <a:schemeClr val="lt1"/>
+          </a:fontRef>
+        </p:style>
+        <p:txBody>
+          <a:bodyPr rtlCol="0" anchor="ctr"/>
+          <a:lstStyle/>
+          <a:p>
+            <a:pPr algn="ctr"/>
+          </a:p>
+        </p:txBody>
+      </p:sp>
+      <p:pic>
+        <p:nvPicPr>
+          <p:cNvPr id="14" name="Picture 13" descr="github_actions.png"/>
+          <p:cNvPicPr>
+            <a:picLocks noChangeAspect="1"/>
+          </p:cNvPicPr>
+          <p:nvPr/>
+        </p:nvPicPr>
+        <p:blipFill>
+          <a:blip r:embed="rId3"/>
+          <a:stretch>
+            <a:fillRect/>
+          </a:stretch>
+        </p:blipFill>
+        <p:spPr>
+          <a:xfrm>
+            <a:off x="5485485" y="1847087"/>
+            <a:ext cx="1220724" cy="1220724"/>
+          </a:xfrm>
+          <a:prstGeom prst="rect">
+            <a:avLst/>
+          </a:prstGeom>
+        </p:spPr>
+      </p:pic>
+      <p:sp>
+        <p:nvSpPr>
+          <p:cNvPr id="15" name="TextBox 14"/>
           <p:cNvSpPr txBox="1"/>
           <p:nvPr/>
         </p:nvSpPr>
         <p:spPr>
           <a:xfrm>
-            <a:off x="594360" y="3108960"/>
-            <a:ext cx="438912" cy="438912"/>
+            <a:off x="4356506" y="3159251"/>
+            <a:ext cx="3478682" cy="621792"/>
           </a:xfrm>
           <a:prstGeom prst="rect">
             <a:avLst/>
@@ -8420,80 +7880,48 @@
           <a:noFill/>
         </p:spPr>
         <p:txBody>
-          <a:bodyPr wrap="square" anchor="ctr"/>
+          <a:bodyPr wrap="square" anchor="t"/>
           <a:lstStyle/>
           <a:p>
             <a:pPr algn="ctr"/>
             <a:r>
-              <a:rPr sz="1600" b="1" i="0">
-                <a:solidFill>
-                  <a:srgbClr val="FFFFFF"/>
-                </a:solidFill>
-                <a:latin typeface="Calibri"/>
-              </a:rPr>
-              <a:t>2</a:t>
-            </a:r>
-          </a:p>
-        </p:txBody>
-      </p:sp>
-      <p:sp>
-        <p:nvSpPr>
-          <p:cNvPr id="13" name="TextBox 12"/>
-          <p:cNvSpPr txBox="1"/>
-          <p:nvPr/>
-        </p:nvSpPr>
-        <p:spPr>
-          <a:xfrm>
-            <a:off x="1188720" y="2894076"/>
-            <a:ext cx="10271455" cy="886968"/>
-          </a:xfrm>
-          <a:prstGeom prst="rect">
-            <a:avLst/>
-          </a:prstGeom>
-          <a:noFill/>
-        </p:spPr>
-        <p:txBody>
-          <a:bodyPr wrap="square" anchor="ctr"/>
-          <a:lstStyle/>
-          <a:p>
-            <a:r>
-              <a:rPr sz="1500" b="1" i="0">
+              <a:rPr sz="1300" b="1" i="0">
                 <a:solidFill>
                   <a:srgbClr val="095292"/>
                 </a:solidFill>
                 <a:latin typeface="Calibri"/>
               </a:rPr>
-              <a:t>Traduce con IA</a:t>
-            </a:r>
-          </a:p>
-          <a:p>
-            <a:pPr>
+              <a:t>GitHub Actions</a:t>
+            </a:r>
+          </a:p>
+          <a:p>
+            <a:pPr algn="ctr">
               <a:spcBef>
                 <a:spcPts val="200"/>
               </a:spcBef>
             </a:pPr>
             <a:r>
-              <a:rPr sz="1300" b="0" i="0">
-                <a:solidFill>
-                  <a:srgbClr val="333333"/>
-                </a:solidFill>
-                <a:latin typeface="Calibri"/>
-              </a:rPr>
-              <a:t>Copia o describe tu boceto a una IA y pidele el codigo Mermaid: «convierte este diagrama a Mermaid usando C4Component». Revisa el resultado: la IA acierta la sintaxis, no tu modelo.</a:t>
-            </a:r>
-          </a:p>
-        </p:txBody>
-      </p:sp>
-      <p:sp>
-        <p:nvSpPr>
-          <p:cNvPr id="14" name="Rounded Rectangle 13"/>
+              <a:rPr sz="1000" b="0" i="0">
+                <a:solidFill>
+                  <a:srgbClr val="666666"/>
+                </a:solidFill>
+                <a:latin typeface="Calibri"/>
+              </a:rPr>
+              <a:t>Evidencia CI</a:t>
+            </a:r>
+          </a:p>
+        </p:txBody>
+      </p:sp>
+      <p:sp>
+        <p:nvSpPr>
+          <p:cNvPr id="16" name="Rounded Rectangle 15"/>
           <p:cNvSpPr/>
           <p:nvPr/>
         </p:nvSpPr>
         <p:spPr>
           <a:xfrm>
-            <a:off x="457200" y="3945636"/>
-            <a:ext cx="11277295" cy="1051560"/>
+            <a:off x="8109508" y="1591056"/>
+            <a:ext cx="3624986" cy="2299716"/>
           </a:xfrm>
           <a:prstGeom prst="roundRect">
             <a:avLst>
@@ -8531,19 +7959,17 @@
       </p:sp>
       <p:sp>
         <p:nvSpPr>
-          <p:cNvPr id="15" name="Rounded Rectangle 14"/>
+          <p:cNvPr id="17" name="Rectangle 16"/>
           <p:cNvSpPr/>
           <p:nvPr/>
         </p:nvSpPr>
         <p:spPr>
           <a:xfrm>
-            <a:off x="594360" y="4251960"/>
-            <a:ext cx="438912" cy="438912"/>
-          </a:xfrm>
-          <a:prstGeom prst="roundRect">
-            <a:avLst>
-              <a:gd name="adj" fmla="val 12000"/>
-            </a:avLst>
+            <a:off x="8109508" y="1591056"/>
+            <a:ext cx="3624986" cy="64008"/>
+          </a:xfrm>
+          <a:prstGeom prst="rect">
+            <a:avLst/>
           </a:prstGeom>
           <a:solidFill>
             <a:srgbClr val="095292"/>
@@ -8576,103 +8002,20 @@
       </p:sp>
       <p:sp>
         <p:nvSpPr>
-          <p:cNvPr id="16" name="TextBox 15"/>
-          <p:cNvSpPr txBox="1"/>
-          <p:nvPr/>
-        </p:nvSpPr>
-        <p:spPr>
-          <a:xfrm>
-            <a:off x="594360" y="4251960"/>
-            <a:ext cx="438912" cy="438912"/>
-          </a:xfrm>
-          <a:prstGeom prst="rect">
-            <a:avLst/>
-          </a:prstGeom>
-          <a:noFill/>
-        </p:spPr>
-        <p:txBody>
-          <a:bodyPr wrap="square" anchor="ctr"/>
-          <a:lstStyle/>
-          <a:p>
-            <a:pPr algn="ctr"/>
-            <a:r>
-              <a:rPr sz="1600" b="1" i="0">
-                <a:solidFill>
-                  <a:srgbClr val="FFFFFF"/>
-                </a:solidFill>
-                <a:latin typeface="Calibri"/>
-              </a:rPr>
-              <a:t>3</a:t>
-            </a:r>
-          </a:p>
-        </p:txBody>
-      </p:sp>
-      <p:sp>
-        <p:nvSpPr>
-          <p:cNvPr id="17" name="TextBox 16"/>
-          <p:cNvSpPr txBox="1"/>
-          <p:nvPr/>
-        </p:nvSpPr>
-        <p:spPr>
-          <a:xfrm>
-            <a:off x="1188720" y="4037076"/>
-            <a:ext cx="10271455" cy="886968"/>
-          </a:xfrm>
-          <a:prstGeom prst="rect">
-            <a:avLst/>
-          </a:prstGeom>
-          <a:noFill/>
-        </p:spPr>
-        <p:txBody>
-          <a:bodyPr wrap="square" anchor="ctr"/>
-          <a:lstStyle/>
-          <a:p>
-            <a:r>
-              <a:rPr sz="1500" b="1" i="0">
-                <a:solidFill>
-                  <a:srgbClr val="095292"/>
-                </a:solidFill>
-                <a:latin typeface="Calibri"/>
-              </a:rPr>
-              <a:t>Pega y renderiza en la plataforma del curso</a:t>
-            </a:r>
-          </a:p>
-          <a:p>
-            <a:pPr>
-              <a:spcBef>
-                <a:spcPts val="200"/>
-              </a:spcBef>
-            </a:pPr>
-            <a:r>
-              <a:rPr sz="1300" b="0" i="0">
-                <a:solidFill>
-                  <a:srgbClr val="333333"/>
-                </a:solidFill>
-                <a:latin typeface="Calibri"/>
-              </a:rPr>
-              <a:t>Pega ese codigo en la caja de texto de la pregunta y mira como lo dibuja la plataforma. Si no renderiza, corrige ahi mismo: lo que se califica es el diagrama renderizado dentro de la plataforma del curso.</a:t>
-            </a:r>
-          </a:p>
-        </p:txBody>
-      </p:sp>
-      <p:sp>
-        <p:nvSpPr>
-          <p:cNvPr id="18" name="Rounded Rectangle 17"/>
+          <p:cNvPr id="18" name="Rectangle 17"/>
           <p:cNvSpPr/>
           <p:nvPr/>
         </p:nvSpPr>
         <p:spPr>
           <a:xfrm>
-            <a:off x="457200" y="5088636"/>
-            <a:ext cx="11277295" cy="1051560"/>
-          </a:xfrm>
-          <a:prstGeom prst="roundRect">
-            <a:avLst>
-              <a:gd name="adj" fmla="val 12000"/>
-            </a:avLst>
+            <a:off x="8109508" y="1655064"/>
+            <a:ext cx="3624986" cy="27432"/>
+          </a:xfrm>
+          <a:prstGeom prst="rect">
+            <a:avLst/>
           </a:prstGeom>
           <a:solidFill>
-            <a:srgbClr val="E8F4FA"/>
+            <a:srgbClr val="FFD000"/>
           </a:solidFill>
           <a:ln>
             <a:noFill/>
@@ -8700,21 +8043,137 @@
           </a:p>
         </p:txBody>
       </p:sp>
-      <p:sp>
-        <p:nvSpPr>
-          <p:cNvPr id="19" name="Rounded Rectangle 18"/>
+      <p:pic>
+        <p:nvPicPr>
+          <p:cNvPr id="19" name="Picture 18" descr="google_docs.png"/>
+          <p:cNvPicPr>
+            <a:picLocks noChangeAspect="1"/>
+          </p:cNvPicPr>
+          <p:nvPr/>
+        </p:nvPicPr>
+        <p:blipFill>
+          <a:blip r:embed="rId4"/>
+          <a:stretch>
+            <a:fillRect/>
+          </a:stretch>
+        </p:blipFill>
+        <p:spPr>
+          <a:xfrm>
+            <a:off x="9311640" y="1847087"/>
+            <a:ext cx="1220724" cy="1220724"/>
+          </a:xfrm>
+          <a:prstGeom prst="rect">
+            <a:avLst/>
+          </a:prstGeom>
+        </p:spPr>
+      </p:pic>
+      <p:sp>
+        <p:nvSpPr>
+          <p:cNvPr id="20" name="TextBox 19"/>
+          <p:cNvSpPr txBox="1"/>
+          <p:nvPr/>
+        </p:nvSpPr>
+        <p:spPr>
+          <a:xfrm>
+            <a:off x="8182660" y="3159251"/>
+            <a:ext cx="3478682" cy="621792"/>
+          </a:xfrm>
+          <a:prstGeom prst="rect">
+            <a:avLst/>
+          </a:prstGeom>
+          <a:noFill/>
+        </p:spPr>
+        <p:txBody>
+          <a:bodyPr wrap="square" anchor="t"/>
+          <a:lstStyle/>
+          <a:p>
+            <a:pPr algn="ctr"/>
+            <a:r>
+              <a:rPr sz="1300" b="1" i="0">
+                <a:solidFill>
+                  <a:srgbClr val="095292"/>
+                </a:solidFill>
+                <a:latin typeface="Calibri"/>
+              </a:rPr>
+              <a:t>Google Docs</a:t>
+            </a:r>
+          </a:p>
+          <a:p>
+            <a:pPr algn="ctr">
+              <a:spcBef>
+                <a:spcPts val="200"/>
+              </a:spcBef>
+            </a:pPr>
+            <a:r>
+              <a:rPr sz="1000" b="0" i="0">
+                <a:solidFill>
+                  <a:srgbClr val="666666"/>
+                </a:solidFill>
+                <a:latin typeface="Calibri"/>
+              </a:rPr>
+              <a:t>Informe PI</a:t>
+            </a:r>
+          </a:p>
+        </p:txBody>
+      </p:sp>
+      <p:sp>
+        <p:nvSpPr>
+          <p:cNvPr id="21" name="Rounded Rectangle 20"/>
           <p:cNvSpPr/>
           <p:nvPr/>
         </p:nvSpPr>
         <p:spPr>
           <a:xfrm>
-            <a:off x="594360" y="5394960"/>
-            <a:ext cx="438912" cy="438912"/>
+            <a:off x="2370277" y="4055364"/>
+            <a:ext cx="3624986" cy="2299716"/>
           </a:xfrm>
           <a:prstGeom prst="roundRect">
             <a:avLst>
               <a:gd name="adj" fmla="val 12000"/>
             </a:avLst>
+          </a:prstGeom>
+          <a:solidFill>
+            <a:srgbClr val="F2F2F2"/>
+          </a:solidFill>
+          <a:ln>
+            <a:noFill/>
+          </a:ln>
+        </p:spPr>
+        <p:style>
+          <a:lnRef idx="1">
+            <a:schemeClr val="accent1"/>
+          </a:lnRef>
+          <a:fillRef idx="3">
+            <a:schemeClr val="accent1"/>
+          </a:fillRef>
+          <a:effectRef idx="2">
+            <a:schemeClr val="accent1"/>
+          </a:effectRef>
+          <a:fontRef idx="minor">
+            <a:schemeClr val="lt1"/>
+          </a:fontRef>
+        </p:style>
+        <p:txBody>
+          <a:bodyPr rtlCol="0" anchor="ctr"/>
+          <a:lstStyle/>
+          <a:p>
+            <a:pPr algn="ctr"/>
+          </a:p>
+        </p:txBody>
+      </p:sp>
+      <p:sp>
+        <p:nvSpPr>
+          <p:cNvPr id="22" name="Rectangle 21"/>
+          <p:cNvSpPr/>
+          <p:nvPr/>
+        </p:nvSpPr>
+        <p:spPr>
+          <a:xfrm>
+            <a:off x="2370277" y="4055364"/>
+            <a:ext cx="3624986" cy="64008"/>
+          </a:xfrm>
+          <a:prstGeom prst="rect">
+            <a:avLst/>
           </a:prstGeom>
           <a:solidFill>
             <a:srgbClr val="095292"/>
@@ -8747,14 +8206,81 @@
       </p:sp>
       <p:sp>
         <p:nvSpPr>
-          <p:cNvPr id="20" name="TextBox 19"/>
+          <p:cNvPr id="23" name="Rectangle 22"/>
+          <p:cNvSpPr/>
+          <p:nvPr/>
+        </p:nvSpPr>
+        <p:spPr>
+          <a:xfrm>
+            <a:off x="2370277" y="4119372"/>
+            <a:ext cx="3624986" cy="27432"/>
+          </a:xfrm>
+          <a:prstGeom prst="rect">
+            <a:avLst/>
+          </a:prstGeom>
+          <a:solidFill>
+            <a:srgbClr val="FFD000"/>
+          </a:solidFill>
+          <a:ln>
+            <a:noFill/>
+          </a:ln>
+        </p:spPr>
+        <p:style>
+          <a:lnRef idx="1">
+            <a:schemeClr val="accent1"/>
+          </a:lnRef>
+          <a:fillRef idx="3">
+            <a:schemeClr val="accent1"/>
+          </a:fillRef>
+          <a:effectRef idx="2">
+            <a:schemeClr val="accent1"/>
+          </a:effectRef>
+          <a:fontRef idx="minor">
+            <a:schemeClr val="lt1"/>
+          </a:fontRef>
+        </p:style>
+        <p:txBody>
+          <a:bodyPr rtlCol="0" anchor="ctr"/>
+          <a:lstStyle/>
+          <a:p>
+            <a:pPr algn="ctr"/>
+          </a:p>
+        </p:txBody>
+      </p:sp>
+      <p:pic>
+        <p:nvPicPr>
+          <p:cNvPr id="24" name="Picture 23" descr="mermaid.png"/>
+          <p:cNvPicPr>
+            <a:picLocks noChangeAspect="1"/>
+          </p:cNvPicPr>
+          <p:nvPr/>
+        </p:nvPicPr>
+        <p:blipFill>
+          <a:blip r:embed="rId5"/>
+          <a:stretch>
+            <a:fillRect/>
+          </a:stretch>
+        </p:blipFill>
+        <p:spPr>
+          <a:xfrm>
+            <a:off x="3572408" y="4311396"/>
+            <a:ext cx="1220724" cy="1220724"/>
+          </a:xfrm>
+          <a:prstGeom prst="rect">
+            <a:avLst/>
+          </a:prstGeom>
+        </p:spPr>
+      </p:pic>
+      <p:sp>
+        <p:nvSpPr>
+          <p:cNvPr id="25" name="TextBox 24"/>
           <p:cNvSpPr txBox="1"/>
           <p:nvPr/>
         </p:nvSpPr>
         <p:spPr>
           <a:xfrm>
-            <a:off x="594360" y="5394960"/>
-            <a:ext cx="438912" cy="438912"/>
+            <a:off x="2443429" y="5623560"/>
+            <a:ext cx="3478682" cy="621792"/>
           </a:xfrm>
           <a:prstGeom prst="rect">
             <a:avLst/>
@@ -8762,73 +8288,245 @@
           <a:noFill/>
         </p:spPr>
         <p:txBody>
-          <a:bodyPr wrap="square" anchor="ctr"/>
+          <a:bodyPr wrap="square" anchor="t"/>
           <a:lstStyle/>
           <a:p>
             <a:pPr algn="ctr"/>
             <a:r>
-              <a:rPr sz="1600" b="1" i="0">
-                <a:solidFill>
-                  <a:srgbClr val="FFFFFF"/>
-                </a:solidFill>
-                <a:latin typeface="Calibri"/>
-              </a:rPr>
-              <a:t>4</a:t>
-            </a:r>
-          </a:p>
-        </p:txBody>
-      </p:sp>
-      <p:sp>
-        <p:nvSpPr>
-          <p:cNvPr id="21" name="TextBox 20"/>
-          <p:cNvSpPr txBox="1"/>
-          <p:nvPr/>
-        </p:nvSpPr>
-        <p:spPr>
-          <a:xfrm>
-            <a:off x="1188720" y="5180076"/>
-            <a:ext cx="10271455" cy="886968"/>
-          </a:xfrm>
-          <a:prstGeom prst="rect">
-            <a:avLst/>
-          </a:prstGeom>
-          <a:noFill/>
-        </p:spPr>
-        <p:txBody>
-          <a:bodyPr wrap="square" anchor="ctr"/>
-          <a:lstStyle/>
-          <a:p>
-            <a:r>
-              <a:rPr sz="1500" b="1" i="0">
+              <a:rPr sz="1300" b="1" i="0">
                 <a:solidFill>
                   <a:srgbClr val="095292"/>
                 </a:solidFill>
                 <a:latin typeface="Calibri"/>
               </a:rPr>
-              <a:t>Guarda el PNG para tu PI</a:t>
-            </a:r>
-          </a:p>
-          <a:p>
-            <a:pPr>
+              <a:t>Mermaid</a:t>
+            </a:r>
+          </a:p>
+          <a:p>
+            <a:pPr algn="ctr">
               <a:spcBef>
                 <a:spcPts val="200"/>
               </a:spcBef>
             </a:pPr>
             <a:r>
-              <a:rPr sz="1300" b="0" i="0">
-                <a:solidFill>
-                  <a:srgbClr val="333333"/>
-                </a:solidFill>
-                <a:latin typeface="Calibri"/>
-              </a:rPr>
-              <a:t>Exporta tambien la imagen a la carpeta de tu Proyecto Integrador. Esa copia es para tu informe; no reemplaza la respuesta en la plataforma.</a:t>
-            </a:r>
-          </a:p>
-        </p:txBody>
-      </p:sp>
-      <p:sp>
-        <p:nvSpPr>
-          <p:cNvPr id="22" name="TextBox 21"/>
+              <a:rPr sz="1000" b="0" i="0">
+                <a:solidFill>
+                  <a:srgbClr val="666666"/>
+                </a:solidFill>
+                <a:latin typeface="Calibri"/>
+              </a:rPr>
+              <a:t>Codigo del diagrama</a:t>
+            </a:r>
+          </a:p>
+        </p:txBody>
+      </p:sp>
+      <p:sp>
+        <p:nvSpPr>
+          <p:cNvPr id="26" name="Rounded Rectangle 25"/>
+          <p:cNvSpPr/>
+          <p:nvPr/>
+        </p:nvSpPr>
+        <p:spPr>
+          <a:xfrm>
+            <a:off x="6196431" y="4055364"/>
+            <a:ext cx="3624986" cy="2299716"/>
+          </a:xfrm>
+          <a:prstGeom prst="roundRect">
+            <a:avLst>
+              <a:gd name="adj" fmla="val 12000"/>
+            </a:avLst>
+          </a:prstGeom>
+          <a:solidFill>
+            <a:srgbClr val="F2F2F2"/>
+          </a:solidFill>
+          <a:ln>
+            <a:noFill/>
+          </a:ln>
+        </p:spPr>
+        <p:style>
+          <a:lnRef idx="1">
+            <a:schemeClr val="accent1"/>
+          </a:lnRef>
+          <a:fillRef idx="3">
+            <a:schemeClr val="accent1"/>
+          </a:fillRef>
+          <a:effectRef idx="2">
+            <a:schemeClr val="accent1"/>
+          </a:effectRef>
+          <a:fontRef idx="minor">
+            <a:schemeClr val="lt1"/>
+          </a:fontRef>
+        </p:style>
+        <p:txBody>
+          <a:bodyPr rtlCol="0" anchor="ctr"/>
+          <a:lstStyle/>
+          <a:p>
+            <a:pPr algn="ctr"/>
+          </a:p>
+        </p:txBody>
+      </p:sp>
+      <p:sp>
+        <p:nvSpPr>
+          <p:cNvPr id="27" name="Rectangle 26"/>
+          <p:cNvSpPr/>
+          <p:nvPr/>
+        </p:nvSpPr>
+        <p:spPr>
+          <a:xfrm>
+            <a:off x="6196431" y="4055364"/>
+            <a:ext cx="3624986" cy="64008"/>
+          </a:xfrm>
+          <a:prstGeom prst="rect">
+            <a:avLst/>
+          </a:prstGeom>
+          <a:solidFill>
+            <a:srgbClr val="095292"/>
+          </a:solidFill>
+          <a:ln>
+            <a:noFill/>
+          </a:ln>
+        </p:spPr>
+        <p:style>
+          <a:lnRef idx="1">
+            <a:schemeClr val="accent1"/>
+          </a:lnRef>
+          <a:fillRef idx="3">
+            <a:schemeClr val="accent1"/>
+          </a:fillRef>
+          <a:effectRef idx="2">
+            <a:schemeClr val="accent1"/>
+          </a:effectRef>
+          <a:fontRef idx="minor">
+            <a:schemeClr val="lt1"/>
+          </a:fontRef>
+        </p:style>
+        <p:txBody>
+          <a:bodyPr rtlCol="0" anchor="ctr"/>
+          <a:lstStyle/>
+          <a:p>
+            <a:pPr algn="ctr"/>
+          </a:p>
+        </p:txBody>
+      </p:sp>
+      <p:sp>
+        <p:nvSpPr>
+          <p:cNvPr id="28" name="Rectangle 27"/>
+          <p:cNvSpPr/>
+          <p:nvPr/>
+        </p:nvSpPr>
+        <p:spPr>
+          <a:xfrm>
+            <a:off x="6196431" y="4119372"/>
+            <a:ext cx="3624986" cy="27432"/>
+          </a:xfrm>
+          <a:prstGeom prst="rect">
+            <a:avLst/>
+          </a:prstGeom>
+          <a:solidFill>
+            <a:srgbClr val="FFD000"/>
+          </a:solidFill>
+          <a:ln>
+            <a:noFill/>
+          </a:ln>
+        </p:spPr>
+        <p:style>
+          <a:lnRef idx="1">
+            <a:schemeClr val="accent1"/>
+          </a:lnRef>
+          <a:fillRef idx="3">
+            <a:schemeClr val="accent1"/>
+          </a:fillRef>
+          <a:effectRef idx="2">
+            <a:schemeClr val="accent1"/>
+          </a:effectRef>
+          <a:fontRef idx="minor">
+            <a:schemeClr val="lt1"/>
+          </a:fontRef>
+        </p:style>
+        <p:txBody>
+          <a:bodyPr rtlCol="0" anchor="ctr"/>
+          <a:lstStyle/>
+          <a:p>
+            <a:pPr algn="ctr"/>
+          </a:p>
+        </p:txBody>
+      </p:sp>
+      <p:pic>
+        <p:nvPicPr>
+          <p:cNvPr id="29" name="Picture 28" descr="examlab.png"/>
+          <p:cNvPicPr>
+            <a:picLocks noChangeAspect="1"/>
+          </p:cNvPicPr>
+          <p:nvPr/>
+        </p:nvPicPr>
+        <p:blipFill>
+          <a:blip r:embed="rId6"/>
+          <a:stretch>
+            <a:fillRect/>
+          </a:stretch>
+        </p:blipFill>
+        <p:spPr>
+          <a:xfrm>
+            <a:off x="7398562" y="4311396"/>
+            <a:ext cx="1220724" cy="1220724"/>
+          </a:xfrm>
+          <a:prstGeom prst="rect">
+            <a:avLst/>
+          </a:prstGeom>
+        </p:spPr>
+      </p:pic>
+      <p:sp>
+        <p:nvSpPr>
+          <p:cNvPr id="30" name="TextBox 29"/>
+          <p:cNvSpPr txBox="1"/>
+          <p:nvPr/>
+        </p:nvSpPr>
+        <p:spPr>
+          <a:xfrm>
+            <a:off x="6269583" y="5623560"/>
+            <a:ext cx="3478682" cy="621792"/>
+          </a:xfrm>
+          <a:prstGeom prst="rect">
+            <a:avLst/>
+          </a:prstGeom>
+          <a:noFill/>
+        </p:spPr>
+        <p:txBody>
+          <a:bodyPr wrap="square" anchor="t"/>
+          <a:lstStyle/>
+          <a:p>
+            <a:pPr algn="ctr"/>
+            <a:r>
+              <a:rPr sz="1300" b="1" i="0">
+                <a:solidFill>
+                  <a:srgbClr val="095292"/>
+                </a:solidFill>
+                <a:latin typeface="Calibri"/>
+              </a:rPr>
+              <a:t>la plataforma del curso</a:t>
+            </a:r>
+          </a:p>
+          <a:p>
+            <a:pPr algn="ctr">
+              <a:spcBef>
+                <a:spcPts val="200"/>
+              </a:spcBef>
+            </a:pPr>
+            <a:r>
+              <a:rPr sz="1000" b="0" i="0">
+                <a:solidFill>
+                  <a:srgbClr val="666666"/>
+                </a:solidFill>
+                <a:latin typeface="Calibri"/>
+              </a:rPr>
+              <a:t>Donde se entrega</a:t>
+            </a:r>
+          </a:p>
+        </p:txBody>
+      </p:sp>
+      <p:sp>
+        <p:nvSpPr>
+          <p:cNvPr id="31" name="TextBox 30"/>
           <p:cNvSpPr txBox="1"/>
           <p:nvPr/>
         </p:nvSpPr>
@@ -8896,7 +8594,7 @@
         <p:spPr>
           <a:xfrm>
             <a:off x="0" y="0"/>
-            <a:ext cx="12191695" cy="960120"/>
+            <a:ext cx="12191695" cy="1170432"/>
           </a:xfrm>
           <a:prstGeom prst="rect">
             <a:avLst/>
@@ -8938,7 +8636,7 @@
         </p:nvSpPr>
         <p:spPr>
           <a:xfrm>
-            <a:off x="0" y="960120"/>
+            <a:off x="0" y="1170432"/>
             <a:ext cx="12191695" cy="41148"/>
           </a:xfrm>
           <a:prstGeom prst="rect">
@@ -8982,7 +8680,7 @@
         <p:spPr>
           <a:xfrm>
             <a:off x="457200" y="164592"/>
-            <a:ext cx="11277295" cy="502920"/>
+            <a:ext cx="11277295" cy="384048"/>
           </a:xfrm>
           <a:prstGeom prst="rect">
             <a:avLst/>
@@ -9002,7 +8700,7 @@
                 </a:solidFill>
                 <a:latin typeface="Calibri"/>
               </a:rPr>
-              <a:t>PI CloudLite — entregable de hoy</a:t>
+              <a:t>Del boceto a la plataforma del curso (diagrama)</a:t>
             </a:r>
           </a:p>
         </p:txBody>
@@ -9015,8 +8713,8 @@
         </p:nvSpPr>
         <p:spPr>
           <a:xfrm>
-            <a:off x="457200" y="1170432"/>
-            <a:ext cx="11277295" cy="5230368"/>
+            <a:off x="457200" y="566928"/>
+            <a:ext cx="11277295" cy="411480"/>
           </a:xfrm>
           <a:prstGeom prst="rect">
             <a:avLst/>
@@ -9029,119 +8727,705 @@
           </a:bodyPr>
           <a:lstStyle/>
           <a:p>
+            <a:r>
+              <a:rPr sz="1400" b="0" i="0">
+                <a:solidFill>
+                  <a:srgbClr val="B8D8EE"/>
+                </a:solidFill>
+                <a:latin typeface="Calibri"/>
+              </a:rPr>
+              <a:t>El diagrama se entrega como código Mermaid dentro de la plataforma del curso, no como imagen</a:t>
+            </a:r>
+          </a:p>
+        </p:txBody>
+      </p:sp>
+      <p:sp>
+        <p:nvSpPr>
+          <p:cNvPr id="6" name="Rounded Rectangle 5"/>
+          <p:cNvSpPr/>
+          <p:nvPr/>
+        </p:nvSpPr>
+        <p:spPr>
+          <a:xfrm>
+            <a:off x="457200" y="1659636"/>
+            <a:ext cx="11277295" cy="1051560"/>
+          </a:xfrm>
+          <a:prstGeom prst="roundRect">
+            <a:avLst>
+              <a:gd name="adj" fmla="val 12000"/>
+            </a:avLst>
+          </a:prstGeom>
+          <a:solidFill>
+            <a:srgbClr val="F2F2F2"/>
+          </a:solidFill>
+          <a:ln>
+            <a:noFill/>
+          </a:ln>
+        </p:spPr>
+        <p:style>
+          <a:lnRef idx="1">
+            <a:schemeClr val="accent1"/>
+          </a:lnRef>
+          <a:fillRef idx="3">
+            <a:schemeClr val="accent1"/>
+          </a:fillRef>
+          <a:effectRef idx="2">
+            <a:schemeClr val="accent1"/>
+          </a:effectRef>
+          <a:fontRef idx="minor">
+            <a:schemeClr val="lt1"/>
+          </a:fontRef>
+        </p:style>
+        <p:txBody>
+          <a:bodyPr rtlCol="0" anchor="ctr"/>
+          <a:lstStyle/>
+          <a:p>
+            <a:pPr algn="ctr"/>
+          </a:p>
+        </p:txBody>
+      </p:sp>
+      <p:sp>
+        <p:nvSpPr>
+          <p:cNvPr id="7" name="Rounded Rectangle 6"/>
+          <p:cNvSpPr/>
+          <p:nvPr/>
+        </p:nvSpPr>
+        <p:spPr>
+          <a:xfrm>
+            <a:off x="594360" y="1965960"/>
+            <a:ext cx="438912" cy="438912"/>
+          </a:xfrm>
+          <a:prstGeom prst="roundRect">
+            <a:avLst>
+              <a:gd name="adj" fmla="val 12000"/>
+            </a:avLst>
+          </a:prstGeom>
+          <a:solidFill>
+            <a:srgbClr val="095292"/>
+          </a:solidFill>
+          <a:ln>
+            <a:noFill/>
+          </a:ln>
+        </p:spPr>
+        <p:style>
+          <a:lnRef idx="1">
+            <a:schemeClr val="accent1"/>
+          </a:lnRef>
+          <a:fillRef idx="3">
+            <a:schemeClr val="accent1"/>
+          </a:fillRef>
+          <a:effectRef idx="2">
+            <a:schemeClr val="accent1"/>
+          </a:effectRef>
+          <a:fontRef idx="minor">
+            <a:schemeClr val="lt1"/>
+          </a:fontRef>
+        </p:style>
+        <p:txBody>
+          <a:bodyPr rtlCol="0" anchor="ctr"/>
+          <a:lstStyle/>
+          <a:p>
+            <a:pPr algn="ctr"/>
+          </a:p>
+        </p:txBody>
+      </p:sp>
+      <p:sp>
+        <p:nvSpPr>
+          <p:cNvPr id="8" name="TextBox 7"/>
+          <p:cNvSpPr txBox="1"/>
+          <p:nvPr/>
+        </p:nvSpPr>
+        <p:spPr>
+          <a:xfrm>
+            <a:off x="594360" y="1965960"/>
+            <a:ext cx="438912" cy="438912"/>
+          </a:xfrm>
+          <a:prstGeom prst="rect">
+            <a:avLst/>
+          </a:prstGeom>
+          <a:noFill/>
+        </p:spPr>
+        <p:txBody>
+          <a:bodyPr wrap="square" anchor="ctr"/>
+          <a:lstStyle/>
+          <a:p>
+            <a:pPr algn="ctr"/>
+            <a:r>
+              <a:rPr sz="1600" b="1" i="0">
+                <a:solidFill>
+                  <a:srgbClr val="FFFFFF"/>
+                </a:solidFill>
+                <a:latin typeface="Calibri"/>
+              </a:rPr>
+              <a:t>1</a:t>
+            </a:r>
+          </a:p>
+        </p:txBody>
+      </p:sp>
+      <p:sp>
+        <p:nvSpPr>
+          <p:cNvPr id="9" name="TextBox 8"/>
+          <p:cNvSpPr txBox="1"/>
+          <p:nvPr/>
+        </p:nvSpPr>
+        <p:spPr>
+          <a:xfrm>
+            <a:off x="1188720" y="1751076"/>
+            <a:ext cx="10271455" cy="886968"/>
+          </a:xfrm>
+          <a:prstGeom prst="rect">
+            <a:avLst/>
+          </a:prstGeom>
+          <a:noFill/>
+        </p:spPr>
+        <p:txBody>
+          <a:bodyPr wrap="square" anchor="ctr"/>
+          <a:lstStyle/>
+          <a:p>
+            <a:r>
+              <a:rPr sz="1500" b="1" i="0">
+                <a:solidFill>
+                  <a:srgbClr val="095292"/>
+                </a:solidFill>
+                <a:latin typeface="Calibri"/>
+              </a:rPr>
+              <a:t>Disena visual</a:t>
+            </a:r>
+          </a:p>
+          <a:p>
             <a:pPr>
-              <a:spcAft>
-                <a:spcPts val="800"/>
-              </a:spcAft>
+              <a:spcBef>
+                <a:spcPts val="200"/>
+              </a:spcBef>
             </a:pPr>
             <a:r>
-              <a:rPr sz="2000" b="0" i="0">
+              <a:rPr sz="1300" b="0" i="0">
                 <a:solidFill>
                   <a:srgbClr val="333333"/>
                 </a:solidFill>
                 <a:latin typeface="Calibri"/>
               </a:rPr>
-              <a:t>–   </a:t>
-            </a:r>
-            <a:r>
-              <a:rPr sz="2000" b="1" i="0">
+              <a:t>Dibuja el diagrama como quieras en Excalidraw o draw.io: es mas rapido arrastrar cajas que escribir codigo, y ahi es donde piensas el modelo.</a:t>
+            </a:r>
+          </a:p>
+        </p:txBody>
+      </p:sp>
+      <p:sp>
+        <p:nvSpPr>
+          <p:cNvPr id="10" name="Rounded Rectangle 9"/>
+          <p:cNvSpPr/>
+          <p:nvPr/>
+        </p:nvSpPr>
+        <p:spPr>
+          <a:xfrm>
+            <a:off x="457200" y="2802636"/>
+            <a:ext cx="11277295" cy="1051560"/>
+          </a:xfrm>
+          <a:prstGeom prst="roundRect">
+            <a:avLst>
+              <a:gd name="adj" fmla="val 12000"/>
+            </a:avLst>
+          </a:prstGeom>
+          <a:solidFill>
+            <a:srgbClr val="E8F4FA"/>
+          </a:solidFill>
+          <a:ln>
+            <a:noFill/>
+          </a:ln>
+        </p:spPr>
+        <p:style>
+          <a:lnRef idx="1">
+            <a:schemeClr val="accent1"/>
+          </a:lnRef>
+          <a:fillRef idx="3">
+            <a:schemeClr val="accent1"/>
+          </a:fillRef>
+          <a:effectRef idx="2">
+            <a:schemeClr val="accent1"/>
+          </a:effectRef>
+          <a:fontRef idx="minor">
+            <a:schemeClr val="lt1"/>
+          </a:fontRef>
+        </p:style>
+        <p:txBody>
+          <a:bodyPr rtlCol="0" anchor="ctr"/>
+          <a:lstStyle/>
+          <a:p>
+            <a:pPr algn="ctr"/>
+          </a:p>
+        </p:txBody>
+      </p:sp>
+      <p:sp>
+        <p:nvSpPr>
+          <p:cNvPr id="11" name="Rounded Rectangle 10"/>
+          <p:cNvSpPr/>
+          <p:nvPr/>
+        </p:nvSpPr>
+        <p:spPr>
+          <a:xfrm>
+            <a:off x="594360" y="3108960"/>
+            <a:ext cx="438912" cy="438912"/>
+          </a:xfrm>
+          <a:prstGeom prst="roundRect">
+            <a:avLst>
+              <a:gd name="adj" fmla="val 12000"/>
+            </a:avLst>
+          </a:prstGeom>
+          <a:solidFill>
+            <a:srgbClr val="095292"/>
+          </a:solidFill>
+          <a:ln>
+            <a:noFill/>
+          </a:ln>
+        </p:spPr>
+        <p:style>
+          <a:lnRef idx="1">
+            <a:schemeClr val="accent1"/>
+          </a:lnRef>
+          <a:fillRef idx="3">
+            <a:schemeClr val="accent1"/>
+          </a:fillRef>
+          <a:effectRef idx="2">
+            <a:schemeClr val="accent1"/>
+          </a:effectRef>
+          <a:fontRef idx="minor">
+            <a:schemeClr val="lt1"/>
+          </a:fontRef>
+        </p:style>
+        <p:txBody>
+          <a:bodyPr rtlCol="0" anchor="ctr"/>
+          <a:lstStyle/>
+          <a:p>
+            <a:pPr algn="ctr"/>
+          </a:p>
+        </p:txBody>
+      </p:sp>
+      <p:sp>
+        <p:nvSpPr>
+          <p:cNvPr id="12" name="TextBox 11"/>
+          <p:cNvSpPr txBox="1"/>
+          <p:nvPr/>
+        </p:nvSpPr>
+        <p:spPr>
+          <a:xfrm>
+            <a:off x="594360" y="3108960"/>
+            <a:ext cx="438912" cy="438912"/>
+          </a:xfrm>
+          <a:prstGeom prst="rect">
+            <a:avLst/>
+          </a:prstGeom>
+          <a:noFill/>
+        </p:spPr>
+        <p:txBody>
+          <a:bodyPr wrap="square" anchor="ctr"/>
+          <a:lstStyle/>
+          <a:p>
+            <a:pPr algn="ctr"/>
+            <a:r>
+              <a:rPr sz="1600" b="1" i="0">
+                <a:solidFill>
+                  <a:srgbClr val="FFFFFF"/>
+                </a:solidFill>
+                <a:latin typeface="Calibri"/>
+              </a:rPr>
+              <a:t>2</a:t>
+            </a:r>
+          </a:p>
+        </p:txBody>
+      </p:sp>
+      <p:sp>
+        <p:nvSpPr>
+          <p:cNvPr id="13" name="TextBox 12"/>
+          <p:cNvSpPr txBox="1"/>
+          <p:nvPr/>
+        </p:nvSpPr>
+        <p:spPr>
+          <a:xfrm>
+            <a:off x="1188720" y="2894076"/>
+            <a:ext cx="10271455" cy="886968"/>
+          </a:xfrm>
+          <a:prstGeom prst="rect">
+            <a:avLst/>
+          </a:prstGeom>
+          <a:noFill/>
+        </p:spPr>
+        <p:txBody>
+          <a:bodyPr wrap="square" anchor="ctr"/>
+          <a:lstStyle/>
+          <a:p>
+            <a:r>
+              <a:rPr sz="1500" b="1" i="0">
+                <a:solidFill>
+                  <a:srgbClr val="095292"/>
+                </a:solidFill>
+                <a:latin typeface="Calibri"/>
+              </a:rPr>
+              <a:t>Traduce con IA</a:t>
+            </a:r>
+          </a:p>
+          <a:p>
+            <a:pPr>
+              <a:spcBef>
+                <a:spcPts val="200"/>
+              </a:spcBef>
+            </a:pPr>
+            <a:r>
+              <a:rPr sz="1300" b="0" i="0">
                 <a:solidFill>
                   <a:srgbClr val="333333"/>
                 </a:solidFill>
                 <a:latin typeface="Calibri"/>
               </a:rPr>
-              <a:t>Entregable:</a:t>
-            </a:r>
-            <a:r>
-              <a:rPr sz="2000" b="0" i="0">
+              <a:t>Copia o describe tu boceto a una IA y pidele el codigo Mermaid: «convierte este diagrama a Mermaid usando C4Component». Revisa el resultado: la IA acierta la sintaxis, no tu modelo.</a:t>
+            </a:r>
+          </a:p>
+        </p:txBody>
+      </p:sp>
+      <p:sp>
+        <p:nvSpPr>
+          <p:cNvPr id="14" name="Rounded Rectangle 13"/>
+          <p:cNvSpPr/>
+          <p:nvPr/>
+        </p:nvSpPr>
+        <p:spPr>
+          <a:xfrm>
+            <a:off x="457200" y="3945636"/>
+            <a:ext cx="11277295" cy="1051560"/>
+          </a:xfrm>
+          <a:prstGeom prst="roundRect">
+            <a:avLst>
+              <a:gd name="adj" fmla="val 12000"/>
+            </a:avLst>
+          </a:prstGeom>
+          <a:solidFill>
+            <a:srgbClr val="F2F2F2"/>
+          </a:solidFill>
+          <a:ln>
+            <a:noFill/>
+          </a:ln>
+        </p:spPr>
+        <p:style>
+          <a:lnRef idx="1">
+            <a:schemeClr val="accent1"/>
+          </a:lnRef>
+          <a:fillRef idx="3">
+            <a:schemeClr val="accent1"/>
+          </a:fillRef>
+          <a:effectRef idx="2">
+            <a:schemeClr val="accent1"/>
+          </a:effectRef>
+          <a:fontRef idx="minor">
+            <a:schemeClr val="lt1"/>
+          </a:fontRef>
+        </p:style>
+        <p:txBody>
+          <a:bodyPr rtlCol="0" anchor="ctr"/>
+          <a:lstStyle/>
+          <a:p>
+            <a:pPr algn="ctr"/>
+          </a:p>
+        </p:txBody>
+      </p:sp>
+      <p:sp>
+        <p:nvSpPr>
+          <p:cNvPr id="15" name="Rounded Rectangle 14"/>
+          <p:cNvSpPr/>
+          <p:nvPr/>
+        </p:nvSpPr>
+        <p:spPr>
+          <a:xfrm>
+            <a:off x="594360" y="4251960"/>
+            <a:ext cx="438912" cy="438912"/>
+          </a:xfrm>
+          <a:prstGeom prst="roundRect">
+            <a:avLst>
+              <a:gd name="adj" fmla="val 12000"/>
+            </a:avLst>
+          </a:prstGeom>
+          <a:solidFill>
+            <a:srgbClr val="095292"/>
+          </a:solidFill>
+          <a:ln>
+            <a:noFill/>
+          </a:ln>
+        </p:spPr>
+        <p:style>
+          <a:lnRef idx="1">
+            <a:schemeClr val="accent1"/>
+          </a:lnRef>
+          <a:fillRef idx="3">
+            <a:schemeClr val="accent1"/>
+          </a:fillRef>
+          <a:effectRef idx="2">
+            <a:schemeClr val="accent1"/>
+          </a:effectRef>
+          <a:fontRef idx="minor">
+            <a:schemeClr val="lt1"/>
+          </a:fontRef>
+        </p:style>
+        <p:txBody>
+          <a:bodyPr rtlCol="0" anchor="ctr"/>
+          <a:lstStyle/>
+          <a:p>
+            <a:pPr algn="ctr"/>
+          </a:p>
+        </p:txBody>
+      </p:sp>
+      <p:sp>
+        <p:nvSpPr>
+          <p:cNvPr id="16" name="TextBox 15"/>
+          <p:cNvSpPr txBox="1"/>
+          <p:nvPr/>
+        </p:nvSpPr>
+        <p:spPr>
+          <a:xfrm>
+            <a:off x="594360" y="4251960"/>
+            <a:ext cx="438912" cy="438912"/>
+          </a:xfrm>
+          <a:prstGeom prst="rect">
+            <a:avLst/>
+          </a:prstGeom>
+          <a:noFill/>
+        </p:spPr>
+        <p:txBody>
+          <a:bodyPr wrap="square" anchor="ctr"/>
+          <a:lstStyle/>
+          <a:p>
+            <a:pPr algn="ctr"/>
+            <a:r>
+              <a:rPr sz="1600" b="1" i="0">
+                <a:solidFill>
+                  <a:srgbClr val="FFFFFF"/>
+                </a:solidFill>
+                <a:latin typeface="Calibri"/>
+              </a:rPr>
+              <a:t>3</a:t>
+            </a:r>
+          </a:p>
+        </p:txBody>
+      </p:sp>
+      <p:sp>
+        <p:nvSpPr>
+          <p:cNvPr id="17" name="TextBox 16"/>
+          <p:cNvSpPr txBox="1"/>
+          <p:nvPr/>
+        </p:nvSpPr>
+        <p:spPr>
+          <a:xfrm>
+            <a:off x="1188720" y="4037076"/>
+            <a:ext cx="10271455" cy="886968"/>
+          </a:xfrm>
+          <a:prstGeom prst="rect">
+            <a:avLst/>
+          </a:prstGeom>
+          <a:noFill/>
+        </p:spPr>
+        <p:txBody>
+          <a:bodyPr wrap="square" anchor="ctr"/>
+          <a:lstStyle/>
+          <a:p>
+            <a:r>
+              <a:rPr sz="1500" b="1" i="0">
+                <a:solidFill>
+                  <a:srgbClr val="095292"/>
+                </a:solidFill>
+                <a:latin typeface="Calibri"/>
+              </a:rPr>
+              <a:t>Pega y renderiza en la plataforma del curso</a:t>
+            </a:r>
+          </a:p>
+          <a:p>
+            <a:pPr>
+              <a:spcBef>
+                <a:spcPts val="200"/>
+              </a:spcBef>
+            </a:pPr>
+            <a:r>
+              <a:rPr sz="1300" b="0" i="0">
                 <a:solidFill>
                   <a:srgbClr val="333333"/>
                 </a:solidFill>
                 <a:latin typeface="Calibri"/>
               </a:rPr>
-              <a:t> Paquete v1: Context + Containers + Deployment + Dockerfile + Actions + informe 60%+</a:t>
+              <a:t>Pega ese codigo en la caja de texto de la pregunta y mira como lo dibuja la plataforma. Si no renderiza, corrige ahi mismo: lo que se califica es el diagrama renderizado dentro de la plataforma del curso.</a:t>
+            </a:r>
+          </a:p>
+        </p:txBody>
+      </p:sp>
+      <p:sp>
+        <p:nvSpPr>
+          <p:cNvPr id="18" name="Rounded Rectangle 17"/>
+          <p:cNvSpPr/>
+          <p:nvPr/>
+        </p:nvSpPr>
+        <p:spPr>
+          <a:xfrm>
+            <a:off x="457200" y="5088636"/>
+            <a:ext cx="11277295" cy="1051560"/>
+          </a:xfrm>
+          <a:prstGeom prst="roundRect">
+            <a:avLst>
+              <a:gd name="adj" fmla="val 12000"/>
+            </a:avLst>
+          </a:prstGeom>
+          <a:solidFill>
+            <a:srgbClr val="E8F4FA"/>
+          </a:solidFill>
+          <a:ln>
+            <a:noFill/>
+          </a:ln>
+        </p:spPr>
+        <p:style>
+          <a:lnRef idx="1">
+            <a:schemeClr val="accent1"/>
+          </a:lnRef>
+          <a:fillRef idx="3">
+            <a:schemeClr val="accent1"/>
+          </a:fillRef>
+          <a:effectRef idx="2">
+            <a:schemeClr val="accent1"/>
+          </a:effectRef>
+          <a:fontRef idx="minor">
+            <a:schemeClr val="lt1"/>
+          </a:fontRef>
+        </p:style>
+        <p:txBody>
+          <a:bodyPr rtlCol="0" anchor="ctr"/>
+          <a:lstStyle/>
+          <a:p>
+            <a:pPr algn="ctr"/>
+          </a:p>
+        </p:txBody>
+      </p:sp>
+      <p:sp>
+        <p:nvSpPr>
+          <p:cNvPr id="19" name="Rounded Rectangle 18"/>
+          <p:cNvSpPr/>
+          <p:nvPr/>
+        </p:nvSpPr>
+        <p:spPr>
+          <a:xfrm>
+            <a:off x="594360" y="5394960"/>
+            <a:ext cx="438912" cy="438912"/>
+          </a:xfrm>
+          <a:prstGeom prst="roundRect">
+            <a:avLst>
+              <a:gd name="adj" fmla="val 12000"/>
+            </a:avLst>
+          </a:prstGeom>
+          <a:solidFill>
+            <a:srgbClr val="095292"/>
+          </a:solidFill>
+          <a:ln>
+            <a:noFill/>
+          </a:ln>
+        </p:spPr>
+        <p:style>
+          <a:lnRef idx="1">
+            <a:schemeClr val="accent1"/>
+          </a:lnRef>
+          <a:fillRef idx="3">
+            <a:schemeClr val="accent1"/>
+          </a:fillRef>
+          <a:effectRef idx="2">
+            <a:schemeClr val="accent1"/>
+          </a:effectRef>
+          <a:fontRef idx="minor">
+            <a:schemeClr val="lt1"/>
+          </a:fontRef>
+        </p:style>
+        <p:txBody>
+          <a:bodyPr rtlCol="0" anchor="ctr"/>
+          <a:lstStyle/>
+          <a:p>
+            <a:pPr algn="ctr"/>
+          </a:p>
+        </p:txBody>
+      </p:sp>
+      <p:sp>
+        <p:nvSpPr>
+          <p:cNvPr id="20" name="TextBox 19"/>
+          <p:cNvSpPr txBox="1"/>
+          <p:nvPr/>
+        </p:nvSpPr>
+        <p:spPr>
+          <a:xfrm>
+            <a:off x="594360" y="5394960"/>
+            <a:ext cx="438912" cy="438912"/>
+          </a:xfrm>
+          <a:prstGeom prst="rect">
+            <a:avLst/>
+          </a:prstGeom>
+          <a:noFill/>
+        </p:spPr>
+        <p:txBody>
+          <a:bodyPr wrap="square" anchor="ctr"/>
+          <a:lstStyle/>
+          <a:p>
+            <a:pPr algn="ctr"/>
+            <a:r>
+              <a:rPr sz="1600" b="1" i="0">
+                <a:solidFill>
+                  <a:srgbClr val="FFFFFF"/>
+                </a:solidFill>
+                <a:latin typeface="Calibri"/>
+              </a:rPr>
+              <a:t>4</a:t>
+            </a:r>
+          </a:p>
+        </p:txBody>
+      </p:sp>
+      <p:sp>
+        <p:nvSpPr>
+          <p:cNvPr id="21" name="TextBox 20"/>
+          <p:cNvSpPr txBox="1"/>
+          <p:nvPr/>
+        </p:nvSpPr>
+        <p:spPr>
+          <a:xfrm>
+            <a:off x="1188720" y="5180076"/>
+            <a:ext cx="10271455" cy="886968"/>
+          </a:xfrm>
+          <a:prstGeom prst="rect">
+            <a:avLst/>
+          </a:prstGeom>
+          <a:noFill/>
+        </p:spPr>
+        <p:txBody>
+          <a:bodyPr wrap="square" anchor="ctr"/>
+          <a:lstStyle/>
+          <a:p>
+            <a:r>
+              <a:rPr sz="1500" b="1" i="0">
+                <a:solidFill>
+                  <a:srgbClr val="095292"/>
+                </a:solidFill>
+                <a:latin typeface="Calibri"/>
+              </a:rPr>
+              <a:t>Guarda el PNG para tu PI</a:t>
             </a:r>
           </a:p>
           <a:p>
             <a:pPr>
-              <a:spcAft>
-                <a:spcPts val="800"/>
-              </a:spcAft>
+              <a:spcBef>
+                <a:spcPts val="200"/>
+              </a:spcBef>
             </a:pPr>
             <a:r>
-              <a:rPr sz="2000" b="0" i="0">
+              <a:rPr sz="1300" b="0" i="0">
                 <a:solidFill>
                   <a:srgbClr val="333333"/>
                 </a:solidFill>
                 <a:latin typeface="Calibri"/>
               </a:rPr>
-              <a:t>–   Herramienta: </a:t>
-            </a:r>
-            <a:r>
-              <a:rPr sz="2000" b="1" i="0">
-                <a:solidFill>
-                  <a:srgbClr val="333333"/>
-                </a:solidFill>
-                <a:latin typeface="Calibri"/>
-              </a:rPr>
-              <a:t>draw.io · GitHub · Google Docs</a:t>
-            </a:r>
-          </a:p>
-          <a:p>
-            <a:pPr>
-              <a:spcAft>
-                <a:spcPts val="800"/>
-              </a:spcAft>
-            </a:pPr>
-            <a:r>
-              <a:rPr sz="2000" b="0" i="0">
-                <a:solidFill>
-                  <a:srgbClr val="333333"/>
-                </a:solidFill>
-                <a:latin typeface="Calibri"/>
-              </a:rPr>
-              <a:t>–   Todo lo que construyan hoy entra al </a:t>
-            </a:r>
-            <a:r>
-              <a:rPr sz="2000" b="1" i="0">
-                <a:solidFill>
-                  <a:srgbClr val="333333"/>
-                </a:solidFill>
-                <a:latin typeface="Calibri"/>
-              </a:rPr>
-              <a:t>informe/repo del PI</a:t>
-            </a:r>
-            <a:r>
-              <a:rPr sz="2000" b="0" i="0">
-                <a:solidFill>
-                  <a:srgbClr val="333333"/>
-                </a:solidFill>
-                <a:latin typeface="Calibri"/>
-              </a:rPr>
-              <a:t> (no es lab suelto).</a:t>
-            </a:r>
-          </a:p>
-          <a:p>
-            <a:pPr>
-              <a:spcAft>
-                <a:spcPts val="800"/>
-              </a:spcAft>
-            </a:pPr>
-            <a:r>
-              <a:rPr sz="2000" b="0" i="0">
-                <a:solidFill>
-                  <a:srgbClr val="333333"/>
-                </a:solidFill>
-                <a:latin typeface="Calibri"/>
-              </a:rPr>
-              <a:t>–   Individual por defecto · el docente puede autorizar equipos de 2–3; la entrega en la plataforma del curso siempre es individual.</a:t>
-            </a:r>
-          </a:p>
-        </p:txBody>
-      </p:sp>
-      <p:sp>
-        <p:nvSpPr>
-          <p:cNvPr id="6" name="TextBox 5"/>
+              <a:t>Exporta tambien la imagen a la carpeta de tu Proyecto Integrador. Esa copia es para tu informe; no reemplaza la respuesta en la plataforma.</a:t>
+            </a:r>
+          </a:p>
+        </p:txBody>
+      </p:sp>
+      <p:sp>
+        <p:nvSpPr>
+          <p:cNvPr id="22" name="TextBox 21"/>
           <p:cNvSpPr txBox="1"/>
           <p:nvPr/>
         </p:nvSpPr>
@@ -9315,7 +9599,7 @@
                 </a:solidFill>
                 <a:latin typeface="Calibri"/>
               </a:rPr>
-              <a:t>Manos a la obra (paso a paso)</a:t>
+              <a:t>PI CloudLite — entregable de hoy</a:t>
             </a:r>
           </a:p>
         </p:txBody>
@@ -9348,22 +9632,31 @@
               </a:spcAft>
             </a:pPr>
             <a:r>
-              <a:rPr sz="1700" b="1" i="0">
+              <a:rPr sz="2000" b="0" i="0">
                 <a:solidFill>
                   <a:srgbClr val="333333"/>
                 </a:solidFill>
                 <a:latin typeface="Calibri"/>
               </a:rPr>
-              <a:t>1.</a:t>
-            </a:r>
-            <a:r>
-              <a:rPr sz="1700" b="0" i="0">
+              <a:t>–   </a:t>
+            </a:r>
+            <a:r>
+              <a:rPr sz="2000" b="1" i="0">
                 <a:solidFill>
                   <a:srgbClr val="333333"/>
                 </a:solidFill>
                 <a:latin typeface="Calibri"/>
               </a:rPr>
-              <a:t> Paso 1: completen el checklist de 10 filas del paquete v1 marcando cada evidencia como si, no o parcial y pegando la ruta o el enlace exacto de cada una, verificando que ninguna fila marcada como si quede sin ruta verificable, porque una fila sin enlace se califica como no.</a:t>
+              <a:t>Entregable:</a:t>
+            </a:r>
+            <a:r>
+              <a:rPr sz="2000" b="0" i="0">
+                <a:solidFill>
+                  <a:srgbClr val="333333"/>
+                </a:solidFill>
+                <a:latin typeface="Calibri"/>
+              </a:rPr>
+              <a:t> Paquete v1: Context + Containers + Deployment + Dockerfile + Actions + informe 60%+</a:t>
             </a:r>
           </a:p>
           <a:p>
@@ -9373,31 +9666,22 @@
               </a:spcAft>
             </a:pPr>
             <a:r>
-              <a:rPr sz="1700" b="0" i="0">
+              <a:rPr sz="2000" b="0" i="0">
                 <a:solidFill>
                   <a:srgbClr val="333333"/>
                 </a:solidFill>
                 <a:latin typeface="Calibri"/>
               </a:rPr>
-              <a:t>–   </a:t>
-            </a:r>
-            <a:r>
-              <a:rPr sz="1700" b="1" i="0">
+              <a:t>–   Herramienta: </a:t>
+            </a:r>
+            <a:r>
+              <a:rPr sz="2000" b="1" i="0">
                 <a:solidFill>
                   <a:srgbClr val="333333"/>
                 </a:solidFill>
                 <a:latin typeface="Calibri"/>
               </a:rPr>
-              <a:t>2.</a:t>
-            </a:r>
-            <a:r>
-              <a:rPr sz="1700" b="0" i="0">
-                <a:solidFill>
-                  <a:srgbClr val="333333"/>
-                </a:solidFill>
-                <a:latin typeface="Calibri"/>
-              </a:rPr>
-              <a:t> Paso 2: hagan la reconciliacion de nombres llenando la tabla de 5 filas que compara como se llama cada elemento en el C4Container, en el C4Deployment, en el Dockerfile o el ci.yml y en el informe, verificando que la columna de nombre canonico sea identica en las cuatro y aplicando la correccion en el artefacto que este desalineado.</a:t>
+              <a:t>draw.io · GitHub · Google Docs</a:t>
             </a:r>
           </a:p>
           <a:p>
@@ -9407,31 +9691,31 @@
               </a:spcAft>
             </a:pPr>
             <a:r>
-              <a:rPr sz="1700" b="0" i="0">
+              <a:rPr sz="2000" b="0" i="0">
                 <a:solidFill>
                   <a:srgbClr val="333333"/>
                 </a:solidFill>
                 <a:latin typeface="Calibri"/>
               </a:rPr>
-              <a:t>–   </a:t>
-            </a:r>
-            <a:r>
-              <a:rPr sz="1700" b="1" i="0">
+              <a:t>–   Todo lo que construyan hoy entra al </a:t>
+            </a:r>
+            <a:r>
+              <a:rPr sz="2000" b="1" i="0">
                 <a:solidFill>
                   <a:srgbClr val="333333"/>
                 </a:solidFill>
                 <a:latin typeface="Calibri"/>
               </a:rPr>
-              <a:t>3.</a:t>
-            </a:r>
-            <a:r>
-              <a:rPr sz="1700" b="0" i="0">
+              <a:t>informe/repo del PI</a:t>
+            </a:r>
+            <a:r>
+              <a:rPr sz="2000" b="0" i="0">
                 <a:solidFill>
                   <a:srgbClr val="333333"/>
                 </a:solidFill>
                 <a:latin typeface="Calibri"/>
               </a:rPr>
-              <a:t> Paso 3: escriban en la plataforma del curso el diagrama C4Component del interior de la API con 5 componentes y sus relaciones hacia la base de datos, la cola y el proveedor de identidad, verificando al renderizar que ningun componente sea un contenedor de la Clase 4 disfrazado y que el contenedor contenedor de la frontera se llame igual que en el C4Container.</a:t>
+              <a:t> (no es lab suelto).</a:t>
             </a:r>
           </a:p>
           <a:p>
@@ -9441,65 +9725,13 @@
               </a:spcAft>
             </a:pPr>
             <a:r>
-              <a:rPr sz="1700" b="0" i="0">
+              <a:rPr sz="2000" b="0" i="0">
                 <a:solidFill>
                   <a:srgbClr val="333333"/>
                 </a:solidFill>
                 <a:latin typeface="Calibri"/>
               </a:rPr>
-              <a:t>–   </a:t>
-            </a:r>
-            <a:r>
-              <a:rPr sz="1700" b="1" i="0">
-                <a:solidFill>
-                  <a:srgbClr val="333333"/>
-                </a:solidFill>
-                <a:latin typeface="Calibri"/>
-              </a:rPr>
-              <a:t>4.</a:t>
-            </a:r>
-            <a:r>
-              <a:rPr sz="1700" b="0" i="0">
-                <a:solidFill>
-                  <a:srgbClr val="333333"/>
-                </a:solidFill>
-                <a:latin typeface="Calibri"/>
-              </a:rPr>
-              <a:t> Paso 4: escriban el backlog de 5 items priorizados hacia la Clase 12 con hueco detectado, accion, responsable y fecha, verificando que cada item se pueda cerrar en una semana y que al menos uno provenga del feedback del docente recibido hoy en la cola de revision.</a:t>
-            </a:r>
-          </a:p>
-          <a:p>
-            <a:pPr>
-              <a:spcAft>
-                <a:spcPts val="800"/>
-              </a:spcAft>
-            </a:pPr>
-            <a:r>
-              <a:rPr sz="1700" b="0" i="0">
-                <a:solidFill>
-                  <a:srgbClr val="333333"/>
-                </a:solidFill>
-                <a:latin typeface="Calibri"/>
-              </a:rPr>
-              <a:t>–   </a:t>
-            </a:r>
-            <a:r>
-              <a:rPr sz="1700" b="1" i="0">
-                <a:solidFill>
-                  <a:srgbClr val="333333"/>
-                </a:solidFill>
-                <a:latin typeface="Calibri"/>
-              </a:rPr>
-              <a:t>5.</a:t>
-            </a:r>
-            <a:r>
-              <a:rPr sz="1700" b="0" i="0">
-                <a:solidFill>
-                  <a:srgbClr val="333333"/>
-                </a:solidFill>
-                <a:latin typeface="Calibri"/>
-              </a:rPr>
-              <a:t> Paso 5: empaqueten el ZIP o el repositorio con los diagramas, el Dockerfile, el ci.yml y el informe al 60 por ciento, y suban las 5 preguntas a la plataforma del curso (modulo Talleres) antes del en la fecha que indique el docente, verificando que el paquete se pueda abrir en otra maquina y que el informe enlace cada evidencia por su ruta dentro del paquete.</a:t>
+              <a:t>–   Individual por defecto · el docente puede autorizar equipos de 2–3; la entrega en la plataforma del curso siempre es individual.</a:t>
             </a:r>
           </a:p>
         </p:txBody>
@@ -9680,109 +9912,21 @@
                 </a:solidFill>
                 <a:latin typeface="Calibri"/>
               </a:rPr>
-              <a:t>Para continuar (PI)</a:t>
-            </a:r>
-          </a:p>
-        </p:txBody>
-      </p:sp>
-      <p:sp>
-        <p:nvSpPr>
-          <p:cNvPr id="5" name="Rounded Rectangle 4"/>
-          <p:cNvSpPr/>
-          <p:nvPr/>
-        </p:nvSpPr>
-        <p:spPr>
-          <a:xfrm>
-            <a:off x="457200" y="1261872"/>
-            <a:ext cx="11277295" cy="1051560"/>
-          </a:xfrm>
-          <a:prstGeom prst="roundRect">
-            <a:avLst>
-              <a:gd name="adj" fmla="val 12000"/>
-            </a:avLst>
-          </a:prstGeom>
-          <a:solidFill>
-            <a:srgbClr val="E8F4FA"/>
-          </a:solidFill>
-          <a:ln>
-            <a:noFill/>
-          </a:ln>
-        </p:spPr>
-        <p:style>
-          <a:lnRef idx="1">
-            <a:schemeClr val="accent1"/>
-          </a:lnRef>
-          <a:fillRef idx="3">
-            <a:schemeClr val="accent1"/>
-          </a:fillRef>
-          <a:effectRef idx="2">
-            <a:schemeClr val="accent1"/>
-          </a:effectRef>
-          <a:fontRef idx="minor">
-            <a:schemeClr val="lt1"/>
-          </a:fontRef>
-        </p:style>
-        <p:txBody>
-          <a:bodyPr rtlCol="0" anchor="ctr"/>
-          <a:lstStyle/>
-          <a:p>
-            <a:pPr algn="ctr"/>
-          </a:p>
-        </p:txBody>
-      </p:sp>
-      <p:sp>
-        <p:nvSpPr>
-          <p:cNvPr id="6" name="Rectangle 5"/>
-          <p:cNvSpPr/>
-          <p:nvPr/>
-        </p:nvSpPr>
-        <p:spPr>
-          <a:xfrm>
-            <a:off x="457200" y="1261872"/>
-            <a:ext cx="128016" cy="1051560"/>
-          </a:xfrm>
-          <a:prstGeom prst="rect">
-            <a:avLst/>
-          </a:prstGeom>
-          <a:solidFill>
-            <a:srgbClr val="269CCB"/>
-          </a:solidFill>
-          <a:ln>
-            <a:noFill/>
-          </a:ln>
-        </p:spPr>
-        <p:style>
-          <a:lnRef idx="1">
-            <a:schemeClr val="accent1"/>
-          </a:lnRef>
-          <a:fillRef idx="3">
-            <a:schemeClr val="accent1"/>
-          </a:fillRef>
-          <a:effectRef idx="2">
-            <a:schemeClr val="accent1"/>
-          </a:effectRef>
-          <a:fontRef idx="minor">
-            <a:schemeClr val="lt1"/>
-          </a:fontRef>
-        </p:style>
-        <p:txBody>
-          <a:bodyPr rtlCol="0" anchor="ctr"/>
-          <a:lstStyle/>
-          <a:p>
-            <a:pPr algn="ctr"/>
-          </a:p>
-        </p:txBody>
-      </p:sp>
-      <p:sp>
-        <p:nvSpPr>
-          <p:cNvPr id="7" name="TextBox 6"/>
+              <a:t>Manos a la obra (paso a paso)</a:t>
+            </a:r>
+          </a:p>
+        </p:txBody>
+      </p:sp>
+      <p:sp>
+        <p:nvSpPr>
+          <p:cNvPr id="5" name="TextBox 4"/>
           <p:cNvSpPr txBox="1"/>
           <p:nvPr/>
         </p:nvSpPr>
         <p:spPr>
           <a:xfrm>
-            <a:off x="777240" y="1399031"/>
-            <a:ext cx="10774375" cy="822959"/>
+            <a:off x="457200" y="1170432"/>
+            <a:ext cx="11277295" cy="5230368"/>
           </a:xfrm>
           <a:prstGeom prst="rect">
             <a:avLst/>
@@ -9795,313 +9939,171 @@
           </a:bodyPr>
           <a:lstStyle/>
           <a:p>
-            <a:r>
-              <a:rPr sz="1200" b="1" i="0">
-                <a:solidFill>
-                  <a:srgbClr val="269CCB"/>
-                </a:solidFill>
-                <a:latin typeface="Calibri"/>
-              </a:rPr>
-              <a:t>Info</a:t>
-            </a:r>
-          </a:p>
-          <a:p>
             <a:pPr>
-              <a:spcBef>
-                <a:spcPts val="400"/>
-              </a:spcBef>
+              <a:spcAft>
+                <a:spcPts val="800"/>
+              </a:spcAft>
             </a:pPr>
             <a:r>
-              <a:rPr sz="1400" b="0" i="0">
+              <a:rPr sz="1700" b="1" i="0">
                 <a:solidFill>
                   <a:srgbClr val="333333"/>
                 </a:solidFill>
                 <a:latin typeface="Calibri"/>
               </a:rPr>
-              <a:t>Entregable: Paquete v1: Context + Containers + Deployment + Dockerfile + Actions + informe 60%+</a:t>
-            </a:r>
-          </a:p>
-        </p:txBody>
-      </p:sp>
-      <p:sp>
-        <p:nvSpPr>
-          <p:cNvPr id="8" name="Rounded Rectangle 7"/>
-          <p:cNvSpPr/>
-          <p:nvPr/>
-        </p:nvSpPr>
-        <p:spPr>
-          <a:xfrm>
-            <a:off x="457200" y="2478024"/>
-            <a:ext cx="11277295" cy="1051560"/>
-          </a:xfrm>
-          <a:prstGeom prst="roundRect">
-            <a:avLst>
-              <a:gd name="adj" fmla="val 12000"/>
-            </a:avLst>
-          </a:prstGeom>
-          <a:solidFill>
-            <a:srgbClr val="FFF8E1"/>
-          </a:solidFill>
-          <a:ln>
-            <a:noFill/>
-          </a:ln>
-        </p:spPr>
-        <p:style>
-          <a:lnRef idx="1">
-            <a:schemeClr val="accent1"/>
-          </a:lnRef>
-          <a:fillRef idx="3">
-            <a:schemeClr val="accent1"/>
-          </a:fillRef>
-          <a:effectRef idx="2">
-            <a:schemeClr val="accent1"/>
-          </a:effectRef>
-          <a:fontRef idx="minor">
-            <a:schemeClr val="lt1"/>
-          </a:fontRef>
-        </p:style>
-        <p:txBody>
-          <a:bodyPr rtlCol="0" anchor="ctr"/>
-          <a:lstStyle/>
-          <a:p>
-            <a:pPr algn="ctr"/>
-          </a:p>
-        </p:txBody>
-      </p:sp>
-      <p:sp>
-        <p:nvSpPr>
-          <p:cNvPr id="9" name="Rectangle 8"/>
-          <p:cNvSpPr/>
-          <p:nvPr/>
-        </p:nvSpPr>
-        <p:spPr>
-          <a:xfrm>
-            <a:off x="457200" y="2478024"/>
-            <a:ext cx="128016" cy="1051560"/>
-          </a:xfrm>
-          <a:prstGeom prst="rect">
-            <a:avLst/>
-          </a:prstGeom>
-          <a:solidFill>
-            <a:srgbClr val="FFD000"/>
-          </a:solidFill>
-          <a:ln>
-            <a:noFill/>
-          </a:ln>
-        </p:spPr>
-        <p:style>
-          <a:lnRef idx="1">
-            <a:schemeClr val="accent1"/>
-          </a:lnRef>
-          <a:fillRef idx="3">
-            <a:schemeClr val="accent1"/>
-          </a:fillRef>
-          <a:effectRef idx="2">
-            <a:schemeClr val="accent1"/>
-          </a:effectRef>
-          <a:fontRef idx="minor">
-            <a:schemeClr val="lt1"/>
-          </a:fontRef>
-        </p:style>
-        <p:txBody>
-          <a:bodyPr rtlCol="0" anchor="ctr"/>
-          <a:lstStyle/>
-          <a:p>
-            <a:pPr algn="ctr"/>
-          </a:p>
-        </p:txBody>
-      </p:sp>
-      <p:sp>
-        <p:nvSpPr>
-          <p:cNvPr id="10" name="TextBox 9"/>
-          <p:cNvSpPr txBox="1"/>
-          <p:nvPr/>
-        </p:nvSpPr>
-        <p:spPr>
-          <a:xfrm>
-            <a:off x="777240" y="2615184"/>
-            <a:ext cx="10774375" cy="822959"/>
-          </a:xfrm>
-          <a:prstGeom prst="rect">
-            <a:avLst/>
-          </a:prstGeom>
-          <a:noFill/>
-        </p:spPr>
-        <p:txBody>
-          <a:bodyPr wrap="square">
-            <a:spAutoFit/>
-          </a:bodyPr>
-          <a:lstStyle/>
-          <a:p>
-            <a:r>
-              <a:rPr sz="1200" b="1" i="0">
-                <a:solidFill>
-                  <a:srgbClr val="FFD000"/>
-                </a:solidFill>
-                <a:latin typeface="Calibri"/>
-              </a:rPr>
-              <a:t>Aclaración</a:t>
+              <a:t>1.</a:t>
+            </a:r>
+            <a:r>
+              <a:rPr sz="1700" b="0" i="0">
+                <a:solidFill>
+                  <a:srgbClr val="333333"/>
+                </a:solidFill>
+                <a:latin typeface="Calibri"/>
+              </a:rPr>
+              <a:t> Paso 1: completen el checklist de 10 filas del paquete v1 marcando cada evidencia como si, no o parcial y pegando la ruta o el enlace exacto de cada una, verificando que ninguna fila marcada como si quede sin ruta verificable, porque una fila sin enlace se califica como no.</a:t>
             </a:r>
           </a:p>
           <a:p>
             <a:pPr>
-              <a:spcBef>
-                <a:spcPts val="400"/>
-              </a:spcBef>
+              <a:spcAft>
+                <a:spcPts val="800"/>
+              </a:spcAft>
             </a:pPr>
             <a:r>
-              <a:rPr sz="1400" b="0" i="0">
+              <a:rPr sz="1700" b="0" i="0">
                 <a:solidFill>
                   <a:srgbClr val="333333"/>
                 </a:solidFill>
                 <a:latin typeface="Calibri"/>
               </a:rPr>
-              <a:t>Subir evidencias al paquete CloudLite (Drive/repo) y a la plataforma del curso en la fecha que indique el docente.</a:t>
-            </a:r>
-          </a:p>
-        </p:txBody>
-      </p:sp>
-      <p:sp>
-        <p:nvSpPr>
-          <p:cNvPr id="11" name="Rounded Rectangle 10"/>
-          <p:cNvSpPr/>
-          <p:nvPr/>
-        </p:nvSpPr>
-        <p:spPr>
-          <a:xfrm>
-            <a:off x="457200" y="3694176"/>
-            <a:ext cx="11277295" cy="1051560"/>
-          </a:xfrm>
-          <a:prstGeom prst="roundRect">
-            <a:avLst>
-              <a:gd name="adj" fmla="val 12000"/>
-            </a:avLst>
-          </a:prstGeom>
-          <a:solidFill>
-            <a:srgbClr val="FBE4E4"/>
-          </a:solidFill>
-          <a:ln>
-            <a:noFill/>
-          </a:ln>
-        </p:spPr>
-        <p:style>
-          <a:lnRef idx="1">
-            <a:schemeClr val="accent1"/>
-          </a:lnRef>
-          <a:fillRef idx="3">
-            <a:schemeClr val="accent1"/>
-          </a:fillRef>
-          <a:effectRef idx="2">
-            <a:schemeClr val="accent1"/>
-          </a:effectRef>
-          <a:fontRef idx="minor">
-            <a:schemeClr val="lt1"/>
-          </a:fontRef>
-        </p:style>
-        <p:txBody>
-          <a:bodyPr rtlCol="0" anchor="ctr"/>
-          <a:lstStyle/>
-          <a:p>
-            <a:pPr algn="ctr"/>
-          </a:p>
-        </p:txBody>
-      </p:sp>
-      <p:sp>
-        <p:nvSpPr>
-          <p:cNvPr id="12" name="Rectangle 11"/>
-          <p:cNvSpPr/>
-          <p:nvPr/>
-        </p:nvSpPr>
-        <p:spPr>
-          <a:xfrm>
-            <a:off x="457200" y="3694176"/>
-            <a:ext cx="128016" cy="1051560"/>
-          </a:xfrm>
-          <a:prstGeom prst="rect">
-            <a:avLst/>
-          </a:prstGeom>
-          <a:solidFill>
-            <a:srgbClr val="A02030"/>
-          </a:solidFill>
-          <a:ln>
-            <a:noFill/>
-          </a:ln>
-        </p:spPr>
-        <p:style>
-          <a:lnRef idx="1">
-            <a:schemeClr val="accent1"/>
-          </a:lnRef>
-          <a:fillRef idx="3">
-            <a:schemeClr val="accent1"/>
-          </a:fillRef>
-          <a:effectRef idx="2">
-            <a:schemeClr val="accent1"/>
-          </a:effectRef>
-          <a:fontRef idx="minor">
-            <a:schemeClr val="lt1"/>
-          </a:fontRef>
-        </p:style>
-        <p:txBody>
-          <a:bodyPr rtlCol="0" anchor="ctr"/>
-          <a:lstStyle/>
-          <a:p>
-            <a:pPr algn="ctr"/>
-          </a:p>
-        </p:txBody>
-      </p:sp>
-      <p:sp>
-        <p:nvSpPr>
-          <p:cNvPr id="13" name="TextBox 12"/>
-          <p:cNvSpPr txBox="1"/>
-          <p:nvPr/>
-        </p:nvSpPr>
-        <p:spPr>
-          <a:xfrm>
-            <a:off x="777240" y="3831336"/>
-            <a:ext cx="10774375" cy="822959"/>
-          </a:xfrm>
-          <a:prstGeom prst="rect">
-            <a:avLst/>
-          </a:prstGeom>
-          <a:noFill/>
-        </p:spPr>
-        <p:txBody>
-          <a:bodyPr wrap="square">
-            <a:spAutoFit/>
-          </a:bodyPr>
-          <a:lstStyle/>
-          <a:p>
-            <a:r>
-              <a:rPr sz="1200" b="1" i="0">
-                <a:solidFill>
-                  <a:srgbClr val="A02030"/>
-                </a:solidFill>
-                <a:latin typeface="Calibri"/>
-              </a:rPr>
-              <a:t>Atención</a:t>
+              <a:t>–   </a:t>
+            </a:r>
+            <a:r>
+              <a:rPr sz="1700" b="1" i="0">
+                <a:solidFill>
+                  <a:srgbClr val="333333"/>
+                </a:solidFill>
+                <a:latin typeface="Calibri"/>
+              </a:rPr>
+              <a:t>2.</a:t>
+            </a:r>
+            <a:r>
+              <a:rPr sz="1700" b="0" i="0">
+                <a:solidFill>
+                  <a:srgbClr val="333333"/>
+                </a:solidFill>
+                <a:latin typeface="Calibri"/>
+              </a:rPr>
+              <a:t> Paso 2: hagan la reconciliacion de nombres llenando la tabla de 5 filas que compara como se llama cada elemento en el C4Container, en el C4Deployment, en el Dockerfile o el ci.yml y en el informe, verificando que la columna de nombre canonico sea identica en las cuatro y aplicando la correccion en el artefacto que este desalineado.</a:t>
             </a:r>
           </a:p>
           <a:p>
             <a:pPr>
-              <a:spcBef>
-                <a:spcPts val="400"/>
-              </a:spcBef>
+              <a:spcAft>
+                <a:spcPts val="800"/>
+              </a:spcAft>
             </a:pPr>
             <a:r>
-              <a:rPr sz="1400" b="0" i="0">
+              <a:rPr sz="1700" b="0" i="0">
                 <a:solidFill>
                   <a:srgbClr val="333333"/>
                 </a:solidFill>
                 <a:latin typeface="Calibri"/>
               </a:rPr>
-              <a:t>Sin cloud de pago ni instalaciones obligatorias de hipervisores/Docker Desktop.</a:t>
-            </a:r>
-          </a:p>
-        </p:txBody>
-      </p:sp>
-      <p:sp>
-        <p:nvSpPr>
-          <p:cNvPr id="14" name="TextBox 13"/>
+              <a:t>–   </a:t>
+            </a:r>
+            <a:r>
+              <a:rPr sz="1700" b="1" i="0">
+                <a:solidFill>
+                  <a:srgbClr val="333333"/>
+                </a:solidFill>
+                <a:latin typeface="Calibri"/>
+              </a:rPr>
+              <a:t>3.</a:t>
+            </a:r>
+            <a:r>
+              <a:rPr sz="1700" b="0" i="0">
+                <a:solidFill>
+                  <a:srgbClr val="333333"/>
+                </a:solidFill>
+                <a:latin typeface="Calibri"/>
+              </a:rPr>
+              <a:t> Paso 3: escriban en la plataforma del curso el diagrama C4Component del interior de la API con 5 componentes y sus relaciones hacia la base de datos, la cola y el proveedor de identidad, verificando al renderizar que ningun componente sea un contenedor de la Clase 4 disfrazado y que el contenedor contenedor de la frontera se llame igual que en el C4Container.</a:t>
+            </a:r>
+          </a:p>
+          <a:p>
+            <a:pPr>
+              <a:spcAft>
+                <a:spcPts val="800"/>
+              </a:spcAft>
+            </a:pPr>
+            <a:r>
+              <a:rPr sz="1700" b="0" i="0">
+                <a:solidFill>
+                  <a:srgbClr val="333333"/>
+                </a:solidFill>
+                <a:latin typeface="Calibri"/>
+              </a:rPr>
+              <a:t>–   </a:t>
+            </a:r>
+            <a:r>
+              <a:rPr sz="1700" b="1" i="0">
+                <a:solidFill>
+                  <a:srgbClr val="333333"/>
+                </a:solidFill>
+                <a:latin typeface="Calibri"/>
+              </a:rPr>
+              <a:t>4.</a:t>
+            </a:r>
+            <a:r>
+              <a:rPr sz="1700" b="0" i="0">
+                <a:solidFill>
+                  <a:srgbClr val="333333"/>
+                </a:solidFill>
+                <a:latin typeface="Calibri"/>
+              </a:rPr>
+              <a:t> Paso 4: escriban el backlog de 5 items priorizados hacia la Clase 12 con hueco detectado, accion, responsable y fecha, verificando que cada item se pueda cerrar en una semana y que al menos uno provenga del feedback del docente recibido hoy en la cola de revision.</a:t>
+            </a:r>
+          </a:p>
+          <a:p>
+            <a:pPr>
+              <a:spcAft>
+                <a:spcPts val="800"/>
+              </a:spcAft>
+            </a:pPr>
+            <a:r>
+              <a:rPr sz="1700" b="0" i="0">
+                <a:solidFill>
+                  <a:srgbClr val="333333"/>
+                </a:solidFill>
+                <a:latin typeface="Calibri"/>
+              </a:rPr>
+              <a:t>–   </a:t>
+            </a:r>
+            <a:r>
+              <a:rPr sz="1700" b="1" i="0">
+                <a:solidFill>
+                  <a:srgbClr val="333333"/>
+                </a:solidFill>
+                <a:latin typeface="Calibri"/>
+              </a:rPr>
+              <a:t>5.</a:t>
+            </a:r>
+            <a:r>
+              <a:rPr sz="1700" b="0" i="0">
+                <a:solidFill>
+                  <a:srgbClr val="333333"/>
+                </a:solidFill>
+                <a:latin typeface="Calibri"/>
+              </a:rPr>
+              <a:t> Paso 5: empaqueten el ZIP o el repositorio con los diagramas, el Dockerfile, el ci.yml y el informe al 60 por ciento, y suban las 5 preguntas a la plataforma del curso (modulo Talleres) antes del en la fecha que indique el docente, verificando que el paquete se pueda abrir en otra maquina y que el informe enlace cada evidencia por su ruta dentro del paquete.</a:t>
+            </a:r>
+          </a:p>
+        </p:txBody>
+      </p:sp>
+      <p:sp>
+        <p:nvSpPr>
+          <p:cNvPr id="6" name="TextBox 5"/>
           <p:cNvSpPr txBox="1"/>
           <p:nvPr/>
         </p:nvSpPr>
@@ -10143,6 +10145,601 @@
 </file>
 
 <file path=ppt/slides/slide26.xml><?xml version="1.0" encoding="utf-8"?>
+<p:sld xmlns:a="http://schemas.openxmlformats.org/drawingml/2006/main" xmlns:p="http://schemas.openxmlformats.org/presentationml/2006/main" xmlns:r="http://schemas.openxmlformats.org/officeDocument/2006/relationships">
+  <p:cSld>
+    <p:bg>
+      <p:bgPr>
+        <a:solidFill>
+          <a:srgbClr val="FFFFFF"/>
+        </a:solidFill>
+        <a:effectLst/>
+      </p:bgPr>
+    </p:bg>
+    <p:spTree>
+      <p:nvGrpSpPr>
+        <p:cNvPr id="1" name=""/>
+        <p:cNvGrpSpPr/>
+        <p:nvPr/>
+      </p:nvGrpSpPr>
+      <p:grpSpPr/>
+      <p:sp>
+        <p:nvSpPr>
+          <p:cNvPr id="2" name="Rectangle 1"/>
+          <p:cNvSpPr/>
+          <p:nvPr/>
+        </p:nvSpPr>
+        <p:spPr>
+          <a:xfrm>
+            <a:off x="0" y="0"/>
+            <a:ext cx="12191695" cy="960120"/>
+          </a:xfrm>
+          <a:prstGeom prst="rect">
+            <a:avLst/>
+          </a:prstGeom>
+          <a:solidFill>
+            <a:srgbClr val="095292"/>
+          </a:solidFill>
+          <a:ln>
+            <a:noFill/>
+          </a:ln>
+        </p:spPr>
+        <p:style>
+          <a:lnRef idx="1">
+            <a:schemeClr val="accent1"/>
+          </a:lnRef>
+          <a:fillRef idx="3">
+            <a:schemeClr val="accent1"/>
+          </a:fillRef>
+          <a:effectRef idx="2">
+            <a:schemeClr val="accent1"/>
+          </a:effectRef>
+          <a:fontRef idx="minor">
+            <a:schemeClr val="lt1"/>
+          </a:fontRef>
+        </p:style>
+        <p:txBody>
+          <a:bodyPr rtlCol="0" anchor="ctr"/>
+          <a:lstStyle/>
+          <a:p>
+            <a:pPr algn="ctr"/>
+          </a:p>
+        </p:txBody>
+      </p:sp>
+      <p:sp>
+        <p:nvSpPr>
+          <p:cNvPr id="3" name="Rectangle 2"/>
+          <p:cNvSpPr/>
+          <p:nvPr/>
+        </p:nvSpPr>
+        <p:spPr>
+          <a:xfrm>
+            <a:off x="0" y="960120"/>
+            <a:ext cx="12191695" cy="41148"/>
+          </a:xfrm>
+          <a:prstGeom prst="rect">
+            <a:avLst/>
+          </a:prstGeom>
+          <a:solidFill>
+            <a:srgbClr val="FFD000"/>
+          </a:solidFill>
+          <a:ln>
+            <a:noFill/>
+          </a:ln>
+        </p:spPr>
+        <p:style>
+          <a:lnRef idx="1">
+            <a:schemeClr val="accent1"/>
+          </a:lnRef>
+          <a:fillRef idx="3">
+            <a:schemeClr val="accent1"/>
+          </a:fillRef>
+          <a:effectRef idx="2">
+            <a:schemeClr val="accent1"/>
+          </a:effectRef>
+          <a:fontRef idx="minor">
+            <a:schemeClr val="lt1"/>
+          </a:fontRef>
+        </p:style>
+        <p:txBody>
+          <a:bodyPr rtlCol="0" anchor="ctr"/>
+          <a:lstStyle/>
+          <a:p>
+            <a:pPr algn="ctr"/>
+          </a:p>
+        </p:txBody>
+      </p:sp>
+      <p:sp>
+        <p:nvSpPr>
+          <p:cNvPr id="4" name="TextBox 3"/>
+          <p:cNvSpPr txBox="1"/>
+          <p:nvPr/>
+        </p:nvSpPr>
+        <p:spPr>
+          <a:xfrm>
+            <a:off x="457200" y="164592"/>
+            <a:ext cx="11277295" cy="502920"/>
+          </a:xfrm>
+          <a:prstGeom prst="rect">
+            <a:avLst/>
+          </a:prstGeom>
+          <a:noFill/>
+        </p:spPr>
+        <p:txBody>
+          <a:bodyPr wrap="square">
+            <a:spAutoFit/>
+          </a:bodyPr>
+          <a:lstStyle/>
+          <a:p>
+            <a:r>
+              <a:rPr sz="2600" b="1" i="0">
+                <a:solidFill>
+                  <a:srgbClr val="FFFFFF"/>
+                </a:solidFill>
+                <a:latin typeface="Calibri"/>
+              </a:rPr>
+              <a:t>Para continuar (PI)</a:t>
+            </a:r>
+          </a:p>
+        </p:txBody>
+      </p:sp>
+      <p:sp>
+        <p:nvSpPr>
+          <p:cNvPr id="5" name="Rounded Rectangle 4"/>
+          <p:cNvSpPr/>
+          <p:nvPr/>
+        </p:nvSpPr>
+        <p:spPr>
+          <a:xfrm>
+            <a:off x="457200" y="1261872"/>
+            <a:ext cx="11277295" cy="1051560"/>
+          </a:xfrm>
+          <a:prstGeom prst="roundRect">
+            <a:avLst>
+              <a:gd name="adj" fmla="val 12000"/>
+            </a:avLst>
+          </a:prstGeom>
+          <a:solidFill>
+            <a:srgbClr val="E8F4FA"/>
+          </a:solidFill>
+          <a:ln>
+            <a:noFill/>
+          </a:ln>
+        </p:spPr>
+        <p:style>
+          <a:lnRef idx="1">
+            <a:schemeClr val="accent1"/>
+          </a:lnRef>
+          <a:fillRef idx="3">
+            <a:schemeClr val="accent1"/>
+          </a:fillRef>
+          <a:effectRef idx="2">
+            <a:schemeClr val="accent1"/>
+          </a:effectRef>
+          <a:fontRef idx="minor">
+            <a:schemeClr val="lt1"/>
+          </a:fontRef>
+        </p:style>
+        <p:txBody>
+          <a:bodyPr rtlCol="0" anchor="ctr"/>
+          <a:lstStyle/>
+          <a:p>
+            <a:pPr algn="ctr"/>
+          </a:p>
+        </p:txBody>
+      </p:sp>
+      <p:sp>
+        <p:nvSpPr>
+          <p:cNvPr id="6" name="Rectangle 5"/>
+          <p:cNvSpPr/>
+          <p:nvPr/>
+        </p:nvSpPr>
+        <p:spPr>
+          <a:xfrm>
+            <a:off x="457200" y="1261872"/>
+            <a:ext cx="128016" cy="1051560"/>
+          </a:xfrm>
+          <a:prstGeom prst="rect">
+            <a:avLst/>
+          </a:prstGeom>
+          <a:solidFill>
+            <a:srgbClr val="269CCB"/>
+          </a:solidFill>
+          <a:ln>
+            <a:noFill/>
+          </a:ln>
+        </p:spPr>
+        <p:style>
+          <a:lnRef idx="1">
+            <a:schemeClr val="accent1"/>
+          </a:lnRef>
+          <a:fillRef idx="3">
+            <a:schemeClr val="accent1"/>
+          </a:fillRef>
+          <a:effectRef idx="2">
+            <a:schemeClr val="accent1"/>
+          </a:effectRef>
+          <a:fontRef idx="minor">
+            <a:schemeClr val="lt1"/>
+          </a:fontRef>
+        </p:style>
+        <p:txBody>
+          <a:bodyPr rtlCol="0" anchor="ctr"/>
+          <a:lstStyle/>
+          <a:p>
+            <a:pPr algn="ctr"/>
+          </a:p>
+        </p:txBody>
+      </p:sp>
+      <p:sp>
+        <p:nvSpPr>
+          <p:cNvPr id="7" name="TextBox 6"/>
+          <p:cNvSpPr txBox="1"/>
+          <p:nvPr/>
+        </p:nvSpPr>
+        <p:spPr>
+          <a:xfrm>
+            <a:off x="777240" y="1399031"/>
+            <a:ext cx="10774375" cy="822959"/>
+          </a:xfrm>
+          <a:prstGeom prst="rect">
+            <a:avLst/>
+          </a:prstGeom>
+          <a:noFill/>
+        </p:spPr>
+        <p:txBody>
+          <a:bodyPr wrap="square">
+            <a:spAutoFit/>
+          </a:bodyPr>
+          <a:lstStyle/>
+          <a:p>
+            <a:r>
+              <a:rPr sz="1200" b="1" i="0">
+                <a:solidFill>
+                  <a:srgbClr val="269CCB"/>
+                </a:solidFill>
+                <a:latin typeface="Calibri"/>
+              </a:rPr>
+              <a:t>Info</a:t>
+            </a:r>
+          </a:p>
+          <a:p>
+            <a:pPr>
+              <a:spcBef>
+                <a:spcPts val="400"/>
+              </a:spcBef>
+            </a:pPr>
+            <a:r>
+              <a:rPr sz="1400" b="0" i="0">
+                <a:solidFill>
+                  <a:srgbClr val="333333"/>
+                </a:solidFill>
+                <a:latin typeface="Calibri"/>
+              </a:rPr>
+              <a:t>Entregable: Paquete v1: Context + Containers + Deployment + Dockerfile + Actions + informe 60%+</a:t>
+            </a:r>
+          </a:p>
+        </p:txBody>
+      </p:sp>
+      <p:sp>
+        <p:nvSpPr>
+          <p:cNvPr id="8" name="Rounded Rectangle 7"/>
+          <p:cNvSpPr/>
+          <p:nvPr/>
+        </p:nvSpPr>
+        <p:spPr>
+          <a:xfrm>
+            <a:off x="457200" y="2478024"/>
+            <a:ext cx="11277295" cy="1051560"/>
+          </a:xfrm>
+          <a:prstGeom prst="roundRect">
+            <a:avLst>
+              <a:gd name="adj" fmla="val 12000"/>
+            </a:avLst>
+          </a:prstGeom>
+          <a:solidFill>
+            <a:srgbClr val="FFF8E1"/>
+          </a:solidFill>
+          <a:ln>
+            <a:noFill/>
+          </a:ln>
+        </p:spPr>
+        <p:style>
+          <a:lnRef idx="1">
+            <a:schemeClr val="accent1"/>
+          </a:lnRef>
+          <a:fillRef idx="3">
+            <a:schemeClr val="accent1"/>
+          </a:fillRef>
+          <a:effectRef idx="2">
+            <a:schemeClr val="accent1"/>
+          </a:effectRef>
+          <a:fontRef idx="minor">
+            <a:schemeClr val="lt1"/>
+          </a:fontRef>
+        </p:style>
+        <p:txBody>
+          <a:bodyPr rtlCol="0" anchor="ctr"/>
+          <a:lstStyle/>
+          <a:p>
+            <a:pPr algn="ctr"/>
+          </a:p>
+        </p:txBody>
+      </p:sp>
+      <p:sp>
+        <p:nvSpPr>
+          <p:cNvPr id="9" name="Rectangle 8"/>
+          <p:cNvSpPr/>
+          <p:nvPr/>
+        </p:nvSpPr>
+        <p:spPr>
+          <a:xfrm>
+            <a:off x="457200" y="2478024"/>
+            <a:ext cx="128016" cy="1051560"/>
+          </a:xfrm>
+          <a:prstGeom prst="rect">
+            <a:avLst/>
+          </a:prstGeom>
+          <a:solidFill>
+            <a:srgbClr val="FFD000"/>
+          </a:solidFill>
+          <a:ln>
+            <a:noFill/>
+          </a:ln>
+        </p:spPr>
+        <p:style>
+          <a:lnRef idx="1">
+            <a:schemeClr val="accent1"/>
+          </a:lnRef>
+          <a:fillRef idx="3">
+            <a:schemeClr val="accent1"/>
+          </a:fillRef>
+          <a:effectRef idx="2">
+            <a:schemeClr val="accent1"/>
+          </a:effectRef>
+          <a:fontRef idx="minor">
+            <a:schemeClr val="lt1"/>
+          </a:fontRef>
+        </p:style>
+        <p:txBody>
+          <a:bodyPr rtlCol="0" anchor="ctr"/>
+          <a:lstStyle/>
+          <a:p>
+            <a:pPr algn="ctr"/>
+          </a:p>
+        </p:txBody>
+      </p:sp>
+      <p:sp>
+        <p:nvSpPr>
+          <p:cNvPr id="10" name="TextBox 9"/>
+          <p:cNvSpPr txBox="1"/>
+          <p:nvPr/>
+        </p:nvSpPr>
+        <p:spPr>
+          <a:xfrm>
+            <a:off x="777240" y="2615184"/>
+            <a:ext cx="10774375" cy="822959"/>
+          </a:xfrm>
+          <a:prstGeom prst="rect">
+            <a:avLst/>
+          </a:prstGeom>
+          <a:noFill/>
+        </p:spPr>
+        <p:txBody>
+          <a:bodyPr wrap="square">
+            <a:spAutoFit/>
+          </a:bodyPr>
+          <a:lstStyle/>
+          <a:p>
+            <a:r>
+              <a:rPr sz="1200" b="1" i="0">
+                <a:solidFill>
+                  <a:srgbClr val="FFD000"/>
+                </a:solidFill>
+                <a:latin typeface="Calibri"/>
+              </a:rPr>
+              <a:t>Aclaración</a:t>
+            </a:r>
+          </a:p>
+          <a:p>
+            <a:pPr>
+              <a:spcBef>
+                <a:spcPts val="400"/>
+              </a:spcBef>
+            </a:pPr>
+            <a:r>
+              <a:rPr sz="1400" b="0" i="0">
+                <a:solidFill>
+                  <a:srgbClr val="333333"/>
+                </a:solidFill>
+                <a:latin typeface="Calibri"/>
+              </a:rPr>
+              <a:t>Subir evidencias al paquete CloudLite (Drive/repo) y a la plataforma del curso en la fecha que indique el docente.</a:t>
+            </a:r>
+          </a:p>
+        </p:txBody>
+      </p:sp>
+      <p:sp>
+        <p:nvSpPr>
+          <p:cNvPr id="11" name="Rounded Rectangle 10"/>
+          <p:cNvSpPr/>
+          <p:nvPr/>
+        </p:nvSpPr>
+        <p:spPr>
+          <a:xfrm>
+            <a:off x="457200" y="3694176"/>
+            <a:ext cx="11277295" cy="1051560"/>
+          </a:xfrm>
+          <a:prstGeom prst="roundRect">
+            <a:avLst>
+              <a:gd name="adj" fmla="val 12000"/>
+            </a:avLst>
+          </a:prstGeom>
+          <a:solidFill>
+            <a:srgbClr val="FBE4E4"/>
+          </a:solidFill>
+          <a:ln>
+            <a:noFill/>
+          </a:ln>
+        </p:spPr>
+        <p:style>
+          <a:lnRef idx="1">
+            <a:schemeClr val="accent1"/>
+          </a:lnRef>
+          <a:fillRef idx="3">
+            <a:schemeClr val="accent1"/>
+          </a:fillRef>
+          <a:effectRef idx="2">
+            <a:schemeClr val="accent1"/>
+          </a:effectRef>
+          <a:fontRef idx="minor">
+            <a:schemeClr val="lt1"/>
+          </a:fontRef>
+        </p:style>
+        <p:txBody>
+          <a:bodyPr rtlCol="0" anchor="ctr"/>
+          <a:lstStyle/>
+          <a:p>
+            <a:pPr algn="ctr"/>
+          </a:p>
+        </p:txBody>
+      </p:sp>
+      <p:sp>
+        <p:nvSpPr>
+          <p:cNvPr id="12" name="Rectangle 11"/>
+          <p:cNvSpPr/>
+          <p:nvPr/>
+        </p:nvSpPr>
+        <p:spPr>
+          <a:xfrm>
+            <a:off x="457200" y="3694176"/>
+            <a:ext cx="128016" cy="1051560"/>
+          </a:xfrm>
+          <a:prstGeom prst="rect">
+            <a:avLst/>
+          </a:prstGeom>
+          <a:solidFill>
+            <a:srgbClr val="A02030"/>
+          </a:solidFill>
+          <a:ln>
+            <a:noFill/>
+          </a:ln>
+        </p:spPr>
+        <p:style>
+          <a:lnRef idx="1">
+            <a:schemeClr val="accent1"/>
+          </a:lnRef>
+          <a:fillRef idx="3">
+            <a:schemeClr val="accent1"/>
+          </a:fillRef>
+          <a:effectRef idx="2">
+            <a:schemeClr val="accent1"/>
+          </a:effectRef>
+          <a:fontRef idx="minor">
+            <a:schemeClr val="lt1"/>
+          </a:fontRef>
+        </p:style>
+        <p:txBody>
+          <a:bodyPr rtlCol="0" anchor="ctr"/>
+          <a:lstStyle/>
+          <a:p>
+            <a:pPr algn="ctr"/>
+          </a:p>
+        </p:txBody>
+      </p:sp>
+      <p:sp>
+        <p:nvSpPr>
+          <p:cNvPr id="13" name="TextBox 12"/>
+          <p:cNvSpPr txBox="1"/>
+          <p:nvPr/>
+        </p:nvSpPr>
+        <p:spPr>
+          <a:xfrm>
+            <a:off x="777240" y="3831336"/>
+            <a:ext cx="10774375" cy="822959"/>
+          </a:xfrm>
+          <a:prstGeom prst="rect">
+            <a:avLst/>
+          </a:prstGeom>
+          <a:noFill/>
+        </p:spPr>
+        <p:txBody>
+          <a:bodyPr wrap="square">
+            <a:spAutoFit/>
+          </a:bodyPr>
+          <a:lstStyle/>
+          <a:p>
+            <a:r>
+              <a:rPr sz="1200" b="1" i="0">
+                <a:solidFill>
+                  <a:srgbClr val="A02030"/>
+                </a:solidFill>
+                <a:latin typeface="Calibri"/>
+              </a:rPr>
+              <a:t>Atención</a:t>
+            </a:r>
+          </a:p>
+          <a:p>
+            <a:pPr>
+              <a:spcBef>
+                <a:spcPts val="400"/>
+              </a:spcBef>
+            </a:pPr>
+            <a:r>
+              <a:rPr sz="1400" b="0" i="0">
+                <a:solidFill>
+                  <a:srgbClr val="333333"/>
+                </a:solidFill>
+                <a:latin typeface="Calibri"/>
+              </a:rPr>
+              <a:t>Sin cloud de pago ni instalaciones obligatorias de hipervisores/Docker Desktop.</a:t>
+            </a:r>
+          </a:p>
+        </p:txBody>
+      </p:sp>
+      <p:sp>
+        <p:nvSpPr>
+          <p:cNvPr id="14" name="TextBox 13"/>
+          <p:cNvSpPr txBox="1"/>
+          <p:nvPr/>
+        </p:nvSpPr>
+        <p:spPr>
+          <a:xfrm>
+            <a:off x="11185855" y="6473952"/>
+            <a:ext cx="640080" cy="274320"/>
+          </a:xfrm>
+          <a:prstGeom prst="rect">
+            <a:avLst/>
+          </a:prstGeom>
+          <a:noFill/>
+        </p:spPr>
+        <p:txBody>
+          <a:bodyPr wrap="square">
+            <a:spAutoFit/>
+          </a:bodyPr>
+          <a:lstStyle/>
+          <a:p>
+            <a:pPr algn="r"/>
+            <a:r>
+              <a:rPr sz="1100" b="0" i="0">
+                <a:solidFill>
+                  <a:srgbClr val="666666"/>
+                </a:solidFill>
+                <a:latin typeface="Calibri"/>
+              </a:rPr>
+              <a:t>26</a:t>
+            </a:r>
+          </a:p>
+        </p:txBody>
+      </p:sp>
+    </p:spTree>
+  </p:cSld>
+  <p:clrMapOvr>
+    <a:masterClrMapping/>
+  </p:clrMapOvr>
+</p:sld>
+</file>
+
+<file path=ppt/slides/slide27.xml><?xml version="1.0" encoding="utf-8"?>
 <p:sld xmlns:a="http://schemas.openxmlformats.org/drawingml/2006/main" xmlns:p="http://schemas.openxmlformats.org/presentationml/2006/main" xmlns:r="http://schemas.openxmlformats.org/officeDocument/2006/relationships">
   <p:cSld>
     <p:bg>

--- a/Arquitectura de Sistemas Computacionales/Clases/Clase 11 - Avance del proyecto final/Presentacion.pptx
+++ b/Arquitectura de Sistemas Computacionales/Clases/Clase 11 - Avance del proyecto final/Presentacion.pptx
@@ -8734,7 +8734,7 @@
                 </a:solidFill>
                 <a:latin typeface="Calibri"/>
               </a:rPr>
-              <a:t>El diagrama se entrega como código Mermaid dentro de la plataforma del curso, no como imagen</a:t>
+              <a:t>El diagrama se entrega como código Mermaid en la plataforma del curso, no como imagen</a:t>
             </a:r>
           </a:p>
         </p:txBody>
@@ -9681,7 +9681,7 @@
                 </a:solidFill>
                 <a:latin typeface="Calibri"/>
               </a:rPr>
-              <a:t>draw.io · GitHub · Google Docs</a:t>
+              <a:t>Navegador · editores de diagramas y de texto del curso</a:t>
             </a:r>
           </a:p>
           <a:p>
@@ -10553,7 +10553,7 @@
                 </a:solidFill>
                 <a:latin typeface="Calibri"/>
               </a:rPr>
-              <a:t>Subir evidencias al paquete CloudLite (Drive/repo) y a la plataforma del curso en la fecha que indique el docente.</a:t>
+              <a:t>Subir evidencias al paquete CloudLite (Drive/repo) y a la plataforma del curso (la plataforma del curso) en la fecha que indique el docente.</a:t>
             </a:r>
           </a:p>
         </p:txBody>

--- a/Arquitectura de Sistemas Computacionales/Clases/Clase 11 - Avance del proyecto final/Presentacion.pptx
+++ b/Arquitectura de Sistemas Computacionales/Clases/Clase 11 - Avance del proyecto final/Presentacion.pptx
@@ -10,28 +10,21 @@
     <p:sldId id="258" r:id="rId9"/>
     <p:sldId id="259" r:id="rId10"/>
     <p:sldId id="260" r:id="rId11"/>
-    <p:sldId id="261" r:id="rId12"/>
-    <p:sldId id="262" r:id="rId13"/>
-    <p:sldId id="263" r:id="rId14"/>
-    <p:sldId id="264" r:id="rId15"/>
-    <p:sldId id="265" r:id="rId16"/>
-    <p:sldId id="266" r:id="rId17"/>
-    <p:sldId id="267" r:id="rId18"/>
-    <p:sldId id="268" r:id="rId19"/>
-    <p:sldId id="269" r:id="rId20"/>
-    <p:sldId id="270" r:id="rId21"/>
-    <p:sldId id="271" r:id="rId22"/>
-    <p:sldId id="272" r:id="rId23"/>
-    <p:sldId id="273" r:id="rId24"/>
-    <p:sldId id="274" r:id="rId25"/>
-    <p:sldId id="275" r:id="rId26"/>
-    <p:sldId id="276" r:id="rId27"/>
-    <p:sldId id="277" r:id="rId28"/>
-    <p:sldId id="278" r:id="rId29"/>
-    <p:sldId id="279" r:id="rId30"/>
-    <p:sldId id="280" r:id="rId31"/>
-    <p:sldId id="281" r:id="rId32"/>
-    <p:sldId id="282" r:id="rId33"/>
+    <p:sldId id="261" r:id="rId13"/>
+    <p:sldId id="262" r:id="rId14"/>
+    <p:sldId id="263" r:id="rId15"/>
+    <p:sldId id="264" r:id="rId16"/>
+    <p:sldId id="265" r:id="rId17"/>
+    <p:sldId id="266" r:id="rId18"/>
+    <p:sldId id="267" r:id="rId19"/>
+    <p:sldId id="268" r:id="rId20"/>
+    <p:sldId id="269" r:id="rId21"/>
+    <p:sldId id="270" r:id="rId22"/>
+    <p:sldId id="271" r:id="rId23"/>
+    <p:sldId id="272" r:id="rId24"/>
+    <p:sldId id="273" r:id="rId25"/>
+    <p:sldId id="274" r:id="rId26"/>
+    <p:sldId id="275" r:id="rId27"/>
   </p:sldIdLst>
   <p:sldSz cx="12191695" cy="6858000" type="screen4x3"/>
   <p:notesSz cx="6858000" cy="9144000"/>
@@ -131,6 +124,724 @@
     </a:lvl9pPr>
   </p:defaultTextStyle>
 </p:presentation>
+</file>
+
+<file path=ppt/notesMasters/notesMaster1.xml><?xml version="1.0" encoding="utf-8"?>
+<p:notesMaster xmlns:a="http://schemas.openxmlformats.org/drawingml/2006/main" xmlns:p="http://schemas.openxmlformats.org/presentationml/2006/main" xmlns:r="http://schemas.openxmlformats.org/officeDocument/2006/relationships">
+  <p:cSld>
+    <p:bg>
+      <p:bgRef idx="1001">
+        <a:schemeClr val="bg1"/>
+      </p:bgRef>
+    </p:bg>
+    <p:spTree>
+      <p:nvGrpSpPr>
+        <p:cNvPr id="1" name=""/>
+        <p:cNvGrpSpPr/>
+        <p:nvPr/>
+      </p:nvGrpSpPr>
+      <p:grpSpPr>
+        <a:xfrm>
+          <a:off x="0" y="0"/>
+          <a:ext cx="0" cy="0"/>
+          <a:chOff x="0" y="0"/>
+          <a:chExt cx="0" cy="0"/>
+        </a:xfrm>
+      </p:grpSpPr>
+      <p:sp>
+        <p:nvSpPr>
+          <p:cNvPr id="2" name="Header Placeholder 1"/>
+          <p:cNvSpPr>
+            <a:spLocks noGrp="1"/>
+          </p:cNvSpPr>
+          <p:nvPr>
+            <p:ph type="hdr" sz="quarter"/>
+          </p:nvPr>
+        </p:nvSpPr>
+        <p:spPr>
+          <a:xfrm>
+            <a:off x="0" y="0"/>
+            <a:ext cx="2971800" cy="457200"/>
+          </a:xfrm>
+          <a:prstGeom prst="rect">
+            <a:avLst/>
+          </a:prstGeom>
+        </p:spPr>
+        <p:txBody>
+          <a:bodyPr vert="horz" lIns="91440" tIns="45720" rIns="91440" bIns="45720" rtlCol="0"/>
+          <a:lstStyle>
+            <a:lvl1pPr algn="l">
+              <a:defRPr sz="1200"/>
+            </a:lvl1pPr>
+          </a:lstStyle>
+          <a:p>
+            <a:endParaRPr lang="en-US"/>
+          </a:p>
+        </p:txBody>
+      </p:sp>
+      <p:sp>
+        <p:nvSpPr>
+          <p:cNvPr id="3" name="Date Placeholder 2"/>
+          <p:cNvSpPr>
+            <a:spLocks noGrp="1"/>
+          </p:cNvSpPr>
+          <p:nvPr>
+            <p:ph type="dt" idx="1"/>
+          </p:nvPr>
+        </p:nvSpPr>
+        <p:spPr>
+          <a:xfrm>
+            <a:off x="3884613" y="0"/>
+            <a:ext cx="2971800" cy="457200"/>
+          </a:xfrm>
+          <a:prstGeom prst="rect">
+            <a:avLst/>
+          </a:prstGeom>
+        </p:spPr>
+        <p:txBody>
+          <a:bodyPr vert="horz" lIns="91440" tIns="45720" rIns="91440" bIns="45720" rtlCol="0"/>
+          <a:lstStyle>
+            <a:lvl1pPr algn="r">
+              <a:defRPr sz="1200"/>
+            </a:lvl1pPr>
+          </a:lstStyle>
+          <a:p>
+            <a:fld id="{0F89C1C7-3DCD-1040-A9CF-14679D8B5DDD}" type="datetimeFigureOut">
+              <a:rPr lang="en-US" smtClean="0"/>
+              <a:t>10/17/16</a:t>
+            </a:fld>
+            <a:endParaRPr lang="en-US"/>
+          </a:p>
+        </p:txBody>
+      </p:sp>
+      <p:sp>
+        <p:nvSpPr>
+          <p:cNvPr id="4" name="Slide Image Placeholder 3"/>
+          <p:cNvSpPr>
+            <a:spLocks noGrp="1" noRot="1" noChangeAspect="1"/>
+          </p:cNvSpPr>
+          <p:nvPr>
+            <p:ph type="sldImg" idx="2"/>
+          </p:nvPr>
+        </p:nvSpPr>
+        <p:spPr>
+          <a:xfrm>
+            <a:off x="1143000" y="685800"/>
+            <a:ext cx="4572000" cy="3429000"/>
+          </a:xfrm>
+          <a:prstGeom prst="rect">
+            <a:avLst/>
+          </a:prstGeom>
+          <a:noFill/>
+          <a:ln w="12700">
+            <a:solidFill>
+              <a:prstClr val="black"/>
+            </a:solidFill>
+          </a:ln>
+        </p:spPr>
+        <p:txBody>
+          <a:bodyPr vert="horz" lIns="91440" tIns="45720" rIns="91440" bIns="45720" rtlCol="0" anchor="ctr"/>
+          <a:lstStyle/>
+          <a:p>
+            <a:endParaRPr lang="en-US"/>
+          </a:p>
+        </p:txBody>
+      </p:sp>
+      <p:sp>
+        <p:nvSpPr>
+          <p:cNvPr id="5" name="Notes Placeholder 4"/>
+          <p:cNvSpPr>
+            <a:spLocks noGrp="1"/>
+          </p:cNvSpPr>
+          <p:nvPr>
+            <p:ph type="body" sz="quarter" idx="3"/>
+          </p:nvPr>
+        </p:nvSpPr>
+        <p:spPr>
+          <a:xfrm>
+            <a:off x="685800" y="4343400"/>
+            <a:ext cx="5486400" cy="4114800"/>
+          </a:xfrm>
+          <a:prstGeom prst="rect">
+            <a:avLst/>
+          </a:prstGeom>
+        </p:spPr>
+        <p:txBody>
+          <a:bodyPr vert="horz" lIns="91440" tIns="45720" rIns="91440" bIns="45720" rtlCol="0"/>
+          <a:lstStyle/>
+          <a:p>
+            <a:pPr lvl="0"/>
+            <a:r>
+              <a:rPr lang="en-US" smtClean="0"/>
+              <a:t>Click to edit Master text styles</a:t>
+            </a:r>
+          </a:p>
+          <a:p>
+            <a:pPr lvl="1"/>
+            <a:r>
+              <a:rPr lang="en-US" smtClean="0"/>
+              <a:t>Second level</a:t>
+            </a:r>
+          </a:p>
+          <a:p>
+            <a:pPr lvl="2"/>
+            <a:r>
+              <a:rPr lang="en-US" smtClean="0"/>
+              <a:t>Third level</a:t>
+            </a:r>
+          </a:p>
+          <a:p>
+            <a:pPr lvl="3"/>
+            <a:r>
+              <a:rPr lang="en-US" smtClean="0"/>
+              <a:t>Fourth level</a:t>
+            </a:r>
+          </a:p>
+          <a:p>
+            <a:pPr lvl="4"/>
+            <a:r>
+              <a:rPr lang="en-US" smtClean="0"/>
+              <a:t>Fifth level</a:t>
+            </a:r>
+            <a:endParaRPr lang="en-US"/>
+          </a:p>
+        </p:txBody>
+      </p:sp>
+      <p:sp>
+        <p:nvSpPr>
+          <p:cNvPr id="6" name="Footer Placeholder 5"/>
+          <p:cNvSpPr>
+            <a:spLocks noGrp="1"/>
+          </p:cNvSpPr>
+          <p:nvPr>
+            <p:ph type="ftr" sz="quarter" idx="4"/>
+          </p:nvPr>
+        </p:nvSpPr>
+        <p:spPr>
+          <a:xfrm>
+            <a:off x="0" y="8685213"/>
+            <a:ext cx="2971800" cy="457200"/>
+          </a:xfrm>
+          <a:prstGeom prst="rect">
+            <a:avLst/>
+          </a:prstGeom>
+        </p:spPr>
+        <p:txBody>
+          <a:bodyPr vert="horz" lIns="91440" tIns="45720" rIns="91440" bIns="45720" rtlCol="0" anchor="b"/>
+          <a:lstStyle>
+            <a:lvl1pPr algn="l">
+              <a:defRPr sz="1200"/>
+            </a:lvl1pPr>
+          </a:lstStyle>
+          <a:p>
+            <a:endParaRPr lang="en-US"/>
+          </a:p>
+        </p:txBody>
+      </p:sp>
+      <p:sp>
+        <p:nvSpPr>
+          <p:cNvPr id="7" name="Slide Number Placeholder 6"/>
+          <p:cNvSpPr>
+            <a:spLocks noGrp="1"/>
+          </p:cNvSpPr>
+          <p:nvPr>
+            <p:ph type="sldNum" sz="quarter" idx="5"/>
+          </p:nvPr>
+        </p:nvSpPr>
+        <p:spPr>
+          <a:xfrm>
+            <a:off x="3884613" y="8685213"/>
+            <a:ext cx="2971800" cy="457200"/>
+          </a:xfrm>
+          <a:prstGeom prst="rect">
+            <a:avLst/>
+          </a:prstGeom>
+        </p:spPr>
+        <p:txBody>
+          <a:bodyPr vert="horz" lIns="91440" tIns="45720" rIns="91440" bIns="45720" rtlCol="0" anchor="b"/>
+          <a:lstStyle>
+            <a:lvl1pPr algn="r">
+              <a:defRPr sz="1200"/>
+            </a:lvl1pPr>
+          </a:lstStyle>
+          <a:p>
+            <a:fld id="{BB5E49A5-4136-284D-997B-48E1D791AD67}" type="slidenum">
+              <a:rPr lang="en-US" smtClean="0"/>
+              <a:t>‹#›</a:t>
+            </a:fld>
+            <a:endParaRPr lang="en-US"/>
+          </a:p>
+        </p:txBody>
+      </p:sp>
+    </p:spTree>
+    <p:extLst>
+      <p:ext uri="{BB962C8B-B14F-4D97-AF65-F5344CB8AC3E}">
+        <p14:creationId xmlns:p14="http://schemas.microsoft.com/office/powerpoint/2010/main" val="2623252185"/>
+      </p:ext>
+    </p:extLst>
+  </p:cSld>
+  <p:clrMap bg1="lt1" tx1="dk1" bg2="lt2" tx2="dk2" accent1="accent1" accent2="accent2" accent3="accent3" accent4="accent4" accent5="accent5" accent6="accent6" hlink="hlink" folHlink="folHlink"/>
+  <p:notesStyle>
+    <a:lvl1pPr marL="0" algn="l" defTabSz="457200" rtl="0" eaLnBrk="1" latinLnBrk="0" hangingPunct="1">
+      <a:defRPr sz="1200" kern="1200">
+        <a:solidFill>
+          <a:schemeClr val="tx1"/>
+        </a:solidFill>
+        <a:latin typeface="+mn-lt"/>
+        <a:ea typeface="+mn-ea"/>
+        <a:cs typeface="+mn-cs"/>
+      </a:defRPr>
+    </a:lvl1pPr>
+    <a:lvl2pPr marL="457200" algn="l" defTabSz="457200" rtl="0" eaLnBrk="1" latinLnBrk="0" hangingPunct="1">
+      <a:defRPr sz="1200" kern="1200">
+        <a:solidFill>
+          <a:schemeClr val="tx1"/>
+        </a:solidFill>
+        <a:latin typeface="+mn-lt"/>
+        <a:ea typeface="+mn-ea"/>
+        <a:cs typeface="+mn-cs"/>
+      </a:defRPr>
+    </a:lvl2pPr>
+    <a:lvl3pPr marL="914400" algn="l" defTabSz="457200" rtl="0" eaLnBrk="1" latinLnBrk="0" hangingPunct="1">
+      <a:defRPr sz="1200" kern="1200">
+        <a:solidFill>
+          <a:schemeClr val="tx1"/>
+        </a:solidFill>
+        <a:latin typeface="+mn-lt"/>
+        <a:ea typeface="+mn-ea"/>
+        <a:cs typeface="+mn-cs"/>
+      </a:defRPr>
+    </a:lvl3pPr>
+    <a:lvl4pPr marL="1371600" algn="l" defTabSz="457200" rtl="0" eaLnBrk="1" latinLnBrk="0" hangingPunct="1">
+      <a:defRPr sz="1200" kern="1200">
+        <a:solidFill>
+          <a:schemeClr val="tx1"/>
+        </a:solidFill>
+        <a:latin typeface="+mn-lt"/>
+        <a:ea typeface="+mn-ea"/>
+        <a:cs typeface="+mn-cs"/>
+      </a:defRPr>
+    </a:lvl4pPr>
+    <a:lvl5pPr marL="1828800" algn="l" defTabSz="457200" rtl="0" eaLnBrk="1" latinLnBrk="0" hangingPunct="1">
+      <a:defRPr sz="1200" kern="1200">
+        <a:solidFill>
+          <a:schemeClr val="tx1"/>
+        </a:solidFill>
+        <a:latin typeface="+mn-lt"/>
+        <a:ea typeface="+mn-ea"/>
+        <a:cs typeface="+mn-cs"/>
+      </a:defRPr>
+    </a:lvl5pPr>
+    <a:lvl6pPr marL="2286000" algn="l" defTabSz="457200" rtl="0" eaLnBrk="1" latinLnBrk="0" hangingPunct="1">
+      <a:defRPr sz="1200" kern="1200">
+        <a:solidFill>
+          <a:schemeClr val="tx1"/>
+        </a:solidFill>
+        <a:latin typeface="+mn-lt"/>
+        <a:ea typeface="+mn-ea"/>
+        <a:cs typeface="+mn-cs"/>
+      </a:defRPr>
+    </a:lvl6pPr>
+    <a:lvl7pPr marL="2743200" algn="l" defTabSz="457200" rtl="0" eaLnBrk="1" latinLnBrk="0" hangingPunct="1">
+      <a:defRPr sz="1200" kern="1200">
+        <a:solidFill>
+          <a:schemeClr val="tx1"/>
+        </a:solidFill>
+        <a:latin typeface="+mn-lt"/>
+        <a:ea typeface="+mn-ea"/>
+        <a:cs typeface="+mn-cs"/>
+      </a:defRPr>
+    </a:lvl7pPr>
+    <a:lvl8pPr marL="3200400" algn="l" defTabSz="457200" rtl="0" eaLnBrk="1" latinLnBrk="0" hangingPunct="1">
+      <a:defRPr sz="1200" kern="1200">
+        <a:solidFill>
+          <a:schemeClr val="tx1"/>
+        </a:solidFill>
+        <a:latin typeface="+mn-lt"/>
+        <a:ea typeface="+mn-ea"/>
+        <a:cs typeface="+mn-cs"/>
+      </a:defRPr>
+    </a:lvl8pPr>
+    <a:lvl9pPr marL="3657600" algn="l" defTabSz="457200" rtl="0" eaLnBrk="1" latinLnBrk="0" hangingPunct="1">
+      <a:defRPr sz="1200" kern="1200">
+        <a:solidFill>
+          <a:schemeClr val="tx1"/>
+        </a:solidFill>
+        <a:latin typeface="+mn-lt"/>
+        <a:ea typeface="+mn-ea"/>
+        <a:cs typeface="+mn-cs"/>
+      </a:defRPr>
+    </a:lvl9pPr>
+  </p:notesStyle>
+</p:notesMaster>
+</file>
+
+<file path=ppt/notesSlides/notesSlide1.xml><?xml version="1.0" encoding="utf-8"?>
+<p:notes xmlns:a="http://schemas.openxmlformats.org/drawingml/2006/main" xmlns:p="http://schemas.openxmlformats.org/presentationml/2006/main" xmlns:r="http://schemas.openxmlformats.org/officeDocument/2006/relationships">
+  <p:cSld>
+    <p:spTree>
+      <p:nvGrpSpPr>
+        <p:cNvPr id="1" name=""/>
+        <p:cNvGrpSpPr/>
+        <p:nvPr/>
+      </p:nvGrpSpPr>
+      <p:grpSpPr>
+        <a:xfrm>
+          <a:off x="0" y="0"/>
+          <a:ext cx="0" cy="0"/>
+          <a:chOff x="0" y="0"/>
+          <a:chExt cx="0" cy="0"/>
+        </a:xfrm>
+      </p:grpSpPr>
+      <p:sp>
+        <p:nvSpPr>
+          <p:cNvPr id="2" name="Slide Image Placeholder 1"/>
+          <p:cNvSpPr>
+            <a:spLocks noGrp="1"/>
+          </p:cNvSpPr>
+          <p:nvPr>
+            <p:ph type="sldImg" idx="2"/>
+          </p:nvPr>
+        </p:nvSpPr>
+        <p:spPr/>
+      </p:sp>
+      <p:sp>
+        <p:nvSpPr>
+          <p:cNvPr id="3" name="Notes Placeholder 2"/>
+          <p:cNvSpPr>
+            <a:spLocks noGrp="1"/>
+          </p:cNvSpPr>
+          <p:nvPr>
+            <p:ph type="body" idx="3" sz="quarter"/>
+          </p:nvPr>
+        </p:nvSpPr>
+        <p:spPr/>
+        <p:txBody>
+          <a:bodyPr/>
+          <a:lstStyle/>
+          <a:p>
+            <a:r>
+              <a:t>Hoy el docente no dicta, audita, y el estudiante no aprende un concepto, demuestra que los que ya tiene forman un sistema.</a:t>
+            </a:r>
+          </a:p>
+        </p:txBody>
+      </p:sp>
+      <p:sp>
+        <p:nvSpPr>
+          <p:cNvPr id="4" name="Slide Number Placeholder 3"/>
+          <p:cNvSpPr>
+            <a:spLocks noGrp="1"/>
+          </p:cNvSpPr>
+          <p:nvPr>
+            <p:ph type="sldNum" idx="5" sz="quarter"/>
+          </p:nvPr>
+        </p:nvSpPr>
+        <p:spPr/>
+      </p:sp>
+    </p:spTree>
+  </p:cSld>
+  <p:clrMapOvr>
+    <a:masterClrMapping/>
+  </p:clrMapOvr>
+</p:notes>
+</file>
+
+<file path=ppt/notesSlides/notesSlide2.xml><?xml version="1.0" encoding="utf-8"?>
+<p:notes xmlns:a="http://schemas.openxmlformats.org/drawingml/2006/main" xmlns:p="http://schemas.openxmlformats.org/presentationml/2006/main" xmlns:r="http://schemas.openxmlformats.org/officeDocument/2006/relationships">
+  <p:cSld>
+    <p:spTree>
+      <p:nvGrpSpPr>
+        <p:cNvPr id="1" name=""/>
+        <p:cNvGrpSpPr/>
+        <p:nvPr/>
+      </p:nvGrpSpPr>
+      <p:grpSpPr>
+        <a:xfrm>
+          <a:off x="0" y="0"/>
+          <a:ext cx="0" cy="0"/>
+          <a:chOff x="0" y="0"/>
+          <a:chExt cx="0" cy="0"/>
+        </a:xfrm>
+      </p:grpSpPr>
+      <p:sp>
+        <p:nvSpPr>
+          <p:cNvPr id="2" name="Slide Image Placeholder 1"/>
+          <p:cNvSpPr>
+            <a:spLocks noGrp="1"/>
+          </p:cNvSpPr>
+          <p:nvPr>
+            <p:ph type="sldImg" idx="2"/>
+          </p:nvPr>
+        </p:nvSpPr>
+        <p:spPr/>
+      </p:sp>
+      <p:sp>
+        <p:nvSpPr>
+          <p:cNvPr id="3" name="Notes Placeholder 2"/>
+          <p:cNvSpPr>
+            <a:spLocks noGrp="1"/>
+          </p:cNvSpPr>
+          <p:nvPr>
+            <p:ph type="body" idx="3" sz="quarter"/>
+          </p:nvPr>
+        </p:nvSpPr>
+        <p:spPr/>
+        <p:txBody>
+          <a:bodyPr/>
+          <a:lstStyle/>
+          <a:p>
+            <a:r>
+              <a:t>Y se audita con preguntas mecanicas que cualquier docente puede hacer sin ser experto en el dominio del proyecto, lo que hace esta tecnica ensenable.</a:t>
+            </a:r>
+          </a:p>
+        </p:txBody>
+      </p:sp>
+      <p:sp>
+        <p:nvSpPr>
+          <p:cNvPr id="4" name="Slide Number Placeholder 3"/>
+          <p:cNvSpPr>
+            <a:spLocks noGrp="1"/>
+          </p:cNvSpPr>
+          <p:nvPr>
+            <p:ph type="sldNum" idx="5" sz="quarter"/>
+          </p:nvPr>
+        </p:nvSpPr>
+        <p:spPr/>
+      </p:sp>
+    </p:spTree>
+  </p:cSld>
+  <p:clrMapOvr>
+    <a:masterClrMapping/>
+  </p:clrMapOvr>
+</p:notes>
+</file>
+
+<file path=ppt/notesSlides/notesSlide3.xml><?xml version="1.0" encoding="utf-8"?>
+<p:notes xmlns:a="http://schemas.openxmlformats.org/drawingml/2006/main" xmlns:p="http://schemas.openxmlformats.org/presentationml/2006/main" xmlns:r="http://schemas.openxmlformats.org/officeDocument/2006/relationships">
+  <p:cSld>
+    <p:spTree>
+      <p:nvGrpSpPr>
+        <p:cNvPr id="1" name=""/>
+        <p:cNvGrpSpPr/>
+        <p:nvPr/>
+      </p:nvGrpSpPr>
+      <p:grpSpPr>
+        <a:xfrm>
+          <a:off x="0" y="0"/>
+          <a:ext cx="0" cy="0"/>
+          <a:chOff x="0" y="0"/>
+          <a:chExt cx="0" cy="0"/>
+        </a:xfrm>
+      </p:grpSpPr>
+      <p:sp>
+        <p:nvSpPr>
+          <p:cNvPr id="2" name="Slide Image Placeholder 1"/>
+          <p:cNvSpPr>
+            <a:spLocks noGrp="1"/>
+          </p:cNvSpPr>
+          <p:nvPr>
+            <p:ph type="sldImg" idx="2"/>
+          </p:nvPr>
+        </p:nvSpPr>
+        <p:spPr/>
+      </p:sp>
+      <p:sp>
+        <p:nvSpPr>
+          <p:cNvPr id="3" name="Notes Placeholder 2"/>
+          <p:cNvSpPr>
+            <a:spLocks noGrp="1"/>
+          </p:cNvSpPr>
+          <p:nvPr>
+            <p:ph type="body" idx="3" sz="quarter"/>
+          </p:nvPr>
+        </p:nvSpPr>
+        <p:spPr/>
+        <p:txBody>
+          <a:bodyPr/>
+          <a:lstStyle/>
+          <a:p>
+            <a:r>
+              <a:t>Hay dos patologias con nombre propio que arruinan las sustentaciones.</a:t>
+            </a:r>
+          </a:p>
+          <a:p/>
+          <a:p>
+            <a:r>
+              <a:t>La respuesta correcta no es prohibir ideas sino congelar el alcance y abrir una lista de aparcamiento, un anexo donde las capacidades extra quedan escritas como "fuera de alcance v1, candidatas a v2": preserva la idea, protege el cronograma y es lo que hace un equipo profesional al cerrar un release.</a:t>
+            </a:r>
+          </a:p>
+        </p:txBody>
+      </p:sp>
+      <p:sp>
+        <p:nvSpPr>
+          <p:cNvPr id="4" name="Slide Number Placeholder 3"/>
+          <p:cNvSpPr>
+            <a:spLocks noGrp="1"/>
+          </p:cNvSpPr>
+          <p:nvPr>
+            <p:ph type="sldNum" idx="5" sz="quarter"/>
+          </p:nvPr>
+        </p:nvSpPr>
+        <p:spPr/>
+      </p:sp>
+    </p:spTree>
+  </p:cSld>
+  <p:clrMapOvr>
+    <a:masterClrMapping/>
+  </p:clrMapOvr>
+</p:notes>
+</file>
+
+<file path=ppt/notesSlides/notesSlide4.xml><?xml version="1.0" encoding="utf-8"?>
+<p:notes xmlns:a="http://schemas.openxmlformats.org/drawingml/2006/main" xmlns:p="http://schemas.openxmlformats.org/presentationml/2006/main" xmlns:r="http://schemas.openxmlformats.org/officeDocument/2006/relationships">
+  <p:cSld>
+    <p:spTree>
+      <p:nvGrpSpPr>
+        <p:cNvPr id="1" name=""/>
+        <p:cNvGrpSpPr/>
+        <p:nvPr/>
+      </p:nvGrpSpPr>
+      <p:grpSpPr>
+        <a:xfrm>
+          <a:off x="0" y="0"/>
+          <a:ext cx="0" cy="0"/>
+          <a:chOff x="0" y="0"/>
+          <a:chExt cx="0" cy="0"/>
+        </a:xfrm>
+      </p:grpSpPr>
+      <p:sp>
+        <p:nvSpPr>
+          <p:cNvPr id="2" name="Slide Image Placeholder 1"/>
+          <p:cNvSpPr>
+            <a:spLocks noGrp="1"/>
+          </p:cNvSpPr>
+          <p:nvPr>
+            <p:ph type="sldImg" idx="2"/>
+          </p:nvPr>
+        </p:nvSpPr>
+        <p:spPr/>
+      </p:sp>
+      <p:sp>
+        <p:nvSpPr>
+          <p:cNvPr id="3" name="Notes Placeholder 2"/>
+          <p:cNvSpPr>
+            <a:spLocks noGrp="1"/>
+          </p:cNvSpPr>
+          <p:nvPr>
+            <p:ph type="body" idx="3" sz="quarter"/>
+          </p:nvPr>
+        </p:nvSpPr>
+        <p:spPr/>
+        <p:txBody>
+          <a:bodyPr/>
+          <a:lstStyle/>
+          <a:p>
+            <a:r>
+              <a:t>El docente debe apuntar a tres hallazgos por proyecto como maximo y marcar cual es el bloqueante, porque un estudiante que recibe once observaciones no corrige ninguna: se paraliza.</a:t>
+            </a:r>
+          </a:p>
+          <a:p/>
+          <a:p>
+            <a:r>
+              <a:t>Conviene nombrar tambien una fortaleza concreta, no por amabilidad sino porque el estudiante necesita saber que conservar; si solo escucha fallas, en la siguiente version cambia todo, incluido lo que estaba bien.</a:t>
+            </a:r>
+          </a:p>
+        </p:txBody>
+      </p:sp>
+      <p:sp>
+        <p:nvSpPr>
+          <p:cNvPr id="4" name="Slide Number Placeholder 3"/>
+          <p:cNvSpPr>
+            <a:spLocks noGrp="1"/>
+          </p:cNvSpPr>
+          <p:nvPr>
+            <p:ph type="sldNum" idx="5" sz="quarter"/>
+          </p:nvPr>
+        </p:nvSpPr>
+        <p:spPr/>
+      </p:sp>
+    </p:spTree>
+  </p:cSld>
+  <p:clrMapOvr>
+    <a:masterClrMapping/>
+  </p:clrMapOvr>
+</p:notes>
+</file>
+
+<file path=ppt/notesSlides/notesSlide5.xml><?xml version="1.0" encoding="utf-8"?>
+<p:notes xmlns:a="http://schemas.openxmlformats.org/drawingml/2006/main" xmlns:p="http://schemas.openxmlformats.org/presentationml/2006/main" xmlns:r="http://schemas.openxmlformats.org/officeDocument/2006/relationships">
+  <p:cSld>
+    <p:spTree>
+      <p:nvGrpSpPr>
+        <p:cNvPr id="1" name=""/>
+        <p:cNvGrpSpPr/>
+        <p:nvPr/>
+      </p:nvGrpSpPr>
+      <p:grpSpPr>
+        <a:xfrm>
+          <a:off x="0" y="0"/>
+          <a:ext cx="0" cy="0"/>
+          <a:chOff x="0" y="0"/>
+          <a:chExt cx="0" cy="0"/>
+        </a:xfrm>
+      </p:grpSpPr>
+      <p:sp>
+        <p:nvSpPr>
+          <p:cNvPr id="2" name="Slide Image Placeholder 1"/>
+          <p:cNvSpPr>
+            <a:spLocks noGrp="1"/>
+          </p:cNvSpPr>
+          <p:nvPr>
+            <p:ph type="sldImg" idx="2"/>
+          </p:nvPr>
+        </p:nvSpPr>
+        <p:spPr/>
+      </p:sp>
+      <p:sp>
+        <p:nvSpPr>
+          <p:cNvPr id="3" name="Notes Placeholder 2"/>
+          <p:cNvSpPr>
+            <a:spLocks noGrp="1"/>
+          </p:cNvSpPr>
+          <p:nvPr>
+            <p:ph type="body" idx="3" sz="quarter"/>
+          </p:nvPr>
+        </p:nvSpPr>
+        <p:spPr/>
+        <p:txBody>
+          <a:bodyPr/>
+          <a:lstStyle/>
+          <a:p>
+            <a:r>
+              <a:t>Tres preguntas se repiten y el docente debe responderlas sin titubear.</a:t>
+            </a:r>
+          </a:p>
+          <a:p/>
+          <a:p>
+            <a:r>
+              <a:t>Conviene cerrar diciendo que lo que se estabilice hoy es la base sobre la que la Clase 12 agregara el analisis de rendimiento y la Clase 13 la politica de escalado, y que un proyecto con el paquete v1 incoherente no puede hacer ninguna de las dos, porque no se puede medir ni escalar un sistema que todavia no esta definido.</a:t>
+            </a:r>
+          </a:p>
+        </p:txBody>
+      </p:sp>
+      <p:sp>
+        <p:nvSpPr>
+          <p:cNvPr id="4" name="Slide Number Placeholder 3"/>
+          <p:cNvSpPr>
+            <a:spLocks noGrp="1"/>
+          </p:cNvSpPr>
+          <p:nvPr>
+            <p:ph type="sldNum" idx="5" sz="quarter"/>
+          </p:nvPr>
+        </p:nvSpPr>
+        <p:spPr/>
+      </p:sp>
+    </p:spTree>
+  </p:cSld>
+  <p:clrMapOvr>
+    <a:masterClrMapping/>
+  </p:clrMapOvr>
+</p:notes>
 </file>
 
 <file path=ppt/slideLayouts/slideLayout1.xml><?xml version="1.0" encoding="utf-8"?>
@@ -3344,13 +4055,22 @@
               </a:spcAft>
             </a:pPr>
             <a:r>
+              <a:rPr sz="1500" b="0" i="0">
+                <a:solidFill>
+                  <a:srgbClr val="333333"/>
+                </a:solidFill>
+                <a:latin typeface="Calibri"/>
+              </a:rPr>
+              <a:t>Bloque </a:t>
+            </a:r>
+            <a:r>
               <a:rPr sz="1500" b="1" i="0">
                 <a:solidFill>
                   <a:srgbClr val="333333"/>
                 </a:solidFill>
                 <a:latin typeface="Calibri"/>
               </a:rPr>
-              <a:t>Hoy avanzamos el PI en:</a:t>
+              <a:t>120 min</a:t>
             </a:r>
             <a:r>
               <a:rPr sz="1500" b="0" i="0">
@@ -3359,7 +4079,25 @@
                 </a:solidFill>
                 <a:latin typeface="Calibri"/>
               </a:rPr>
-              <a:t> Integrar diagramas v1 + checklist de avance PI</a:t>
+              <a:t> · sesión </a:t>
+            </a:r>
+            <a:r>
+              <a:rPr sz="1500" b="1" i="0">
+                <a:solidFill>
+                  <a:srgbClr val="333333"/>
+                </a:solidFill>
+                <a:latin typeface="Calibri"/>
+              </a:rPr>
+              <a:t>virtual síncrona</a:t>
+            </a:r>
+            <a:r>
+              <a:rPr sz="1500" b="0" i="0">
+                <a:solidFill>
+                  <a:srgbClr val="333333"/>
+                </a:solidFill>
+                <a:latin typeface="Calibri"/>
+              </a:rPr>
+              <a:t> por Google Meet.</a:t>
             </a:r>
           </a:p>
           <a:p>
@@ -3375,41 +4113,7 @@
                 </a:solidFill>
                 <a:latin typeface="Calibri"/>
               </a:rPr>
-              <a:t>Bloque </a:t>
-            </a:r>
-            <a:r>
-              <a:rPr sz="1500" b="1" i="0">
-                <a:solidFill>
-                  <a:srgbClr val="333333"/>
-                </a:solidFill>
-                <a:latin typeface="Calibri"/>
-              </a:rPr>
-              <a:t>120 min</a:t>
-            </a:r>
-            <a:r>
-              <a:rPr sz="1500" b="0" i="0">
-                <a:solidFill>
-                  <a:srgbClr val="333333"/>
-                </a:solidFill>
-                <a:latin typeface="Calibri"/>
-              </a:rPr>
-              <a:t> · Teoría breve · Taller PI · cierre.</a:t>
-            </a:r>
-          </a:p>
-          <a:p>
-            <a:pPr>
-              <a:spcAft>
-                <a:spcPts val="800"/>
-              </a:spcAft>
-            </a:pPr>
-            <a:r>
-              <a:rPr sz="1500" b="0" i="0">
-                <a:solidFill>
-                  <a:srgbClr val="333333"/>
-                </a:solidFill>
-                <a:latin typeface="Calibri"/>
-              </a:rPr>
-              <a:t>Herramientas gratis + navegador · sin AWS/GCP/Oracle Cloud.</a:t>
+              <a:t>Conceptos del tema, ejemplos resueltos sobre CloudLite y cierre conceptual.</a:t>
             </a:r>
           </a:p>
         </p:txBody>
@@ -3590,7 +4294,7 @@
                 </a:solidFill>
                 <a:latin typeface="Calibri"/>
               </a:rPr>
-              <a:t>Las cinco preguntas de coherencia, en orden (1/2)</a:t>
+              <a:t>Scope creep y arquitectura de papel: las dos patologias con nombre propio (1/2)</a:t>
             </a:r>
           </a:p>
         </p:txBody>
@@ -3629,7 +4333,7 @@
                 </a:solidFill>
                 <a:latin typeface="Calibri"/>
               </a:rPr>
-              <a:t>–   Las preguntas de coherencia, aplicadas a CloudLite, son cinco y conviene hacerlas en orden.</a:t>
+              <a:t>–   La primera es el scope creep, el crecimiento no controlado del alcance: el sistema suma capacidades clase por clase, cada una razonable por si misma, hasta que el proyecto tiene un alcance que no se puede documentar ni defender en el tiempo restante.</a:t>
             </a:r>
           </a:p>
           <a:p>
@@ -3645,7 +4349,7 @@
                 </a:solidFill>
                 <a:latin typeface="Calibri"/>
               </a:rPr>
-              <a:t>–   Primera: cada contenedor del C4 de la Clase 4 aparece en el diagrama de despliegue de la Clase 7 y con el mismo nombre</a:t>
+              <a:t>–   Se detecta con un dato objetivo, no con intuicion: en la Clase 1 cada estudiante definio entre tres y cinco capacidades para CloudLite, asi que basta contar las de hoy y compararlas con esa linea base</a:t>
             </a:r>
           </a:p>
           <a:p>
@@ -3661,7 +4365,7 @@
                 </a:solidFill>
                 <a:latin typeface="Calibri"/>
               </a:rPr>
-              <a:t>–   Si el C4 dice "servicio de notificaciones" y el despliegue dice "worker de correos", o son la misma cosa mal nombrada o son dos cosas y falta una.</a:t>
+              <a:t>–   Si eran cuatro y hoy son nueve, hay scope creep, y da igual que las nuevas suenen interesantes.</a:t>
             </a:r>
           </a:p>
           <a:p>
@@ -3677,23 +4381,7 @@
                 </a:solidFill>
                 <a:latin typeface="Calibri"/>
               </a:rPr>
-              <a:t>–   Segunda: cada actor y sistema externo del diagrama de Contexto sigue existiendo</a:t>
-            </a:r>
-          </a:p>
-          <a:p>
-            <a:pPr>
-              <a:spcAft>
-                <a:spcPts val="800"/>
-              </a:spcAft>
-            </a:pPr>
-            <a:r>
-              <a:rPr sz="2000" b="0" i="0">
-                <a:solidFill>
-                  <a:srgbClr val="333333"/>
-                </a:solidFill>
-                <a:latin typeface="Calibri"/>
-              </a:rPr>
-              <a:t>–   El caso frecuente es que el estudiante dibujo en la Clase 1 una pasarela de pagos y hoy ningun contenedor habla con ella, asi que o desaparecio del alcance y hay que borrarla o esta olvidada y es un hueco.</a:t>
+              <a:t>–   La segunda patologia es el teatro de microservicios: servicios separados en el diagrama que en la practica no son unidades independientes.</a:t>
             </a:r>
           </a:p>
         </p:txBody>
@@ -3874,7 +4562,7 @@
                 </a:solidFill>
                 <a:latin typeface="Calibri"/>
               </a:rPr>
-              <a:t>Las cinco preguntas de coherencia, en orden (2/2)</a:t>
+              <a:t>Scope creep y arquitectura de papel: las dos patologias con nombre propio (2/2)</a:t>
             </a:r>
           </a:p>
         </p:txBody>
@@ -3913,7 +4601,7 @@
                 </a:solidFill>
                 <a:latin typeface="Calibri"/>
               </a:rPr>
-              <a:t>–   Tercera: cada amenaza del modelo STRIDE de la Clase 6 tiene un control visible en el despliegue; si la amenaza es acceso no autorizado a la base de datos y el diagrama la muestra en la subred publica, el control existe en el documento y no en el diseno.</a:t>
+              <a:t>–   Se detecta con cuatro preguntas de una linea, todas respondibles por el estudiante: se puede desplegar ese servicio sin desplegar los otros, tiene sus propios datos o comparte tablas con el vecino, puede fallar sin tumbar a los demas</a:t>
             </a:r>
           </a:p>
           <a:p>
@@ -3929,7 +4617,7 @@
                 </a:solidFill>
                 <a:latin typeface="Calibri"/>
               </a:rPr>
-              <a:t>–   Cuarta: los componentes de la tabla de costos de la Clase 10 son los mismos contenedores, no una lista inventada.</a:t>
+              <a:t>–   Y existe una razon de negocio por la que cambiaria en un momento distinto al resto.</a:t>
             </a:r>
           </a:p>
           <a:p>
@@ -3945,7 +4633,7 @@
                 </a:solidFill>
                 <a:latin typeface="Calibri"/>
               </a:rPr>
-              <a:t>–   Quinta: el workflow de Actions se ejecuto al menos una vez con resultado visible, porque un archivo YAML que nunca corrio es una intencion, no evidencia.</a:t>
+              <a:t>–   En CloudLite el caso clasico es el "servicio de autenticacion" dibujado como caja aparte que en el repositorio es un modulo dentro de la misma API, escribe en las mismas tablas y se despliega en el mismo contenedor.</a:t>
             </a:r>
           </a:p>
           <a:p>
@@ -3961,7 +4649,7 @@
                 </a:solidFill>
                 <a:latin typeface="Calibri"/>
               </a:rPr>
-              <a:t>–   Ese es el nucleo del acta: no una nota, sino cuales de estas cinco cadenas estan rotas en cada proyecto.</a:t>
+              <a:t>–   No es un microservicio, es un modulo, y decirlo no castiga al estudiante: corrige el vocabulario antes del Parcial 3, donde esa distincion se evalua.</a:t>
             </a:r>
           </a:p>
         </p:txBody>
@@ -4142,7 +4830,7 @@
                 </a:solidFill>
                 <a:latin typeface="Calibri"/>
               </a:rPr>
-              <a:t>Scope creep y arquitectura de papel: las dos patologias con nombre propio (1/2)</a:t>
+              <a:t>Retroalimentacion accionable: observacion, evidencia, impacto y accion con fecha (1/2)</a:t>
             </a:r>
           </a:p>
         </p:txBody>
@@ -4181,7 +4869,7 @@
                 </a:solidFill>
                 <a:latin typeface="Calibri"/>
               </a:rPr>
-              <a:t>–   La primera es el scope creep, el crecimiento no controlado del alcance: el sistema suma capacidades clase por clase, cada una razonable por si misma, hasta que el proyecto tiene un alcance que no se puede documentar ni defender en el tiempo restante.</a:t>
+              <a:t>–   La retroalimentacion es la mitad del valor del dia y tiene tecnica propia.</a:t>
             </a:r>
           </a:p>
           <a:p>
@@ -4197,7 +4885,7 @@
                 </a:solidFill>
                 <a:latin typeface="Calibri"/>
               </a:rPr>
-              <a:t>–   Se detecta con un dato objetivo, no con intuicion: en la Clase 1 cada estudiante definio entre tres y cinco capacidades para CloudLite, asi que basta contar las de hoy y compararlas con esa linea base</a:t>
+              <a:t>–   Una retroalimentacion accionable tiene cuatro partes: observacion, evidencia, impacto y accion con fecha. "Falta seguridad" no cumple ninguna. "En el diagrama de despliegue la base de datos esta en la subred publica</a:t>
             </a:r>
           </a:p>
           <a:p>
@@ -4213,7 +4901,7 @@
                 </a:solidFill>
                 <a:latin typeface="Calibri"/>
               </a:rPr>
-              <a:t>–   Si eran cuatro y hoy son nueve, hay scope creep, y da igual que las nuevas suenen interesantes.</a:t>
+              <a:t>–   Contradice el control que ustedes escribieron para la amenaza de acceso no autorizado</a:t>
             </a:r>
           </a:p>
           <a:p>
@@ -4229,7 +4917,7 @@
                 </a:solidFill>
                 <a:latin typeface="Calibri"/>
               </a:rPr>
-              <a:t>–   La segunda patologia es el teatro de microservicios: servicios separados en el diagrama que en la practica no son unidades independientes.</a:t>
+              <a:t>–   Si lo sustentan asi en la Clase 15 el evaluador concluira que el modelo de amenazas se escribio sin mirar el diagrama; muevanla a subred privada y dejen solo la API expuesta, antes de la Clase 12" cumple las cuatro.</a:t>
             </a:r>
           </a:p>
         </p:txBody>
@@ -4410,7 +5098,7 @@
                 </a:solidFill>
                 <a:latin typeface="Calibri"/>
               </a:rPr>
-              <a:t>Scope creep y arquitectura de papel: las dos patologias con nombre propio (2/2)</a:t>
+              <a:t>Retroalimentacion accionable: observacion, evidencia, impacto y accion con fecha (2/2)</a:t>
             </a:r>
           </a:p>
         </p:txBody>
@@ -4449,7 +5137,7 @@
                 </a:solidFill>
                 <a:latin typeface="Calibri"/>
               </a:rPr>
-              <a:t>–   Se detecta con cuatro preguntas de una linea, todas respondibles por el estudiante: se puede desplegar ese servicio sin desplegar los otros, tiene sus propios datos o comparte tablas con el vecino, puede fallar sin tumbar a los demas</a:t>
+              <a:t>–   Y la revision entre pares cumple una funcion que la del docente no puede: explicarle el sistema a otro estudiante obliga a verbalizar decisiones que nunca se dijeron en voz alta, y ahi el propio autor descubre sus huecos.</a:t>
             </a:r>
           </a:p>
           <a:p>
@@ -4465,39 +5153,7 @@
                 </a:solidFill>
                 <a:latin typeface="Calibri"/>
               </a:rPr>
-              <a:t>–   Y existe una razon de negocio por la que cambiaria en un momento distinto al resto.</a:t>
-            </a:r>
-          </a:p>
-          <a:p>
-            <a:pPr>
-              <a:spcAft>
-                <a:spcPts val="800"/>
-              </a:spcAft>
-            </a:pPr>
-            <a:r>
-              <a:rPr sz="2000" b="0" i="0">
-                <a:solidFill>
-                  <a:srgbClr val="333333"/>
-                </a:solidFill>
-                <a:latin typeface="Calibri"/>
-              </a:rPr>
-              <a:t>–   En CloudLite el caso clasico es el "servicio de autenticacion" dibujado como caja aparte que en el repositorio es un modulo dentro de la misma API, escribe en las mismas tablas y se despliega en el mismo contenedor.</a:t>
-            </a:r>
-          </a:p>
-          <a:p>
-            <a:pPr>
-              <a:spcAft>
-                <a:spcPts val="800"/>
-              </a:spcAft>
-            </a:pPr>
-            <a:r>
-              <a:rPr sz="2000" b="0" i="0">
-                <a:solidFill>
-                  <a:srgbClr val="333333"/>
-                </a:solidFill>
-                <a:latin typeface="Calibri"/>
-              </a:rPr>
-              <a:t>–   No es un microservicio, es un modulo, y decirlo no castiga al estudiante: corrige el vocabulario antes del Parcial 3, donde esa distincion se evalua.</a:t>
+              <a:t>–   El formato eficiente es de siete a ocho minutos por proyecto, con reloj visible, y el revisor asignado (otro estudiante, u otro equipo si el docente los autorizo) entregando por escrito una observacion y una pregunta.</a:t>
             </a:r>
           </a:p>
         </p:txBody>
@@ -4678,7 +5334,7 @@
                 </a:solidFill>
                 <a:latin typeface="Calibri"/>
               </a:rPr>
-              <a:t>Retroalimentacion accionable: observacion, evidencia, impacto y accion con fecha (1/2)</a:t>
+              <a:t>El semaforo: el umbral que decide si el proyecto va a tiempo (1/2)</a:t>
             </a:r>
           </a:p>
         </p:txBody>
@@ -4717,7 +5373,7 @@
                 </a:solidFill>
                 <a:latin typeface="Calibri"/>
               </a:rPr>
-              <a:t>–   La retroalimentacion es la mitad del valor del dia y tiene tecnica propia.</a:t>
+              <a:t>–   Falta el criterio para decidir si un proyecto va a tiempo, y aqui el docente necesita un umbral y no una impresion.</a:t>
             </a:r>
           </a:p>
           <a:p>
@@ -4733,7 +5389,7 @@
                 </a:solidFill>
                 <a:latin typeface="Calibri"/>
               </a:rPr>
-              <a:t>–   Una retroalimentacion accionable tiene cuatro partes: observacion, evidencia, impacto y accion con fecha. "Falta seguridad" no cumple ninguna. "En el diagrama de despliegue la base de datos esta en la subred publica</a:t>
+              <a:t>–   Con seis artefactos esperados la regla practica es un semaforo: verde si estan los seis y a lo sumo una cadena de trazabilidad rota</a:t>
             </a:r>
           </a:p>
           <a:p>
@@ -4749,7 +5405,7 @@
                 </a:solidFill>
                 <a:latin typeface="Calibri"/>
               </a:rPr>
-              <a:t>–   Contradice el control que ustedes escribieron para la amenaza de acceso no autorizado</a:t>
+              <a:t>–   Amarillo si hay cinco de seis, o dos o tres cadenas rotas pero corregibles editando documentos; rojo si falta el C4 de Contenedores o el diagrama de despliegue</a:t>
             </a:r>
           </a:p>
           <a:p>
@@ -4765,7 +5421,23 @@
                 </a:solidFill>
                 <a:latin typeface="Calibri"/>
               </a:rPr>
-              <a:t>–   Si lo sustentan asi en la Clase 15 el evaluador concluira que el modelo de amenazas se escribio sin mirar el diagrama; muevanla a subred privada y dejen solo la API expuesta, antes de la Clase 12" cumple las cuatro.</a:t>
+              <a:t>–   Que son la columna vertebral y sin los cuales el resto no se puede evaluar, o si el repositorio no existe.</a:t>
+            </a:r>
+          </a:p>
+          <a:p>
+            <a:pPr>
+              <a:spcAft>
+                <a:spcPts val="800"/>
+              </a:spcAft>
+            </a:pPr>
+            <a:r>
+              <a:rPr sz="2000" b="0" i="0">
+                <a:solidFill>
+                  <a:srgbClr val="333333"/>
+                </a:solidFill>
+                <a:latin typeface="Calibri"/>
+              </a:rPr>
+              <a:t>–   El umbral de seis no es una ley de la ingenieria, es la contabilidad de este curso, y decirlo asi evita que el estudiante lo memorice como estandar internacional.</a:t>
             </a:r>
           </a:p>
         </p:txBody>
@@ -4946,7 +5618,7 @@
                 </a:solidFill>
                 <a:latin typeface="Calibri"/>
               </a:rPr>
-              <a:t>Retroalimentacion accionable: observacion, evidencia, impacto y accion con fecha (2/2)</a:t>
+              <a:t>El semaforo: el umbral que decide si el proyecto va a tiempo (2/2)</a:t>
             </a:r>
           </a:p>
         </p:txBody>
@@ -4985,7 +5657,7 @@
                 </a:solidFill>
                 <a:latin typeface="Calibri"/>
               </a:rPr>
-              <a:t>–   Y la revision entre pares cumple una funcion que la del docente no puede: explicarle el sistema a otro estudiante obliga a verbalizar decisiones que nunca se dijeron en voz alta, y ahi el propio autor descubre sus huecos.</a:t>
+              <a:t>–   Lo transferible es la idea de fondo: un checkpoint se evalua por evidencia presente, no por promesas.</a:t>
             </a:r>
           </a:p>
           <a:p>
@@ -5001,7 +5673,23 @@
                 </a:solidFill>
                 <a:latin typeface="Calibri"/>
               </a:rPr>
-              <a:t>–   El formato eficiente es de siete a ocho minutos por proyecto, con reloj visible, y el revisor asignado (otro estudiante, u otro equipo si el docente los autorizo) entregando por escrito una observacion y una pregunta.</a:t>
+              <a:t>–   Cuando un estudiante dice "eso ya lo tenemos, solo falta subirlo", el estado es amarillo y el acta lo registra con fecha de cierre; no es desconfianza, es que en un proyecto lo que no esta en el repositorio no existe.</a:t>
+            </a:r>
+          </a:p>
+          <a:p>
+            <a:pPr>
+              <a:spcAft>
+                <a:spcPts val="800"/>
+              </a:spcAft>
+            </a:pPr>
+            <a:r>
+              <a:rPr sz="2000" b="0" i="0">
+                <a:solidFill>
+                  <a:srgbClr val="333333"/>
+                </a:solidFill>
+                <a:latin typeface="Calibri"/>
+              </a:rPr>
+              <a:t>–   Para un proyecto en rojo el plan de recuperacion debe reducir alcance, nunca agregar trabajo: menos capacidades, menos servicios, y toda la energia en las dos piezas que faltan.</a:t>
             </a:r>
           </a:p>
         </p:txBody>
@@ -5182,7 +5870,7 @@
                 </a:solidFill>
                 <a:latin typeface="Calibri"/>
               </a:rPr>
-              <a:t>El semaforo: el umbral que decide si el proyecto va a tiempo (1/2)</a:t>
+              <a:t>Preguntas frecuentes y cierre conceptual () (1/3)</a:t>
             </a:r>
           </a:p>
         </p:txBody>
@@ -5221,7 +5909,7 @@
                 </a:solidFill>
                 <a:latin typeface="Calibri"/>
               </a:rPr>
-              <a:t>–   Falta el criterio para decidir si un proyecto va a tiempo, y aqui el docente necesita un umbral y no una impresion.</a:t>
+              <a:t>–   La primera es si esto se califica; la respuesta honesta es que este checkpoint no es la sustentacion final, que ocurre en la Clase 15, ni el Parcial 3, que es la evaluacion escrita de la Clase 14</a:t>
             </a:r>
           </a:p>
           <a:p>
@@ -5237,7 +5925,7 @@
                 </a:solidFill>
                 <a:latin typeface="Calibri"/>
               </a:rPr>
-              <a:t>–   Con seis artefactos esperados la regla practica es un semaforo: verde si estan los seis y a lo sumo una cadena de trazabilidad rota</a:t>
+              <a:t>–   Y que hoy se registra estado y compromisos, pero el acta es el insumo con el que se mirara la entrega final: un gap senalado hoy y no cerrado pesa mucho mas que uno que aparecio despues.</a:t>
             </a:r>
           </a:p>
           <a:p>
@@ -5253,7 +5941,7 @@
                 </a:solidFill>
                 <a:latin typeface="Calibri"/>
               </a:rPr>
-              <a:t>–   Amarillo si hay cinco de seis, o dos o tres cadenas rotas pero corregibles editando documentos; rojo si falta el C4 de Contenedores o el diagrama de despliegue</a:t>
+              <a:t>–   La segunda es por que revisa un companero si el que califica es el docente, y la respuesta es que la revision por pares es practica estandar en la industria y que su valor no esta en el juicio del par sino en la obligacion de explicar</a:t>
             </a:r>
           </a:p>
           <a:p>
@@ -5269,23 +5957,7 @@
                 </a:solidFill>
                 <a:latin typeface="Calibri"/>
               </a:rPr>
-              <a:t>–   Que son la columna vertebral y sin los cuales el resto no se puede evaluar, o si el repositorio no existe.</a:t>
-            </a:r>
-          </a:p>
-          <a:p>
-            <a:pPr>
-              <a:spcAft>
-                <a:spcPts val="800"/>
-              </a:spcAft>
-            </a:pPr>
-            <a:r>
-              <a:rPr sz="2000" b="0" i="0">
-                <a:solidFill>
-                  <a:srgbClr val="333333"/>
-                </a:solidFill>
-                <a:latin typeface="Calibri"/>
-              </a:rPr>
-              <a:t>–   El umbral de seis no es una ley de la ingenieria, es la contabilidad de este curso, y decirlo asi evita que el estudiante lo memorice como estandar internacional.</a:t>
+              <a:t>–   Ademas el par pregunta lo que el docente ya asume, y esas son justo las preguntas que llegan en un Q&amp;A real.</a:t>
             </a:r>
           </a:p>
         </p:txBody>
@@ -5466,7 +6138,7 @@
                 </a:solidFill>
                 <a:latin typeface="Calibri"/>
               </a:rPr>
-              <a:t>El semaforo: el umbral que decide si el proyecto va a tiempo (2/2)</a:t>
+              <a:t>Preguntas frecuentes y cierre conceptual () (2/3)</a:t>
             </a:r>
           </a:p>
         </p:txBody>
@@ -5505,7 +6177,7 @@
                 </a:solidFill>
                 <a:latin typeface="Calibri"/>
               </a:rPr>
-              <a:t>–   Lo transferible es la idea de fondo: un checkpoint se evalua por evidencia presente, no por promesas.</a:t>
+              <a:t>–   La tercera, la mas delicada, es si cambiar el diagrama ahora significa perder el trabajo hecho</a:t>
             </a:r>
           </a:p>
           <a:p>
@@ -5521,7 +6193,7 @@
                 </a:solidFill>
                 <a:latin typeface="Calibri"/>
               </a:rPr>
-              <a:t>–   Cuando un estudiante dice "eso ya lo tenemos, solo falta subirlo", el estado es amarillo y el acta lo registra con fecha de cierre; no es desconfianza, es que en un proyecto lo que no esta en el repositorio no existe.</a:t>
+              <a:t>–   Y la respuesta debe ser tajante: no, porque el artefacto no es el entregable, la decision documentada lo es; un diagrama corregido con una nota de por que cambio vale mas que uno intacto, y ese cambio justificado es exactamente lo que un ADR registra.</a:t>
             </a:r>
           </a:p>
           <a:p>
@@ -5537,7 +6209,39 @@
                 </a:solidFill>
                 <a:latin typeface="Calibri"/>
               </a:rPr>
-              <a:t>–   Para un proyecto en rojo el plan de recuperacion debe reducir alcance, nunca agregar trabajo: menos capacidades, menos servicios, y toda la energia en las dos piezas que faltan.</a:t>
+              <a:t>–   Error tipico del docente que no domina el tema: dejar pasar el checkpoint con un "todo bien, sigan asi".</a:t>
+            </a:r>
+          </a:p>
+          <a:p>
+            <a:pPr>
+              <a:spcAft>
+                <a:spcPts val="800"/>
+              </a:spcAft>
+            </a:pPr>
+            <a:r>
+              <a:rPr sz="2000" b="0" i="0">
+                <a:solidFill>
+                  <a:srgbClr val="333333"/>
+                </a:solidFill>
+                <a:latin typeface="Calibri"/>
+              </a:rPr>
+              <a:t>–   La consecuencia no se ve hoy, se ve en la Clase 15, cuando varios estudiantes sustentan con la base de datos expuesta, con servicios que no son servicios y con nueve capacidades que nunca cerraron</a:t>
+            </a:r>
+          </a:p>
+          <a:p>
+            <a:pPr>
+              <a:spcAft>
+                <a:spcPts val="800"/>
+              </a:spcAft>
+            </a:pPr>
+            <a:r>
+              <a:rPr sz="2000" b="0" i="0">
+                <a:solidFill>
+                  <a:srgbClr val="333333"/>
+                </a:solidFill>
+                <a:latin typeface="Calibri"/>
+              </a:rPr>
+              <a:t>–   Y el docente descubre que las tenia todas a la vista un mes antes; ademas el estudiante interpreta el silencio como aprobacion, asi que el error queda ratificado y luego reclama con razon que nadie se lo advirtio.</a:t>
             </a:r>
           </a:p>
         </p:txBody>
@@ -5718,7 +6422,7 @@
                 </a:solidFill>
                 <a:latin typeface="Calibri"/>
               </a:rPr>
-              <a:t>Preguntas frecuentes y cierre conceptual () (1/3)</a:t>
+              <a:t>Preguntas frecuentes y cierre conceptual () (3/3)</a:t>
             </a:r>
           </a:p>
         </p:txBody>
@@ -5757,7 +6461,7 @@
                 </a:solidFill>
                 <a:latin typeface="Calibri"/>
               </a:rPr>
-              <a:t>–   La primera es si esto se califica; la respuesta honesta es que este checkpoint no es la sustentacion final, que ocurre en la Clase 15, ni el Parcial 3, que es la evaluacion escrita de la Clase 14</a:t>
+              <a:t>–   El segundo error es convertir el checkpoint en clase magistral: cuando el docente detecta un vacio conceptual y se pone a reexplicar contenedores o STRIDE durante veinte minutos</a:t>
             </a:r>
           </a:p>
           <a:p>
@@ -5773,7 +6477,7 @@
                 </a:solidFill>
                 <a:latin typeface="Calibri"/>
               </a:rPr>
-              <a:t>–   Y que hoy se registra estado y compromisos, pero el acta es el insumo con el que se mirara la entrega final: un gap senalado hoy y no cerrado pesa mucho mas que uno que aparecio despues.</a:t>
+              <a:t>–   Se consume el tiempo de los estudiantes que faltan, la mitad del curso queda sin retroalimentacion y el acta sale a medias.</a:t>
             </a:r>
           </a:p>
           <a:p>
@@ -5789,23 +6493,7 @@
                 </a:solidFill>
                 <a:latin typeface="Calibri"/>
               </a:rPr>
-              <a:t>–   La segunda es por que revisa un companero si el que califica es el docente, y la respuesta es que la revision por pares es practica estandar en la industria y que su valor no esta en el juicio del par sino en la obligacion de explicar</a:t>
-            </a:r>
-          </a:p>
-          <a:p>
-            <a:pPr>
-              <a:spcAft>
-                <a:spcPts val="800"/>
-              </a:spcAft>
-            </a:pPr>
-            <a:r>
-              <a:rPr sz="2000" b="0" i="0">
-                <a:solidFill>
-                  <a:srgbClr val="333333"/>
-                </a:solidFill>
-                <a:latin typeface="Calibri"/>
-              </a:rPr>
-              <a:t>–   Ademas el par pregunta lo que el docente ya asume, y esas son justo las preguntas que llegan en un Q&amp;A real.</a:t>
+              <a:t>–   Lo correcto es anotar el vacio, dar la accion concreta con fecha y seguir; si el vacio es general al grupo, se atiende en cinco minutos al cierre para todos, no proyecto por proyecto.</a:t>
             </a:r>
           </a:p>
         </p:txBody>
@@ -5986,21 +6674,141 @@
                 </a:solidFill>
                 <a:latin typeface="Calibri"/>
               </a:rPr>
-              <a:t>Preguntas frecuentes y cierre conceptual () (2/3)</a:t>
-            </a:r>
-          </a:p>
-        </p:txBody>
-      </p:sp>
-      <p:sp>
-        <p:nvSpPr>
-          <p:cNvPr id="5" name="TextBox 4"/>
+              <a:t>El C4 Component: por dentro de la API</a:t>
+            </a:r>
+          </a:p>
+        </p:txBody>
+      </p:sp>
+      <p:sp>
+        <p:nvSpPr>
+          <p:cNvPr id="5" name="Rounded Rectangle 4"/>
+          <p:cNvSpPr/>
+          <p:nvPr/>
+        </p:nvSpPr>
+        <p:spPr>
+          <a:xfrm>
+            <a:off x="457200" y="1261872"/>
+            <a:ext cx="11277295" cy="5093208"/>
+          </a:xfrm>
+          <a:prstGeom prst="roundRect">
+            <a:avLst>
+              <a:gd name="adj" fmla="val 12000"/>
+            </a:avLst>
+          </a:prstGeom>
+          <a:solidFill>
+            <a:srgbClr val="1E2A38"/>
+          </a:solidFill>
+          <a:ln>
+            <a:noFill/>
+          </a:ln>
+        </p:spPr>
+        <p:style>
+          <a:lnRef idx="1">
+            <a:schemeClr val="accent1"/>
+          </a:lnRef>
+          <a:fillRef idx="3">
+            <a:schemeClr val="accent1"/>
+          </a:fillRef>
+          <a:effectRef idx="2">
+            <a:schemeClr val="accent1"/>
+          </a:effectRef>
+          <a:fontRef idx="minor">
+            <a:schemeClr val="lt1"/>
+          </a:fontRef>
+        </p:style>
+        <p:txBody>
+          <a:bodyPr rtlCol="0" anchor="ctr"/>
+          <a:lstStyle/>
+          <a:p>
+            <a:pPr algn="ctr"/>
+          </a:p>
+        </p:txBody>
+      </p:sp>
+      <p:sp>
+        <p:nvSpPr>
+          <p:cNvPr id="6" name="Rectangle 5"/>
+          <p:cNvSpPr/>
+          <p:nvPr/>
+        </p:nvSpPr>
+        <p:spPr>
+          <a:xfrm>
+            <a:off x="457200" y="1261872"/>
+            <a:ext cx="11277295" cy="320040"/>
+          </a:xfrm>
+          <a:prstGeom prst="rect">
+            <a:avLst/>
+          </a:prstGeom>
+          <a:solidFill>
+            <a:srgbClr val="095292"/>
+          </a:solidFill>
+          <a:ln>
+            <a:noFill/>
+          </a:ln>
+        </p:spPr>
+        <p:style>
+          <a:lnRef idx="1">
+            <a:schemeClr val="accent1"/>
+          </a:lnRef>
+          <a:fillRef idx="3">
+            <a:schemeClr val="accent1"/>
+          </a:fillRef>
+          <a:effectRef idx="2">
+            <a:schemeClr val="accent1"/>
+          </a:effectRef>
+          <a:fontRef idx="minor">
+            <a:schemeClr val="lt1"/>
+          </a:fontRef>
+        </p:style>
+        <p:txBody>
+          <a:bodyPr rtlCol="0" anchor="ctr"/>
+          <a:lstStyle/>
+          <a:p>
+            <a:pPr algn="ctr"/>
+          </a:p>
+        </p:txBody>
+      </p:sp>
+      <p:sp>
+        <p:nvSpPr>
+          <p:cNvPr id="7" name="TextBox 6"/>
           <p:cNvSpPr txBox="1"/>
           <p:nvPr/>
         </p:nvSpPr>
         <p:spPr>
           <a:xfrm>
-            <a:off x="457200" y="1170432"/>
-            <a:ext cx="11277295" cy="5230368"/>
+            <a:off x="685800" y="1307592"/>
+            <a:ext cx="10820095" cy="256032"/>
+          </a:xfrm>
+          <a:prstGeom prst="rect">
+            <a:avLst/>
+          </a:prstGeom>
+          <a:noFill/>
+        </p:spPr>
+        <p:txBody>
+          <a:bodyPr wrap="square" anchor="ctr"/>
+          <a:lstStyle/>
+          <a:p>
+            <a:r>
+              <a:rPr sz="1000" b="1" i="0">
+                <a:solidFill>
+                  <a:srgbClr val="269CCB"/>
+                </a:solidFill>
+                <a:latin typeface="Calibri"/>
+              </a:rPr>
+              <a:t>● ● ●</a:t>
+            </a:r>
+          </a:p>
+        </p:txBody>
+      </p:sp>
+      <p:sp>
+        <p:nvSpPr>
+          <p:cNvPr id="8" name="TextBox 7"/>
+          <p:cNvSpPr txBox="1"/>
+          <p:nvPr/>
+        </p:nvSpPr>
+        <p:spPr>
+          <a:xfrm>
+            <a:off x="777240" y="1719072"/>
+            <a:ext cx="10637215" cy="4453128"/>
           </a:xfrm>
           <a:prstGeom prst="rect">
             <a:avLst/>
@@ -6015,88 +6823,280 @@
           <a:p>
             <a:pPr>
               <a:spcAft>
-                <a:spcPts val="800"/>
+                <a:spcPts val="371"/>
               </a:spcAft>
             </a:pPr>
             <a:r>
-              <a:rPr sz="2000" b="0" i="0">
-                <a:solidFill>
-                  <a:srgbClr val="333333"/>
-                </a:solidFill>
-                <a:latin typeface="Calibri"/>
-              </a:rPr>
-              <a:t>–   La tercera, la mas delicada, es si cambiar el diagrama ahora significa perder el trabajo hecho</a:t>
+              <a:rPr sz="1300" b="0" i="0">
+                <a:solidFill>
+                  <a:srgbClr val="FFFFFF"/>
+                </a:solidFill>
+                <a:latin typeface="Calibri"/>
+              </a:rPr>
+              <a:t>flowchart TB</a:t>
             </a:r>
           </a:p>
           <a:p>
             <a:pPr>
               <a:spcAft>
-                <a:spcPts val="800"/>
+                <a:spcPts val="371"/>
               </a:spcAft>
             </a:pPr>
             <a:r>
-              <a:rPr sz="2000" b="0" i="0">
-                <a:solidFill>
-                  <a:srgbClr val="333333"/>
-                </a:solidFill>
-                <a:latin typeface="Calibri"/>
-              </a:rPr>
-              <a:t>–   Y la respuesta debe ser tajante: no, porque el artefacto no es el entregable, la decision documentada lo es; un diagrama corregido con una nota de por que cambio vale mas que uno intacto, y ese cambio justificado es exactamente lo que un ADR registra.</a:t>
+              <a:rPr sz="1300" b="0" i="0">
+                <a:solidFill>
+                  <a:srgbClr val="FFFFFF"/>
+                </a:solidFill>
+                <a:latin typeface="Calibri"/>
+              </a:rPr>
+              <a:t>  subgraph api[API REST de CloudLite - Node + Express]</a:t>
             </a:r>
           </a:p>
           <a:p>
             <a:pPr>
               <a:spcAft>
-                <a:spcPts val="800"/>
+                <a:spcPts val="371"/>
               </a:spcAft>
             </a:pPr>
             <a:r>
-              <a:rPr sz="2000" b="0" i="0">
-                <a:solidFill>
-                  <a:srgbClr val="333333"/>
-                </a:solidFill>
-                <a:latin typeface="Calibri"/>
-              </a:rPr>
-              <a:t>–   Error tipico del docente que no domina el tema: dejar pasar el checkpoint con un "todo bien, sigan asi".</a:t>
+              <a:rPr sz="1300" b="0" i="0">
+                <a:solidFill>
+                  <a:srgbClr val="FFFFFF"/>
+                </a:solidFill>
+                <a:latin typeface="Calibri"/>
+              </a:rPr>
+              <a:t>    rutas[Capa de rutas&lt;br/&gt;valida entrada y responde HTTP]</a:t>
             </a:r>
           </a:p>
           <a:p>
             <a:pPr>
               <a:spcAft>
-                <a:spcPts val="800"/>
+                <a:spcPts val="371"/>
               </a:spcAft>
             </a:pPr>
             <a:r>
-              <a:rPr sz="2000" b="0" i="0">
-                <a:solidFill>
-                  <a:srgbClr val="333333"/>
-                </a:solidFill>
-                <a:latin typeface="Calibri"/>
-              </a:rPr>
-              <a:t>–   La consecuencia no se ve hoy, se ve en la Clase 15, cuando varios estudiantes sustentan con la base de datos expuesta, con servicios que no son servicios y con nueve capacidades que nunca cerraron</a:t>
+              <a:rPr sz="1300" b="0" i="0">
+                <a:solidFill>
+                  <a:srgbClr val="FFFFFF"/>
+                </a:solidFill>
+                <a:latin typeface="Calibri"/>
+              </a:rPr>
+              <a:t>    servicio[Servicio de dominio&lt;br/&gt;reglas de &lt;su dominio&gt;]</a:t>
             </a:r>
           </a:p>
           <a:p>
             <a:pPr>
               <a:spcAft>
-                <a:spcPts val="800"/>
+                <a:spcPts val="371"/>
               </a:spcAft>
             </a:pPr>
             <a:r>
-              <a:rPr sz="2000" b="0" i="0">
-                <a:solidFill>
-                  <a:srgbClr val="333333"/>
-                </a:solidFill>
-                <a:latin typeface="Calibri"/>
-              </a:rPr>
-              <a:t>–   Y el docente descubre que las tenia todas a la vista un mes antes; ademas el estudiante interpreta el silencio como aprobacion, asi que el error queda ratificado y luego reclama con razon que nadie se lo advirtio.</a:t>
-            </a:r>
-          </a:p>
-        </p:txBody>
-      </p:sp>
-      <p:sp>
-        <p:nvSpPr>
-          <p:cNvPr id="6" name="TextBox 5"/>
+              <a:rPr sz="1300" b="0" i="0">
+                <a:solidFill>
+                  <a:srgbClr val="FFFFFF"/>
+                </a:solidFill>
+                <a:latin typeface="Calibri"/>
+              </a:rPr>
+              <a:t>    repo[Repositorio&lt;br/&gt;consultas SQL]</a:t>
+            </a:r>
+          </a:p>
+          <a:p>
+            <a:pPr>
+              <a:spcAft>
+                <a:spcPts val="371"/>
+              </a:spcAft>
+            </a:pPr>
+            <a:r>
+              <a:rPr sz="1300" b="0" i="0">
+                <a:solidFill>
+                  <a:srgbClr val="FFFFFF"/>
+                </a:solidFill>
+                <a:latin typeface="Calibri"/>
+              </a:rPr>
+              <a:t>    auth[Autenticacion&lt;br/&gt;verifica el token]</a:t>
+            </a:r>
+          </a:p>
+          <a:p>
+            <a:pPr>
+              <a:spcAft>
+                <a:spcPts val="371"/>
+              </a:spcAft>
+            </a:pPr>
+            <a:r>
+              <a:rPr sz="1300" b="0" i="0">
+                <a:solidFill>
+                  <a:srgbClr val="FFFFFF"/>
+                </a:solidFill>
+                <a:latin typeface="Calibri"/>
+              </a:rPr>
+              <a:t>  end</a:t>
+            </a:r>
+          </a:p>
+          <a:p>
+            <a:pPr>
+              <a:spcAft>
+                <a:spcPts val="371"/>
+              </a:spcAft>
+            </a:pPr>
+            <a:r>
+              <a:rPr sz="1300" b="0" i="0">
+                <a:solidFill>
+                  <a:srgbClr val="FFFFFF"/>
+                </a:solidFill>
+                <a:latin typeface="Calibri"/>
+              </a:rPr>
+              <a:t/>
+            </a:r>
+          </a:p>
+          <a:p>
+            <a:pPr>
+              <a:spcAft>
+                <a:spcPts val="371"/>
+              </a:spcAft>
+            </a:pPr>
+            <a:r>
+              <a:rPr sz="1300" b="0" i="0">
+                <a:solidFill>
+                  <a:srgbClr val="FFFFFF"/>
+                </a:solidFill>
+                <a:latin typeface="Calibri"/>
+              </a:rPr>
+              <a:t>  web[Web SPA] --&gt;|JSON/HTTPS| rutas</a:t>
+            </a:r>
+          </a:p>
+          <a:p>
+            <a:pPr>
+              <a:spcAft>
+                <a:spcPts val="371"/>
+              </a:spcAft>
+            </a:pPr>
+            <a:r>
+              <a:rPr sz="1300" b="0" i="0">
+                <a:solidFill>
+                  <a:srgbClr val="FFFFFF"/>
+                </a:solidFill>
+                <a:latin typeface="Calibri"/>
+              </a:rPr>
+              <a:t>  rutas --&gt; auth</a:t>
+            </a:r>
+          </a:p>
+          <a:p>
+            <a:pPr>
+              <a:spcAft>
+                <a:spcPts val="371"/>
+              </a:spcAft>
+            </a:pPr>
+            <a:r>
+              <a:rPr sz="1300" b="0" i="0">
+                <a:solidFill>
+                  <a:srgbClr val="FFFFFF"/>
+                </a:solidFill>
+                <a:latin typeface="Calibri"/>
+              </a:rPr>
+              <a:t>  rutas --&gt; servicio</a:t>
+            </a:r>
+          </a:p>
+          <a:p>
+            <a:pPr>
+              <a:spcAft>
+                <a:spcPts val="371"/>
+              </a:spcAft>
+            </a:pPr>
+            <a:r>
+              <a:rPr sz="1300" b="0" i="0">
+                <a:solidFill>
+                  <a:srgbClr val="FFFFFF"/>
+                </a:solidFill>
+                <a:latin typeface="Calibri"/>
+              </a:rPr>
+              <a:t>  servicio --&gt; repo</a:t>
+            </a:r>
+          </a:p>
+          <a:p>
+            <a:pPr>
+              <a:spcAft>
+                <a:spcPts val="371"/>
+              </a:spcAft>
+            </a:pPr>
+            <a:r>
+              <a:rPr sz="1300" b="0" i="0">
+                <a:solidFill>
+                  <a:srgbClr val="FFFFFF"/>
+                </a:solidFill>
+                <a:latin typeface="Calibri"/>
+              </a:rPr>
+              <a:t>  repo --&gt;|SQL| db[(PostgreSQL)]</a:t>
+            </a:r>
+          </a:p>
+          <a:p>
+            <a:pPr>
+              <a:spcAft>
+                <a:spcPts val="371"/>
+              </a:spcAft>
+            </a:pPr>
+            <a:r>
+              <a:rPr sz="1300" b="0" i="0">
+                <a:solidFill>
+                  <a:srgbClr val="FFFFFF"/>
+                </a:solidFill>
+                <a:latin typeface="Calibri"/>
+              </a:rPr>
+              <a:t/>
+            </a:r>
+          </a:p>
+          <a:p>
+            <a:pPr>
+              <a:spcAft>
+                <a:spcPts val="371"/>
+              </a:spcAft>
+            </a:pPr>
+            <a:r>
+              <a:rPr sz="1300" b="0" i="0">
+                <a:solidFill>
+                  <a:srgbClr val="FFFFFF"/>
+                </a:solidFill>
+                <a:latin typeface="Calibri"/>
+              </a:rPr>
+              <a:t>%% La regla del nivel Component: las cajas son piezas de CODIGO dentro</a:t>
+            </a:r>
+          </a:p>
+          <a:p>
+            <a:pPr>
+              <a:spcAft>
+                <a:spcPts val="371"/>
+              </a:spcAft>
+            </a:pPr>
+            <a:r>
+              <a:rPr sz="1300" b="0" i="0">
+                <a:solidFill>
+                  <a:srgbClr val="FFFFFF"/>
+                </a:solidFill>
+                <a:latin typeface="Calibri"/>
+              </a:rPr>
+              <a:t>%% de UN container, no servicios nuevos. Si le pone un puerto, es un</a:t>
+            </a:r>
+          </a:p>
+          <a:p>
+            <a:pPr>
+              <a:spcAft>
+                <a:spcPts val="371"/>
+              </a:spcAft>
+            </a:pPr>
+            <a:r>
+              <a:rPr sz="1300" b="0" i="0">
+                <a:solidFill>
+                  <a:srgbClr val="FFFFFF"/>
+                </a:solidFill>
+                <a:latin typeface="Calibri"/>
+              </a:rPr>
+              <a:t>%% container y va en el diagrama de la Clase 4.</a:t>
+            </a:r>
+          </a:p>
+        </p:txBody>
+      </p:sp>
+      <p:sp>
+        <p:nvSpPr>
+          <p:cNvPr id="9" name="TextBox 8"/>
           <p:cNvSpPr txBox="1"/>
           <p:nvPr/>
         </p:nvSpPr>
@@ -6327,7 +7327,7 @@
                 </a:solidFill>
                 <a:latin typeface="Calibri"/>
               </a:rPr>
-              <a:t> Encuadre: hoy avanzamos el PI en… + entregable concreto.</a:t>
+              <a:t> Encuadre del tema y objetivos de la clase.</a:t>
             </a:r>
           </a:p>
           <a:p>
@@ -6343,7 +7343,7 @@
                 </a:solidFill>
                 <a:latin typeface="Calibri"/>
               </a:rPr>
-              <a:t>10–40</a:t>
+              <a:t>10–70</a:t>
             </a:r>
             <a:r>
               <a:rPr sz="2000" b="0" i="0">
@@ -6352,7 +7352,7 @@
                 </a:solidFill>
                 <a:latin typeface="Calibri"/>
               </a:rPr>
-              <a:t> Teoría Core breve (solo lo necesario para el taller PI).</a:t>
+              <a:t> Conceptos del tema, uno por lámina, con ejemplos sobre CloudLite.</a:t>
             </a:r>
           </a:p>
           <a:p>
@@ -6377,7 +7377,7 @@
                 </a:solidFill>
                 <a:latin typeface="Calibri"/>
               </a:rPr>
-              <a:t>40–100</a:t>
+              <a:t>70–100</a:t>
             </a:r>
             <a:r>
               <a:rPr sz="2000" b="0" i="0">
@@ -6386,7 +7386,7 @@
                 </a:solidFill>
                 <a:latin typeface="Calibri"/>
               </a:rPr>
-              <a:t> Trabajo guiado del PI (demo en vivo + avance individual).</a:t>
+              <a:t> Ejemplos resueltos y demo del docente sobre el tema.</a:t>
             </a:r>
           </a:p>
           <a:p>
@@ -6411,7 +7411,7 @@
                 </a:solidFill>
                 <a:latin typeface="Calibri"/>
               </a:rPr>
-              <a:t> Revisión de evidencias del PI.</a:t>
+              <a:t> Práctica (opcional, guía en la carpeta de la clase).</a:t>
             </a:r>
           </a:p>
           <a:p>
@@ -6436,7 +7436,7 @@
                 </a:solidFill>
                 <a:latin typeface="Calibri"/>
               </a:rPr>
-              <a:t> Cierre: criterio de éxito + plazo en la fecha que indique el docente.</a:t>
+              <a:t> Preguntas y cierre conceptual.</a:t>
             </a:r>
           </a:p>
         </p:txBody>
@@ -6511,13 +7511,13 @@
         <p:spPr>
           <a:xfrm>
             <a:off x="0" y="0"/>
-            <a:ext cx="12191695" cy="960120"/>
+            <a:ext cx="12191695" cy="164592"/>
           </a:xfrm>
           <a:prstGeom prst="rect">
             <a:avLst/>
           </a:prstGeom>
           <a:solidFill>
-            <a:srgbClr val="095292"/>
+            <a:srgbClr val="269CCB"/>
           </a:solidFill>
           <a:ln>
             <a:noFill/>
@@ -6545,1099 +7545,9 @@
           </a:p>
         </p:txBody>
       </p:sp>
-      <p:sp>
-        <p:nvSpPr>
-          <p:cNvPr id="3" name="Rectangle 2"/>
-          <p:cNvSpPr/>
-          <p:nvPr/>
-        </p:nvSpPr>
-        <p:spPr>
-          <a:xfrm>
-            <a:off x="0" y="960120"/>
-            <a:ext cx="12191695" cy="41148"/>
-          </a:xfrm>
-          <a:prstGeom prst="rect">
-            <a:avLst/>
-          </a:prstGeom>
-          <a:solidFill>
-            <a:srgbClr val="FFD000"/>
-          </a:solidFill>
-          <a:ln>
-            <a:noFill/>
-          </a:ln>
-        </p:spPr>
-        <p:style>
-          <a:lnRef idx="1">
-            <a:schemeClr val="accent1"/>
-          </a:lnRef>
-          <a:fillRef idx="3">
-            <a:schemeClr val="accent1"/>
-          </a:fillRef>
-          <a:effectRef idx="2">
-            <a:schemeClr val="accent1"/>
-          </a:effectRef>
-          <a:fontRef idx="minor">
-            <a:schemeClr val="lt1"/>
-          </a:fontRef>
-        </p:style>
-        <p:txBody>
-          <a:bodyPr rtlCol="0" anchor="ctr"/>
-          <a:lstStyle/>
-          <a:p>
-            <a:pPr algn="ctr"/>
-          </a:p>
-        </p:txBody>
-      </p:sp>
-      <p:sp>
-        <p:nvSpPr>
-          <p:cNvPr id="4" name="TextBox 3"/>
-          <p:cNvSpPr txBox="1"/>
-          <p:nvPr/>
-        </p:nvSpPr>
-        <p:spPr>
-          <a:xfrm>
-            <a:off x="457200" y="164592"/>
-            <a:ext cx="11277295" cy="502920"/>
-          </a:xfrm>
-          <a:prstGeom prst="rect">
-            <a:avLst/>
-          </a:prstGeom>
-          <a:noFill/>
-        </p:spPr>
-        <p:txBody>
-          <a:bodyPr wrap="square">
-            <a:spAutoFit/>
-          </a:bodyPr>
-          <a:lstStyle/>
-          <a:p>
-            <a:r>
-              <a:rPr sz="2600" b="1" i="0">
-                <a:solidFill>
-                  <a:srgbClr val="FFFFFF"/>
-                </a:solidFill>
-                <a:latin typeface="Calibri"/>
-              </a:rPr>
-              <a:t>Preguntas frecuentes y cierre conceptual () (3/3)</a:t>
-            </a:r>
-          </a:p>
-        </p:txBody>
-      </p:sp>
-      <p:sp>
-        <p:nvSpPr>
-          <p:cNvPr id="5" name="TextBox 4"/>
-          <p:cNvSpPr txBox="1"/>
-          <p:nvPr/>
-        </p:nvSpPr>
-        <p:spPr>
-          <a:xfrm>
-            <a:off x="457200" y="1170432"/>
-            <a:ext cx="11277295" cy="5230368"/>
-          </a:xfrm>
-          <a:prstGeom prst="rect">
-            <a:avLst/>
-          </a:prstGeom>
-          <a:noFill/>
-        </p:spPr>
-        <p:txBody>
-          <a:bodyPr wrap="square">
-            <a:spAutoFit/>
-          </a:bodyPr>
-          <a:lstStyle/>
-          <a:p>
-            <a:pPr>
-              <a:spcAft>
-                <a:spcPts val="800"/>
-              </a:spcAft>
-            </a:pPr>
-            <a:r>
-              <a:rPr sz="2000" b="0" i="0">
-                <a:solidFill>
-                  <a:srgbClr val="333333"/>
-                </a:solidFill>
-                <a:latin typeface="Calibri"/>
-              </a:rPr>
-              <a:t>–   El segundo error es convertir el checkpoint en clase magistral: cuando el docente detecta un vacio conceptual y se pone a reexplicar contenedores o STRIDE durante veinte minutos</a:t>
-            </a:r>
-          </a:p>
-          <a:p>
-            <a:pPr>
-              <a:spcAft>
-                <a:spcPts val="800"/>
-              </a:spcAft>
-            </a:pPr>
-            <a:r>
-              <a:rPr sz="2000" b="0" i="0">
-                <a:solidFill>
-                  <a:srgbClr val="333333"/>
-                </a:solidFill>
-                <a:latin typeface="Calibri"/>
-              </a:rPr>
-              <a:t>–   Se consume el tiempo de los estudiantes que faltan, la mitad del curso queda sin retroalimentacion y el acta sale a medias.</a:t>
-            </a:r>
-          </a:p>
-          <a:p>
-            <a:pPr>
-              <a:spcAft>
-                <a:spcPts val="800"/>
-              </a:spcAft>
-            </a:pPr>
-            <a:r>
-              <a:rPr sz="2000" b="0" i="0">
-                <a:solidFill>
-                  <a:srgbClr val="333333"/>
-                </a:solidFill>
-                <a:latin typeface="Calibri"/>
-              </a:rPr>
-              <a:t>–   Lo correcto es anotar el vacio, dar la accion concreta con fecha y seguir; si el vacio es general al grupo, se atiende en cinco minutos al cierre para todos, no proyecto por proyecto.</a:t>
-            </a:r>
-          </a:p>
-        </p:txBody>
-      </p:sp>
-      <p:sp>
-        <p:nvSpPr>
-          <p:cNvPr id="6" name="TextBox 5"/>
-          <p:cNvSpPr txBox="1"/>
-          <p:nvPr/>
-        </p:nvSpPr>
-        <p:spPr>
-          <a:xfrm>
-            <a:off x="11185855" y="6473952"/>
-            <a:ext cx="640080" cy="274320"/>
-          </a:xfrm>
-          <a:prstGeom prst="rect">
-            <a:avLst/>
-          </a:prstGeom>
-          <a:noFill/>
-        </p:spPr>
-        <p:txBody>
-          <a:bodyPr wrap="square">
-            <a:spAutoFit/>
-          </a:bodyPr>
-          <a:lstStyle/>
-          <a:p>
-            <a:pPr algn="r"/>
-            <a:r>
-              <a:rPr sz="1100" b="0" i="0">
-                <a:solidFill>
-                  <a:srgbClr val="666666"/>
-                </a:solidFill>
-                <a:latin typeface="Calibri"/>
-              </a:rPr>
-              <a:t>20</a:t>
-            </a:r>
-          </a:p>
-        </p:txBody>
-      </p:sp>
-    </p:spTree>
-  </p:cSld>
-  <p:clrMapOvr>
-    <a:masterClrMapping/>
-  </p:clrMapOvr>
-</p:sld>
-</file>
-
-<file path=ppt/slides/slide21.xml><?xml version="1.0" encoding="utf-8"?>
-<p:sld xmlns:a="http://schemas.openxmlformats.org/drawingml/2006/main" xmlns:p="http://schemas.openxmlformats.org/presentationml/2006/main" xmlns:r="http://schemas.openxmlformats.org/officeDocument/2006/relationships">
-  <p:cSld>
-    <p:bg>
-      <p:bgPr>
-        <a:solidFill>
-          <a:srgbClr val="FFFFFF"/>
-        </a:solidFill>
-        <a:effectLst/>
-      </p:bgPr>
-    </p:bg>
-    <p:spTree>
-      <p:nvGrpSpPr>
-        <p:cNvPr id="1" name=""/>
-        <p:cNvGrpSpPr/>
-        <p:nvPr/>
-      </p:nvGrpSpPr>
-      <p:grpSpPr/>
-      <p:sp>
-        <p:nvSpPr>
-          <p:cNvPr id="2" name="Rectangle 1"/>
-          <p:cNvSpPr/>
-          <p:nvPr/>
-        </p:nvSpPr>
-        <p:spPr>
-          <a:xfrm>
-            <a:off x="0" y="0"/>
-            <a:ext cx="12191695" cy="960120"/>
-          </a:xfrm>
-          <a:prstGeom prst="rect">
-            <a:avLst/>
-          </a:prstGeom>
-          <a:solidFill>
-            <a:srgbClr val="095292"/>
-          </a:solidFill>
-          <a:ln>
-            <a:noFill/>
-          </a:ln>
-        </p:spPr>
-        <p:style>
-          <a:lnRef idx="1">
-            <a:schemeClr val="accent1"/>
-          </a:lnRef>
-          <a:fillRef idx="3">
-            <a:schemeClr val="accent1"/>
-          </a:fillRef>
-          <a:effectRef idx="2">
-            <a:schemeClr val="accent1"/>
-          </a:effectRef>
-          <a:fontRef idx="minor">
-            <a:schemeClr val="lt1"/>
-          </a:fontRef>
-        </p:style>
-        <p:txBody>
-          <a:bodyPr rtlCol="0" anchor="ctr"/>
-          <a:lstStyle/>
-          <a:p>
-            <a:pPr algn="ctr"/>
-          </a:p>
-        </p:txBody>
-      </p:sp>
-      <p:sp>
-        <p:nvSpPr>
-          <p:cNvPr id="3" name="Rectangle 2"/>
-          <p:cNvSpPr/>
-          <p:nvPr/>
-        </p:nvSpPr>
-        <p:spPr>
-          <a:xfrm>
-            <a:off x="0" y="960120"/>
-            <a:ext cx="12191695" cy="41148"/>
-          </a:xfrm>
-          <a:prstGeom prst="rect">
-            <a:avLst/>
-          </a:prstGeom>
-          <a:solidFill>
-            <a:srgbClr val="FFD000"/>
-          </a:solidFill>
-          <a:ln>
-            <a:noFill/>
-          </a:ln>
-        </p:spPr>
-        <p:style>
-          <a:lnRef idx="1">
-            <a:schemeClr val="accent1"/>
-          </a:lnRef>
-          <a:fillRef idx="3">
-            <a:schemeClr val="accent1"/>
-          </a:fillRef>
-          <a:effectRef idx="2">
-            <a:schemeClr val="accent1"/>
-          </a:effectRef>
-          <a:fontRef idx="minor">
-            <a:schemeClr val="lt1"/>
-          </a:fontRef>
-        </p:style>
-        <p:txBody>
-          <a:bodyPr rtlCol="0" anchor="ctr"/>
-          <a:lstStyle/>
-          <a:p>
-            <a:pPr algn="ctr"/>
-          </a:p>
-        </p:txBody>
-      </p:sp>
-      <p:sp>
-        <p:nvSpPr>
-          <p:cNvPr id="4" name="TextBox 3"/>
-          <p:cNvSpPr txBox="1"/>
-          <p:nvPr/>
-        </p:nvSpPr>
-        <p:spPr>
-          <a:xfrm>
-            <a:off x="457200" y="164592"/>
-            <a:ext cx="11277295" cy="502920"/>
-          </a:xfrm>
-          <a:prstGeom prst="rect">
-            <a:avLst/>
-          </a:prstGeom>
-          <a:noFill/>
-        </p:spPr>
-        <p:txBody>
-          <a:bodyPr wrap="square">
-            <a:spAutoFit/>
-          </a:bodyPr>
-          <a:lstStyle/>
-          <a:p>
-            <a:r>
-              <a:rPr sz="2600" b="1" i="0">
-                <a:solidFill>
-                  <a:srgbClr val="FFFFFF"/>
-                </a:solidFill>
-                <a:latin typeface="Calibri"/>
-              </a:rPr>
-              <a:t>El C4 Component: por dentro de la API</a:t>
-            </a:r>
-          </a:p>
-        </p:txBody>
-      </p:sp>
-      <p:sp>
-        <p:nvSpPr>
-          <p:cNvPr id="5" name="Rounded Rectangle 4"/>
-          <p:cNvSpPr/>
-          <p:nvPr/>
-        </p:nvSpPr>
-        <p:spPr>
-          <a:xfrm>
-            <a:off x="457200" y="1261872"/>
-            <a:ext cx="11277295" cy="5093208"/>
-          </a:xfrm>
-          <a:prstGeom prst="roundRect">
-            <a:avLst>
-              <a:gd name="adj" fmla="val 12000"/>
-            </a:avLst>
-          </a:prstGeom>
-          <a:solidFill>
-            <a:srgbClr val="1E2A38"/>
-          </a:solidFill>
-          <a:ln>
-            <a:noFill/>
-          </a:ln>
-        </p:spPr>
-        <p:style>
-          <a:lnRef idx="1">
-            <a:schemeClr val="accent1"/>
-          </a:lnRef>
-          <a:fillRef idx="3">
-            <a:schemeClr val="accent1"/>
-          </a:fillRef>
-          <a:effectRef idx="2">
-            <a:schemeClr val="accent1"/>
-          </a:effectRef>
-          <a:fontRef idx="minor">
-            <a:schemeClr val="lt1"/>
-          </a:fontRef>
-        </p:style>
-        <p:txBody>
-          <a:bodyPr rtlCol="0" anchor="ctr"/>
-          <a:lstStyle/>
-          <a:p>
-            <a:pPr algn="ctr"/>
-          </a:p>
-        </p:txBody>
-      </p:sp>
-      <p:sp>
-        <p:nvSpPr>
-          <p:cNvPr id="6" name="Rectangle 5"/>
-          <p:cNvSpPr/>
-          <p:nvPr/>
-        </p:nvSpPr>
-        <p:spPr>
-          <a:xfrm>
-            <a:off x="457200" y="1261872"/>
-            <a:ext cx="11277295" cy="320040"/>
-          </a:xfrm>
-          <a:prstGeom prst="rect">
-            <a:avLst/>
-          </a:prstGeom>
-          <a:solidFill>
-            <a:srgbClr val="095292"/>
-          </a:solidFill>
-          <a:ln>
-            <a:noFill/>
-          </a:ln>
-        </p:spPr>
-        <p:style>
-          <a:lnRef idx="1">
-            <a:schemeClr val="accent1"/>
-          </a:lnRef>
-          <a:fillRef idx="3">
-            <a:schemeClr val="accent1"/>
-          </a:fillRef>
-          <a:effectRef idx="2">
-            <a:schemeClr val="accent1"/>
-          </a:effectRef>
-          <a:fontRef idx="minor">
-            <a:schemeClr val="lt1"/>
-          </a:fontRef>
-        </p:style>
-        <p:txBody>
-          <a:bodyPr rtlCol="0" anchor="ctr"/>
-          <a:lstStyle/>
-          <a:p>
-            <a:pPr algn="ctr"/>
-          </a:p>
-        </p:txBody>
-      </p:sp>
-      <p:sp>
-        <p:nvSpPr>
-          <p:cNvPr id="7" name="TextBox 6"/>
-          <p:cNvSpPr txBox="1"/>
-          <p:nvPr/>
-        </p:nvSpPr>
-        <p:spPr>
-          <a:xfrm>
-            <a:off x="685800" y="1307592"/>
-            <a:ext cx="10820095" cy="256032"/>
-          </a:xfrm>
-          <a:prstGeom prst="rect">
-            <a:avLst/>
-          </a:prstGeom>
-          <a:noFill/>
-        </p:spPr>
-        <p:txBody>
-          <a:bodyPr wrap="square" anchor="ctr"/>
-          <a:lstStyle/>
-          <a:p>
-            <a:r>
-              <a:rPr sz="1000" b="1" i="0">
-                <a:solidFill>
-                  <a:srgbClr val="269CCB"/>
-                </a:solidFill>
-                <a:latin typeface="Calibri"/>
-              </a:rPr>
-              <a:t>● ● ●</a:t>
-            </a:r>
-          </a:p>
-        </p:txBody>
-      </p:sp>
-      <p:sp>
-        <p:nvSpPr>
-          <p:cNvPr id="8" name="TextBox 7"/>
-          <p:cNvSpPr txBox="1"/>
-          <p:nvPr/>
-        </p:nvSpPr>
-        <p:spPr>
-          <a:xfrm>
-            <a:off x="777240" y="1719072"/>
-            <a:ext cx="10637215" cy="4453128"/>
-          </a:xfrm>
-          <a:prstGeom prst="rect">
-            <a:avLst/>
-          </a:prstGeom>
-          <a:noFill/>
-        </p:spPr>
-        <p:txBody>
-          <a:bodyPr wrap="square">
-            <a:spAutoFit/>
-          </a:bodyPr>
-          <a:lstStyle/>
-          <a:p>
-            <a:pPr>
-              <a:spcAft>
-                <a:spcPts val="371"/>
-              </a:spcAft>
-            </a:pPr>
-            <a:r>
-              <a:rPr sz="1300" b="0" i="0">
-                <a:solidFill>
-                  <a:srgbClr val="FFFFFF"/>
-                </a:solidFill>
-                <a:latin typeface="Calibri"/>
-              </a:rPr>
-              <a:t>flowchart TB</a:t>
-            </a:r>
-          </a:p>
-          <a:p>
-            <a:pPr>
-              <a:spcAft>
-                <a:spcPts val="371"/>
-              </a:spcAft>
-            </a:pPr>
-            <a:r>
-              <a:rPr sz="1300" b="0" i="0">
-                <a:solidFill>
-                  <a:srgbClr val="FFFFFF"/>
-                </a:solidFill>
-                <a:latin typeface="Calibri"/>
-              </a:rPr>
-              <a:t>  subgraph api[API REST de CloudLite - Node + Express]</a:t>
-            </a:r>
-          </a:p>
-          <a:p>
-            <a:pPr>
-              <a:spcAft>
-                <a:spcPts val="371"/>
-              </a:spcAft>
-            </a:pPr>
-            <a:r>
-              <a:rPr sz="1300" b="0" i="0">
-                <a:solidFill>
-                  <a:srgbClr val="FFFFFF"/>
-                </a:solidFill>
-                <a:latin typeface="Calibri"/>
-              </a:rPr>
-              <a:t>    rutas[Capa de rutas&lt;br/&gt;valida entrada y responde HTTP]</a:t>
-            </a:r>
-          </a:p>
-          <a:p>
-            <a:pPr>
-              <a:spcAft>
-                <a:spcPts val="371"/>
-              </a:spcAft>
-            </a:pPr>
-            <a:r>
-              <a:rPr sz="1300" b="0" i="0">
-                <a:solidFill>
-                  <a:srgbClr val="FFFFFF"/>
-                </a:solidFill>
-                <a:latin typeface="Calibri"/>
-              </a:rPr>
-              <a:t>    servicio[Servicio de dominio&lt;br/&gt;reglas de &lt;su dominio&gt;]</a:t>
-            </a:r>
-          </a:p>
-          <a:p>
-            <a:pPr>
-              <a:spcAft>
-                <a:spcPts val="371"/>
-              </a:spcAft>
-            </a:pPr>
-            <a:r>
-              <a:rPr sz="1300" b="0" i="0">
-                <a:solidFill>
-                  <a:srgbClr val="FFFFFF"/>
-                </a:solidFill>
-                <a:latin typeface="Calibri"/>
-              </a:rPr>
-              <a:t>    repo[Repositorio&lt;br/&gt;consultas SQL]</a:t>
-            </a:r>
-          </a:p>
-          <a:p>
-            <a:pPr>
-              <a:spcAft>
-                <a:spcPts val="371"/>
-              </a:spcAft>
-            </a:pPr>
-            <a:r>
-              <a:rPr sz="1300" b="0" i="0">
-                <a:solidFill>
-                  <a:srgbClr val="FFFFFF"/>
-                </a:solidFill>
-                <a:latin typeface="Calibri"/>
-              </a:rPr>
-              <a:t>    auth[Autenticacion&lt;br/&gt;verifica el token]</a:t>
-            </a:r>
-          </a:p>
-          <a:p>
-            <a:pPr>
-              <a:spcAft>
-                <a:spcPts val="371"/>
-              </a:spcAft>
-            </a:pPr>
-            <a:r>
-              <a:rPr sz="1300" b="0" i="0">
-                <a:solidFill>
-                  <a:srgbClr val="FFFFFF"/>
-                </a:solidFill>
-                <a:latin typeface="Calibri"/>
-              </a:rPr>
-              <a:t>  end</a:t>
-            </a:r>
-          </a:p>
-          <a:p>
-            <a:pPr>
-              <a:spcAft>
-                <a:spcPts val="371"/>
-              </a:spcAft>
-            </a:pPr>
-            <a:r>
-              <a:rPr sz="1300" b="0" i="0">
-                <a:solidFill>
-                  <a:srgbClr val="FFFFFF"/>
-                </a:solidFill>
-                <a:latin typeface="Calibri"/>
-              </a:rPr>
-              <a:t/>
-            </a:r>
-          </a:p>
-          <a:p>
-            <a:pPr>
-              <a:spcAft>
-                <a:spcPts val="371"/>
-              </a:spcAft>
-            </a:pPr>
-            <a:r>
-              <a:rPr sz="1300" b="0" i="0">
-                <a:solidFill>
-                  <a:srgbClr val="FFFFFF"/>
-                </a:solidFill>
-                <a:latin typeface="Calibri"/>
-              </a:rPr>
-              <a:t>  web[Web SPA] --&gt;|JSON/HTTPS| rutas</a:t>
-            </a:r>
-          </a:p>
-          <a:p>
-            <a:pPr>
-              <a:spcAft>
-                <a:spcPts val="371"/>
-              </a:spcAft>
-            </a:pPr>
-            <a:r>
-              <a:rPr sz="1300" b="0" i="0">
-                <a:solidFill>
-                  <a:srgbClr val="FFFFFF"/>
-                </a:solidFill>
-                <a:latin typeface="Calibri"/>
-              </a:rPr>
-              <a:t>  rutas --&gt; auth</a:t>
-            </a:r>
-          </a:p>
-          <a:p>
-            <a:pPr>
-              <a:spcAft>
-                <a:spcPts val="371"/>
-              </a:spcAft>
-            </a:pPr>
-            <a:r>
-              <a:rPr sz="1300" b="0" i="0">
-                <a:solidFill>
-                  <a:srgbClr val="FFFFFF"/>
-                </a:solidFill>
-                <a:latin typeface="Calibri"/>
-              </a:rPr>
-              <a:t>  rutas --&gt; servicio</a:t>
-            </a:r>
-          </a:p>
-          <a:p>
-            <a:pPr>
-              <a:spcAft>
-                <a:spcPts val="371"/>
-              </a:spcAft>
-            </a:pPr>
-            <a:r>
-              <a:rPr sz="1300" b="0" i="0">
-                <a:solidFill>
-                  <a:srgbClr val="FFFFFF"/>
-                </a:solidFill>
-                <a:latin typeface="Calibri"/>
-              </a:rPr>
-              <a:t>  servicio --&gt; repo</a:t>
-            </a:r>
-          </a:p>
-          <a:p>
-            <a:pPr>
-              <a:spcAft>
-                <a:spcPts val="371"/>
-              </a:spcAft>
-            </a:pPr>
-            <a:r>
-              <a:rPr sz="1300" b="0" i="0">
-                <a:solidFill>
-                  <a:srgbClr val="FFFFFF"/>
-                </a:solidFill>
-                <a:latin typeface="Calibri"/>
-              </a:rPr>
-              <a:t>  repo --&gt;|SQL| db[(PostgreSQL)]</a:t>
-            </a:r>
-          </a:p>
-          <a:p>
-            <a:pPr>
-              <a:spcAft>
-                <a:spcPts val="371"/>
-              </a:spcAft>
-            </a:pPr>
-            <a:r>
-              <a:rPr sz="1300" b="0" i="0">
-                <a:solidFill>
-                  <a:srgbClr val="FFFFFF"/>
-                </a:solidFill>
-                <a:latin typeface="Calibri"/>
-              </a:rPr>
-              <a:t/>
-            </a:r>
-          </a:p>
-          <a:p>
-            <a:pPr>
-              <a:spcAft>
-                <a:spcPts val="371"/>
-              </a:spcAft>
-            </a:pPr>
-            <a:r>
-              <a:rPr sz="1300" b="0" i="0">
-                <a:solidFill>
-                  <a:srgbClr val="FFFFFF"/>
-                </a:solidFill>
-                <a:latin typeface="Calibri"/>
-              </a:rPr>
-              <a:t>%% La regla del nivel Component: las cajas son piezas de CODIGO dentro</a:t>
-            </a:r>
-          </a:p>
-          <a:p>
-            <a:pPr>
-              <a:spcAft>
-                <a:spcPts val="371"/>
-              </a:spcAft>
-            </a:pPr>
-            <a:r>
-              <a:rPr sz="1300" b="0" i="0">
-                <a:solidFill>
-                  <a:srgbClr val="FFFFFF"/>
-                </a:solidFill>
-                <a:latin typeface="Calibri"/>
-              </a:rPr>
-              <a:t>%% de UN container, no servicios nuevos. Si le pone un puerto, es un</a:t>
-            </a:r>
-          </a:p>
-          <a:p>
-            <a:pPr>
-              <a:spcAft>
-                <a:spcPts val="371"/>
-              </a:spcAft>
-            </a:pPr>
-            <a:r>
-              <a:rPr sz="1300" b="0" i="0">
-                <a:solidFill>
-                  <a:srgbClr val="FFFFFF"/>
-                </a:solidFill>
-                <a:latin typeface="Calibri"/>
-              </a:rPr>
-              <a:t>%% container y va en el diagrama de la Clase 4.</a:t>
-            </a:r>
-          </a:p>
-        </p:txBody>
-      </p:sp>
-      <p:sp>
-        <p:nvSpPr>
-          <p:cNvPr id="9" name="TextBox 8"/>
-          <p:cNvSpPr txBox="1"/>
-          <p:nvPr/>
-        </p:nvSpPr>
-        <p:spPr>
-          <a:xfrm>
-            <a:off x="11185855" y="6473952"/>
-            <a:ext cx="640080" cy="274320"/>
-          </a:xfrm>
-          <a:prstGeom prst="rect">
-            <a:avLst/>
-          </a:prstGeom>
-          <a:noFill/>
-        </p:spPr>
-        <p:txBody>
-          <a:bodyPr wrap="square">
-            <a:spAutoFit/>
-          </a:bodyPr>
-          <a:lstStyle/>
-          <a:p>
-            <a:pPr algn="r"/>
-            <a:r>
-              <a:rPr sz="1100" b="0" i="0">
-                <a:solidFill>
-                  <a:srgbClr val="666666"/>
-                </a:solidFill>
-                <a:latin typeface="Calibri"/>
-              </a:rPr>
-              <a:t>21</a:t>
-            </a:r>
-          </a:p>
-        </p:txBody>
-      </p:sp>
-    </p:spTree>
-  </p:cSld>
-  <p:clrMapOvr>
-    <a:masterClrMapping/>
-  </p:clrMapOvr>
-</p:sld>
-</file>
-
-<file path=ppt/slides/slide22.xml><?xml version="1.0" encoding="utf-8"?>
-<p:sld xmlns:a="http://schemas.openxmlformats.org/drawingml/2006/main" xmlns:p="http://schemas.openxmlformats.org/presentationml/2006/main" xmlns:r="http://schemas.openxmlformats.org/officeDocument/2006/relationships">
-  <p:cSld>
-    <p:bg>
-      <p:bgPr>
-        <a:solidFill>
-          <a:srgbClr val="FFFFFF"/>
-        </a:solidFill>
-        <a:effectLst/>
-      </p:bgPr>
-    </p:bg>
-    <p:spTree>
-      <p:nvGrpSpPr>
-        <p:cNvPr id="1" name=""/>
-        <p:cNvGrpSpPr/>
-        <p:nvPr/>
-      </p:nvGrpSpPr>
-      <p:grpSpPr/>
-      <p:sp>
-        <p:nvSpPr>
-          <p:cNvPr id="2" name="Rectangle 1"/>
-          <p:cNvSpPr/>
-          <p:nvPr/>
-        </p:nvSpPr>
-        <p:spPr>
-          <a:xfrm>
-            <a:off x="0" y="0"/>
-            <a:ext cx="12191695" cy="1170432"/>
-          </a:xfrm>
-          <a:prstGeom prst="rect">
-            <a:avLst/>
-          </a:prstGeom>
-          <a:solidFill>
-            <a:srgbClr val="095292"/>
-          </a:solidFill>
-          <a:ln>
-            <a:noFill/>
-          </a:ln>
-        </p:spPr>
-        <p:style>
-          <a:lnRef idx="1">
-            <a:schemeClr val="accent1"/>
-          </a:lnRef>
-          <a:fillRef idx="3">
-            <a:schemeClr val="accent1"/>
-          </a:fillRef>
-          <a:effectRef idx="2">
-            <a:schemeClr val="accent1"/>
-          </a:effectRef>
-          <a:fontRef idx="minor">
-            <a:schemeClr val="lt1"/>
-          </a:fontRef>
-        </p:style>
-        <p:txBody>
-          <a:bodyPr rtlCol="0" anchor="ctr"/>
-          <a:lstStyle/>
-          <a:p>
-            <a:pPr algn="ctr"/>
-          </a:p>
-        </p:txBody>
-      </p:sp>
-      <p:sp>
-        <p:nvSpPr>
-          <p:cNvPr id="3" name="Rectangle 2"/>
-          <p:cNvSpPr/>
-          <p:nvPr/>
-        </p:nvSpPr>
-        <p:spPr>
-          <a:xfrm>
-            <a:off x="0" y="1170432"/>
-            <a:ext cx="12191695" cy="41148"/>
-          </a:xfrm>
-          <a:prstGeom prst="rect">
-            <a:avLst/>
-          </a:prstGeom>
-          <a:solidFill>
-            <a:srgbClr val="FFD000"/>
-          </a:solidFill>
-          <a:ln>
-            <a:noFill/>
-          </a:ln>
-        </p:spPr>
-        <p:style>
-          <a:lnRef idx="1">
-            <a:schemeClr val="accent1"/>
-          </a:lnRef>
-          <a:fillRef idx="3">
-            <a:schemeClr val="accent1"/>
-          </a:fillRef>
-          <a:effectRef idx="2">
-            <a:schemeClr val="accent1"/>
-          </a:effectRef>
-          <a:fontRef idx="minor">
-            <a:schemeClr val="lt1"/>
-          </a:fontRef>
-        </p:style>
-        <p:txBody>
-          <a:bodyPr rtlCol="0" anchor="ctr"/>
-          <a:lstStyle/>
-          <a:p>
-            <a:pPr algn="ctr"/>
-          </a:p>
-        </p:txBody>
-      </p:sp>
-      <p:sp>
-        <p:nvSpPr>
-          <p:cNvPr id="4" name="TextBox 3"/>
-          <p:cNvSpPr txBox="1"/>
-          <p:nvPr/>
-        </p:nvSpPr>
-        <p:spPr>
-          <a:xfrm>
-            <a:off x="457200" y="164592"/>
-            <a:ext cx="11277295" cy="384048"/>
-          </a:xfrm>
-          <a:prstGeom prst="rect">
-            <a:avLst/>
-          </a:prstGeom>
-          <a:noFill/>
-        </p:spPr>
-        <p:txBody>
-          <a:bodyPr wrap="square">
-            <a:spAutoFit/>
-          </a:bodyPr>
-          <a:lstStyle/>
-          <a:p>
-            <a:r>
-              <a:rPr sz="2600" b="1" i="0">
-                <a:solidFill>
-                  <a:srgbClr val="FFFFFF"/>
-                </a:solidFill>
-                <a:latin typeface="Calibri"/>
-              </a:rPr>
-              <a:t>Herramientas de hoy</a:t>
-            </a:r>
-          </a:p>
-        </p:txBody>
-      </p:sp>
-      <p:sp>
-        <p:nvSpPr>
-          <p:cNvPr id="5" name="TextBox 4"/>
-          <p:cNvSpPr txBox="1"/>
-          <p:nvPr/>
-        </p:nvSpPr>
-        <p:spPr>
-          <a:xfrm>
-            <a:off x="457200" y="566928"/>
-            <a:ext cx="11277295" cy="411480"/>
-          </a:xfrm>
-          <a:prstGeom prst="rect">
-            <a:avLst/>
-          </a:prstGeom>
-          <a:noFill/>
-        </p:spPr>
-        <p:txBody>
-          <a:bodyPr wrap="square">
-            <a:spAutoFit/>
-          </a:bodyPr>
-          <a:lstStyle/>
-          <a:p>
-            <a:r>
-              <a:rPr sz="1400" b="0" i="0">
-                <a:solidFill>
-                  <a:srgbClr val="B8D8EE"/>
-                </a:solidFill>
-                <a:latin typeface="Calibri"/>
-              </a:rPr>
-              <a:t>Gratis · navegador o free tier · sin cuenta de pago</a:t>
-            </a:r>
-          </a:p>
-        </p:txBody>
-      </p:sp>
-      <p:sp>
-        <p:nvSpPr>
-          <p:cNvPr id="6" name="Rounded Rectangle 5"/>
-          <p:cNvSpPr/>
-          <p:nvPr/>
-        </p:nvSpPr>
-        <p:spPr>
-          <a:xfrm>
-            <a:off x="457200" y="1591056"/>
-            <a:ext cx="3624986" cy="2299716"/>
-          </a:xfrm>
-          <a:prstGeom prst="roundRect">
-            <a:avLst>
-              <a:gd name="adj" fmla="val 12000"/>
-            </a:avLst>
-          </a:prstGeom>
-          <a:solidFill>
-            <a:srgbClr val="F2F2F2"/>
-          </a:solidFill>
-          <a:ln>
-            <a:noFill/>
-          </a:ln>
-        </p:spPr>
-        <p:style>
-          <a:lnRef idx="1">
-            <a:schemeClr val="accent1"/>
-          </a:lnRef>
-          <a:fillRef idx="3">
-            <a:schemeClr val="accent1"/>
-          </a:fillRef>
-          <a:effectRef idx="2">
-            <a:schemeClr val="accent1"/>
-          </a:effectRef>
-          <a:fontRef idx="minor">
-            <a:schemeClr val="lt1"/>
-          </a:fontRef>
-        </p:style>
-        <p:txBody>
-          <a:bodyPr rtlCol="0" anchor="ctr"/>
-          <a:lstStyle/>
-          <a:p>
-            <a:pPr algn="ctr"/>
-          </a:p>
-        </p:txBody>
-      </p:sp>
-      <p:sp>
-        <p:nvSpPr>
-          <p:cNvPr id="7" name="Rectangle 6"/>
-          <p:cNvSpPr/>
-          <p:nvPr/>
-        </p:nvSpPr>
-        <p:spPr>
-          <a:xfrm>
-            <a:off x="457200" y="1591056"/>
-            <a:ext cx="3624986" cy="64008"/>
-          </a:xfrm>
-          <a:prstGeom prst="rect">
-            <a:avLst/>
-          </a:prstGeom>
-          <a:solidFill>
-            <a:srgbClr val="095292"/>
-          </a:solidFill>
-          <a:ln>
-            <a:noFill/>
-          </a:ln>
-        </p:spPr>
-        <p:style>
-          <a:lnRef idx="1">
-            <a:schemeClr val="accent1"/>
-          </a:lnRef>
-          <a:fillRef idx="3">
-            <a:schemeClr val="accent1"/>
-          </a:fillRef>
-          <a:effectRef idx="2">
-            <a:schemeClr val="accent1"/>
-          </a:effectRef>
-          <a:fontRef idx="minor">
-            <a:schemeClr val="lt1"/>
-          </a:fontRef>
-        </p:style>
-        <p:txBody>
-          <a:bodyPr rtlCol="0" anchor="ctr"/>
-          <a:lstStyle/>
-          <a:p>
-            <a:pPr algn="ctr"/>
-          </a:p>
-        </p:txBody>
-      </p:sp>
-      <p:sp>
-        <p:nvSpPr>
-          <p:cNvPr id="8" name="Rectangle 7"/>
-          <p:cNvSpPr/>
-          <p:nvPr/>
-        </p:nvSpPr>
-        <p:spPr>
-          <a:xfrm>
-            <a:off x="457200" y="1655064"/>
-            <a:ext cx="3624986" cy="27432"/>
-          </a:xfrm>
-          <a:prstGeom prst="rect">
-            <a:avLst/>
-          </a:prstGeom>
-          <a:solidFill>
-            <a:srgbClr val="FFD000"/>
-          </a:solidFill>
-          <a:ln>
-            <a:noFill/>
-          </a:ln>
-        </p:spPr>
-        <p:style>
-          <a:lnRef idx="1">
-            <a:schemeClr val="accent1"/>
-          </a:lnRef>
-          <a:fillRef idx="3">
-            <a:schemeClr val="accent1"/>
-          </a:fillRef>
-          <a:effectRef idx="2">
-            <a:schemeClr val="accent1"/>
-          </a:effectRef>
-          <a:fontRef idx="minor">
-            <a:schemeClr val="lt1"/>
-          </a:fontRef>
-        </p:style>
-        <p:txBody>
-          <a:bodyPr rtlCol="0" anchor="ctr"/>
-          <a:lstStyle/>
-          <a:p>
-            <a:pPr algn="ctr"/>
-          </a:p>
-        </p:txBody>
-      </p:sp>
       <p:pic>
         <p:nvPicPr>
-          <p:cNvPr id="9" name="Picture 8" descr="drawio.png"/>
+          <p:cNvPr id="3" name="Picture 2" descr="logo_uniajc_color.png"/>
           <p:cNvPicPr>
             <a:picLocks noChangeAspect="1"/>
           </p:cNvPicPr>
@@ -7651,1026 +7561,14 @@
         </p:blipFill>
         <p:spPr>
           <a:xfrm>
-            <a:off x="1659331" y="1847087"/>
-            <a:ext cx="1220724" cy="1220724"/>
+            <a:off x="10271455" y="5998464"/>
+            <a:ext cx="1463040" cy="643233"/>
           </a:xfrm>
           <a:prstGeom prst="rect">
             <a:avLst/>
           </a:prstGeom>
         </p:spPr>
       </p:pic>
-      <p:sp>
-        <p:nvSpPr>
-          <p:cNvPr id="10" name="TextBox 9"/>
-          <p:cNvSpPr txBox="1"/>
-          <p:nvPr/>
-        </p:nvSpPr>
-        <p:spPr>
-          <a:xfrm>
-            <a:off x="530352" y="3159251"/>
-            <a:ext cx="3478682" cy="621792"/>
-          </a:xfrm>
-          <a:prstGeom prst="rect">
-            <a:avLst/>
-          </a:prstGeom>
-          <a:noFill/>
-        </p:spPr>
-        <p:txBody>
-          <a:bodyPr wrap="square" anchor="t"/>
-          <a:lstStyle/>
-          <a:p>
-            <a:pPr algn="ctr"/>
-            <a:r>
-              <a:rPr sz="1300" b="1" i="0">
-                <a:solidFill>
-                  <a:srgbClr val="095292"/>
-                </a:solidFill>
-                <a:latin typeface="Calibri"/>
-              </a:rPr>
-              <a:t>draw.io</a:t>
-            </a:r>
-          </a:p>
-          <a:p>
-            <a:pPr algn="ctr">
-              <a:spcBef>
-                <a:spcPts val="200"/>
-              </a:spcBef>
-            </a:pPr>
-            <a:r>
-              <a:rPr sz="1000" b="0" i="0">
-                <a:solidFill>
-                  <a:srgbClr val="666666"/>
-                </a:solidFill>
-                <a:latin typeface="Calibri"/>
-              </a:rPr>
-              <a:t>Auditoria del paquete</a:t>
-            </a:r>
-          </a:p>
-        </p:txBody>
-      </p:sp>
-      <p:sp>
-        <p:nvSpPr>
-          <p:cNvPr id="11" name="Rounded Rectangle 10"/>
-          <p:cNvSpPr/>
-          <p:nvPr/>
-        </p:nvSpPr>
-        <p:spPr>
-          <a:xfrm>
-            <a:off x="4283354" y="1591056"/>
-            <a:ext cx="3624986" cy="2299716"/>
-          </a:xfrm>
-          <a:prstGeom prst="roundRect">
-            <a:avLst>
-              <a:gd name="adj" fmla="val 12000"/>
-            </a:avLst>
-          </a:prstGeom>
-          <a:solidFill>
-            <a:srgbClr val="F2F2F2"/>
-          </a:solidFill>
-          <a:ln>
-            <a:noFill/>
-          </a:ln>
-        </p:spPr>
-        <p:style>
-          <a:lnRef idx="1">
-            <a:schemeClr val="accent1"/>
-          </a:lnRef>
-          <a:fillRef idx="3">
-            <a:schemeClr val="accent1"/>
-          </a:fillRef>
-          <a:effectRef idx="2">
-            <a:schemeClr val="accent1"/>
-          </a:effectRef>
-          <a:fontRef idx="minor">
-            <a:schemeClr val="lt1"/>
-          </a:fontRef>
-        </p:style>
-        <p:txBody>
-          <a:bodyPr rtlCol="0" anchor="ctr"/>
-          <a:lstStyle/>
-          <a:p>
-            <a:pPr algn="ctr"/>
-          </a:p>
-        </p:txBody>
-      </p:sp>
-      <p:sp>
-        <p:nvSpPr>
-          <p:cNvPr id="12" name="Rectangle 11"/>
-          <p:cNvSpPr/>
-          <p:nvPr/>
-        </p:nvSpPr>
-        <p:spPr>
-          <a:xfrm>
-            <a:off x="4283354" y="1591056"/>
-            <a:ext cx="3624986" cy="64008"/>
-          </a:xfrm>
-          <a:prstGeom prst="rect">
-            <a:avLst/>
-          </a:prstGeom>
-          <a:solidFill>
-            <a:srgbClr val="095292"/>
-          </a:solidFill>
-          <a:ln>
-            <a:noFill/>
-          </a:ln>
-        </p:spPr>
-        <p:style>
-          <a:lnRef idx="1">
-            <a:schemeClr val="accent1"/>
-          </a:lnRef>
-          <a:fillRef idx="3">
-            <a:schemeClr val="accent1"/>
-          </a:fillRef>
-          <a:effectRef idx="2">
-            <a:schemeClr val="accent1"/>
-          </a:effectRef>
-          <a:fontRef idx="minor">
-            <a:schemeClr val="lt1"/>
-          </a:fontRef>
-        </p:style>
-        <p:txBody>
-          <a:bodyPr rtlCol="0" anchor="ctr"/>
-          <a:lstStyle/>
-          <a:p>
-            <a:pPr algn="ctr"/>
-          </a:p>
-        </p:txBody>
-      </p:sp>
-      <p:sp>
-        <p:nvSpPr>
-          <p:cNvPr id="13" name="Rectangle 12"/>
-          <p:cNvSpPr/>
-          <p:nvPr/>
-        </p:nvSpPr>
-        <p:spPr>
-          <a:xfrm>
-            <a:off x="4283354" y="1655064"/>
-            <a:ext cx="3624986" cy="27432"/>
-          </a:xfrm>
-          <a:prstGeom prst="rect">
-            <a:avLst/>
-          </a:prstGeom>
-          <a:solidFill>
-            <a:srgbClr val="FFD000"/>
-          </a:solidFill>
-          <a:ln>
-            <a:noFill/>
-          </a:ln>
-        </p:spPr>
-        <p:style>
-          <a:lnRef idx="1">
-            <a:schemeClr val="accent1"/>
-          </a:lnRef>
-          <a:fillRef idx="3">
-            <a:schemeClr val="accent1"/>
-          </a:fillRef>
-          <a:effectRef idx="2">
-            <a:schemeClr val="accent1"/>
-          </a:effectRef>
-          <a:fontRef idx="minor">
-            <a:schemeClr val="lt1"/>
-          </a:fontRef>
-        </p:style>
-        <p:txBody>
-          <a:bodyPr rtlCol="0" anchor="ctr"/>
-          <a:lstStyle/>
-          <a:p>
-            <a:pPr algn="ctr"/>
-          </a:p>
-        </p:txBody>
-      </p:sp>
-      <p:pic>
-        <p:nvPicPr>
-          <p:cNvPr id="14" name="Picture 13" descr="github_actions.png"/>
-          <p:cNvPicPr>
-            <a:picLocks noChangeAspect="1"/>
-          </p:cNvPicPr>
-          <p:nvPr/>
-        </p:nvPicPr>
-        <p:blipFill>
-          <a:blip r:embed="rId3"/>
-          <a:stretch>
-            <a:fillRect/>
-          </a:stretch>
-        </p:blipFill>
-        <p:spPr>
-          <a:xfrm>
-            <a:off x="5485485" y="1847087"/>
-            <a:ext cx="1220724" cy="1220724"/>
-          </a:xfrm>
-          <a:prstGeom prst="rect">
-            <a:avLst/>
-          </a:prstGeom>
-        </p:spPr>
-      </p:pic>
-      <p:sp>
-        <p:nvSpPr>
-          <p:cNvPr id="15" name="TextBox 14"/>
-          <p:cNvSpPr txBox="1"/>
-          <p:nvPr/>
-        </p:nvSpPr>
-        <p:spPr>
-          <a:xfrm>
-            <a:off x="4356506" y="3159251"/>
-            <a:ext cx="3478682" cy="621792"/>
-          </a:xfrm>
-          <a:prstGeom prst="rect">
-            <a:avLst/>
-          </a:prstGeom>
-          <a:noFill/>
-        </p:spPr>
-        <p:txBody>
-          <a:bodyPr wrap="square" anchor="t"/>
-          <a:lstStyle/>
-          <a:p>
-            <a:pPr algn="ctr"/>
-            <a:r>
-              <a:rPr sz="1300" b="1" i="0">
-                <a:solidFill>
-                  <a:srgbClr val="095292"/>
-                </a:solidFill>
-                <a:latin typeface="Calibri"/>
-              </a:rPr>
-              <a:t>GitHub Actions</a:t>
-            </a:r>
-          </a:p>
-          <a:p>
-            <a:pPr algn="ctr">
-              <a:spcBef>
-                <a:spcPts val="200"/>
-              </a:spcBef>
-            </a:pPr>
-            <a:r>
-              <a:rPr sz="1000" b="0" i="0">
-                <a:solidFill>
-                  <a:srgbClr val="666666"/>
-                </a:solidFill>
-                <a:latin typeface="Calibri"/>
-              </a:rPr>
-              <a:t>Evidencia CI</a:t>
-            </a:r>
-          </a:p>
-        </p:txBody>
-      </p:sp>
-      <p:sp>
-        <p:nvSpPr>
-          <p:cNvPr id="16" name="Rounded Rectangle 15"/>
-          <p:cNvSpPr/>
-          <p:nvPr/>
-        </p:nvSpPr>
-        <p:spPr>
-          <a:xfrm>
-            <a:off x="8109508" y="1591056"/>
-            <a:ext cx="3624986" cy="2299716"/>
-          </a:xfrm>
-          <a:prstGeom prst="roundRect">
-            <a:avLst>
-              <a:gd name="adj" fmla="val 12000"/>
-            </a:avLst>
-          </a:prstGeom>
-          <a:solidFill>
-            <a:srgbClr val="F2F2F2"/>
-          </a:solidFill>
-          <a:ln>
-            <a:noFill/>
-          </a:ln>
-        </p:spPr>
-        <p:style>
-          <a:lnRef idx="1">
-            <a:schemeClr val="accent1"/>
-          </a:lnRef>
-          <a:fillRef idx="3">
-            <a:schemeClr val="accent1"/>
-          </a:fillRef>
-          <a:effectRef idx="2">
-            <a:schemeClr val="accent1"/>
-          </a:effectRef>
-          <a:fontRef idx="minor">
-            <a:schemeClr val="lt1"/>
-          </a:fontRef>
-        </p:style>
-        <p:txBody>
-          <a:bodyPr rtlCol="0" anchor="ctr"/>
-          <a:lstStyle/>
-          <a:p>
-            <a:pPr algn="ctr"/>
-          </a:p>
-        </p:txBody>
-      </p:sp>
-      <p:sp>
-        <p:nvSpPr>
-          <p:cNvPr id="17" name="Rectangle 16"/>
-          <p:cNvSpPr/>
-          <p:nvPr/>
-        </p:nvSpPr>
-        <p:spPr>
-          <a:xfrm>
-            <a:off x="8109508" y="1591056"/>
-            <a:ext cx="3624986" cy="64008"/>
-          </a:xfrm>
-          <a:prstGeom prst="rect">
-            <a:avLst/>
-          </a:prstGeom>
-          <a:solidFill>
-            <a:srgbClr val="095292"/>
-          </a:solidFill>
-          <a:ln>
-            <a:noFill/>
-          </a:ln>
-        </p:spPr>
-        <p:style>
-          <a:lnRef idx="1">
-            <a:schemeClr val="accent1"/>
-          </a:lnRef>
-          <a:fillRef idx="3">
-            <a:schemeClr val="accent1"/>
-          </a:fillRef>
-          <a:effectRef idx="2">
-            <a:schemeClr val="accent1"/>
-          </a:effectRef>
-          <a:fontRef idx="minor">
-            <a:schemeClr val="lt1"/>
-          </a:fontRef>
-        </p:style>
-        <p:txBody>
-          <a:bodyPr rtlCol="0" anchor="ctr"/>
-          <a:lstStyle/>
-          <a:p>
-            <a:pPr algn="ctr"/>
-          </a:p>
-        </p:txBody>
-      </p:sp>
-      <p:sp>
-        <p:nvSpPr>
-          <p:cNvPr id="18" name="Rectangle 17"/>
-          <p:cNvSpPr/>
-          <p:nvPr/>
-        </p:nvSpPr>
-        <p:spPr>
-          <a:xfrm>
-            <a:off x="8109508" y="1655064"/>
-            <a:ext cx="3624986" cy="27432"/>
-          </a:xfrm>
-          <a:prstGeom prst="rect">
-            <a:avLst/>
-          </a:prstGeom>
-          <a:solidFill>
-            <a:srgbClr val="FFD000"/>
-          </a:solidFill>
-          <a:ln>
-            <a:noFill/>
-          </a:ln>
-        </p:spPr>
-        <p:style>
-          <a:lnRef idx="1">
-            <a:schemeClr val="accent1"/>
-          </a:lnRef>
-          <a:fillRef idx="3">
-            <a:schemeClr val="accent1"/>
-          </a:fillRef>
-          <a:effectRef idx="2">
-            <a:schemeClr val="accent1"/>
-          </a:effectRef>
-          <a:fontRef idx="minor">
-            <a:schemeClr val="lt1"/>
-          </a:fontRef>
-        </p:style>
-        <p:txBody>
-          <a:bodyPr rtlCol="0" anchor="ctr"/>
-          <a:lstStyle/>
-          <a:p>
-            <a:pPr algn="ctr"/>
-          </a:p>
-        </p:txBody>
-      </p:sp>
-      <p:pic>
-        <p:nvPicPr>
-          <p:cNvPr id="19" name="Picture 18" descr="google_docs.png"/>
-          <p:cNvPicPr>
-            <a:picLocks noChangeAspect="1"/>
-          </p:cNvPicPr>
-          <p:nvPr/>
-        </p:nvPicPr>
-        <p:blipFill>
-          <a:blip r:embed="rId4"/>
-          <a:stretch>
-            <a:fillRect/>
-          </a:stretch>
-        </p:blipFill>
-        <p:spPr>
-          <a:xfrm>
-            <a:off x="9311640" y="1847087"/>
-            <a:ext cx="1220724" cy="1220724"/>
-          </a:xfrm>
-          <a:prstGeom prst="rect">
-            <a:avLst/>
-          </a:prstGeom>
-        </p:spPr>
-      </p:pic>
-      <p:sp>
-        <p:nvSpPr>
-          <p:cNvPr id="20" name="TextBox 19"/>
-          <p:cNvSpPr txBox="1"/>
-          <p:nvPr/>
-        </p:nvSpPr>
-        <p:spPr>
-          <a:xfrm>
-            <a:off x="8182660" y="3159251"/>
-            <a:ext cx="3478682" cy="621792"/>
-          </a:xfrm>
-          <a:prstGeom prst="rect">
-            <a:avLst/>
-          </a:prstGeom>
-          <a:noFill/>
-        </p:spPr>
-        <p:txBody>
-          <a:bodyPr wrap="square" anchor="t"/>
-          <a:lstStyle/>
-          <a:p>
-            <a:pPr algn="ctr"/>
-            <a:r>
-              <a:rPr sz="1300" b="1" i="0">
-                <a:solidFill>
-                  <a:srgbClr val="095292"/>
-                </a:solidFill>
-                <a:latin typeface="Calibri"/>
-              </a:rPr>
-              <a:t>Google Docs</a:t>
-            </a:r>
-          </a:p>
-          <a:p>
-            <a:pPr algn="ctr">
-              <a:spcBef>
-                <a:spcPts val="200"/>
-              </a:spcBef>
-            </a:pPr>
-            <a:r>
-              <a:rPr sz="1000" b="0" i="0">
-                <a:solidFill>
-                  <a:srgbClr val="666666"/>
-                </a:solidFill>
-                <a:latin typeface="Calibri"/>
-              </a:rPr>
-              <a:t>Informe PI</a:t>
-            </a:r>
-          </a:p>
-        </p:txBody>
-      </p:sp>
-      <p:sp>
-        <p:nvSpPr>
-          <p:cNvPr id="21" name="Rounded Rectangle 20"/>
-          <p:cNvSpPr/>
-          <p:nvPr/>
-        </p:nvSpPr>
-        <p:spPr>
-          <a:xfrm>
-            <a:off x="2370277" y="4055364"/>
-            <a:ext cx="3624986" cy="2299716"/>
-          </a:xfrm>
-          <a:prstGeom prst="roundRect">
-            <a:avLst>
-              <a:gd name="adj" fmla="val 12000"/>
-            </a:avLst>
-          </a:prstGeom>
-          <a:solidFill>
-            <a:srgbClr val="F2F2F2"/>
-          </a:solidFill>
-          <a:ln>
-            <a:noFill/>
-          </a:ln>
-        </p:spPr>
-        <p:style>
-          <a:lnRef idx="1">
-            <a:schemeClr val="accent1"/>
-          </a:lnRef>
-          <a:fillRef idx="3">
-            <a:schemeClr val="accent1"/>
-          </a:fillRef>
-          <a:effectRef idx="2">
-            <a:schemeClr val="accent1"/>
-          </a:effectRef>
-          <a:fontRef idx="minor">
-            <a:schemeClr val="lt1"/>
-          </a:fontRef>
-        </p:style>
-        <p:txBody>
-          <a:bodyPr rtlCol="0" anchor="ctr"/>
-          <a:lstStyle/>
-          <a:p>
-            <a:pPr algn="ctr"/>
-          </a:p>
-        </p:txBody>
-      </p:sp>
-      <p:sp>
-        <p:nvSpPr>
-          <p:cNvPr id="22" name="Rectangle 21"/>
-          <p:cNvSpPr/>
-          <p:nvPr/>
-        </p:nvSpPr>
-        <p:spPr>
-          <a:xfrm>
-            <a:off x="2370277" y="4055364"/>
-            <a:ext cx="3624986" cy="64008"/>
-          </a:xfrm>
-          <a:prstGeom prst="rect">
-            <a:avLst/>
-          </a:prstGeom>
-          <a:solidFill>
-            <a:srgbClr val="095292"/>
-          </a:solidFill>
-          <a:ln>
-            <a:noFill/>
-          </a:ln>
-        </p:spPr>
-        <p:style>
-          <a:lnRef idx="1">
-            <a:schemeClr val="accent1"/>
-          </a:lnRef>
-          <a:fillRef idx="3">
-            <a:schemeClr val="accent1"/>
-          </a:fillRef>
-          <a:effectRef idx="2">
-            <a:schemeClr val="accent1"/>
-          </a:effectRef>
-          <a:fontRef idx="minor">
-            <a:schemeClr val="lt1"/>
-          </a:fontRef>
-        </p:style>
-        <p:txBody>
-          <a:bodyPr rtlCol="0" anchor="ctr"/>
-          <a:lstStyle/>
-          <a:p>
-            <a:pPr algn="ctr"/>
-          </a:p>
-        </p:txBody>
-      </p:sp>
-      <p:sp>
-        <p:nvSpPr>
-          <p:cNvPr id="23" name="Rectangle 22"/>
-          <p:cNvSpPr/>
-          <p:nvPr/>
-        </p:nvSpPr>
-        <p:spPr>
-          <a:xfrm>
-            <a:off x="2370277" y="4119372"/>
-            <a:ext cx="3624986" cy="27432"/>
-          </a:xfrm>
-          <a:prstGeom prst="rect">
-            <a:avLst/>
-          </a:prstGeom>
-          <a:solidFill>
-            <a:srgbClr val="FFD000"/>
-          </a:solidFill>
-          <a:ln>
-            <a:noFill/>
-          </a:ln>
-        </p:spPr>
-        <p:style>
-          <a:lnRef idx="1">
-            <a:schemeClr val="accent1"/>
-          </a:lnRef>
-          <a:fillRef idx="3">
-            <a:schemeClr val="accent1"/>
-          </a:fillRef>
-          <a:effectRef idx="2">
-            <a:schemeClr val="accent1"/>
-          </a:effectRef>
-          <a:fontRef idx="minor">
-            <a:schemeClr val="lt1"/>
-          </a:fontRef>
-        </p:style>
-        <p:txBody>
-          <a:bodyPr rtlCol="0" anchor="ctr"/>
-          <a:lstStyle/>
-          <a:p>
-            <a:pPr algn="ctr"/>
-          </a:p>
-        </p:txBody>
-      </p:sp>
-      <p:pic>
-        <p:nvPicPr>
-          <p:cNvPr id="24" name="Picture 23" descr="mermaid.png"/>
-          <p:cNvPicPr>
-            <a:picLocks noChangeAspect="1"/>
-          </p:cNvPicPr>
-          <p:nvPr/>
-        </p:nvPicPr>
-        <p:blipFill>
-          <a:blip r:embed="rId5"/>
-          <a:stretch>
-            <a:fillRect/>
-          </a:stretch>
-        </p:blipFill>
-        <p:spPr>
-          <a:xfrm>
-            <a:off x="3572408" y="4311396"/>
-            <a:ext cx="1220724" cy="1220724"/>
-          </a:xfrm>
-          <a:prstGeom prst="rect">
-            <a:avLst/>
-          </a:prstGeom>
-        </p:spPr>
-      </p:pic>
-      <p:sp>
-        <p:nvSpPr>
-          <p:cNvPr id="25" name="TextBox 24"/>
-          <p:cNvSpPr txBox="1"/>
-          <p:nvPr/>
-        </p:nvSpPr>
-        <p:spPr>
-          <a:xfrm>
-            <a:off x="2443429" y="5623560"/>
-            <a:ext cx="3478682" cy="621792"/>
-          </a:xfrm>
-          <a:prstGeom prst="rect">
-            <a:avLst/>
-          </a:prstGeom>
-          <a:noFill/>
-        </p:spPr>
-        <p:txBody>
-          <a:bodyPr wrap="square" anchor="t"/>
-          <a:lstStyle/>
-          <a:p>
-            <a:pPr algn="ctr"/>
-            <a:r>
-              <a:rPr sz="1300" b="1" i="0">
-                <a:solidFill>
-                  <a:srgbClr val="095292"/>
-                </a:solidFill>
-                <a:latin typeface="Calibri"/>
-              </a:rPr>
-              <a:t>Mermaid</a:t>
-            </a:r>
-          </a:p>
-          <a:p>
-            <a:pPr algn="ctr">
-              <a:spcBef>
-                <a:spcPts val="200"/>
-              </a:spcBef>
-            </a:pPr>
-            <a:r>
-              <a:rPr sz="1000" b="0" i="0">
-                <a:solidFill>
-                  <a:srgbClr val="666666"/>
-                </a:solidFill>
-                <a:latin typeface="Calibri"/>
-              </a:rPr>
-              <a:t>Codigo del diagrama</a:t>
-            </a:r>
-          </a:p>
-        </p:txBody>
-      </p:sp>
-      <p:sp>
-        <p:nvSpPr>
-          <p:cNvPr id="26" name="Rounded Rectangle 25"/>
-          <p:cNvSpPr/>
-          <p:nvPr/>
-        </p:nvSpPr>
-        <p:spPr>
-          <a:xfrm>
-            <a:off x="6196431" y="4055364"/>
-            <a:ext cx="3624986" cy="2299716"/>
-          </a:xfrm>
-          <a:prstGeom prst="roundRect">
-            <a:avLst>
-              <a:gd name="adj" fmla="val 12000"/>
-            </a:avLst>
-          </a:prstGeom>
-          <a:solidFill>
-            <a:srgbClr val="F2F2F2"/>
-          </a:solidFill>
-          <a:ln>
-            <a:noFill/>
-          </a:ln>
-        </p:spPr>
-        <p:style>
-          <a:lnRef idx="1">
-            <a:schemeClr val="accent1"/>
-          </a:lnRef>
-          <a:fillRef idx="3">
-            <a:schemeClr val="accent1"/>
-          </a:fillRef>
-          <a:effectRef idx="2">
-            <a:schemeClr val="accent1"/>
-          </a:effectRef>
-          <a:fontRef idx="minor">
-            <a:schemeClr val="lt1"/>
-          </a:fontRef>
-        </p:style>
-        <p:txBody>
-          <a:bodyPr rtlCol="0" anchor="ctr"/>
-          <a:lstStyle/>
-          <a:p>
-            <a:pPr algn="ctr"/>
-          </a:p>
-        </p:txBody>
-      </p:sp>
-      <p:sp>
-        <p:nvSpPr>
-          <p:cNvPr id="27" name="Rectangle 26"/>
-          <p:cNvSpPr/>
-          <p:nvPr/>
-        </p:nvSpPr>
-        <p:spPr>
-          <a:xfrm>
-            <a:off x="6196431" y="4055364"/>
-            <a:ext cx="3624986" cy="64008"/>
-          </a:xfrm>
-          <a:prstGeom prst="rect">
-            <a:avLst/>
-          </a:prstGeom>
-          <a:solidFill>
-            <a:srgbClr val="095292"/>
-          </a:solidFill>
-          <a:ln>
-            <a:noFill/>
-          </a:ln>
-        </p:spPr>
-        <p:style>
-          <a:lnRef idx="1">
-            <a:schemeClr val="accent1"/>
-          </a:lnRef>
-          <a:fillRef idx="3">
-            <a:schemeClr val="accent1"/>
-          </a:fillRef>
-          <a:effectRef idx="2">
-            <a:schemeClr val="accent1"/>
-          </a:effectRef>
-          <a:fontRef idx="minor">
-            <a:schemeClr val="lt1"/>
-          </a:fontRef>
-        </p:style>
-        <p:txBody>
-          <a:bodyPr rtlCol="0" anchor="ctr"/>
-          <a:lstStyle/>
-          <a:p>
-            <a:pPr algn="ctr"/>
-          </a:p>
-        </p:txBody>
-      </p:sp>
-      <p:sp>
-        <p:nvSpPr>
-          <p:cNvPr id="28" name="Rectangle 27"/>
-          <p:cNvSpPr/>
-          <p:nvPr/>
-        </p:nvSpPr>
-        <p:spPr>
-          <a:xfrm>
-            <a:off x="6196431" y="4119372"/>
-            <a:ext cx="3624986" cy="27432"/>
-          </a:xfrm>
-          <a:prstGeom prst="rect">
-            <a:avLst/>
-          </a:prstGeom>
-          <a:solidFill>
-            <a:srgbClr val="FFD000"/>
-          </a:solidFill>
-          <a:ln>
-            <a:noFill/>
-          </a:ln>
-        </p:spPr>
-        <p:style>
-          <a:lnRef idx="1">
-            <a:schemeClr val="accent1"/>
-          </a:lnRef>
-          <a:fillRef idx="3">
-            <a:schemeClr val="accent1"/>
-          </a:fillRef>
-          <a:effectRef idx="2">
-            <a:schemeClr val="accent1"/>
-          </a:effectRef>
-          <a:fontRef idx="minor">
-            <a:schemeClr val="lt1"/>
-          </a:fontRef>
-        </p:style>
-        <p:txBody>
-          <a:bodyPr rtlCol="0" anchor="ctr"/>
-          <a:lstStyle/>
-          <a:p>
-            <a:pPr algn="ctr"/>
-          </a:p>
-        </p:txBody>
-      </p:sp>
-      <p:pic>
-        <p:nvPicPr>
-          <p:cNvPr id="29" name="Picture 28" descr="examlab.png"/>
-          <p:cNvPicPr>
-            <a:picLocks noChangeAspect="1"/>
-          </p:cNvPicPr>
-          <p:nvPr/>
-        </p:nvPicPr>
-        <p:blipFill>
-          <a:blip r:embed="rId6"/>
-          <a:stretch>
-            <a:fillRect/>
-          </a:stretch>
-        </p:blipFill>
-        <p:spPr>
-          <a:xfrm>
-            <a:off x="7398562" y="4311396"/>
-            <a:ext cx="1220724" cy="1220724"/>
-          </a:xfrm>
-          <a:prstGeom prst="rect">
-            <a:avLst/>
-          </a:prstGeom>
-        </p:spPr>
-      </p:pic>
-      <p:sp>
-        <p:nvSpPr>
-          <p:cNvPr id="30" name="TextBox 29"/>
-          <p:cNvSpPr txBox="1"/>
-          <p:nvPr/>
-        </p:nvSpPr>
-        <p:spPr>
-          <a:xfrm>
-            <a:off x="6269583" y="5623560"/>
-            <a:ext cx="3478682" cy="621792"/>
-          </a:xfrm>
-          <a:prstGeom prst="rect">
-            <a:avLst/>
-          </a:prstGeom>
-          <a:noFill/>
-        </p:spPr>
-        <p:txBody>
-          <a:bodyPr wrap="square" anchor="t"/>
-          <a:lstStyle/>
-          <a:p>
-            <a:pPr algn="ctr"/>
-            <a:r>
-              <a:rPr sz="1300" b="1" i="0">
-                <a:solidFill>
-                  <a:srgbClr val="095292"/>
-                </a:solidFill>
-                <a:latin typeface="Calibri"/>
-              </a:rPr>
-              <a:t>la plataforma del curso</a:t>
-            </a:r>
-          </a:p>
-          <a:p>
-            <a:pPr algn="ctr">
-              <a:spcBef>
-                <a:spcPts val="200"/>
-              </a:spcBef>
-            </a:pPr>
-            <a:r>
-              <a:rPr sz="1000" b="0" i="0">
-                <a:solidFill>
-                  <a:srgbClr val="666666"/>
-                </a:solidFill>
-                <a:latin typeface="Calibri"/>
-              </a:rPr>
-              <a:t>Donde se entrega</a:t>
-            </a:r>
-          </a:p>
-        </p:txBody>
-      </p:sp>
-      <p:sp>
-        <p:nvSpPr>
-          <p:cNvPr id="31" name="TextBox 30"/>
-          <p:cNvSpPr txBox="1"/>
-          <p:nvPr/>
-        </p:nvSpPr>
-        <p:spPr>
-          <a:xfrm>
-            <a:off x="11185855" y="6473952"/>
-            <a:ext cx="640080" cy="274320"/>
-          </a:xfrm>
-          <a:prstGeom prst="rect">
-            <a:avLst/>
-          </a:prstGeom>
-          <a:noFill/>
-        </p:spPr>
-        <p:txBody>
-          <a:bodyPr wrap="square">
-            <a:spAutoFit/>
-          </a:bodyPr>
-          <a:lstStyle/>
-          <a:p>
-            <a:pPr algn="r"/>
-            <a:r>
-              <a:rPr sz="1100" b="0" i="0">
-                <a:solidFill>
-                  <a:srgbClr val="666666"/>
-                </a:solidFill>
-                <a:latin typeface="Calibri"/>
-              </a:rPr>
-              <a:t>22</a:t>
-            </a:r>
-          </a:p>
-        </p:txBody>
-      </p:sp>
-    </p:spTree>
-  </p:cSld>
-  <p:clrMapOvr>
-    <a:masterClrMapping/>
-  </p:clrMapOvr>
-</p:sld>
-</file>
-
-<file path=ppt/slides/slide23.xml><?xml version="1.0" encoding="utf-8"?>
-<p:sld xmlns:a="http://schemas.openxmlformats.org/drawingml/2006/main" xmlns:p="http://schemas.openxmlformats.org/presentationml/2006/main" xmlns:r="http://schemas.openxmlformats.org/officeDocument/2006/relationships">
-  <p:cSld>
-    <p:bg>
-      <p:bgPr>
-        <a:solidFill>
-          <a:srgbClr val="FFFFFF"/>
-        </a:solidFill>
-        <a:effectLst/>
-      </p:bgPr>
-    </p:bg>
-    <p:spTree>
-      <p:nvGrpSpPr>
-        <p:cNvPr id="1" name=""/>
-        <p:cNvGrpSpPr/>
-        <p:nvPr/>
-      </p:nvGrpSpPr>
-      <p:grpSpPr/>
-      <p:sp>
-        <p:nvSpPr>
-          <p:cNvPr id="2" name="Rectangle 1"/>
-          <p:cNvSpPr/>
-          <p:nvPr/>
-        </p:nvSpPr>
-        <p:spPr>
-          <a:xfrm>
-            <a:off x="0" y="0"/>
-            <a:ext cx="12191695" cy="1170432"/>
-          </a:xfrm>
-          <a:prstGeom prst="rect">
-            <a:avLst/>
-          </a:prstGeom>
-          <a:solidFill>
-            <a:srgbClr val="095292"/>
-          </a:solidFill>
-          <a:ln>
-            <a:noFill/>
-          </a:ln>
-        </p:spPr>
-        <p:style>
-          <a:lnRef idx="1">
-            <a:schemeClr val="accent1"/>
-          </a:lnRef>
-          <a:fillRef idx="3">
-            <a:schemeClr val="accent1"/>
-          </a:fillRef>
-          <a:effectRef idx="2">
-            <a:schemeClr val="accent1"/>
-          </a:effectRef>
-          <a:fontRef idx="minor">
-            <a:schemeClr val="lt1"/>
-          </a:fontRef>
-        </p:style>
-        <p:txBody>
-          <a:bodyPr rtlCol="0" anchor="ctr"/>
-          <a:lstStyle/>
-          <a:p>
-            <a:pPr algn="ctr"/>
-          </a:p>
-        </p:txBody>
-      </p:sp>
-      <p:sp>
-        <p:nvSpPr>
-          <p:cNvPr id="3" name="Rectangle 2"/>
-          <p:cNvSpPr/>
-          <p:nvPr/>
-        </p:nvSpPr>
-        <p:spPr>
-          <a:xfrm>
-            <a:off x="0" y="1170432"/>
-            <a:ext cx="12191695" cy="41148"/>
-          </a:xfrm>
-          <a:prstGeom prst="rect">
-            <a:avLst/>
-          </a:prstGeom>
-          <a:solidFill>
-            <a:srgbClr val="FFD000"/>
-          </a:solidFill>
-          <a:ln>
-            <a:noFill/>
-          </a:ln>
-        </p:spPr>
-        <p:style>
-          <a:lnRef idx="1">
-            <a:schemeClr val="accent1"/>
-          </a:lnRef>
-          <a:fillRef idx="3">
-            <a:schemeClr val="accent1"/>
-          </a:fillRef>
-          <a:effectRef idx="2">
-            <a:schemeClr val="accent1"/>
-          </a:effectRef>
-          <a:fontRef idx="minor">
-            <a:schemeClr val="lt1"/>
-          </a:fontRef>
-        </p:style>
-        <p:txBody>
-          <a:bodyPr rtlCol="0" anchor="ctr"/>
-          <a:lstStyle/>
-          <a:p>
-            <a:pPr algn="ctr"/>
-          </a:p>
-        </p:txBody>
-      </p:sp>
       <p:sp>
         <p:nvSpPr>
           <p:cNvPr id="4" name="TextBox 3"/>
@@ -8679,2159 +7577,6 @@
         </p:nvSpPr>
         <p:spPr>
           <a:xfrm>
-            <a:off x="457200" y="164592"/>
-            <a:ext cx="11277295" cy="384048"/>
-          </a:xfrm>
-          <a:prstGeom prst="rect">
-            <a:avLst/>
-          </a:prstGeom>
-          <a:noFill/>
-        </p:spPr>
-        <p:txBody>
-          <a:bodyPr wrap="square">
-            <a:spAutoFit/>
-          </a:bodyPr>
-          <a:lstStyle/>
-          <a:p>
-            <a:r>
-              <a:rPr sz="2600" b="1" i="0">
-                <a:solidFill>
-                  <a:srgbClr val="FFFFFF"/>
-                </a:solidFill>
-                <a:latin typeface="Calibri"/>
-              </a:rPr>
-              <a:t>Del boceto a la plataforma del curso (diagrama)</a:t>
-            </a:r>
-          </a:p>
-        </p:txBody>
-      </p:sp>
-      <p:sp>
-        <p:nvSpPr>
-          <p:cNvPr id="5" name="TextBox 4"/>
-          <p:cNvSpPr txBox="1"/>
-          <p:nvPr/>
-        </p:nvSpPr>
-        <p:spPr>
-          <a:xfrm>
-            <a:off x="457200" y="566928"/>
-            <a:ext cx="11277295" cy="411480"/>
-          </a:xfrm>
-          <a:prstGeom prst="rect">
-            <a:avLst/>
-          </a:prstGeom>
-          <a:noFill/>
-        </p:spPr>
-        <p:txBody>
-          <a:bodyPr wrap="square">
-            <a:spAutoFit/>
-          </a:bodyPr>
-          <a:lstStyle/>
-          <a:p>
-            <a:r>
-              <a:rPr sz="1400" b="0" i="0">
-                <a:solidFill>
-                  <a:srgbClr val="B8D8EE"/>
-                </a:solidFill>
-                <a:latin typeface="Calibri"/>
-              </a:rPr>
-              <a:t>El diagrama se entrega como código Mermaid en la plataforma del curso, no como imagen</a:t>
-            </a:r>
-          </a:p>
-        </p:txBody>
-      </p:sp>
-      <p:sp>
-        <p:nvSpPr>
-          <p:cNvPr id="6" name="Rounded Rectangle 5"/>
-          <p:cNvSpPr/>
-          <p:nvPr/>
-        </p:nvSpPr>
-        <p:spPr>
-          <a:xfrm>
-            <a:off x="457200" y="1659636"/>
-            <a:ext cx="11277295" cy="1051560"/>
-          </a:xfrm>
-          <a:prstGeom prst="roundRect">
-            <a:avLst>
-              <a:gd name="adj" fmla="val 12000"/>
-            </a:avLst>
-          </a:prstGeom>
-          <a:solidFill>
-            <a:srgbClr val="F2F2F2"/>
-          </a:solidFill>
-          <a:ln>
-            <a:noFill/>
-          </a:ln>
-        </p:spPr>
-        <p:style>
-          <a:lnRef idx="1">
-            <a:schemeClr val="accent1"/>
-          </a:lnRef>
-          <a:fillRef idx="3">
-            <a:schemeClr val="accent1"/>
-          </a:fillRef>
-          <a:effectRef idx="2">
-            <a:schemeClr val="accent1"/>
-          </a:effectRef>
-          <a:fontRef idx="minor">
-            <a:schemeClr val="lt1"/>
-          </a:fontRef>
-        </p:style>
-        <p:txBody>
-          <a:bodyPr rtlCol="0" anchor="ctr"/>
-          <a:lstStyle/>
-          <a:p>
-            <a:pPr algn="ctr"/>
-          </a:p>
-        </p:txBody>
-      </p:sp>
-      <p:sp>
-        <p:nvSpPr>
-          <p:cNvPr id="7" name="Rounded Rectangle 6"/>
-          <p:cNvSpPr/>
-          <p:nvPr/>
-        </p:nvSpPr>
-        <p:spPr>
-          <a:xfrm>
-            <a:off x="594360" y="1965960"/>
-            <a:ext cx="438912" cy="438912"/>
-          </a:xfrm>
-          <a:prstGeom prst="roundRect">
-            <a:avLst>
-              <a:gd name="adj" fmla="val 12000"/>
-            </a:avLst>
-          </a:prstGeom>
-          <a:solidFill>
-            <a:srgbClr val="095292"/>
-          </a:solidFill>
-          <a:ln>
-            <a:noFill/>
-          </a:ln>
-        </p:spPr>
-        <p:style>
-          <a:lnRef idx="1">
-            <a:schemeClr val="accent1"/>
-          </a:lnRef>
-          <a:fillRef idx="3">
-            <a:schemeClr val="accent1"/>
-          </a:fillRef>
-          <a:effectRef idx="2">
-            <a:schemeClr val="accent1"/>
-          </a:effectRef>
-          <a:fontRef idx="minor">
-            <a:schemeClr val="lt1"/>
-          </a:fontRef>
-        </p:style>
-        <p:txBody>
-          <a:bodyPr rtlCol="0" anchor="ctr"/>
-          <a:lstStyle/>
-          <a:p>
-            <a:pPr algn="ctr"/>
-          </a:p>
-        </p:txBody>
-      </p:sp>
-      <p:sp>
-        <p:nvSpPr>
-          <p:cNvPr id="8" name="TextBox 7"/>
-          <p:cNvSpPr txBox="1"/>
-          <p:nvPr/>
-        </p:nvSpPr>
-        <p:spPr>
-          <a:xfrm>
-            <a:off x="594360" y="1965960"/>
-            <a:ext cx="438912" cy="438912"/>
-          </a:xfrm>
-          <a:prstGeom prst="rect">
-            <a:avLst/>
-          </a:prstGeom>
-          <a:noFill/>
-        </p:spPr>
-        <p:txBody>
-          <a:bodyPr wrap="square" anchor="ctr"/>
-          <a:lstStyle/>
-          <a:p>
-            <a:pPr algn="ctr"/>
-            <a:r>
-              <a:rPr sz="1600" b="1" i="0">
-                <a:solidFill>
-                  <a:srgbClr val="FFFFFF"/>
-                </a:solidFill>
-                <a:latin typeface="Calibri"/>
-              </a:rPr>
-              <a:t>1</a:t>
-            </a:r>
-          </a:p>
-        </p:txBody>
-      </p:sp>
-      <p:sp>
-        <p:nvSpPr>
-          <p:cNvPr id="9" name="TextBox 8"/>
-          <p:cNvSpPr txBox="1"/>
-          <p:nvPr/>
-        </p:nvSpPr>
-        <p:spPr>
-          <a:xfrm>
-            <a:off x="1188720" y="1751076"/>
-            <a:ext cx="10271455" cy="886968"/>
-          </a:xfrm>
-          <a:prstGeom prst="rect">
-            <a:avLst/>
-          </a:prstGeom>
-          <a:noFill/>
-        </p:spPr>
-        <p:txBody>
-          <a:bodyPr wrap="square" anchor="ctr"/>
-          <a:lstStyle/>
-          <a:p>
-            <a:r>
-              <a:rPr sz="1500" b="1" i="0">
-                <a:solidFill>
-                  <a:srgbClr val="095292"/>
-                </a:solidFill>
-                <a:latin typeface="Calibri"/>
-              </a:rPr>
-              <a:t>Disena visual</a:t>
-            </a:r>
-          </a:p>
-          <a:p>
-            <a:pPr>
-              <a:spcBef>
-                <a:spcPts val="200"/>
-              </a:spcBef>
-            </a:pPr>
-            <a:r>
-              <a:rPr sz="1300" b="0" i="0">
-                <a:solidFill>
-                  <a:srgbClr val="333333"/>
-                </a:solidFill>
-                <a:latin typeface="Calibri"/>
-              </a:rPr>
-              <a:t>Dibuja el diagrama como quieras en Excalidraw o draw.io: es mas rapido arrastrar cajas que escribir codigo, y ahi es donde piensas el modelo.</a:t>
-            </a:r>
-          </a:p>
-        </p:txBody>
-      </p:sp>
-      <p:sp>
-        <p:nvSpPr>
-          <p:cNvPr id="10" name="Rounded Rectangle 9"/>
-          <p:cNvSpPr/>
-          <p:nvPr/>
-        </p:nvSpPr>
-        <p:spPr>
-          <a:xfrm>
-            <a:off x="457200" y="2802636"/>
-            <a:ext cx="11277295" cy="1051560"/>
-          </a:xfrm>
-          <a:prstGeom prst="roundRect">
-            <a:avLst>
-              <a:gd name="adj" fmla="val 12000"/>
-            </a:avLst>
-          </a:prstGeom>
-          <a:solidFill>
-            <a:srgbClr val="E8F4FA"/>
-          </a:solidFill>
-          <a:ln>
-            <a:noFill/>
-          </a:ln>
-        </p:spPr>
-        <p:style>
-          <a:lnRef idx="1">
-            <a:schemeClr val="accent1"/>
-          </a:lnRef>
-          <a:fillRef idx="3">
-            <a:schemeClr val="accent1"/>
-          </a:fillRef>
-          <a:effectRef idx="2">
-            <a:schemeClr val="accent1"/>
-          </a:effectRef>
-          <a:fontRef idx="minor">
-            <a:schemeClr val="lt1"/>
-          </a:fontRef>
-        </p:style>
-        <p:txBody>
-          <a:bodyPr rtlCol="0" anchor="ctr"/>
-          <a:lstStyle/>
-          <a:p>
-            <a:pPr algn="ctr"/>
-          </a:p>
-        </p:txBody>
-      </p:sp>
-      <p:sp>
-        <p:nvSpPr>
-          <p:cNvPr id="11" name="Rounded Rectangle 10"/>
-          <p:cNvSpPr/>
-          <p:nvPr/>
-        </p:nvSpPr>
-        <p:spPr>
-          <a:xfrm>
-            <a:off x="594360" y="3108960"/>
-            <a:ext cx="438912" cy="438912"/>
-          </a:xfrm>
-          <a:prstGeom prst="roundRect">
-            <a:avLst>
-              <a:gd name="adj" fmla="val 12000"/>
-            </a:avLst>
-          </a:prstGeom>
-          <a:solidFill>
-            <a:srgbClr val="095292"/>
-          </a:solidFill>
-          <a:ln>
-            <a:noFill/>
-          </a:ln>
-        </p:spPr>
-        <p:style>
-          <a:lnRef idx="1">
-            <a:schemeClr val="accent1"/>
-          </a:lnRef>
-          <a:fillRef idx="3">
-            <a:schemeClr val="accent1"/>
-          </a:fillRef>
-          <a:effectRef idx="2">
-            <a:schemeClr val="accent1"/>
-          </a:effectRef>
-          <a:fontRef idx="minor">
-            <a:schemeClr val="lt1"/>
-          </a:fontRef>
-        </p:style>
-        <p:txBody>
-          <a:bodyPr rtlCol="0" anchor="ctr"/>
-          <a:lstStyle/>
-          <a:p>
-            <a:pPr algn="ctr"/>
-          </a:p>
-        </p:txBody>
-      </p:sp>
-      <p:sp>
-        <p:nvSpPr>
-          <p:cNvPr id="12" name="TextBox 11"/>
-          <p:cNvSpPr txBox="1"/>
-          <p:nvPr/>
-        </p:nvSpPr>
-        <p:spPr>
-          <a:xfrm>
-            <a:off x="594360" y="3108960"/>
-            <a:ext cx="438912" cy="438912"/>
-          </a:xfrm>
-          <a:prstGeom prst="rect">
-            <a:avLst/>
-          </a:prstGeom>
-          <a:noFill/>
-        </p:spPr>
-        <p:txBody>
-          <a:bodyPr wrap="square" anchor="ctr"/>
-          <a:lstStyle/>
-          <a:p>
-            <a:pPr algn="ctr"/>
-            <a:r>
-              <a:rPr sz="1600" b="1" i="0">
-                <a:solidFill>
-                  <a:srgbClr val="FFFFFF"/>
-                </a:solidFill>
-                <a:latin typeface="Calibri"/>
-              </a:rPr>
-              <a:t>2</a:t>
-            </a:r>
-          </a:p>
-        </p:txBody>
-      </p:sp>
-      <p:sp>
-        <p:nvSpPr>
-          <p:cNvPr id="13" name="TextBox 12"/>
-          <p:cNvSpPr txBox="1"/>
-          <p:nvPr/>
-        </p:nvSpPr>
-        <p:spPr>
-          <a:xfrm>
-            <a:off x="1188720" y="2894076"/>
-            <a:ext cx="10271455" cy="886968"/>
-          </a:xfrm>
-          <a:prstGeom prst="rect">
-            <a:avLst/>
-          </a:prstGeom>
-          <a:noFill/>
-        </p:spPr>
-        <p:txBody>
-          <a:bodyPr wrap="square" anchor="ctr"/>
-          <a:lstStyle/>
-          <a:p>
-            <a:r>
-              <a:rPr sz="1500" b="1" i="0">
-                <a:solidFill>
-                  <a:srgbClr val="095292"/>
-                </a:solidFill>
-                <a:latin typeface="Calibri"/>
-              </a:rPr>
-              <a:t>Traduce con IA</a:t>
-            </a:r>
-          </a:p>
-          <a:p>
-            <a:pPr>
-              <a:spcBef>
-                <a:spcPts val="200"/>
-              </a:spcBef>
-            </a:pPr>
-            <a:r>
-              <a:rPr sz="1300" b="0" i="0">
-                <a:solidFill>
-                  <a:srgbClr val="333333"/>
-                </a:solidFill>
-                <a:latin typeface="Calibri"/>
-              </a:rPr>
-              <a:t>Copia o describe tu boceto a una IA y pidele el codigo Mermaid: «convierte este diagrama a Mermaid usando C4Component». Revisa el resultado: la IA acierta la sintaxis, no tu modelo.</a:t>
-            </a:r>
-          </a:p>
-        </p:txBody>
-      </p:sp>
-      <p:sp>
-        <p:nvSpPr>
-          <p:cNvPr id="14" name="Rounded Rectangle 13"/>
-          <p:cNvSpPr/>
-          <p:nvPr/>
-        </p:nvSpPr>
-        <p:spPr>
-          <a:xfrm>
-            <a:off x="457200" y="3945636"/>
-            <a:ext cx="11277295" cy="1051560"/>
-          </a:xfrm>
-          <a:prstGeom prst="roundRect">
-            <a:avLst>
-              <a:gd name="adj" fmla="val 12000"/>
-            </a:avLst>
-          </a:prstGeom>
-          <a:solidFill>
-            <a:srgbClr val="F2F2F2"/>
-          </a:solidFill>
-          <a:ln>
-            <a:noFill/>
-          </a:ln>
-        </p:spPr>
-        <p:style>
-          <a:lnRef idx="1">
-            <a:schemeClr val="accent1"/>
-          </a:lnRef>
-          <a:fillRef idx="3">
-            <a:schemeClr val="accent1"/>
-          </a:fillRef>
-          <a:effectRef idx="2">
-            <a:schemeClr val="accent1"/>
-          </a:effectRef>
-          <a:fontRef idx="minor">
-            <a:schemeClr val="lt1"/>
-          </a:fontRef>
-        </p:style>
-        <p:txBody>
-          <a:bodyPr rtlCol="0" anchor="ctr"/>
-          <a:lstStyle/>
-          <a:p>
-            <a:pPr algn="ctr"/>
-          </a:p>
-        </p:txBody>
-      </p:sp>
-      <p:sp>
-        <p:nvSpPr>
-          <p:cNvPr id="15" name="Rounded Rectangle 14"/>
-          <p:cNvSpPr/>
-          <p:nvPr/>
-        </p:nvSpPr>
-        <p:spPr>
-          <a:xfrm>
-            <a:off x="594360" y="4251960"/>
-            <a:ext cx="438912" cy="438912"/>
-          </a:xfrm>
-          <a:prstGeom prst="roundRect">
-            <a:avLst>
-              <a:gd name="adj" fmla="val 12000"/>
-            </a:avLst>
-          </a:prstGeom>
-          <a:solidFill>
-            <a:srgbClr val="095292"/>
-          </a:solidFill>
-          <a:ln>
-            <a:noFill/>
-          </a:ln>
-        </p:spPr>
-        <p:style>
-          <a:lnRef idx="1">
-            <a:schemeClr val="accent1"/>
-          </a:lnRef>
-          <a:fillRef idx="3">
-            <a:schemeClr val="accent1"/>
-          </a:fillRef>
-          <a:effectRef idx="2">
-            <a:schemeClr val="accent1"/>
-          </a:effectRef>
-          <a:fontRef idx="minor">
-            <a:schemeClr val="lt1"/>
-          </a:fontRef>
-        </p:style>
-        <p:txBody>
-          <a:bodyPr rtlCol="0" anchor="ctr"/>
-          <a:lstStyle/>
-          <a:p>
-            <a:pPr algn="ctr"/>
-          </a:p>
-        </p:txBody>
-      </p:sp>
-      <p:sp>
-        <p:nvSpPr>
-          <p:cNvPr id="16" name="TextBox 15"/>
-          <p:cNvSpPr txBox="1"/>
-          <p:nvPr/>
-        </p:nvSpPr>
-        <p:spPr>
-          <a:xfrm>
-            <a:off x="594360" y="4251960"/>
-            <a:ext cx="438912" cy="438912"/>
-          </a:xfrm>
-          <a:prstGeom prst="rect">
-            <a:avLst/>
-          </a:prstGeom>
-          <a:noFill/>
-        </p:spPr>
-        <p:txBody>
-          <a:bodyPr wrap="square" anchor="ctr"/>
-          <a:lstStyle/>
-          <a:p>
-            <a:pPr algn="ctr"/>
-            <a:r>
-              <a:rPr sz="1600" b="1" i="0">
-                <a:solidFill>
-                  <a:srgbClr val="FFFFFF"/>
-                </a:solidFill>
-                <a:latin typeface="Calibri"/>
-              </a:rPr>
-              <a:t>3</a:t>
-            </a:r>
-          </a:p>
-        </p:txBody>
-      </p:sp>
-      <p:sp>
-        <p:nvSpPr>
-          <p:cNvPr id="17" name="TextBox 16"/>
-          <p:cNvSpPr txBox="1"/>
-          <p:nvPr/>
-        </p:nvSpPr>
-        <p:spPr>
-          <a:xfrm>
-            <a:off x="1188720" y="4037076"/>
-            <a:ext cx="10271455" cy="886968"/>
-          </a:xfrm>
-          <a:prstGeom prst="rect">
-            <a:avLst/>
-          </a:prstGeom>
-          <a:noFill/>
-        </p:spPr>
-        <p:txBody>
-          <a:bodyPr wrap="square" anchor="ctr"/>
-          <a:lstStyle/>
-          <a:p>
-            <a:r>
-              <a:rPr sz="1500" b="1" i="0">
-                <a:solidFill>
-                  <a:srgbClr val="095292"/>
-                </a:solidFill>
-                <a:latin typeface="Calibri"/>
-              </a:rPr>
-              <a:t>Pega y renderiza en la plataforma del curso</a:t>
-            </a:r>
-          </a:p>
-          <a:p>
-            <a:pPr>
-              <a:spcBef>
-                <a:spcPts val="200"/>
-              </a:spcBef>
-            </a:pPr>
-            <a:r>
-              <a:rPr sz="1300" b="0" i="0">
-                <a:solidFill>
-                  <a:srgbClr val="333333"/>
-                </a:solidFill>
-                <a:latin typeface="Calibri"/>
-              </a:rPr>
-              <a:t>Pega ese codigo en la caja de texto de la pregunta y mira como lo dibuja la plataforma. Si no renderiza, corrige ahi mismo: lo que se califica es el diagrama renderizado dentro de la plataforma del curso.</a:t>
-            </a:r>
-          </a:p>
-        </p:txBody>
-      </p:sp>
-      <p:sp>
-        <p:nvSpPr>
-          <p:cNvPr id="18" name="Rounded Rectangle 17"/>
-          <p:cNvSpPr/>
-          <p:nvPr/>
-        </p:nvSpPr>
-        <p:spPr>
-          <a:xfrm>
-            <a:off x="457200" y="5088636"/>
-            <a:ext cx="11277295" cy="1051560"/>
-          </a:xfrm>
-          <a:prstGeom prst="roundRect">
-            <a:avLst>
-              <a:gd name="adj" fmla="val 12000"/>
-            </a:avLst>
-          </a:prstGeom>
-          <a:solidFill>
-            <a:srgbClr val="E8F4FA"/>
-          </a:solidFill>
-          <a:ln>
-            <a:noFill/>
-          </a:ln>
-        </p:spPr>
-        <p:style>
-          <a:lnRef idx="1">
-            <a:schemeClr val="accent1"/>
-          </a:lnRef>
-          <a:fillRef idx="3">
-            <a:schemeClr val="accent1"/>
-          </a:fillRef>
-          <a:effectRef idx="2">
-            <a:schemeClr val="accent1"/>
-          </a:effectRef>
-          <a:fontRef idx="minor">
-            <a:schemeClr val="lt1"/>
-          </a:fontRef>
-        </p:style>
-        <p:txBody>
-          <a:bodyPr rtlCol="0" anchor="ctr"/>
-          <a:lstStyle/>
-          <a:p>
-            <a:pPr algn="ctr"/>
-          </a:p>
-        </p:txBody>
-      </p:sp>
-      <p:sp>
-        <p:nvSpPr>
-          <p:cNvPr id="19" name="Rounded Rectangle 18"/>
-          <p:cNvSpPr/>
-          <p:nvPr/>
-        </p:nvSpPr>
-        <p:spPr>
-          <a:xfrm>
-            <a:off x="594360" y="5394960"/>
-            <a:ext cx="438912" cy="438912"/>
-          </a:xfrm>
-          <a:prstGeom prst="roundRect">
-            <a:avLst>
-              <a:gd name="adj" fmla="val 12000"/>
-            </a:avLst>
-          </a:prstGeom>
-          <a:solidFill>
-            <a:srgbClr val="095292"/>
-          </a:solidFill>
-          <a:ln>
-            <a:noFill/>
-          </a:ln>
-        </p:spPr>
-        <p:style>
-          <a:lnRef idx="1">
-            <a:schemeClr val="accent1"/>
-          </a:lnRef>
-          <a:fillRef idx="3">
-            <a:schemeClr val="accent1"/>
-          </a:fillRef>
-          <a:effectRef idx="2">
-            <a:schemeClr val="accent1"/>
-          </a:effectRef>
-          <a:fontRef idx="minor">
-            <a:schemeClr val="lt1"/>
-          </a:fontRef>
-        </p:style>
-        <p:txBody>
-          <a:bodyPr rtlCol="0" anchor="ctr"/>
-          <a:lstStyle/>
-          <a:p>
-            <a:pPr algn="ctr"/>
-          </a:p>
-        </p:txBody>
-      </p:sp>
-      <p:sp>
-        <p:nvSpPr>
-          <p:cNvPr id="20" name="TextBox 19"/>
-          <p:cNvSpPr txBox="1"/>
-          <p:nvPr/>
-        </p:nvSpPr>
-        <p:spPr>
-          <a:xfrm>
-            <a:off x="594360" y="5394960"/>
-            <a:ext cx="438912" cy="438912"/>
-          </a:xfrm>
-          <a:prstGeom prst="rect">
-            <a:avLst/>
-          </a:prstGeom>
-          <a:noFill/>
-        </p:spPr>
-        <p:txBody>
-          <a:bodyPr wrap="square" anchor="ctr"/>
-          <a:lstStyle/>
-          <a:p>
-            <a:pPr algn="ctr"/>
-            <a:r>
-              <a:rPr sz="1600" b="1" i="0">
-                <a:solidFill>
-                  <a:srgbClr val="FFFFFF"/>
-                </a:solidFill>
-                <a:latin typeface="Calibri"/>
-              </a:rPr>
-              <a:t>4</a:t>
-            </a:r>
-          </a:p>
-        </p:txBody>
-      </p:sp>
-      <p:sp>
-        <p:nvSpPr>
-          <p:cNvPr id="21" name="TextBox 20"/>
-          <p:cNvSpPr txBox="1"/>
-          <p:nvPr/>
-        </p:nvSpPr>
-        <p:spPr>
-          <a:xfrm>
-            <a:off x="1188720" y="5180076"/>
-            <a:ext cx="10271455" cy="886968"/>
-          </a:xfrm>
-          <a:prstGeom prst="rect">
-            <a:avLst/>
-          </a:prstGeom>
-          <a:noFill/>
-        </p:spPr>
-        <p:txBody>
-          <a:bodyPr wrap="square" anchor="ctr"/>
-          <a:lstStyle/>
-          <a:p>
-            <a:r>
-              <a:rPr sz="1500" b="1" i="0">
-                <a:solidFill>
-                  <a:srgbClr val="095292"/>
-                </a:solidFill>
-                <a:latin typeface="Calibri"/>
-              </a:rPr>
-              <a:t>Guarda el PNG para tu PI</a:t>
-            </a:r>
-          </a:p>
-          <a:p>
-            <a:pPr>
-              <a:spcBef>
-                <a:spcPts val="200"/>
-              </a:spcBef>
-            </a:pPr>
-            <a:r>
-              <a:rPr sz="1300" b="0" i="0">
-                <a:solidFill>
-                  <a:srgbClr val="333333"/>
-                </a:solidFill>
-                <a:latin typeface="Calibri"/>
-              </a:rPr>
-              <a:t>Exporta tambien la imagen a la carpeta de tu Proyecto Integrador. Esa copia es para tu informe; no reemplaza la respuesta en la plataforma.</a:t>
-            </a:r>
-          </a:p>
-        </p:txBody>
-      </p:sp>
-      <p:sp>
-        <p:nvSpPr>
-          <p:cNvPr id="22" name="TextBox 21"/>
-          <p:cNvSpPr txBox="1"/>
-          <p:nvPr/>
-        </p:nvSpPr>
-        <p:spPr>
-          <a:xfrm>
-            <a:off x="11185855" y="6473952"/>
-            <a:ext cx="640080" cy="274320"/>
-          </a:xfrm>
-          <a:prstGeom prst="rect">
-            <a:avLst/>
-          </a:prstGeom>
-          <a:noFill/>
-        </p:spPr>
-        <p:txBody>
-          <a:bodyPr wrap="square">
-            <a:spAutoFit/>
-          </a:bodyPr>
-          <a:lstStyle/>
-          <a:p>
-            <a:pPr algn="r"/>
-            <a:r>
-              <a:rPr sz="1100" b="0" i="0">
-                <a:solidFill>
-                  <a:srgbClr val="666666"/>
-                </a:solidFill>
-                <a:latin typeface="Calibri"/>
-              </a:rPr>
-              <a:t>23</a:t>
-            </a:r>
-          </a:p>
-        </p:txBody>
-      </p:sp>
-    </p:spTree>
-  </p:cSld>
-  <p:clrMapOvr>
-    <a:masterClrMapping/>
-  </p:clrMapOvr>
-</p:sld>
-</file>
-
-<file path=ppt/slides/slide24.xml><?xml version="1.0" encoding="utf-8"?>
-<p:sld xmlns:a="http://schemas.openxmlformats.org/drawingml/2006/main" xmlns:p="http://schemas.openxmlformats.org/presentationml/2006/main" xmlns:r="http://schemas.openxmlformats.org/officeDocument/2006/relationships">
-  <p:cSld>
-    <p:bg>
-      <p:bgPr>
-        <a:solidFill>
-          <a:srgbClr val="FFFFFF"/>
-        </a:solidFill>
-        <a:effectLst/>
-      </p:bgPr>
-    </p:bg>
-    <p:spTree>
-      <p:nvGrpSpPr>
-        <p:cNvPr id="1" name=""/>
-        <p:cNvGrpSpPr/>
-        <p:nvPr/>
-      </p:nvGrpSpPr>
-      <p:grpSpPr/>
-      <p:sp>
-        <p:nvSpPr>
-          <p:cNvPr id="2" name="Rectangle 1"/>
-          <p:cNvSpPr/>
-          <p:nvPr/>
-        </p:nvSpPr>
-        <p:spPr>
-          <a:xfrm>
-            <a:off x="0" y="0"/>
-            <a:ext cx="12191695" cy="960120"/>
-          </a:xfrm>
-          <a:prstGeom prst="rect">
-            <a:avLst/>
-          </a:prstGeom>
-          <a:solidFill>
-            <a:srgbClr val="095292"/>
-          </a:solidFill>
-          <a:ln>
-            <a:noFill/>
-          </a:ln>
-        </p:spPr>
-        <p:style>
-          <a:lnRef idx="1">
-            <a:schemeClr val="accent1"/>
-          </a:lnRef>
-          <a:fillRef idx="3">
-            <a:schemeClr val="accent1"/>
-          </a:fillRef>
-          <a:effectRef idx="2">
-            <a:schemeClr val="accent1"/>
-          </a:effectRef>
-          <a:fontRef idx="minor">
-            <a:schemeClr val="lt1"/>
-          </a:fontRef>
-        </p:style>
-        <p:txBody>
-          <a:bodyPr rtlCol="0" anchor="ctr"/>
-          <a:lstStyle/>
-          <a:p>
-            <a:pPr algn="ctr"/>
-          </a:p>
-        </p:txBody>
-      </p:sp>
-      <p:sp>
-        <p:nvSpPr>
-          <p:cNvPr id="3" name="Rectangle 2"/>
-          <p:cNvSpPr/>
-          <p:nvPr/>
-        </p:nvSpPr>
-        <p:spPr>
-          <a:xfrm>
-            <a:off x="0" y="960120"/>
-            <a:ext cx="12191695" cy="41148"/>
-          </a:xfrm>
-          <a:prstGeom prst="rect">
-            <a:avLst/>
-          </a:prstGeom>
-          <a:solidFill>
-            <a:srgbClr val="FFD000"/>
-          </a:solidFill>
-          <a:ln>
-            <a:noFill/>
-          </a:ln>
-        </p:spPr>
-        <p:style>
-          <a:lnRef idx="1">
-            <a:schemeClr val="accent1"/>
-          </a:lnRef>
-          <a:fillRef idx="3">
-            <a:schemeClr val="accent1"/>
-          </a:fillRef>
-          <a:effectRef idx="2">
-            <a:schemeClr val="accent1"/>
-          </a:effectRef>
-          <a:fontRef idx="minor">
-            <a:schemeClr val="lt1"/>
-          </a:fontRef>
-        </p:style>
-        <p:txBody>
-          <a:bodyPr rtlCol="0" anchor="ctr"/>
-          <a:lstStyle/>
-          <a:p>
-            <a:pPr algn="ctr"/>
-          </a:p>
-        </p:txBody>
-      </p:sp>
-      <p:sp>
-        <p:nvSpPr>
-          <p:cNvPr id="4" name="TextBox 3"/>
-          <p:cNvSpPr txBox="1"/>
-          <p:nvPr/>
-        </p:nvSpPr>
-        <p:spPr>
-          <a:xfrm>
-            <a:off x="457200" y="164592"/>
-            <a:ext cx="11277295" cy="502920"/>
-          </a:xfrm>
-          <a:prstGeom prst="rect">
-            <a:avLst/>
-          </a:prstGeom>
-          <a:noFill/>
-        </p:spPr>
-        <p:txBody>
-          <a:bodyPr wrap="square">
-            <a:spAutoFit/>
-          </a:bodyPr>
-          <a:lstStyle/>
-          <a:p>
-            <a:r>
-              <a:rPr sz="2600" b="1" i="0">
-                <a:solidFill>
-                  <a:srgbClr val="FFFFFF"/>
-                </a:solidFill>
-                <a:latin typeface="Calibri"/>
-              </a:rPr>
-              <a:t>PI CloudLite — entregable de hoy</a:t>
-            </a:r>
-          </a:p>
-        </p:txBody>
-      </p:sp>
-      <p:sp>
-        <p:nvSpPr>
-          <p:cNvPr id="5" name="TextBox 4"/>
-          <p:cNvSpPr txBox="1"/>
-          <p:nvPr/>
-        </p:nvSpPr>
-        <p:spPr>
-          <a:xfrm>
-            <a:off x="457200" y="1170432"/>
-            <a:ext cx="11277295" cy="5230368"/>
-          </a:xfrm>
-          <a:prstGeom prst="rect">
-            <a:avLst/>
-          </a:prstGeom>
-          <a:noFill/>
-        </p:spPr>
-        <p:txBody>
-          <a:bodyPr wrap="square">
-            <a:spAutoFit/>
-          </a:bodyPr>
-          <a:lstStyle/>
-          <a:p>
-            <a:pPr>
-              <a:spcAft>
-                <a:spcPts val="800"/>
-              </a:spcAft>
-            </a:pPr>
-            <a:r>
-              <a:rPr sz="2000" b="0" i="0">
-                <a:solidFill>
-                  <a:srgbClr val="333333"/>
-                </a:solidFill>
-                <a:latin typeface="Calibri"/>
-              </a:rPr>
-              <a:t>–   </a:t>
-            </a:r>
-            <a:r>
-              <a:rPr sz="2000" b="1" i="0">
-                <a:solidFill>
-                  <a:srgbClr val="333333"/>
-                </a:solidFill>
-                <a:latin typeface="Calibri"/>
-              </a:rPr>
-              <a:t>Entregable:</a:t>
-            </a:r>
-            <a:r>
-              <a:rPr sz="2000" b="0" i="0">
-                <a:solidFill>
-                  <a:srgbClr val="333333"/>
-                </a:solidFill>
-                <a:latin typeface="Calibri"/>
-              </a:rPr>
-              <a:t> Paquete v1: Context + Containers + Deployment + Dockerfile + Actions + informe 60%+</a:t>
-            </a:r>
-          </a:p>
-          <a:p>
-            <a:pPr>
-              <a:spcAft>
-                <a:spcPts val="800"/>
-              </a:spcAft>
-            </a:pPr>
-            <a:r>
-              <a:rPr sz="2000" b="0" i="0">
-                <a:solidFill>
-                  <a:srgbClr val="333333"/>
-                </a:solidFill>
-                <a:latin typeface="Calibri"/>
-              </a:rPr>
-              <a:t>–   Herramienta: </a:t>
-            </a:r>
-            <a:r>
-              <a:rPr sz="2000" b="1" i="0">
-                <a:solidFill>
-                  <a:srgbClr val="333333"/>
-                </a:solidFill>
-                <a:latin typeface="Calibri"/>
-              </a:rPr>
-              <a:t>Navegador · editores de diagramas y de texto del curso</a:t>
-            </a:r>
-          </a:p>
-          <a:p>
-            <a:pPr>
-              <a:spcAft>
-                <a:spcPts val="800"/>
-              </a:spcAft>
-            </a:pPr>
-            <a:r>
-              <a:rPr sz="2000" b="0" i="0">
-                <a:solidFill>
-                  <a:srgbClr val="333333"/>
-                </a:solidFill>
-                <a:latin typeface="Calibri"/>
-              </a:rPr>
-              <a:t>–   Todo lo que construyan hoy entra al </a:t>
-            </a:r>
-            <a:r>
-              <a:rPr sz="2000" b="1" i="0">
-                <a:solidFill>
-                  <a:srgbClr val="333333"/>
-                </a:solidFill>
-                <a:latin typeface="Calibri"/>
-              </a:rPr>
-              <a:t>informe/repo del PI</a:t>
-            </a:r>
-            <a:r>
-              <a:rPr sz="2000" b="0" i="0">
-                <a:solidFill>
-                  <a:srgbClr val="333333"/>
-                </a:solidFill>
-                <a:latin typeface="Calibri"/>
-              </a:rPr>
-              <a:t> (no es lab suelto).</a:t>
-            </a:r>
-          </a:p>
-          <a:p>
-            <a:pPr>
-              <a:spcAft>
-                <a:spcPts val="800"/>
-              </a:spcAft>
-            </a:pPr>
-            <a:r>
-              <a:rPr sz="2000" b="0" i="0">
-                <a:solidFill>
-                  <a:srgbClr val="333333"/>
-                </a:solidFill>
-                <a:latin typeface="Calibri"/>
-              </a:rPr>
-              <a:t>–   Individual por defecto · el docente puede autorizar equipos de 2–3; la entrega en la plataforma del curso siempre es individual.</a:t>
-            </a:r>
-          </a:p>
-        </p:txBody>
-      </p:sp>
-      <p:sp>
-        <p:nvSpPr>
-          <p:cNvPr id="6" name="TextBox 5"/>
-          <p:cNvSpPr txBox="1"/>
-          <p:nvPr/>
-        </p:nvSpPr>
-        <p:spPr>
-          <a:xfrm>
-            <a:off x="11185855" y="6473952"/>
-            <a:ext cx="640080" cy="274320"/>
-          </a:xfrm>
-          <a:prstGeom prst="rect">
-            <a:avLst/>
-          </a:prstGeom>
-          <a:noFill/>
-        </p:spPr>
-        <p:txBody>
-          <a:bodyPr wrap="square">
-            <a:spAutoFit/>
-          </a:bodyPr>
-          <a:lstStyle/>
-          <a:p>
-            <a:pPr algn="r"/>
-            <a:r>
-              <a:rPr sz="1100" b="0" i="0">
-                <a:solidFill>
-                  <a:srgbClr val="666666"/>
-                </a:solidFill>
-                <a:latin typeface="Calibri"/>
-              </a:rPr>
-              <a:t>24</a:t>
-            </a:r>
-          </a:p>
-        </p:txBody>
-      </p:sp>
-    </p:spTree>
-  </p:cSld>
-  <p:clrMapOvr>
-    <a:masterClrMapping/>
-  </p:clrMapOvr>
-</p:sld>
-</file>
-
-<file path=ppt/slides/slide25.xml><?xml version="1.0" encoding="utf-8"?>
-<p:sld xmlns:a="http://schemas.openxmlformats.org/drawingml/2006/main" xmlns:p="http://schemas.openxmlformats.org/presentationml/2006/main" xmlns:r="http://schemas.openxmlformats.org/officeDocument/2006/relationships">
-  <p:cSld>
-    <p:bg>
-      <p:bgPr>
-        <a:solidFill>
-          <a:srgbClr val="FFFFFF"/>
-        </a:solidFill>
-        <a:effectLst/>
-      </p:bgPr>
-    </p:bg>
-    <p:spTree>
-      <p:nvGrpSpPr>
-        <p:cNvPr id="1" name=""/>
-        <p:cNvGrpSpPr/>
-        <p:nvPr/>
-      </p:nvGrpSpPr>
-      <p:grpSpPr/>
-      <p:sp>
-        <p:nvSpPr>
-          <p:cNvPr id="2" name="Rectangle 1"/>
-          <p:cNvSpPr/>
-          <p:nvPr/>
-        </p:nvSpPr>
-        <p:spPr>
-          <a:xfrm>
-            <a:off x="0" y="0"/>
-            <a:ext cx="12191695" cy="960120"/>
-          </a:xfrm>
-          <a:prstGeom prst="rect">
-            <a:avLst/>
-          </a:prstGeom>
-          <a:solidFill>
-            <a:srgbClr val="095292"/>
-          </a:solidFill>
-          <a:ln>
-            <a:noFill/>
-          </a:ln>
-        </p:spPr>
-        <p:style>
-          <a:lnRef idx="1">
-            <a:schemeClr val="accent1"/>
-          </a:lnRef>
-          <a:fillRef idx="3">
-            <a:schemeClr val="accent1"/>
-          </a:fillRef>
-          <a:effectRef idx="2">
-            <a:schemeClr val="accent1"/>
-          </a:effectRef>
-          <a:fontRef idx="minor">
-            <a:schemeClr val="lt1"/>
-          </a:fontRef>
-        </p:style>
-        <p:txBody>
-          <a:bodyPr rtlCol="0" anchor="ctr"/>
-          <a:lstStyle/>
-          <a:p>
-            <a:pPr algn="ctr"/>
-          </a:p>
-        </p:txBody>
-      </p:sp>
-      <p:sp>
-        <p:nvSpPr>
-          <p:cNvPr id="3" name="Rectangle 2"/>
-          <p:cNvSpPr/>
-          <p:nvPr/>
-        </p:nvSpPr>
-        <p:spPr>
-          <a:xfrm>
-            <a:off x="0" y="960120"/>
-            <a:ext cx="12191695" cy="41148"/>
-          </a:xfrm>
-          <a:prstGeom prst="rect">
-            <a:avLst/>
-          </a:prstGeom>
-          <a:solidFill>
-            <a:srgbClr val="FFD000"/>
-          </a:solidFill>
-          <a:ln>
-            <a:noFill/>
-          </a:ln>
-        </p:spPr>
-        <p:style>
-          <a:lnRef idx="1">
-            <a:schemeClr val="accent1"/>
-          </a:lnRef>
-          <a:fillRef idx="3">
-            <a:schemeClr val="accent1"/>
-          </a:fillRef>
-          <a:effectRef idx="2">
-            <a:schemeClr val="accent1"/>
-          </a:effectRef>
-          <a:fontRef idx="minor">
-            <a:schemeClr val="lt1"/>
-          </a:fontRef>
-        </p:style>
-        <p:txBody>
-          <a:bodyPr rtlCol="0" anchor="ctr"/>
-          <a:lstStyle/>
-          <a:p>
-            <a:pPr algn="ctr"/>
-          </a:p>
-        </p:txBody>
-      </p:sp>
-      <p:sp>
-        <p:nvSpPr>
-          <p:cNvPr id="4" name="TextBox 3"/>
-          <p:cNvSpPr txBox="1"/>
-          <p:nvPr/>
-        </p:nvSpPr>
-        <p:spPr>
-          <a:xfrm>
-            <a:off x="457200" y="164592"/>
-            <a:ext cx="11277295" cy="502920"/>
-          </a:xfrm>
-          <a:prstGeom prst="rect">
-            <a:avLst/>
-          </a:prstGeom>
-          <a:noFill/>
-        </p:spPr>
-        <p:txBody>
-          <a:bodyPr wrap="square">
-            <a:spAutoFit/>
-          </a:bodyPr>
-          <a:lstStyle/>
-          <a:p>
-            <a:r>
-              <a:rPr sz="2600" b="1" i="0">
-                <a:solidFill>
-                  <a:srgbClr val="FFFFFF"/>
-                </a:solidFill>
-                <a:latin typeface="Calibri"/>
-              </a:rPr>
-              <a:t>Manos a la obra (paso a paso)</a:t>
-            </a:r>
-          </a:p>
-        </p:txBody>
-      </p:sp>
-      <p:sp>
-        <p:nvSpPr>
-          <p:cNvPr id="5" name="TextBox 4"/>
-          <p:cNvSpPr txBox="1"/>
-          <p:nvPr/>
-        </p:nvSpPr>
-        <p:spPr>
-          <a:xfrm>
-            <a:off x="457200" y="1170432"/>
-            <a:ext cx="11277295" cy="5230368"/>
-          </a:xfrm>
-          <a:prstGeom prst="rect">
-            <a:avLst/>
-          </a:prstGeom>
-          <a:noFill/>
-        </p:spPr>
-        <p:txBody>
-          <a:bodyPr wrap="square">
-            <a:spAutoFit/>
-          </a:bodyPr>
-          <a:lstStyle/>
-          <a:p>
-            <a:pPr>
-              <a:spcAft>
-                <a:spcPts val="800"/>
-              </a:spcAft>
-            </a:pPr>
-            <a:r>
-              <a:rPr sz="1700" b="1" i="0">
-                <a:solidFill>
-                  <a:srgbClr val="333333"/>
-                </a:solidFill>
-                <a:latin typeface="Calibri"/>
-              </a:rPr>
-              <a:t>1.</a:t>
-            </a:r>
-            <a:r>
-              <a:rPr sz="1700" b="0" i="0">
-                <a:solidFill>
-                  <a:srgbClr val="333333"/>
-                </a:solidFill>
-                <a:latin typeface="Calibri"/>
-              </a:rPr>
-              <a:t> Paso 1: completen el checklist de 10 filas del paquete v1 marcando cada evidencia como si, no o parcial y pegando la ruta o el enlace exacto de cada una, verificando que ninguna fila marcada como si quede sin ruta verificable, porque una fila sin enlace se califica como no.</a:t>
-            </a:r>
-          </a:p>
-          <a:p>
-            <a:pPr>
-              <a:spcAft>
-                <a:spcPts val="800"/>
-              </a:spcAft>
-            </a:pPr>
-            <a:r>
-              <a:rPr sz="1700" b="0" i="0">
-                <a:solidFill>
-                  <a:srgbClr val="333333"/>
-                </a:solidFill>
-                <a:latin typeface="Calibri"/>
-              </a:rPr>
-              <a:t>–   </a:t>
-            </a:r>
-            <a:r>
-              <a:rPr sz="1700" b="1" i="0">
-                <a:solidFill>
-                  <a:srgbClr val="333333"/>
-                </a:solidFill>
-                <a:latin typeface="Calibri"/>
-              </a:rPr>
-              <a:t>2.</a:t>
-            </a:r>
-            <a:r>
-              <a:rPr sz="1700" b="0" i="0">
-                <a:solidFill>
-                  <a:srgbClr val="333333"/>
-                </a:solidFill>
-                <a:latin typeface="Calibri"/>
-              </a:rPr>
-              <a:t> Paso 2: hagan la reconciliacion de nombres llenando la tabla de 5 filas que compara como se llama cada elemento en el C4Container, en el C4Deployment, en el Dockerfile o el ci.yml y en el informe, verificando que la columna de nombre canonico sea identica en las cuatro y aplicando la correccion en el artefacto que este desalineado.</a:t>
-            </a:r>
-          </a:p>
-          <a:p>
-            <a:pPr>
-              <a:spcAft>
-                <a:spcPts val="800"/>
-              </a:spcAft>
-            </a:pPr>
-            <a:r>
-              <a:rPr sz="1700" b="0" i="0">
-                <a:solidFill>
-                  <a:srgbClr val="333333"/>
-                </a:solidFill>
-                <a:latin typeface="Calibri"/>
-              </a:rPr>
-              <a:t>–   </a:t>
-            </a:r>
-            <a:r>
-              <a:rPr sz="1700" b="1" i="0">
-                <a:solidFill>
-                  <a:srgbClr val="333333"/>
-                </a:solidFill>
-                <a:latin typeface="Calibri"/>
-              </a:rPr>
-              <a:t>3.</a:t>
-            </a:r>
-            <a:r>
-              <a:rPr sz="1700" b="0" i="0">
-                <a:solidFill>
-                  <a:srgbClr val="333333"/>
-                </a:solidFill>
-                <a:latin typeface="Calibri"/>
-              </a:rPr>
-              <a:t> Paso 3: escriban en la plataforma del curso el diagrama C4Component del interior de la API con 5 componentes y sus relaciones hacia la base de datos, la cola y el proveedor de identidad, verificando al renderizar que ningun componente sea un contenedor de la Clase 4 disfrazado y que el contenedor contenedor de la frontera se llame igual que en el C4Container.</a:t>
-            </a:r>
-          </a:p>
-          <a:p>
-            <a:pPr>
-              <a:spcAft>
-                <a:spcPts val="800"/>
-              </a:spcAft>
-            </a:pPr>
-            <a:r>
-              <a:rPr sz="1700" b="0" i="0">
-                <a:solidFill>
-                  <a:srgbClr val="333333"/>
-                </a:solidFill>
-                <a:latin typeface="Calibri"/>
-              </a:rPr>
-              <a:t>–   </a:t>
-            </a:r>
-            <a:r>
-              <a:rPr sz="1700" b="1" i="0">
-                <a:solidFill>
-                  <a:srgbClr val="333333"/>
-                </a:solidFill>
-                <a:latin typeface="Calibri"/>
-              </a:rPr>
-              <a:t>4.</a:t>
-            </a:r>
-            <a:r>
-              <a:rPr sz="1700" b="0" i="0">
-                <a:solidFill>
-                  <a:srgbClr val="333333"/>
-                </a:solidFill>
-                <a:latin typeface="Calibri"/>
-              </a:rPr>
-              <a:t> Paso 4: escriban el backlog de 5 items priorizados hacia la Clase 12 con hueco detectado, accion, responsable y fecha, verificando que cada item se pueda cerrar en una semana y que al menos uno provenga del feedback del docente recibido hoy en la cola de revision.</a:t>
-            </a:r>
-          </a:p>
-          <a:p>
-            <a:pPr>
-              <a:spcAft>
-                <a:spcPts val="800"/>
-              </a:spcAft>
-            </a:pPr>
-            <a:r>
-              <a:rPr sz="1700" b="0" i="0">
-                <a:solidFill>
-                  <a:srgbClr val="333333"/>
-                </a:solidFill>
-                <a:latin typeface="Calibri"/>
-              </a:rPr>
-              <a:t>–   </a:t>
-            </a:r>
-            <a:r>
-              <a:rPr sz="1700" b="1" i="0">
-                <a:solidFill>
-                  <a:srgbClr val="333333"/>
-                </a:solidFill>
-                <a:latin typeface="Calibri"/>
-              </a:rPr>
-              <a:t>5.</a:t>
-            </a:r>
-            <a:r>
-              <a:rPr sz="1700" b="0" i="0">
-                <a:solidFill>
-                  <a:srgbClr val="333333"/>
-                </a:solidFill>
-                <a:latin typeface="Calibri"/>
-              </a:rPr>
-              <a:t> Paso 5: empaqueten el ZIP o el repositorio con los diagramas, el Dockerfile, el ci.yml y el informe al 60 por ciento, y suban las 5 preguntas a la plataforma del curso (modulo Talleres) antes del en la fecha que indique el docente, verificando que el paquete se pueda abrir en otra maquina y que el informe enlace cada evidencia por su ruta dentro del paquete.</a:t>
-            </a:r>
-          </a:p>
-        </p:txBody>
-      </p:sp>
-      <p:sp>
-        <p:nvSpPr>
-          <p:cNvPr id="6" name="TextBox 5"/>
-          <p:cNvSpPr txBox="1"/>
-          <p:nvPr/>
-        </p:nvSpPr>
-        <p:spPr>
-          <a:xfrm>
-            <a:off x="11185855" y="6473952"/>
-            <a:ext cx="640080" cy="274320"/>
-          </a:xfrm>
-          <a:prstGeom prst="rect">
-            <a:avLst/>
-          </a:prstGeom>
-          <a:noFill/>
-        </p:spPr>
-        <p:txBody>
-          <a:bodyPr wrap="square">
-            <a:spAutoFit/>
-          </a:bodyPr>
-          <a:lstStyle/>
-          <a:p>
-            <a:pPr algn="r"/>
-            <a:r>
-              <a:rPr sz="1100" b="0" i="0">
-                <a:solidFill>
-                  <a:srgbClr val="666666"/>
-                </a:solidFill>
-                <a:latin typeface="Calibri"/>
-              </a:rPr>
-              <a:t>25</a:t>
-            </a:r>
-          </a:p>
-        </p:txBody>
-      </p:sp>
-    </p:spTree>
-  </p:cSld>
-  <p:clrMapOvr>
-    <a:masterClrMapping/>
-  </p:clrMapOvr>
-</p:sld>
-</file>
-
-<file path=ppt/slides/slide26.xml><?xml version="1.0" encoding="utf-8"?>
-<p:sld xmlns:a="http://schemas.openxmlformats.org/drawingml/2006/main" xmlns:p="http://schemas.openxmlformats.org/presentationml/2006/main" xmlns:r="http://schemas.openxmlformats.org/officeDocument/2006/relationships">
-  <p:cSld>
-    <p:bg>
-      <p:bgPr>
-        <a:solidFill>
-          <a:srgbClr val="FFFFFF"/>
-        </a:solidFill>
-        <a:effectLst/>
-      </p:bgPr>
-    </p:bg>
-    <p:spTree>
-      <p:nvGrpSpPr>
-        <p:cNvPr id="1" name=""/>
-        <p:cNvGrpSpPr/>
-        <p:nvPr/>
-      </p:nvGrpSpPr>
-      <p:grpSpPr/>
-      <p:sp>
-        <p:nvSpPr>
-          <p:cNvPr id="2" name="Rectangle 1"/>
-          <p:cNvSpPr/>
-          <p:nvPr/>
-        </p:nvSpPr>
-        <p:spPr>
-          <a:xfrm>
-            <a:off x="0" y="0"/>
-            <a:ext cx="12191695" cy="960120"/>
-          </a:xfrm>
-          <a:prstGeom prst="rect">
-            <a:avLst/>
-          </a:prstGeom>
-          <a:solidFill>
-            <a:srgbClr val="095292"/>
-          </a:solidFill>
-          <a:ln>
-            <a:noFill/>
-          </a:ln>
-        </p:spPr>
-        <p:style>
-          <a:lnRef idx="1">
-            <a:schemeClr val="accent1"/>
-          </a:lnRef>
-          <a:fillRef idx="3">
-            <a:schemeClr val="accent1"/>
-          </a:fillRef>
-          <a:effectRef idx="2">
-            <a:schemeClr val="accent1"/>
-          </a:effectRef>
-          <a:fontRef idx="minor">
-            <a:schemeClr val="lt1"/>
-          </a:fontRef>
-        </p:style>
-        <p:txBody>
-          <a:bodyPr rtlCol="0" anchor="ctr"/>
-          <a:lstStyle/>
-          <a:p>
-            <a:pPr algn="ctr"/>
-          </a:p>
-        </p:txBody>
-      </p:sp>
-      <p:sp>
-        <p:nvSpPr>
-          <p:cNvPr id="3" name="Rectangle 2"/>
-          <p:cNvSpPr/>
-          <p:nvPr/>
-        </p:nvSpPr>
-        <p:spPr>
-          <a:xfrm>
-            <a:off x="0" y="960120"/>
-            <a:ext cx="12191695" cy="41148"/>
-          </a:xfrm>
-          <a:prstGeom prst="rect">
-            <a:avLst/>
-          </a:prstGeom>
-          <a:solidFill>
-            <a:srgbClr val="FFD000"/>
-          </a:solidFill>
-          <a:ln>
-            <a:noFill/>
-          </a:ln>
-        </p:spPr>
-        <p:style>
-          <a:lnRef idx="1">
-            <a:schemeClr val="accent1"/>
-          </a:lnRef>
-          <a:fillRef idx="3">
-            <a:schemeClr val="accent1"/>
-          </a:fillRef>
-          <a:effectRef idx="2">
-            <a:schemeClr val="accent1"/>
-          </a:effectRef>
-          <a:fontRef idx="minor">
-            <a:schemeClr val="lt1"/>
-          </a:fontRef>
-        </p:style>
-        <p:txBody>
-          <a:bodyPr rtlCol="0" anchor="ctr"/>
-          <a:lstStyle/>
-          <a:p>
-            <a:pPr algn="ctr"/>
-          </a:p>
-        </p:txBody>
-      </p:sp>
-      <p:sp>
-        <p:nvSpPr>
-          <p:cNvPr id="4" name="TextBox 3"/>
-          <p:cNvSpPr txBox="1"/>
-          <p:nvPr/>
-        </p:nvSpPr>
-        <p:spPr>
-          <a:xfrm>
-            <a:off x="457200" y="164592"/>
-            <a:ext cx="11277295" cy="502920"/>
-          </a:xfrm>
-          <a:prstGeom prst="rect">
-            <a:avLst/>
-          </a:prstGeom>
-          <a:noFill/>
-        </p:spPr>
-        <p:txBody>
-          <a:bodyPr wrap="square">
-            <a:spAutoFit/>
-          </a:bodyPr>
-          <a:lstStyle/>
-          <a:p>
-            <a:r>
-              <a:rPr sz="2600" b="1" i="0">
-                <a:solidFill>
-                  <a:srgbClr val="FFFFFF"/>
-                </a:solidFill>
-                <a:latin typeface="Calibri"/>
-              </a:rPr>
-              <a:t>Para continuar (PI)</a:t>
-            </a:r>
-          </a:p>
-        </p:txBody>
-      </p:sp>
-      <p:sp>
-        <p:nvSpPr>
-          <p:cNvPr id="5" name="Rounded Rectangle 4"/>
-          <p:cNvSpPr/>
-          <p:nvPr/>
-        </p:nvSpPr>
-        <p:spPr>
-          <a:xfrm>
-            <a:off x="457200" y="1261872"/>
-            <a:ext cx="11277295" cy="1051560"/>
-          </a:xfrm>
-          <a:prstGeom prst="roundRect">
-            <a:avLst>
-              <a:gd name="adj" fmla="val 12000"/>
-            </a:avLst>
-          </a:prstGeom>
-          <a:solidFill>
-            <a:srgbClr val="E8F4FA"/>
-          </a:solidFill>
-          <a:ln>
-            <a:noFill/>
-          </a:ln>
-        </p:spPr>
-        <p:style>
-          <a:lnRef idx="1">
-            <a:schemeClr val="accent1"/>
-          </a:lnRef>
-          <a:fillRef idx="3">
-            <a:schemeClr val="accent1"/>
-          </a:fillRef>
-          <a:effectRef idx="2">
-            <a:schemeClr val="accent1"/>
-          </a:effectRef>
-          <a:fontRef idx="minor">
-            <a:schemeClr val="lt1"/>
-          </a:fontRef>
-        </p:style>
-        <p:txBody>
-          <a:bodyPr rtlCol="0" anchor="ctr"/>
-          <a:lstStyle/>
-          <a:p>
-            <a:pPr algn="ctr"/>
-          </a:p>
-        </p:txBody>
-      </p:sp>
-      <p:sp>
-        <p:nvSpPr>
-          <p:cNvPr id="6" name="Rectangle 5"/>
-          <p:cNvSpPr/>
-          <p:nvPr/>
-        </p:nvSpPr>
-        <p:spPr>
-          <a:xfrm>
-            <a:off x="457200" y="1261872"/>
-            <a:ext cx="128016" cy="1051560"/>
-          </a:xfrm>
-          <a:prstGeom prst="rect">
-            <a:avLst/>
-          </a:prstGeom>
-          <a:solidFill>
-            <a:srgbClr val="269CCB"/>
-          </a:solidFill>
-          <a:ln>
-            <a:noFill/>
-          </a:ln>
-        </p:spPr>
-        <p:style>
-          <a:lnRef idx="1">
-            <a:schemeClr val="accent1"/>
-          </a:lnRef>
-          <a:fillRef idx="3">
-            <a:schemeClr val="accent1"/>
-          </a:fillRef>
-          <a:effectRef idx="2">
-            <a:schemeClr val="accent1"/>
-          </a:effectRef>
-          <a:fontRef idx="minor">
-            <a:schemeClr val="lt1"/>
-          </a:fontRef>
-        </p:style>
-        <p:txBody>
-          <a:bodyPr rtlCol="0" anchor="ctr"/>
-          <a:lstStyle/>
-          <a:p>
-            <a:pPr algn="ctr"/>
-          </a:p>
-        </p:txBody>
-      </p:sp>
-      <p:sp>
-        <p:nvSpPr>
-          <p:cNvPr id="7" name="TextBox 6"/>
-          <p:cNvSpPr txBox="1"/>
-          <p:nvPr/>
-        </p:nvSpPr>
-        <p:spPr>
-          <a:xfrm>
-            <a:off x="777240" y="1399031"/>
-            <a:ext cx="10774375" cy="822959"/>
-          </a:xfrm>
-          <a:prstGeom prst="rect">
-            <a:avLst/>
-          </a:prstGeom>
-          <a:noFill/>
-        </p:spPr>
-        <p:txBody>
-          <a:bodyPr wrap="square">
-            <a:spAutoFit/>
-          </a:bodyPr>
-          <a:lstStyle/>
-          <a:p>
-            <a:r>
-              <a:rPr sz="1200" b="1" i="0">
-                <a:solidFill>
-                  <a:srgbClr val="269CCB"/>
-                </a:solidFill>
-                <a:latin typeface="Calibri"/>
-              </a:rPr>
-              <a:t>Info</a:t>
-            </a:r>
-          </a:p>
-          <a:p>
-            <a:pPr>
-              <a:spcBef>
-                <a:spcPts val="400"/>
-              </a:spcBef>
-            </a:pPr>
-            <a:r>
-              <a:rPr sz="1400" b="0" i="0">
-                <a:solidFill>
-                  <a:srgbClr val="333333"/>
-                </a:solidFill>
-                <a:latin typeface="Calibri"/>
-              </a:rPr>
-              <a:t>Entregable: Paquete v1: Context + Containers + Deployment + Dockerfile + Actions + informe 60%+</a:t>
-            </a:r>
-          </a:p>
-        </p:txBody>
-      </p:sp>
-      <p:sp>
-        <p:nvSpPr>
-          <p:cNvPr id="8" name="Rounded Rectangle 7"/>
-          <p:cNvSpPr/>
-          <p:nvPr/>
-        </p:nvSpPr>
-        <p:spPr>
-          <a:xfrm>
-            <a:off x="457200" y="2478024"/>
-            <a:ext cx="11277295" cy="1051560"/>
-          </a:xfrm>
-          <a:prstGeom prst="roundRect">
-            <a:avLst>
-              <a:gd name="adj" fmla="val 12000"/>
-            </a:avLst>
-          </a:prstGeom>
-          <a:solidFill>
-            <a:srgbClr val="FFF8E1"/>
-          </a:solidFill>
-          <a:ln>
-            <a:noFill/>
-          </a:ln>
-        </p:spPr>
-        <p:style>
-          <a:lnRef idx="1">
-            <a:schemeClr val="accent1"/>
-          </a:lnRef>
-          <a:fillRef idx="3">
-            <a:schemeClr val="accent1"/>
-          </a:fillRef>
-          <a:effectRef idx="2">
-            <a:schemeClr val="accent1"/>
-          </a:effectRef>
-          <a:fontRef idx="minor">
-            <a:schemeClr val="lt1"/>
-          </a:fontRef>
-        </p:style>
-        <p:txBody>
-          <a:bodyPr rtlCol="0" anchor="ctr"/>
-          <a:lstStyle/>
-          <a:p>
-            <a:pPr algn="ctr"/>
-          </a:p>
-        </p:txBody>
-      </p:sp>
-      <p:sp>
-        <p:nvSpPr>
-          <p:cNvPr id="9" name="Rectangle 8"/>
-          <p:cNvSpPr/>
-          <p:nvPr/>
-        </p:nvSpPr>
-        <p:spPr>
-          <a:xfrm>
-            <a:off x="457200" y="2478024"/>
-            <a:ext cx="128016" cy="1051560"/>
-          </a:xfrm>
-          <a:prstGeom prst="rect">
-            <a:avLst/>
-          </a:prstGeom>
-          <a:solidFill>
-            <a:srgbClr val="FFD000"/>
-          </a:solidFill>
-          <a:ln>
-            <a:noFill/>
-          </a:ln>
-        </p:spPr>
-        <p:style>
-          <a:lnRef idx="1">
-            <a:schemeClr val="accent1"/>
-          </a:lnRef>
-          <a:fillRef idx="3">
-            <a:schemeClr val="accent1"/>
-          </a:fillRef>
-          <a:effectRef idx="2">
-            <a:schemeClr val="accent1"/>
-          </a:effectRef>
-          <a:fontRef idx="minor">
-            <a:schemeClr val="lt1"/>
-          </a:fontRef>
-        </p:style>
-        <p:txBody>
-          <a:bodyPr rtlCol="0" anchor="ctr"/>
-          <a:lstStyle/>
-          <a:p>
-            <a:pPr algn="ctr"/>
-          </a:p>
-        </p:txBody>
-      </p:sp>
-      <p:sp>
-        <p:nvSpPr>
-          <p:cNvPr id="10" name="TextBox 9"/>
-          <p:cNvSpPr txBox="1"/>
-          <p:nvPr/>
-        </p:nvSpPr>
-        <p:spPr>
-          <a:xfrm>
-            <a:off x="777240" y="2615184"/>
-            <a:ext cx="10774375" cy="822959"/>
-          </a:xfrm>
-          <a:prstGeom prst="rect">
-            <a:avLst/>
-          </a:prstGeom>
-          <a:noFill/>
-        </p:spPr>
-        <p:txBody>
-          <a:bodyPr wrap="square">
-            <a:spAutoFit/>
-          </a:bodyPr>
-          <a:lstStyle/>
-          <a:p>
-            <a:r>
-              <a:rPr sz="1200" b="1" i="0">
-                <a:solidFill>
-                  <a:srgbClr val="FFD000"/>
-                </a:solidFill>
-                <a:latin typeface="Calibri"/>
-              </a:rPr>
-              <a:t>Aclaración</a:t>
-            </a:r>
-          </a:p>
-          <a:p>
-            <a:pPr>
-              <a:spcBef>
-                <a:spcPts val="400"/>
-              </a:spcBef>
-            </a:pPr>
-            <a:r>
-              <a:rPr sz="1400" b="0" i="0">
-                <a:solidFill>
-                  <a:srgbClr val="333333"/>
-                </a:solidFill>
-                <a:latin typeface="Calibri"/>
-              </a:rPr>
-              <a:t>Subir evidencias al paquete CloudLite (Drive/repo) y a la plataforma del curso (la plataforma del curso) en la fecha que indique el docente.</a:t>
-            </a:r>
-          </a:p>
-        </p:txBody>
-      </p:sp>
-      <p:sp>
-        <p:nvSpPr>
-          <p:cNvPr id="11" name="Rounded Rectangle 10"/>
-          <p:cNvSpPr/>
-          <p:nvPr/>
-        </p:nvSpPr>
-        <p:spPr>
-          <a:xfrm>
-            <a:off x="457200" y="3694176"/>
-            <a:ext cx="11277295" cy="1051560"/>
-          </a:xfrm>
-          <a:prstGeom prst="roundRect">
-            <a:avLst>
-              <a:gd name="adj" fmla="val 12000"/>
-            </a:avLst>
-          </a:prstGeom>
-          <a:solidFill>
-            <a:srgbClr val="FBE4E4"/>
-          </a:solidFill>
-          <a:ln>
-            <a:noFill/>
-          </a:ln>
-        </p:spPr>
-        <p:style>
-          <a:lnRef idx="1">
-            <a:schemeClr val="accent1"/>
-          </a:lnRef>
-          <a:fillRef idx="3">
-            <a:schemeClr val="accent1"/>
-          </a:fillRef>
-          <a:effectRef idx="2">
-            <a:schemeClr val="accent1"/>
-          </a:effectRef>
-          <a:fontRef idx="minor">
-            <a:schemeClr val="lt1"/>
-          </a:fontRef>
-        </p:style>
-        <p:txBody>
-          <a:bodyPr rtlCol="0" anchor="ctr"/>
-          <a:lstStyle/>
-          <a:p>
-            <a:pPr algn="ctr"/>
-          </a:p>
-        </p:txBody>
-      </p:sp>
-      <p:sp>
-        <p:nvSpPr>
-          <p:cNvPr id="12" name="Rectangle 11"/>
-          <p:cNvSpPr/>
-          <p:nvPr/>
-        </p:nvSpPr>
-        <p:spPr>
-          <a:xfrm>
-            <a:off x="457200" y="3694176"/>
-            <a:ext cx="128016" cy="1051560"/>
-          </a:xfrm>
-          <a:prstGeom prst="rect">
-            <a:avLst/>
-          </a:prstGeom>
-          <a:solidFill>
-            <a:srgbClr val="A02030"/>
-          </a:solidFill>
-          <a:ln>
-            <a:noFill/>
-          </a:ln>
-        </p:spPr>
-        <p:style>
-          <a:lnRef idx="1">
-            <a:schemeClr val="accent1"/>
-          </a:lnRef>
-          <a:fillRef idx="3">
-            <a:schemeClr val="accent1"/>
-          </a:fillRef>
-          <a:effectRef idx="2">
-            <a:schemeClr val="accent1"/>
-          </a:effectRef>
-          <a:fontRef idx="minor">
-            <a:schemeClr val="lt1"/>
-          </a:fontRef>
-        </p:style>
-        <p:txBody>
-          <a:bodyPr rtlCol="0" anchor="ctr"/>
-          <a:lstStyle/>
-          <a:p>
-            <a:pPr algn="ctr"/>
-          </a:p>
-        </p:txBody>
-      </p:sp>
-      <p:sp>
-        <p:nvSpPr>
-          <p:cNvPr id="13" name="TextBox 12"/>
-          <p:cNvSpPr txBox="1"/>
-          <p:nvPr/>
-        </p:nvSpPr>
-        <p:spPr>
-          <a:xfrm>
-            <a:off x="777240" y="3831336"/>
-            <a:ext cx="10774375" cy="822959"/>
-          </a:xfrm>
-          <a:prstGeom prst="rect">
-            <a:avLst/>
-          </a:prstGeom>
-          <a:noFill/>
-        </p:spPr>
-        <p:txBody>
-          <a:bodyPr wrap="square">
-            <a:spAutoFit/>
-          </a:bodyPr>
-          <a:lstStyle/>
-          <a:p>
-            <a:r>
-              <a:rPr sz="1200" b="1" i="0">
-                <a:solidFill>
-                  <a:srgbClr val="A02030"/>
-                </a:solidFill>
-                <a:latin typeface="Calibri"/>
-              </a:rPr>
-              <a:t>Atención</a:t>
-            </a:r>
-          </a:p>
-          <a:p>
-            <a:pPr>
-              <a:spcBef>
-                <a:spcPts val="400"/>
-              </a:spcBef>
-            </a:pPr>
-            <a:r>
-              <a:rPr sz="1400" b="0" i="0">
-                <a:solidFill>
-                  <a:srgbClr val="333333"/>
-                </a:solidFill>
-                <a:latin typeface="Calibri"/>
-              </a:rPr>
-              <a:t>Sin cloud de pago ni instalaciones obligatorias de hipervisores/Docker Desktop.</a:t>
-            </a:r>
-          </a:p>
-        </p:txBody>
-      </p:sp>
-      <p:sp>
-        <p:nvSpPr>
-          <p:cNvPr id="14" name="TextBox 13"/>
-          <p:cNvSpPr txBox="1"/>
-          <p:nvPr/>
-        </p:nvSpPr>
-        <p:spPr>
-          <a:xfrm>
-            <a:off x="11185855" y="6473952"/>
-            <a:ext cx="640080" cy="274320"/>
-          </a:xfrm>
-          <a:prstGeom prst="rect">
-            <a:avLst/>
-          </a:prstGeom>
-          <a:noFill/>
-        </p:spPr>
-        <p:txBody>
-          <a:bodyPr wrap="square">
-            <a:spAutoFit/>
-          </a:bodyPr>
-          <a:lstStyle/>
-          <a:p>
-            <a:pPr algn="r"/>
-            <a:r>
-              <a:rPr sz="1100" b="0" i="0">
-                <a:solidFill>
-                  <a:srgbClr val="666666"/>
-                </a:solidFill>
-                <a:latin typeface="Calibri"/>
-              </a:rPr>
-              <a:t>26</a:t>
-            </a:r>
-          </a:p>
-        </p:txBody>
-      </p:sp>
-    </p:spTree>
-  </p:cSld>
-  <p:clrMapOvr>
-    <a:masterClrMapping/>
-  </p:clrMapOvr>
-</p:sld>
-</file>
-
-<file path=ppt/slides/slide27.xml><?xml version="1.0" encoding="utf-8"?>
-<p:sld xmlns:a="http://schemas.openxmlformats.org/drawingml/2006/main" xmlns:p="http://schemas.openxmlformats.org/presentationml/2006/main" xmlns:r="http://schemas.openxmlformats.org/officeDocument/2006/relationships">
-  <p:cSld>
-    <p:bg>
-      <p:bgPr>
-        <a:solidFill>
-          <a:srgbClr val="FFFFFF"/>
-        </a:solidFill>
-        <a:effectLst/>
-      </p:bgPr>
-    </p:bg>
-    <p:spTree>
-      <p:nvGrpSpPr>
-        <p:cNvPr id="1" name=""/>
-        <p:cNvGrpSpPr/>
-        <p:nvPr/>
-      </p:nvGrpSpPr>
-      <p:grpSpPr/>
-      <p:sp>
-        <p:nvSpPr>
-          <p:cNvPr id="2" name="Rectangle 1"/>
-          <p:cNvSpPr/>
-          <p:nvPr/>
-        </p:nvSpPr>
-        <p:spPr>
-          <a:xfrm>
-            <a:off x="0" y="0"/>
-            <a:ext cx="12191695" cy="164592"/>
-          </a:xfrm>
-          <a:prstGeom prst="rect">
-            <a:avLst/>
-          </a:prstGeom>
-          <a:solidFill>
-            <a:srgbClr val="269CCB"/>
-          </a:solidFill>
-          <a:ln>
-            <a:noFill/>
-          </a:ln>
-        </p:spPr>
-        <p:style>
-          <a:lnRef idx="1">
-            <a:schemeClr val="accent1"/>
-          </a:lnRef>
-          <a:fillRef idx="3">
-            <a:schemeClr val="accent1"/>
-          </a:fillRef>
-          <a:effectRef idx="2">
-            <a:schemeClr val="accent1"/>
-          </a:effectRef>
-          <a:fontRef idx="minor">
-            <a:schemeClr val="lt1"/>
-          </a:fontRef>
-        </p:style>
-        <p:txBody>
-          <a:bodyPr rtlCol="0" anchor="ctr"/>
-          <a:lstStyle/>
-          <a:p>
-            <a:pPr algn="ctr"/>
-          </a:p>
-        </p:txBody>
-      </p:sp>
-      <p:pic>
-        <p:nvPicPr>
-          <p:cNvPr id="3" name="Picture 2" descr="logo_uniajc_color.png"/>
-          <p:cNvPicPr>
-            <a:picLocks noChangeAspect="1"/>
-          </p:cNvPicPr>
-          <p:nvPr/>
-        </p:nvPicPr>
-        <p:blipFill>
-          <a:blip r:embed="rId2"/>
-          <a:stretch>
-            <a:fillRect/>
-          </a:stretch>
-        </p:blipFill>
-        <p:spPr>
-          <a:xfrm>
-            <a:off x="10271455" y="5998464"/>
-            <a:ext cx="1463040" cy="643233"/>
-          </a:xfrm>
-          <a:prstGeom prst="rect">
-            <a:avLst/>
-          </a:prstGeom>
-        </p:spPr>
-      </p:pic>
-      <p:sp>
-        <p:nvSpPr>
-          <p:cNvPr id="4" name="TextBox 3"/>
-          <p:cNvSpPr txBox="1"/>
-          <p:nvPr/>
-        </p:nvSpPr>
-        <p:spPr>
-          <a:xfrm>
             <a:off x="457200" y="1737360"/>
             <a:ext cx="11277295" cy="1097280"/>
           </a:xfrm>
@@ -10852,7 +7597,7 @@
                 </a:solidFill>
                 <a:latin typeface="Calibri"/>
               </a:rPr>
-              <a:t>Clase 11 · PI en movimiento</a:t>
+              <a:t>Clase 11 · cierre conceptual</a:t>
             </a:r>
           </a:p>
         </p:txBody>
@@ -10891,7 +7636,7 @@
                 </a:solidFill>
                 <a:latin typeface="Calibri"/>
               </a:rPr>
-              <a:t>Integrar diagramas v1 + checklist de avance PI</a:t>
+              <a:t>Consolidar evidencias PI en un paquete revisable.</a:t>
             </a:r>
           </a:p>
           <a:p>
@@ -10907,7 +7652,7 @@
                 </a:solidFill>
                 <a:latin typeface="Calibri"/>
               </a:rPr>
-              <a:t>Evidencia: Paquete v1: Context + Containers + Deployment + Dockerfile + Actions + informe 60%+</a:t>
+              <a:t>Detectar huecos (nombres inconsistentes, servicios de más, sin seguridad).</a:t>
             </a:r>
           </a:p>
           <a:p>
@@ -10923,7 +7668,7 @@
                 </a:solidFill>
                 <a:latin typeface="Calibri"/>
               </a:rPr>
-              <a:t>Siguiente paso = siguiente hito del PI CloudLite</a:t>
+              <a:t>Salir con backlog claro hacia Clase 12/15.</a:t>
             </a:r>
           </a:p>
         </p:txBody>
@@ -10958,7 +7703,7 @@
                 </a:solidFill>
                 <a:latin typeface="Calibri"/>
               </a:rPr>
-              <a:t>Teoría al servicio del proyecto</a:t>
+              <a:t>Teoría al servicio del diseño</a:t>
             </a:r>
           </a:p>
         </p:txBody>
@@ -11356,7 +8101,7 @@
                 </a:solidFill>
                 <a:latin typeface="Calibri"/>
               </a:rPr>
-              <a:t>Checklist de avance (obligatorio)</a:t>
+              <a:t>Errores frecuentes a corregir</a:t>
             </a:r>
           </a:p>
         </p:txBody>
@@ -11395,7 +8140,7 @@
                 </a:solidFill>
                 <a:latin typeface="Calibri"/>
               </a:rPr>
-              <a:t>–   ☐ Dominio + capacidades  ☐ ADR modelo  ☐ C4 Context/Containers</a:t>
+              <a:t>–   Microservicios teatro · nombres distintos entre diagramas · secretos en imagen.</a:t>
             </a:r>
           </a:p>
           <a:p>
@@ -11411,23 +8156,7 @@
                 </a:solidFill>
                 <a:latin typeface="Calibri"/>
               </a:rPr>
-              <a:t>–   ☐ Deployment  ☐ Dockerfile/lab  ☐ Actions YAML  ☐ Seguridad  ☐ Costos</a:t>
-            </a:r>
-          </a:p>
-          <a:p>
-            <a:pPr>
-              <a:spcAft>
-                <a:spcPts val="800"/>
-              </a:spcAft>
-            </a:pPr>
-            <a:r>
-              <a:rPr sz="2000" b="0" i="0">
-                <a:solidFill>
-                  <a:srgbClr val="333333"/>
-                </a:solidFill>
-                <a:latin typeface="Calibri"/>
-              </a:rPr>
-              <a:t>–   Hoy el docente revisa en vivo; no es sustentación final.</a:t>
+              <a:t>–   CI sin tests · diagrama sin puertos · dominio infinito.</a:t>
             </a:r>
           </a:p>
         </p:txBody>
@@ -11608,7 +8337,7 @@
                 </a:solidFill>
                 <a:latin typeface="Calibri"/>
               </a:rPr>
-              <a:t>Errores frecuentes a corregir</a:t>
+              <a:t>La teoria propia del dia: que es una revision de arquitectura (1/2)</a:t>
             </a:r>
           </a:p>
         </p:txBody>
@@ -11647,7 +8376,7 @@
                 </a:solidFill>
                 <a:latin typeface="Calibri"/>
               </a:rPr>
-              <a:t>–   Microservicios teatro · nombres distintos entre diagramas · secretos en imagen.</a:t>
+              <a:t>–   Esta clase no introduce teoria de un tema tecnico nuevo, y eso es deliberado, pero si tiene teoria propia: la teoria de la revision y la evaluacion.</a:t>
             </a:r>
           </a:p>
           <a:p>
@@ -11663,7 +8392,23 @@
                 </a:solidFill>
                 <a:latin typeface="Calibri"/>
               </a:rPr>
-              <a:t>–   CI sin tests · diagrama sin puertos · dominio infinito.</a:t>
+              <a:t>–   Una revision de arquitectura, en ingles architecture review, es una practica profesional formal en la que alguien distinto de quien diseno el sistema examina el diseno antes de que este construido, buscando riesgos y decisiones sin justificar.</a:t>
+            </a:r>
+          </a:p>
+          <a:p>
+            <a:pPr>
+              <a:spcAft>
+                <a:spcPts val="800"/>
+              </a:spcAft>
+            </a:pPr>
+            <a:r>
+              <a:rPr sz="2000" b="0" i="0">
+                <a:solidFill>
+                  <a:srgbClr val="333333"/>
+                </a:solidFill>
+                <a:latin typeface="Calibri"/>
+              </a:rPr>
+              <a:t>–   Existe en la industria con nombres concretos: ATAM en su version academica, design review o RFC review en empresas de producto, comite de arquitectura en organizaciones grandes.</a:t>
             </a:r>
           </a:p>
         </p:txBody>
@@ -11844,7 +8589,7 @@
                 </a:solidFill>
                 <a:latin typeface="Calibri"/>
               </a:rPr>
-              <a:t>Rúbrica (recordatorio)</a:t>
+              <a:t>La teoria propia del dia: que es una revision de arquitectura (2/2)</a:t>
             </a:r>
           </a:p>
         </p:txBody>
@@ -11883,7 +8628,7 @@
                 </a:solidFill>
                 <a:latin typeface="Calibri"/>
               </a:rPr>
-              <a:t>–   Diagramas 25 · Contenedores 20 · CI/CD 15 · Dominio/servicio 15 · etc.</a:t>
+              <a:t>–   Todas comparten la premisa economica que sostiene el curso: un riesgo detectado en el diseno cuesta una fraccion de lo que cuesta cuando ya esta implementado y con usuarios encima.</a:t>
             </a:r>
           </a:p>
           <a:p>
@@ -11899,7 +8644,7 @@
                 </a:solidFill>
                 <a:latin typeface="Calibri"/>
               </a:rPr>
-              <a:t>–   Detalle en enunciado PI (no se repite evaluación global aquí).</a:t>
+              <a:t>–   La revision no juzga si el diagrama es bonito; busca tres cosas: decisiones sin argumento, incoherencias entre artefactos y riesgos que nadie ha nombrado.</a:t>
             </a:r>
           </a:p>
         </p:txBody>
@@ -12080,7 +8825,7 @@
                 </a:solidFill>
                 <a:latin typeface="Calibri"/>
               </a:rPr>
-              <a:t>La teoria propia del dia: que es una revision de arquitectura (1/2)</a:t>
+              <a:t>El insumo: las seis piezas del paquete CloudLite v1</a:t>
             </a:r>
           </a:p>
         </p:txBody>
@@ -12119,7 +8864,7 @@
                 </a:solidFill>
                 <a:latin typeface="Calibri"/>
               </a:rPr>
-              <a:t>–   Esta clase no introduce teoria de un tema tecnico nuevo, y eso es deliberado, pero si tiene teoria propia: la teoria de la revision y la evaluacion.</a:t>
+              <a:t>–   El insumo es el paquete CloudLite v1, que a estas alturas debe tener seis piezas producidas antes: el C4 de Contexto de la Clase 1, el C4 de Contenedores de la Clase 4, el modelo de amenazas con controles de la Clase 6</a:t>
             </a:r>
           </a:p>
           <a:p>
@@ -12135,7 +8880,7 @@
                 </a:solidFill>
                 <a:latin typeface="Calibri"/>
               </a:rPr>
-              <a:t>–   Una revision de arquitectura, en ingles architecture review, es una practica profesional formal en la que alguien distinto de quien diseno el sistema examina el diseno antes de que este construido, buscando riesgos y decisiones sin justificar.</a:t>
+              <a:t>–   El diagrama de despliegue con zonas publica y privada de la Clase 7, el workflow de GitHub Actions y las metricas de monitoreo de la Clase 8, y la tabla de costos con drivers y right-sizing de la Clase 10.</a:t>
             </a:r>
           </a:p>
           <a:p>
@@ -12151,7 +8896,23 @@
                 </a:solidFill>
                 <a:latin typeface="Calibri"/>
               </a:rPr>
-              <a:t>–   Existe en la industria con nombres concretos: ATAM en su version academica, design review o RFC review en empresas de producto, comite de arquitectura en organizaciones grandes.</a:t>
+              <a:t>–   El criterio central de auditoria se llama trazabilidad: la propiedad de que un elemento se pueda seguir de un artefacto al siguiente sin cambiar de nombre ni desaparecer.</a:t>
+            </a:r>
+          </a:p>
+          <a:p>
+            <a:pPr>
+              <a:spcAft>
+                <a:spcPts val="800"/>
+              </a:spcAft>
+            </a:pPr>
+            <a:r>
+              <a:rPr sz="2000" b="0" i="0">
+                <a:solidFill>
+                  <a:srgbClr val="333333"/>
+                </a:solidFill>
+                <a:latin typeface="Calibri"/>
+              </a:rPr>
+              <a:t>–   No es una formalidad burocratica, es el unico detector confiable de que el estudiante penso el sistema en vez de producir seis tareas independientes para seis notas distintas.</a:t>
             </a:r>
           </a:p>
         </p:txBody>
@@ -12332,7 +9093,7 @@
                 </a:solidFill>
                 <a:latin typeface="Calibri"/>
               </a:rPr>
-              <a:t>La teoria propia del dia: que es una revision de arquitectura (2/2)</a:t>
+              <a:t>Las cinco preguntas de coherencia, en orden (1/2)</a:t>
             </a:r>
           </a:p>
         </p:txBody>
@@ -12371,7 +9132,7 @@
                 </a:solidFill>
                 <a:latin typeface="Calibri"/>
               </a:rPr>
-              <a:t>–   Todas comparten la premisa economica que sostiene el curso: un riesgo detectado en el diseno cuesta una fraccion de lo que cuesta cuando ya esta implementado y con usuarios encima.</a:t>
+              <a:t>–   Las preguntas de coherencia, aplicadas a CloudLite, son cinco y conviene hacerlas en orden.</a:t>
             </a:r>
           </a:p>
           <a:p>
@@ -12387,7 +9148,55 @@
                 </a:solidFill>
                 <a:latin typeface="Calibri"/>
               </a:rPr>
-              <a:t>–   La revision no juzga si el diagrama es bonito; busca tres cosas: decisiones sin argumento, incoherencias entre artefactos y riesgos que nadie ha nombrado.</a:t>
+              <a:t>–   Primera: cada contenedor del C4 de la Clase 4 aparece en el diagrama de despliegue de la Clase 7 y con el mismo nombre</a:t>
+            </a:r>
+          </a:p>
+          <a:p>
+            <a:pPr>
+              <a:spcAft>
+                <a:spcPts val="800"/>
+              </a:spcAft>
+            </a:pPr>
+            <a:r>
+              <a:rPr sz="2000" b="0" i="0">
+                <a:solidFill>
+                  <a:srgbClr val="333333"/>
+                </a:solidFill>
+                <a:latin typeface="Calibri"/>
+              </a:rPr>
+              <a:t>–   Si el C4 dice "servicio de notificaciones" y el despliegue dice "worker de correos", o son la misma cosa mal nombrada o son dos cosas y falta una.</a:t>
+            </a:r>
+          </a:p>
+          <a:p>
+            <a:pPr>
+              <a:spcAft>
+                <a:spcPts val="800"/>
+              </a:spcAft>
+            </a:pPr>
+            <a:r>
+              <a:rPr sz="2000" b="0" i="0">
+                <a:solidFill>
+                  <a:srgbClr val="333333"/>
+                </a:solidFill>
+                <a:latin typeface="Calibri"/>
+              </a:rPr>
+              <a:t>–   Segunda: cada actor y sistema externo del diagrama de Contexto sigue existiendo</a:t>
+            </a:r>
+          </a:p>
+          <a:p>
+            <a:pPr>
+              <a:spcAft>
+                <a:spcPts val="800"/>
+              </a:spcAft>
+            </a:pPr>
+            <a:r>
+              <a:rPr sz="2000" b="0" i="0">
+                <a:solidFill>
+                  <a:srgbClr val="333333"/>
+                </a:solidFill>
+                <a:latin typeface="Calibri"/>
+              </a:rPr>
+              <a:t>–   El caso frecuente es que el estudiante dibujo en la Clase 1 una pasarela de pagos y hoy ningun contenedor habla con ella, asi que o desaparecio del alcance y hay que borrarla o esta olvidada y es un hueco.</a:t>
             </a:r>
           </a:p>
         </p:txBody>
@@ -12568,7 +9377,7 @@
                 </a:solidFill>
                 <a:latin typeface="Calibri"/>
               </a:rPr>
-              <a:t>El insumo: las seis piezas del paquete CloudLite v1</a:t>
+              <a:t>Las cinco preguntas de coherencia, en orden (2/2)</a:t>
             </a:r>
           </a:p>
         </p:txBody>
@@ -12607,7 +9416,7 @@
                 </a:solidFill>
                 <a:latin typeface="Calibri"/>
               </a:rPr>
-              <a:t>–   El insumo es el paquete CloudLite v1, que a estas alturas debe tener seis piezas producidas antes: el C4 de Contexto de la Clase 1, el C4 de Contenedores de la Clase 4, el modelo de amenazas con controles de la Clase 6</a:t>
+              <a:t>–   Tercera: cada amenaza del modelo STRIDE de la Clase 6 tiene un control visible en el despliegue; si la amenaza es acceso no autorizado a la base de datos y el diagrama la muestra en la subred publica, el control existe en el documento y no en el diseno.</a:t>
             </a:r>
           </a:p>
           <a:p>
@@ -12623,7 +9432,7 @@
                 </a:solidFill>
                 <a:latin typeface="Calibri"/>
               </a:rPr>
-              <a:t>–   El diagrama de despliegue con zonas publica y privada de la Clase 7, el workflow de GitHub Actions y las metricas de monitoreo de la Clase 8, y la tabla de costos con drivers y right-sizing de la Clase 10.</a:t>
+              <a:t>–   Cuarta: los componentes de la tabla de costos de la Clase 10 son los mismos contenedores, no una lista inventada.</a:t>
             </a:r>
           </a:p>
           <a:p>
@@ -12639,7 +9448,7 @@
                 </a:solidFill>
                 <a:latin typeface="Calibri"/>
               </a:rPr>
-              <a:t>–   El criterio central de auditoria se llama trazabilidad: la propiedad de que un elemento se pueda seguir de un artefacto al siguiente sin cambiar de nombre ni desaparecer.</a:t>
+              <a:t>–   Quinta: el workflow de Actions se ejecuto al menos una vez con resultado visible, porque un archivo YAML que nunca corrio es una intencion, no evidencia.</a:t>
             </a:r>
           </a:p>
           <a:p>
@@ -12655,7 +9464,7 @@
                 </a:solidFill>
                 <a:latin typeface="Calibri"/>
               </a:rPr>
-              <a:t>–   No es una formalidad burocratica, es el unico detector confiable de que el estudiante penso el sistema en vez de producir seis tareas independientes para seis notas distintas.</a:t>
+              <a:t>–   Ese es el nucleo del acta: no una nota, sino cuales de estas cinco cadenas estan rotas en cada proyecto.</a:t>
             </a:r>
           </a:p>
         </p:txBody>
@@ -13021,4 +9830,324 @@
   </a:objectDefaults>
   <a:extraClrSchemeLst/>
 </a:theme>
+</file>
+
+<file path=ppt/theme/theme2.xml><?xml version="1.0" encoding="utf-8"?>
+<a:theme xmlns:a="http://schemas.openxmlformats.org/drawingml/2006/main" name="Office Theme">
+  <a:themeElements>
+    <a:clrScheme name="Office">
+      <a:dk1>
+        <a:sysClr val="windowText" lastClr="000000"/>
+      </a:dk1>
+      <a:lt1>
+        <a:sysClr val="window" lastClr="FFFFFF"/>
+      </a:lt1>
+      <a:dk2>
+        <a:srgbClr val="1F497D"/>
+      </a:dk2>
+      <a:lt2>
+        <a:srgbClr val="EEECE1"/>
+      </a:lt2>
+      <a:accent1>
+        <a:srgbClr val="4F81BD"/>
+      </a:accent1>
+      <a:accent2>
+        <a:srgbClr val="C0504D"/>
+      </a:accent2>
+      <a:accent3>
+        <a:srgbClr val="9BBB59"/>
+      </a:accent3>
+      <a:accent4>
+        <a:srgbClr val="8064A2"/>
+      </a:accent4>
+      <a:accent5>
+        <a:srgbClr val="4BACC6"/>
+      </a:accent5>
+      <a:accent6>
+        <a:srgbClr val="F79646"/>
+      </a:accent6>
+      <a:hlink>
+        <a:srgbClr val="0000FF"/>
+      </a:hlink>
+      <a:folHlink>
+        <a:srgbClr val="800080"/>
+      </a:folHlink>
+    </a:clrScheme>
+    <a:fontScheme name="Office">
+      <a:majorFont>
+        <a:latin typeface="Calibri"/>
+        <a:ea typeface=""/>
+        <a:cs typeface=""/>
+        <a:font script="Jpan" typeface="ＭＳ Ｐゴシック"/>
+        <a:font script="Hang" typeface="맑은 고딕"/>
+        <a:font script="Hans" typeface="宋体"/>
+        <a:font script="Hant" typeface="新細明體"/>
+        <a:font script="Arab" typeface="Times New Roman"/>
+        <a:font script="Hebr" typeface="Times New Roman"/>
+        <a:font script="Thai" typeface="Angsana New"/>
+        <a:font script="Ethi" typeface="Nyala"/>
+        <a:font script="Beng" typeface="Vrinda"/>
+        <a:font script="Gujr" typeface="Shruti"/>
+        <a:font script="Khmr" typeface="MoolBoran"/>
+        <a:font script="Knda" typeface="Tunga"/>
+        <a:font script="Guru" typeface="Raavi"/>
+        <a:font script="Cans" typeface="Euphemia"/>
+        <a:font script="Cher" typeface="Plantagenet Cherokee"/>
+        <a:font script="Yiii" typeface="Microsoft Yi Baiti"/>
+        <a:font script="Tibt" typeface="Microsoft Himalaya"/>
+        <a:font script="Thaa" typeface="MV Boli"/>
+        <a:font script="Deva" typeface="Mangal"/>
+        <a:font script="Telu" typeface="Gautami"/>
+        <a:font script="Taml" typeface="Latha"/>
+        <a:font script="Syrc" typeface="Estrangelo Edessa"/>
+        <a:font script="Orya" typeface="Kalinga"/>
+        <a:font script="Mlym" typeface="Kartika"/>
+        <a:font script="Laoo" typeface="DokChampa"/>
+        <a:font script="Sinh" typeface="Iskoola Pota"/>
+        <a:font script="Mong" typeface="Mongolian Baiti"/>
+        <a:font script="Viet" typeface="Times New Roman"/>
+        <a:font script="Uigh" typeface="Microsoft Uighur"/>
+        <a:font script="Geor" typeface="Sylfaen"/>
+      </a:majorFont>
+      <a:minorFont>
+        <a:latin typeface="Calibri"/>
+        <a:ea typeface=""/>
+        <a:cs typeface=""/>
+        <a:font script="Jpan" typeface="ＭＳ Ｐゴシック"/>
+        <a:font script="Hang" typeface="맑은 고딕"/>
+        <a:font script="Hans" typeface="宋体"/>
+        <a:font script="Hant" typeface="新細明體"/>
+        <a:font script="Arab" typeface="Arial"/>
+        <a:font script="Hebr" typeface="Arial"/>
+        <a:font script="Thai" typeface="Cordia New"/>
+        <a:font script="Ethi" typeface="Nyala"/>
+        <a:font script="Beng" typeface="Vrinda"/>
+        <a:font script="Gujr" typeface="Shruti"/>
+        <a:font script="Khmr" typeface="DaunPenh"/>
+        <a:font script="Knda" typeface="Tunga"/>
+        <a:font script="Guru" typeface="Raavi"/>
+        <a:font script="Cans" typeface="Euphemia"/>
+        <a:font script="Cher" typeface="Plantagenet Cherokee"/>
+        <a:font script="Yiii" typeface="Microsoft Yi Baiti"/>
+        <a:font script="Tibt" typeface="Microsoft Himalaya"/>
+        <a:font script="Thaa" typeface="MV Boli"/>
+        <a:font script="Deva" typeface="Mangal"/>
+        <a:font script="Telu" typeface="Gautami"/>
+        <a:font script="Taml" typeface="Latha"/>
+        <a:font script="Syrc" typeface="Estrangelo Edessa"/>
+        <a:font script="Orya" typeface="Kalinga"/>
+        <a:font script="Mlym" typeface="Kartika"/>
+        <a:font script="Laoo" typeface="DokChampa"/>
+        <a:font script="Sinh" typeface="Iskoola Pota"/>
+        <a:font script="Mong" typeface="Mongolian Baiti"/>
+        <a:font script="Viet" typeface="Arial"/>
+        <a:font script="Uigh" typeface="Microsoft Uighur"/>
+        <a:font script="Geor" typeface="Sylfaen"/>
+      </a:minorFont>
+    </a:fontScheme>
+    <a:fmtScheme name="Office">
+      <a:fillStyleLst>
+        <a:solidFill>
+          <a:schemeClr val="phClr"/>
+        </a:solidFill>
+        <a:gradFill rotWithShape="1">
+          <a:gsLst>
+            <a:gs pos="0">
+              <a:schemeClr val="phClr">
+                <a:tint val="50000"/>
+                <a:satMod val="300000"/>
+              </a:schemeClr>
+            </a:gs>
+            <a:gs pos="35000">
+              <a:schemeClr val="phClr">
+                <a:tint val="37000"/>
+                <a:satMod val="300000"/>
+              </a:schemeClr>
+            </a:gs>
+            <a:gs pos="100000">
+              <a:schemeClr val="phClr">
+                <a:tint val="15000"/>
+                <a:satMod val="350000"/>
+              </a:schemeClr>
+            </a:gs>
+          </a:gsLst>
+          <a:lin ang="16200000" scaled="1"/>
+        </a:gradFill>
+        <a:gradFill rotWithShape="1">
+          <a:gsLst>
+            <a:gs pos="0">
+              <a:schemeClr val="phClr">
+                <a:tint val="100000"/>
+                <a:shade val="100000"/>
+                <a:satMod val="130000"/>
+              </a:schemeClr>
+            </a:gs>
+            <a:gs pos="100000">
+              <a:schemeClr val="phClr">
+                <a:tint val="50000"/>
+                <a:shade val="100000"/>
+                <a:satMod val="350000"/>
+              </a:schemeClr>
+            </a:gs>
+          </a:gsLst>
+          <a:lin ang="16200000" scaled="0"/>
+        </a:gradFill>
+      </a:fillStyleLst>
+      <a:lnStyleLst>
+        <a:ln w="9525" cap="flat" cmpd="sng" algn="ctr">
+          <a:solidFill>
+            <a:schemeClr val="phClr">
+              <a:shade val="95000"/>
+              <a:satMod val="105000"/>
+            </a:schemeClr>
+          </a:solidFill>
+          <a:prstDash val="solid"/>
+        </a:ln>
+        <a:ln w="25400" cap="flat" cmpd="sng" algn="ctr">
+          <a:solidFill>
+            <a:schemeClr val="phClr"/>
+          </a:solidFill>
+          <a:prstDash val="solid"/>
+        </a:ln>
+        <a:ln w="38100" cap="flat" cmpd="sng" algn="ctr">
+          <a:solidFill>
+            <a:schemeClr val="phClr"/>
+          </a:solidFill>
+          <a:prstDash val="solid"/>
+        </a:ln>
+      </a:lnStyleLst>
+      <a:effectStyleLst>
+        <a:effectStyle>
+          <a:effectLst>
+            <a:outerShdw blurRad="40000" dist="20000" dir="5400000" rotWithShape="0">
+              <a:srgbClr val="000000">
+                <a:alpha val="38000"/>
+              </a:srgbClr>
+            </a:outerShdw>
+          </a:effectLst>
+        </a:effectStyle>
+        <a:effectStyle>
+          <a:effectLst>
+            <a:outerShdw blurRad="40000" dist="23000" dir="5400000" rotWithShape="0">
+              <a:srgbClr val="000000">
+                <a:alpha val="35000"/>
+              </a:srgbClr>
+            </a:outerShdw>
+          </a:effectLst>
+        </a:effectStyle>
+        <a:effectStyle>
+          <a:effectLst>
+            <a:outerShdw blurRad="40000" dist="23000" dir="5400000" rotWithShape="0">
+              <a:srgbClr val="000000">
+                <a:alpha val="35000"/>
+              </a:srgbClr>
+            </a:outerShdw>
+          </a:effectLst>
+          <a:scene3d>
+            <a:camera prst="orthographicFront">
+              <a:rot lat="0" lon="0" rev="0"/>
+            </a:camera>
+            <a:lightRig rig="threePt" dir="t">
+              <a:rot lat="0" lon="0" rev="1200000"/>
+            </a:lightRig>
+          </a:scene3d>
+          <a:sp3d>
+            <a:bevelT w="63500" h="25400"/>
+          </a:sp3d>
+        </a:effectStyle>
+      </a:effectStyleLst>
+      <a:bgFillStyleLst>
+        <a:solidFill>
+          <a:schemeClr val="phClr"/>
+        </a:solidFill>
+        <a:gradFill rotWithShape="1">
+          <a:gsLst>
+            <a:gs pos="0">
+              <a:schemeClr val="phClr">
+                <a:tint val="40000"/>
+                <a:satMod val="350000"/>
+              </a:schemeClr>
+            </a:gs>
+            <a:gs pos="40000">
+              <a:schemeClr val="phClr">
+                <a:tint val="45000"/>
+                <a:shade val="99000"/>
+                <a:satMod val="350000"/>
+              </a:schemeClr>
+            </a:gs>
+            <a:gs pos="100000">
+              <a:schemeClr val="phClr">
+                <a:shade val="20000"/>
+                <a:satMod val="255000"/>
+              </a:schemeClr>
+            </a:gs>
+          </a:gsLst>
+          <a:path path="circle">
+            <a:fillToRect l="50000" t="-80000" r="50000" b="180000"/>
+          </a:path>
+        </a:gradFill>
+        <a:gradFill rotWithShape="1">
+          <a:gsLst>
+            <a:gs pos="0">
+              <a:schemeClr val="phClr">
+                <a:tint val="80000"/>
+                <a:satMod val="300000"/>
+              </a:schemeClr>
+            </a:gs>
+            <a:gs pos="100000">
+              <a:schemeClr val="phClr">
+                <a:shade val="30000"/>
+                <a:satMod val="200000"/>
+              </a:schemeClr>
+            </a:gs>
+          </a:gsLst>
+          <a:path path="circle">
+            <a:fillToRect l="50000" t="50000" r="50000" b="50000"/>
+          </a:path>
+        </a:gradFill>
+      </a:bgFillStyleLst>
+    </a:fmtScheme>
+  </a:themeElements>
+  <a:objectDefaults>
+    <a:spDef>
+      <a:spPr/>
+      <a:bodyPr/>
+      <a:lstStyle/>
+      <a:style>
+        <a:lnRef idx="1">
+          <a:schemeClr val="accent1"/>
+        </a:lnRef>
+        <a:fillRef idx="3">
+          <a:schemeClr val="accent1"/>
+        </a:fillRef>
+        <a:effectRef idx="2">
+          <a:schemeClr val="accent1"/>
+        </a:effectRef>
+        <a:fontRef idx="minor">
+          <a:schemeClr val="lt1"/>
+        </a:fontRef>
+      </a:style>
+    </a:spDef>
+    <a:lnDef>
+      <a:spPr/>
+      <a:bodyPr/>
+      <a:lstStyle/>
+      <a:style>
+        <a:lnRef idx="2">
+          <a:schemeClr val="accent1"/>
+        </a:lnRef>
+        <a:fillRef idx="0">
+          <a:schemeClr val="accent1"/>
+        </a:fillRef>
+        <a:effectRef idx="1">
+          <a:schemeClr val="accent1"/>
+        </a:effectRef>
+        <a:fontRef idx="minor">
+          <a:schemeClr val="tx1"/>
+        </a:fontRef>
+      </a:style>
+    </a:lnDef>
+  </a:objectDefaults>
+  <a:extraClrSchemeLst/>
+</a:theme>
 </file>
--- a/Arquitectura de Sistemas Computacionales/Clases/Clase 11 - Avance del proyecto final/Presentacion.pptx
+++ b/Arquitectura de Sistemas Computacionales/Clases/Clase 11 - Avance del proyecto final/Presentacion.pptx
@@ -820,6 +820,24 @@
           <a:p>
             <a:r>
               <a:t>Conviene cerrar diciendo que lo que se estabilice hoy es la base sobre la que la Clase 12 agregara el analisis de rendimiento y la Clase 13 la politica de escalado, y que un proyecto con el paquete v1 incoherente no puede hacer ninguna de las dos, porque no se puede medir ni escalar un sistema que todavia no esta definido.</a:t>
+            </a:r>
+          </a:p>
+          <a:p/>
+          <a:p>
+            <a:r>
+              <a:t>(Sobre la actividad, no se proyecta) La primera es si esto se califica; la respuesta honesta es que este checkpoint no es la sustentacion final, que ocurre en la Clase 15, ni el Parcial 3, que es la evaluacion escrita de la Clase 14, y que hoy se registra estado y compromisos, pero el acta es el insumo con el que se mirara la entrega final: un gap senalado hoy y no cerrado pesa mucho mas que uno que aparecio despues.</a:t>
+            </a:r>
+          </a:p>
+          <a:p/>
+          <a:p>
+            <a:r>
+              <a:t>(Sobre la actividad, no se proyecta) La segunda es por que revisa un companero si el que califica es el docente, y la respuesta es que la revision por pares es practica estandar en la industria y que su valor no esta en el juicio del par sino en la obligacion de explicar; ademas el par pregunta lo que el docente ya asume, y esas son justo las preguntas que llegan en un Q&amp;A real.</a:t>
+            </a:r>
+          </a:p>
+          <a:p/>
+          <a:p>
+            <a:r>
+              <a:t>(Sobre la actividad, no se proyecta) La tercera, la mas delicada, es si cambiar el diagrama ahora significa perder el trabajo hecho, y la respuesta debe ser tajante: no, porque el artefacto no es el entregable, la decision documentada lo es; un diagrama corregido con una nota de por que cambio vale mas que uno intacto, y ese cambio justificado es exactamente lo que un ADR registra.</a:t>
             </a:r>
           </a:p>
         </p:txBody>
@@ -5870,7 +5888,7 @@
                 </a:solidFill>
                 <a:latin typeface="Calibri"/>
               </a:rPr>
-              <a:t>Preguntas frecuentes y cierre conceptual () (1/3)</a:t>
+              <a:t>Preguntas frecuentes y cierre conceptual () (1/2)</a:t>
             </a:r>
           </a:p>
         </p:txBody>
@@ -5909,7 +5927,7 @@
                 </a:solidFill>
                 <a:latin typeface="Calibri"/>
               </a:rPr>
-              <a:t>–   La primera es si esto se califica; la respuesta honesta es que este checkpoint no es la sustentacion final, que ocurre en la Clase 15, ni el Parcial 3, que es la evaluacion escrita de la Clase 14</a:t>
+              <a:t>–   Error tipico del docente que no domina el tema: dejar pasar el checkpoint con un "todo bien, sigan asi".</a:t>
             </a:r>
           </a:p>
           <a:p>
@@ -5925,7 +5943,7 @@
                 </a:solidFill>
                 <a:latin typeface="Calibri"/>
               </a:rPr>
-              <a:t>–   Y que hoy se registra estado y compromisos, pero el acta es el insumo con el que se mirara la entrega final: un gap senalado hoy y no cerrado pesa mucho mas que uno que aparecio despues.</a:t>
+              <a:t>–   La consecuencia no se ve hoy, se ve en la Clase 15, cuando varios estudiantes sustentan con la base de datos expuesta, con servicios que no son servicios y con nueve capacidades que nunca cerraron</a:t>
             </a:r>
           </a:p>
           <a:p>
@@ -5941,23 +5959,7 @@
                 </a:solidFill>
                 <a:latin typeface="Calibri"/>
               </a:rPr>
-              <a:t>–   La segunda es por que revisa un companero si el que califica es el docente, y la respuesta es que la revision por pares es practica estandar en la industria y que su valor no esta en el juicio del par sino en la obligacion de explicar</a:t>
-            </a:r>
-          </a:p>
-          <a:p>
-            <a:pPr>
-              <a:spcAft>
-                <a:spcPts val="800"/>
-              </a:spcAft>
-            </a:pPr>
-            <a:r>
-              <a:rPr sz="2000" b="0" i="0">
-                <a:solidFill>
-                  <a:srgbClr val="333333"/>
-                </a:solidFill>
-                <a:latin typeface="Calibri"/>
-              </a:rPr>
-              <a:t>–   Ademas el par pregunta lo que el docente ya asume, y esas son justo las preguntas que llegan en un Q&amp;A real.</a:t>
+              <a:t>–   Y el docente descubre que las tenia todas a la vista un mes antes; ademas el estudiante interpreta el silencio como aprobacion, asi que el error queda ratificado y luego reclama con razon que nadie se lo advirtio.</a:t>
             </a:r>
           </a:p>
         </p:txBody>
@@ -6138,7 +6140,7 @@
                 </a:solidFill>
                 <a:latin typeface="Calibri"/>
               </a:rPr>
-              <a:t>Preguntas frecuentes y cierre conceptual () (2/3)</a:t>
+              <a:t>Preguntas frecuentes y cierre conceptual () (2/2)</a:t>
             </a:r>
           </a:p>
         </p:txBody>
@@ -6177,7 +6179,7 @@
                 </a:solidFill>
                 <a:latin typeface="Calibri"/>
               </a:rPr>
-              <a:t>–   La tercera, la mas delicada, es si cambiar el diagrama ahora significa perder el trabajo hecho</a:t>
+              <a:t>–   El segundo error es convertir el checkpoint en clase magistral: cuando el docente detecta un vacio conceptual y se pone a reexplicar contenedores o STRIDE durante veinte minutos</a:t>
             </a:r>
           </a:p>
           <a:p>
@@ -6193,7 +6195,7 @@
                 </a:solidFill>
                 <a:latin typeface="Calibri"/>
               </a:rPr>
-              <a:t>–   Y la respuesta debe ser tajante: no, porque el artefacto no es el entregable, la decision documentada lo es; un diagrama corregido con una nota de por que cambio vale mas que uno intacto, y ese cambio justificado es exactamente lo que un ADR registra.</a:t>
+              <a:t>–   Se consume el tiempo de los estudiantes que faltan, la mitad del curso queda sin retroalimentacion y el acta sale a medias.</a:t>
             </a:r>
           </a:p>
           <a:p>
@@ -6209,39 +6211,7 @@
                 </a:solidFill>
                 <a:latin typeface="Calibri"/>
               </a:rPr>
-              <a:t>–   Error tipico del docente que no domina el tema: dejar pasar el checkpoint con un "todo bien, sigan asi".</a:t>
-            </a:r>
-          </a:p>
-          <a:p>
-            <a:pPr>
-              <a:spcAft>
-                <a:spcPts val="800"/>
-              </a:spcAft>
-            </a:pPr>
-            <a:r>
-              <a:rPr sz="2000" b="0" i="0">
-                <a:solidFill>
-                  <a:srgbClr val="333333"/>
-                </a:solidFill>
-                <a:latin typeface="Calibri"/>
-              </a:rPr>
-              <a:t>–   La consecuencia no se ve hoy, se ve en la Clase 15, cuando varios estudiantes sustentan con la base de datos expuesta, con servicios que no son servicios y con nueve capacidades que nunca cerraron</a:t>
-            </a:r>
-          </a:p>
-          <a:p>
-            <a:pPr>
-              <a:spcAft>
-                <a:spcPts val="800"/>
-              </a:spcAft>
-            </a:pPr>
-            <a:r>
-              <a:rPr sz="2000" b="0" i="0">
-                <a:solidFill>
-                  <a:srgbClr val="333333"/>
-                </a:solidFill>
-                <a:latin typeface="Calibri"/>
-              </a:rPr>
-              <a:t>–   Y el docente descubre que las tenia todas a la vista un mes antes; ademas el estudiante interpreta el silencio como aprobacion, asi que el error queda ratificado y luego reclama con razon que nadie se lo advirtio.</a:t>
+              <a:t>–   Lo correcto es anotar el vacio, dar la accion concreta con fecha y seguir; si el vacio es general al grupo, se atiende en cinco minutos al cierre para todos, no proyecto por proyecto.</a:t>
             </a:r>
           </a:p>
         </p:txBody>
@@ -6422,21 +6392,141 @@
                 </a:solidFill>
                 <a:latin typeface="Calibri"/>
               </a:rPr>
-              <a:t>Preguntas frecuentes y cierre conceptual () (3/3)</a:t>
-            </a:r>
-          </a:p>
-        </p:txBody>
-      </p:sp>
-      <p:sp>
-        <p:nvSpPr>
-          <p:cNvPr id="5" name="TextBox 4"/>
+              <a:t>El C4 Component: por dentro de la API</a:t>
+            </a:r>
+          </a:p>
+        </p:txBody>
+      </p:sp>
+      <p:sp>
+        <p:nvSpPr>
+          <p:cNvPr id="5" name="Rounded Rectangle 4"/>
+          <p:cNvSpPr/>
+          <p:nvPr/>
+        </p:nvSpPr>
+        <p:spPr>
+          <a:xfrm>
+            <a:off x="457200" y="1261872"/>
+            <a:ext cx="11277295" cy="5093208"/>
+          </a:xfrm>
+          <a:prstGeom prst="roundRect">
+            <a:avLst>
+              <a:gd name="adj" fmla="val 12000"/>
+            </a:avLst>
+          </a:prstGeom>
+          <a:solidFill>
+            <a:srgbClr val="1E2A38"/>
+          </a:solidFill>
+          <a:ln>
+            <a:noFill/>
+          </a:ln>
+        </p:spPr>
+        <p:style>
+          <a:lnRef idx="1">
+            <a:schemeClr val="accent1"/>
+          </a:lnRef>
+          <a:fillRef idx="3">
+            <a:schemeClr val="accent1"/>
+          </a:fillRef>
+          <a:effectRef idx="2">
+            <a:schemeClr val="accent1"/>
+          </a:effectRef>
+          <a:fontRef idx="minor">
+            <a:schemeClr val="lt1"/>
+          </a:fontRef>
+        </p:style>
+        <p:txBody>
+          <a:bodyPr rtlCol="0" anchor="ctr"/>
+          <a:lstStyle/>
+          <a:p>
+            <a:pPr algn="ctr"/>
+          </a:p>
+        </p:txBody>
+      </p:sp>
+      <p:sp>
+        <p:nvSpPr>
+          <p:cNvPr id="6" name="Rectangle 5"/>
+          <p:cNvSpPr/>
+          <p:nvPr/>
+        </p:nvSpPr>
+        <p:spPr>
+          <a:xfrm>
+            <a:off x="457200" y="1261872"/>
+            <a:ext cx="11277295" cy="320040"/>
+          </a:xfrm>
+          <a:prstGeom prst="rect">
+            <a:avLst/>
+          </a:prstGeom>
+          <a:solidFill>
+            <a:srgbClr val="095292"/>
+          </a:solidFill>
+          <a:ln>
+            <a:noFill/>
+          </a:ln>
+        </p:spPr>
+        <p:style>
+          <a:lnRef idx="1">
+            <a:schemeClr val="accent1"/>
+          </a:lnRef>
+          <a:fillRef idx="3">
+            <a:schemeClr val="accent1"/>
+          </a:fillRef>
+          <a:effectRef idx="2">
+            <a:schemeClr val="accent1"/>
+          </a:effectRef>
+          <a:fontRef idx="minor">
+            <a:schemeClr val="lt1"/>
+          </a:fontRef>
+        </p:style>
+        <p:txBody>
+          <a:bodyPr rtlCol="0" anchor="ctr"/>
+          <a:lstStyle/>
+          <a:p>
+            <a:pPr algn="ctr"/>
+          </a:p>
+        </p:txBody>
+      </p:sp>
+      <p:sp>
+        <p:nvSpPr>
+          <p:cNvPr id="7" name="TextBox 6"/>
           <p:cNvSpPr txBox="1"/>
           <p:nvPr/>
         </p:nvSpPr>
         <p:spPr>
           <a:xfrm>
-            <a:off x="457200" y="1170432"/>
-            <a:ext cx="11277295" cy="5230368"/>
+            <a:off x="685800" y="1307592"/>
+            <a:ext cx="10820095" cy="256032"/>
+          </a:xfrm>
+          <a:prstGeom prst="rect">
+            <a:avLst/>
+          </a:prstGeom>
+          <a:noFill/>
+        </p:spPr>
+        <p:txBody>
+          <a:bodyPr wrap="square" anchor="ctr"/>
+          <a:lstStyle/>
+          <a:p>
+            <a:r>
+              <a:rPr sz="1000" b="1" i="0">
+                <a:solidFill>
+                  <a:srgbClr val="269CCB"/>
+                </a:solidFill>
+                <a:latin typeface="Calibri"/>
+              </a:rPr>
+              <a:t>● ● ●</a:t>
+            </a:r>
+          </a:p>
+        </p:txBody>
+      </p:sp>
+      <p:sp>
+        <p:nvSpPr>
+          <p:cNvPr id="8" name="TextBox 7"/>
+          <p:cNvSpPr txBox="1"/>
+          <p:nvPr/>
+        </p:nvSpPr>
+        <p:spPr>
+          <a:xfrm>
+            <a:off x="777240" y="1719072"/>
+            <a:ext cx="10637215" cy="4453128"/>
           </a:xfrm>
           <a:prstGeom prst="rect">
             <a:avLst/>
@@ -6451,56 +6541,280 @@
           <a:p>
             <a:pPr>
               <a:spcAft>
-                <a:spcPts val="800"/>
+                <a:spcPts val="371"/>
               </a:spcAft>
             </a:pPr>
             <a:r>
-              <a:rPr sz="2000" b="0" i="0">
-                <a:solidFill>
-                  <a:srgbClr val="333333"/>
-                </a:solidFill>
-                <a:latin typeface="Calibri"/>
-              </a:rPr>
-              <a:t>–   El segundo error es convertir el checkpoint en clase magistral: cuando el docente detecta un vacio conceptual y se pone a reexplicar contenedores o STRIDE durante veinte minutos</a:t>
+              <a:rPr sz="1300" b="0" i="0">
+                <a:solidFill>
+                  <a:srgbClr val="FFFFFF"/>
+                </a:solidFill>
+                <a:latin typeface="Calibri"/>
+              </a:rPr>
+              <a:t>flowchart TB</a:t>
             </a:r>
           </a:p>
           <a:p>
             <a:pPr>
               <a:spcAft>
-                <a:spcPts val="800"/>
+                <a:spcPts val="371"/>
               </a:spcAft>
             </a:pPr>
             <a:r>
-              <a:rPr sz="2000" b="0" i="0">
-                <a:solidFill>
-                  <a:srgbClr val="333333"/>
-                </a:solidFill>
-                <a:latin typeface="Calibri"/>
-              </a:rPr>
-              <a:t>–   Se consume el tiempo de los estudiantes que faltan, la mitad del curso queda sin retroalimentacion y el acta sale a medias.</a:t>
+              <a:rPr sz="1300" b="0" i="0">
+                <a:solidFill>
+                  <a:srgbClr val="FFFFFF"/>
+                </a:solidFill>
+                <a:latin typeface="Calibri"/>
+              </a:rPr>
+              <a:t>  subgraph api[API REST de CloudLite - Node + Express]</a:t>
             </a:r>
           </a:p>
           <a:p>
             <a:pPr>
               <a:spcAft>
-                <a:spcPts val="800"/>
+                <a:spcPts val="371"/>
               </a:spcAft>
             </a:pPr>
             <a:r>
-              <a:rPr sz="2000" b="0" i="0">
-                <a:solidFill>
-                  <a:srgbClr val="333333"/>
-                </a:solidFill>
-                <a:latin typeface="Calibri"/>
-              </a:rPr>
-              <a:t>–   Lo correcto es anotar el vacio, dar la accion concreta con fecha y seguir; si el vacio es general al grupo, se atiende en cinco minutos al cierre para todos, no proyecto por proyecto.</a:t>
-            </a:r>
-          </a:p>
-        </p:txBody>
-      </p:sp>
-      <p:sp>
-        <p:nvSpPr>
-          <p:cNvPr id="6" name="TextBox 5"/>
+              <a:rPr sz="1300" b="0" i="0">
+                <a:solidFill>
+                  <a:srgbClr val="FFFFFF"/>
+                </a:solidFill>
+                <a:latin typeface="Calibri"/>
+              </a:rPr>
+              <a:t>    rutas[Capa de rutas&lt;br/&gt;valida entrada y responde HTTP]</a:t>
+            </a:r>
+          </a:p>
+          <a:p>
+            <a:pPr>
+              <a:spcAft>
+                <a:spcPts val="371"/>
+              </a:spcAft>
+            </a:pPr>
+            <a:r>
+              <a:rPr sz="1300" b="0" i="0">
+                <a:solidFill>
+                  <a:srgbClr val="FFFFFF"/>
+                </a:solidFill>
+                <a:latin typeface="Calibri"/>
+              </a:rPr>
+              <a:t>    servicio[Servicio de dominio&lt;br/&gt;reglas de &lt;su dominio&gt;]</a:t>
+            </a:r>
+          </a:p>
+          <a:p>
+            <a:pPr>
+              <a:spcAft>
+                <a:spcPts val="371"/>
+              </a:spcAft>
+            </a:pPr>
+            <a:r>
+              <a:rPr sz="1300" b="0" i="0">
+                <a:solidFill>
+                  <a:srgbClr val="FFFFFF"/>
+                </a:solidFill>
+                <a:latin typeface="Calibri"/>
+              </a:rPr>
+              <a:t>    repo[Repositorio&lt;br/&gt;consultas SQL]</a:t>
+            </a:r>
+          </a:p>
+          <a:p>
+            <a:pPr>
+              <a:spcAft>
+                <a:spcPts val="371"/>
+              </a:spcAft>
+            </a:pPr>
+            <a:r>
+              <a:rPr sz="1300" b="0" i="0">
+                <a:solidFill>
+                  <a:srgbClr val="FFFFFF"/>
+                </a:solidFill>
+                <a:latin typeface="Calibri"/>
+              </a:rPr>
+              <a:t>    auth[Autenticacion&lt;br/&gt;verifica el token]</a:t>
+            </a:r>
+          </a:p>
+          <a:p>
+            <a:pPr>
+              <a:spcAft>
+                <a:spcPts val="371"/>
+              </a:spcAft>
+            </a:pPr>
+            <a:r>
+              <a:rPr sz="1300" b="0" i="0">
+                <a:solidFill>
+                  <a:srgbClr val="FFFFFF"/>
+                </a:solidFill>
+                <a:latin typeface="Calibri"/>
+              </a:rPr>
+              <a:t>  end</a:t>
+            </a:r>
+          </a:p>
+          <a:p>
+            <a:pPr>
+              <a:spcAft>
+                <a:spcPts val="371"/>
+              </a:spcAft>
+            </a:pPr>
+            <a:r>
+              <a:rPr sz="1300" b="0" i="0">
+                <a:solidFill>
+                  <a:srgbClr val="FFFFFF"/>
+                </a:solidFill>
+                <a:latin typeface="Calibri"/>
+              </a:rPr>
+              <a:t/>
+            </a:r>
+          </a:p>
+          <a:p>
+            <a:pPr>
+              <a:spcAft>
+                <a:spcPts val="371"/>
+              </a:spcAft>
+            </a:pPr>
+            <a:r>
+              <a:rPr sz="1300" b="0" i="0">
+                <a:solidFill>
+                  <a:srgbClr val="FFFFFF"/>
+                </a:solidFill>
+                <a:latin typeface="Calibri"/>
+              </a:rPr>
+              <a:t>  web[Web SPA] --&gt;|JSON/HTTPS| rutas</a:t>
+            </a:r>
+          </a:p>
+          <a:p>
+            <a:pPr>
+              <a:spcAft>
+                <a:spcPts val="371"/>
+              </a:spcAft>
+            </a:pPr>
+            <a:r>
+              <a:rPr sz="1300" b="0" i="0">
+                <a:solidFill>
+                  <a:srgbClr val="FFFFFF"/>
+                </a:solidFill>
+                <a:latin typeface="Calibri"/>
+              </a:rPr>
+              <a:t>  rutas --&gt; auth</a:t>
+            </a:r>
+          </a:p>
+          <a:p>
+            <a:pPr>
+              <a:spcAft>
+                <a:spcPts val="371"/>
+              </a:spcAft>
+            </a:pPr>
+            <a:r>
+              <a:rPr sz="1300" b="0" i="0">
+                <a:solidFill>
+                  <a:srgbClr val="FFFFFF"/>
+                </a:solidFill>
+                <a:latin typeface="Calibri"/>
+              </a:rPr>
+              <a:t>  rutas --&gt; servicio</a:t>
+            </a:r>
+          </a:p>
+          <a:p>
+            <a:pPr>
+              <a:spcAft>
+                <a:spcPts val="371"/>
+              </a:spcAft>
+            </a:pPr>
+            <a:r>
+              <a:rPr sz="1300" b="0" i="0">
+                <a:solidFill>
+                  <a:srgbClr val="FFFFFF"/>
+                </a:solidFill>
+                <a:latin typeface="Calibri"/>
+              </a:rPr>
+              <a:t>  servicio --&gt; repo</a:t>
+            </a:r>
+          </a:p>
+          <a:p>
+            <a:pPr>
+              <a:spcAft>
+                <a:spcPts val="371"/>
+              </a:spcAft>
+            </a:pPr>
+            <a:r>
+              <a:rPr sz="1300" b="0" i="0">
+                <a:solidFill>
+                  <a:srgbClr val="FFFFFF"/>
+                </a:solidFill>
+                <a:latin typeface="Calibri"/>
+              </a:rPr>
+              <a:t>  repo --&gt;|SQL| db[(PostgreSQL)]</a:t>
+            </a:r>
+          </a:p>
+          <a:p>
+            <a:pPr>
+              <a:spcAft>
+                <a:spcPts val="371"/>
+              </a:spcAft>
+            </a:pPr>
+            <a:r>
+              <a:rPr sz="1300" b="0" i="0">
+                <a:solidFill>
+                  <a:srgbClr val="FFFFFF"/>
+                </a:solidFill>
+                <a:latin typeface="Calibri"/>
+              </a:rPr>
+              <a:t/>
+            </a:r>
+          </a:p>
+          <a:p>
+            <a:pPr>
+              <a:spcAft>
+                <a:spcPts val="371"/>
+              </a:spcAft>
+            </a:pPr>
+            <a:r>
+              <a:rPr sz="1300" b="0" i="0">
+                <a:solidFill>
+                  <a:srgbClr val="FFFFFF"/>
+                </a:solidFill>
+                <a:latin typeface="Calibri"/>
+              </a:rPr>
+              <a:t>%% La regla del nivel Component: las cajas son piezas de CODIGO dentro</a:t>
+            </a:r>
+          </a:p>
+          <a:p>
+            <a:pPr>
+              <a:spcAft>
+                <a:spcPts val="371"/>
+              </a:spcAft>
+            </a:pPr>
+            <a:r>
+              <a:rPr sz="1300" b="0" i="0">
+                <a:solidFill>
+                  <a:srgbClr val="FFFFFF"/>
+                </a:solidFill>
+                <a:latin typeface="Calibri"/>
+              </a:rPr>
+              <a:t>%% de UN container, no servicios nuevos. Si le pone un puerto, es un</a:t>
+            </a:r>
+          </a:p>
+          <a:p>
+            <a:pPr>
+              <a:spcAft>
+                <a:spcPts val="371"/>
+              </a:spcAft>
+            </a:pPr>
+            <a:r>
+              <a:rPr sz="1300" b="0" i="0">
+                <a:solidFill>
+                  <a:srgbClr val="FFFFFF"/>
+                </a:solidFill>
+                <a:latin typeface="Calibri"/>
+              </a:rPr>
+              <a:t>%% container y va en el diagrama de la Clase 4.</a:t>
+            </a:r>
+          </a:p>
+        </p:txBody>
+      </p:sp>
+      <p:sp>
+        <p:nvSpPr>
+          <p:cNvPr id="9" name="TextBox 8"/>
           <p:cNvSpPr txBox="1"/>
           <p:nvPr/>
         </p:nvSpPr>
@@ -6568,7 +6882,7 @@
         <p:spPr>
           <a:xfrm>
             <a:off x="0" y="0"/>
-            <a:ext cx="12191695" cy="960120"/>
+            <a:ext cx="12191695" cy="1170432"/>
           </a:xfrm>
           <a:prstGeom prst="rect">
             <a:avLst/>
@@ -6610,7 +6924,7 @@
         </p:nvSpPr>
         <p:spPr>
           <a:xfrm>
-            <a:off x="0" y="960120"/>
+            <a:off x="0" y="1170432"/>
             <a:ext cx="12191695" cy="41148"/>
           </a:xfrm>
           <a:prstGeom prst="rect">
@@ -6654,7 +6968,7 @@
         <p:spPr>
           <a:xfrm>
             <a:off x="457200" y="164592"/>
-            <a:ext cx="11277295" cy="502920"/>
+            <a:ext cx="11277295" cy="384048"/>
           </a:xfrm>
           <a:prstGeom prst="rect">
             <a:avLst/>
@@ -6674,21 +6988,55 @@
                 </a:solidFill>
                 <a:latin typeface="Calibri"/>
               </a:rPr>
-              <a:t>El C4 Component: por dentro de la API</a:t>
-            </a:r>
-          </a:p>
-        </p:txBody>
-      </p:sp>
-      <p:sp>
-        <p:nvSpPr>
-          <p:cNvPr id="5" name="Rounded Rectangle 4"/>
+              <a:t>Del boceto al código Mermaid</a:t>
+            </a:r>
+          </a:p>
+        </p:txBody>
+      </p:sp>
+      <p:sp>
+        <p:nvSpPr>
+          <p:cNvPr id="5" name="TextBox 4"/>
+          <p:cNvSpPr txBox="1"/>
+          <p:nvPr/>
+        </p:nvSpPr>
+        <p:spPr>
+          <a:xfrm>
+            <a:off x="457200" y="566928"/>
+            <a:ext cx="11277295" cy="411480"/>
+          </a:xfrm>
+          <a:prstGeom prst="rect">
+            <a:avLst/>
+          </a:prstGeom>
+          <a:noFill/>
+        </p:spPr>
+        <p:txBody>
+          <a:bodyPr wrap="square">
+            <a:spAutoFit/>
+          </a:bodyPr>
+          <a:lstStyle/>
+          <a:p>
+            <a:r>
+              <a:rPr sz="1400" b="0" i="0">
+                <a:solidFill>
+                  <a:srgbClr val="B8D8EE"/>
+                </a:solidFill>
+                <a:latin typeface="Calibri"/>
+              </a:rPr>
+              <a:t>El diagrama se escribe como código: se versiona, se compara y se corrige</a:t>
+            </a:r>
+          </a:p>
+        </p:txBody>
+      </p:sp>
+      <p:sp>
+        <p:nvSpPr>
+          <p:cNvPr id="6" name="Rounded Rectangle 5"/>
           <p:cNvSpPr/>
           <p:nvPr/>
         </p:nvSpPr>
         <p:spPr>
           <a:xfrm>
-            <a:off x="457200" y="1261872"/>
-            <a:ext cx="11277295" cy="5093208"/>
+            <a:off x="457200" y="1659636"/>
+            <a:ext cx="11277295" cy="1051560"/>
           </a:xfrm>
           <a:prstGeom prst="roundRect">
             <a:avLst>
@@ -6696,7 +7044,7 @@
             </a:avLst>
           </a:prstGeom>
           <a:solidFill>
-            <a:srgbClr val="1E2A38"/>
+            <a:srgbClr val="F2F2F2"/>
           </a:solidFill>
           <a:ln>
             <a:noFill/>
@@ -6726,17 +7074,19 @@
       </p:sp>
       <p:sp>
         <p:nvSpPr>
-          <p:cNvPr id="6" name="Rectangle 5"/>
+          <p:cNvPr id="7" name="Rounded Rectangle 6"/>
           <p:cNvSpPr/>
           <p:nvPr/>
         </p:nvSpPr>
         <p:spPr>
           <a:xfrm>
-            <a:off x="457200" y="1261872"/>
-            <a:ext cx="11277295" cy="320040"/>
-          </a:xfrm>
-          <a:prstGeom prst="rect">
-            <a:avLst/>
+            <a:off x="594360" y="1965960"/>
+            <a:ext cx="438912" cy="438912"/>
+          </a:xfrm>
+          <a:prstGeom prst="roundRect">
+            <a:avLst>
+              <a:gd name="adj" fmla="val 12000"/>
+            </a:avLst>
           </a:prstGeom>
           <a:solidFill>
             <a:srgbClr val="095292"/>
@@ -6769,46 +7119,14 @@
       </p:sp>
       <p:sp>
         <p:nvSpPr>
-          <p:cNvPr id="7" name="TextBox 6"/>
-          <p:cNvSpPr txBox="1"/>
-          <p:nvPr/>
-        </p:nvSpPr>
-        <p:spPr>
-          <a:xfrm>
-            <a:off x="685800" y="1307592"/>
-            <a:ext cx="10820095" cy="256032"/>
-          </a:xfrm>
-          <a:prstGeom prst="rect">
-            <a:avLst/>
-          </a:prstGeom>
-          <a:noFill/>
-        </p:spPr>
-        <p:txBody>
-          <a:bodyPr wrap="square" anchor="ctr"/>
-          <a:lstStyle/>
-          <a:p>
-            <a:r>
-              <a:rPr sz="1000" b="1" i="0">
-                <a:solidFill>
-                  <a:srgbClr val="269CCB"/>
-                </a:solidFill>
-                <a:latin typeface="Calibri"/>
-              </a:rPr>
-              <a:t>● ● ●</a:t>
-            </a:r>
-          </a:p>
-        </p:txBody>
-      </p:sp>
-      <p:sp>
-        <p:nvSpPr>
           <p:cNvPr id="8" name="TextBox 7"/>
           <p:cNvSpPr txBox="1"/>
           <p:nvPr/>
         </p:nvSpPr>
         <p:spPr>
           <a:xfrm>
-            <a:off x="777240" y="1719072"/>
-            <a:ext cx="10637215" cy="4453128"/>
+            <a:off x="594360" y="1965960"/>
+            <a:ext cx="438912" cy="438912"/>
           </a:xfrm>
           <a:prstGeom prst="rect">
             <a:avLst/>
@@ -6816,287 +7134,586 @@
           <a:noFill/>
         </p:spPr>
         <p:txBody>
-          <a:bodyPr wrap="square">
-            <a:spAutoFit/>
-          </a:bodyPr>
-          <a:lstStyle/>
+          <a:bodyPr wrap="square" anchor="ctr"/>
+          <a:lstStyle/>
+          <a:p>
+            <a:pPr algn="ctr"/>
+            <a:r>
+              <a:rPr sz="1600" b="1" i="0">
+                <a:solidFill>
+                  <a:srgbClr val="FFFFFF"/>
+                </a:solidFill>
+                <a:latin typeface="Calibri"/>
+              </a:rPr>
+              <a:t>1</a:t>
+            </a:r>
+          </a:p>
+        </p:txBody>
+      </p:sp>
+      <p:sp>
+        <p:nvSpPr>
+          <p:cNvPr id="9" name="TextBox 8"/>
+          <p:cNvSpPr txBox="1"/>
+          <p:nvPr/>
+        </p:nvSpPr>
+        <p:spPr>
+          <a:xfrm>
+            <a:off x="1188720" y="1751076"/>
+            <a:ext cx="10271455" cy="886968"/>
+          </a:xfrm>
+          <a:prstGeom prst="rect">
+            <a:avLst/>
+          </a:prstGeom>
+          <a:noFill/>
+        </p:spPr>
+        <p:txBody>
+          <a:bodyPr wrap="square" anchor="ctr"/>
+          <a:lstStyle/>
+          <a:p>
+            <a:r>
+              <a:rPr sz="1500" b="1" i="0">
+                <a:solidFill>
+                  <a:srgbClr val="095292"/>
+                </a:solidFill>
+                <a:latin typeface="Calibri"/>
+              </a:rPr>
+              <a:t>Diseña visual</a:t>
+            </a:r>
+          </a:p>
           <a:p>
             <a:pPr>
-              <a:spcAft>
-                <a:spcPts val="371"/>
-              </a:spcAft>
+              <a:spcBef>
+                <a:spcPts val="200"/>
+              </a:spcBef>
             </a:pPr>
             <a:r>
               <a:rPr sz="1300" b="0" i="0">
                 <a:solidFill>
+                  <a:srgbClr val="333333"/>
+                </a:solidFill>
+                <a:latin typeface="Calibri"/>
+              </a:rPr>
+              <a:t>Dibuja el diagrama como quieras en Excalidraw o draw.io: es más rápido arrastrar cajas que escribir código, y ahí es donde se piensa el modelo.</a:t>
+            </a:r>
+          </a:p>
+        </p:txBody>
+      </p:sp>
+      <p:sp>
+        <p:nvSpPr>
+          <p:cNvPr id="10" name="Rounded Rectangle 9"/>
+          <p:cNvSpPr/>
+          <p:nvPr/>
+        </p:nvSpPr>
+        <p:spPr>
+          <a:xfrm>
+            <a:off x="457200" y="2802636"/>
+            <a:ext cx="11277295" cy="1051560"/>
+          </a:xfrm>
+          <a:prstGeom prst="roundRect">
+            <a:avLst>
+              <a:gd name="adj" fmla="val 12000"/>
+            </a:avLst>
+          </a:prstGeom>
+          <a:solidFill>
+            <a:srgbClr val="E8F4FA"/>
+          </a:solidFill>
+          <a:ln>
+            <a:noFill/>
+          </a:ln>
+        </p:spPr>
+        <p:style>
+          <a:lnRef idx="1">
+            <a:schemeClr val="accent1"/>
+          </a:lnRef>
+          <a:fillRef idx="3">
+            <a:schemeClr val="accent1"/>
+          </a:fillRef>
+          <a:effectRef idx="2">
+            <a:schemeClr val="accent1"/>
+          </a:effectRef>
+          <a:fontRef idx="minor">
+            <a:schemeClr val="lt1"/>
+          </a:fontRef>
+        </p:style>
+        <p:txBody>
+          <a:bodyPr rtlCol="0" anchor="ctr"/>
+          <a:lstStyle/>
+          <a:p>
+            <a:pPr algn="ctr"/>
+          </a:p>
+        </p:txBody>
+      </p:sp>
+      <p:sp>
+        <p:nvSpPr>
+          <p:cNvPr id="11" name="Rounded Rectangle 10"/>
+          <p:cNvSpPr/>
+          <p:nvPr/>
+        </p:nvSpPr>
+        <p:spPr>
+          <a:xfrm>
+            <a:off x="594360" y="3108960"/>
+            <a:ext cx="438912" cy="438912"/>
+          </a:xfrm>
+          <a:prstGeom prst="roundRect">
+            <a:avLst>
+              <a:gd name="adj" fmla="val 12000"/>
+            </a:avLst>
+          </a:prstGeom>
+          <a:solidFill>
+            <a:srgbClr val="095292"/>
+          </a:solidFill>
+          <a:ln>
+            <a:noFill/>
+          </a:ln>
+        </p:spPr>
+        <p:style>
+          <a:lnRef idx="1">
+            <a:schemeClr val="accent1"/>
+          </a:lnRef>
+          <a:fillRef idx="3">
+            <a:schemeClr val="accent1"/>
+          </a:fillRef>
+          <a:effectRef idx="2">
+            <a:schemeClr val="accent1"/>
+          </a:effectRef>
+          <a:fontRef idx="minor">
+            <a:schemeClr val="lt1"/>
+          </a:fontRef>
+        </p:style>
+        <p:txBody>
+          <a:bodyPr rtlCol="0" anchor="ctr"/>
+          <a:lstStyle/>
+          <a:p>
+            <a:pPr algn="ctr"/>
+          </a:p>
+        </p:txBody>
+      </p:sp>
+      <p:sp>
+        <p:nvSpPr>
+          <p:cNvPr id="12" name="TextBox 11"/>
+          <p:cNvSpPr txBox="1"/>
+          <p:nvPr/>
+        </p:nvSpPr>
+        <p:spPr>
+          <a:xfrm>
+            <a:off x="594360" y="3108960"/>
+            <a:ext cx="438912" cy="438912"/>
+          </a:xfrm>
+          <a:prstGeom prst="rect">
+            <a:avLst/>
+          </a:prstGeom>
+          <a:noFill/>
+        </p:spPr>
+        <p:txBody>
+          <a:bodyPr wrap="square" anchor="ctr"/>
+          <a:lstStyle/>
+          <a:p>
+            <a:pPr algn="ctr"/>
+            <a:r>
+              <a:rPr sz="1600" b="1" i="0">
+                <a:solidFill>
                   <a:srgbClr val="FFFFFF"/>
                 </a:solidFill>
                 <a:latin typeface="Calibri"/>
               </a:rPr>
-              <a:t>flowchart TB</a:t>
+              <a:t>2</a:t>
+            </a:r>
+          </a:p>
+        </p:txBody>
+      </p:sp>
+      <p:sp>
+        <p:nvSpPr>
+          <p:cNvPr id="13" name="TextBox 12"/>
+          <p:cNvSpPr txBox="1"/>
+          <p:nvPr/>
+        </p:nvSpPr>
+        <p:spPr>
+          <a:xfrm>
+            <a:off x="1188720" y="2894076"/>
+            <a:ext cx="10271455" cy="886968"/>
+          </a:xfrm>
+          <a:prstGeom prst="rect">
+            <a:avLst/>
+          </a:prstGeom>
+          <a:noFill/>
+        </p:spPr>
+        <p:txBody>
+          <a:bodyPr wrap="square" anchor="ctr"/>
+          <a:lstStyle/>
+          <a:p>
+            <a:r>
+              <a:rPr sz="1500" b="1" i="0">
+                <a:solidFill>
+                  <a:srgbClr val="095292"/>
+                </a:solidFill>
+                <a:latin typeface="Calibri"/>
+              </a:rPr>
+              <a:t>Traduce con IA</a:t>
             </a:r>
           </a:p>
           <a:p>
             <a:pPr>
-              <a:spcAft>
-                <a:spcPts val="371"/>
-              </a:spcAft>
+              <a:spcBef>
+                <a:spcPts val="200"/>
+              </a:spcBef>
             </a:pPr>
             <a:r>
               <a:rPr sz="1300" b="0" i="0">
                 <a:solidFill>
+                  <a:srgbClr val="333333"/>
+                </a:solidFill>
+                <a:latin typeface="Calibri"/>
+              </a:rPr>
+              <a:t>Describe tu boceto a una IA y pídele el código Mermaid usando C4Component. Revisa el resultado: la IA acierta la sintaxis, no tu modelo.</a:t>
+            </a:r>
+          </a:p>
+        </p:txBody>
+      </p:sp>
+      <p:sp>
+        <p:nvSpPr>
+          <p:cNvPr id="14" name="Rounded Rectangle 13"/>
+          <p:cNvSpPr/>
+          <p:nvPr/>
+        </p:nvSpPr>
+        <p:spPr>
+          <a:xfrm>
+            <a:off x="457200" y="3945636"/>
+            <a:ext cx="11277295" cy="1051560"/>
+          </a:xfrm>
+          <a:prstGeom prst="roundRect">
+            <a:avLst>
+              <a:gd name="adj" fmla="val 12000"/>
+            </a:avLst>
+          </a:prstGeom>
+          <a:solidFill>
+            <a:srgbClr val="F2F2F2"/>
+          </a:solidFill>
+          <a:ln>
+            <a:noFill/>
+          </a:ln>
+        </p:spPr>
+        <p:style>
+          <a:lnRef idx="1">
+            <a:schemeClr val="accent1"/>
+          </a:lnRef>
+          <a:fillRef idx="3">
+            <a:schemeClr val="accent1"/>
+          </a:fillRef>
+          <a:effectRef idx="2">
+            <a:schemeClr val="accent1"/>
+          </a:effectRef>
+          <a:fontRef idx="minor">
+            <a:schemeClr val="lt1"/>
+          </a:fontRef>
+        </p:style>
+        <p:txBody>
+          <a:bodyPr rtlCol="0" anchor="ctr"/>
+          <a:lstStyle/>
+          <a:p>
+            <a:pPr algn="ctr"/>
+          </a:p>
+        </p:txBody>
+      </p:sp>
+      <p:sp>
+        <p:nvSpPr>
+          <p:cNvPr id="15" name="Rounded Rectangle 14"/>
+          <p:cNvSpPr/>
+          <p:nvPr/>
+        </p:nvSpPr>
+        <p:spPr>
+          <a:xfrm>
+            <a:off x="594360" y="4251960"/>
+            <a:ext cx="438912" cy="438912"/>
+          </a:xfrm>
+          <a:prstGeom prst="roundRect">
+            <a:avLst>
+              <a:gd name="adj" fmla="val 12000"/>
+            </a:avLst>
+          </a:prstGeom>
+          <a:solidFill>
+            <a:srgbClr val="095292"/>
+          </a:solidFill>
+          <a:ln>
+            <a:noFill/>
+          </a:ln>
+        </p:spPr>
+        <p:style>
+          <a:lnRef idx="1">
+            <a:schemeClr val="accent1"/>
+          </a:lnRef>
+          <a:fillRef idx="3">
+            <a:schemeClr val="accent1"/>
+          </a:fillRef>
+          <a:effectRef idx="2">
+            <a:schemeClr val="accent1"/>
+          </a:effectRef>
+          <a:fontRef idx="minor">
+            <a:schemeClr val="lt1"/>
+          </a:fontRef>
+        </p:style>
+        <p:txBody>
+          <a:bodyPr rtlCol="0" anchor="ctr"/>
+          <a:lstStyle/>
+          <a:p>
+            <a:pPr algn="ctr"/>
+          </a:p>
+        </p:txBody>
+      </p:sp>
+      <p:sp>
+        <p:nvSpPr>
+          <p:cNvPr id="16" name="TextBox 15"/>
+          <p:cNvSpPr txBox="1"/>
+          <p:nvPr/>
+        </p:nvSpPr>
+        <p:spPr>
+          <a:xfrm>
+            <a:off x="594360" y="4251960"/>
+            <a:ext cx="438912" cy="438912"/>
+          </a:xfrm>
+          <a:prstGeom prst="rect">
+            <a:avLst/>
+          </a:prstGeom>
+          <a:noFill/>
+        </p:spPr>
+        <p:txBody>
+          <a:bodyPr wrap="square" anchor="ctr"/>
+          <a:lstStyle/>
+          <a:p>
+            <a:pPr algn="ctr"/>
+            <a:r>
+              <a:rPr sz="1600" b="1" i="0">
+                <a:solidFill>
                   <a:srgbClr val="FFFFFF"/>
                 </a:solidFill>
                 <a:latin typeface="Calibri"/>
               </a:rPr>
-              <a:t>  subgraph api[API REST de CloudLite - Node + Express]</a:t>
+              <a:t>3</a:t>
+            </a:r>
+          </a:p>
+        </p:txBody>
+      </p:sp>
+      <p:sp>
+        <p:nvSpPr>
+          <p:cNvPr id="17" name="TextBox 16"/>
+          <p:cNvSpPr txBox="1"/>
+          <p:nvPr/>
+        </p:nvSpPr>
+        <p:spPr>
+          <a:xfrm>
+            <a:off x="1188720" y="4037076"/>
+            <a:ext cx="10271455" cy="886968"/>
+          </a:xfrm>
+          <a:prstGeom prst="rect">
+            <a:avLst/>
+          </a:prstGeom>
+          <a:noFill/>
+        </p:spPr>
+        <p:txBody>
+          <a:bodyPr wrap="square" anchor="ctr"/>
+          <a:lstStyle/>
+          <a:p>
+            <a:r>
+              <a:rPr sz="1500" b="1" i="0">
+                <a:solidFill>
+                  <a:srgbClr val="095292"/>
+                </a:solidFill>
+                <a:latin typeface="Calibri"/>
+              </a:rPr>
+              <a:t>Renderiza en un visor</a:t>
             </a:r>
           </a:p>
           <a:p>
             <a:pPr>
-              <a:spcAft>
-                <a:spcPts val="371"/>
-              </a:spcAft>
+              <a:spcBef>
+                <a:spcPts val="200"/>
+              </a:spcBef>
             </a:pPr>
             <a:r>
               <a:rPr sz="1300" b="0" i="0">
                 <a:solidFill>
+                  <a:srgbClr val="333333"/>
+                </a:solidFill>
+                <a:latin typeface="Calibri"/>
+              </a:rPr>
+              <a:t>Pega el código en un visor Mermaid (mermaid.live o la vista previa de tu editor) y míralo dibujado. Si no renderiza, corrige ahí: un end faltante o un rótulo sin comillas.</a:t>
+            </a:r>
+          </a:p>
+        </p:txBody>
+      </p:sp>
+      <p:sp>
+        <p:nvSpPr>
+          <p:cNvPr id="18" name="Rounded Rectangle 17"/>
+          <p:cNvSpPr/>
+          <p:nvPr/>
+        </p:nvSpPr>
+        <p:spPr>
+          <a:xfrm>
+            <a:off x="457200" y="5088636"/>
+            <a:ext cx="11277295" cy="1051560"/>
+          </a:xfrm>
+          <a:prstGeom prst="roundRect">
+            <a:avLst>
+              <a:gd name="adj" fmla="val 12000"/>
+            </a:avLst>
+          </a:prstGeom>
+          <a:solidFill>
+            <a:srgbClr val="E8F4FA"/>
+          </a:solidFill>
+          <a:ln>
+            <a:noFill/>
+          </a:ln>
+        </p:spPr>
+        <p:style>
+          <a:lnRef idx="1">
+            <a:schemeClr val="accent1"/>
+          </a:lnRef>
+          <a:fillRef idx="3">
+            <a:schemeClr val="accent1"/>
+          </a:fillRef>
+          <a:effectRef idx="2">
+            <a:schemeClr val="accent1"/>
+          </a:effectRef>
+          <a:fontRef idx="minor">
+            <a:schemeClr val="lt1"/>
+          </a:fontRef>
+        </p:style>
+        <p:txBody>
+          <a:bodyPr rtlCol="0" anchor="ctr"/>
+          <a:lstStyle/>
+          <a:p>
+            <a:pPr algn="ctr"/>
+          </a:p>
+        </p:txBody>
+      </p:sp>
+      <p:sp>
+        <p:nvSpPr>
+          <p:cNvPr id="19" name="Rounded Rectangle 18"/>
+          <p:cNvSpPr/>
+          <p:nvPr/>
+        </p:nvSpPr>
+        <p:spPr>
+          <a:xfrm>
+            <a:off x="594360" y="5394960"/>
+            <a:ext cx="438912" cy="438912"/>
+          </a:xfrm>
+          <a:prstGeom prst="roundRect">
+            <a:avLst>
+              <a:gd name="adj" fmla="val 12000"/>
+            </a:avLst>
+          </a:prstGeom>
+          <a:solidFill>
+            <a:srgbClr val="095292"/>
+          </a:solidFill>
+          <a:ln>
+            <a:noFill/>
+          </a:ln>
+        </p:spPr>
+        <p:style>
+          <a:lnRef idx="1">
+            <a:schemeClr val="accent1"/>
+          </a:lnRef>
+          <a:fillRef idx="3">
+            <a:schemeClr val="accent1"/>
+          </a:fillRef>
+          <a:effectRef idx="2">
+            <a:schemeClr val="accent1"/>
+          </a:effectRef>
+          <a:fontRef idx="minor">
+            <a:schemeClr val="lt1"/>
+          </a:fontRef>
+        </p:style>
+        <p:txBody>
+          <a:bodyPr rtlCol="0" anchor="ctr"/>
+          <a:lstStyle/>
+          <a:p>
+            <a:pPr algn="ctr"/>
+          </a:p>
+        </p:txBody>
+      </p:sp>
+      <p:sp>
+        <p:nvSpPr>
+          <p:cNvPr id="20" name="TextBox 19"/>
+          <p:cNvSpPr txBox="1"/>
+          <p:nvPr/>
+        </p:nvSpPr>
+        <p:spPr>
+          <a:xfrm>
+            <a:off x="594360" y="5394960"/>
+            <a:ext cx="438912" cy="438912"/>
+          </a:xfrm>
+          <a:prstGeom prst="rect">
+            <a:avLst/>
+          </a:prstGeom>
+          <a:noFill/>
+        </p:spPr>
+        <p:txBody>
+          <a:bodyPr wrap="square" anchor="ctr"/>
+          <a:lstStyle/>
+          <a:p>
+            <a:pPr algn="ctr"/>
+            <a:r>
+              <a:rPr sz="1600" b="1" i="0">
+                <a:solidFill>
                   <a:srgbClr val="FFFFFF"/>
                 </a:solidFill>
                 <a:latin typeface="Calibri"/>
               </a:rPr>
-              <a:t>    rutas[Capa de rutas&lt;br/&gt;valida entrada y responde HTTP]</a:t>
+              <a:t>4</a:t>
+            </a:r>
+          </a:p>
+        </p:txBody>
+      </p:sp>
+      <p:sp>
+        <p:nvSpPr>
+          <p:cNvPr id="21" name="TextBox 20"/>
+          <p:cNvSpPr txBox="1"/>
+          <p:nvPr/>
+        </p:nvSpPr>
+        <p:spPr>
+          <a:xfrm>
+            <a:off x="1188720" y="5180076"/>
+            <a:ext cx="10271455" cy="886968"/>
+          </a:xfrm>
+          <a:prstGeom prst="rect">
+            <a:avLst/>
+          </a:prstGeom>
+          <a:noFill/>
+        </p:spPr>
+        <p:txBody>
+          <a:bodyPr wrap="square" anchor="ctr"/>
+          <a:lstStyle/>
+          <a:p>
+            <a:r>
+              <a:rPr sz="1500" b="1" i="0">
+                <a:solidFill>
+                  <a:srgbClr val="095292"/>
+                </a:solidFill>
+                <a:latin typeface="Calibri"/>
+              </a:rPr>
+              <a:t>Guarda código e imagen</a:t>
             </a:r>
           </a:p>
           <a:p>
             <a:pPr>
-              <a:spcAft>
-                <a:spcPts val="371"/>
-              </a:spcAft>
+              <a:spcBef>
+                <a:spcPts val="200"/>
+              </a:spcBef>
             </a:pPr>
             <a:r>
               <a:rPr sz="1300" b="0" i="0">
                 <a:solidFill>
-                  <a:srgbClr val="FFFFFF"/>
-                </a:solidFill>
-                <a:latin typeface="Calibri"/>
-              </a:rPr>
-              <a:t>    servicio[Servicio de dominio&lt;br/&gt;reglas de &lt;su dominio&gt;]</a:t>
-            </a:r>
-          </a:p>
-          <a:p>
-            <a:pPr>
-              <a:spcAft>
-                <a:spcPts val="371"/>
-              </a:spcAft>
-            </a:pPr>
-            <a:r>
-              <a:rPr sz="1300" b="0" i="0">
-                <a:solidFill>
-                  <a:srgbClr val="FFFFFF"/>
-                </a:solidFill>
-                <a:latin typeface="Calibri"/>
-              </a:rPr>
-              <a:t>    repo[Repositorio&lt;br/&gt;consultas SQL]</a:t>
-            </a:r>
-          </a:p>
-          <a:p>
-            <a:pPr>
-              <a:spcAft>
-                <a:spcPts val="371"/>
-              </a:spcAft>
-            </a:pPr>
-            <a:r>
-              <a:rPr sz="1300" b="0" i="0">
-                <a:solidFill>
-                  <a:srgbClr val="FFFFFF"/>
-                </a:solidFill>
-                <a:latin typeface="Calibri"/>
-              </a:rPr>
-              <a:t>    auth[Autenticacion&lt;br/&gt;verifica el token]</a:t>
-            </a:r>
-          </a:p>
-          <a:p>
-            <a:pPr>
-              <a:spcAft>
-                <a:spcPts val="371"/>
-              </a:spcAft>
-            </a:pPr>
-            <a:r>
-              <a:rPr sz="1300" b="0" i="0">
-                <a:solidFill>
-                  <a:srgbClr val="FFFFFF"/>
-                </a:solidFill>
-                <a:latin typeface="Calibri"/>
-              </a:rPr>
-              <a:t>  end</a:t>
-            </a:r>
-          </a:p>
-          <a:p>
-            <a:pPr>
-              <a:spcAft>
-                <a:spcPts val="371"/>
-              </a:spcAft>
-            </a:pPr>
-            <a:r>
-              <a:rPr sz="1300" b="0" i="0">
-                <a:solidFill>
-                  <a:srgbClr val="FFFFFF"/>
-                </a:solidFill>
-                <a:latin typeface="Calibri"/>
-              </a:rPr>
-              <a:t/>
-            </a:r>
-          </a:p>
-          <a:p>
-            <a:pPr>
-              <a:spcAft>
-                <a:spcPts val="371"/>
-              </a:spcAft>
-            </a:pPr>
-            <a:r>
-              <a:rPr sz="1300" b="0" i="0">
-                <a:solidFill>
-                  <a:srgbClr val="FFFFFF"/>
-                </a:solidFill>
-                <a:latin typeface="Calibri"/>
-              </a:rPr>
-              <a:t>  web[Web SPA] --&gt;|JSON/HTTPS| rutas</a:t>
-            </a:r>
-          </a:p>
-          <a:p>
-            <a:pPr>
-              <a:spcAft>
-                <a:spcPts val="371"/>
-              </a:spcAft>
-            </a:pPr>
-            <a:r>
-              <a:rPr sz="1300" b="0" i="0">
-                <a:solidFill>
-                  <a:srgbClr val="FFFFFF"/>
-                </a:solidFill>
-                <a:latin typeface="Calibri"/>
-              </a:rPr>
-              <a:t>  rutas --&gt; auth</a:t>
-            </a:r>
-          </a:p>
-          <a:p>
-            <a:pPr>
-              <a:spcAft>
-                <a:spcPts val="371"/>
-              </a:spcAft>
-            </a:pPr>
-            <a:r>
-              <a:rPr sz="1300" b="0" i="0">
-                <a:solidFill>
-                  <a:srgbClr val="FFFFFF"/>
-                </a:solidFill>
-                <a:latin typeface="Calibri"/>
-              </a:rPr>
-              <a:t>  rutas --&gt; servicio</a:t>
-            </a:r>
-          </a:p>
-          <a:p>
-            <a:pPr>
-              <a:spcAft>
-                <a:spcPts val="371"/>
-              </a:spcAft>
-            </a:pPr>
-            <a:r>
-              <a:rPr sz="1300" b="0" i="0">
-                <a:solidFill>
-                  <a:srgbClr val="FFFFFF"/>
-                </a:solidFill>
-                <a:latin typeface="Calibri"/>
-              </a:rPr>
-              <a:t>  servicio --&gt; repo</a:t>
-            </a:r>
-          </a:p>
-          <a:p>
-            <a:pPr>
-              <a:spcAft>
-                <a:spcPts val="371"/>
-              </a:spcAft>
-            </a:pPr>
-            <a:r>
-              <a:rPr sz="1300" b="0" i="0">
-                <a:solidFill>
-                  <a:srgbClr val="FFFFFF"/>
-                </a:solidFill>
-                <a:latin typeface="Calibri"/>
-              </a:rPr>
-              <a:t>  repo --&gt;|SQL| db[(PostgreSQL)]</a:t>
-            </a:r>
-          </a:p>
-          <a:p>
-            <a:pPr>
-              <a:spcAft>
-                <a:spcPts val="371"/>
-              </a:spcAft>
-            </a:pPr>
-            <a:r>
-              <a:rPr sz="1300" b="0" i="0">
-                <a:solidFill>
-                  <a:srgbClr val="FFFFFF"/>
-                </a:solidFill>
-                <a:latin typeface="Calibri"/>
-              </a:rPr>
-              <a:t/>
-            </a:r>
-          </a:p>
-          <a:p>
-            <a:pPr>
-              <a:spcAft>
-                <a:spcPts val="371"/>
-              </a:spcAft>
-            </a:pPr>
-            <a:r>
-              <a:rPr sz="1300" b="0" i="0">
-                <a:solidFill>
-                  <a:srgbClr val="FFFFFF"/>
-                </a:solidFill>
-                <a:latin typeface="Calibri"/>
-              </a:rPr>
-              <a:t>%% La regla del nivel Component: las cajas son piezas de CODIGO dentro</a:t>
-            </a:r>
-          </a:p>
-          <a:p>
-            <a:pPr>
-              <a:spcAft>
-                <a:spcPts val="371"/>
-              </a:spcAft>
-            </a:pPr>
-            <a:r>
-              <a:rPr sz="1300" b="0" i="0">
-                <a:solidFill>
-                  <a:srgbClr val="FFFFFF"/>
-                </a:solidFill>
-                <a:latin typeface="Calibri"/>
-              </a:rPr>
-              <a:t>%% de UN container, no servicios nuevos. Si le pone un puerto, es un</a:t>
-            </a:r>
-          </a:p>
-          <a:p>
-            <a:pPr>
-              <a:spcAft>
-                <a:spcPts val="371"/>
-              </a:spcAft>
-            </a:pPr>
-            <a:r>
-              <a:rPr sz="1300" b="0" i="0">
-                <a:solidFill>
-                  <a:srgbClr val="FFFFFF"/>
-                </a:solidFill>
-                <a:latin typeface="Calibri"/>
-              </a:rPr>
-              <a:t>%% container y va en el diagrama de la Clase 4.</a:t>
-            </a:r>
-          </a:p>
-        </p:txBody>
-      </p:sp>
-      <p:sp>
-        <p:nvSpPr>
-          <p:cNvPr id="9" name="TextBox 8"/>
+                  <a:srgbClr val="333333"/>
+                </a:solidFill>
+                <a:latin typeface="Calibri"/>
+              </a:rPr>
+              <a:t>El código es la fuente del diagrama: guárdalo con tu proyecto junto con el PNG exportado.</a:t>
+            </a:r>
+          </a:p>
+        </p:txBody>
+      </p:sp>
+      <p:sp>
+        <p:nvSpPr>
+          <p:cNvPr id="22" name="TextBox 21"/>
           <p:cNvSpPr txBox="1"/>
           <p:nvPr/>
         </p:nvSpPr>

--- a/Arquitectura de Sistemas Computacionales/Clases/Clase 11 - Avance del proyecto final/Presentacion.pptx
+++ b/Arquitectura de Sistemas Computacionales/Clases/Clase 11 - Avance del proyecto final/Presentacion.pptx
@@ -8776,6 +8776,108 @@
               <a:t>–   CI sin tests · diagrama sin puertos · dominio infinito.</a:t>
             </a:r>
           </a:p>
+          <a:p>
+            <a:pPr>
+              <a:spcAft>
+                <a:spcPts val="800"/>
+              </a:spcAft>
+            </a:pPr>
+            <a:r>
+              <a:rPr sz="2000" b="0" i="0">
+                <a:solidFill>
+                  <a:srgbClr val="333333"/>
+                </a:solidFill>
+                <a:latin typeface="Calibri"/>
+              </a:rPr>
+              <a:t>–   </a:t>
+            </a:r>
+            <a:r>
+              <a:rPr sz="2000" b="1" i="0">
+                <a:solidFill>
+                  <a:srgbClr val="333333"/>
+                </a:solidFill>
+                <a:latin typeface="Calibri"/>
+              </a:rPr>
+              <a:t>Microservicios teatro</a:t>
+            </a:r>
+            <a:r>
+              <a:rPr sz="2000" b="0" i="0">
+                <a:solidFill>
+                  <a:srgbClr val="333333"/>
+                </a:solidFill>
+                <a:latin typeface="Calibri"/>
+              </a:rPr>
+              <a:t>: servicios separados que comparten base de datos y se despliegan siempre juntos.</a:t>
+            </a:r>
+          </a:p>
+          <a:p>
+            <a:pPr>
+              <a:spcAft>
+                <a:spcPts val="800"/>
+              </a:spcAft>
+            </a:pPr>
+            <a:r>
+              <a:rPr sz="2000" b="0" i="0">
+                <a:solidFill>
+                  <a:srgbClr val="333333"/>
+                </a:solidFill>
+                <a:latin typeface="Calibri"/>
+              </a:rPr>
+              <a:t>–   </a:t>
+            </a:r>
+            <a:r>
+              <a:rPr sz="2000" b="1" i="0">
+                <a:solidFill>
+                  <a:srgbClr val="333333"/>
+                </a:solidFill>
+                <a:latin typeface="Calibri"/>
+              </a:rPr>
+              <a:t>Nombres distintos</a:t>
+            </a:r>
+            <a:r>
+              <a:rPr sz="2000" b="0" i="0">
+                <a:solidFill>
+                  <a:srgbClr val="333333"/>
+                </a:solidFill>
+                <a:latin typeface="Calibri"/>
+              </a:rPr>
+              <a:t>: «API de turnos» en el C4 y «backend» en el Despliegue rompen la trazabilidad.</a:t>
+            </a:r>
+          </a:p>
+          <a:p>
+            <a:pPr>
+              <a:spcAft>
+                <a:spcPts val="800"/>
+              </a:spcAft>
+            </a:pPr>
+            <a:r>
+              <a:rPr sz="2000" b="0" i="0">
+                <a:solidFill>
+                  <a:srgbClr val="333333"/>
+                </a:solidFill>
+                <a:latin typeface="Calibri"/>
+              </a:rPr>
+              <a:t>–   </a:t>
+            </a:r>
+            <a:r>
+              <a:rPr sz="2000" b="1" i="0">
+                <a:solidFill>
+                  <a:srgbClr val="333333"/>
+                </a:solidFill>
+                <a:latin typeface="Calibri"/>
+              </a:rPr>
+              <a:t>CI sin tests</a:t>
+            </a:r>
+            <a:r>
+              <a:rPr sz="2000" b="0" i="0">
+                <a:solidFill>
+                  <a:srgbClr val="333333"/>
+                </a:solidFill>
+                <a:latin typeface="Calibri"/>
+              </a:rPr>
+              <a:t>: un pipeline que no puede fallar no verifica nada.</a:t>
+            </a:r>
+          </a:p>
         </p:txBody>
       </p:sp>
       <p:sp>
@@ -9028,6 +9130,22 @@
               <a:t>–   Existe en la industria con nombres concretos: ATAM en su version academica, design review o RFC review en empresas de producto, comite de arquitectura en organizaciones grandes.</a:t>
             </a:r>
           </a:p>
+          <a:p>
+            <a:pPr>
+              <a:spcAft>
+                <a:spcPts val="800"/>
+              </a:spcAft>
+            </a:pPr>
+            <a:r>
+              <a:rPr sz="2000" b="0" i="0">
+                <a:solidFill>
+                  <a:srgbClr val="333333"/>
+                </a:solidFill>
+                <a:latin typeface="Calibri"/>
+              </a:rPr>
+              <a:t>–   Todas comparten la premisa economica que sostiene el curso: un riesgo detectado en el diseno cuesta una fraccion de lo que cuesta cuando ya esta implementado y con usuarios encima.</a:t>
+            </a:r>
+          </a:p>
         </p:txBody>
       </p:sp>
       <p:sp>
@@ -9245,7 +9363,7 @@
                 </a:solidFill>
                 <a:latin typeface="Calibri"/>
               </a:rPr>
-              <a:t>–   Todas comparten la premisa economica que sostiene el curso: un riesgo detectado en el diseno cuesta una fraccion de lo que cuesta cuando ya esta implementado y con usuarios encima.</a:t>
+              <a:t>–   La revision no juzga si el diagrama es bonito; busca tres cosas: decisiones sin argumento, incoherencias entre artefactos y riesgos que nadie ha nombrado.</a:t>
             </a:r>
           </a:p>
           <a:p>
@@ -9261,7 +9379,39 @@
                 </a:solidFill>
                 <a:latin typeface="Calibri"/>
               </a:rPr>
-              <a:t>–   La revision no juzga si el diagrama es bonito; busca tres cosas: decisiones sin argumento, incoherencias entre artefactos y riesgos que nadie ha nombrado.</a:t>
+              <a:t>–   Una revision de arquitectura es una lectura estructurada de los artefactos de diseno, hecha por alguien distinto del autor, antes de implementar o cambiar el diseno.</a:t>
+            </a:r>
+          </a:p>
+          <a:p>
+            <a:pPr>
+              <a:spcAft>
+                <a:spcPts val="800"/>
+              </a:spcAft>
+            </a:pPr>
+            <a:r>
+              <a:rPr sz="2000" b="0" i="0">
+                <a:solidFill>
+                  <a:srgbClr val="333333"/>
+                </a:solidFill>
+                <a:latin typeface="Calibri"/>
+              </a:rPr>
+              <a:t>–   Sus tres salidas son: hallazgos con evidencia, riesgos nombrados y acciones con responsable.</a:t>
+            </a:r>
+          </a:p>
+          <a:p>
+            <a:pPr>
+              <a:spcAft>
+                <a:spcPts val="800"/>
+              </a:spcAft>
+            </a:pPr>
+            <a:r>
+              <a:rPr sz="2000" b="0" i="0">
+                <a:solidFill>
+                  <a:srgbClr val="333333"/>
+                </a:solidFill>
+                <a:latin typeface="Calibri"/>
+              </a:rPr>
+              <a:t>–   Ejemplo en CloudLite: el Containers nombra «API de turnos» y el Despliegue nombra «backend»; el hallazgo es la incoherencia, la evidencia son los dos diagramas y la accion es unificar el nombre.</a:t>
             </a:r>
           </a:p>
         </p:txBody>

--- a/Arquitectura de Sistemas Computacionales/Clases/Clase 11 - Avance del proyecto final/Presentacion.pptx
+++ b/Arquitectura de Sistemas Computacionales/Clases/Clase 11 - Avance del proyecto final/Presentacion.pptx
@@ -4040,7 +4040,7 @@
                 </a:solidFill>
                 <a:latin typeface="Calibri"/>
               </a:rPr>
-              <a:t>Checkpoint diagramas v1 CloudLite</a:t>
+              <a:t>Checkpoint diagramas v1 de la app</a:t>
             </a:r>
           </a:p>
         </p:txBody>
@@ -4131,7 +4131,7 @@
                 </a:solidFill>
                 <a:latin typeface="Calibri"/>
               </a:rPr>
-              <a:t>Conceptos del tema, ejemplos resueltos sobre CloudLite y cierre conceptual.</a:t>
+              <a:t>Conceptos del tema, ejemplos resueltos sobre la app y cierre conceptual.</a:t>
             </a:r>
           </a:p>
         </p:txBody>
@@ -4367,7 +4367,7 @@
                 </a:solidFill>
                 <a:latin typeface="Calibri"/>
               </a:rPr>
-              <a:t>–   Se detecta con un dato objetivo, no con intuicion: en la Clase 1 cada estudiante definio entre tres y cinco capacidades para CloudLite, asi que basta contar las de hoy y compararlas con esa linea base</a:t>
+              <a:t>–   Se detecta con un dato objetivo, no con intuicion: en la Clase 1 cada estudiante definio entre tres y cinco capacidades para la app, asi que basta contar las de hoy y compararlas con esa linea base</a:t>
             </a:r>
           </a:p>
           <a:p>
@@ -4651,7 +4651,7 @@
                 </a:solidFill>
                 <a:latin typeface="Calibri"/>
               </a:rPr>
-              <a:t>–   En CloudLite el caso clasico es el "servicio de autenticacion" dibujado como caja aparte que en el repositorio es un modulo dentro de la misma API, escribe en las mismas tablas y se despliega en el mismo contenedor.</a:t>
+              <a:t>–   En la app el caso clasico es el "servicio de autenticacion" dibujado como caja aparte que en el repositorio es un modulo dentro de la misma API, escribe en las mismas tablas y se despliega en el mismo contenedor.</a:t>
             </a:r>
           </a:p>
           <a:p>
@@ -6567,7 +6567,7 @@
                 </a:solidFill>
                 <a:latin typeface="Calibri"/>
               </a:rPr>
-              <a:t>  subgraph api[API REST de CloudLite - Node + Express]</a:t>
+              <a:t>  subgraph api[API REST de la app - Node + Express]</a:t>
             </a:r>
           </a:p>
           <a:p>
@@ -7969,7 +7969,7 @@
                 </a:solidFill>
                 <a:latin typeface="Calibri"/>
               </a:rPr>
-              <a:t> Conceptos del tema, uno por lámina, con ejemplos sobre CloudLite.</a:t>
+              <a:t> Conceptos del tema, uno por lámina, con ejemplos sobre la app.</a:t>
             </a:r>
           </a:p>
           <a:p>
@@ -8253,7 +8253,7 @@
                 </a:solidFill>
                 <a:latin typeface="Calibri"/>
               </a:rPr>
-              <a:t>Consolidar evidencias PI en un paquete revisable.</a:t>
+              <a:t>Consolidar evidencias en un paquete revisable.</a:t>
             </a:r>
           </a:p>
           <a:p>
@@ -8505,7 +8505,7 @@
                 </a:solidFill>
                 <a:latin typeface="Calibri"/>
               </a:rPr>
-              <a:t>–   Consolidar evidencias PI en un paquete revisable.</a:t>
+              <a:t>–   Consolidar evidencias en un paquete revisable.</a:t>
             </a:r>
           </a:p>
           <a:p>
@@ -9411,7 +9411,7 @@
                 </a:solidFill>
                 <a:latin typeface="Calibri"/>
               </a:rPr>
-              <a:t>–   Ejemplo en CloudLite: el Containers nombra «API de turnos» y el Despliegue nombra «backend»; el hallazgo es la incoherencia, la evidencia son los dos diagramas y la accion es unificar el nombre.</a:t>
+              <a:t>–   Ejemplo en la app: el Containers nombra «API de turnos» y el Despliegue nombra «backend»; el hallazgo es la incoherencia, la evidencia son los dos diagramas y la accion es unificar el nombre.</a:t>
             </a:r>
           </a:p>
         </p:txBody>
@@ -9592,7 +9592,7 @@
                 </a:solidFill>
                 <a:latin typeface="Calibri"/>
               </a:rPr>
-              <a:t>El insumo: las seis piezas del paquete CloudLite v1</a:t>
+              <a:t>El insumo: las seis piezas del paquete v1</a:t>
             </a:r>
           </a:p>
         </p:txBody>
@@ -9631,7 +9631,7 @@
                 </a:solidFill>
                 <a:latin typeface="Calibri"/>
               </a:rPr>
-              <a:t>–   El insumo es el paquete CloudLite v1, que a estas alturas debe tener seis piezas producidas antes: el C4 de Contexto de la Clase 1, el C4 de Contenedores de la Clase 4, el modelo de amenazas con controles de la Clase 6</a:t>
+              <a:t>–   El insumo es el paquete v1, que a estas alturas debe tener seis piezas producidas antes: el C4 de Contexto de la Clase 1, el C4 de Contenedores de la Clase 4, el modelo de amenazas con controles de la Clase 6</a:t>
             </a:r>
           </a:p>
           <a:p>
@@ -9899,7 +9899,7 @@
                 </a:solidFill>
                 <a:latin typeface="Calibri"/>
               </a:rPr>
-              <a:t>–   Las preguntas de coherencia, aplicadas a CloudLite, son cinco y conviene hacerlas en orden.</a:t>
+              <a:t>–   Las preguntas de coherencia, aplicadas a la app, son cinco y conviene hacerlas en orden.</a:t>
             </a:r>
           </a:p>
           <a:p>

--- a/Arquitectura de Sistemas Computacionales/Clases/Clase 11 - Avance del proyecto final/Presentacion.pptx
+++ b/Arquitectura de Sistemas Computacionales/Clases/Clase 11 - Avance del proyecto final/Presentacion.pptx
@@ -20,11 +20,6 @@
     <p:sldId id="268" r:id="rId20"/>
     <p:sldId id="269" r:id="rId21"/>
     <p:sldId id="270" r:id="rId22"/>
-    <p:sldId id="271" r:id="rId23"/>
-    <p:sldId id="272" r:id="rId24"/>
-    <p:sldId id="273" r:id="rId25"/>
-    <p:sldId id="274" r:id="rId26"/>
-    <p:sldId id="275" r:id="rId27"/>
   </p:sldIdLst>
   <p:sldSz cx="12191695" cy="6858000" type="screen4x3"/>
   <p:notesSz cx="6858000" cy="9144000"/>
@@ -521,7 +516,13 @@
           <a:lstStyle/>
           <a:p>
             <a:r>
-              <a:t>Hoy el docente no dicta, audita, y el estudiante no aprende un concepto, demuestra que los que ya tiene forman un sistema.</a:t>
+              <a:t>(No se proyecta) Esta clase no introduce teoria de un tema tecnico nuevo, y eso es deliberado, pero si tiene teoria propia: la teoria de la revision y la evaluacion.</a:t>
+            </a:r>
+          </a:p>
+          <a:p/>
+          <a:p>
+            <a:r>
+              <a:t>(No se proyecta) Hoy el docente no dicta, audita, y el estudiante no aprende un concepto, demuestra que los que ya tiene forman un sistema.</a:t>
             </a:r>
           </a:p>
         </p:txBody>
@@ -594,6 +595,18 @@
               <a:t>Y se audita con preguntas mecanicas que cualquier docente puede hacer sin ser experto en el dominio del proyecto, lo que hace esta tecnica ensenable.</a:t>
             </a:r>
           </a:p>
+          <a:p/>
+          <a:p>
+            <a:r>
+              <a:t>(No se proyecta) El insumo es el paquete CloudLite v1, que a estas alturas debe tener seis piezas producidas antes: el C4 de Contexto de la Clase 1, el C4 de Contenedores de la Clase 4, el modelo de amenazas con controles de la Clase 6, el diagrama de despliegue con zonas publica y privada de la Clase 7, el workflow de GitHub Actions y las metricas de monitoreo de la Clase 8, y la tabla de costos con drivers y right-sizing de la Clase 10.</a:t>
+            </a:r>
+          </a:p>
+          <a:p/>
+          <a:p>
+            <a:r>
+              <a:t>(No se proyecta) No es una formalidad burocratica, es el unico detector confiable de que el estudiante penso el sistema en vez de producir seis tareas independientes para seis notas distintas.</a:t>
+            </a:r>
+          </a:p>
         </p:txBody>
       </p:sp>
       <p:sp>
@@ -661,13 +674,31 @@
           <a:lstStyle/>
           <a:p>
             <a:r>
-              <a:t>Hay dos patologias con nombre propio que arruinan las sustentaciones.</a:t>
+              <a:t>(No se proyecta) Las preguntas de coherencia, aplicadas a CloudLite, son cinco y conviene hacerlas en orden.</a:t>
             </a:r>
           </a:p>
           <a:p/>
           <a:p>
             <a:r>
-              <a:t>La respuesta correcta no es prohibir ideas sino congelar el alcance y abrir una lista de aparcamiento, un anexo donde las capacidades extra quedan escritas como "fuera de alcance v1, candidatas a v2": preserva la idea, protege el cronograma y es lo que hace un equipo profesional al cerrar un release.</a:t>
+              <a:t>(No se proyecta) Primera: cada contenedor del C4 de la Clase 4 aparece en el diagrama de despliegue de la Clase 7 y con el mismo nombre; si el C4 dice "servicio de notificaciones" y el despliegue dice "worker de correos", o son la misma cosa mal nombrada o son dos cosas y falta una.</a:t>
+            </a:r>
+          </a:p>
+          <a:p/>
+          <a:p>
+            <a:r>
+              <a:t>(No se proyecta) Segunda: cada actor y sistema externo del diagrama de Contexto sigue existiendo; el caso frecuente es que el estudiante dibujo en la Clase 1 una pasarela de pagos y hoy ningun contenedor habla con ella, asi que o desaparecio del alcance y hay que borrarla o esta olvidada y es un hueco.</a:t>
+            </a:r>
+          </a:p>
+          <a:p/>
+          <a:p>
+            <a:r>
+              <a:t>(No se proyecta) Tercera: cada amenaza del modelo STRIDE de la Clase 6 tiene un control visible en el despliegue; si la amenaza es acceso no autorizado a la base de datos y el diagrama la muestra en la subred publica, el control existe en el documento y no en el diseno.</a:t>
+            </a:r>
+          </a:p>
+          <a:p/>
+          <a:p>
+            <a:r>
+              <a:t>(No se proyecta) Cuarta: los componentes de la tabla de costos de la Clase 10 son los mismos contenedores, no una lista inventada.</a:t>
             </a:r>
           </a:p>
         </p:txBody>
@@ -737,13 +768,25 @@
           <a:lstStyle/>
           <a:p>
             <a:r>
-              <a:t>El docente debe apuntar a tres hallazgos por proyecto como maximo y marcar cual es el bloqueante, porque un estudiante que recibe once observaciones no corrige ninguna: se paraliza.</a:t>
+              <a:t>Hay dos patologias con nombre propio que arruinan las sustentaciones.</a:t>
             </a:r>
           </a:p>
           <a:p/>
           <a:p>
             <a:r>
-              <a:t>Conviene nombrar tambien una fortaleza concreta, no por amabilidad sino porque el estudiante necesita saber que conservar; si solo escucha fallas, en la siguiente version cambia todo, incluido lo que estaba bien.</a:t>
+              <a:t>La respuesta correcta no es prohibir ideas sino congelar el alcance y abrir una lista de aparcamiento, un anexo donde las capacidades extra quedan escritas como "fuera de alcance v1, candidatas a v2": preserva la idea, protege el cronograma y es lo que hace un equipo profesional al cerrar un release.</a:t>
+            </a:r>
+          </a:p>
+          <a:p/>
+          <a:p>
+            <a:r>
+              <a:t>(No se proyecta) Se detecta con un dato objetivo, no con intuicion: en la Clase 1 cada estudiante definio entre tres y cinco capacidades para CloudLite, asi que basta contar las de hoy y compararlas con esa linea base; si eran cuatro y hoy son nueve, hay scope creep, y da igual que las nuevas suenen interesantes.</a:t>
+            </a:r>
+          </a:p>
+          <a:p/>
+          <a:p>
+            <a:r>
+              <a:t>(No se proyecta) Se detecta con cuatro preguntas de una linea, todas respondibles por el estudiante: se puede desplegar ese servicio sin desplegar los otros, tiene sus propios datos o comparte tablas con el vecino, puede fallar sin tumbar a los demas, y existe una razon de negocio por la que cambiaria en un momento distinto al resto.</a:t>
             </a:r>
           </a:p>
         </p:txBody>
@@ -813,31 +856,107 @@
           <a:lstStyle/>
           <a:p>
             <a:r>
-              <a:t>Tres preguntas se repiten y el docente debe responderlas sin titubear.</a:t>
+              <a:t>(No se proyecta) Una retroalimentacion accionable tiene cuatro partes: observacion, evidencia, impacto y accion con fecha. "Falta seguridad" no cumple ninguna. "En el diagrama de despliegue la base de datos esta en la subred publica, contradice el control que ustedes escribieron para la amenaza de acceso no autorizado; si lo sustentan asi en la Clase 15 el evaluador concluira que el modelo de amenazas se escribio sin mirar el diagrama; muevanla a subred privada y dejen solo la API expuesta, antes de la Clase 12" cumple las cuatro.</a:t>
             </a:r>
           </a:p>
           <a:p/>
           <a:p>
             <a:r>
-              <a:t>Conviene cerrar diciendo que lo que se estabilice hoy es la base sobre la que la Clase 12 agregara el analisis de rendimiento y la Clase 13 la politica de escalado, y que un proyecto con el paquete v1 incoherente no puede hacer ninguna de las dos, porque no se puede medir ni escalar un sistema que todavia no esta definido.</a:t>
+              <a:t>(No se proyecta) El docente debe apuntar a tres hallazgos por proyecto como maximo y marcar cual es el bloqueante, porque un estudiante que recibe once observaciones no corrige ninguna: se paraliza.</a:t>
             </a:r>
           </a:p>
           <a:p/>
           <a:p>
             <a:r>
-              <a:t>(Sobre la actividad, no se proyecta) La primera es si esto se califica; la respuesta honesta es que este checkpoint no es la sustentacion final, que ocurre en la Clase 15, ni el Parcial 3, que es la evaluacion escrita de la Clase 14, y que hoy se registra estado y compromisos, pero el acta es el insumo con el que se mirara la entrega final: un gap senalado hoy y no cerrado pesa mucho mas que uno que aparecio despues.</a:t>
+              <a:t>(No se proyecta) Conviene nombrar tambien una fortaleza concreta, no por amabilidad sino porque el estudiante necesita saber que conservar; si solo escucha fallas, en la siguiente version cambia todo, incluido lo que estaba bien.</a:t>
             </a:r>
           </a:p>
           <a:p/>
           <a:p>
             <a:r>
-              <a:t>(Sobre la actividad, no se proyecta) La segunda es por que revisa un companero si el que califica es el docente, y la respuesta es que la revision por pares es practica estandar en la industria y que su valor no esta en el juicio del par sino en la obligacion de explicar; ademas el par pregunta lo que el docente ya asume, y esas son justo las preguntas que llegan en un Q&amp;A real.</a:t>
+              <a:t>(No se proyecta) Y la revision entre pares cumple una funcion que la del docente no puede: explicarle el sistema a otro estudiante obliga a verbalizar decisiones que nunca se dijeron en voz alta, y ahi el propio autor descubre sus huecos.</a:t>
             </a:r>
           </a:p>
           <a:p/>
           <a:p>
             <a:r>
-              <a:t>(Sobre la actividad, no se proyecta) La tercera, la mas delicada, es si cambiar el diagrama ahora significa perder el trabajo hecho, y la respuesta debe ser tajante: no, porque el artefacto no es el entregable, la decision documentada lo es; un diagrama corregido con una nota de por que cambio vale mas que uno intacto, y ese cambio justificado es exactamente lo que un ADR registra.</a:t>
+              <a:t>(No se proyecta) El formato eficiente es de siete a ocho minutos por proyecto, con reloj visible, y el revisor asignado (otro estudiante, u otro equipo si el docente los autorizo) entregando por escrito una observacion y una pregunta.</a:t>
+            </a:r>
+          </a:p>
+        </p:txBody>
+      </p:sp>
+      <p:sp>
+        <p:nvSpPr>
+          <p:cNvPr id="4" name="Slide Number Placeholder 3"/>
+          <p:cNvSpPr>
+            <a:spLocks noGrp="1"/>
+          </p:cNvSpPr>
+          <p:nvPr>
+            <p:ph type="sldNum" idx="5" sz="quarter"/>
+          </p:nvPr>
+        </p:nvSpPr>
+        <p:spPr/>
+      </p:sp>
+    </p:spTree>
+  </p:cSld>
+  <p:clrMapOvr>
+    <a:masterClrMapping/>
+  </p:clrMapOvr>
+</p:notes>
+</file>
+
+<file path=ppt/notesSlides/notesSlide6.xml><?xml version="1.0" encoding="utf-8"?>
+<p:notes xmlns:a="http://schemas.openxmlformats.org/drawingml/2006/main" xmlns:p="http://schemas.openxmlformats.org/presentationml/2006/main" xmlns:r="http://schemas.openxmlformats.org/officeDocument/2006/relationships">
+  <p:cSld>
+    <p:spTree>
+      <p:nvGrpSpPr>
+        <p:cNvPr id="1" name=""/>
+        <p:cNvGrpSpPr/>
+        <p:nvPr/>
+      </p:nvGrpSpPr>
+      <p:grpSpPr>
+        <a:xfrm>
+          <a:off x="0" y="0"/>
+          <a:ext cx="0" cy="0"/>
+          <a:chOff x="0" y="0"/>
+          <a:chExt cx="0" cy="0"/>
+        </a:xfrm>
+      </p:grpSpPr>
+      <p:sp>
+        <p:nvSpPr>
+          <p:cNvPr id="2" name="Slide Image Placeholder 1"/>
+          <p:cNvSpPr>
+            <a:spLocks noGrp="1"/>
+          </p:cNvSpPr>
+          <p:nvPr>
+            <p:ph type="sldImg" idx="2"/>
+          </p:nvPr>
+        </p:nvSpPr>
+        <p:spPr/>
+      </p:sp>
+      <p:sp>
+        <p:nvSpPr>
+          <p:cNvPr id="3" name="Notes Placeholder 2"/>
+          <p:cNvSpPr>
+            <a:spLocks noGrp="1"/>
+          </p:cNvSpPr>
+          <p:nvPr>
+            <p:ph type="body" idx="3" sz="quarter"/>
+          </p:nvPr>
+        </p:nvSpPr>
+        <p:spPr/>
+        <p:txBody>
+          <a:bodyPr/>
+          <a:lstStyle/>
+          <a:p>
+            <a:r>
+              <a:t>(No se proyecta) Falta el criterio para decidir si un proyecto va a tiempo, y aqui el docente necesita un umbral y no una impresion.</a:t>
+            </a:r>
+          </a:p>
+          <a:p/>
+          <a:p>
+            <a:r>
+              <a:t>(No se proyecta) El umbral de seis no es una ley de la ingenieria, es la contabilidad de este curso, y decirlo asi evita que el estudiante lo memorice como estandar internacional.</a:t>
             </a:r>
           </a:p>
         </p:txBody>
@@ -4312,7 +4431,7 @@
                 </a:solidFill>
                 <a:latin typeface="Calibri"/>
               </a:rPr>
-              <a:t>Scope creep y arquitectura de papel: las dos patologias con nombre propio (1/2)</a:t>
+              <a:t>Retroalimentacion accionable: observacion, evidencia, impacto y accion con fecha</a:t>
             </a:r>
           </a:p>
         </p:txBody>
@@ -4351,7 +4470,7 @@
                 </a:solidFill>
                 <a:latin typeface="Calibri"/>
               </a:rPr>
-              <a:t>–   La primera es el scope creep, el crecimiento no controlado del alcance: el sistema suma capacidades clase por clase, cada una razonable por si misma, hasta que el proyecto tiene un alcance que no se puede documentar ni defender en el tiempo restante.</a:t>
+              <a:t>–   La retroalimentacion es la mitad del valor del dia y tiene tecnica propia.</a:t>
             </a:r>
           </a:p>
           <a:p>
@@ -4367,7 +4486,7 @@
                 </a:solidFill>
                 <a:latin typeface="Calibri"/>
               </a:rPr>
-              <a:t>–   Se detecta con un dato objetivo, no con intuicion: en la Clase 1 cada estudiante definio entre tres y cinco capacidades para la app, asi que basta contar las de hoy y compararlas con esa linea base</a:t>
+              <a:t>–   Una observacion accionable tiene cuatro partes: observacion, evidencia, impacto y accion con fecha.</a:t>
             </a:r>
           </a:p>
           <a:p>
@@ -4383,7 +4502,7 @@
                 </a:solidFill>
                 <a:latin typeface="Calibri"/>
               </a:rPr>
-              <a:t>–   Si eran cuatro y hoy son nueve, hay scope creep, y da igual que las nuevas suenen interesantes.</a:t>
+              <a:t>–   Ejemplo: «el despliegue llama backend a la API de turnos (observacion); se ve en la caja central (evidencia); rompe la trazabilidad con el Containers (impacto); unificar el nombre antes de la proxima revision (accion con fecha)».</a:t>
             </a:r>
           </a:p>
           <a:p>
@@ -4399,7 +4518,7 @@
                 </a:solidFill>
                 <a:latin typeface="Calibri"/>
               </a:rPr>
-              <a:t>–   La segunda patologia es el teatro de microservicios: servicios separados en el diagrama que en la practica no son unidades independientes.</a:t>
+              <a:t>–   Un comentario como «mejorar el diagrama» no es accionable: no dice que, ni donde, ni cuando.</a:t>
             </a:r>
           </a:p>
         </p:txBody>
@@ -4580,7 +4699,7 @@
                 </a:solidFill>
                 <a:latin typeface="Calibri"/>
               </a:rPr>
-              <a:t>Scope creep y arquitectura de papel: las dos patologias con nombre propio (2/2)</a:t>
+              <a:t>El semaforo: el umbral que decide si el proyecto va a tiempo (1/2)</a:t>
             </a:r>
           </a:p>
         </p:txBody>
@@ -4619,7 +4738,7 @@
                 </a:solidFill>
                 <a:latin typeface="Calibri"/>
               </a:rPr>
-              <a:t>–   Se detecta con cuatro preguntas de una linea, todas respondibles por el estudiante: se puede desplegar ese servicio sin desplegar los otros, tiene sus propios datos o comparte tablas con el vecino, puede fallar sin tumbar a los demas</a:t>
+              <a:t>–   Con seis artefactos esperados la regla practica es un semaforo: verde si estan los seis y a lo sumo una cadena de trazabilidad rota</a:t>
             </a:r>
           </a:p>
           <a:p>
@@ -4635,7 +4754,7 @@
                 </a:solidFill>
                 <a:latin typeface="Calibri"/>
               </a:rPr>
-              <a:t>–   Y existe una razon de negocio por la que cambiaria en un momento distinto al resto.</a:t>
+              <a:t>–   Amarillo si hay cinco de seis, o dos o tres cadenas rotas pero corregibles editando documentos; rojo si falta el C4 de Contenedores o el diagrama de despliegue</a:t>
             </a:r>
           </a:p>
           <a:p>
@@ -4651,7 +4770,7 @@
                 </a:solidFill>
                 <a:latin typeface="Calibri"/>
               </a:rPr>
-              <a:t>–   En la app el caso clasico es el "servicio de autenticacion" dibujado como caja aparte que en el repositorio es un modulo dentro de la misma API, escribe en las mismas tablas y se despliega en el mismo contenedor.</a:t>
+              <a:t>–   Que son la columna vertebral y sin los cuales el resto no se puede evaluar, o si el repositorio no existe.</a:t>
             </a:r>
           </a:p>
           <a:p>
@@ -4667,7 +4786,7 @@
                 </a:solidFill>
                 <a:latin typeface="Calibri"/>
               </a:rPr>
-              <a:t>–   No es un microservicio, es un modulo, y decirlo no castiga al estudiante: corrige el vocabulario antes del Parcial 3, donde esa distincion se evalua.</a:t>
+              <a:t>–   Lo transferible es la idea de fondo: un checkpoint se evalua por evidencia presente, no por promesas.</a:t>
             </a:r>
           </a:p>
         </p:txBody>
@@ -4848,7 +4967,7 @@
                 </a:solidFill>
                 <a:latin typeface="Calibri"/>
               </a:rPr>
-              <a:t>Retroalimentacion accionable: observacion, evidencia, impacto y accion con fecha (1/2)</a:t>
+              <a:t>El semaforo: el umbral que decide si el proyecto va a tiempo (2/2)</a:t>
             </a:r>
           </a:p>
         </p:txBody>
@@ -4887,7 +5006,7 @@
                 </a:solidFill>
                 <a:latin typeface="Calibri"/>
               </a:rPr>
-              <a:t>–   La retroalimentacion es la mitad del valor del dia y tiene tecnica propia.</a:t>
+              <a:t>–   Cuando un estudiante dice "eso ya lo tenemos, solo falta subirlo", el estado es amarillo y el acta lo registra con fecha de cierre; no es desconfianza, es que en un proyecto lo que no esta en el repositorio no existe.</a:t>
             </a:r>
           </a:p>
           <a:p>
@@ -4903,39 +5022,7 @@
                 </a:solidFill>
                 <a:latin typeface="Calibri"/>
               </a:rPr>
-              <a:t>–   Una retroalimentacion accionable tiene cuatro partes: observacion, evidencia, impacto y accion con fecha. "Falta seguridad" no cumple ninguna. "En el diagrama de despliegue la base de datos esta en la subred publica</a:t>
-            </a:r>
-          </a:p>
-          <a:p>
-            <a:pPr>
-              <a:spcAft>
-                <a:spcPts val="800"/>
-              </a:spcAft>
-            </a:pPr>
-            <a:r>
-              <a:rPr sz="2000" b="0" i="0">
-                <a:solidFill>
-                  <a:srgbClr val="333333"/>
-                </a:solidFill>
-                <a:latin typeface="Calibri"/>
-              </a:rPr>
-              <a:t>–   Contradice el control que ustedes escribieron para la amenaza de acceso no autorizado</a:t>
-            </a:r>
-          </a:p>
-          <a:p>
-            <a:pPr>
-              <a:spcAft>
-                <a:spcPts val="800"/>
-              </a:spcAft>
-            </a:pPr>
-            <a:r>
-              <a:rPr sz="2000" b="0" i="0">
-                <a:solidFill>
-                  <a:srgbClr val="333333"/>
-                </a:solidFill>
-                <a:latin typeface="Calibri"/>
-              </a:rPr>
-              <a:t>–   Si lo sustentan asi en la Clase 15 el evaluador concluira que el modelo de amenazas se escribio sin mirar el diagrama; muevanla a subred privada y dejen solo la API expuesta, antes de la Clase 12" cumple las cuatro.</a:t>
+              <a:t>–   Para un proyecto en rojo el plan de recuperacion debe reducir alcance, nunca agregar trabajo: menos capacidades, menos servicios, y toda la energia en las dos piezas que faltan.</a:t>
             </a:r>
           </a:p>
         </p:txBody>
@@ -5116,21 +5203,141 @@
                 </a:solidFill>
                 <a:latin typeface="Calibri"/>
               </a:rPr>
-              <a:t>Retroalimentacion accionable: observacion, evidencia, impacto y accion con fecha (2/2)</a:t>
-            </a:r>
-          </a:p>
-        </p:txBody>
-      </p:sp>
-      <p:sp>
-        <p:nvSpPr>
-          <p:cNvPr id="5" name="TextBox 4"/>
+              <a:t>El C4 Component: por dentro de la API</a:t>
+            </a:r>
+          </a:p>
+        </p:txBody>
+      </p:sp>
+      <p:sp>
+        <p:nvSpPr>
+          <p:cNvPr id="5" name="Rounded Rectangle 4"/>
+          <p:cNvSpPr/>
+          <p:nvPr/>
+        </p:nvSpPr>
+        <p:spPr>
+          <a:xfrm>
+            <a:off x="457200" y="1261872"/>
+            <a:ext cx="11277295" cy="5093208"/>
+          </a:xfrm>
+          <a:prstGeom prst="roundRect">
+            <a:avLst>
+              <a:gd name="adj" fmla="val 12000"/>
+            </a:avLst>
+          </a:prstGeom>
+          <a:solidFill>
+            <a:srgbClr val="1E2A38"/>
+          </a:solidFill>
+          <a:ln>
+            <a:noFill/>
+          </a:ln>
+        </p:spPr>
+        <p:style>
+          <a:lnRef idx="1">
+            <a:schemeClr val="accent1"/>
+          </a:lnRef>
+          <a:fillRef idx="3">
+            <a:schemeClr val="accent1"/>
+          </a:fillRef>
+          <a:effectRef idx="2">
+            <a:schemeClr val="accent1"/>
+          </a:effectRef>
+          <a:fontRef idx="minor">
+            <a:schemeClr val="lt1"/>
+          </a:fontRef>
+        </p:style>
+        <p:txBody>
+          <a:bodyPr rtlCol="0" anchor="ctr"/>
+          <a:lstStyle/>
+          <a:p>
+            <a:pPr algn="ctr"/>
+          </a:p>
+        </p:txBody>
+      </p:sp>
+      <p:sp>
+        <p:nvSpPr>
+          <p:cNvPr id="6" name="Rectangle 5"/>
+          <p:cNvSpPr/>
+          <p:nvPr/>
+        </p:nvSpPr>
+        <p:spPr>
+          <a:xfrm>
+            <a:off x="457200" y="1261872"/>
+            <a:ext cx="11277295" cy="320040"/>
+          </a:xfrm>
+          <a:prstGeom prst="rect">
+            <a:avLst/>
+          </a:prstGeom>
+          <a:solidFill>
+            <a:srgbClr val="095292"/>
+          </a:solidFill>
+          <a:ln>
+            <a:noFill/>
+          </a:ln>
+        </p:spPr>
+        <p:style>
+          <a:lnRef idx="1">
+            <a:schemeClr val="accent1"/>
+          </a:lnRef>
+          <a:fillRef idx="3">
+            <a:schemeClr val="accent1"/>
+          </a:fillRef>
+          <a:effectRef idx="2">
+            <a:schemeClr val="accent1"/>
+          </a:effectRef>
+          <a:fontRef idx="minor">
+            <a:schemeClr val="lt1"/>
+          </a:fontRef>
+        </p:style>
+        <p:txBody>
+          <a:bodyPr rtlCol="0" anchor="ctr"/>
+          <a:lstStyle/>
+          <a:p>
+            <a:pPr algn="ctr"/>
+          </a:p>
+        </p:txBody>
+      </p:sp>
+      <p:sp>
+        <p:nvSpPr>
+          <p:cNvPr id="7" name="TextBox 6"/>
           <p:cNvSpPr txBox="1"/>
           <p:nvPr/>
         </p:nvSpPr>
         <p:spPr>
           <a:xfrm>
-            <a:off x="457200" y="1170432"/>
-            <a:ext cx="11277295" cy="5230368"/>
+            <a:off x="685800" y="1307592"/>
+            <a:ext cx="10820095" cy="256032"/>
+          </a:xfrm>
+          <a:prstGeom prst="rect">
+            <a:avLst/>
+          </a:prstGeom>
+          <a:noFill/>
+        </p:spPr>
+        <p:txBody>
+          <a:bodyPr wrap="square" anchor="ctr"/>
+          <a:lstStyle/>
+          <a:p>
+            <a:r>
+              <a:rPr sz="1000" b="1" i="0">
+                <a:solidFill>
+                  <a:srgbClr val="269CCB"/>
+                </a:solidFill>
+                <a:latin typeface="Calibri"/>
+              </a:rPr>
+              <a:t>● ● ●</a:t>
+            </a:r>
+          </a:p>
+        </p:txBody>
+      </p:sp>
+      <p:sp>
+        <p:nvSpPr>
+          <p:cNvPr id="8" name="TextBox 7"/>
+          <p:cNvSpPr txBox="1"/>
+          <p:nvPr/>
+        </p:nvSpPr>
+        <p:spPr>
+          <a:xfrm>
+            <a:off x="777240" y="1719072"/>
+            <a:ext cx="10637215" cy="4453128"/>
           </a:xfrm>
           <a:prstGeom prst="rect">
             <a:avLst/>
@@ -5145,40 +5352,280 @@
           <a:p>
             <a:pPr>
               <a:spcAft>
-                <a:spcPts val="800"/>
+                <a:spcPts val="371"/>
               </a:spcAft>
             </a:pPr>
             <a:r>
-              <a:rPr sz="2000" b="0" i="0">
-                <a:solidFill>
-                  <a:srgbClr val="333333"/>
-                </a:solidFill>
-                <a:latin typeface="Calibri"/>
-              </a:rPr>
-              <a:t>–   Y la revision entre pares cumple una funcion que la del docente no puede: explicarle el sistema a otro estudiante obliga a verbalizar decisiones que nunca se dijeron en voz alta, y ahi el propio autor descubre sus huecos.</a:t>
+              <a:rPr sz="1300" b="0" i="0">
+                <a:solidFill>
+                  <a:srgbClr val="FFFFFF"/>
+                </a:solidFill>
+                <a:latin typeface="Calibri"/>
+              </a:rPr>
+              <a:t>flowchart TB</a:t>
             </a:r>
           </a:p>
           <a:p>
             <a:pPr>
               <a:spcAft>
-                <a:spcPts val="800"/>
+                <a:spcPts val="371"/>
               </a:spcAft>
             </a:pPr>
             <a:r>
-              <a:rPr sz="2000" b="0" i="0">
-                <a:solidFill>
-                  <a:srgbClr val="333333"/>
-                </a:solidFill>
-                <a:latin typeface="Calibri"/>
-              </a:rPr>
-              <a:t>–   El formato eficiente es de siete a ocho minutos por proyecto, con reloj visible, y el revisor asignado (otro estudiante, u otro equipo si el docente los autorizo) entregando por escrito una observacion y una pregunta.</a:t>
-            </a:r>
-          </a:p>
-        </p:txBody>
-      </p:sp>
-      <p:sp>
-        <p:nvSpPr>
-          <p:cNvPr id="6" name="TextBox 5"/>
+              <a:rPr sz="1300" b="0" i="0">
+                <a:solidFill>
+                  <a:srgbClr val="FFFFFF"/>
+                </a:solidFill>
+                <a:latin typeface="Calibri"/>
+              </a:rPr>
+              <a:t>  subgraph api[API REST de la app - Node + Express]</a:t>
+            </a:r>
+          </a:p>
+          <a:p>
+            <a:pPr>
+              <a:spcAft>
+                <a:spcPts val="371"/>
+              </a:spcAft>
+            </a:pPr>
+            <a:r>
+              <a:rPr sz="1300" b="0" i="0">
+                <a:solidFill>
+                  <a:srgbClr val="FFFFFF"/>
+                </a:solidFill>
+                <a:latin typeface="Calibri"/>
+              </a:rPr>
+              <a:t>    rutas[Capa de rutas&lt;br/&gt;valida entrada y responde HTTP]</a:t>
+            </a:r>
+          </a:p>
+          <a:p>
+            <a:pPr>
+              <a:spcAft>
+                <a:spcPts val="371"/>
+              </a:spcAft>
+            </a:pPr>
+            <a:r>
+              <a:rPr sz="1300" b="0" i="0">
+                <a:solidFill>
+                  <a:srgbClr val="FFFFFF"/>
+                </a:solidFill>
+                <a:latin typeface="Calibri"/>
+              </a:rPr>
+              <a:t>    servicio[Servicio de dominio&lt;br/&gt;reglas de &lt;su dominio&gt;]</a:t>
+            </a:r>
+          </a:p>
+          <a:p>
+            <a:pPr>
+              <a:spcAft>
+                <a:spcPts val="371"/>
+              </a:spcAft>
+            </a:pPr>
+            <a:r>
+              <a:rPr sz="1300" b="0" i="0">
+                <a:solidFill>
+                  <a:srgbClr val="FFFFFF"/>
+                </a:solidFill>
+                <a:latin typeface="Calibri"/>
+              </a:rPr>
+              <a:t>    repo[Repositorio&lt;br/&gt;consultas SQL]</a:t>
+            </a:r>
+          </a:p>
+          <a:p>
+            <a:pPr>
+              <a:spcAft>
+                <a:spcPts val="371"/>
+              </a:spcAft>
+            </a:pPr>
+            <a:r>
+              <a:rPr sz="1300" b="0" i="0">
+                <a:solidFill>
+                  <a:srgbClr val="FFFFFF"/>
+                </a:solidFill>
+                <a:latin typeface="Calibri"/>
+              </a:rPr>
+              <a:t>    auth[Autenticacion&lt;br/&gt;verifica el token]</a:t>
+            </a:r>
+          </a:p>
+          <a:p>
+            <a:pPr>
+              <a:spcAft>
+                <a:spcPts val="371"/>
+              </a:spcAft>
+            </a:pPr>
+            <a:r>
+              <a:rPr sz="1300" b="0" i="0">
+                <a:solidFill>
+                  <a:srgbClr val="FFFFFF"/>
+                </a:solidFill>
+                <a:latin typeface="Calibri"/>
+              </a:rPr>
+              <a:t>  end</a:t>
+            </a:r>
+          </a:p>
+          <a:p>
+            <a:pPr>
+              <a:spcAft>
+                <a:spcPts val="371"/>
+              </a:spcAft>
+            </a:pPr>
+            <a:r>
+              <a:rPr sz="1300" b="0" i="0">
+                <a:solidFill>
+                  <a:srgbClr val="FFFFFF"/>
+                </a:solidFill>
+                <a:latin typeface="Calibri"/>
+              </a:rPr>
+              <a:t/>
+            </a:r>
+          </a:p>
+          <a:p>
+            <a:pPr>
+              <a:spcAft>
+                <a:spcPts val="371"/>
+              </a:spcAft>
+            </a:pPr>
+            <a:r>
+              <a:rPr sz="1300" b="0" i="0">
+                <a:solidFill>
+                  <a:srgbClr val="FFFFFF"/>
+                </a:solidFill>
+                <a:latin typeface="Calibri"/>
+              </a:rPr>
+              <a:t>  web[Web SPA] --&gt;|JSON/HTTPS| rutas</a:t>
+            </a:r>
+          </a:p>
+          <a:p>
+            <a:pPr>
+              <a:spcAft>
+                <a:spcPts val="371"/>
+              </a:spcAft>
+            </a:pPr>
+            <a:r>
+              <a:rPr sz="1300" b="0" i="0">
+                <a:solidFill>
+                  <a:srgbClr val="FFFFFF"/>
+                </a:solidFill>
+                <a:latin typeface="Calibri"/>
+              </a:rPr>
+              <a:t>  rutas --&gt; auth</a:t>
+            </a:r>
+          </a:p>
+          <a:p>
+            <a:pPr>
+              <a:spcAft>
+                <a:spcPts val="371"/>
+              </a:spcAft>
+            </a:pPr>
+            <a:r>
+              <a:rPr sz="1300" b="0" i="0">
+                <a:solidFill>
+                  <a:srgbClr val="FFFFFF"/>
+                </a:solidFill>
+                <a:latin typeface="Calibri"/>
+              </a:rPr>
+              <a:t>  rutas --&gt; servicio</a:t>
+            </a:r>
+          </a:p>
+          <a:p>
+            <a:pPr>
+              <a:spcAft>
+                <a:spcPts val="371"/>
+              </a:spcAft>
+            </a:pPr>
+            <a:r>
+              <a:rPr sz="1300" b="0" i="0">
+                <a:solidFill>
+                  <a:srgbClr val="FFFFFF"/>
+                </a:solidFill>
+                <a:latin typeface="Calibri"/>
+              </a:rPr>
+              <a:t>  servicio --&gt; repo</a:t>
+            </a:r>
+          </a:p>
+          <a:p>
+            <a:pPr>
+              <a:spcAft>
+                <a:spcPts val="371"/>
+              </a:spcAft>
+            </a:pPr>
+            <a:r>
+              <a:rPr sz="1300" b="0" i="0">
+                <a:solidFill>
+                  <a:srgbClr val="FFFFFF"/>
+                </a:solidFill>
+                <a:latin typeface="Calibri"/>
+              </a:rPr>
+              <a:t>  repo --&gt;|SQL| db[(PostgreSQL)]</a:t>
+            </a:r>
+          </a:p>
+          <a:p>
+            <a:pPr>
+              <a:spcAft>
+                <a:spcPts val="371"/>
+              </a:spcAft>
+            </a:pPr>
+            <a:r>
+              <a:rPr sz="1300" b="0" i="0">
+                <a:solidFill>
+                  <a:srgbClr val="FFFFFF"/>
+                </a:solidFill>
+                <a:latin typeface="Calibri"/>
+              </a:rPr>
+              <a:t/>
+            </a:r>
+          </a:p>
+          <a:p>
+            <a:pPr>
+              <a:spcAft>
+                <a:spcPts val="371"/>
+              </a:spcAft>
+            </a:pPr>
+            <a:r>
+              <a:rPr sz="1300" b="0" i="0">
+                <a:solidFill>
+                  <a:srgbClr val="FFFFFF"/>
+                </a:solidFill>
+                <a:latin typeface="Calibri"/>
+              </a:rPr>
+              <a:t>%% La regla del nivel Component: las cajas son piezas de CODIGO dentro</a:t>
+            </a:r>
+          </a:p>
+          <a:p>
+            <a:pPr>
+              <a:spcAft>
+                <a:spcPts val="371"/>
+              </a:spcAft>
+            </a:pPr>
+            <a:r>
+              <a:rPr sz="1300" b="0" i="0">
+                <a:solidFill>
+                  <a:srgbClr val="FFFFFF"/>
+                </a:solidFill>
+                <a:latin typeface="Calibri"/>
+              </a:rPr>
+              <a:t>%% de UN container, no servicios nuevos. Si le pone un puerto, es un</a:t>
+            </a:r>
+          </a:p>
+          <a:p>
+            <a:pPr>
+              <a:spcAft>
+                <a:spcPts val="371"/>
+              </a:spcAft>
+            </a:pPr>
+            <a:r>
+              <a:rPr sz="1300" b="0" i="0">
+                <a:solidFill>
+                  <a:srgbClr val="FFFFFF"/>
+                </a:solidFill>
+                <a:latin typeface="Calibri"/>
+              </a:rPr>
+              <a:t>%% container y va en el diagrama de la Clase 4.</a:t>
+            </a:r>
+          </a:p>
+        </p:txBody>
+      </p:sp>
+      <p:sp>
+        <p:nvSpPr>
+          <p:cNvPr id="9" name="TextBox 8"/>
           <p:cNvSpPr txBox="1"/>
           <p:nvPr/>
         </p:nvSpPr>
@@ -5246,7 +5693,7 @@
         <p:spPr>
           <a:xfrm>
             <a:off x="0" y="0"/>
-            <a:ext cx="12191695" cy="960120"/>
+            <a:ext cx="12191695" cy="1170432"/>
           </a:xfrm>
           <a:prstGeom prst="rect">
             <a:avLst/>
@@ -5288,7 +5735,7 @@
         </p:nvSpPr>
         <p:spPr>
           <a:xfrm>
-            <a:off x="0" y="960120"/>
+            <a:off x="0" y="1170432"/>
             <a:ext cx="12191695" cy="41148"/>
           </a:xfrm>
           <a:prstGeom prst="rect">
@@ -5332,7 +5779,7 @@
         <p:spPr>
           <a:xfrm>
             <a:off x="457200" y="164592"/>
-            <a:ext cx="11277295" cy="502920"/>
+            <a:ext cx="11277295" cy="384048"/>
           </a:xfrm>
           <a:prstGeom prst="rect">
             <a:avLst/>
@@ -5352,7 +5799,7 @@
                 </a:solidFill>
                 <a:latin typeface="Calibri"/>
               </a:rPr>
-              <a:t>El semaforo: el umbral que decide si el proyecto va a tiempo (1/2)</a:t>
+              <a:t>Del boceto al código Mermaid</a:t>
             </a:r>
           </a:p>
         </p:txBody>
@@ -5365,8 +5812,8 @@
         </p:nvSpPr>
         <p:spPr>
           <a:xfrm>
-            <a:off x="457200" y="1170432"/>
-            <a:ext cx="11277295" cy="5230368"/>
+            <a:off x="457200" y="566928"/>
+            <a:ext cx="11277295" cy="411480"/>
           </a:xfrm>
           <a:prstGeom prst="rect">
             <a:avLst/>
@@ -5379,90 +5826,705 @@
           </a:bodyPr>
           <a:lstStyle/>
           <a:p>
+            <a:r>
+              <a:rPr sz="1400" b="0" i="0">
+                <a:solidFill>
+                  <a:srgbClr val="B8D8EE"/>
+                </a:solidFill>
+                <a:latin typeface="Calibri"/>
+              </a:rPr>
+              <a:t>El diagrama se escribe como código: se versiona, se compara y se corrige</a:t>
+            </a:r>
+          </a:p>
+        </p:txBody>
+      </p:sp>
+      <p:sp>
+        <p:nvSpPr>
+          <p:cNvPr id="6" name="Rounded Rectangle 5"/>
+          <p:cNvSpPr/>
+          <p:nvPr/>
+        </p:nvSpPr>
+        <p:spPr>
+          <a:xfrm>
+            <a:off x="457200" y="1659636"/>
+            <a:ext cx="11277295" cy="1051560"/>
+          </a:xfrm>
+          <a:prstGeom prst="roundRect">
+            <a:avLst>
+              <a:gd name="adj" fmla="val 12000"/>
+            </a:avLst>
+          </a:prstGeom>
+          <a:solidFill>
+            <a:srgbClr val="F2F2F2"/>
+          </a:solidFill>
+          <a:ln>
+            <a:noFill/>
+          </a:ln>
+        </p:spPr>
+        <p:style>
+          <a:lnRef idx="1">
+            <a:schemeClr val="accent1"/>
+          </a:lnRef>
+          <a:fillRef idx="3">
+            <a:schemeClr val="accent1"/>
+          </a:fillRef>
+          <a:effectRef idx="2">
+            <a:schemeClr val="accent1"/>
+          </a:effectRef>
+          <a:fontRef idx="minor">
+            <a:schemeClr val="lt1"/>
+          </a:fontRef>
+        </p:style>
+        <p:txBody>
+          <a:bodyPr rtlCol="0" anchor="ctr"/>
+          <a:lstStyle/>
+          <a:p>
+            <a:pPr algn="ctr"/>
+          </a:p>
+        </p:txBody>
+      </p:sp>
+      <p:sp>
+        <p:nvSpPr>
+          <p:cNvPr id="7" name="Rounded Rectangle 6"/>
+          <p:cNvSpPr/>
+          <p:nvPr/>
+        </p:nvSpPr>
+        <p:spPr>
+          <a:xfrm>
+            <a:off x="594360" y="1965960"/>
+            <a:ext cx="438912" cy="438912"/>
+          </a:xfrm>
+          <a:prstGeom prst="roundRect">
+            <a:avLst>
+              <a:gd name="adj" fmla="val 12000"/>
+            </a:avLst>
+          </a:prstGeom>
+          <a:solidFill>
+            <a:srgbClr val="095292"/>
+          </a:solidFill>
+          <a:ln>
+            <a:noFill/>
+          </a:ln>
+        </p:spPr>
+        <p:style>
+          <a:lnRef idx="1">
+            <a:schemeClr val="accent1"/>
+          </a:lnRef>
+          <a:fillRef idx="3">
+            <a:schemeClr val="accent1"/>
+          </a:fillRef>
+          <a:effectRef idx="2">
+            <a:schemeClr val="accent1"/>
+          </a:effectRef>
+          <a:fontRef idx="minor">
+            <a:schemeClr val="lt1"/>
+          </a:fontRef>
+        </p:style>
+        <p:txBody>
+          <a:bodyPr rtlCol="0" anchor="ctr"/>
+          <a:lstStyle/>
+          <a:p>
+            <a:pPr algn="ctr"/>
+          </a:p>
+        </p:txBody>
+      </p:sp>
+      <p:sp>
+        <p:nvSpPr>
+          <p:cNvPr id="8" name="TextBox 7"/>
+          <p:cNvSpPr txBox="1"/>
+          <p:nvPr/>
+        </p:nvSpPr>
+        <p:spPr>
+          <a:xfrm>
+            <a:off x="594360" y="1965960"/>
+            <a:ext cx="438912" cy="438912"/>
+          </a:xfrm>
+          <a:prstGeom prst="rect">
+            <a:avLst/>
+          </a:prstGeom>
+          <a:noFill/>
+        </p:spPr>
+        <p:txBody>
+          <a:bodyPr wrap="square" anchor="ctr"/>
+          <a:lstStyle/>
+          <a:p>
+            <a:pPr algn="ctr"/>
+            <a:r>
+              <a:rPr sz="1600" b="1" i="0">
+                <a:solidFill>
+                  <a:srgbClr val="FFFFFF"/>
+                </a:solidFill>
+                <a:latin typeface="Calibri"/>
+              </a:rPr>
+              <a:t>1</a:t>
+            </a:r>
+          </a:p>
+        </p:txBody>
+      </p:sp>
+      <p:sp>
+        <p:nvSpPr>
+          <p:cNvPr id="9" name="TextBox 8"/>
+          <p:cNvSpPr txBox="1"/>
+          <p:nvPr/>
+        </p:nvSpPr>
+        <p:spPr>
+          <a:xfrm>
+            <a:off x="1188720" y="1751076"/>
+            <a:ext cx="10271455" cy="886968"/>
+          </a:xfrm>
+          <a:prstGeom prst="rect">
+            <a:avLst/>
+          </a:prstGeom>
+          <a:noFill/>
+        </p:spPr>
+        <p:txBody>
+          <a:bodyPr wrap="square" anchor="ctr"/>
+          <a:lstStyle/>
+          <a:p>
+            <a:r>
+              <a:rPr sz="1500" b="1" i="0">
+                <a:solidFill>
+                  <a:srgbClr val="095292"/>
+                </a:solidFill>
+                <a:latin typeface="Calibri"/>
+              </a:rPr>
+              <a:t>Diseña visual</a:t>
+            </a:r>
+          </a:p>
+          <a:p>
             <a:pPr>
-              <a:spcAft>
-                <a:spcPts val="800"/>
-              </a:spcAft>
+              <a:spcBef>
+                <a:spcPts val="200"/>
+              </a:spcBef>
             </a:pPr>
             <a:r>
-              <a:rPr sz="2000" b="0" i="0">
+              <a:rPr sz="1300" b="0" i="0">
                 <a:solidFill>
                   <a:srgbClr val="333333"/>
                 </a:solidFill>
                 <a:latin typeface="Calibri"/>
               </a:rPr>
-              <a:t>–   Falta el criterio para decidir si un proyecto va a tiempo, y aqui el docente necesita un umbral y no una impresion.</a:t>
+              <a:t>Dibuja el diagrama como quieras en Excalidraw o draw.io: es más rápido arrastrar cajas que escribir código, y ahí es donde se piensa el modelo.</a:t>
+            </a:r>
+          </a:p>
+        </p:txBody>
+      </p:sp>
+      <p:sp>
+        <p:nvSpPr>
+          <p:cNvPr id="10" name="Rounded Rectangle 9"/>
+          <p:cNvSpPr/>
+          <p:nvPr/>
+        </p:nvSpPr>
+        <p:spPr>
+          <a:xfrm>
+            <a:off x="457200" y="2802636"/>
+            <a:ext cx="11277295" cy="1051560"/>
+          </a:xfrm>
+          <a:prstGeom prst="roundRect">
+            <a:avLst>
+              <a:gd name="adj" fmla="val 12000"/>
+            </a:avLst>
+          </a:prstGeom>
+          <a:solidFill>
+            <a:srgbClr val="E8F4FA"/>
+          </a:solidFill>
+          <a:ln>
+            <a:noFill/>
+          </a:ln>
+        </p:spPr>
+        <p:style>
+          <a:lnRef idx="1">
+            <a:schemeClr val="accent1"/>
+          </a:lnRef>
+          <a:fillRef idx="3">
+            <a:schemeClr val="accent1"/>
+          </a:fillRef>
+          <a:effectRef idx="2">
+            <a:schemeClr val="accent1"/>
+          </a:effectRef>
+          <a:fontRef idx="minor">
+            <a:schemeClr val="lt1"/>
+          </a:fontRef>
+        </p:style>
+        <p:txBody>
+          <a:bodyPr rtlCol="0" anchor="ctr"/>
+          <a:lstStyle/>
+          <a:p>
+            <a:pPr algn="ctr"/>
+          </a:p>
+        </p:txBody>
+      </p:sp>
+      <p:sp>
+        <p:nvSpPr>
+          <p:cNvPr id="11" name="Rounded Rectangle 10"/>
+          <p:cNvSpPr/>
+          <p:nvPr/>
+        </p:nvSpPr>
+        <p:spPr>
+          <a:xfrm>
+            <a:off x="594360" y="3108960"/>
+            <a:ext cx="438912" cy="438912"/>
+          </a:xfrm>
+          <a:prstGeom prst="roundRect">
+            <a:avLst>
+              <a:gd name="adj" fmla="val 12000"/>
+            </a:avLst>
+          </a:prstGeom>
+          <a:solidFill>
+            <a:srgbClr val="095292"/>
+          </a:solidFill>
+          <a:ln>
+            <a:noFill/>
+          </a:ln>
+        </p:spPr>
+        <p:style>
+          <a:lnRef idx="1">
+            <a:schemeClr val="accent1"/>
+          </a:lnRef>
+          <a:fillRef idx="3">
+            <a:schemeClr val="accent1"/>
+          </a:fillRef>
+          <a:effectRef idx="2">
+            <a:schemeClr val="accent1"/>
+          </a:effectRef>
+          <a:fontRef idx="minor">
+            <a:schemeClr val="lt1"/>
+          </a:fontRef>
+        </p:style>
+        <p:txBody>
+          <a:bodyPr rtlCol="0" anchor="ctr"/>
+          <a:lstStyle/>
+          <a:p>
+            <a:pPr algn="ctr"/>
+          </a:p>
+        </p:txBody>
+      </p:sp>
+      <p:sp>
+        <p:nvSpPr>
+          <p:cNvPr id="12" name="TextBox 11"/>
+          <p:cNvSpPr txBox="1"/>
+          <p:nvPr/>
+        </p:nvSpPr>
+        <p:spPr>
+          <a:xfrm>
+            <a:off x="594360" y="3108960"/>
+            <a:ext cx="438912" cy="438912"/>
+          </a:xfrm>
+          <a:prstGeom prst="rect">
+            <a:avLst/>
+          </a:prstGeom>
+          <a:noFill/>
+        </p:spPr>
+        <p:txBody>
+          <a:bodyPr wrap="square" anchor="ctr"/>
+          <a:lstStyle/>
+          <a:p>
+            <a:pPr algn="ctr"/>
+            <a:r>
+              <a:rPr sz="1600" b="1" i="0">
+                <a:solidFill>
+                  <a:srgbClr val="FFFFFF"/>
+                </a:solidFill>
+                <a:latin typeface="Calibri"/>
+              </a:rPr>
+              <a:t>2</a:t>
+            </a:r>
+          </a:p>
+        </p:txBody>
+      </p:sp>
+      <p:sp>
+        <p:nvSpPr>
+          <p:cNvPr id="13" name="TextBox 12"/>
+          <p:cNvSpPr txBox="1"/>
+          <p:nvPr/>
+        </p:nvSpPr>
+        <p:spPr>
+          <a:xfrm>
+            <a:off x="1188720" y="2894076"/>
+            <a:ext cx="10271455" cy="886968"/>
+          </a:xfrm>
+          <a:prstGeom prst="rect">
+            <a:avLst/>
+          </a:prstGeom>
+          <a:noFill/>
+        </p:spPr>
+        <p:txBody>
+          <a:bodyPr wrap="square" anchor="ctr"/>
+          <a:lstStyle/>
+          <a:p>
+            <a:r>
+              <a:rPr sz="1500" b="1" i="0">
+                <a:solidFill>
+                  <a:srgbClr val="095292"/>
+                </a:solidFill>
+                <a:latin typeface="Calibri"/>
+              </a:rPr>
+              <a:t>Traduce con IA</a:t>
             </a:r>
           </a:p>
           <a:p>
             <a:pPr>
-              <a:spcAft>
-                <a:spcPts val="800"/>
-              </a:spcAft>
+              <a:spcBef>
+                <a:spcPts val="200"/>
+              </a:spcBef>
             </a:pPr>
             <a:r>
-              <a:rPr sz="2000" b="0" i="0">
+              <a:rPr sz="1300" b="0" i="0">
                 <a:solidFill>
                   <a:srgbClr val="333333"/>
                 </a:solidFill>
                 <a:latin typeface="Calibri"/>
               </a:rPr>
-              <a:t>–   Con seis artefactos esperados la regla practica es un semaforo: verde si estan los seis y a lo sumo una cadena de trazabilidad rota</a:t>
+              <a:t>Describe tu boceto a una IA y pídele el código Mermaid usando C4Component. Revisa el resultado: la IA acierta la sintaxis, no tu modelo.</a:t>
+            </a:r>
+          </a:p>
+        </p:txBody>
+      </p:sp>
+      <p:sp>
+        <p:nvSpPr>
+          <p:cNvPr id="14" name="Rounded Rectangle 13"/>
+          <p:cNvSpPr/>
+          <p:nvPr/>
+        </p:nvSpPr>
+        <p:spPr>
+          <a:xfrm>
+            <a:off x="457200" y="3945636"/>
+            <a:ext cx="11277295" cy="1051560"/>
+          </a:xfrm>
+          <a:prstGeom prst="roundRect">
+            <a:avLst>
+              <a:gd name="adj" fmla="val 12000"/>
+            </a:avLst>
+          </a:prstGeom>
+          <a:solidFill>
+            <a:srgbClr val="F2F2F2"/>
+          </a:solidFill>
+          <a:ln>
+            <a:noFill/>
+          </a:ln>
+        </p:spPr>
+        <p:style>
+          <a:lnRef idx="1">
+            <a:schemeClr val="accent1"/>
+          </a:lnRef>
+          <a:fillRef idx="3">
+            <a:schemeClr val="accent1"/>
+          </a:fillRef>
+          <a:effectRef idx="2">
+            <a:schemeClr val="accent1"/>
+          </a:effectRef>
+          <a:fontRef idx="minor">
+            <a:schemeClr val="lt1"/>
+          </a:fontRef>
+        </p:style>
+        <p:txBody>
+          <a:bodyPr rtlCol="0" anchor="ctr"/>
+          <a:lstStyle/>
+          <a:p>
+            <a:pPr algn="ctr"/>
+          </a:p>
+        </p:txBody>
+      </p:sp>
+      <p:sp>
+        <p:nvSpPr>
+          <p:cNvPr id="15" name="Rounded Rectangle 14"/>
+          <p:cNvSpPr/>
+          <p:nvPr/>
+        </p:nvSpPr>
+        <p:spPr>
+          <a:xfrm>
+            <a:off x="594360" y="4251960"/>
+            <a:ext cx="438912" cy="438912"/>
+          </a:xfrm>
+          <a:prstGeom prst="roundRect">
+            <a:avLst>
+              <a:gd name="adj" fmla="val 12000"/>
+            </a:avLst>
+          </a:prstGeom>
+          <a:solidFill>
+            <a:srgbClr val="095292"/>
+          </a:solidFill>
+          <a:ln>
+            <a:noFill/>
+          </a:ln>
+        </p:spPr>
+        <p:style>
+          <a:lnRef idx="1">
+            <a:schemeClr val="accent1"/>
+          </a:lnRef>
+          <a:fillRef idx="3">
+            <a:schemeClr val="accent1"/>
+          </a:fillRef>
+          <a:effectRef idx="2">
+            <a:schemeClr val="accent1"/>
+          </a:effectRef>
+          <a:fontRef idx="minor">
+            <a:schemeClr val="lt1"/>
+          </a:fontRef>
+        </p:style>
+        <p:txBody>
+          <a:bodyPr rtlCol="0" anchor="ctr"/>
+          <a:lstStyle/>
+          <a:p>
+            <a:pPr algn="ctr"/>
+          </a:p>
+        </p:txBody>
+      </p:sp>
+      <p:sp>
+        <p:nvSpPr>
+          <p:cNvPr id="16" name="TextBox 15"/>
+          <p:cNvSpPr txBox="1"/>
+          <p:nvPr/>
+        </p:nvSpPr>
+        <p:spPr>
+          <a:xfrm>
+            <a:off x="594360" y="4251960"/>
+            <a:ext cx="438912" cy="438912"/>
+          </a:xfrm>
+          <a:prstGeom prst="rect">
+            <a:avLst/>
+          </a:prstGeom>
+          <a:noFill/>
+        </p:spPr>
+        <p:txBody>
+          <a:bodyPr wrap="square" anchor="ctr"/>
+          <a:lstStyle/>
+          <a:p>
+            <a:pPr algn="ctr"/>
+            <a:r>
+              <a:rPr sz="1600" b="1" i="0">
+                <a:solidFill>
+                  <a:srgbClr val="FFFFFF"/>
+                </a:solidFill>
+                <a:latin typeface="Calibri"/>
+              </a:rPr>
+              <a:t>3</a:t>
+            </a:r>
+          </a:p>
+        </p:txBody>
+      </p:sp>
+      <p:sp>
+        <p:nvSpPr>
+          <p:cNvPr id="17" name="TextBox 16"/>
+          <p:cNvSpPr txBox="1"/>
+          <p:nvPr/>
+        </p:nvSpPr>
+        <p:spPr>
+          <a:xfrm>
+            <a:off x="1188720" y="4037076"/>
+            <a:ext cx="10271455" cy="886968"/>
+          </a:xfrm>
+          <a:prstGeom prst="rect">
+            <a:avLst/>
+          </a:prstGeom>
+          <a:noFill/>
+        </p:spPr>
+        <p:txBody>
+          <a:bodyPr wrap="square" anchor="ctr"/>
+          <a:lstStyle/>
+          <a:p>
+            <a:r>
+              <a:rPr sz="1500" b="1" i="0">
+                <a:solidFill>
+                  <a:srgbClr val="095292"/>
+                </a:solidFill>
+                <a:latin typeface="Calibri"/>
+              </a:rPr>
+              <a:t>Renderiza en un visor</a:t>
             </a:r>
           </a:p>
           <a:p>
             <a:pPr>
-              <a:spcAft>
-                <a:spcPts val="800"/>
-              </a:spcAft>
+              <a:spcBef>
+                <a:spcPts val="200"/>
+              </a:spcBef>
             </a:pPr>
             <a:r>
-              <a:rPr sz="2000" b="0" i="0">
+              <a:rPr sz="1300" b="0" i="0">
                 <a:solidFill>
                   <a:srgbClr val="333333"/>
                 </a:solidFill>
                 <a:latin typeface="Calibri"/>
               </a:rPr>
-              <a:t>–   Amarillo si hay cinco de seis, o dos o tres cadenas rotas pero corregibles editando documentos; rojo si falta el C4 de Contenedores o el diagrama de despliegue</a:t>
+              <a:t>Pega el código en un visor Mermaid (mermaid.live o la vista previa de tu editor) y míralo dibujado. Si no renderiza, corrige ahí: un end faltante o un rótulo sin comillas.</a:t>
+            </a:r>
+          </a:p>
+        </p:txBody>
+      </p:sp>
+      <p:sp>
+        <p:nvSpPr>
+          <p:cNvPr id="18" name="Rounded Rectangle 17"/>
+          <p:cNvSpPr/>
+          <p:nvPr/>
+        </p:nvSpPr>
+        <p:spPr>
+          <a:xfrm>
+            <a:off x="457200" y="5088636"/>
+            <a:ext cx="11277295" cy="1051560"/>
+          </a:xfrm>
+          <a:prstGeom prst="roundRect">
+            <a:avLst>
+              <a:gd name="adj" fmla="val 12000"/>
+            </a:avLst>
+          </a:prstGeom>
+          <a:solidFill>
+            <a:srgbClr val="E8F4FA"/>
+          </a:solidFill>
+          <a:ln>
+            <a:noFill/>
+          </a:ln>
+        </p:spPr>
+        <p:style>
+          <a:lnRef idx="1">
+            <a:schemeClr val="accent1"/>
+          </a:lnRef>
+          <a:fillRef idx="3">
+            <a:schemeClr val="accent1"/>
+          </a:fillRef>
+          <a:effectRef idx="2">
+            <a:schemeClr val="accent1"/>
+          </a:effectRef>
+          <a:fontRef idx="minor">
+            <a:schemeClr val="lt1"/>
+          </a:fontRef>
+        </p:style>
+        <p:txBody>
+          <a:bodyPr rtlCol="0" anchor="ctr"/>
+          <a:lstStyle/>
+          <a:p>
+            <a:pPr algn="ctr"/>
+          </a:p>
+        </p:txBody>
+      </p:sp>
+      <p:sp>
+        <p:nvSpPr>
+          <p:cNvPr id="19" name="Rounded Rectangle 18"/>
+          <p:cNvSpPr/>
+          <p:nvPr/>
+        </p:nvSpPr>
+        <p:spPr>
+          <a:xfrm>
+            <a:off x="594360" y="5394960"/>
+            <a:ext cx="438912" cy="438912"/>
+          </a:xfrm>
+          <a:prstGeom prst="roundRect">
+            <a:avLst>
+              <a:gd name="adj" fmla="val 12000"/>
+            </a:avLst>
+          </a:prstGeom>
+          <a:solidFill>
+            <a:srgbClr val="095292"/>
+          </a:solidFill>
+          <a:ln>
+            <a:noFill/>
+          </a:ln>
+        </p:spPr>
+        <p:style>
+          <a:lnRef idx="1">
+            <a:schemeClr val="accent1"/>
+          </a:lnRef>
+          <a:fillRef idx="3">
+            <a:schemeClr val="accent1"/>
+          </a:fillRef>
+          <a:effectRef idx="2">
+            <a:schemeClr val="accent1"/>
+          </a:effectRef>
+          <a:fontRef idx="minor">
+            <a:schemeClr val="lt1"/>
+          </a:fontRef>
+        </p:style>
+        <p:txBody>
+          <a:bodyPr rtlCol="0" anchor="ctr"/>
+          <a:lstStyle/>
+          <a:p>
+            <a:pPr algn="ctr"/>
+          </a:p>
+        </p:txBody>
+      </p:sp>
+      <p:sp>
+        <p:nvSpPr>
+          <p:cNvPr id="20" name="TextBox 19"/>
+          <p:cNvSpPr txBox="1"/>
+          <p:nvPr/>
+        </p:nvSpPr>
+        <p:spPr>
+          <a:xfrm>
+            <a:off x="594360" y="5394960"/>
+            <a:ext cx="438912" cy="438912"/>
+          </a:xfrm>
+          <a:prstGeom prst="rect">
+            <a:avLst/>
+          </a:prstGeom>
+          <a:noFill/>
+        </p:spPr>
+        <p:txBody>
+          <a:bodyPr wrap="square" anchor="ctr"/>
+          <a:lstStyle/>
+          <a:p>
+            <a:pPr algn="ctr"/>
+            <a:r>
+              <a:rPr sz="1600" b="1" i="0">
+                <a:solidFill>
+                  <a:srgbClr val="FFFFFF"/>
+                </a:solidFill>
+                <a:latin typeface="Calibri"/>
+              </a:rPr>
+              <a:t>4</a:t>
+            </a:r>
+          </a:p>
+        </p:txBody>
+      </p:sp>
+      <p:sp>
+        <p:nvSpPr>
+          <p:cNvPr id="21" name="TextBox 20"/>
+          <p:cNvSpPr txBox="1"/>
+          <p:nvPr/>
+        </p:nvSpPr>
+        <p:spPr>
+          <a:xfrm>
+            <a:off x="1188720" y="5180076"/>
+            <a:ext cx="10271455" cy="886968"/>
+          </a:xfrm>
+          <a:prstGeom prst="rect">
+            <a:avLst/>
+          </a:prstGeom>
+          <a:noFill/>
+        </p:spPr>
+        <p:txBody>
+          <a:bodyPr wrap="square" anchor="ctr"/>
+          <a:lstStyle/>
+          <a:p>
+            <a:r>
+              <a:rPr sz="1500" b="1" i="0">
+                <a:solidFill>
+                  <a:srgbClr val="095292"/>
+                </a:solidFill>
+                <a:latin typeface="Calibri"/>
+              </a:rPr>
+              <a:t>Guarda código e imagen</a:t>
             </a:r>
           </a:p>
           <a:p>
             <a:pPr>
-              <a:spcAft>
-                <a:spcPts val="800"/>
-              </a:spcAft>
+              <a:spcBef>
+                <a:spcPts val="200"/>
+              </a:spcBef>
             </a:pPr>
             <a:r>
-              <a:rPr sz="2000" b="0" i="0">
+              <a:rPr sz="1300" b="0" i="0">
                 <a:solidFill>
                   <a:srgbClr val="333333"/>
                 </a:solidFill>
                 <a:latin typeface="Calibri"/>
               </a:rPr>
-              <a:t>–   Que son la columna vertebral y sin los cuales el resto no se puede evaluar, o si el repositorio no existe.</a:t>
-            </a:r>
-          </a:p>
-          <a:p>
-            <a:pPr>
-              <a:spcAft>
-                <a:spcPts val="800"/>
-              </a:spcAft>
-            </a:pPr>
-            <a:r>
-              <a:rPr sz="2000" b="0" i="0">
-                <a:solidFill>
-                  <a:srgbClr val="333333"/>
-                </a:solidFill>
-                <a:latin typeface="Calibri"/>
-              </a:rPr>
-              <a:t>–   El umbral de seis no es una ley de la ingenieria, es la contabilidad de este curso, y decirlo asi evita que el estudiante lo memorice como estandar internacional.</a:t>
-            </a:r>
-          </a:p>
-        </p:txBody>
-      </p:sp>
-      <p:sp>
-        <p:nvSpPr>
-          <p:cNvPr id="6" name="TextBox 5"/>
+              <a:t>El código es la fuente del diagrama: guárdalo con tu proyecto junto con el PNG exportado.</a:t>
+            </a:r>
+          </a:p>
+        </p:txBody>
+      </p:sp>
+      <p:sp>
+        <p:nvSpPr>
+          <p:cNvPr id="22" name="TextBox 21"/>
           <p:cNvSpPr txBox="1"/>
           <p:nvPr/>
         </p:nvSpPr>
@@ -5530,13 +6592,13 @@
         <p:spPr>
           <a:xfrm>
             <a:off x="0" y="0"/>
-            <a:ext cx="12191695" cy="960120"/>
+            <a:ext cx="12191695" cy="164592"/>
           </a:xfrm>
           <a:prstGeom prst="rect">
             <a:avLst/>
           </a:prstGeom>
           <a:solidFill>
-            <a:srgbClr val="095292"/>
+            <a:srgbClr val="269CCB"/>
           </a:solidFill>
           <a:ln>
             <a:noFill/>
@@ -5564,49 +6626,30 @@
           </a:p>
         </p:txBody>
       </p:sp>
-      <p:sp>
-        <p:nvSpPr>
-          <p:cNvPr id="3" name="Rectangle 2"/>
-          <p:cNvSpPr/>
+      <p:pic>
+        <p:nvPicPr>
+          <p:cNvPr id="3" name="Picture 2" descr="logo_uniajc_color.png"/>
+          <p:cNvPicPr>
+            <a:picLocks noChangeAspect="1"/>
+          </p:cNvPicPr>
           <p:nvPr/>
-        </p:nvSpPr>
-        <p:spPr>
-          <a:xfrm>
-            <a:off x="0" y="960120"/>
-            <a:ext cx="12191695" cy="41148"/>
-          </a:xfrm>
-          <a:prstGeom prst="rect">
-            <a:avLst/>
-          </a:prstGeom>
-          <a:solidFill>
-            <a:srgbClr val="FFD000"/>
-          </a:solidFill>
-          <a:ln>
-            <a:noFill/>
-          </a:ln>
-        </p:spPr>
-        <p:style>
-          <a:lnRef idx="1">
-            <a:schemeClr val="accent1"/>
-          </a:lnRef>
-          <a:fillRef idx="3">
-            <a:schemeClr val="accent1"/>
-          </a:fillRef>
-          <a:effectRef idx="2">
-            <a:schemeClr val="accent1"/>
-          </a:effectRef>
-          <a:fontRef idx="minor">
-            <a:schemeClr val="lt1"/>
-          </a:fontRef>
-        </p:style>
-        <p:txBody>
-          <a:bodyPr rtlCol="0" anchor="ctr"/>
-          <a:lstStyle/>
-          <a:p>
-            <a:pPr algn="ctr"/>
-          </a:p>
-        </p:txBody>
-      </p:sp>
+        </p:nvPicPr>
+        <p:blipFill>
+          <a:blip r:embed="rId2"/>
+          <a:stretch>
+            <a:fillRect/>
+          </a:stretch>
+        </p:blipFill>
+        <p:spPr>
+          <a:xfrm>
+            <a:off x="10271455" y="5998464"/>
+            <a:ext cx="1463040" cy="643233"/>
+          </a:xfrm>
+          <a:prstGeom prst="rect">
+            <a:avLst/>
+          </a:prstGeom>
+        </p:spPr>
+      </p:pic>
       <p:sp>
         <p:nvSpPr>
           <p:cNvPr id="4" name="TextBox 3"/>
@@ -5615,8 +6658,41 @@
         </p:nvSpPr>
         <p:spPr>
           <a:xfrm>
-            <a:off x="457200" y="164592"/>
-            <a:ext cx="11277295" cy="502920"/>
+            <a:off x="457200" y="1737360"/>
+            <a:ext cx="11277295" cy="1097280"/>
+          </a:xfrm>
+          <a:prstGeom prst="rect">
+            <a:avLst/>
+          </a:prstGeom>
+          <a:noFill/>
+        </p:spPr>
+        <p:txBody>
+          <a:bodyPr wrap="square" anchor="ctr"/>
+          <a:lstStyle/>
+          <a:p>
+            <a:pPr algn="ctr"/>
+            <a:r>
+              <a:rPr sz="3400" b="1" i="0">
+                <a:solidFill>
+                  <a:srgbClr val="095292"/>
+                </a:solidFill>
+                <a:latin typeface="Calibri"/>
+              </a:rPr>
+              <a:t>Clase 11 · cierre conceptual</a:t>
+            </a:r>
+          </a:p>
+        </p:txBody>
+      </p:sp>
+      <p:sp>
+        <p:nvSpPr>
+          <p:cNvPr id="5" name="TextBox 4"/>
+          <p:cNvSpPr txBox="1"/>
+          <p:nvPr/>
+        </p:nvSpPr>
+        <p:spPr>
+          <a:xfrm>
+            <a:off x="457200" y="3017520"/>
+            <a:ext cx="11277295" cy="1645920"/>
           </a:xfrm>
           <a:prstGeom prst="rect">
             <a:avLst/>
@@ -5629,28 +6705,65 @@
           </a:bodyPr>
           <a:lstStyle/>
           <a:p>
-            <a:r>
-              <a:rPr sz="2600" b="1" i="0">
-                <a:solidFill>
-                  <a:srgbClr val="FFFFFF"/>
-                </a:solidFill>
-                <a:latin typeface="Calibri"/>
-              </a:rPr>
-              <a:t>El semaforo: el umbral que decide si el proyecto va a tiempo (2/2)</a:t>
-            </a:r>
-          </a:p>
-        </p:txBody>
-      </p:sp>
-      <p:sp>
-        <p:nvSpPr>
-          <p:cNvPr id="5" name="TextBox 4"/>
+            <a:pPr algn="ctr">
+              <a:spcAft>
+                <a:spcPts val="600"/>
+              </a:spcAft>
+            </a:pPr>
+            <a:r>
+              <a:rPr sz="1600" b="0" i="0">
+                <a:solidFill>
+                  <a:srgbClr val="333333"/>
+                </a:solidFill>
+                <a:latin typeface="Calibri"/>
+              </a:rPr>
+              <a:t>Consolidar evidencias en un paquete revisable.</a:t>
+            </a:r>
+          </a:p>
+          <a:p>
+            <a:pPr algn="ctr">
+              <a:spcAft>
+                <a:spcPts val="600"/>
+              </a:spcAft>
+            </a:pPr>
+            <a:r>
+              <a:rPr sz="1600" b="0" i="0">
+                <a:solidFill>
+                  <a:srgbClr val="333333"/>
+                </a:solidFill>
+                <a:latin typeface="Calibri"/>
+              </a:rPr>
+              <a:t>Detectar huecos (nombres inconsistentes, servicios de más, sin seguridad).</a:t>
+            </a:r>
+          </a:p>
+          <a:p>
+            <a:pPr algn="ctr">
+              <a:spcAft>
+                <a:spcPts val="600"/>
+              </a:spcAft>
+            </a:pPr>
+            <a:r>
+              <a:rPr sz="1600" b="0" i="0">
+                <a:solidFill>
+                  <a:srgbClr val="333333"/>
+                </a:solidFill>
+                <a:latin typeface="Calibri"/>
+              </a:rPr>
+              <a:t>Salir con backlog claro hacia Clase 12/15.</a:t>
+            </a:r>
+          </a:p>
+        </p:txBody>
+      </p:sp>
+      <p:sp>
+        <p:nvSpPr>
+          <p:cNvPr id="6" name="TextBox 5"/>
           <p:cNvSpPr txBox="1"/>
           <p:nvPr/>
         </p:nvSpPr>
         <p:spPr>
           <a:xfrm>
-            <a:off x="457200" y="1170432"/>
-            <a:ext cx="11277295" cy="5230368"/>
+            <a:off x="457200" y="4754880"/>
+            <a:ext cx="11277295" cy="640080"/>
           </a:xfrm>
           <a:prstGeom prst="rect">
             <a:avLst/>
@@ -5663,2085 +6776,15 @@
           </a:bodyPr>
           <a:lstStyle/>
           <a:p>
-            <a:pPr>
-              <a:spcAft>
-                <a:spcPts val="800"/>
-              </a:spcAft>
-            </a:pPr>
-            <a:r>
-              <a:rPr sz="2000" b="0" i="0">
-                <a:solidFill>
-                  <a:srgbClr val="333333"/>
-                </a:solidFill>
-                <a:latin typeface="Calibri"/>
-              </a:rPr>
-              <a:t>–   Lo transferible es la idea de fondo: un checkpoint se evalua por evidencia presente, no por promesas.</a:t>
-            </a:r>
-          </a:p>
-          <a:p>
-            <a:pPr>
-              <a:spcAft>
-                <a:spcPts val="800"/>
-              </a:spcAft>
-            </a:pPr>
-            <a:r>
-              <a:rPr sz="2000" b="0" i="0">
-                <a:solidFill>
-                  <a:srgbClr val="333333"/>
-                </a:solidFill>
-                <a:latin typeface="Calibri"/>
-              </a:rPr>
-              <a:t>–   Cuando un estudiante dice "eso ya lo tenemos, solo falta subirlo", el estado es amarillo y el acta lo registra con fecha de cierre; no es desconfianza, es que en un proyecto lo que no esta en el repositorio no existe.</a:t>
-            </a:r>
-          </a:p>
-          <a:p>
-            <a:pPr>
-              <a:spcAft>
-                <a:spcPts val="800"/>
-              </a:spcAft>
-            </a:pPr>
-            <a:r>
-              <a:rPr sz="2000" b="0" i="0">
-                <a:solidFill>
-                  <a:srgbClr val="333333"/>
-                </a:solidFill>
-                <a:latin typeface="Calibri"/>
-              </a:rPr>
-              <a:t>–   Para un proyecto en rojo el plan de recuperacion debe reducir alcance, nunca agregar trabajo: menos capacidades, menos servicios, y toda la energia en las dos piezas que faltan.</a:t>
-            </a:r>
-          </a:p>
-        </p:txBody>
-      </p:sp>
-      <p:sp>
-        <p:nvSpPr>
-          <p:cNvPr id="6" name="TextBox 5"/>
-          <p:cNvSpPr txBox="1"/>
-          <p:nvPr/>
-        </p:nvSpPr>
-        <p:spPr>
-          <a:xfrm>
-            <a:off x="11185855" y="6473952"/>
-            <a:ext cx="640080" cy="274320"/>
-          </a:xfrm>
-          <a:prstGeom prst="rect">
-            <a:avLst/>
-          </a:prstGeom>
-          <a:noFill/>
-        </p:spPr>
-        <p:txBody>
-          <a:bodyPr wrap="square">
-            <a:spAutoFit/>
-          </a:bodyPr>
-          <a:lstStyle/>
-          <a:p>
-            <a:pPr algn="r"/>
-            <a:r>
-              <a:rPr sz="1100" b="0" i="0">
-                <a:solidFill>
-                  <a:srgbClr val="666666"/>
-                </a:solidFill>
-                <a:latin typeface="Calibri"/>
-              </a:rPr>
-              <a:t>15</a:t>
-            </a:r>
-          </a:p>
-        </p:txBody>
-      </p:sp>
-    </p:spTree>
-  </p:cSld>
-  <p:clrMapOvr>
-    <a:masterClrMapping/>
-  </p:clrMapOvr>
-</p:sld>
-</file>
-
-<file path=ppt/slides/slide16.xml><?xml version="1.0" encoding="utf-8"?>
-<p:sld xmlns:a="http://schemas.openxmlformats.org/drawingml/2006/main" xmlns:p="http://schemas.openxmlformats.org/presentationml/2006/main" xmlns:r="http://schemas.openxmlformats.org/officeDocument/2006/relationships">
-  <p:cSld>
-    <p:bg>
-      <p:bgPr>
-        <a:solidFill>
-          <a:srgbClr val="FFFFFF"/>
-        </a:solidFill>
-        <a:effectLst/>
-      </p:bgPr>
-    </p:bg>
-    <p:spTree>
-      <p:nvGrpSpPr>
-        <p:cNvPr id="1" name=""/>
-        <p:cNvGrpSpPr/>
-        <p:nvPr/>
-      </p:nvGrpSpPr>
-      <p:grpSpPr/>
-      <p:sp>
-        <p:nvSpPr>
-          <p:cNvPr id="2" name="Rectangle 1"/>
-          <p:cNvSpPr/>
-          <p:nvPr/>
-        </p:nvSpPr>
-        <p:spPr>
-          <a:xfrm>
-            <a:off x="0" y="0"/>
-            <a:ext cx="12191695" cy="960120"/>
-          </a:xfrm>
-          <a:prstGeom prst="rect">
-            <a:avLst/>
-          </a:prstGeom>
-          <a:solidFill>
-            <a:srgbClr val="095292"/>
-          </a:solidFill>
-          <a:ln>
-            <a:noFill/>
-          </a:ln>
-        </p:spPr>
-        <p:style>
-          <a:lnRef idx="1">
-            <a:schemeClr val="accent1"/>
-          </a:lnRef>
-          <a:fillRef idx="3">
-            <a:schemeClr val="accent1"/>
-          </a:fillRef>
-          <a:effectRef idx="2">
-            <a:schemeClr val="accent1"/>
-          </a:effectRef>
-          <a:fontRef idx="minor">
-            <a:schemeClr val="lt1"/>
-          </a:fontRef>
-        </p:style>
-        <p:txBody>
-          <a:bodyPr rtlCol="0" anchor="ctr"/>
-          <a:lstStyle/>
-          <a:p>
             <a:pPr algn="ctr"/>
-          </a:p>
-        </p:txBody>
-      </p:sp>
-      <p:sp>
-        <p:nvSpPr>
-          <p:cNvPr id="3" name="Rectangle 2"/>
-          <p:cNvSpPr/>
-          <p:nvPr/>
-        </p:nvSpPr>
-        <p:spPr>
-          <a:xfrm>
-            <a:off x="0" y="960120"/>
-            <a:ext cx="12191695" cy="41148"/>
-          </a:xfrm>
-          <a:prstGeom prst="rect">
-            <a:avLst/>
-          </a:prstGeom>
-          <a:solidFill>
-            <a:srgbClr val="FFD000"/>
-          </a:solidFill>
-          <a:ln>
-            <a:noFill/>
-          </a:ln>
-        </p:spPr>
-        <p:style>
-          <a:lnRef idx="1">
-            <a:schemeClr val="accent1"/>
-          </a:lnRef>
-          <a:fillRef idx="3">
-            <a:schemeClr val="accent1"/>
-          </a:fillRef>
-          <a:effectRef idx="2">
-            <a:schemeClr val="accent1"/>
-          </a:effectRef>
-          <a:fontRef idx="minor">
-            <a:schemeClr val="lt1"/>
-          </a:fontRef>
-        </p:style>
-        <p:txBody>
-          <a:bodyPr rtlCol="0" anchor="ctr"/>
-          <a:lstStyle/>
-          <a:p>
-            <a:pPr algn="ctr"/>
-          </a:p>
-        </p:txBody>
-      </p:sp>
-      <p:sp>
-        <p:nvSpPr>
-          <p:cNvPr id="4" name="TextBox 3"/>
-          <p:cNvSpPr txBox="1"/>
-          <p:nvPr/>
-        </p:nvSpPr>
-        <p:spPr>
-          <a:xfrm>
-            <a:off x="457200" y="164592"/>
-            <a:ext cx="11277295" cy="502920"/>
-          </a:xfrm>
-          <a:prstGeom prst="rect">
-            <a:avLst/>
-          </a:prstGeom>
-          <a:noFill/>
-        </p:spPr>
-        <p:txBody>
-          <a:bodyPr wrap="square">
-            <a:spAutoFit/>
-          </a:bodyPr>
-          <a:lstStyle/>
-          <a:p>
-            <a:r>
-              <a:rPr sz="2600" b="1" i="0">
-                <a:solidFill>
-                  <a:srgbClr val="FFFFFF"/>
-                </a:solidFill>
-                <a:latin typeface="Calibri"/>
-              </a:rPr>
-              <a:t>Preguntas frecuentes y cierre conceptual () (1/2)</a:t>
-            </a:r>
-          </a:p>
-        </p:txBody>
-      </p:sp>
-      <p:sp>
-        <p:nvSpPr>
-          <p:cNvPr id="5" name="TextBox 4"/>
-          <p:cNvSpPr txBox="1"/>
-          <p:nvPr/>
-        </p:nvSpPr>
-        <p:spPr>
-          <a:xfrm>
-            <a:off x="457200" y="1170432"/>
-            <a:ext cx="11277295" cy="5230368"/>
-          </a:xfrm>
-          <a:prstGeom prst="rect">
-            <a:avLst/>
-          </a:prstGeom>
-          <a:noFill/>
-        </p:spPr>
-        <p:txBody>
-          <a:bodyPr wrap="square">
-            <a:spAutoFit/>
-          </a:bodyPr>
-          <a:lstStyle/>
-          <a:p>
-            <a:pPr>
-              <a:spcAft>
-                <a:spcPts val="800"/>
-              </a:spcAft>
-            </a:pPr>
-            <a:r>
-              <a:rPr sz="2000" b="0" i="0">
-                <a:solidFill>
-                  <a:srgbClr val="333333"/>
-                </a:solidFill>
-                <a:latin typeface="Calibri"/>
-              </a:rPr>
-              <a:t>–   Error tipico del docente que no domina el tema: dejar pasar el checkpoint con un "todo bien, sigan asi".</a:t>
-            </a:r>
-          </a:p>
-          <a:p>
-            <a:pPr>
-              <a:spcAft>
-                <a:spcPts val="800"/>
-              </a:spcAft>
-            </a:pPr>
-            <a:r>
-              <a:rPr sz="2000" b="0" i="0">
-                <a:solidFill>
-                  <a:srgbClr val="333333"/>
-                </a:solidFill>
-                <a:latin typeface="Calibri"/>
-              </a:rPr>
-              <a:t>–   La consecuencia no se ve hoy, se ve en la Clase 15, cuando varios estudiantes sustentan con la base de datos expuesta, con servicios que no son servicios y con nueve capacidades que nunca cerraron</a:t>
-            </a:r>
-          </a:p>
-          <a:p>
-            <a:pPr>
-              <a:spcAft>
-                <a:spcPts val="800"/>
-              </a:spcAft>
-            </a:pPr>
-            <a:r>
-              <a:rPr sz="2000" b="0" i="0">
-                <a:solidFill>
-                  <a:srgbClr val="333333"/>
-                </a:solidFill>
-                <a:latin typeface="Calibri"/>
-              </a:rPr>
-              <a:t>–   Y el docente descubre que las tenia todas a la vista un mes antes; ademas el estudiante interpreta el silencio como aprobacion, asi que el error queda ratificado y luego reclama con razon que nadie se lo advirtio.</a:t>
-            </a:r>
-          </a:p>
-        </p:txBody>
-      </p:sp>
-      <p:sp>
-        <p:nvSpPr>
-          <p:cNvPr id="6" name="TextBox 5"/>
-          <p:cNvSpPr txBox="1"/>
-          <p:nvPr/>
-        </p:nvSpPr>
-        <p:spPr>
-          <a:xfrm>
-            <a:off x="11185855" y="6473952"/>
-            <a:ext cx="640080" cy="274320"/>
-          </a:xfrm>
-          <a:prstGeom prst="rect">
-            <a:avLst/>
-          </a:prstGeom>
-          <a:noFill/>
-        </p:spPr>
-        <p:txBody>
-          <a:bodyPr wrap="square">
-            <a:spAutoFit/>
-          </a:bodyPr>
-          <a:lstStyle/>
-          <a:p>
-            <a:pPr algn="r"/>
-            <a:r>
-              <a:rPr sz="1100" b="0" i="0">
-                <a:solidFill>
-                  <a:srgbClr val="666666"/>
-                </a:solidFill>
-                <a:latin typeface="Calibri"/>
-              </a:rPr>
-              <a:t>16</a:t>
-            </a:r>
-          </a:p>
-        </p:txBody>
-      </p:sp>
-    </p:spTree>
-  </p:cSld>
-  <p:clrMapOvr>
-    <a:masterClrMapping/>
-  </p:clrMapOvr>
-</p:sld>
-</file>
-
-<file path=ppt/slides/slide17.xml><?xml version="1.0" encoding="utf-8"?>
-<p:sld xmlns:a="http://schemas.openxmlformats.org/drawingml/2006/main" xmlns:p="http://schemas.openxmlformats.org/presentationml/2006/main" xmlns:r="http://schemas.openxmlformats.org/officeDocument/2006/relationships">
-  <p:cSld>
-    <p:bg>
-      <p:bgPr>
-        <a:solidFill>
-          <a:srgbClr val="FFFFFF"/>
-        </a:solidFill>
-        <a:effectLst/>
-      </p:bgPr>
-    </p:bg>
-    <p:spTree>
-      <p:nvGrpSpPr>
-        <p:cNvPr id="1" name=""/>
-        <p:cNvGrpSpPr/>
-        <p:nvPr/>
-      </p:nvGrpSpPr>
-      <p:grpSpPr/>
-      <p:sp>
-        <p:nvSpPr>
-          <p:cNvPr id="2" name="Rectangle 1"/>
-          <p:cNvSpPr/>
-          <p:nvPr/>
-        </p:nvSpPr>
-        <p:spPr>
-          <a:xfrm>
-            <a:off x="0" y="0"/>
-            <a:ext cx="12191695" cy="960120"/>
-          </a:xfrm>
-          <a:prstGeom prst="rect">
-            <a:avLst/>
-          </a:prstGeom>
-          <a:solidFill>
-            <a:srgbClr val="095292"/>
-          </a:solidFill>
-          <a:ln>
-            <a:noFill/>
-          </a:ln>
-        </p:spPr>
-        <p:style>
-          <a:lnRef idx="1">
-            <a:schemeClr val="accent1"/>
-          </a:lnRef>
-          <a:fillRef idx="3">
-            <a:schemeClr val="accent1"/>
-          </a:fillRef>
-          <a:effectRef idx="2">
-            <a:schemeClr val="accent1"/>
-          </a:effectRef>
-          <a:fontRef idx="minor">
-            <a:schemeClr val="lt1"/>
-          </a:fontRef>
-        </p:style>
-        <p:txBody>
-          <a:bodyPr rtlCol="0" anchor="ctr"/>
-          <a:lstStyle/>
-          <a:p>
-            <a:pPr algn="ctr"/>
-          </a:p>
-        </p:txBody>
-      </p:sp>
-      <p:sp>
-        <p:nvSpPr>
-          <p:cNvPr id="3" name="Rectangle 2"/>
-          <p:cNvSpPr/>
-          <p:nvPr/>
-        </p:nvSpPr>
-        <p:spPr>
-          <a:xfrm>
-            <a:off x="0" y="960120"/>
-            <a:ext cx="12191695" cy="41148"/>
-          </a:xfrm>
-          <a:prstGeom prst="rect">
-            <a:avLst/>
-          </a:prstGeom>
-          <a:solidFill>
-            <a:srgbClr val="FFD000"/>
-          </a:solidFill>
-          <a:ln>
-            <a:noFill/>
-          </a:ln>
-        </p:spPr>
-        <p:style>
-          <a:lnRef idx="1">
-            <a:schemeClr val="accent1"/>
-          </a:lnRef>
-          <a:fillRef idx="3">
-            <a:schemeClr val="accent1"/>
-          </a:fillRef>
-          <a:effectRef idx="2">
-            <a:schemeClr val="accent1"/>
-          </a:effectRef>
-          <a:fontRef idx="minor">
-            <a:schemeClr val="lt1"/>
-          </a:fontRef>
-        </p:style>
-        <p:txBody>
-          <a:bodyPr rtlCol="0" anchor="ctr"/>
-          <a:lstStyle/>
-          <a:p>
-            <a:pPr algn="ctr"/>
-          </a:p>
-        </p:txBody>
-      </p:sp>
-      <p:sp>
-        <p:nvSpPr>
-          <p:cNvPr id="4" name="TextBox 3"/>
-          <p:cNvSpPr txBox="1"/>
-          <p:nvPr/>
-        </p:nvSpPr>
-        <p:spPr>
-          <a:xfrm>
-            <a:off x="457200" y="164592"/>
-            <a:ext cx="11277295" cy="502920"/>
-          </a:xfrm>
-          <a:prstGeom prst="rect">
-            <a:avLst/>
-          </a:prstGeom>
-          <a:noFill/>
-        </p:spPr>
-        <p:txBody>
-          <a:bodyPr wrap="square">
-            <a:spAutoFit/>
-          </a:bodyPr>
-          <a:lstStyle/>
-          <a:p>
-            <a:r>
-              <a:rPr sz="2600" b="1" i="0">
-                <a:solidFill>
-                  <a:srgbClr val="FFFFFF"/>
-                </a:solidFill>
-                <a:latin typeface="Calibri"/>
-              </a:rPr>
-              <a:t>Preguntas frecuentes y cierre conceptual () (2/2)</a:t>
-            </a:r>
-          </a:p>
-        </p:txBody>
-      </p:sp>
-      <p:sp>
-        <p:nvSpPr>
-          <p:cNvPr id="5" name="TextBox 4"/>
-          <p:cNvSpPr txBox="1"/>
-          <p:nvPr/>
-        </p:nvSpPr>
-        <p:spPr>
-          <a:xfrm>
-            <a:off x="457200" y="1170432"/>
-            <a:ext cx="11277295" cy="5230368"/>
-          </a:xfrm>
-          <a:prstGeom prst="rect">
-            <a:avLst/>
-          </a:prstGeom>
-          <a:noFill/>
-        </p:spPr>
-        <p:txBody>
-          <a:bodyPr wrap="square">
-            <a:spAutoFit/>
-          </a:bodyPr>
-          <a:lstStyle/>
-          <a:p>
-            <a:pPr>
-              <a:spcAft>
-                <a:spcPts val="800"/>
-              </a:spcAft>
-            </a:pPr>
-            <a:r>
-              <a:rPr sz="2000" b="0" i="0">
-                <a:solidFill>
-                  <a:srgbClr val="333333"/>
-                </a:solidFill>
-                <a:latin typeface="Calibri"/>
-              </a:rPr>
-              <a:t>–   El segundo error es convertir el checkpoint en clase magistral: cuando el docente detecta un vacio conceptual y se pone a reexplicar contenedores o STRIDE durante veinte minutos</a:t>
-            </a:r>
-          </a:p>
-          <a:p>
-            <a:pPr>
-              <a:spcAft>
-                <a:spcPts val="800"/>
-              </a:spcAft>
-            </a:pPr>
-            <a:r>
-              <a:rPr sz="2000" b="0" i="0">
-                <a:solidFill>
-                  <a:srgbClr val="333333"/>
-                </a:solidFill>
-                <a:latin typeface="Calibri"/>
-              </a:rPr>
-              <a:t>–   Se consume el tiempo de los estudiantes que faltan, la mitad del curso queda sin retroalimentacion y el acta sale a medias.</a:t>
-            </a:r>
-          </a:p>
-          <a:p>
-            <a:pPr>
-              <a:spcAft>
-                <a:spcPts val="800"/>
-              </a:spcAft>
-            </a:pPr>
-            <a:r>
-              <a:rPr sz="2000" b="0" i="0">
-                <a:solidFill>
-                  <a:srgbClr val="333333"/>
-                </a:solidFill>
-                <a:latin typeface="Calibri"/>
-              </a:rPr>
-              <a:t>–   Lo correcto es anotar el vacio, dar la accion concreta con fecha y seguir; si el vacio es general al grupo, se atiende en cinco minutos al cierre para todos, no proyecto por proyecto.</a:t>
-            </a:r>
-          </a:p>
-        </p:txBody>
-      </p:sp>
-      <p:sp>
-        <p:nvSpPr>
-          <p:cNvPr id="6" name="TextBox 5"/>
-          <p:cNvSpPr txBox="1"/>
-          <p:nvPr/>
-        </p:nvSpPr>
-        <p:spPr>
-          <a:xfrm>
-            <a:off x="11185855" y="6473952"/>
-            <a:ext cx="640080" cy="274320"/>
-          </a:xfrm>
-          <a:prstGeom prst="rect">
-            <a:avLst/>
-          </a:prstGeom>
-          <a:noFill/>
-        </p:spPr>
-        <p:txBody>
-          <a:bodyPr wrap="square">
-            <a:spAutoFit/>
-          </a:bodyPr>
-          <a:lstStyle/>
-          <a:p>
-            <a:pPr algn="r"/>
-            <a:r>
-              <a:rPr sz="1100" b="0" i="0">
-                <a:solidFill>
-                  <a:srgbClr val="666666"/>
-                </a:solidFill>
-                <a:latin typeface="Calibri"/>
-              </a:rPr>
-              <a:t>17</a:t>
-            </a:r>
-          </a:p>
-        </p:txBody>
-      </p:sp>
-    </p:spTree>
-  </p:cSld>
-  <p:clrMapOvr>
-    <a:masterClrMapping/>
-  </p:clrMapOvr>
-</p:sld>
-</file>
-
-<file path=ppt/slides/slide18.xml><?xml version="1.0" encoding="utf-8"?>
-<p:sld xmlns:a="http://schemas.openxmlformats.org/drawingml/2006/main" xmlns:p="http://schemas.openxmlformats.org/presentationml/2006/main" xmlns:r="http://schemas.openxmlformats.org/officeDocument/2006/relationships">
-  <p:cSld>
-    <p:bg>
-      <p:bgPr>
-        <a:solidFill>
-          <a:srgbClr val="FFFFFF"/>
-        </a:solidFill>
-        <a:effectLst/>
-      </p:bgPr>
-    </p:bg>
-    <p:spTree>
-      <p:nvGrpSpPr>
-        <p:cNvPr id="1" name=""/>
-        <p:cNvGrpSpPr/>
-        <p:nvPr/>
-      </p:nvGrpSpPr>
-      <p:grpSpPr/>
-      <p:sp>
-        <p:nvSpPr>
-          <p:cNvPr id="2" name="Rectangle 1"/>
-          <p:cNvSpPr/>
-          <p:nvPr/>
-        </p:nvSpPr>
-        <p:spPr>
-          <a:xfrm>
-            <a:off x="0" y="0"/>
-            <a:ext cx="12191695" cy="960120"/>
-          </a:xfrm>
-          <a:prstGeom prst="rect">
-            <a:avLst/>
-          </a:prstGeom>
-          <a:solidFill>
-            <a:srgbClr val="095292"/>
-          </a:solidFill>
-          <a:ln>
-            <a:noFill/>
-          </a:ln>
-        </p:spPr>
-        <p:style>
-          <a:lnRef idx="1">
-            <a:schemeClr val="accent1"/>
-          </a:lnRef>
-          <a:fillRef idx="3">
-            <a:schemeClr val="accent1"/>
-          </a:fillRef>
-          <a:effectRef idx="2">
-            <a:schemeClr val="accent1"/>
-          </a:effectRef>
-          <a:fontRef idx="minor">
-            <a:schemeClr val="lt1"/>
-          </a:fontRef>
-        </p:style>
-        <p:txBody>
-          <a:bodyPr rtlCol="0" anchor="ctr"/>
-          <a:lstStyle/>
-          <a:p>
-            <a:pPr algn="ctr"/>
-          </a:p>
-        </p:txBody>
-      </p:sp>
-      <p:sp>
-        <p:nvSpPr>
-          <p:cNvPr id="3" name="Rectangle 2"/>
-          <p:cNvSpPr/>
-          <p:nvPr/>
-        </p:nvSpPr>
-        <p:spPr>
-          <a:xfrm>
-            <a:off x="0" y="960120"/>
-            <a:ext cx="12191695" cy="41148"/>
-          </a:xfrm>
-          <a:prstGeom prst="rect">
-            <a:avLst/>
-          </a:prstGeom>
-          <a:solidFill>
-            <a:srgbClr val="FFD000"/>
-          </a:solidFill>
-          <a:ln>
-            <a:noFill/>
-          </a:ln>
-        </p:spPr>
-        <p:style>
-          <a:lnRef idx="1">
-            <a:schemeClr val="accent1"/>
-          </a:lnRef>
-          <a:fillRef idx="3">
-            <a:schemeClr val="accent1"/>
-          </a:fillRef>
-          <a:effectRef idx="2">
-            <a:schemeClr val="accent1"/>
-          </a:effectRef>
-          <a:fontRef idx="minor">
-            <a:schemeClr val="lt1"/>
-          </a:fontRef>
-        </p:style>
-        <p:txBody>
-          <a:bodyPr rtlCol="0" anchor="ctr"/>
-          <a:lstStyle/>
-          <a:p>
-            <a:pPr algn="ctr"/>
-          </a:p>
-        </p:txBody>
-      </p:sp>
-      <p:sp>
-        <p:nvSpPr>
-          <p:cNvPr id="4" name="TextBox 3"/>
-          <p:cNvSpPr txBox="1"/>
-          <p:nvPr/>
-        </p:nvSpPr>
-        <p:spPr>
-          <a:xfrm>
-            <a:off x="457200" y="164592"/>
-            <a:ext cx="11277295" cy="502920"/>
-          </a:xfrm>
-          <a:prstGeom prst="rect">
-            <a:avLst/>
-          </a:prstGeom>
-          <a:noFill/>
-        </p:spPr>
-        <p:txBody>
-          <a:bodyPr wrap="square">
-            <a:spAutoFit/>
-          </a:bodyPr>
-          <a:lstStyle/>
-          <a:p>
-            <a:r>
-              <a:rPr sz="2600" b="1" i="0">
-                <a:solidFill>
-                  <a:srgbClr val="FFFFFF"/>
-                </a:solidFill>
-                <a:latin typeface="Calibri"/>
-              </a:rPr>
-              <a:t>El C4 Component: por dentro de la API</a:t>
-            </a:r>
-          </a:p>
-        </p:txBody>
-      </p:sp>
-      <p:sp>
-        <p:nvSpPr>
-          <p:cNvPr id="5" name="Rounded Rectangle 4"/>
-          <p:cNvSpPr/>
-          <p:nvPr/>
-        </p:nvSpPr>
-        <p:spPr>
-          <a:xfrm>
-            <a:off x="457200" y="1261872"/>
-            <a:ext cx="11277295" cy="5093208"/>
-          </a:xfrm>
-          <a:prstGeom prst="roundRect">
-            <a:avLst>
-              <a:gd name="adj" fmla="val 12000"/>
-            </a:avLst>
-          </a:prstGeom>
-          <a:solidFill>
-            <a:srgbClr val="1E2A38"/>
-          </a:solidFill>
-          <a:ln>
-            <a:noFill/>
-          </a:ln>
-        </p:spPr>
-        <p:style>
-          <a:lnRef idx="1">
-            <a:schemeClr val="accent1"/>
-          </a:lnRef>
-          <a:fillRef idx="3">
-            <a:schemeClr val="accent1"/>
-          </a:fillRef>
-          <a:effectRef idx="2">
-            <a:schemeClr val="accent1"/>
-          </a:effectRef>
-          <a:fontRef idx="minor">
-            <a:schemeClr val="lt1"/>
-          </a:fontRef>
-        </p:style>
-        <p:txBody>
-          <a:bodyPr rtlCol="0" anchor="ctr"/>
-          <a:lstStyle/>
-          <a:p>
-            <a:pPr algn="ctr"/>
-          </a:p>
-        </p:txBody>
-      </p:sp>
-      <p:sp>
-        <p:nvSpPr>
-          <p:cNvPr id="6" name="Rectangle 5"/>
-          <p:cNvSpPr/>
-          <p:nvPr/>
-        </p:nvSpPr>
-        <p:spPr>
-          <a:xfrm>
-            <a:off x="457200" y="1261872"/>
-            <a:ext cx="11277295" cy="320040"/>
-          </a:xfrm>
-          <a:prstGeom prst="rect">
-            <a:avLst/>
-          </a:prstGeom>
-          <a:solidFill>
-            <a:srgbClr val="095292"/>
-          </a:solidFill>
-          <a:ln>
-            <a:noFill/>
-          </a:ln>
-        </p:spPr>
-        <p:style>
-          <a:lnRef idx="1">
-            <a:schemeClr val="accent1"/>
-          </a:lnRef>
-          <a:fillRef idx="3">
-            <a:schemeClr val="accent1"/>
-          </a:fillRef>
-          <a:effectRef idx="2">
-            <a:schemeClr val="accent1"/>
-          </a:effectRef>
-          <a:fontRef idx="minor">
-            <a:schemeClr val="lt1"/>
-          </a:fontRef>
-        </p:style>
-        <p:txBody>
-          <a:bodyPr rtlCol="0" anchor="ctr"/>
-          <a:lstStyle/>
-          <a:p>
-            <a:pPr algn="ctr"/>
-          </a:p>
-        </p:txBody>
-      </p:sp>
-      <p:sp>
-        <p:nvSpPr>
-          <p:cNvPr id="7" name="TextBox 6"/>
-          <p:cNvSpPr txBox="1"/>
-          <p:nvPr/>
-        </p:nvSpPr>
-        <p:spPr>
-          <a:xfrm>
-            <a:off x="685800" y="1307592"/>
-            <a:ext cx="10820095" cy="256032"/>
-          </a:xfrm>
-          <a:prstGeom prst="rect">
-            <a:avLst/>
-          </a:prstGeom>
-          <a:noFill/>
-        </p:spPr>
-        <p:txBody>
-          <a:bodyPr wrap="square" anchor="ctr"/>
-          <a:lstStyle/>
-          <a:p>
-            <a:r>
-              <a:rPr sz="1000" b="1" i="0">
+            <a:r>
+              <a:rPr sz="2000" b="1" i="0">
                 <a:solidFill>
                   <a:srgbClr val="269CCB"/>
                 </a:solidFill>
                 <a:latin typeface="Calibri"/>
               </a:rPr>
-              <a:t>● ● ●</a:t>
-            </a:r>
-          </a:p>
-        </p:txBody>
-      </p:sp>
-      <p:sp>
-        <p:nvSpPr>
-          <p:cNvPr id="8" name="TextBox 7"/>
-          <p:cNvSpPr txBox="1"/>
-          <p:nvPr/>
-        </p:nvSpPr>
-        <p:spPr>
-          <a:xfrm>
-            <a:off x="777240" y="1719072"/>
-            <a:ext cx="10637215" cy="4453128"/>
-          </a:xfrm>
-          <a:prstGeom prst="rect">
-            <a:avLst/>
-          </a:prstGeom>
-          <a:noFill/>
-        </p:spPr>
-        <p:txBody>
-          <a:bodyPr wrap="square">
-            <a:spAutoFit/>
-          </a:bodyPr>
-          <a:lstStyle/>
-          <a:p>
-            <a:pPr>
-              <a:spcAft>
-                <a:spcPts val="371"/>
-              </a:spcAft>
-            </a:pPr>
-            <a:r>
-              <a:rPr sz="1300" b="0" i="0">
-                <a:solidFill>
-                  <a:srgbClr val="FFFFFF"/>
-                </a:solidFill>
-                <a:latin typeface="Calibri"/>
-              </a:rPr>
-              <a:t>flowchart TB</a:t>
-            </a:r>
-          </a:p>
-          <a:p>
-            <a:pPr>
-              <a:spcAft>
-                <a:spcPts val="371"/>
-              </a:spcAft>
-            </a:pPr>
-            <a:r>
-              <a:rPr sz="1300" b="0" i="0">
-                <a:solidFill>
-                  <a:srgbClr val="FFFFFF"/>
-                </a:solidFill>
-                <a:latin typeface="Calibri"/>
-              </a:rPr>
-              <a:t>  subgraph api[API REST de la app - Node + Express]</a:t>
-            </a:r>
-          </a:p>
-          <a:p>
-            <a:pPr>
-              <a:spcAft>
-                <a:spcPts val="371"/>
-              </a:spcAft>
-            </a:pPr>
-            <a:r>
-              <a:rPr sz="1300" b="0" i="0">
-                <a:solidFill>
-                  <a:srgbClr val="FFFFFF"/>
-                </a:solidFill>
-                <a:latin typeface="Calibri"/>
-              </a:rPr>
-              <a:t>    rutas[Capa de rutas&lt;br/&gt;valida entrada y responde HTTP]</a:t>
-            </a:r>
-          </a:p>
-          <a:p>
-            <a:pPr>
-              <a:spcAft>
-                <a:spcPts val="371"/>
-              </a:spcAft>
-            </a:pPr>
-            <a:r>
-              <a:rPr sz="1300" b="0" i="0">
-                <a:solidFill>
-                  <a:srgbClr val="FFFFFF"/>
-                </a:solidFill>
-                <a:latin typeface="Calibri"/>
-              </a:rPr>
-              <a:t>    servicio[Servicio de dominio&lt;br/&gt;reglas de &lt;su dominio&gt;]</a:t>
-            </a:r>
-          </a:p>
-          <a:p>
-            <a:pPr>
-              <a:spcAft>
-                <a:spcPts val="371"/>
-              </a:spcAft>
-            </a:pPr>
-            <a:r>
-              <a:rPr sz="1300" b="0" i="0">
-                <a:solidFill>
-                  <a:srgbClr val="FFFFFF"/>
-                </a:solidFill>
-                <a:latin typeface="Calibri"/>
-              </a:rPr>
-              <a:t>    repo[Repositorio&lt;br/&gt;consultas SQL]</a:t>
-            </a:r>
-          </a:p>
-          <a:p>
-            <a:pPr>
-              <a:spcAft>
-                <a:spcPts val="371"/>
-              </a:spcAft>
-            </a:pPr>
-            <a:r>
-              <a:rPr sz="1300" b="0" i="0">
-                <a:solidFill>
-                  <a:srgbClr val="FFFFFF"/>
-                </a:solidFill>
-                <a:latin typeface="Calibri"/>
-              </a:rPr>
-              <a:t>    auth[Autenticacion&lt;br/&gt;verifica el token]</a:t>
-            </a:r>
-          </a:p>
-          <a:p>
-            <a:pPr>
-              <a:spcAft>
-                <a:spcPts val="371"/>
-              </a:spcAft>
-            </a:pPr>
-            <a:r>
-              <a:rPr sz="1300" b="0" i="0">
-                <a:solidFill>
-                  <a:srgbClr val="FFFFFF"/>
-                </a:solidFill>
-                <a:latin typeface="Calibri"/>
-              </a:rPr>
-              <a:t>  end</a:t>
-            </a:r>
-          </a:p>
-          <a:p>
-            <a:pPr>
-              <a:spcAft>
-                <a:spcPts val="371"/>
-              </a:spcAft>
-            </a:pPr>
-            <a:r>
-              <a:rPr sz="1300" b="0" i="0">
-                <a:solidFill>
-                  <a:srgbClr val="FFFFFF"/>
-                </a:solidFill>
-                <a:latin typeface="Calibri"/>
-              </a:rPr>
-              <a:t/>
-            </a:r>
-          </a:p>
-          <a:p>
-            <a:pPr>
-              <a:spcAft>
-                <a:spcPts val="371"/>
-              </a:spcAft>
-            </a:pPr>
-            <a:r>
-              <a:rPr sz="1300" b="0" i="0">
-                <a:solidFill>
-                  <a:srgbClr val="FFFFFF"/>
-                </a:solidFill>
-                <a:latin typeface="Calibri"/>
-              </a:rPr>
-              <a:t>  web[Web SPA] --&gt;|JSON/HTTPS| rutas</a:t>
-            </a:r>
-          </a:p>
-          <a:p>
-            <a:pPr>
-              <a:spcAft>
-                <a:spcPts val="371"/>
-              </a:spcAft>
-            </a:pPr>
-            <a:r>
-              <a:rPr sz="1300" b="0" i="0">
-                <a:solidFill>
-                  <a:srgbClr val="FFFFFF"/>
-                </a:solidFill>
-                <a:latin typeface="Calibri"/>
-              </a:rPr>
-              <a:t>  rutas --&gt; auth</a:t>
-            </a:r>
-          </a:p>
-          <a:p>
-            <a:pPr>
-              <a:spcAft>
-                <a:spcPts val="371"/>
-              </a:spcAft>
-            </a:pPr>
-            <a:r>
-              <a:rPr sz="1300" b="0" i="0">
-                <a:solidFill>
-                  <a:srgbClr val="FFFFFF"/>
-                </a:solidFill>
-                <a:latin typeface="Calibri"/>
-              </a:rPr>
-              <a:t>  rutas --&gt; servicio</a:t>
-            </a:r>
-          </a:p>
-          <a:p>
-            <a:pPr>
-              <a:spcAft>
-                <a:spcPts val="371"/>
-              </a:spcAft>
-            </a:pPr>
-            <a:r>
-              <a:rPr sz="1300" b="0" i="0">
-                <a:solidFill>
-                  <a:srgbClr val="FFFFFF"/>
-                </a:solidFill>
-                <a:latin typeface="Calibri"/>
-              </a:rPr>
-              <a:t>  servicio --&gt; repo</a:t>
-            </a:r>
-          </a:p>
-          <a:p>
-            <a:pPr>
-              <a:spcAft>
-                <a:spcPts val="371"/>
-              </a:spcAft>
-            </a:pPr>
-            <a:r>
-              <a:rPr sz="1300" b="0" i="0">
-                <a:solidFill>
-                  <a:srgbClr val="FFFFFF"/>
-                </a:solidFill>
-                <a:latin typeface="Calibri"/>
-              </a:rPr>
-              <a:t>  repo --&gt;|SQL| db[(PostgreSQL)]</a:t>
-            </a:r>
-          </a:p>
-          <a:p>
-            <a:pPr>
-              <a:spcAft>
-                <a:spcPts val="371"/>
-              </a:spcAft>
-            </a:pPr>
-            <a:r>
-              <a:rPr sz="1300" b="0" i="0">
-                <a:solidFill>
-                  <a:srgbClr val="FFFFFF"/>
-                </a:solidFill>
-                <a:latin typeface="Calibri"/>
-              </a:rPr>
-              <a:t/>
-            </a:r>
-          </a:p>
-          <a:p>
-            <a:pPr>
-              <a:spcAft>
-                <a:spcPts val="371"/>
-              </a:spcAft>
-            </a:pPr>
-            <a:r>
-              <a:rPr sz="1300" b="0" i="0">
-                <a:solidFill>
-                  <a:srgbClr val="FFFFFF"/>
-                </a:solidFill>
-                <a:latin typeface="Calibri"/>
-              </a:rPr>
-              <a:t>%% La regla del nivel Component: las cajas son piezas de CODIGO dentro</a:t>
-            </a:r>
-          </a:p>
-          <a:p>
-            <a:pPr>
-              <a:spcAft>
-                <a:spcPts val="371"/>
-              </a:spcAft>
-            </a:pPr>
-            <a:r>
-              <a:rPr sz="1300" b="0" i="0">
-                <a:solidFill>
-                  <a:srgbClr val="FFFFFF"/>
-                </a:solidFill>
-                <a:latin typeface="Calibri"/>
-              </a:rPr>
-              <a:t>%% de UN container, no servicios nuevos. Si le pone un puerto, es un</a:t>
-            </a:r>
-          </a:p>
-          <a:p>
-            <a:pPr>
-              <a:spcAft>
-                <a:spcPts val="371"/>
-              </a:spcAft>
-            </a:pPr>
-            <a:r>
-              <a:rPr sz="1300" b="0" i="0">
-                <a:solidFill>
-                  <a:srgbClr val="FFFFFF"/>
-                </a:solidFill>
-                <a:latin typeface="Calibri"/>
-              </a:rPr>
-              <a:t>%% container y va en el diagrama de la Clase 4.</a:t>
-            </a:r>
-          </a:p>
-        </p:txBody>
-      </p:sp>
-      <p:sp>
-        <p:nvSpPr>
-          <p:cNvPr id="9" name="TextBox 8"/>
-          <p:cNvSpPr txBox="1"/>
-          <p:nvPr/>
-        </p:nvSpPr>
-        <p:spPr>
-          <a:xfrm>
-            <a:off x="11185855" y="6473952"/>
-            <a:ext cx="640080" cy="274320"/>
-          </a:xfrm>
-          <a:prstGeom prst="rect">
-            <a:avLst/>
-          </a:prstGeom>
-          <a:noFill/>
-        </p:spPr>
-        <p:txBody>
-          <a:bodyPr wrap="square">
-            <a:spAutoFit/>
-          </a:bodyPr>
-          <a:lstStyle/>
-          <a:p>
-            <a:pPr algn="r"/>
-            <a:r>
-              <a:rPr sz="1100" b="0" i="0">
-                <a:solidFill>
-                  <a:srgbClr val="666666"/>
-                </a:solidFill>
-                <a:latin typeface="Calibri"/>
-              </a:rPr>
-              <a:t>18</a:t>
-            </a:r>
-          </a:p>
-        </p:txBody>
-      </p:sp>
-    </p:spTree>
-  </p:cSld>
-  <p:clrMapOvr>
-    <a:masterClrMapping/>
-  </p:clrMapOvr>
-</p:sld>
-</file>
-
-<file path=ppt/slides/slide19.xml><?xml version="1.0" encoding="utf-8"?>
-<p:sld xmlns:a="http://schemas.openxmlformats.org/drawingml/2006/main" xmlns:p="http://schemas.openxmlformats.org/presentationml/2006/main" xmlns:r="http://schemas.openxmlformats.org/officeDocument/2006/relationships">
-  <p:cSld>
-    <p:bg>
-      <p:bgPr>
-        <a:solidFill>
-          <a:srgbClr val="FFFFFF"/>
-        </a:solidFill>
-        <a:effectLst/>
-      </p:bgPr>
-    </p:bg>
-    <p:spTree>
-      <p:nvGrpSpPr>
-        <p:cNvPr id="1" name=""/>
-        <p:cNvGrpSpPr/>
-        <p:nvPr/>
-      </p:nvGrpSpPr>
-      <p:grpSpPr/>
-      <p:sp>
-        <p:nvSpPr>
-          <p:cNvPr id="2" name="Rectangle 1"/>
-          <p:cNvSpPr/>
-          <p:nvPr/>
-        </p:nvSpPr>
-        <p:spPr>
-          <a:xfrm>
-            <a:off x="0" y="0"/>
-            <a:ext cx="12191695" cy="1170432"/>
-          </a:xfrm>
-          <a:prstGeom prst="rect">
-            <a:avLst/>
-          </a:prstGeom>
-          <a:solidFill>
-            <a:srgbClr val="095292"/>
-          </a:solidFill>
-          <a:ln>
-            <a:noFill/>
-          </a:ln>
-        </p:spPr>
-        <p:style>
-          <a:lnRef idx="1">
-            <a:schemeClr val="accent1"/>
-          </a:lnRef>
-          <a:fillRef idx="3">
-            <a:schemeClr val="accent1"/>
-          </a:fillRef>
-          <a:effectRef idx="2">
-            <a:schemeClr val="accent1"/>
-          </a:effectRef>
-          <a:fontRef idx="minor">
-            <a:schemeClr val="lt1"/>
-          </a:fontRef>
-        </p:style>
-        <p:txBody>
-          <a:bodyPr rtlCol="0" anchor="ctr"/>
-          <a:lstStyle/>
-          <a:p>
-            <a:pPr algn="ctr"/>
-          </a:p>
-        </p:txBody>
-      </p:sp>
-      <p:sp>
-        <p:nvSpPr>
-          <p:cNvPr id="3" name="Rectangle 2"/>
-          <p:cNvSpPr/>
-          <p:nvPr/>
-        </p:nvSpPr>
-        <p:spPr>
-          <a:xfrm>
-            <a:off x="0" y="1170432"/>
-            <a:ext cx="12191695" cy="41148"/>
-          </a:xfrm>
-          <a:prstGeom prst="rect">
-            <a:avLst/>
-          </a:prstGeom>
-          <a:solidFill>
-            <a:srgbClr val="FFD000"/>
-          </a:solidFill>
-          <a:ln>
-            <a:noFill/>
-          </a:ln>
-        </p:spPr>
-        <p:style>
-          <a:lnRef idx="1">
-            <a:schemeClr val="accent1"/>
-          </a:lnRef>
-          <a:fillRef idx="3">
-            <a:schemeClr val="accent1"/>
-          </a:fillRef>
-          <a:effectRef idx="2">
-            <a:schemeClr val="accent1"/>
-          </a:effectRef>
-          <a:fontRef idx="minor">
-            <a:schemeClr val="lt1"/>
-          </a:fontRef>
-        </p:style>
-        <p:txBody>
-          <a:bodyPr rtlCol="0" anchor="ctr"/>
-          <a:lstStyle/>
-          <a:p>
-            <a:pPr algn="ctr"/>
-          </a:p>
-        </p:txBody>
-      </p:sp>
-      <p:sp>
-        <p:nvSpPr>
-          <p:cNvPr id="4" name="TextBox 3"/>
-          <p:cNvSpPr txBox="1"/>
-          <p:nvPr/>
-        </p:nvSpPr>
-        <p:spPr>
-          <a:xfrm>
-            <a:off x="457200" y="164592"/>
-            <a:ext cx="11277295" cy="384048"/>
-          </a:xfrm>
-          <a:prstGeom prst="rect">
-            <a:avLst/>
-          </a:prstGeom>
-          <a:noFill/>
-        </p:spPr>
-        <p:txBody>
-          <a:bodyPr wrap="square">
-            <a:spAutoFit/>
-          </a:bodyPr>
-          <a:lstStyle/>
-          <a:p>
-            <a:r>
-              <a:rPr sz="2600" b="1" i="0">
-                <a:solidFill>
-                  <a:srgbClr val="FFFFFF"/>
-                </a:solidFill>
-                <a:latin typeface="Calibri"/>
-              </a:rPr>
-              <a:t>Del boceto al código Mermaid</a:t>
-            </a:r>
-          </a:p>
-        </p:txBody>
-      </p:sp>
-      <p:sp>
-        <p:nvSpPr>
-          <p:cNvPr id="5" name="TextBox 4"/>
-          <p:cNvSpPr txBox="1"/>
-          <p:nvPr/>
-        </p:nvSpPr>
-        <p:spPr>
-          <a:xfrm>
-            <a:off x="457200" y="566928"/>
-            <a:ext cx="11277295" cy="411480"/>
-          </a:xfrm>
-          <a:prstGeom prst="rect">
-            <a:avLst/>
-          </a:prstGeom>
-          <a:noFill/>
-        </p:spPr>
-        <p:txBody>
-          <a:bodyPr wrap="square">
-            <a:spAutoFit/>
-          </a:bodyPr>
-          <a:lstStyle/>
-          <a:p>
-            <a:r>
-              <a:rPr sz="1400" b="0" i="0">
-                <a:solidFill>
-                  <a:srgbClr val="B8D8EE"/>
-                </a:solidFill>
-                <a:latin typeface="Calibri"/>
-              </a:rPr>
-              <a:t>El diagrama se escribe como código: se versiona, se compara y se corrige</a:t>
-            </a:r>
-          </a:p>
-        </p:txBody>
-      </p:sp>
-      <p:sp>
-        <p:nvSpPr>
-          <p:cNvPr id="6" name="Rounded Rectangle 5"/>
-          <p:cNvSpPr/>
-          <p:nvPr/>
-        </p:nvSpPr>
-        <p:spPr>
-          <a:xfrm>
-            <a:off x="457200" y="1659636"/>
-            <a:ext cx="11277295" cy="1051560"/>
-          </a:xfrm>
-          <a:prstGeom prst="roundRect">
-            <a:avLst>
-              <a:gd name="adj" fmla="val 12000"/>
-            </a:avLst>
-          </a:prstGeom>
-          <a:solidFill>
-            <a:srgbClr val="F2F2F2"/>
-          </a:solidFill>
-          <a:ln>
-            <a:noFill/>
-          </a:ln>
-        </p:spPr>
-        <p:style>
-          <a:lnRef idx="1">
-            <a:schemeClr val="accent1"/>
-          </a:lnRef>
-          <a:fillRef idx="3">
-            <a:schemeClr val="accent1"/>
-          </a:fillRef>
-          <a:effectRef idx="2">
-            <a:schemeClr val="accent1"/>
-          </a:effectRef>
-          <a:fontRef idx="minor">
-            <a:schemeClr val="lt1"/>
-          </a:fontRef>
-        </p:style>
-        <p:txBody>
-          <a:bodyPr rtlCol="0" anchor="ctr"/>
-          <a:lstStyle/>
-          <a:p>
-            <a:pPr algn="ctr"/>
-          </a:p>
-        </p:txBody>
-      </p:sp>
-      <p:sp>
-        <p:nvSpPr>
-          <p:cNvPr id="7" name="Rounded Rectangle 6"/>
-          <p:cNvSpPr/>
-          <p:nvPr/>
-        </p:nvSpPr>
-        <p:spPr>
-          <a:xfrm>
-            <a:off x="594360" y="1965960"/>
-            <a:ext cx="438912" cy="438912"/>
-          </a:xfrm>
-          <a:prstGeom prst="roundRect">
-            <a:avLst>
-              <a:gd name="adj" fmla="val 12000"/>
-            </a:avLst>
-          </a:prstGeom>
-          <a:solidFill>
-            <a:srgbClr val="095292"/>
-          </a:solidFill>
-          <a:ln>
-            <a:noFill/>
-          </a:ln>
-        </p:spPr>
-        <p:style>
-          <a:lnRef idx="1">
-            <a:schemeClr val="accent1"/>
-          </a:lnRef>
-          <a:fillRef idx="3">
-            <a:schemeClr val="accent1"/>
-          </a:fillRef>
-          <a:effectRef idx="2">
-            <a:schemeClr val="accent1"/>
-          </a:effectRef>
-          <a:fontRef idx="minor">
-            <a:schemeClr val="lt1"/>
-          </a:fontRef>
-        </p:style>
-        <p:txBody>
-          <a:bodyPr rtlCol="0" anchor="ctr"/>
-          <a:lstStyle/>
-          <a:p>
-            <a:pPr algn="ctr"/>
-          </a:p>
-        </p:txBody>
-      </p:sp>
-      <p:sp>
-        <p:nvSpPr>
-          <p:cNvPr id="8" name="TextBox 7"/>
-          <p:cNvSpPr txBox="1"/>
-          <p:nvPr/>
-        </p:nvSpPr>
-        <p:spPr>
-          <a:xfrm>
-            <a:off x="594360" y="1965960"/>
-            <a:ext cx="438912" cy="438912"/>
-          </a:xfrm>
-          <a:prstGeom prst="rect">
-            <a:avLst/>
-          </a:prstGeom>
-          <a:noFill/>
-        </p:spPr>
-        <p:txBody>
-          <a:bodyPr wrap="square" anchor="ctr"/>
-          <a:lstStyle/>
-          <a:p>
-            <a:pPr algn="ctr"/>
-            <a:r>
-              <a:rPr sz="1600" b="1" i="0">
-                <a:solidFill>
-                  <a:srgbClr val="FFFFFF"/>
-                </a:solidFill>
-                <a:latin typeface="Calibri"/>
-              </a:rPr>
-              <a:t>1</a:t>
-            </a:r>
-          </a:p>
-        </p:txBody>
-      </p:sp>
-      <p:sp>
-        <p:nvSpPr>
-          <p:cNvPr id="9" name="TextBox 8"/>
-          <p:cNvSpPr txBox="1"/>
-          <p:nvPr/>
-        </p:nvSpPr>
-        <p:spPr>
-          <a:xfrm>
-            <a:off x="1188720" y="1751076"/>
-            <a:ext cx="10271455" cy="886968"/>
-          </a:xfrm>
-          <a:prstGeom prst="rect">
-            <a:avLst/>
-          </a:prstGeom>
-          <a:noFill/>
-        </p:spPr>
-        <p:txBody>
-          <a:bodyPr wrap="square" anchor="ctr"/>
-          <a:lstStyle/>
-          <a:p>
-            <a:r>
-              <a:rPr sz="1500" b="1" i="0">
-                <a:solidFill>
-                  <a:srgbClr val="095292"/>
-                </a:solidFill>
-                <a:latin typeface="Calibri"/>
-              </a:rPr>
-              <a:t>Diseña visual</a:t>
-            </a:r>
-          </a:p>
-          <a:p>
-            <a:pPr>
-              <a:spcBef>
-                <a:spcPts val="200"/>
-              </a:spcBef>
-            </a:pPr>
-            <a:r>
-              <a:rPr sz="1300" b="0" i="0">
-                <a:solidFill>
-                  <a:srgbClr val="333333"/>
-                </a:solidFill>
-                <a:latin typeface="Calibri"/>
-              </a:rPr>
-              <a:t>Dibuja el diagrama como quieras en Excalidraw o draw.io: es más rápido arrastrar cajas que escribir código, y ahí es donde se piensa el modelo.</a:t>
-            </a:r>
-          </a:p>
-        </p:txBody>
-      </p:sp>
-      <p:sp>
-        <p:nvSpPr>
-          <p:cNvPr id="10" name="Rounded Rectangle 9"/>
-          <p:cNvSpPr/>
-          <p:nvPr/>
-        </p:nvSpPr>
-        <p:spPr>
-          <a:xfrm>
-            <a:off x="457200" y="2802636"/>
-            <a:ext cx="11277295" cy="1051560"/>
-          </a:xfrm>
-          <a:prstGeom prst="roundRect">
-            <a:avLst>
-              <a:gd name="adj" fmla="val 12000"/>
-            </a:avLst>
-          </a:prstGeom>
-          <a:solidFill>
-            <a:srgbClr val="E8F4FA"/>
-          </a:solidFill>
-          <a:ln>
-            <a:noFill/>
-          </a:ln>
-        </p:spPr>
-        <p:style>
-          <a:lnRef idx="1">
-            <a:schemeClr val="accent1"/>
-          </a:lnRef>
-          <a:fillRef idx="3">
-            <a:schemeClr val="accent1"/>
-          </a:fillRef>
-          <a:effectRef idx="2">
-            <a:schemeClr val="accent1"/>
-          </a:effectRef>
-          <a:fontRef idx="minor">
-            <a:schemeClr val="lt1"/>
-          </a:fontRef>
-        </p:style>
-        <p:txBody>
-          <a:bodyPr rtlCol="0" anchor="ctr"/>
-          <a:lstStyle/>
-          <a:p>
-            <a:pPr algn="ctr"/>
-          </a:p>
-        </p:txBody>
-      </p:sp>
-      <p:sp>
-        <p:nvSpPr>
-          <p:cNvPr id="11" name="Rounded Rectangle 10"/>
-          <p:cNvSpPr/>
-          <p:nvPr/>
-        </p:nvSpPr>
-        <p:spPr>
-          <a:xfrm>
-            <a:off x="594360" y="3108960"/>
-            <a:ext cx="438912" cy="438912"/>
-          </a:xfrm>
-          <a:prstGeom prst="roundRect">
-            <a:avLst>
-              <a:gd name="adj" fmla="val 12000"/>
-            </a:avLst>
-          </a:prstGeom>
-          <a:solidFill>
-            <a:srgbClr val="095292"/>
-          </a:solidFill>
-          <a:ln>
-            <a:noFill/>
-          </a:ln>
-        </p:spPr>
-        <p:style>
-          <a:lnRef idx="1">
-            <a:schemeClr val="accent1"/>
-          </a:lnRef>
-          <a:fillRef idx="3">
-            <a:schemeClr val="accent1"/>
-          </a:fillRef>
-          <a:effectRef idx="2">
-            <a:schemeClr val="accent1"/>
-          </a:effectRef>
-          <a:fontRef idx="minor">
-            <a:schemeClr val="lt1"/>
-          </a:fontRef>
-        </p:style>
-        <p:txBody>
-          <a:bodyPr rtlCol="0" anchor="ctr"/>
-          <a:lstStyle/>
-          <a:p>
-            <a:pPr algn="ctr"/>
-          </a:p>
-        </p:txBody>
-      </p:sp>
-      <p:sp>
-        <p:nvSpPr>
-          <p:cNvPr id="12" name="TextBox 11"/>
-          <p:cNvSpPr txBox="1"/>
-          <p:nvPr/>
-        </p:nvSpPr>
-        <p:spPr>
-          <a:xfrm>
-            <a:off x="594360" y="3108960"/>
-            <a:ext cx="438912" cy="438912"/>
-          </a:xfrm>
-          <a:prstGeom prst="rect">
-            <a:avLst/>
-          </a:prstGeom>
-          <a:noFill/>
-        </p:spPr>
-        <p:txBody>
-          <a:bodyPr wrap="square" anchor="ctr"/>
-          <a:lstStyle/>
-          <a:p>
-            <a:pPr algn="ctr"/>
-            <a:r>
-              <a:rPr sz="1600" b="1" i="0">
-                <a:solidFill>
-                  <a:srgbClr val="FFFFFF"/>
-                </a:solidFill>
-                <a:latin typeface="Calibri"/>
-              </a:rPr>
-              <a:t>2</a:t>
-            </a:r>
-          </a:p>
-        </p:txBody>
-      </p:sp>
-      <p:sp>
-        <p:nvSpPr>
-          <p:cNvPr id="13" name="TextBox 12"/>
-          <p:cNvSpPr txBox="1"/>
-          <p:nvPr/>
-        </p:nvSpPr>
-        <p:spPr>
-          <a:xfrm>
-            <a:off x="1188720" y="2894076"/>
-            <a:ext cx="10271455" cy="886968"/>
-          </a:xfrm>
-          <a:prstGeom prst="rect">
-            <a:avLst/>
-          </a:prstGeom>
-          <a:noFill/>
-        </p:spPr>
-        <p:txBody>
-          <a:bodyPr wrap="square" anchor="ctr"/>
-          <a:lstStyle/>
-          <a:p>
-            <a:r>
-              <a:rPr sz="1500" b="1" i="0">
-                <a:solidFill>
-                  <a:srgbClr val="095292"/>
-                </a:solidFill>
-                <a:latin typeface="Calibri"/>
-              </a:rPr>
-              <a:t>Traduce con IA</a:t>
-            </a:r>
-          </a:p>
-          <a:p>
-            <a:pPr>
-              <a:spcBef>
-                <a:spcPts val="200"/>
-              </a:spcBef>
-            </a:pPr>
-            <a:r>
-              <a:rPr sz="1300" b="0" i="0">
-                <a:solidFill>
-                  <a:srgbClr val="333333"/>
-                </a:solidFill>
-                <a:latin typeface="Calibri"/>
-              </a:rPr>
-              <a:t>Describe tu boceto a una IA y pídele el código Mermaid usando C4Component. Revisa el resultado: la IA acierta la sintaxis, no tu modelo.</a:t>
-            </a:r>
-          </a:p>
-        </p:txBody>
-      </p:sp>
-      <p:sp>
-        <p:nvSpPr>
-          <p:cNvPr id="14" name="Rounded Rectangle 13"/>
-          <p:cNvSpPr/>
-          <p:nvPr/>
-        </p:nvSpPr>
-        <p:spPr>
-          <a:xfrm>
-            <a:off x="457200" y="3945636"/>
-            <a:ext cx="11277295" cy="1051560"/>
-          </a:xfrm>
-          <a:prstGeom prst="roundRect">
-            <a:avLst>
-              <a:gd name="adj" fmla="val 12000"/>
-            </a:avLst>
-          </a:prstGeom>
-          <a:solidFill>
-            <a:srgbClr val="F2F2F2"/>
-          </a:solidFill>
-          <a:ln>
-            <a:noFill/>
-          </a:ln>
-        </p:spPr>
-        <p:style>
-          <a:lnRef idx="1">
-            <a:schemeClr val="accent1"/>
-          </a:lnRef>
-          <a:fillRef idx="3">
-            <a:schemeClr val="accent1"/>
-          </a:fillRef>
-          <a:effectRef idx="2">
-            <a:schemeClr val="accent1"/>
-          </a:effectRef>
-          <a:fontRef idx="minor">
-            <a:schemeClr val="lt1"/>
-          </a:fontRef>
-        </p:style>
-        <p:txBody>
-          <a:bodyPr rtlCol="0" anchor="ctr"/>
-          <a:lstStyle/>
-          <a:p>
-            <a:pPr algn="ctr"/>
-          </a:p>
-        </p:txBody>
-      </p:sp>
-      <p:sp>
-        <p:nvSpPr>
-          <p:cNvPr id="15" name="Rounded Rectangle 14"/>
-          <p:cNvSpPr/>
-          <p:nvPr/>
-        </p:nvSpPr>
-        <p:spPr>
-          <a:xfrm>
-            <a:off x="594360" y="4251960"/>
-            <a:ext cx="438912" cy="438912"/>
-          </a:xfrm>
-          <a:prstGeom prst="roundRect">
-            <a:avLst>
-              <a:gd name="adj" fmla="val 12000"/>
-            </a:avLst>
-          </a:prstGeom>
-          <a:solidFill>
-            <a:srgbClr val="095292"/>
-          </a:solidFill>
-          <a:ln>
-            <a:noFill/>
-          </a:ln>
-        </p:spPr>
-        <p:style>
-          <a:lnRef idx="1">
-            <a:schemeClr val="accent1"/>
-          </a:lnRef>
-          <a:fillRef idx="3">
-            <a:schemeClr val="accent1"/>
-          </a:fillRef>
-          <a:effectRef idx="2">
-            <a:schemeClr val="accent1"/>
-          </a:effectRef>
-          <a:fontRef idx="minor">
-            <a:schemeClr val="lt1"/>
-          </a:fontRef>
-        </p:style>
-        <p:txBody>
-          <a:bodyPr rtlCol="0" anchor="ctr"/>
-          <a:lstStyle/>
-          <a:p>
-            <a:pPr algn="ctr"/>
-          </a:p>
-        </p:txBody>
-      </p:sp>
-      <p:sp>
-        <p:nvSpPr>
-          <p:cNvPr id="16" name="TextBox 15"/>
-          <p:cNvSpPr txBox="1"/>
-          <p:nvPr/>
-        </p:nvSpPr>
-        <p:spPr>
-          <a:xfrm>
-            <a:off x="594360" y="4251960"/>
-            <a:ext cx="438912" cy="438912"/>
-          </a:xfrm>
-          <a:prstGeom prst="rect">
-            <a:avLst/>
-          </a:prstGeom>
-          <a:noFill/>
-        </p:spPr>
-        <p:txBody>
-          <a:bodyPr wrap="square" anchor="ctr"/>
-          <a:lstStyle/>
-          <a:p>
-            <a:pPr algn="ctr"/>
-            <a:r>
-              <a:rPr sz="1600" b="1" i="0">
-                <a:solidFill>
-                  <a:srgbClr val="FFFFFF"/>
-                </a:solidFill>
-                <a:latin typeface="Calibri"/>
-              </a:rPr>
-              <a:t>3</a:t>
-            </a:r>
-          </a:p>
-        </p:txBody>
-      </p:sp>
-      <p:sp>
-        <p:nvSpPr>
-          <p:cNvPr id="17" name="TextBox 16"/>
-          <p:cNvSpPr txBox="1"/>
-          <p:nvPr/>
-        </p:nvSpPr>
-        <p:spPr>
-          <a:xfrm>
-            <a:off x="1188720" y="4037076"/>
-            <a:ext cx="10271455" cy="886968"/>
-          </a:xfrm>
-          <a:prstGeom prst="rect">
-            <a:avLst/>
-          </a:prstGeom>
-          <a:noFill/>
-        </p:spPr>
-        <p:txBody>
-          <a:bodyPr wrap="square" anchor="ctr"/>
-          <a:lstStyle/>
-          <a:p>
-            <a:r>
-              <a:rPr sz="1500" b="1" i="0">
-                <a:solidFill>
-                  <a:srgbClr val="095292"/>
-                </a:solidFill>
-                <a:latin typeface="Calibri"/>
-              </a:rPr>
-              <a:t>Renderiza en un visor</a:t>
-            </a:r>
-          </a:p>
-          <a:p>
-            <a:pPr>
-              <a:spcBef>
-                <a:spcPts val="200"/>
-              </a:spcBef>
-            </a:pPr>
-            <a:r>
-              <a:rPr sz="1300" b="0" i="0">
-                <a:solidFill>
-                  <a:srgbClr val="333333"/>
-                </a:solidFill>
-                <a:latin typeface="Calibri"/>
-              </a:rPr>
-              <a:t>Pega el código en un visor Mermaid (mermaid.live o la vista previa de tu editor) y míralo dibujado. Si no renderiza, corrige ahí: un end faltante o un rótulo sin comillas.</a:t>
-            </a:r>
-          </a:p>
-        </p:txBody>
-      </p:sp>
-      <p:sp>
-        <p:nvSpPr>
-          <p:cNvPr id="18" name="Rounded Rectangle 17"/>
-          <p:cNvSpPr/>
-          <p:nvPr/>
-        </p:nvSpPr>
-        <p:spPr>
-          <a:xfrm>
-            <a:off x="457200" y="5088636"/>
-            <a:ext cx="11277295" cy="1051560"/>
-          </a:xfrm>
-          <a:prstGeom prst="roundRect">
-            <a:avLst>
-              <a:gd name="adj" fmla="val 12000"/>
-            </a:avLst>
-          </a:prstGeom>
-          <a:solidFill>
-            <a:srgbClr val="E8F4FA"/>
-          </a:solidFill>
-          <a:ln>
-            <a:noFill/>
-          </a:ln>
-        </p:spPr>
-        <p:style>
-          <a:lnRef idx="1">
-            <a:schemeClr val="accent1"/>
-          </a:lnRef>
-          <a:fillRef idx="3">
-            <a:schemeClr val="accent1"/>
-          </a:fillRef>
-          <a:effectRef idx="2">
-            <a:schemeClr val="accent1"/>
-          </a:effectRef>
-          <a:fontRef idx="minor">
-            <a:schemeClr val="lt1"/>
-          </a:fontRef>
-        </p:style>
-        <p:txBody>
-          <a:bodyPr rtlCol="0" anchor="ctr"/>
-          <a:lstStyle/>
-          <a:p>
-            <a:pPr algn="ctr"/>
-          </a:p>
-        </p:txBody>
-      </p:sp>
-      <p:sp>
-        <p:nvSpPr>
-          <p:cNvPr id="19" name="Rounded Rectangle 18"/>
-          <p:cNvSpPr/>
-          <p:nvPr/>
-        </p:nvSpPr>
-        <p:spPr>
-          <a:xfrm>
-            <a:off x="594360" y="5394960"/>
-            <a:ext cx="438912" cy="438912"/>
-          </a:xfrm>
-          <a:prstGeom prst="roundRect">
-            <a:avLst>
-              <a:gd name="adj" fmla="val 12000"/>
-            </a:avLst>
-          </a:prstGeom>
-          <a:solidFill>
-            <a:srgbClr val="095292"/>
-          </a:solidFill>
-          <a:ln>
-            <a:noFill/>
-          </a:ln>
-        </p:spPr>
-        <p:style>
-          <a:lnRef idx="1">
-            <a:schemeClr val="accent1"/>
-          </a:lnRef>
-          <a:fillRef idx="3">
-            <a:schemeClr val="accent1"/>
-          </a:fillRef>
-          <a:effectRef idx="2">
-            <a:schemeClr val="accent1"/>
-          </a:effectRef>
-          <a:fontRef idx="minor">
-            <a:schemeClr val="lt1"/>
-          </a:fontRef>
-        </p:style>
-        <p:txBody>
-          <a:bodyPr rtlCol="0" anchor="ctr"/>
-          <a:lstStyle/>
-          <a:p>
-            <a:pPr algn="ctr"/>
-          </a:p>
-        </p:txBody>
-      </p:sp>
-      <p:sp>
-        <p:nvSpPr>
-          <p:cNvPr id="20" name="TextBox 19"/>
-          <p:cNvSpPr txBox="1"/>
-          <p:nvPr/>
-        </p:nvSpPr>
-        <p:spPr>
-          <a:xfrm>
-            <a:off x="594360" y="5394960"/>
-            <a:ext cx="438912" cy="438912"/>
-          </a:xfrm>
-          <a:prstGeom prst="rect">
-            <a:avLst/>
-          </a:prstGeom>
-          <a:noFill/>
-        </p:spPr>
-        <p:txBody>
-          <a:bodyPr wrap="square" anchor="ctr"/>
-          <a:lstStyle/>
-          <a:p>
-            <a:pPr algn="ctr"/>
-            <a:r>
-              <a:rPr sz="1600" b="1" i="0">
-                <a:solidFill>
-                  <a:srgbClr val="FFFFFF"/>
-                </a:solidFill>
-                <a:latin typeface="Calibri"/>
-              </a:rPr>
-              <a:t>4</a:t>
-            </a:r>
-          </a:p>
-        </p:txBody>
-      </p:sp>
-      <p:sp>
-        <p:nvSpPr>
-          <p:cNvPr id="21" name="TextBox 20"/>
-          <p:cNvSpPr txBox="1"/>
-          <p:nvPr/>
-        </p:nvSpPr>
-        <p:spPr>
-          <a:xfrm>
-            <a:off x="1188720" y="5180076"/>
-            <a:ext cx="10271455" cy="886968"/>
-          </a:xfrm>
-          <a:prstGeom prst="rect">
-            <a:avLst/>
-          </a:prstGeom>
-          <a:noFill/>
-        </p:spPr>
-        <p:txBody>
-          <a:bodyPr wrap="square" anchor="ctr"/>
-          <a:lstStyle/>
-          <a:p>
-            <a:r>
-              <a:rPr sz="1500" b="1" i="0">
-                <a:solidFill>
-                  <a:srgbClr val="095292"/>
-                </a:solidFill>
-                <a:latin typeface="Calibri"/>
-              </a:rPr>
-              <a:t>Guarda código e imagen</a:t>
-            </a:r>
-          </a:p>
-          <a:p>
-            <a:pPr>
-              <a:spcBef>
-                <a:spcPts val="200"/>
-              </a:spcBef>
-            </a:pPr>
-            <a:r>
-              <a:rPr sz="1300" b="0" i="0">
-                <a:solidFill>
-                  <a:srgbClr val="333333"/>
-                </a:solidFill>
-                <a:latin typeface="Calibri"/>
-              </a:rPr>
-              <a:t>El código es la fuente del diagrama: guárdalo con tu proyecto junto con el PNG exportado.</a:t>
-            </a:r>
-          </a:p>
-        </p:txBody>
-      </p:sp>
-      <p:sp>
-        <p:nvSpPr>
-          <p:cNvPr id="22" name="TextBox 21"/>
-          <p:cNvSpPr txBox="1"/>
-          <p:nvPr/>
-        </p:nvSpPr>
-        <p:spPr>
-          <a:xfrm>
-            <a:off x="11185855" y="6473952"/>
-            <a:ext cx="640080" cy="274320"/>
-          </a:xfrm>
-          <a:prstGeom prst="rect">
-            <a:avLst/>
-          </a:prstGeom>
-          <a:noFill/>
-        </p:spPr>
-        <p:txBody>
-          <a:bodyPr wrap="square">
-            <a:spAutoFit/>
-          </a:bodyPr>
-          <a:lstStyle/>
-          <a:p>
-            <a:pPr algn="r"/>
-            <a:r>
-              <a:rPr sz="1100" b="0" i="0">
-                <a:solidFill>
-                  <a:srgbClr val="666666"/>
-                </a:solidFill>
-                <a:latin typeface="Calibri"/>
-              </a:rPr>
-              <a:t>19</a:t>
+              <a:t>Teoría al servicio del diseño</a:t>
             </a:r>
           </a:p>
         </p:txBody>
@@ -8003,7 +7046,7 @@
                 </a:solidFill>
                 <a:latin typeface="Calibri"/>
               </a:rPr>
-              <a:t> Ejemplos resueltos y demo del docente sobre el tema.</a:t>
+              <a:t> Ejemplos resueltos y demostración sobre el tema.</a:t>
             </a:r>
           </a:p>
           <a:p>
@@ -8089,238 +7132,6 @@
                 <a:latin typeface="Calibri"/>
               </a:rPr>
               <a:t>2</a:t>
-            </a:r>
-          </a:p>
-        </p:txBody>
-      </p:sp>
-    </p:spTree>
-  </p:cSld>
-  <p:clrMapOvr>
-    <a:masterClrMapping/>
-  </p:clrMapOvr>
-</p:sld>
-</file>
-
-<file path=ppt/slides/slide20.xml><?xml version="1.0" encoding="utf-8"?>
-<p:sld xmlns:a="http://schemas.openxmlformats.org/drawingml/2006/main" xmlns:p="http://schemas.openxmlformats.org/presentationml/2006/main" xmlns:r="http://schemas.openxmlformats.org/officeDocument/2006/relationships">
-  <p:cSld>
-    <p:bg>
-      <p:bgPr>
-        <a:solidFill>
-          <a:srgbClr val="FFFFFF"/>
-        </a:solidFill>
-        <a:effectLst/>
-      </p:bgPr>
-    </p:bg>
-    <p:spTree>
-      <p:nvGrpSpPr>
-        <p:cNvPr id="1" name=""/>
-        <p:cNvGrpSpPr/>
-        <p:nvPr/>
-      </p:nvGrpSpPr>
-      <p:grpSpPr/>
-      <p:sp>
-        <p:nvSpPr>
-          <p:cNvPr id="2" name="Rectangle 1"/>
-          <p:cNvSpPr/>
-          <p:nvPr/>
-        </p:nvSpPr>
-        <p:spPr>
-          <a:xfrm>
-            <a:off x="0" y="0"/>
-            <a:ext cx="12191695" cy="164592"/>
-          </a:xfrm>
-          <a:prstGeom prst="rect">
-            <a:avLst/>
-          </a:prstGeom>
-          <a:solidFill>
-            <a:srgbClr val="269CCB"/>
-          </a:solidFill>
-          <a:ln>
-            <a:noFill/>
-          </a:ln>
-        </p:spPr>
-        <p:style>
-          <a:lnRef idx="1">
-            <a:schemeClr val="accent1"/>
-          </a:lnRef>
-          <a:fillRef idx="3">
-            <a:schemeClr val="accent1"/>
-          </a:fillRef>
-          <a:effectRef idx="2">
-            <a:schemeClr val="accent1"/>
-          </a:effectRef>
-          <a:fontRef idx="minor">
-            <a:schemeClr val="lt1"/>
-          </a:fontRef>
-        </p:style>
-        <p:txBody>
-          <a:bodyPr rtlCol="0" anchor="ctr"/>
-          <a:lstStyle/>
-          <a:p>
-            <a:pPr algn="ctr"/>
-          </a:p>
-        </p:txBody>
-      </p:sp>
-      <p:pic>
-        <p:nvPicPr>
-          <p:cNvPr id="3" name="Picture 2" descr="logo_uniajc_color.png"/>
-          <p:cNvPicPr>
-            <a:picLocks noChangeAspect="1"/>
-          </p:cNvPicPr>
-          <p:nvPr/>
-        </p:nvPicPr>
-        <p:blipFill>
-          <a:blip r:embed="rId2"/>
-          <a:stretch>
-            <a:fillRect/>
-          </a:stretch>
-        </p:blipFill>
-        <p:spPr>
-          <a:xfrm>
-            <a:off x="10271455" y="5998464"/>
-            <a:ext cx="1463040" cy="643233"/>
-          </a:xfrm>
-          <a:prstGeom prst="rect">
-            <a:avLst/>
-          </a:prstGeom>
-        </p:spPr>
-      </p:pic>
-      <p:sp>
-        <p:nvSpPr>
-          <p:cNvPr id="4" name="TextBox 3"/>
-          <p:cNvSpPr txBox="1"/>
-          <p:nvPr/>
-        </p:nvSpPr>
-        <p:spPr>
-          <a:xfrm>
-            <a:off x="457200" y="1737360"/>
-            <a:ext cx="11277295" cy="1097280"/>
-          </a:xfrm>
-          <a:prstGeom prst="rect">
-            <a:avLst/>
-          </a:prstGeom>
-          <a:noFill/>
-        </p:spPr>
-        <p:txBody>
-          <a:bodyPr wrap="square" anchor="ctr"/>
-          <a:lstStyle/>
-          <a:p>
-            <a:pPr algn="ctr"/>
-            <a:r>
-              <a:rPr sz="3400" b="1" i="0">
-                <a:solidFill>
-                  <a:srgbClr val="095292"/>
-                </a:solidFill>
-                <a:latin typeface="Calibri"/>
-              </a:rPr>
-              <a:t>Clase 11 · cierre conceptual</a:t>
-            </a:r>
-          </a:p>
-        </p:txBody>
-      </p:sp>
-      <p:sp>
-        <p:nvSpPr>
-          <p:cNvPr id="5" name="TextBox 4"/>
-          <p:cNvSpPr txBox="1"/>
-          <p:nvPr/>
-        </p:nvSpPr>
-        <p:spPr>
-          <a:xfrm>
-            <a:off x="457200" y="3017520"/>
-            <a:ext cx="11277295" cy="1645920"/>
-          </a:xfrm>
-          <a:prstGeom prst="rect">
-            <a:avLst/>
-          </a:prstGeom>
-          <a:noFill/>
-        </p:spPr>
-        <p:txBody>
-          <a:bodyPr wrap="square">
-            <a:spAutoFit/>
-          </a:bodyPr>
-          <a:lstStyle/>
-          <a:p>
-            <a:pPr algn="ctr">
-              <a:spcAft>
-                <a:spcPts val="600"/>
-              </a:spcAft>
-            </a:pPr>
-            <a:r>
-              <a:rPr sz="1600" b="0" i="0">
-                <a:solidFill>
-                  <a:srgbClr val="333333"/>
-                </a:solidFill>
-                <a:latin typeface="Calibri"/>
-              </a:rPr>
-              <a:t>Consolidar evidencias en un paquete revisable.</a:t>
-            </a:r>
-          </a:p>
-          <a:p>
-            <a:pPr algn="ctr">
-              <a:spcAft>
-                <a:spcPts val="600"/>
-              </a:spcAft>
-            </a:pPr>
-            <a:r>
-              <a:rPr sz="1600" b="0" i="0">
-                <a:solidFill>
-                  <a:srgbClr val="333333"/>
-                </a:solidFill>
-                <a:latin typeface="Calibri"/>
-              </a:rPr>
-              <a:t>Detectar huecos (nombres inconsistentes, servicios de más, sin seguridad).</a:t>
-            </a:r>
-          </a:p>
-          <a:p>
-            <a:pPr algn="ctr">
-              <a:spcAft>
-                <a:spcPts val="600"/>
-              </a:spcAft>
-            </a:pPr>
-            <a:r>
-              <a:rPr sz="1600" b="0" i="0">
-                <a:solidFill>
-                  <a:srgbClr val="333333"/>
-                </a:solidFill>
-                <a:latin typeface="Calibri"/>
-              </a:rPr>
-              <a:t>Salir con backlog claro hacia Clase 12/15.</a:t>
-            </a:r>
-          </a:p>
-        </p:txBody>
-      </p:sp>
-      <p:sp>
-        <p:nvSpPr>
-          <p:cNvPr id="6" name="TextBox 5"/>
-          <p:cNvSpPr txBox="1"/>
-          <p:nvPr/>
-        </p:nvSpPr>
-        <p:spPr>
-          <a:xfrm>
-            <a:off x="457200" y="4754880"/>
-            <a:ext cx="11277295" cy="640080"/>
-          </a:xfrm>
-          <a:prstGeom prst="rect">
-            <a:avLst/>
-          </a:prstGeom>
-          <a:noFill/>
-        </p:spPr>
-        <p:txBody>
-          <a:bodyPr wrap="square">
-            <a:spAutoFit/>
-          </a:bodyPr>
-          <a:lstStyle/>
-          <a:p>
-            <a:pPr algn="ctr"/>
-            <a:r>
-              <a:rPr sz="2000" b="1" i="0">
-                <a:solidFill>
-                  <a:srgbClr val="269CCB"/>
-                </a:solidFill>
-                <a:latin typeface="Calibri"/>
-              </a:rPr>
-              <a:t>Teoría al servicio del diseño</a:t>
             </a:r>
           </a:p>
         </p:txBody>
@@ -9095,7 +7906,7 @@
                 </a:solidFill>
                 <a:latin typeface="Calibri"/>
               </a:rPr>
-              <a:t>–   Esta clase no introduce teoria de un tema tecnico nuevo, y eso es deliberado, pero si tiene teoria propia: la teoria de la revision y la evaluacion.</a:t>
+              <a:t>–   Una revision de arquitectura, en ingles architecture review, es una practica profesional formal en la que alguien distinto de quien diseno el sistema examina el diseno antes de que este construido, buscando riesgos y decisiones sin justificar.</a:t>
             </a:r>
           </a:p>
           <a:p>
@@ -9111,7 +7922,7 @@
                 </a:solidFill>
                 <a:latin typeface="Calibri"/>
               </a:rPr>
-              <a:t>–   Una revision de arquitectura, en ingles architecture review, es una practica profesional formal en la que alguien distinto de quien diseno el sistema examina el diseno antes de que este construido, buscando riesgos y decisiones sin justificar.</a:t>
+              <a:t>–   Existe en la industria con nombres concretos: ATAM en su version academica, design review o RFC review en empresas de producto, comite de arquitectura en organizaciones grandes.</a:t>
             </a:r>
           </a:p>
           <a:p>
@@ -9127,7 +7938,7 @@
                 </a:solidFill>
                 <a:latin typeface="Calibri"/>
               </a:rPr>
-              <a:t>–   Existe en la industria con nombres concretos: ATAM en su version academica, design review o RFC review en empresas de producto, comite de arquitectura en organizaciones grandes.</a:t>
+              <a:t>–   Todas comparten la premisa economica que sostiene el curso: un riesgo detectado en el diseno cuesta una fraccion de lo que cuesta cuando ya esta implementado y con usuarios encima.</a:t>
             </a:r>
           </a:p>
           <a:p>
@@ -9143,7 +7954,7 @@
                 </a:solidFill>
                 <a:latin typeface="Calibri"/>
               </a:rPr>
-              <a:t>–   Todas comparten la premisa economica que sostiene el curso: un riesgo detectado en el diseno cuesta una fraccion de lo que cuesta cuando ya esta implementado y con usuarios encima.</a:t>
+              <a:t>–   La revision no juzga si el diagrama es bonito; busca tres cosas: decisiones sin argumento, incoherencias entre artefactos y riesgos que nadie ha nombrado.</a:t>
             </a:r>
           </a:p>
         </p:txBody>
@@ -9363,22 +8174,6 @@
                 </a:solidFill>
                 <a:latin typeface="Calibri"/>
               </a:rPr>
-              <a:t>–   La revision no juzga si el diagrama es bonito; busca tres cosas: decisiones sin argumento, incoherencias entre artefactos y riesgos que nadie ha nombrado.</a:t>
-            </a:r>
-          </a:p>
-          <a:p>
-            <a:pPr>
-              <a:spcAft>
-                <a:spcPts val="800"/>
-              </a:spcAft>
-            </a:pPr>
-            <a:r>
-              <a:rPr sz="2000" b="0" i="0">
-                <a:solidFill>
-                  <a:srgbClr val="333333"/>
-                </a:solidFill>
-                <a:latin typeface="Calibri"/>
-              </a:rPr>
               <a:t>–   Una revision de arquitectura es una lectura estructurada de los artefactos de diseno, hecha por alguien distinto del autor, antes de implementar o cambiar el diseno.</a:t>
             </a:r>
           </a:p>
@@ -9631,7 +8426,7 @@
                 </a:solidFill>
                 <a:latin typeface="Calibri"/>
               </a:rPr>
-              <a:t>–   El insumo es el paquete v1, que a estas alturas debe tener seis piezas producidas antes: el C4 de Contexto de la Clase 1, el C4 de Contenedores de la Clase 4, el modelo de amenazas con controles de la Clase 6</a:t>
+              <a:t>–   El criterio central de auditoria se llama trazabilidad: la propiedad de que un elemento se pueda seguir de un artefacto al siguiente sin cambiar de nombre ni desaparecer.</a:t>
             </a:r>
           </a:p>
           <a:p>
@@ -9647,7 +8442,7 @@
                 </a:solidFill>
                 <a:latin typeface="Calibri"/>
               </a:rPr>
-              <a:t>–   El diagrama de despliegue con zonas publica y privada de la Clase 7, el workflow de GitHub Actions y las metricas de monitoreo de la Clase 8, y la tabla de costos con drivers y right-sizing de la Clase 10.</a:t>
+              <a:t>–   Las seis piezas son: diagrama Context, diagrama Containers, diagrama de despliegue, Dockerfile, workflow de Actions e informe.</a:t>
             </a:r>
           </a:p>
           <a:p>
@@ -9663,23 +8458,7 @@
                 </a:solidFill>
                 <a:latin typeface="Calibri"/>
               </a:rPr>
-              <a:t>–   El criterio central de auditoria se llama trazabilidad: la propiedad de que un elemento se pueda seguir de un artefacto al siguiente sin cambiar de nombre ni desaparecer.</a:t>
-            </a:r>
-          </a:p>
-          <a:p>
-            <a:pPr>
-              <a:spcAft>
-                <a:spcPts val="800"/>
-              </a:spcAft>
-            </a:pPr>
-            <a:r>
-              <a:rPr sz="2000" b="0" i="0">
-                <a:solidFill>
-                  <a:srgbClr val="333333"/>
-                </a:solidFill>
-                <a:latin typeface="Calibri"/>
-              </a:rPr>
-              <a:t>–   No es una formalidad burocratica, es el unico detector confiable de que el estudiante penso el sistema en vez de producir seis tareas independientes para seis notas distintas.</a:t>
+              <a:t>–   Un ejemplo de trazabilidad rota: el Context dibuja una pasarela de pagos y el Containers ya no la menciona; o salio del alcance y se borra, o se olvido y es un hueco.</a:t>
             </a:r>
           </a:p>
         </p:txBody>
@@ -9860,7 +8639,7 @@
                 </a:solidFill>
                 <a:latin typeface="Calibri"/>
               </a:rPr>
-              <a:t>Las cinco preguntas de coherencia, en orden (1/2)</a:t>
+              <a:t>Las cinco preguntas de coherencia, en orden</a:t>
             </a:r>
           </a:p>
         </p:txBody>
@@ -9899,7 +8678,7 @@
                 </a:solidFill>
                 <a:latin typeface="Calibri"/>
               </a:rPr>
-              <a:t>–   Las preguntas de coherencia, aplicadas a la app, son cinco y conviene hacerlas en orden.</a:t>
+              <a:t>–   Quinta: el workflow de Actions se ejecuto al menos una vez con resultado visible, porque un archivo YAML que nunca corrio es una intencion, no evidencia.</a:t>
             </a:r>
           </a:p>
           <a:p>
@@ -9915,7 +8694,7 @@
                 </a:solidFill>
                 <a:latin typeface="Calibri"/>
               </a:rPr>
-              <a:t>–   Primera: cada contenedor del C4 de la Clase 4 aparece en el diagrama de despliegue de la Clase 7 y con el mismo nombre</a:t>
+              <a:t>–   Ese es el nucleo del acta: no una nota, sino cuales de estas cinco cadenas estan rotas en cada proyecto.</a:t>
             </a:r>
           </a:p>
           <a:p>
@@ -9931,39 +8710,7 @@
                 </a:solidFill>
                 <a:latin typeface="Calibri"/>
               </a:rPr>
-              <a:t>–   Si el C4 dice "servicio de notificaciones" y el despliegue dice "worker de correos", o son la misma cosa mal nombrada o son dos cosas y falta una.</a:t>
-            </a:r>
-          </a:p>
-          <a:p>
-            <a:pPr>
-              <a:spcAft>
-                <a:spcPts val="800"/>
-              </a:spcAft>
-            </a:pPr>
-            <a:r>
-              <a:rPr sz="2000" b="0" i="0">
-                <a:solidFill>
-                  <a:srgbClr val="333333"/>
-                </a:solidFill>
-                <a:latin typeface="Calibri"/>
-              </a:rPr>
-              <a:t>–   Segunda: cada actor y sistema externo del diagrama de Contexto sigue existiendo</a:t>
-            </a:r>
-          </a:p>
-          <a:p>
-            <a:pPr>
-              <a:spcAft>
-                <a:spcPts val="800"/>
-              </a:spcAft>
-            </a:pPr>
-            <a:r>
-              <a:rPr sz="2000" b="0" i="0">
-                <a:solidFill>
-                  <a:srgbClr val="333333"/>
-                </a:solidFill>
-                <a:latin typeface="Calibri"/>
-              </a:rPr>
-              <a:t>–   El caso frecuente es que el estudiante dibujo en la Clase 1 una pasarela de pagos y hoy ningun contenedor habla con ella, asi que o desaparecio del alcance y hay que borrarla o esta olvidada y es un hueco.</a:t>
+              <a:t>–   Un ejemplo de cadena rota: el Containers tiene un worker de avisos, pero el diagrama de despliegue no lo ubica en ninguna zona; la pieza existe en el diseno y no tiene donde correr.</a:t>
             </a:r>
           </a:p>
         </p:txBody>
@@ -10144,7 +8891,7 @@
                 </a:solidFill>
                 <a:latin typeface="Calibri"/>
               </a:rPr>
-              <a:t>Las cinco preguntas de coherencia, en orden (2/2)</a:t>
+              <a:t>Scope creep y arquitectura de papel: las dos patologias con nombre propio</a:t>
             </a:r>
           </a:p>
         </p:txBody>
@@ -10183,7 +8930,7 @@
                 </a:solidFill>
                 <a:latin typeface="Calibri"/>
               </a:rPr>
-              <a:t>–   Tercera: cada amenaza del modelo STRIDE de la Clase 6 tiene un control visible en el despliegue; si la amenaza es acceso no autorizado a la base de datos y el diagrama la muestra en la subred publica, el control existe en el documento y no en el diseno.</a:t>
+              <a:t>–   La primera es el scope creep, el crecimiento no controlado del alcance: el sistema suma capacidades clase por clase, cada una razonable por si misma, hasta que el proyecto tiene un alcance que no se puede documentar ni defender en el tiempo restante.</a:t>
             </a:r>
           </a:p>
           <a:p>
@@ -10199,7 +8946,7 @@
                 </a:solidFill>
                 <a:latin typeface="Calibri"/>
               </a:rPr>
-              <a:t>–   Cuarta: los componentes de la tabla de costos de la Clase 10 son los mismos contenedores, no una lista inventada.</a:t>
+              <a:t>–   La segunda patologia es el teatro de microservicios: servicios separados en el diagrama que en la practica no son unidades independientes.</a:t>
             </a:r>
           </a:p>
           <a:p>
@@ -10215,7 +8962,7 @@
                 </a:solidFill>
                 <a:latin typeface="Calibri"/>
               </a:rPr>
-              <a:t>–   Quinta: el workflow de Actions se ejecuto al menos una vez con resultado visible, porque un archivo YAML que nunca corrio es una intencion, no evidencia.</a:t>
+              <a:t>–   En la app el caso clasico es el "servicio de autenticacion" dibujado como caja aparte que en el repositorio es un modulo dentro de la misma API, escribe en las mismas tablas y se despliega en el mismo contenedor.</a:t>
             </a:r>
           </a:p>
           <a:p>
@@ -10231,7 +8978,7 @@
                 </a:solidFill>
                 <a:latin typeface="Calibri"/>
               </a:rPr>
-              <a:t>–   Ese es el nucleo del acta: no una nota, sino cuales de estas cinco cadenas estan rotas en cada proyecto.</a:t>
+              <a:t>–   No es un microservicio, es un modulo, y decirlo no castiga al estudiante: corrige el vocabulario antes del Parcial 3, donde esa distincion se evalua.</a:t>
             </a:r>
           </a:p>
         </p:txBody>

--- a/Arquitectura de Sistemas Computacionales/Clases/Clase 11 - Avance del proyecto final/Presentacion.pptx
+++ b/Arquitectura de Sistemas Computacionales/Clases/Clase 11 - Avance del proyecto final/Presentacion.pptx
@@ -9,7 +9,7 @@
     <p:sldId id="257" r:id="rId8"/>
     <p:sldId id="258" r:id="rId9"/>
     <p:sldId id="259" r:id="rId10"/>
-    <p:sldId id="260" r:id="rId11"/>
+    <p:sldId id="260" r:id="rId12"/>
     <p:sldId id="261" r:id="rId13"/>
     <p:sldId id="262" r:id="rId14"/>
     <p:sldId id="263" r:id="rId15"/>
@@ -18,8 +18,6 @@
     <p:sldId id="266" r:id="rId18"/>
     <p:sldId id="267" r:id="rId19"/>
     <p:sldId id="268" r:id="rId20"/>
-    <p:sldId id="269" r:id="rId21"/>
-    <p:sldId id="270" r:id="rId22"/>
   </p:sldIdLst>
   <p:sldSz cx="12191695" cy="6858000" type="screen4x3"/>
   <p:notesSz cx="6858000" cy="9144000"/>
@@ -516,6 +514,54 @@
           <a:lstStyle/>
           <a:p>
             <a:r>
+              <a:t>DESARROLLO (para explicarlo, no se proyecta):</a:t>
+            </a:r>
+          </a:p>
+          <a:p/>
+          <a:p>
+            <a:r>
+              <a:t>Una revision de arquitectura, en ingles architecture review, es una practica profesional formal en la que alguien distinto de quien diseno el sistema examina el diseno antes de que este construido, buscando riesgos y decisiones sin justificar.</a:t>
+            </a:r>
+          </a:p>
+          <a:p/>
+          <a:p>
+            <a:r>
+              <a:t>Existe en la industria con nombres concretos: ATAM en su version academica, design review o RFC review en empresas de producto, comite de arquitectura en organizaciones grandes.</a:t>
+            </a:r>
+          </a:p>
+          <a:p/>
+          <a:p>
+            <a:r>
+              <a:t>Todas comparten la premisa economica que sostiene el curso: un riesgo detectado en el diseno cuesta una fraccion de lo que cuesta cuando ya esta implementado y con usuarios encima.</a:t>
+            </a:r>
+          </a:p>
+          <a:p/>
+          <a:p>
+            <a:r>
+              <a:t>La revision no juzga si el diagrama es bonito; busca tres cosas: decisiones sin argumento, incoherencias entre artefactos y riesgos que nadie ha nombrado.</a:t>
+            </a:r>
+          </a:p>
+          <a:p/>
+          <a:p>
+            <a:r>
+              <a:t>Una revision de arquitectura es una lectura estructurada de los artefactos de diseno, hecha por alguien distinto del autor, antes de implementar o cambiar el diseno.</a:t>
+            </a:r>
+          </a:p>
+          <a:p/>
+          <a:p>
+            <a:r>
+              <a:t>Sus tres salidas son: hallazgos con evidencia, riesgos nombrados y acciones con responsable.</a:t>
+            </a:r>
+          </a:p>
+          <a:p/>
+          <a:p>
+            <a:r>
+              <a:t>Ejemplo en CloudLite: el Containers nombra «API de turnos» y el Despliegue nombra «backend»; el hallazgo es la incoherencia, la evidencia son los dos diagramas y la accion es unificar el nombre.</a:t>
+            </a:r>
+          </a:p>
+          <a:p/>
+          <a:p>
+            <a:r>
               <a:t>(No se proyecta) Esta clase no introduce teoria de un tema tecnico nuevo, y eso es deliberado, pero si tiene teoria propia: la teoria de la revision y la evaluacion.</a:t>
             </a:r>
           </a:p>
@@ -592,6 +638,36 @@
           <a:lstStyle/>
           <a:p>
             <a:r>
+              <a:t>DESARROLLO (para explicarlo, no se proyecta):</a:t>
+            </a:r>
+          </a:p>
+          <a:p/>
+          <a:p>
+            <a:r>
+              <a:t>El criterio central de auditoria se llama trazabilidad: la propiedad de que un elemento se pueda seguir de un artefacto al siguiente sin cambiar de nombre ni desaparecer.</a:t>
+            </a:r>
+          </a:p>
+          <a:p/>
+          <a:p>
+            <a:r>
+              <a:t>Las seis piezas son: diagrama Context, diagrama Containers, diagrama de despliegue, Dockerfile, workflow de Actions e informe.</a:t>
+            </a:r>
+          </a:p>
+          <a:p/>
+          <a:p>
+            <a:r>
+              <a:t>Un ejemplo de trazabilidad rota: el Context dibuja una pasarela de pagos y el Containers ya no la menciona; o salio del alcance y se borra, o se olvido y es un hueco.</a:t>
+            </a:r>
+          </a:p>
+          <a:p/>
+          <a:p>
+            <a:r>
+              <a:t>NOTAS:</a:t>
+            </a:r>
+          </a:p>
+          <a:p/>
+          <a:p>
+            <a:r>
               <a:t>Y se audita con preguntas mecanicas que cualquier docente puede hacer sin ser experto en el dominio del proyecto, lo que hace esta tecnica ensenable.</a:t>
             </a:r>
           </a:p>
@@ -674,6 +750,30 @@
           <a:lstStyle/>
           <a:p>
             <a:r>
+              <a:t>DESARROLLO (para explicarlo, no se proyecta):</a:t>
+            </a:r>
+          </a:p>
+          <a:p/>
+          <a:p>
+            <a:r>
+              <a:t>Quinta: el workflow de Actions se ejecuto al menos una vez con resultado visible, porque un archivo YAML que nunca corrio es una intencion, no evidencia.</a:t>
+            </a:r>
+          </a:p>
+          <a:p/>
+          <a:p>
+            <a:r>
+              <a:t>Ese es el nucleo del acta: no una nota, sino cuales de estas cinco cadenas estan rotas en cada proyecto.</a:t>
+            </a:r>
+          </a:p>
+          <a:p/>
+          <a:p>
+            <a:r>
+              <a:t>Un ejemplo de cadena rota: el Containers tiene un worker de avisos, pero el diagrama de despliegue no lo ubica en ninguna zona; la pieza existe en el diseno y no tiene donde correr.</a:t>
+            </a:r>
+          </a:p>
+          <a:p/>
+          <a:p>
+            <a:r>
               <a:t>(No se proyecta) Las preguntas de coherencia, aplicadas a CloudLite, son cinco y conviene hacerlas en orden.</a:t>
             </a:r>
           </a:p>
@@ -768,6 +868,42 @@
           <a:lstStyle/>
           <a:p>
             <a:r>
+              <a:t>DESARROLLO (para explicarlo, no se proyecta):</a:t>
+            </a:r>
+          </a:p>
+          <a:p/>
+          <a:p>
+            <a:r>
+              <a:t>La primera es el scope creep, el crecimiento no controlado del alcance: el sistema suma capacidades clase por clase, cada una razonable por si misma, hasta que el proyecto tiene un alcance que no se puede documentar ni defender en el tiempo restante.</a:t>
+            </a:r>
+          </a:p>
+          <a:p/>
+          <a:p>
+            <a:r>
+              <a:t>La segunda patologia es el teatro de microservicios: servicios separados en el diagrama que en la practica no son unidades independientes.</a:t>
+            </a:r>
+          </a:p>
+          <a:p/>
+          <a:p>
+            <a:r>
+              <a:t>En CloudLite el caso clasico es el "servicio de autenticacion" dibujado como caja aparte que en el repositorio es un modulo dentro de la misma API, escribe en las mismas tablas y se despliega en el mismo contenedor.</a:t>
+            </a:r>
+          </a:p>
+          <a:p/>
+          <a:p>
+            <a:r>
+              <a:t>No es un microservicio, es un modulo, y decirlo no castiga al estudiante: corrige el vocabulario antes del Parcial 3, donde esa distincion se evalua.</a:t>
+            </a:r>
+          </a:p>
+          <a:p/>
+          <a:p>
+            <a:r>
+              <a:t>NOTAS:</a:t>
+            </a:r>
+          </a:p>
+          <a:p/>
+          <a:p>
+            <a:r>
               <a:t>Hay dos patologias con nombre propio que arruinan las sustentaciones.</a:t>
             </a:r>
           </a:p>
@@ -856,31 +992,37 @@
           <a:lstStyle/>
           <a:p>
             <a:r>
-              <a:t>(No se proyecta) Una retroalimentacion accionable tiene cuatro partes: observacion, evidencia, impacto y accion con fecha. "Falta seguridad" no cumple ninguna. "En el diagrama de despliegue la base de datos esta en la subred publica, contradice el control que ustedes escribieron para la amenaza de acceso no autorizado; si lo sustentan asi en la Clase 15 el evaluador concluira que el modelo de amenazas se escribio sin mirar el diagrama; muevanla a subred privada y dejen solo la API expuesta, antes de la Clase 12" cumple las cuatro.</a:t>
+              <a:t>TEXTO COMPLETO DE LA LÁMINA (se proyecta resumido):</a:t>
             </a:r>
           </a:p>
           <a:p/>
           <a:p>
             <a:r>
-              <a:t>(No se proyecta) El docente debe apuntar a tres hallazgos por proyecto como maximo y marcar cual es el bloqueante, porque un estudiante que recibe once observaciones no corrige ninguna: se paraliza.</a:t>
+              <a:t>Microservicios teatro · nombres distintos entre diagramas · secretos en imagen.</a:t>
             </a:r>
           </a:p>
           <a:p/>
           <a:p>
             <a:r>
-              <a:t>(No se proyecta) Conviene nombrar tambien una fortaleza concreta, no por amabilidad sino porque el estudiante necesita saber que conservar; si solo escucha fallas, en la siguiente version cambia todo, incluido lo que estaba bien.</a:t>
+              <a:t>CI sin tests · diagrama sin puertos · dominio infinito.</a:t>
             </a:r>
           </a:p>
           <a:p/>
           <a:p>
             <a:r>
-              <a:t>(No se proyecta) Y la revision entre pares cumple una funcion que la del docente no puede: explicarle el sistema a otro estudiante obliga a verbalizar decisiones que nunca se dijeron en voz alta, y ahi el propio autor descubre sus huecos.</a:t>
+              <a:t>Microservicios teatro: servicios separados que comparten base de datos y se despliegan siempre juntos.</a:t>
             </a:r>
           </a:p>
           <a:p/>
           <a:p>
             <a:r>
-              <a:t>(No se proyecta) El formato eficiente es de siete a ocho minutos por proyecto, con reloj visible, y el revisor asignado (otro estudiante, u otro equipo si el docente los autorizo) entregando por escrito una observacion y una pregunta.</a:t>
+              <a:t>Nombres distintos: «API de turnos» en el C4 y «backend» en el Despliegue rompen la trazabilidad.</a:t>
+            </a:r>
+          </a:p>
+          <a:p/>
+          <a:p>
+            <a:r>
+              <a:t>CI sin tests: un pipeline que no puede fallar no verifica nada.</a:t>
             </a:r>
           </a:p>
         </p:txBody>
@@ -948,6 +1090,178 @@
         <p:txBody>
           <a:bodyPr/>
           <a:lstStyle/>
+          <a:p>
+            <a:r>
+              <a:t>DESARROLLO (para explicarlo, no se proyecta):</a:t>
+            </a:r>
+          </a:p>
+          <a:p/>
+          <a:p>
+            <a:r>
+              <a:t>La retroalimentacion es la mitad del valor del dia y tiene tecnica propia.</a:t>
+            </a:r>
+          </a:p>
+          <a:p/>
+          <a:p>
+            <a:r>
+              <a:t>Una observacion accionable tiene cuatro partes: observacion, evidencia, impacto y accion con fecha.</a:t>
+            </a:r>
+          </a:p>
+          <a:p/>
+          <a:p>
+            <a:r>
+              <a:t>Ejemplo: «el despliegue llama backend a la API de turnos (observacion); se ve en la caja central (evidencia); rompe la trazabilidad con el Containers (impacto); unificar el nombre antes de la proxima revision (accion con fecha)».</a:t>
+            </a:r>
+          </a:p>
+          <a:p/>
+          <a:p>
+            <a:r>
+              <a:t>Un comentario como «mejorar el diagrama» no es accionable: no dice que, ni donde, ni cuando.</a:t>
+            </a:r>
+          </a:p>
+          <a:p/>
+          <a:p>
+            <a:r>
+              <a:t>(No se proyecta) Una retroalimentacion accionable tiene cuatro partes: observacion, evidencia, impacto y accion con fecha. "Falta seguridad" no cumple ninguna. "En el diagrama de despliegue la base de datos esta en la subred publica, contradice el control que ustedes escribieron para la amenaza de acceso no autorizado; si lo sustentan asi en la Clase 15 el evaluador concluira que el modelo de amenazas se escribio sin mirar el diagrama; muevanla a subred privada y dejen solo la API expuesta, antes de la Clase 12" cumple las cuatro.</a:t>
+            </a:r>
+          </a:p>
+          <a:p/>
+          <a:p>
+            <a:r>
+              <a:t>(No se proyecta) El docente debe apuntar a tres hallazgos por proyecto como maximo y marcar cual es el bloqueante, porque un estudiante que recibe once observaciones no corrige ninguna: se paraliza.</a:t>
+            </a:r>
+          </a:p>
+          <a:p/>
+          <a:p>
+            <a:r>
+              <a:t>(No se proyecta) Conviene nombrar tambien una fortaleza concreta, no por amabilidad sino porque el estudiante necesita saber que conservar; si solo escucha fallas, en la siguiente version cambia todo, incluido lo que estaba bien.</a:t>
+            </a:r>
+          </a:p>
+          <a:p/>
+          <a:p>
+            <a:r>
+              <a:t>(No se proyecta) Y la revision entre pares cumple una funcion que la del docente no puede: explicarle el sistema a otro estudiante obliga a verbalizar decisiones que nunca se dijeron en voz alta, y ahi el propio autor descubre sus huecos.</a:t>
+            </a:r>
+          </a:p>
+          <a:p/>
+          <a:p>
+            <a:r>
+              <a:t>(No se proyecta) El formato eficiente es de siete a ocho minutos por proyecto, con reloj visible, y el revisor asignado (otro estudiante, u otro equipo si el docente los autorizo) entregando por escrito una observacion y una pregunta.</a:t>
+            </a:r>
+          </a:p>
+        </p:txBody>
+      </p:sp>
+      <p:sp>
+        <p:nvSpPr>
+          <p:cNvPr id="4" name="Slide Number Placeholder 3"/>
+          <p:cNvSpPr>
+            <a:spLocks noGrp="1"/>
+          </p:cNvSpPr>
+          <p:nvPr>
+            <p:ph type="sldNum" idx="5" sz="quarter"/>
+          </p:nvPr>
+        </p:nvSpPr>
+        <p:spPr/>
+      </p:sp>
+    </p:spTree>
+  </p:cSld>
+  <p:clrMapOvr>
+    <a:masterClrMapping/>
+  </p:clrMapOvr>
+</p:notes>
+</file>
+
+<file path=ppt/notesSlides/notesSlide7.xml><?xml version="1.0" encoding="utf-8"?>
+<p:notes xmlns:a="http://schemas.openxmlformats.org/drawingml/2006/main" xmlns:p="http://schemas.openxmlformats.org/presentationml/2006/main" xmlns:r="http://schemas.openxmlformats.org/officeDocument/2006/relationships">
+  <p:cSld>
+    <p:spTree>
+      <p:nvGrpSpPr>
+        <p:cNvPr id="1" name=""/>
+        <p:cNvGrpSpPr/>
+        <p:nvPr/>
+      </p:nvGrpSpPr>
+      <p:grpSpPr>
+        <a:xfrm>
+          <a:off x="0" y="0"/>
+          <a:ext cx="0" cy="0"/>
+          <a:chOff x="0" y="0"/>
+          <a:chExt cx="0" cy="0"/>
+        </a:xfrm>
+      </p:grpSpPr>
+      <p:sp>
+        <p:nvSpPr>
+          <p:cNvPr id="2" name="Slide Image Placeholder 1"/>
+          <p:cNvSpPr>
+            <a:spLocks noGrp="1"/>
+          </p:cNvSpPr>
+          <p:nvPr>
+            <p:ph type="sldImg" idx="2"/>
+          </p:nvPr>
+        </p:nvSpPr>
+        <p:spPr/>
+      </p:sp>
+      <p:sp>
+        <p:nvSpPr>
+          <p:cNvPr id="3" name="Notes Placeholder 2"/>
+          <p:cNvSpPr>
+            <a:spLocks noGrp="1"/>
+          </p:cNvSpPr>
+          <p:nvPr>
+            <p:ph type="body" idx="3" sz="quarter"/>
+          </p:nvPr>
+        </p:nvSpPr>
+        <p:spPr/>
+        <p:txBody>
+          <a:bodyPr/>
+          <a:lstStyle/>
+          <a:p>
+            <a:r>
+              <a:t>DESARROLLO (para explicarlo, no se proyecta):</a:t>
+            </a:r>
+          </a:p>
+          <a:p/>
+          <a:p>
+            <a:r>
+              <a:t>Con seis artefactos esperados la regla practica es un semaforo: verde si estan los seis y a lo sumo una cadena de trazabilidad rota</a:t>
+            </a:r>
+          </a:p>
+          <a:p/>
+          <a:p>
+            <a:r>
+              <a:t>Amarillo si hay cinco de seis, o dos o tres cadenas rotas pero corregibles editando documentos; rojo si falta el C4 de Contenedores o el diagrama de despliegue</a:t>
+            </a:r>
+          </a:p>
+          <a:p/>
+          <a:p>
+            <a:r>
+              <a:t>Que son la columna vertebral y sin los cuales el resto no se puede evaluar, o si el repositorio no existe.</a:t>
+            </a:r>
+          </a:p>
+          <a:p/>
+          <a:p>
+            <a:r>
+              <a:t>Lo transferible es la idea de fondo: un checkpoint se evalua por evidencia presente, no por promesas.</a:t>
+            </a:r>
+          </a:p>
+          <a:p/>
+          <a:p>
+            <a:r>
+              <a:t>Cuando un estudiante dice "eso ya lo tenemos, solo falta subirlo", el estado es amarillo y el acta lo registra con fecha de cierre; no es desconfianza, es que en un proyecto lo que no esta en el repositorio no existe.</a:t>
+            </a:r>
+          </a:p>
+          <a:p/>
+          <a:p>
+            <a:r>
+              <a:t>Para un proyecto en rojo el plan de recuperacion debe reducir alcance, nunca agregar trabajo: menos capacidades, menos servicios, y toda la energia en las dos piezas que faltan.</a:t>
+            </a:r>
+          </a:p>
+          <a:p/>
+          <a:p>
+            <a:r>
+              <a:t>PREGUNTAS FRECUENTES Y CIERRE CONCEPTUAL ()</a:t>
+            </a:r>
+          </a:p>
+          <a:p/>
           <a:p>
             <a:r>
               <a:t>(No se proyecta) Falta el criterio para decidir si un proyecto va a tiempo, y aqui el docente necesita un umbral y no una impresion.</a:t>
@@ -4438,14 +4752,214 @@
       </p:sp>
       <p:sp>
         <p:nvSpPr>
-          <p:cNvPr id="5" name="TextBox 4"/>
+          <p:cNvPr id="5" name="Rounded Rectangle 4"/>
+          <p:cNvSpPr/>
+          <p:nvPr/>
+        </p:nvSpPr>
+        <p:spPr>
+          <a:xfrm>
+            <a:off x="5803166" y="1188719"/>
+            <a:ext cx="5998464" cy="4828032"/>
+          </a:xfrm>
+          <a:prstGeom prst="roundRect">
+            <a:avLst>
+              <a:gd name="adj" fmla="val 4000"/>
+            </a:avLst>
+          </a:prstGeom>
+          <a:solidFill>
+            <a:srgbClr val="E8EEF4"/>
+          </a:solidFill>
+          <a:ln>
+            <a:noFill/>
+          </a:ln>
+        </p:spPr>
+        <p:style>
+          <a:lnRef idx="1">
+            <a:schemeClr val="accent1"/>
+          </a:lnRef>
+          <a:fillRef idx="3">
+            <a:schemeClr val="accent1"/>
+          </a:fillRef>
+          <a:effectRef idx="2">
+            <a:schemeClr val="accent1"/>
+          </a:effectRef>
+          <a:fontRef idx="minor">
+            <a:schemeClr val="lt1"/>
+          </a:fontRef>
+        </p:style>
+        <p:txBody>
+          <a:bodyPr rtlCol="0" anchor="ctr"/>
+          <a:lstStyle/>
+          <a:p>
+            <a:pPr algn="ctr"/>
+          </a:p>
+        </p:txBody>
+      </p:sp>
+      <p:pic>
+        <p:nvPicPr>
+          <p:cNvPr id="6" name="Picture 5" descr="retro-cuatro-partes-paso1.png"/>
+          <p:cNvPicPr>
+            <a:picLocks noChangeAspect="1"/>
+          </p:cNvPicPr>
+          <p:nvPr/>
+        </p:nvPicPr>
+        <p:blipFill>
+          <a:blip r:embed="rId2"/>
+          <a:stretch>
+            <a:fillRect/>
+          </a:stretch>
+        </p:blipFill>
+        <p:spPr>
+          <a:xfrm>
+            <a:off x="5876318" y="1261872"/>
+            <a:ext cx="5852160" cy="4681728"/>
+          </a:xfrm>
+          <a:prstGeom prst="rect">
+            <a:avLst/>
+          </a:prstGeom>
+        </p:spPr>
+      </p:pic>
+      <p:pic>
+        <p:nvPicPr>
+          <p:cNvPr id="7" name="Picture 6" descr="retro-cuatro-partes-paso2.png"/>
+          <p:cNvPicPr>
+            <a:picLocks noChangeAspect="1"/>
+          </p:cNvPicPr>
+          <p:nvPr/>
+        </p:nvPicPr>
+        <p:blipFill>
+          <a:blip r:embed="rId3"/>
+          <a:stretch>
+            <a:fillRect/>
+          </a:stretch>
+        </p:blipFill>
+        <p:spPr>
+          <a:xfrm>
+            <a:off x="5876318" y="1261872"/>
+            <a:ext cx="5852160" cy="4681728"/>
+          </a:xfrm>
+          <a:prstGeom prst="rect">
+            <a:avLst/>
+          </a:prstGeom>
+        </p:spPr>
+      </p:pic>
+      <p:pic>
+        <p:nvPicPr>
+          <p:cNvPr id="8" name="Picture 7" descr="retro-cuatro-partes-paso3.png"/>
+          <p:cNvPicPr>
+            <a:picLocks noChangeAspect="1"/>
+          </p:cNvPicPr>
+          <p:nvPr/>
+        </p:nvPicPr>
+        <p:blipFill>
+          <a:blip r:embed="rId4"/>
+          <a:stretch>
+            <a:fillRect/>
+          </a:stretch>
+        </p:blipFill>
+        <p:spPr>
+          <a:xfrm>
+            <a:off x="5876318" y="1261872"/>
+            <a:ext cx="5852160" cy="4681728"/>
+          </a:xfrm>
+          <a:prstGeom prst="rect">
+            <a:avLst/>
+          </a:prstGeom>
+        </p:spPr>
+      </p:pic>
+      <p:pic>
+        <p:nvPicPr>
+          <p:cNvPr id="9" name="Picture 8" descr="retro-cuatro-partes-paso4.png"/>
+          <p:cNvPicPr>
+            <a:picLocks noChangeAspect="1"/>
+          </p:cNvPicPr>
+          <p:nvPr/>
+        </p:nvPicPr>
+        <p:blipFill>
+          <a:blip r:embed="rId5"/>
+          <a:stretch>
+            <a:fillRect/>
+          </a:stretch>
+        </p:blipFill>
+        <p:spPr>
+          <a:xfrm>
+            <a:off x="5876318" y="1261872"/>
+            <a:ext cx="5852160" cy="4681728"/>
+          </a:xfrm>
+          <a:prstGeom prst="rect">
+            <a:avLst/>
+          </a:prstGeom>
+        </p:spPr>
+      </p:pic>
+      <p:pic>
+        <p:nvPicPr>
+          <p:cNvPr id="10" name="Picture 9" descr="retro-cuatro-partes-paso5.png"/>
+          <p:cNvPicPr>
+            <a:picLocks noChangeAspect="1"/>
+          </p:cNvPicPr>
+          <p:nvPr/>
+        </p:nvPicPr>
+        <p:blipFill>
+          <a:blip r:embed="rId6"/>
+          <a:stretch>
+            <a:fillRect/>
+          </a:stretch>
+        </p:blipFill>
+        <p:spPr>
+          <a:xfrm>
+            <a:off x="5876318" y="1261872"/>
+            <a:ext cx="5852160" cy="4681728"/>
+          </a:xfrm>
+          <a:prstGeom prst="rect">
+            <a:avLst/>
+          </a:prstGeom>
+        </p:spPr>
+      </p:pic>
+      <p:sp>
+        <p:nvSpPr>
+          <p:cNvPr id="23" name="TextBox 22"/>
           <p:cNvSpPr txBox="1"/>
           <p:nvPr/>
         </p:nvSpPr>
         <p:spPr>
           <a:xfrm>
-            <a:off x="457200" y="1170432"/>
-            <a:ext cx="11277295" cy="5230368"/>
+            <a:off x="5870301" y="5961888"/>
+            <a:ext cx="5864193" cy="320040"/>
+          </a:xfrm>
+          <a:prstGeom prst="rect">
+            <a:avLst/>
+          </a:prstGeom>
+          <a:noFill/>
+        </p:spPr>
+        <p:txBody>
+          <a:bodyPr wrap="square">
+            <a:spAutoFit/>
+          </a:bodyPr>
+          <a:lstStyle/>
+          <a:p>
+            <a:pPr algn="ctr"/>
+            <a:r>
+              <a:rPr sz="1100" b="0" i="1">
+                <a:solidFill>
+                  <a:srgbClr val="666666"/>
+                </a:solidFill>
+                <a:latin typeface="Calibri"/>
+              </a:rPr>
+              <a:t>Clic para avanzar la animación</a:t>
+            </a:r>
+          </a:p>
+        </p:txBody>
+      </p:sp>
+      <p:sp>
+        <p:nvSpPr>
+          <p:cNvPr id="24" name="TextBox 23"/>
+          <p:cNvSpPr txBox="1"/>
+          <p:nvPr/>
+        </p:nvSpPr>
+        <p:spPr>
+          <a:xfrm>
+            <a:off x="457200" y="1353312"/>
+            <a:ext cx="5093061" cy="5047488"/>
           </a:xfrm>
           <a:prstGeom prst="rect">
             <a:avLst/>
@@ -4470,7 +4984,7 @@
                 </a:solidFill>
                 <a:latin typeface="Calibri"/>
               </a:rPr>
-              <a:t>–   La retroalimentacion es la mitad del valor del dia y tiene tecnica propia.</a:t>
+              <a:t>–   Una observación accionable tiene cuatro partes: observación, evidencia, impacto y acción con fecha.</a:t>
             </a:r>
           </a:p>
           <a:p>
@@ -4486,7 +5000,7 @@
                 </a:solidFill>
                 <a:latin typeface="Calibri"/>
               </a:rPr>
-              <a:t>–   Una observacion accionable tiene cuatro partes: observacion, evidencia, impacto y accion con fecha.</a:t>
+              <a:t>–   «Falta seguridad» o «mejorar el diagrama» no cumplen ninguna: no dicen qué, ni dónde, ni cuándo.</a:t>
             </a:r>
           </a:p>
           <a:p>
@@ -4502,30 +5016,14 @@
                 </a:solidFill>
                 <a:latin typeface="Calibri"/>
               </a:rPr>
-              <a:t>–   Ejemplo: «el despliegue llama backend a la API de turnos (observacion); se ve en la caja central (evidencia); rompe la trazabilidad con el Containers (impacto); unificar el nombre antes de la proxima revision (accion con fecha)».</a:t>
-            </a:r>
-          </a:p>
-          <a:p>
-            <a:pPr>
-              <a:spcAft>
-                <a:spcPts val="800"/>
-              </a:spcAft>
-            </a:pPr>
-            <a:r>
-              <a:rPr sz="2000" b="0" i="0">
-                <a:solidFill>
-                  <a:srgbClr val="333333"/>
-                </a:solidFill>
-                <a:latin typeface="Calibri"/>
-              </a:rPr>
-              <a:t>–   Un comentario como «mejorar el diagrama» no es accionable: no dice que, ni donde, ni cuando.</a:t>
-            </a:r>
-          </a:p>
-        </p:txBody>
-      </p:sp>
-      <p:sp>
-        <p:nvSpPr>
-          <p:cNvPr id="6" name="TextBox 5"/>
+              <a:t>–   Tres hallazgos por proyecto como máximo, marcando cuál bloquea, y una fortaleza concreta que conservar.</a:t>
+            </a:r>
+          </a:p>
+        </p:txBody>
+      </p:sp>
+      <p:sp>
+        <p:nvSpPr>
+          <p:cNvPr id="25" name="TextBox 24"/>
           <p:cNvSpPr txBox="1"/>
           <p:nvPr/>
         </p:nvSpPr>
@@ -4563,6 +5061,248 @@
   <p:clrMapOvr>
     <a:masterClrMapping/>
   </p:clrMapOvr>
+  <p:timing>
+    <p:tnLst>
+      <p:par>
+        <p:cTn id="1" dur="indefinite" restart="never" nodeType="tmRoot">
+          <p:childTnLst>
+            <p:seq concurrent="1" nextAc="seek">
+              <p:cTn id="2" dur="indefinite" nodeType="mainSeq">
+                <p:childTnLst>
+                  <p:par>
+                    <p:cTn id="3" fill="hold">
+                      <p:stCondLst>
+                        <p:cond delay="indefinite"/>
+                      </p:stCondLst>
+                      <p:childTnLst>
+                        <p:par>
+                          <p:cTn id="4" fill="hold">
+                            <p:stCondLst>
+                              <p:cond delay="0"/>
+                            </p:stCondLst>
+                            <p:childTnLst>
+                              <p:par>
+                                <p:cTn id="5" presetID="10" presetClass="entr" presetSubtype="0" fill="hold" nodeType="clickEffect">
+                                  <p:stCondLst>
+                                    <p:cond delay="0"/>
+                                  </p:stCondLst>
+                                  <p:childTnLst>
+                                    <p:set>
+                                      <p:cBhvr>
+                                        <p:cTn id="6" dur="1" fill="hold">
+                                          <p:stCondLst>
+                                            <p:cond delay="0"/>
+                                          </p:stCondLst>
+                                        </p:cTn>
+                                        <p:tgtEl>
+                                          <p:spTgt spid="7"/>
+                                        </p:tgtEl>
+                                        <p:attrNameLst>
+                                          <p:attrName>style.visibility</p:attrName>
+                                        </p:attrNameLst>
+                                      </p:cBhvr>
+                                      <p:to>
+                                        <p:strVal val="visible"/>
+                                      </p:to>
+                                    </p:set>
+                                    <p:animEffect transition="in" filter="fade">
+                                      <p:cBhvr>
+                                        <p:cTn id="7" dur="450"/>
+                                        <p:tgtEl>
+                                          <p:spTgt spid="7"/>
+                                        </p:tgtEl>
+                                      </p:cBhvr>
+                                    </p:animEffect>
+                                  </p:childTnLst>
+                                </p:cTn>
+                              </p:par>
+                            </p:childTnLst>
+                          </p:cTn>
+                        </p:par>
+                      </p:childTnLst>
+                    </p:cTn>
+                  </p:par>
+                  <p:par>
+                    <p:cTn id="8" fill="hold">
+                      <p:stCondLst>
+                        <p:cond delay="indefinite"/>
+                      </p:stCondLst>
+                      <p:childTnLst>
+                        <p:par>
+                          <p:cTn id="9" fill="hold">
+                            <p:stCondLst>
+                              <p:cond delay="0"/>
+                            </p:stCondLst>
+                            <p:childTnLst>
+                              <p:par>
+                                <p:cTn id="10" presetID="10" presetClass="entr" presetSubtype="0" fill="hold" nodeType="clickEffect">
+                                  <p:stCondLst>
+                                    <p:cond delay="0"/>
+                                  </p:stCondLst>
+                                  <p:childTnLst>
+                                    <p:set>
+                                      <p:cBhvr>
+                                        <p:cTn id="11" dur="1" fill="hold">
+                                          <p:stCondLst>
+                                            <p:cond delay="0"/>
+                                          </p:stCondLst>
+                                        </p:cTn>
+                                        <p:tgtEl>
+                                          <p:spTgt spid="8"/>
+                                        </p:tgtEl>
+                                        <p:attrNameLst>
+                                          <p:attrName>style.visibility</p:attrName>
+                                        </p:attrNameLst>
+                                      </p:cBhvr>
+                                      <p:to>
+                                        <p:strVal val="visible"/>
+                                      </p:to>
+                                    </p:set>
+                                    <p:animEffect transition="in" filter="fade">
+                                      <p:cBhvr>
+                                        <p:cTn id="12" dur="450"/>
+                                        <p:tgtEl>
+                                          <p:spTgt spid="8"/>
+                                        </p:tgtEl>
+                                      </p:cBhvr>
+                                    </p:animEffect>
+                                  </p:childTnLst>
+                                </p:cTn>
+                              </p:par>
+                            </p:childTnLst>
+                          </p:cTn>
+                        </p:par>
+                      </p:childTnLst>
+                    </p:cTn>
+                  </p:par>
+                  <p:par>
+                    <p:cTn id="13" fill="hold">
+                      <p:stCondLst>
+                        <p:cond delay="indefinite"/>
+                      </p:stCondLst>
+                      <p:childTnLst>
+                        <p:par>
+                          <p:cTn id="14" fill="hold">
+                            <p:stCondLst>
+                              <p:cond delay="0"/>
+                            </p:stCondLst>
+                            <p:childTnLst>
+                              <p:par>
+                                <p:cTn id="15" presetID="10" presetClass="entr" presetSubtype="0" fill="hold" nodeType="clickEffect">
+                                  <p:stCondLst>
+                                    <p:cond delay="0"/>
+                                  </p:stCondLst>
+                                  <p:childTnLst>
+                                    <p:set>
+                                      <p:cBhvr>
+                                        <p:cTn id="16" dur="1" fill="hold">
+                                          <p:stCondLst>
+                                            <p:cond delay="0"/>
+                                          </p:stCondLst>
+                                        </p:cTn>
+                                        <p:tgtEl>
+                                          <p:spTgt spid="9"/>
+                                        </p:tgtEl>
+                                        <p:attrNameLst>
+                                          <p:attrName>style.visibility</p:attrName>
+                                        </p:attrNameLst>
+                                      </p:cBhvr>
+                                      <p:to>
+                                        <p:strVal val="visible"/>
+                                      </p:to>
+                                    </p:set>
+                                    <p:animEffect transition="in" filter="fade">
+                                      <p:cBhvr>
+                                        <p:cTn id="17" dur="450"/>
+                                        <p:tgtEl>
+                                          <p:spTgt spid="9"/>
+                                        </p:tgtEl>
+                                      </p:cBhvr>
+                                    </p:animEffect>
+                                  </p:childTnLst>
+                                </p:cTn>
+                              </p:par>
+                            </p:childTnLst>
+                          </p:cTn>
+                        </p:par>
+                      </p:childTnLst>
+                    </p:cTn>
+                  </p:par>
+                  <p:par>
+                    <p:cTn id="18" fill="hold">
+                      <p:stCondLst>
+                        <p:cond delay="indefinite"/>
+                      </p:stCondLst>
+                      <p:childTnLst>
+                        <p:par>
+                          <p:cTn id="19" fill="hold">
+                            <p:stCondLst>
+                              <p:cond delay="0"/>
+                            </p:stCondLst>
+                            <p:childTnLst>
+                              <p:par>
+                                <p:cTn id="20" presetID="10" presetClass="entr" presetSubtype="0" fill="hold" nodeType="clickEffect">
+                                  <p:stCondLst>
+                                    <p:cond delay="0"/>
+                                  </p:stCondLst>
+                                  <p:childTnLst>
+                                    <p:set>
+                                      <p:cBhvr>
+                                        <p:cTn id="21" dur="1" fill="hold">
+                                          <p:stCondLst>
+                                            <p:cond delay="0"/>
+                                          </p:stCondLst>
+                                        </p:cTn>
+                                        <p:tgtEl>
+                                          <p:spTgt spid="10"/>
+                                        </p:tgtEl>
+                                        <p:attrNameLst>
+                                          <p:attrName>style.visibility</p:attrName>
+                                        </p:attrNameLst>
+                                      </p:cBhvr>
+                                      <p:to>
+                                        <p:strVal val="visible"/>
+                                      </p:to>
+                                    </p:set>
+                                    <p:animEffect transition="in" filter="fade">
+                                      <p:cBhvr>
+                                        <p:cTn id="22" dur="450"/>
+                                        <p:tgtEl>
+                                          <p:spTgt spid="10"/>
+                                        </p:tgtEl>
+                                      </p:cBhvr>
+                                    </p:animEffect>
+                                  </p:childTnLst>
+                                </p:cTn>
+                              </p:par>
+                            </p:childTnLst>
+                          </p:cTn>
+                        </p:par>
+                      </p:childTnLst>
+                    </p:cTn>
+                  </p:par>
+                </p:childTnLst>
+              </p:cTn>
+              <p:prevCondLst>
+                <p:cond evt="onPrev" delay="0">
+                  <p:tgtEl>
+                    <p:sldTgt/>
+                  </p:tgtEl>
+                </p:cond>
+              </p:prevCondLst>
+              <p:nextCondLst>
+                <p:cond evt="onNext" delay="0">
+                  <p:tgtEl>
+                    <p:sldTgt/>
+                  </p:tgtEl>
+                </p:cond>
+              </p:nextCondLst>
+            </p:seq>
+          </p:childTnLst>
+        </p:cTn>
+      </p:par>
+    </p:tnLst>
+  </p:timing>
 </p:sld>
 </file>
 
@@ -4699,21 +5439,173 @@
                 </a:solidFill>
                 <a:latin typeface="Calibri"/>
               </a:rPr>
-              <a:t>El semaforo: el umbral que decide si el proyecto va a tiempo (1/2)</a:t>
-            </a:r>
-          </a:p>
-        </p:txBody>
-      </p:sp>
-      <p:sp>
-        <p:nvSpPr>
-          <p:cNvPr id="5" name="TextBox 4"/>
+              <a:t>El semaforo: el umbral que decide si el proyecto va a tiempo</a:t>
+            </a:r>
+          </a:p>
+        </p:txBody>
+      </p:sp>
+      <p:sp>
+        <p:nvSpPr>
+          <p:cNvPr id="5" name="Rounded Rectangle 4"/>
+          <p:cNvSpPr/>
+          <p:nvPr/>
+        </p:nvSpPr>
+        <p:spPr>
+          <a:xfrm>
+            <a:off x="5803166" y="1188719"/>
+            <a:ext cx="5998464" cy="4828032"/>
+          </a:xfrm>
+          <a:prstGeom prst="roundRect">
+            <a:avLst>
+              <a:gd name="adj" fmla="val 4000"/>
+            </a:avLst>
+          </a:prstGeom>
+          <a:solidFill>
+            <a:srgbClr val="E8EEF4"/>
+          </a:solidFill>
+          <a:ln>
+            <a:noFill/>
+          </a:ln>
+        </p:spPr>
+        <p:style>
+          <a:lnRef idx="1">
+            <a:schemeClr val="accent1"/>
+          </a:lnRef>
+          <a:fillRef idx="3">
+            <a:schemeClr val="accent1"/>
+          </a:fillRef>
+          <a:effectRef idx="2">
+            <a:schemeClr val="accent1"/>
+          </a:effectRef>
+          <a:fontRef idx="minor">
+            <a:schemeClr val="lt1"/>
+          </a:fontRef>
+        </p:style>
+        <p:txBody>
+          <a:bodyPr rtlCol="0" anchor="ctr"/>
+          <a:lstStyle/>
+          <a:p>
+            <a:pPr algn="ctr"/>
+          </a:p>
+        </p:txBody>
+      </p:sp>
+      <p:pic>
+        <p:nvPicPr>
+          <p:cNvPr id="6" name="Picture 5" descr="semaforo-paso1.png"/>
+          <p:cNvPicPr>
+            <a:picLocks noChangeAspect="1"/>
+          </p:cNvPicPr>
+          <p:nvPr/>
+        </p:nvPicPr>
+        <p:blipFill>
+          <a:blip r:embed="rId2"/>
+          <a:stretch>
+            <a:fillRect/>
+          </a:stretch>
+        </p:blipFill>
+        <p:spPr>
+          <a:xfrm>
+            <a:off x="5876318" y="1261872"/>
+            <a:ext cx="5852160" cy="4681728"/>
+          </a:xfrm>
+          <a:prstGeom prst="rect">
+            <a:avLst/>
+          </a:prstGeom>
+        </p:spPr>
+      </p:pic>
+      <p:pic>
+        <p:nvPicPr>
+          <p:cNvPr id="7" name="Picture 6" descr="semaforo-paso2.png"/>
+          <p:cNvPicPr>
+            <a:picLocks noChangeAspect="1"/>
+          </p:cNvPicPr>
+          <p:nvPr/>
+        </p:nvPicPr>
+        <p:blipFill>
+          <a:blip r:embed="rId3"/>
+          <a:stretch>
+            <a:fillRect/>
+          </a:stretch>
+        </p:blipFill>
+        <p:spPr>
+          <a:xfrm>
+            <a:off x="5876318" y="1261872"/>
+            <a:ext cx="5852160" cy="4681728"/>
+          </a:xfrm>
+          <a:prstGeom prst="rect">
+            <a:avLst/>
+          </a:prstGeom>
+        </p:spPr>
+      </p:pic>
+      <p:pic>
+        <p:nvPicPr>
+          <p:cNvPr id="8" name="Picture 7" descr="semaforo-paso3.png"/>
+          <p:cNvPicPr>
+            <a:picLocks noChangeAspect="1"/>
+          </p:cNvPicPr>
+          <p:nvPr/>
+        </p:nvPicPr>
+        <p:blipFill>
+          <a:blip r:embed="rId4"/>
+          <a:stretch>
+            <a:fillRect/>
+          </a:stretch>
+        </p:blipFill>
+        <p:spPr>
+          <a:xfrm>
+            <a:off x="5876318" y="1261872"/>
+            <a:ext cx="5852160" cy="4681728"/>
+          </a:xfrm>
+          <a:prstGeom prst="rect">
+            <a:avLst/>
+          </a:prstGeom>
+        </p:spPr>
+      </p:pic>
+      <p:sp>
+        <p:nvSpPr>
+          <p:cNvPr id="13" name="TextBox 12"/>
           <p:cNvSpPr txBox="1"/>
           <p:nvPr/>
         </p:nvSpPr>
         <p:spPr>
           <a:xfrm>
-            <a:off x="457200" y="1170432"/>
-            <a:ext cx="11277295" cy="5230368"/>
+            <a:off x="5870301" y="5961888"/>
+            <a:ext cx="5864193" cy="320040"/>
+          </a:xfrm>
+          <a:prstGeom prst="rect">
+            <a:avLst/>
+          </a:prstGeom>
+          <a:noFill/>
+        </p:spPr>
+        <p:txBody>
+          <a:bodyPr wrap="square">
+            <a:spAutoFit/>
+          </a:bodyPr>
+          <a:lstStyle/>
+          <a:p>
+            <a:pPr algn="ctr"/>
+            <a:r>
+              <a:rPr sz="1100" b="0" i="1">
+                <a:solidFill>
+                  <a:srgbClr val="666666"/>
+                </a:solidFill>
+                <a:latin typeface="Calibri"/>
+              </a:rPr>
+              <a:t>Clic para avanzar la animación</a:t>
+            </a:r>
+          </a:p>
+        </p:txBody>
+      </p:sp>
+      <p:sp>
+        <p:nvSpPr>
+          <p:cNvPr id="14" name="TextBox 13"/>
+          <p:cNvSpPr txBox="1"/>
+          <p:nvPr/>
+        </p:nvSpPr>
+        <p:spPr>
+          <a:xfrm>
+            <a:off x="457200" y="1353312"/>
+            <a:ext cx="5093061" cy="5047488"/>
           </a:xfrm>
           <a:prstGeom prst="rect">
             <a:avLst/>
@@ -4738,7 +5630,7 @@
                 </a:solidFill>
                 <a:latin typeface="Calibri"/>
               </a:rPr>
-              <a:t>–   Con seis artefactos esperados la regla practica es un semaforo: verde si estan los seis y a lo sumo una cadena de trazabilidad rota</a:t>
+              <a:t>–   Verde: los seis artefactos y a lo sumo una cadena de trazabilidad rota.</a:t>
             </a:r>
           </a:p>
           <a:p>
@@ -4754,7 +5646,7 @@
                 </a:solidFill>
                 <a:latin typeface="Calibri"/>
               </a:rPr>
-              <a:t>–   Amarillo si hay cinco de seis, o dos o tres cadenas rotas pero corregibles editando documentos; rojo si falta el C4 de Contenedores o el diagrama de despliegue</a:t>
+              <a:t>–   Amarillo: cinco de seis, o dos o tres cadenas rotas que se corrigen editando documentos.</a:t>
             </a:r>
           </a:p>
           <a:p>
@@ -4770,7 +5662,7 @@
                 </a:solidFill>
                 <a:latin typeface="Calibri"/>
               </a:rPr>
-              <a:t>–   Que son la columna vertebral y sin los cuales el resto no se puede evaluar, o si el repositorio no existe.</a:t>
+              <a:t>–   Rojo: falta el C4 de Contenedores o el Despliegue, o no hay repositorio.</a:t>
             </a:r>
           </a:p>
           <a:p>
@@ -4786,14 +5678,14 @@
                 </a:solidFill>
                 <a:latin typeface="Calibri"/>
               </a:rPr>
-              <a:t>–   Lo transferible es la idea de fondo: un checkpoint se evalua por evidencia presente, no por promesas.</a:t>
-            </a:r>
-          </a:p>
-        </p:txBody>
-      </p:sp>
-      <p:sp>
-        <p:nvSpPr>
-          <p:cNvPr id="6" name="TextBox 5"/>
+              <a:t>–   Un checkpoint se evalúa por evidencia presente, no por promesas.</a:t>
+            </a:r>
+          </a:p>
+        </p:txBody>
+      </p:sp>
+      <p:sp>
+        <p:nvSpPr>
+          <p:cNvPr id="15" name="TextBox 14"/>
           <p:cNvSpPr txBox="1"/>
           <p:nvPr/>
         </p:nvSpPr>
@@ -4831,6 +5723,142 @@
   <p:clrMapOvr>
     <a:masterClrMapping/>
   </p:clrMapOvr>
+  <p:timing>
+    <p:tnLst>
+      <p:par>
+        <p:cTn id="1" dur="indefinite" restart="never" nodeType="tmRoot">
+          <p:childTnLst>
+            <p:seq concurrent="1" nextAc="seek">
+              <p:cTn id="2" dur="indefinite" nodeType="mainSeq">
+                <p:childTnLst>
+                  <p:par>
+                    <p:cTn id="3" fill="hold">
+                      <p:stCondLst>
+                        <p:cond delay="indefinite"/>
+                      </p:stCondLst>
+                      <p:childTnLst>
+                        <p:par>
+                          <p:cTn id="4" fill="hold">
+                            <p:stCondLst>
+                              <p:cond delay="0"/>
+                            </p:stCondLst>
+                            <p:childTnLst>
+                              <p:par>
+                                <p:cTn id="5" presetID="10" presetClass="entr" presetSubtype="0" fill="hold" nodeType="clickEffect">
+                                  <p:stCondLst>
+                                    <p:cond delay="0"/>
+                                  </p:stCondLst>
+                                  <p:childTnLst>
+                                    <p:set>
+                                      <p:cBhvr>
+                                        <p:cTn id="6" dur="1" fill="hold">
+                                          <p:stCondLst>
+                                            <p:cond delay="0"/>
+                                          </p:stCondLst>
+                                        </p:cTn>
+                                        <p:tgtEl>
+                                          <p:spTgt spid="7"/>
+                                        </p:tgtEl>
+                                        <p:attrNameLst>
+                                          <p:attrName>style.visibility</p:attrName>
+                                        </p:attrNameLst>
+                                      </p:cBhvr>
+                                      <p:to>
+                                        <p:strVal val="visible"/>
+                                      </p:to>
+                                    </p:set>
+                                    <p:animEffect transition="in" filter="fade">
+                                      <p:cBhvr>
+                                        <p:cTn id="7" dur="450"/>
+                                        <p:tgtEl>
+                                          <p:spTgt spid="7"/>
+                                        </p:tgtEl>
+                                      </p:cBhvr>
+                                    </p:animEffect>
+                                  </p:childTnLst>
+                                </p:cTn>
+                              </p:par>
+                            </p:childTnLst>
+                          </p:cTn>
+                        </p:par>
+                      </p:childTnLst>
+                    </p:cTn>
+                  </p:par>
+                  <p:par>
+                    <p:cTn id="8" fill="hold">
+                      <p:stCondLst>
+                        <p:cond delay="indefinite"/>
+                      </p:stCondLst>
+                      <p:childTnLst>
+                        <p:par>
+                          <p:cTn id="9" fill="hold">
+                            <p:stCondLst>
+                              <p:cond delay="0"/>
+                            </p:stCondLst>
+                            <p:childTnLst>
+                              <p:par>
+                                <p:cTn id="10" presetID="10" presetClass="entr" presetSubtype="0" fill="hold" nodeType="clickEffect">
+                                  <p:stCondLst>
+                                    <p:cond delay="0"/>
+                                  </p:stCondLst>
+                                  <p:childTnLst>
+                                    <p:set>
+                                      <p:cBhvr>
+                                        <p:cTn id="11" dur="1" fill="hold">
+                                          <p:stCondLst>
+                                            <p:cond delay="0"/>
+                                          </p:stCondLst>
+                                        </p:cTn>
+                                        <p:tgtEl>
+                                          <p:spTgt spid="8"/>
+                                        </p:tgtEl>
+                                        <p:attrNameLst>
+                                          <p:attrName>style.visibility</p:attrName>
+                                        </p:attrNameLst>
+                                      </p:cBhvr>
+                                      <p:to>
+                                        <p:strVal val="visible"/>
+                                      </p:to>
+                                    </p:set>
+                                    <p:animEffect transition="in" filter="fade">
+                                      <p:cBhvr>
+                                        <p:cTn id="12" dur="450"/>
+                                        <p:tgtEl>
+                                          <p:spTgt spid="8"/>
+                                        </p:tgtEl>
+                                      </p:cBhvr>
+                                    </p:animEffect>
+                                  </p:childTnLst>
+                                </p:cTn>
+                              </p:par>
+                            </p:childTnLst>
+                          </p:cTn>
+                        </p:par>
+                      </p:childTnLst>
+                    </p:cTn>
+                  </p:par>
+                </p:childTnLst>
+              </p:cTn>
+              <p:prevCondLst>
+                <p:cond evt="onPrev" delay="0">
+                  <p:tgtEl>
+                    <p:sldTgt/>
+                  </p:tgtEl>
+                </p:cond>
+              </p:prevCondLst>
+              <p:nextCondLst>
+                <p:cond evt="onNext" delay="0">
+                  <p:tgtEl>
+                    <p:sldTgt/>
+                  </p:tgtEl>
+                </p:cond>
+              </p:nextCondLst>
+            </p:seq>
+          </p:childTnLst>
+        </p:cTn>
+      </p:par>
+    </p:tnLst>
+  </p:timing>
 </p:sld>
 </file>
 
@@ -4861,7 +5889,7 @@
         <p:spPr>
           <a:xfrm>
             <a:off x="0" y="0"/>
-            <a:ext cx="12191695" cy="960120"/>
+            <a:ext cx="12191695" cy="1170432"/>
           </a:xfrm>
           <a:prstGeom prst="rect">
             <a:avLst/>
@@ -4903,7 +5931,7 @@
         </p:nvSpPr>
         <p:spPr>
           <a:xfrm>
-            <a:off x="0" y="960120"/>
+            <a:off x="0" y="1170432"/>
             <a:ext cx="12191695" cy="41148"/>
           </a:xfrm>
           <a:prstGeom prst="rect">
@@ -4947,7 +5975,7 @@
         <p:spPr>
           <a:xfrm>
             <a:off x="457200" y="164592"/>
-            <a:ext cx="11277295" cy="502920"/>
+            <a:ext cx="11277295" cy="384048"/>
           </a:xfrm>
           <a:prstGeom prst="rect">
             <a:avLst/>
@@ -4967,7 +5995,7 @@
                 </a:solidFill>
                 <a:latin typeface="Calibri"/>
               </a:rPr>
-              <a:t>El semaforo: el umbral que decide si el proyecto va a tiempo (2/2)</a:t>
+              <a:t>Del boceto al código Mermaid</a:t>
             </a:r>
           </a:p>
         </p:txBody>
@@ -4980,8 +6008,8 @@
         </p:nvSpPr>
         <p:spPr>
           <a:xfrm>
-            <a:off x="457200" y="1170432"/>
-            <a:ext cx="11277295" cy="5230368"/>
+            <a:off x="457200" y="566928"/>
+            <a:ext cx="11277295" cy="411480"/>
           </a:xfrm>
           <a:prstGeom prst="rect">
             <a:avLst/>
@@ -4994,42 +6022,705 @@
           </a:bodyPr>
           <a:lstStyle/>
           <a:p>
+            <a:r>
+              <a:rPr sz="1400" b="0" i="0">
+                <a:solidFill>
+                  <a:srgbClr val="B8D8EE"/>
+                </a:solidFill>
+                <a:latin typeface="Calibri"/>
+              </a:rPr>
+              <a:t>El diagrama se escribe como código: se versiona, se compara y se corrige</a:t>
+            </a:r>
+          </a:p>
+        </p:txBody>
+      </p:sp>
+      <p:sp>
+        <p:nvSpPr>
+          <p:cNvPr id="6" name="Rounded Rectangle 5"/>
+          <p:cNvSpPr/>
+          <p:nvPr/>
+        </p:nvSpPr>
+        <p:spPr>
+          <a:xfrm>
+            <a:off x="457200" y="1659636"/>
+            <a:ext cx="11277295" cy="1051560"/>
+          </a:xfrm>
+          <a:prstGeom prst="roundRect">
+            <a:avLst>
+              <a:gd name="adj" fmla="val 12000"/>
+            </a:avLst>
+          </a:prstGeom>
+          <a:solidFill>
+            <a:srgbClr val="F2F2F2"/>
+          </a:solidFill>
+          <a:ln>
+            <a:noFill/>
+          </a:ln>
+        </p:spPr>
+        <p:style>
+          <a:lnRef idx="1">
+            <a:schemeClr val="accent1"/>
+          </a:lnRef>
+          <a:fillRef idx="3">
+            <a:schemeClr val="accent1"/>
+          </a:fillRef>
+          <a:effectRef idx="2">
+            <a:schemeClr val="accent1"/>
+          </a:effectRef>
+          <a:fontRef idx="minor">
+            <a:schemeClr val="lt1"/>
+          </a:fontRef>
+        </p:style>
+        <p:txBody>
+          <a:bodyPr rtlCol="0" anchor="ctr"/>
+          <a:lstStyle/>
+          <a:p>
+            <a:pPr algn="ctr"/>
+          </a:p>
+        </p:txBody>
+      </p:sp>
+      <p:sp>
+        <p:nvSpPr>
+          <p:cNvPr id="7" name="Rounded Rectangle 6"/>
+          <p:cNvSpPr/>
+          <p:nvPr/>
+        </p:nvSpPr>
+        <p:spPr>
+          <a:xfrm>
+            <a:off x="594360" y="1965960"/>
+            <a:ext cx="438912" cy="438912"/>
+          </a:xfrm>
+          <a:prstGeom prst="roundRect">
+            <a:avLst>
+              <a:gd name="adj" fmla="val 12000"/>
+            </a:avLst>
+          </a:prstGeom>
+          <a:solidFill>
+            <a:srgbClr val="095292"/>
+          </a:solidFill>
+          <a:ln>
+            <a:noFill/>
+          </a:ln>
+        </p:spPr>
+        <p:style>
+          <a:lnRef idx="1">
+            <a:schemeClr val="accent1"/>
+          </a:lnRef>
+          <a:fillRef idx="3">
+            <a:schemeClr val="accent1"/>
+          </a:fillRef>
+          <a:effectRef idx="2">
+            <a:schemeClr val="accent1"/>
+          </a:effectRef>
+          <a:fontRef idx="minor">
+            <a:schemeClr val="lt1"/>
+          </a:fontRef>
+        </p:style>
+        <p:txBody>
+          <a:bodyPr rtlCol="0" anchor="ctr"/>
+          <a:lstStyle/>
+          <a:p>
+            <a:pPr algn="ctr"/>
+          </a:p>
+        </p:txBody>
+      </p:sp>
+      <p:sp>
+        <p:nvSpPr>
+          <p:cNvPr id="8" name="TextBox 7"/>
+          <p:cNvSpPr txBox="1"/>
+          <p:nvPr/>
+        </p:nvSpPr>
+        <p:spPr>
+          <a:xfrm>
+            <a:off x="594360" y="1965960"/>
+            <a:ext cx="438912" cy="438912"/>
+          </a:xfrm>
+          <a:prstGeom prst="rect">
+            <a:avLst/>
+          </a:prstGeom>
+          <a:noFill/>
+        </p:spPr>
+        <p:txBody>
+          <a:bodyPr wrap="square" anchor="ctr"/>
+          <a:lstStyle/>
+          <a:p>
+            <a:pPr algn="ctr"/>
+            <a:r>
+              <a:rPr sz="1600" b="1" i="0">
+                <a:solidFill>
+                  <a:srgbClr val="FFFFFF"/>
+                </a:solidFill>
+                <a:latin typeface="Calibri"/>
+              </a:rPr>
+              <a:t>1</a:t>
+            </a:r>
+          </a:p>
+        </p:txBody>
+      </p:sp>
+      <p:sp>
+        <p:nvSpPr>
+          <p:cNvPr id="9" name="TextBox 8"/>
+          <p:cNvSpPr txBox="1"/>
+          <p:nvPr/>
+        </p:nvSpPr>
+        <p:spPr>
+          <a:xfrm>
+            <a:off x="1188720" y="1751076"/>
+            <a:ext cx="10271455" cy="886968"/>
+          </a:xfrm>
+          <a:prstGeom prst="rect">
+            <a:avLst/>
+          </a:prstGeom>
+          <a:noFill/>
+        </p:spPr>
+        <p:txBody>
+          <a:bodyPr wrap="square" anchor="ctr"/>
+          <a:lstStyle/>
+          <a:p>
+            <a:r>
+              <a:rPr sz="1500" b="1" i="0">
+                <a:solidFill>
+                  <a:srgbClr val="095292"/>
+                </a:solidFill>
+                <a:latin typeface="Calibri"/>
+              </a:rPr>
+              <a:t>Diseña visual</a:t>
+            </a:r>
+          </a:p>
+          <a:p>
             <a:pPr>
-              <a:spcAft>
-                <a:spcPts val="800"/>
-              </a:spcAft>
+              <a:spcBef>
+                <a:spcPts val="200"/>
+              </a:spcBef>
             </a:pPr>
             <a:r>
-              <a:rPr sz="2000" b="0" i="0">
+              <a:rPr sz="1300" b="0" i="0">
                 <a:solidFill>
                   <a:srgbClr val="333333"/>
                 </a:solidFill>
                 <a:latin typeface="Calibri"/>
               </a:rPr>
-              <a:t>–   Cuando un estudiante dice "eso ya lo tenemos, solo falta subirlo", el estado es amarillo y el acta lo registra con fecha de cierre; no es desconfianza, es que en un proyecto lo que no esta en el repositorio no existe.</a:t>
+              <a:t>Dibuja el diagrama como quieras en Excalidraw o draw.io: es más rápido arrastrar cajas que escribir código, y ahí es donde se piensa el modelo.</a:t>
+            </a:r>
+          </a:p>
+        </p:txBody>
+      </p:sp>
+      <p:sp>
+        <p:nvSpPr>
+          <p:cNvPr id="10" name="Rounded Rectangle 9"/>
+          <p:cNvSpPr/>
+          <p:nvPr/>
+        </p:nvSpPr>
+        <p:spPr>
+          <a:xfrm>
+            <a:off x="457200" y="2802636"/>
+            <a:ext cx="11277295" cy="1051560"/>
+          </a:xfrm>
+          <a:prstGeom prst="roundRect">
+            <a:avLst>
+              <a:gd name="adj" fmla="val 12000"/>
+            </a:avLst>
+          </a:prstGeom>
+          <a:solidFill>
+            <a:srgbClr val="E8F4FA"/>
+          </a:solidFill>
+          <a:ln>
+            <a:noFill/>
+          </a:ln>
+        </p:spPr>
+        <p:style>
+          <a:lnRef idx="1">
+            <a:schemeClr val="accent1"/>
+          </a:lnRef>
+          <a:fillRef idx="3">
+            <a:schemeClr val="accent1"/>
+          </a:fillRef>
+          <a:effectRef idx="2">
+            <a:schemeClr val="accent1"/>
+          </a:effectRef>
+          <a:fontRef idx="minor">
+            <a:schemeClr val="lt1"/>
+          </a:fontRef>
+        </p:style>
+        <p:txBody>
+          <a:bodyPr rtlCol="0" anchor="ctr"/>
+          <a:lstStyle/>
+          <a:p>
+            <a:pPr algn="ctr"/>
+          </a:p>
+        </p:txBody>
+      </p:sp>
+      <p:sp>
+        <p:nvSpPr>
+          <p:cNvPr id="11" name="Rounded Rectangle 10"/>
+          <p:cNvSpPr/>
+          <p:nvPr/>
+        </p:nvSpPr>
+        <p:spPr>
+          <a:xfrm>
+            <a:off x="594360" y="3108960"/>
+            <a:ext cx="438912" cy="438912"/>
+          </a:xfrm>
+          <a:prstGeom prst="roundRect">
+            <a:avLst>
+              <a:gd name="adj" fmla="val 12000"/>
+            </a:avLst>
+          </a:prstGeom>
+          <a:solidFill>
+            <a:srgbClr val="095292"/>
+          </a:solidFill>
+          <a:ln>
+            <a:noFill/>
+          </a:ln>
+        </p:spPr>
+        <p:style>
+          <a:lnRef idx="1">
+            <a:schemeClr val="accent1"/>
+          </a:lnRef>
+          <a:fillRef idx="3">
+            <a:schemeClr val="accent1"/>
+          </a:fillRef>
+          <a:effectRef idx="2">
+            <a:schemeClr val="accent1"/>
+          </a:effectRef>
+          <a:fontRef idx="minor">
+            <a:schemeClr val="lt1"/>
+          </a:fontRef>
+        </p:style>
+        <p:txBody>
+          <a:bodyPr rtlCol="0" anchor="ctr"/>
+          <a:lstStyle/>
+          <a:p>
+            <a:pPr algn="ctr"/>
+          </a:p>
+        </p:txBody>
+      </p:sp>
+      <p:sp>
+        <p:nvSpPr>
+          <p:cNvPr id="12" name="TextBox 11"/>
+          <p:cNvSpPr txBox="1"/>
+          <p:nvPr/>
+        </p:nvSpPr>
+        <p:spPr>
+          <a:xfrm>
+            <a:off x="594360" y="3108960"/>
+            <a:ext cx="438912" cy="438912"/>
+          </a:xfrm>
+          <a:prstGeom prst="rect">
+            <a:avLst/>
+          </a:prstGeom>
+          <a:noFill/>
+        </p:spPr>
+        <p:txBody>
+          <a:bodyPr wrap="square" anchor="ctr"/>
+          <a:lstStyle/>
+          <a:p>
+            <a:pPr algn="ctr"/>
+            <a:r>
+              <a:rPr sz="1600" b="1" i="0">
+                <a:solidFill>
+                  <a:srgbClr val="FFFFFF"/>
+                </a:solidFill>
+                <a:latin typeface="Calibri"/>
+              </a:rPr>
+              <a:t>2</a:t>
+            </a:r>
+          </a:p>
+        </p:txBody>
+      </p:sp>
+      <p:sp>
+        <p:nvSpPr>
+          <p:cNvPr id="13" name="TextBox 12"/>
+          <p:cNvSpPr txBox="1"/>
+          <p:nvPr/>
+        </p:nvSpPr>
+        <p:spPr>
+          <a:xfrm>
+            <a:off x="1188720" y="2894076"/>
+            <a:ext cx="10271455" cy="886968"/>
+          </a:xfrm>
+          <a:prstGeom prst="rect">
+            <a:avLst/>
+          </a:prstGeom>
+          <a:noFill/>
+        </p:spPr>
+        <p:txBody>
+          <a:bodyPr wrap="square" anchor="ctr"/>
+          <a:lstStyle/>
+          <a:p>
+            <a:r>
+              <a:rPr sz="1500" b="1" i="0">
+                <a:solidFill>
+                  <a:srgbClr val="095292"/>
+                </a:solidFill>
+                <a:latin typeface="Calibri"/>
+              </a:rPr>
+              <a:t>Traduce con IA</a:t>
             </a:r>
           </a:p>
           <a:p>
             <a:pPr>
-              <a:spcAft>
-                <a:spcPts val="800"/>
-              </a:spcAft>
+              <a:spcBef>
+                <a:spcPts val="200"/>
+              </a:spcBef>
             </a:pPr>
             <a:r>
-              <a:rPr sz="2000" b="0" i="0">
+              <a:rPr sz="1300" b="0" i="0">
                 <a:solidFill>
                   <a:srgbClr val="333333"/>
                 </a:solidFill>
                 <a:latin typeface="Calibri"/>
               </a:rPr>
-              <a:t>–   Para un proyecto en rojo el plan de recuperacion debe reducir alcance, nunca agregar trabajo: menos capacidades, menos servicios, y toda la energia en las dos piezas que faltan.</a:t>
-            </a:r>
-          </a:p>
-        </p:txBody>
-      </p:sp>
-      <p:sp>
-        <p:nvSpPr>
-          <p:cNvPr id="6" name="TextBox 5"/>
+              <a:t>Describe tu boceto a una IA y pídele el código Mermaid usando C4Component. Revisa el resultado: la IA acierta la sintaxis, no tu modelo.</a:t>
+            </a:r>
+          </a:p>
+        </p:txBody>
+      </p:sp>
+      <p:sp>
+        <p:nvSpPr>
+          <p:cNvPr id="14" name="Rounded Rectangle 13"/>
+          <p:cNvSpPr/>
+          <p:nvPr/>
+        </p:nvSpPr>
+        <p:spPr>
+          <a:xfrm>
+            <a:off x="457200" y="3945636"/>
+            <a:ext cx="11277295" cy="1051560"/>
+          </a:xfrm>
+          <a:prstGeom prst="roundRect">
+            <a:avLst>
+              <a:gd name="adj" fmla="val 12000"/>
+            </a:avLst>
+          </a:prstGeom>
+          <a:solidFill>
+            <a:srgbClr val="F2F2F2"/>
+          </a:solidFill>
+          <a:ln>
+            <a:noFill/>
+          </a:ln>
+        </p:spPr>
+        <p:style>
+          <a:lnRef idx="1">
+            <a:schemeClr val="accent1"/>
+          </a:lnRef>
+          <a:fillRef idx="3">
+            <a:schemeClr val="accent1"/>
+          </a:fillRef>
+          <a:effectRef idx="2">
+            <a:schemeClr val="accent1"/>
+          </a:effectRef>
+          <a:fontRef idx="minor">
+            <a:schemeClr val="lt1"/>
+          </a:fontRef>
+        </p:style>
+        <p:txBody>
+          <a:bodyPr rtlCol="0" anchor="ctr"/>
+          <a:lstStyle/>
+          <a:p>
+            <a:pPr algn="ctr"/>
+          </a:p>
+        </p:txBody>
+      </p:sp>
+      <p:sp>
+        <p:nvSpPr>
+          <p:cNvPr id="15" name="Rounded Rectangle 14"/>
+          <p:cNvSpPr/>
+          <p:nvPr/>
+        </p:nvSpPr>
+        <p:spPr>
+          <a:xfrm>
+            <a:off x="594360" y="4251960"/>
+            <a:ext cx="438912" cy="438912"/>
+          </a:xfrm>
+          <a:prstGeom prst="roundRect">
+            <a:avLst>
+              <a:gd name="adj" fmla="val 12000"/>
+            </a:avLst>
+          </a:prstGeom>
+          <a:solidFill>
+            <a:srgbClr val="095292"/>
+          </a:solidFill>
+          <a:ln>
+            <a:noFill/>
+          </a:ln>
+        </p:spPr>
+        <p:style>
+          <a:lnRef idx="1">
+            <a:schemeClr val="accent1"/>
+          </a:lnRef>
+          <a:fillRef idx="3">
+            <a:schemeClr val="accent1"/>
+          </a:fillRef>
+          <a:effectRef idx="2">
+            <a:schemeClr val="accent1"/>
+          </a:effectRef>
+          <a:fontRef idx="minor">
+            <a:schemeClr val="lt1"/>
+          </a:fontRef>
+        </p:style>
+        <p:txBody>
+          <a:bodyPr rtlCol="0" anchor="ctr"/>
+          <a:lstStyle/>
+          <a:p>
+            <a:pPr algn="ctr"/>
+          </a:p>
+        </p:txBody>
+      </p:sp>
+      <p:sp>
+        <p:nvSpPr>
+          <p:cNvPr id="16" name="TextBox 15"/>
+          <p:cNvSpPr txBox="1"/>
+          <p:nvPr/>
+        </p:nvSpPr>
+        <p:spPr>
+          <a:xfrm>
+            <a:off x="594360" y="4251960"/>
+            <a:ext cx="438912" cy="438912"/>
+          </a:xfrm>
+          <a:prstGeom prst="rect">
+            <a:avLst/>
+          </a:prstGeom>
+          <a:noFill/>
+        </p:spPr>
+        <p:txBody>
+          <a:bodyPr wrap="square" anchor="ctr"/>
+          <a:lstStyle/>
+          <a:p>
+            <a:pPr algn="ctr"/>
+            <a:r>
+              <a:rPr sz="1600" b="1" i="0">
+                <a:solidFill>
+                  <a:srgbClr val="FFFFFF"/>
+                </a:solidFill>
+                <a:latin typeface="Calibri"/>
+              </a:rPr>
+              <a:t>3</a:t>
+            </a:r>
+          </a:p>
+        </p:txBody>
+      </p:sp>
+      <p:sp>
+        <p:nvSpPr>
+          <p:cNvPr id="17" name="TextBox 16"/>
+          <p:cNvSpPr txBox="1"/>
+          <p:nvPr/>
+        </p:nvSpPr>
+        <p:spPr>
+          <a:xfrm>
+            <a:off x="1188720" y="4037076"/>
+            <a:ext cx="10271455" cy="886968"/>
+          </a:xfrm>
+          <a:prstGeom prst="rect">
+            <a:avLst/>
+          </a:prstGeom>
+          <a:noFill/>
+        </p:spPr>
+        <p:txBody>
+          <a:bodyPr wrap="square" anchor="ctr"/>
+          <a:lstStyle/>
+          <a:p>
+            <a:r>
+              <a:rPr sz="1500" b="1" i="0">
+                <a:solidFill>
+                  <a:srgbClr val="095292"/>
+                </a:solidFill>
+                <a:latin typeface="Calibri"/>
+              </a:rPr>
+              <a:t>Renderiza en un visor</a:t>
+            </a:r>
+          </a:p>
+          <a:p>
+            <a:pPr>
+              <a:spcBef>
+                <a:spcPts val="200"/>
+              </a:spcBef>
+            </a:pPr>
+            <a:r>
+              <a:rPr sz="1300" b="0" i="0">
+                <a:solidFill>
+                  <a:srgbClr val="333333"/>
+                </a:solidFill>
+                <a:latin typeface="Calibri"/>
+              </a:rPr>
+              <a:t>Pega el código en un visor Mermaid (mermaid.live o la vista previa de tu editor) y míralo dibujado. Si no renderiza, corrige ahí: un end faltante o un rótulo sin comillas.</a:t>
+            </a:r>
+          </a:p>
+        </p:txBody>
+      </p:sp>
+      <p:sp>
+        <p:nvSpPr>
+          <p:cNvPr id="18" name="Rounded Rectangle 17"/>
+          <p:cNvSpPr/>
+          <p:nvPr/>
+        </p:nvSpPr>
+        <p:spPr>
+          <a:xfrm>
+            <a:off x="457200" y="5088636"/>
+            <a:ext cx="11277295" cy="1051560"/>
+          </a:xfrm>
+          <a:prstGeom prst="roundRect">
+            <a:avLst>
+              <a:gd name="adj" fmla="val 12000"/>
+            </a:avLst>
+          </a:prstGeom>
+          <a:solidFill>
+            <a:srgbClr val="E8F4FA"/>
+          </a:solidFill>
+          <a:ln>
+            <a:noFill/>
+          </a:ln>
+        </p:spPr>
+        <p:style>
+          <a:lnRef idx="1">
+            <a:schemeClr val="accent1"/>
+          </a:lnRef>
+          <a:fillRef idx="3">
+            <a:schemeClr val="accent1"/>
+          </a:fillRef>
+          <a:effectRef idx="2">
+            <a:schemeClr val="accent1"/>
+          </a:effectRef>
+          <a:fontRef idx="minor">
+            <a:schemeClr val="lt1"/>
+          </a:fontRef>
+        </p:style>
+        <p:txBody>
+          <a:bodyPr rtlCol="0" anchor="ctr"/>
+          <a:lstStyle/>
+          <a:p>
+            <a:pPr algn="ctr"/>
+          </a:p>
+        </p:txBody>
+      </p:sp>
+      <p:sp>
+        <p:nvSpPr>
+          <p:cNvPr id="19" name="Rounded Rectangle 18"/>
+          <p:cNvSpPr/>
+          <p:nvPr/>
+        </p:nvSpPr>
+        <p:spPr>
+          <a:xfrm>
+            <a:off x="594360" y="5394960"/>
+            <a:ext cx="438912" cy="438912"/>
+          </a:xfrm>
+          <a:prstGeom prst="roundRect">
+            <a:avLst>
+              <a:gd name="adj" fmla="val 12000"/>
+            </a:avLst>
+          </a:prstGeom>
+          <a:solidFill>
+            <a:srgbClr val="095292"/>
+          </a:solidFill>
+          <a:ln>
+            <a:noFill/>
+          </a:ln>
+        </p:spPr>
+        <p:style>
+          <a:lnRef idx="1">
+            <a:schemeClr val="accent1"/>
+          </a:lnRef>
+          <a:fillRef idx="3">
+            <a:schemeClr val="accent1"/>
+          </a:fillRef>
+          <a:effectRef idx="2">
+            <a:schemeClr val="accent1"/>
+          </a:effectRef>
+          <a:fontRef idx="minor">
+            <a:schemeClr val="lt1"/>
+          </a:fontRef>
+        </p:style>
+        <p:txBody>
+          <a:bodyPr rtlCol="0" anchor="ctr"/>
+          <a:lstStyle/>
+          <a:p>
+            <a:pPr algn="ctr"/>
+          </a:p>
+        </p:txBody>
+      </p:sp>
+      <p:sp>
+        <p:nvSpPr>
+          <p:cNvPr id="20" name="TextBox 19"/>
+          <p:cNvSpPr txBox="1"/>
+          <p:nvPr/>
+        </p:nvSpPr>
+        <p:spPr>
+          <a:xfrm>
+            <a:off x="594360" y="5394960"/>
+            <a:ext cx="438912" cy="438912"/>
+          </a:xfrm>
+          <a:prstGeom prst="rect">
+            <a:avLst/>
+          </a:prstGeom>
+          <a:noFill/>
+        </p:spPr>
+        <p:txBody>
+          <a:bodyPr wrap="square" anchor="ctr"/>
+          <a:lstStyle/>
+          <a:p>
+            <a:pPr algn="ctr"/>
+            <a:r>
+              <a:rPr sz="1600" b="1" i="0">
+                <a:solidFill>
+                  <a:srgbClr val="FFFFFF"/>
+                </a:solidFill>
+                <a:latin typeface="Calibri"/>
+              </a:rPr>
+              <a:t>4</a:t>
+            </a:r>
+          </a:p>
+        </p:txBody>
+      </p:sp>
+      <p:sp>
+        <p:nvSpPr>
+          <p:cNvPr id="21" name="TextBox 20"/>
+          <p:cNvSpPr txBox="1"/>
+          <p:nvPr/>
+        </p:nvSpPr>
+        <p:spPr>
+          <a:xfrm>
+            <a:off x="1188720" y="5180076"/>
+            <a:ext cx="10271455" cy="886968"/>
+          </a:xfrm>
+          <a:prstGeom prst="rect">
+            <a:avLst/>
+          </a:prstGeom>
+          <a:noFill/>
+        </p:spPr>
+        <p:txBody>
+          <a:bodyPr wrap="square" anchor="ctr"/>
+          <a:lstStyle/>
+          <a:p>
+            <a:r>
+              <a:rPr sz="1500" b="1" i="0">
+                <a:solidFill>
+                  <a:srgbClr val="095292"/>
+                </a:solidFill>
+                <a:latin typeface="Calibri"/>
+              </a:rPr>
+              <a:t>Guarda código e imagen</a:t>
+            </a:r>
+          </a:p>
+          <a:p>
+            <a:pPr>
+              <a:spcBef>
+                <a:spcPts val="200"/>
+              </a:spcBef>
+            </a:pPr>
+            <a:r>
+              <a:rPr sz="1300" b="0" i="0">
+                <a:solidFill>
+                  <a:srgbClr val="333333"/>
+                </a:solidFill>
+                <a:latin typeface="Calibri"/>
+              </a:rPr>
+              <a:t>El código es la fuente del diagrama: guárdalo con tu proyecto junto con el PNG exportado.</a:t>
+            </a:r>
+          </a:p>
+        </p:txBody>
+      </p:sp>
+      <p:sp>
+        <p:nvSpPr>
+          <p:cNvPr id="22" name="TextBox 21"/>
           <p:cNvSpPr txBox="1"/>
           <p:nvPr/>
         </p:nvSpPr>
@@ -5097,1501 +6788,6 @@
         <p:spPr>
           <a:xfrm>
             <a:off x="0" y="0"/>
-            <a:ext cx="12191695" cy="960120"/>
-          </a:xfrm>
-          <a:prstGeom prst="rect">
-            <a:avLst/>
-          </a:prstGeom>
-          <a:solidFill>
-            <a:srgbClr val="095292"/>
-          </a:solidFill>
-          <a:ln>
-            <a:noFill/>
-          </a:ln>
-        </p:spPr>
-        <p:style>
-          <a:lnRef idx="1">
-            <a:schemeClr val="accent1"/>
-          </a:lnRef>
-          <a:fillRef idx="3">
-            <a:schemeClr val="accent1"/>
-          </a:fillRef>
-          <a:effectRef idx="2">
-            <a:schemeClr val="accent1"/>
-          </a:effectRef>
-          <a:fontRef idx="minor">
-            <a:schemeClr val="lt1"/>
-          </a:fontRef>
-        </p:style>
-        <p:txBody>
-          <a:bodyPr rtlCol="0" anchor="ctr"/>
-          <a:lstStyle/>
-          <a:p>
-            <a:pPr algn="ctr"/>
-          </a:p>
-        </p:txBody>
-      </p:sp>
-      <p:sp>
-        <p:nvSpPr>
-          <p:cNvPr id="3" name="Rectangle 2"/>
-          <p:cNvSpPr/>
-          <p:nvPr/>
-        </p:nvSpPr>
-        <p:spPr>
-          <a:xfrm>
-            <a:off x="0" y="960120"/>
-            <a:ext cx="12191695" cy="41148"/>
-          </a:xfrm>
-          <a:prstGeom prst="rect">
-            <a:avLst/>
-          </a:prstGeom>
-          <a:solidFill>
-            <a:srgbClr val="FFD000"/>
-          </a:solidFill>
-          <a:ln>
-            <a:noFill/>
-          </a:ln>
-        </p:spPr>
-        <p:style>
-          <a:lnRef idx="1">
-            <a:schemeClr val="accent1"/>
-          </a:lnRef>
-          <a:fillRef idx="3">
-            <a:schemeClr val="accent1"/>
-          </a:fillRef>
-          <a:effectRef idx="2">
-            <a:schemeClr val="accent1"/>
-          </a:effectRef>
-          <a:fontRef idx="minor">
-            <a:schemeClr val="lt1"/>
-          </a:fontRef>
-        </p:style>
-        <p:txBody>
-          <a:bodyPr rtlCol="0" anchor="ctr"/>
-          <a:lstStyle/>
-          <a:p>
-            <a:pPr algn="ctr"/>
-          </a:p>
-        </p:txBody>
-      </p:sp>
-      <p:sp>
-        <p:nvSpPr>
-          <p:cNvPr id="4" name="TextBox 3"/>
-          <p:cNvSpPr txBox="1"/>
-          <p:nvPr/>
-        </p:nvSpPr>
-        <p:spPr>
-          <a:xfrm>
-            <a:off x="457200" y="164592"/>
-            <a:ext cx="11277295" cy="502920"/>
-          </a:xfrm>
-          <a:prstGeom prst="rect">
-            <a:avLst/>
-          </a:prstGeom>
-          <a:noFill/>
-        </p:spPr>
-        <p:txBody>
-          <a:bodyPr wrap="square">
-            <a:spAutoFit/>
-          </a:bodyPr>
-          <a:lstStyle/>
-          <a:p>
-            <a:r>
-              <a:rPr sz="2600" b="1" i="0">
-                <a:solidFill>
-                  <a:srgbClr val="FFFFFF"/>
-                </a:solidFill>
-                <a:latin typeface="Calibri"/>
-              </a:rPr>
-              <a:t>El C4 Component: por dentro de la API</a:t>
-            </a:r>
-          </a:p>
-        </p:txBody>
-      </p:sp>
-      <p:sp>
-        <p:nvSpPr>
-          <p:cNvPr id="5" name="Rounded Rectangle 4"/>
-          <p:cNvSpPr/>
-          <p:nvPr/>
-        </p:nvSpPr>
-        <p:spPr>
-          <a:xfrm>
-            <a:off x="457200" y="1261872"/>
-            <a:ext cx="11277295" cy="5093208"/>
-          </a:xfrm>
-          <a:prstGeom prst="roundRect">
-            <a:avLst>
-              <a:gd name="adj" fmla="val 12000"/>
-            </a:avLst>
-          </a:prstGeom>
-          <a:solidFill>
-            <a:srgbClr val="1E2A38"/>
-          </a:solidFill>
-          <a:ln>
-            <a:noFill/>
-          </a:ln>
-        </p:spPr>
-        <p:style>
-          <a:lnRef idx="1">
-            <a:schemeClr val="accent1"/>
-          </a:lnRef>
-          <a:fillRef idx="3">
-            <a:schemeClr val="accent1"/>
-          </a:fillRef>
-          <a:effectRef idx="2">
-            <a:schemeClr val="accent1"/>
-          </a:effectRef>
-          <a:fontRef idx="minor">
-            <a:schemeClr val="lt1"/>
-          </a:fontRef>
-        </p:style>
-        <p:txBody>
-          <a:bodyPr rtlCol="0" anchor="ctr"/>
-          <a:lstStyle/>
-          <a:p>
-            <a:pPr algn="ctr"/>
-          </a:p>
-        </p:txBody>
-      </p:sp>
-      <p:sp>
-        <p:nvSpPr>
-          <p:cNvPr id="6" name="Rectangle 5"/>
-          <p:cNvSpPr/>
-          <p:nvPr/>
-        </p:nvSpPr>
-        <p:spPr>
-          <a:xfrm>
-            <a:off x="457200" y="1261872"/>
-            <a:ext cx="11277295" cy="320040"/>
-          </a:xfrm>
-          <a:prstGeom prst="rect">
-            <a:avLst/>
-          </a:prstGeom>
-          <a:solidFill>
-            <a:srgbClr val="095292"/>
-          </a:solidFill>
-          <a:ln>
-            <a:noFill/>
-          </a:ln>
-        </p:spPr>
-        <p:style>
-          <a:lnRef idx="1">
-            <a:schemeClr val="accent1"/>
-          </a:lnRef>
-          <a:fillRef idx="3">
-            <a:schemeClr val="accent1"/>
-          </a:fillRef>
-          <a:effectRef idx="2">
-            <a:schemeClr val="accent1"/>
-          </a:effectRef>
-          <a:fontRef idx="minor">
-            <a:schemeClr val="lt1"/>
-          </a:fontRef>
-        </p:style>
-        <p:txBody>
-          <a:bodyPr rtlCol="0" anchor="ctr"/>
-          <a:lstStyle/>
-          <a:p>
-            <a:pPr algn="ctr"/>
-          </a:p>
-        </p:txBody>
-      </p:sp>
-      <p:sp>
-        <p:nvSpPr>
-          <p:cNvPr id="7" name="TextBox 6"/>
-          <p:cNvSpPr txBox="1"/>
-          <p:nvPr/>
-        </p:nvSpPr>
-        <p:spPr>
-          <a:xfrm>
-            <a:off x="685800" y="1307592"/>
-            <a:ext cx="10820095" cy="256032"/>
-          </a:xfrm>
-          <a:prstGeom prst="rect">
-            <a:avLst/>
-          </a:prstGeom>
-          <a:noFill/>
-        </p:spPr>
-        <p:txBody>
-          <a:bodyPr wrap="square" anchor="ctr"/>
-          <a:lstStyle/>
-          <a:p>
-            <a:r>
-              <a:rPr sz="1000" b="1" i="0">
-                <a:solidFill>
-                  <a:srgbClr val="269CCB"/>
-                </a:solidFill>
-                <a:latin typeface="Calibri"/>
-              </a:rPr>
-              <a:t>● ● ●</a:t>
-            </a:r>
-          </a:p>
-        </p:txBody>
-      </p:sp>
-      <p:sp>
-        <p:nvSpPr>
-          <p:cNvPr id="8" name="TextBox 7"/>
-          <p:cNvSpPr txBox="1"/>
-          <p:nvPr/>
-        </p:nvSpPr>
-        <p:spPr>
-          <a:xfrm>
-            <a:off x="777240" y="1719072"/>
-            <a:ext cx="10637215" cy="4453128"/>
-          </a:xfrm>
-          <a:prstGeom prst="rect">
-            <a:avLst/>
-          </a:prstGeom>
-          <a:noFill/>
-        </p:spPr>
-        <p:txBody>
-          <a:bodyPr wrap="square">
-            <a:spAutoFit/>
-          </a:bodyPr>
-          <a:lstStyle/>
-          <a:p>
-            <a:pPr>
-              <a:spcAft>
-                <a:spcPts val="371"/>
-              </a:spcAft>
-            </a:pPr>
-            <a:r>
-              <a:rPr sz="1300" b="0" i="0">
-                <a:solidFill>
-                  <a:srgbClr val="FFFFFF"/>
-                </a:solidFill>
-                <a:latin typeface="Calibri"/>
-              </a:rPr>
-              <a:t>flowchart TB</a:t>
-            </a:r>
-          </a:p>
-          <a:p>
-            <a:pPr>
-              <a:spcAft>
-                <a:spcPts val="371"/>
-              </a:spcAft>
-            </a:pPr>
-            <a:r>
-              <a:rPr sz="1300" b="0" i="0">
-                <a:solidFill>
-                  <a:srgbClr val="FFFFFF"/>
-                </a:solidFill>
-                <a:latin typeface="Calibri"/>
-              </a:rPr>
-              <a:t>  subgraph api[API REST de la app - Node + Express]</a:t>
-            </a:r>
-          </a:p>
-          <a:p>
-            <a:pPr>
-              <a:spcAft>
-                <a:spcPts val="371"/>
-              </a:spcAft>
-            </a:pPr>
-            <a:r>
-              <a:rPr sz="1300" b="0" i="0">
-                <a:solidFill>
-                  <a:srgbClr val="FFFFFF"/>
-                </a:solidFill>
-                <a:latin typeface="Calibri"/>
-              </a:rPr>
-              <a:t>    rutas[Capa de rutas&lt;br/&gt;valida entrada y responde HTTP]</a:t>
-            </a:r>
-          </a:p>
-          <a:p>
-            <a:pPr>
-              <a:spcAft>
-                <a:spcPts val="371"/>
-              </a:spcAft>
-            </a:pPr>
-            <a:r>
-              <a:rPr sz="1300" b="0" i="0">
-                <a:solidFill>
-                  <a:srgbClr val="FFFFFF"/>
-                </a:solidFill>
-                <a:latin typeface="Calibri"/>
-              </a:rPr>
-              <a:t>    servicio[Servicio de dominio&lt;br/&gt;reglas de &lt;su dominio&gt;]</a:t>
-            </a:r>
-          </a:p>
-          <a:p>
-            <a:pPr>
-              <a:spcAft>
-                <a:spcPts val="371"/>
-              </a:spcAft>
-            </a:pPr>
-            <a:r>
-              <a:rPr sz="1300" b="0" i="0">
-                <a:solidFill>
-                  <a:srgbClr val="FFFFFF"/>
-                </a:solidFill>
-                <a:latin typeface="Calibri"/>
-              </a:rPr>
-              <a:t>    repo[Repositorio&lt;br/&gt;consultas SQL]</a:t>
-            </a:r>
-          </a:p>
-          <a:p>
-            <a:pPr>
-              <a:spcAft>
-                <a:spcPts val="371"/>
-              </a:spcAft>
-            </a:pPr>
-            <a:r>
-              <a:rPr sz="1300" b="0" i="0">
-                <a:solidFill>
-                  <a:srgbClr val="FFFFFF"/>
-                </a:solidFill>
-                <a:latin typeface="Calibri"/>
-              </a:rPr>
-              <a:t>    auth[Autenticacion&lt;br/&gt;verifica el token]</a:t>
-            </a:r>
-          </a:p>
-          <a:p>
-            <a:pPr>
-              <a:spcAft>
-                <a:spcPts val="371"/>
-              </a:spcAft>
-            </a:pPr>
-            <a:r>
-              <a:rPr sz="1300" b="0" i="0">
-                <a:solidFill>
-                  <a:srgbClr val="FFFFFF"/>
-                </a:solidFill>
-                <a:latin typeface="Calibri"/>
-              </a:rPr>
-              <a:t>  end</a:t>
-            </a:r>
-          </a:p>
-          <a:p>
-            <a:pPr>
-              <a:spcAft>
-                <a:spcPts val="371"/>
-              </a:spcAft>
-            </a:pPr>
-            <a:r>
-              <a:rPr sz="1300" b="0" i="0">
-                <a:solidFill>
-                  <a:srgbClr val="FFFFFF"/>
-                </a:solidFill>
-                <a:latin typeface="Calibri"/>
-              </a:rPr>
-              <a:t/>
-            </a:r>
-          </a:p>
-          <a:p>
-            <a:pPr>
-              <a:spcAft>
-                <a:spcPts val="371"/>
-              </a:spcAft>
-            </a:pPr>
-            <a:r>
-              <a:rPr sz="1300" b="0" i="0">
-                <a:solidFill>
-                  <a:srgbClr val="FFFFFF"/>
-                </a:solidFill>
-                <a:latin typeface="Calibri"/>
-              </a:rPr>
-              <a:t>  web[Web SPA] --&gt;|JSON/HTTPS| rutas</a:t>
-            </a:r>
-          </a:p>
-          <a:p>
-            <a:pPr>
-              <a:spcAft>
-                <a:spcPts val="371"/>
-              </a:spcAft>
-            </a:pPr>
-            <a:r>
-              <a:rPr sz="1300" b="0" i="0">
-                <a:solidFill>
-                  <a:srgbClr val="FFFFFF"/>
-                </a:solidFill>
-                <a:latin typeface="Calibri"/>
-              </a:rPr>
-              <a:t>  rutas --&gt; auth</a:t>
-            </a:r>
-          </a:p>
-          <a:p>
-            <a:pPr>
-              <a:spcAft>
-                <a:spcPts val="371"/>
-              </a:spcAft>
-            </a:pPr>
-            <a:r>
-              <a:rPr sz="1300" b="0" i="0">
-                <a:solidFill>
-                  <a:srgbClr val="FFFFFF"/>
-                </a:solidFill>
-                <a:latin typeface="Calibri"/>
-              </a:rPr>
-              <a:t>  rutas --&gt; servicio</a:t>
-            </a:r>
-          </a:p>
-          <a:p>
-            <a:pPr>
-              <a:spcAft>
-                <a:spcPts val="371"/>
-              </a:spcAft>
-            </a:pPr>
-            <a:r>
-              <a:rPr sz="1300" b="0" i="0">
-                <a:solidFill>
-                  <a:srgbClr val="FFFFFF"/>
-                </a:solidFill>
-                <a:latin typeface="Calibri"/>
-              </a:rPr>
-              <a:t>  servicio --&gt; repo</a:t>
-            </a:r>
-          </a:p>
-          <a:p>
-            <a:pPr>
-              <a:spcAft>
-                <a:spcPts val="371"/>
-              </a:spcAft>
-            </a:pPr>
-            <a:r>
-              <a:rPr sz="1300" b="0" i="0">
-                <a:solidFill>
-                  <a:srgbClr val="FFFFFF"/>
-                </a:solidFill>
-                <a:latin typeface="Calibri"/>
-              </a:rPr>
-              <a:t>  repo --&gt;|SQL| db[(PostgreSQL)]</a:t>
-            </a:r>
-          </a:p>
-          <a:p>
-            <a:pPr>
-              <a:spcAft>
-                <a:spcPts val="371"/>
-              </a:spcAft>
-            </a:pPr>
-            <a:r>
-              <a:rPr sz="1300" b="0" i="0">
-                <a:solidFill>
-                  <a:srgbClr val="FFFFFF"/>
-                </a:solidFill>
-                <a:latin typeface="Calibri"/>
-              </a:rPr>
-              <a:t/>
-            </a:r>
-          </a:p>
-          <a:p>
-            <a:pPr>
-              <a:spcAft>
-                <a:spcPts val="371"/>
-              </a:spcAft>
-            </a:pPr>
-            <a:r>
-              <a:rPr sz="1300" b="0" i="0">
-                <a:solidFill>
-                  <a:srgbClr val="FFFFFF"/>
-                </a:solidFill>
-                <a:latin typeface="Calibri"/>
-              </a:rPr>
-              <a:t>%% La regla del nivel Component: las cajas son piezas de CODIGO dentro</a:t>
-            </a:r>
-          </a:p>
-          <a:p>
-            <a:pPr>
-              <a:spcAft>
-                <a:spcPts val="371"/>
-              </a:spcAft>
-            </a:pPr>
-            <a:r>
-              <a:rPr sz="1300" b="0" i="0">
-                <a:solidFill>
-                  <a:srgbClr val="FFFFFF"/>
-                </a:solidFill>
-                <a:latin typeface="Calibri"/>
-              </a:rPr>
-              <a:t>%% de UN container, no servicios nuevos. Si le pone un puerto, es un</a:t>
-            </a:r>
-          </a:p>
-          <a:p>
-            <a:pPr>
-              <a:spcAft>
-                <a:spcPts val="371"/>
-              </a:spcAft>
-            </a:pPr>
-            <a:r>
-              <a:rPr sz="1300" b="0" i="0">
-                <a:solidFill>
-                  <a:srgbClr val="FFFFFF"/>
-                </a:solidFill>
-                <a:latin typeface="Calibri"/>
-              </a:rPr>
-              <a:t>%% container y va en el diagrama de la Clase 4.</a:t>
-            </a:r>
-          </a:p>
-        </p:txBody>
-      </p:sp>
-      <p:sp>
-        <p:nvSpPr>
-          <p:cNvPr id="9" name="TextBox 8"/>
-          <p:cNvSpPr txBox="1"/>
-          <p:nvPr/>
-        </p:nvSpPr>
-        <p:spPr>
-          <a:xfrm>
-            <a:off x="11185855" y="6473952"/>
-            <a:ext cx="640080" cy="274320"/>
-          </a:xfrm>
-          <a:prstGeom prst="rect">
-            <a:avLst/>
-          </a:prstGeom>
-          <a:noFill/>
-        </p:spPr>
-        <p:txBody>
-          <a:bodyPr wrap="square">
-            <a:spAutoFit/>
-          </a:bodyPr>
-          <a:lstStyle/>
-          <a:p>
-            <a:pPr algn="r"/>
-            <a:r>
-              <a:rPr sz="1100" b="0" i="0">
-                <a:solidFill>
-                  <a:srgbClr val="666666"/>
-                </a:solidFill>
-                <a:latin typeface="Calibri"/>
-              </a:rPr>
-              <a:t>13</a:t>
-            </a:r>
-          </a:p>
-        </p:txBody>
-      </p:sp>
-    </p:spTree>
-  </p:cSld>
-  <p:clrMapOvr>
-    <a:masterClrMapping/>
-  </p:clrMapOvr>
-</p:sld>
-</file>
-
-<file path=ppt/slides/slide14.xml><?xml version="1.0" encoding="utf-8"?>
-<p:sld xmlns:a="http://schemas.openxmlformats.org/drawingml/2006/main" xmlns:p="http://schemas.openxmlformats.org/presentationml/2006/main" xmlns:r="http://schemas.openxmlformats.org/officeDocument/2006/relationships">
-  <p:cSld>
-    <p:bg>
-      <p:bgPr>
-        <a:solidFill>
-          <a:srgbClr val="FFFFFF"/>
-        </a:solidFill>
-        <a:effectLst/>
-      </p:bgPr>
-    </p:bg>
-    <p:spTree>
-      <p:nvGrpSpPr>
-        <p:cNvPr id="1" name=""/>
-        <p:cNvGrpSpPr/>
-        <p:nvPr/>
-      </p:nvGrpSpPr>
-      <p:grpSpPr/>
-      <p:sp>
-        <p:nvSpPr>
-          <p:cNvPr id="2" name="Rectangle 1"/>
-          <p:cNvSpPr/>
-          <p:nvPr/>
-        </p:nvSpPr>
-        <p:spPr>
-          <a:xfrm>
-            <a:off x="0" y="0"/>
-            <a:ext cx="12191695" cy="1170432"/>
-          </a:xfrm>
-          <a:prstGeom prst="rect">
-            <a:avLst/>
-          </a:prstGeom>
-          <a:solidFill>
-            <a:srgbClr val="095292"/>
-          </a:solidFill>
-          <a:ln>
-            <a:noFill/>
-          </a:ln>
-        </p:spPr>
-        <p:style>
-          <a:lnRef idx="1">
-            <a:schemeClr val="accent1"/>
-          </a:lnRef>
-          <a:fillRef idx="3">
-            <a:schemeClr val="accent1"/>
-          </a:fillRef>
-          <a:effectRef idx="2">
-            <a:schemeClr val="accent1"/>
-          </a:effectRef>
-          <a:fontRef idx="minor">
-            <a:schemeClr val="lt1"/>
-          </a:fontRef>
-        </p:style>
-        <p:txBody>
-          <a:bodyPr rtlCol="0" anchor="ctr"/>
-          <a:lstStyle/>
-          <a:p>
-            <a:pPr algn="ctr"/>
-          </a:p>
-        </p:txBody>
-      </p:sp>
-      <p:sp>
-        <p:nvSpPr>
-          <p:cNvPr id="3" name="Rectangle 2"/>
-          <p:cNvSpPr/>
-          <p:nvPr/>
-        </p:nvSpPr>
-        <p:spPr>
-          <a:xfrm>
-            <a:off x="0" y="1170432"/>
-            <a:ext cx="12191695" cy="41148"/>
-          </a:xfrm>
-          <a:prstGeom prst="rect">
-            <a:avLst/>
-          </a:prstGeom>
-          <a:solidFill>
-            <a:srgbClr val="FFD000"/>
-          </a:solidFill>
-          <a:ln>
-            <a:noFill/>
-          </a:ln>
-        </p:spPr>
-        <p:style>
-          <a:lnRef idx="1">
-            <a:schemeClr val="accent1"/>
-          </a:lnRef>
-          <a:fillRef idx="3">
-            <a:schemeClr val="accent1"/>
-          </a:fillRef>
-          <a:effectRef idx="2">
-            <a:schemeClr val="accent1"/>
-          </a:effectRef>
-          <a:fontRef idx="minor">
-            <a:schemeClr val="lt1"/>
-          </a:fontRef>
-        </p:style>
-        <p:txBody>
-          <a:bodyPr rtlCol="0" anchor="ctr"/>
-          <a:lstStyle/>
-          <a:p>
-            <a:pPr algn="ctr"/>
-          </a:p>
-        </p:txBody>
-      </p:sp>
-      <p:sp>
-        <p:nvSpPr>
-          <p:cNvPr id="4" name="TextBox 3"/>
-          <p:cNvSpPr txBox="1"/>
-          <p:nvPr/>
-        </p:nvSpPr>
-        <p:spPr>
-          <a:xfrm>
-            <a:off x="457200" y="164592"/>
-            <a:ext cx="11277295" cy="384048"/>
-          </a:xfrm>
-          <a:prstGeom prst="rect">
-            <a:avLst/>
-          </a:prstGeom>
-          <a:noFill/>
-        </p:spPr>
-        <p:txBody>
-          <a:bodyPr wrap="square">
-            <a:spAutoFit/>
-          </a:bodyPr>
-          <a:lstStyle/>
-          <a:p>
-            <a:r>
-              <a:rPr sz="2600" b="1" i="0">
-                <a:solidFill>
-                  <a:srgbClr val="FFFFFF"/>
-                </a:solidFill>
-                <a:latin typeface="Calibri"/>
-              </a:rPr>
-              <a:t>Del boceto al código Mermaid</a:t>
-            </a:r>
-          </a:p>
-        </p:txBody>
-      </p:sp>
-      <p:sp>
-        <p:nvSpPr>
-          <p:cNvPr id="5" name="TextBox 4"/>
-          <p:cNvSpPr txBox="1"/>
-          <p:nvPr/>
-        </p:nvSpPr>
-        <p:spPr>
-          <a:xfrm>
-            <a:off x="457200" y="566928"/>
-            <a:ext cx="11277295" cy="411480"/>
-          </a:xfrm>
-          <a:prstGeom prst="rect">
-            <a:avLst/>
-          </a:prstGeom>
-          <a:noFill/>
-        </p:spPr>
-        <p:txBody>
-          <a:bodyPr wrap="square">
-            <a:spAutoFit/>
-          </a:bodyPr>
-          <a:lstStyle/>
-          <a:p>
-            <a:r>
-              <a:rPr sz="1400" b="0" i="0">
-                <a:solidFill>
-                  <a:srgbClr val="B8D8EE"/>
-                </a:solidFill>
-                <a:latin typeface="Calibri"/>
-              </a:rPr>
-              <a:t>El diagrama se escribe como código: se versiona, se compara y se corrige</a:t>
-            </a:r>
-          </a:p>
-        </p:txBody>
-      </p:sp>
-      <p:sp>
-        <p:nvSpPr>
-          <p:cNvPr id="6" name="Rounded Rectangle 5"/>
-          <p:cNvSpPr/>
-          <p:nvPr/>
-        </p:nvSpPr>
-        <p:spPr>
-          <a:xfrm>
-            <a:off x="457200" y="1659636"/>
-            <a:ext cx="11277295" cy="1051560"/>
-          </a:xfrm>
-          <a:prstGeom prst="roundRect">
-            <a:avLst>
-              <a:gd name="adj" fmla="val 12000"/>
-            </a:avLst>
-          </a:prstGeom>
-          <a:solidFill>
-            <a:srgbClr val="F2F2F2"/>
-          </a:solidFill>
-          <a:ln>
-            <a:noFill/>
-          </a:ln>
-        </p:spPr>
-        <p:style>
-          <a:lnRef idx="1">
-            <a:schemeClr val="accent1"/>
-          </a:lnRef>
-          <a:fillRef idx="3">
-            <a:schemeClr val="accent1"/>
-          </a:fillRef>
-          <a:effectRef idx="2">
-            <a:schemeClr val="accent1"/>
-          </a:effectRef>
-          <a:fontRef idx="minor">
-            <a:schemeClr val="lt1"/>
-          </a:fontRef>
-        </p:style>
-        <p:txBody>
-          <a:bodyPr rtlCol="0" anchor="ctr"/>
-          <a:lstStyle/>
-          <a:p>
-            <a:pPr algn="ctr"/>
-          </a:p>
-        </p:txBody>
-      </p:sp>
-      <p:sp>
-        <p:nvSpPr>
-          <p:cNvPr id="7" name="Rounded Rectangle 6"/>
-          <p:cNvSpPr/>
-          <p:nvPr/>
-        </p:nvSpPr>
-        <p:spPr>
-          <a:xfrm>
-            <a:off x="594360" y="1965960"/>
-            <a:ext cx="438912" cy="438912"/>
-          </a:xfrm>
-          <a:prstGeom prst="roundRect">
-            <a:avLst>
-              <a:gd name="adj" fmla="val 12000"/>
-            </a:avLst>
-          </a:prstGeom>
-          <a:solidFill>
-            <a:srgbClr val="095292"/>
-          </a:solidFill>
-          <a:ln>
-            <a:noFill/>
-          </a:ln>
-        </p:spPr>
-        <p:style>
-          <a:lnRef idx="1">
-            <a:schemeClr val="accent1"/>
-          </a:lnRef>
-          <a:fillRef idx="3">
-            <a:schemeClr val="accent1"/>
-          </a:fillRef>
-          <a:effectRef idx="2">
-            <a:schemeClr val="accent1"/>
-          </a:effectRef>
-          <a:fontRef idx="minor">
-            <a:schemeClr val="lt1"/>
-          </a:fontRef>
-        </p:style>
-        <p:txBody>
-          <a:bodyPr rtlCol="0" anchor="ctr"/>
-          <a:lstStyle/>
-          <a:p>
-            <a:pPr algn="ctr"/>
-          </a:p>
-        </p:txBody>
-      </p:sp>
-      <p:sp>
-        <p:nvSpPr>
-          <p:cNvPr id="8" name="TextBox 7"/>
-          <p:cNvSpPr txBox="1"/>
-          <p:nvPr/>
-        </p:nvSpPr>
-        <p:spPr>
-          <a:xfrm>
-            <a:off x="594360" y="1965960"/>
-            <a:ext cx="438912" cy="438912"/>
-          </a:xfrm>
-          <a:prstGeom prst="rect">
-            <a:avLst/>
-          </a:prstGeom>
-          <a:noFill/>
-        </p:spPr>
-        <p:txBody>
-          <a:bodyPr wrap="square" anchor="ctr"/>
-          <a:lstStyle/>
-          <a:p>
-            <a:pPr algn="ctr"/>
-            <a:r>
-              <a:rPr sz="1600" b="1" i="0">
-                <a:solidFill>
-                  <a:srgbClr val="FFFFFF"/>
-                </a:solidFill>
-                <a:latin typeface="Calibri"/>
-              </a:rPr>
-              <a:t>1</a:t>
-            </a:r>
-          </a:p>
-        </p:txBody>
-      </p:sp>
-      <p:sp>
-        <p:nvSpPr>
-          <p:cNvPr id="9" name="TextBox 8"/>
-          <p:cNvSpPr txBox="1"/>
-          <p:nvPr/>
-        </p:nvSpPr>
-        <p:spPr>
-          <a:xfrm>
-            <a:off x="1188720" y="1751076"/>
-            <a:ext cx="10271455" cy="886968"/>
-          </a:xfrm>
-          <a:prstGeom prst="rect">
-            <a:avLst/>
-          </a:prstGeom>
-          <a:noFill/>
-        </p:spPr>
-        <p:txBody>
-          <a:bodyPr wrap="square" anchor="ctr"/>
-          <a:lstStyle/>
-          <a:p>
-            <a:r>
-              <a:rPr sz="1500" b="1" i="0">
-                <a:solidFill>
-                  <a:srgbClr val="095292"/>
-                </a:solidFill>
-                <a:latin typeface="Calibri"/>
-              </a:rPr>
-              <a:t>Diseña visual</a:t>
-            </a:r>
-          </a:p>
-          <a:p>
-            <a:pPr>
-              <a:spcBef>
-                <a:spcPts val="200"/>
-              </a:spcBef>
-            </a:pPr>
-            <a:r>
-              <a:rPr sz="1300" b="0" i="0">
-                <a:solidFill>
-                  <a:srgbClr val="333333"/>
-                </a:solidFill>
-                <a:latin typeface="Calibri"/>
-              </a:rPr>
-              <a:t>Dibuja el diagrama como quieras en Excalidraw o draw.io: es más rápido arrastrar cajas que escribir código, y ahí es donde se piensa el modelo.</a:t>
-            </a:r>
-          </a:p>
-        </p:txBody>
-      </p:sp>
-      <p:sp>
-        <p:nvSpPr>
-          <p:cNvPr id="10" name="Rounded Rectangle 9"/>
-          <p:cNvSpPr/>
-          <p:nvPr/>
-        </p:nvSpPr>
-        <p:spPr>
-          <a:xfrm>
-            <a:off x="457200" y="2802636"/>
-            <a:ext cx="11277295" cy="1051560"/>
-          </a:xfrm>
-          <a:prstGeom prst="roundRect">
-            <a:avLst>
-              <a:gd name="adj" fmla="val 12000"/>
-            </a:avLst>
-          </a:prstGeom>
-          <a:solidFill>
-            <a:srgbClr val="E8F4FA"/>
-          </a:solidFill>
-          <a:ln>
-            <a:noFill/>
-          </a:ln>
-        </p:spPr>
-        <p:style>
-          <a:lnRef idx="1">
-            <a:schemeClr val="accent1"/>
-          </a:lnRef>
-          <a:fillRef idx="3">
-            <a:schemeClr val="accent1"/>
-          </a:fillRef>
-          <a:effectRef idx="2">
-            <a:schemeClr val="accent1"/>
-          </a:effectRef>
-          <a:fontRef idx="minor">
-            <a:schemeClr val="lt1"/>
-          </a:fontRef>
-        </p:style>
-        <p:txBody>
-          <a:bodyPr rtlCol="0" anchor="ctr"/>
-          <a:lstStyle/>
-          <a:p>
-            <a:pPr algn="ctr"/>
-          </a:p>
-        </p:txBody>
-      </p:sp>
-      <p:sp>
-        <p:nvSpPr>
-          <p:cNvPr id="11" name="Rounded Rectangle 10"/>
-          <p:cNvSpPr/>
-          <p:nvPr/>
-        </p:nvSpPr>
-        <p:spPr>
-          <a:xfrm>
-            <a:off x="594360" y="3108960"/>
-            <a:ext cx="438912" cy="438912"/>
-          </a:xfrm>
-          <a:prstGeom prst="roundRect">
-            <a:avLst>
-              <a:gd name="adj" fmla="val 12000"/>
-            </a:avLst>
-          </a:prstGeom>
-          <a:solidFill>
-            <a:srgbClr val="095292"/>
-          </a:solidFill>
-          <a:ln>
-            <a:noFill/>
-          </a:ln>
-        </p:spPr>
-        <p:style>
-          <a:lnRef idx="1">
-            <a:schemeClr val="accent1"/>
-          </a:lnRef>
-          <a:fillRef idx="3">
-            <a:schemeClr val="accent1"/>
-          </a:fillRef>
-          <a:effectRef idx="2">
-            <a:schemeClr val="accent1"/>
-          </a:effectRef>
-          <a:fontRef idx="minor">
-            <a:schemeClr val="lt1"/>
-          </a:fontRef>
-        </p:style>
-        <p:txBody>
-          <a:bodyPr rtlCol="0" anchor="ctr"/>
-          <a:lstStyle/>
-          <a:p>
-            <a:pPr algn="ctr"/>
-          </a:p>
-        </p:txBody>
-      </p:sp>
-      <p:sp>
-        <p:nvSpPr>
-          <p:cNvPr id="12" name="TextBox 11"/>
-          <p:cNvSpPr txBox="1"/>
-          <p:nvPr/>
-        </p:nvSpPr>
-        <p:spPr>
-          <a:xfrm>
-            <a:off x="594360" y="3108960"/>
-            <a:ext cx="438912" cy="438912"/>
-          </a:xfrm>
-          <a:prstGeom prst="rect">
-            <a:avLst/>
-          </a:prstGeom>
-          <a:noFill/>
-        </p:spPr>
-        <p:txBody>
-          <a:bodyPr wrap="square" anchor="ctr"/>
-          <a:lstStyle/>
-          <a:p>
-            <a:pPr algn="ctr"/>
-            <a:r>
-              <a:rPr sz="1600" b="1" i="0">
-                <a:solidFill>
-                  <a:srgbClr val="FFFFFF"/>
-                </a:solidFill>
-                <a:latin typeface="Calibri"/>
-              </a:rPr>
-              <a:t>2</a:t>
-            </a:r>
-          </a:p>
-        </p:txBody>
-      </p:sp>
-      <p:sp>
-        <p:nvSpPr>
-          <p:cNvPr id="13" name="TextBox 12"/>
-          <p:cNvSpPr txBox="1"/>
-          <p:nvPr/>
-        </p:nvSpPr>
-        <p:spPr>
-          <a:xfrm>
-            <a:off x="1188720" y="2894076"/>
-            <a:ext cx="10271455" cy="886968"/>
-          </a:xfrm>
-          <a:prstGeom prst="rect">
-            <a:avLst/>
-          </a:prstGeom>
-          <a:noFill/>
-        </p:spPr>
-        <p:txBody>
-          <a:bodyPr wrap="square" anchor="ctr"/>
-          <a:lstStyle/>
-          <a:p>
-            <a:r>
-              <a:rPr sz="1500" b="1" i="0">
-                <a:solidFill>
-                  <a:srgbClr val="095292"/>
-                </a:solidFill>
-                <a:latin typeface="Calibri"/>
-              </a:rPr>
-              <a:t>Traduce con IA</a:t>
-            </a:r>
-          </a:p>
-          <a:p>
-            <a:pPr>
-              <a:spcBef>
-                <a:spcPts val="200"/>
-              </a:spcBef>
-            </a:pPr>
-            <a:r>
-              <a:rPr sz="1300" b="0" i="0">
-                <a:solidFill>
-                  <a:srgbClr val="333333"/>
-                </a:solidFill>
-                <a:latin typeface="Calibri"/>
-              </a:rPr>
-              <a:t>Describe tu boceto a una IA y pídele el código Mermaid usando C4Component. Revisa el resultado: la IA acierta la sintaxis, no tu modelo.</a:t>
-            </a:r>
-          </a:p>
-        </p:txBody>
-      </p:sp>
-      <p:sp>
-        <p:nvSpPr>
-          <p:cNvPr id="14" name="Rounded Rectangle 13"/>
-          <p:cNvSpPr/>
-          <p:nvPr/>
-        </p:nvSpPr>
-        <p:spPr>
-          <a:xfrm>
-            <a:off x="457200" y="3945636"/>
-            <a:ext cx="11277295" cy="1051560"/>
-          </a:xfrm>
-          <a:prstGeom prst="roundRect">
-            <a:avLst>
-              <a:gd name="adj" fmla="val 12000"/>
-            </a:avLst>
-          </a:prstGeom>
-          <a:solidFill>
-            <a:srgbClr val="F2F2F2"/>
-          </a:solidFill>
-          <a:ln>
-            <a:noFill/>
-          </a:ln>
-        </p:spPr>
-        <p:style>
-          <a:lnRef idx="1">
-            <a:schemeClr val="accent1"/>
-          </a:lnRef>
-          <a:fillRef idx="3">
-            <a:schemeClr val="accent1"/>
-          </a:fillRef>
-          <a:effectRef idx="2">
-            <a:schemeClr val="accent1"/>
-          </a:effectRef>
-          <a:fontRef idx="minor">
-            <a:schemeClr val="lt1"/>
-          </a:fontRef>
-        </p:style>
-        <p:txBody>
-          <a:bodyPr rtlCol="0" anchor="ctr"/>
-          <a:lstStyle/>
-          <a:p>
-            <a:pPr algn="ctr"/>
-          </a:p>
-        </p:txBody>
-      </p:sp>
-      <p:sp>
-        <p:nvSpPr>
-          <p:cNvPr id="15" name="Rounded Rectangle 14"/>
-          <p:cNvSpPr/>
-          <p:nvPr/>
-        </p:nvSpPr>
-        <p:spPr>
-          <a:xfrm>
-            <a:off x="594360" y="4251960"/>
-            <a:ext cx="438912" cy="438912"/>
-          </a:xfrm>
-          <a:prstGeom prst="roundRect">
-            <a:avLst>
-              <a:gd name="adj" fmla="val 12000"/>
-            </a:avLst>
-          </a:prstGeom>
-          <a:solidFill>
-            <a:srgbClr val="095292"/>
-          </a:solidFill>
-          <a:ln>
-            <a:noFill/>
-          </a:ln>
-        </p:spPr>
-        <p:style>
-          <a:lnRef idx="1">
-            <a:schemeClr val="accent1"/>
-          </a:lnRef>
-          <a:fillRef idx="3">
-            <a:schemeClr val="accent1"/>
-          </a:fillRef>
-          <a:effectRef idx="2">
-            <a:schemeClr val="accent1"/>
-          </a:effectRef>
-          <a:fontRef idx="minor">
-            <a:schemeClr val="lt1"/>
-          </a:fontRef>
-        </p:style>
-        <p:txBody>
-          <a:bodyPr rtlCol="0" anchor="ctr"/>
-          <a:lstStyle/>
-          <a:p>
-            <a:pPr algn="ctr"/>
-          </a:p>
-        </p:txBody>
-      </p:sp>
-      <p:sp>
-        <p:nvSpPr>
-          <p:cNvPr id="16" name="TextBox 15"/>
-          <p:cNvSpPr txBox="1"/>
-          <p:nvPr/>
-        </p:nvSpPr>
-        <p:spPr>
-          <a:xfrm>
-            <a:off x="594360" y="4251960"/>
-            <a:ext cx="438912" cy="438912"/>
-          </a:xfrm>
-          <a:prstGeom prst="rect">
-            <a:avLst/>
-          </a:prstGeom>
-          <a:noFill/>
-        </p:spPr>
-        <p:txBody>
-          <a:bodyPr wrap="square" anchor="ctr"/>
-          <a:lstStyle/>
-          <a:p>
-            <a:pPr algn="ctr"/>
-            <a:r>
-              <a:rPr sz="1600" b="1" i="0">
-                <a:solidFill>
-                  <a:srgbClr val="FFFFFF"/>
-                </a:solidFill>
-                <a:latin typeface="Calibri"/>
-              </a:rPr>
-              <a:t>3</a:t>
-            </a:r>
-          </a:p>
-        </p:txBody>
-      </p:sp>
-      <p:sp>
-        <p:nvSpPr>
-          <p:cNvPr id="17" name="TextBox 16"/>
-          <p:cNvSpPr txBox="1"/>
-          <p:nvPr/>
-        </p:nvSpPr>
-        <p:spPr>
-          <a:xfrm>
-            <a:off x="1188720" y="4037076"/>
-            <a:ext cx="10271455" cy="886968"/>
-          </a:xfrm>
-          <a:prstGeom prst="rect">
-            <a:avLst/>
-          </a:prstGeom>
-          <a:noFill/>
-        </p:spPr>
-        <p:txBody>
-          <a:bodyPr wrap="square" anchor="ctr"/>
-          <a:lstStyle/>
-          <a:p>
-            <a:r>
-              <a:rPr sz="1500" b="1" i="0">
-                <a:solidFill>
-                  <a:srgbClr val="095292"/>
-                </a:solidFill>
-                <a:latin typeface="Calibri"/>
-              </a:rPr>
-              <a:t>Renderiza en un visor</a:t>
-            </a:r>
-          </a:p>
-          <a:p>
-            <a:pPr>
-              <a:spcBef>
-                <a:spcPts val="200"/>
-              </a:spcBef>
-            </a:pPr>
-            <a:r>
-              <a:rPr sz="1300" b="0" i="0">
-                <a:solidFill>
-                  <a:srgbClr val="333333"/>
-                </a:solidFill>
-                <a:latin typeface="Calibri"/>
-              </a:rPr>
-              <a:t>Pega el código en un visor Mermaid (mermaid.live o la vista previa de tu editor) y míralo dibujado. Si no renderiza, corrige ahí: un end faltante o un rótulo sin comillas.</a:t>
-            </a:r>
-          </a:p>
-        </p:txBody>
-      </p:sp>
-      <p:sp>
-        <p:nvSpPr>
-          <p:cNvPr id="18" name="Rounded Rectangle 17"/>
-          <p:cNvSpPr/>
-          <p:nvPr/>
-        </p:nvSpPr>
-        <p:spPr>
-          <a:xfrm>
-            <a:off x="457200" y="5088636"/>
-            <a:ext cx="11277295" cy="1051560"/>
-          </a:xfrm>
-          <a:prstGeom prst="roundRect">
-            <a:avLst>
-              <a:gd name="adj" fmla="val 12000"/>
-            </a:avLst>
-          </a:prstGeom>
-          <a:solidFill>
-            <a:srgbClr val="E8F4FA"/>
-          </a:solidFill>
-          <a:ln>
-            <a:noFill/>
-          </a:ln>
-        </p:spPr>
-        <p:style>
-          <a:lnRef idx="1">
-            <a:schemeClr val="accent1"/>
-          </a:lnRef>
-          <a:fillRef idx="3">
-            <a:schemeClr val="accent1"/>
-          </a:fillRef>
-          <a:effectRef idx="2">
-            <a:schemeClr val="accent1"/>
-          </a:effectRef>
-          <a:fontRef idx="minor">
-            <a:schemeClr val="lt1"/>
-          </a:fontRef>
-        </p:style>
-        <p:txBody>
-          <a:bodyPr rtlCol="0" anchor="ctr"/>
-          <a:lstStyle/>
-          <a:p>
-            <a:pPr algn="ctr"/>
-          </a:p>
-        </p:txBody>
-      </p:sp>
-      <p:sp>
-        <p:nvSpPr>
-          <p:cNvPr id="19" name="Rounded Rectangle 18"/>
-          <p:cNvSpPr/>
-          <p:nvPr/>
-        </p:nvSpPr>
-        <p:spPr>
-          <a:xfrm>
-            <a:off x="594360" y="5394960"/>
-            <a:ext cx="438912" cy="438912"/>
-          </a:xfrm>
-          <a:prstGeom prst="roundRect">
-            <a:avLst>
-              <a:gd name="adj" fmla="val 12000"/>
-            </a:avLst>
-          </a:prstGeom>
-          <a:solidFill>
-            <a:srgbClr val="095292"/>
-          </a:solidFill>
-          <a:ln>
-            <a:noFill/>
-          </a:ln>
-        </p:spPr>
-        <p:style>
-          <a:lnRef idx="1">
-            <a:schemeClr val="accent1"/>
-          </a:lnRef>
-          <a:fillRef idx="3">
-            <a:schemeClr val="accent1"/>
-          </a:fillRef>
-          <a:effectRef idx="2">
-            <a:schemeClr val="accent1"/>
-          </a:effectRef>
-          <a:fontRef idx="minor">
-            <a:schemeClr val="lt1"/>
-          </a:fontRef>
-        </p:style>
-        <p:txBody>
-          <a:bodyPr rtlCol="0" anchor="ctr"/>
-          <a:lstStyle/>
-          <a:p>
-            <a:pPr algn="ctr"/>
-          </a:p>
-        </p:txBody>
-      </p:sp>
-      <p:sp>
-        <p:nvSpPr>
-          <p:cNvPr id="20" name="TextBox 19"/>
-          <p:cNvSpPr txBox="1"/>
-          <p:nvPr/>
-        </p:nvSpPr>
-        <p:spPr>
-          <a:xfrm>
-            <a:off x="594360" y="5394960"/>
-            <a:ext cx="438912" cy="438912"/>
-          </a:xfrm>
-          <a:prstGeom prst="rect">
-            <a:avLst/>
-          </a:prstGeom>
-          <a:noFill/>
-        </p:spPr>
-        <p:txBody>
-          <a:bodyPr wrap="square" anchor="ctr"/>
-          <a:lstStyle/>
-          <a:p>
-            <a:pPr algn="ctr"/>
-            <a:r>
-              <a:rPr sz="1600" b="1" i="0">
-                <a:solidFill>
-                  <a:srgbClr val="FFFFFF"/>
-                </a:solidFill>
-                <a:latin typeface="Calibri"/>
-              </a:rPr>
-              <a:t>4</a:t>
-            </a:r>
-          </a:p>
-        </p:txBody>
-      </p:sp>
-      <p:sp>
-        <p:nvSpPr>
-          <p:cNvPr id="21" name="TextBox 20"/>
-          <p:cNvSpPr txBox="1"/>
-          <p:nvPr/>
-        </p:nvSpPr>
-        <p:spPr>
-          <a:xfrm>
-            <a:off x="1188720" y="5180076"/>
-            <a:ext cx="10271455" cy="886968"/>
-          </a:xfrm>
-          <a:prstGeom prst="rect">
-            <a:avLst/>
-          </a:prstGeom>
-          <a:noFill/>
-        </p:spPr>
-        <p:txBody>
-          <a:bodyPr wrap="square" anchor="ctr"/>
-          <a:lstStyle/>
-          <a:p>
-            <a:r>
-              <a:rPr sz="1500" b="1" i="0">
-                <a:solidFill>
-                  <a:srgbClr val="095292"/>
-                </a:solidFill>
-                <a:latin typeface="Calibri"/>
-              </a:rPr>
-              <a:t>Guarda código e imagen</a:t>
-            </a:r>
-          </a:p>
-          <a:p>
-            <a:pPr>
-              <a:spcBef>
-                <a:spcPts val="200"/>
-              </a:spcBef>
-            </a:pPr>
-            <a:r>
-              <a:rPr sz="1300" b="0" i="0">
-                <a:solidFill>
-                  <a:srgbClr val="333333"/>
-                </a:solidFill>
-                <a:latin typeface="Calibri"/>
-              </a:rPr>
-              <a:t>El código es la fuente del diagrama: guárdalo con tu proyecto junto con el PNG exportado.</a:t>
-            </a:r>
-          </a:p>
-        </p:txBody>
-      </p:sp>
-      <p:sp>
-        <p:nvSpPr>
-          <p:cNvPr id="22" name="TextBox 21"/>
-          <p:cNvSpPr txBox="1"/>
-          <p:nvPr/>
-        </p:nvSpPr>
-        <p:spPr>
-          <a:xfrm>
-            <a:off x="11185855" y="6473952"/>
-            <a:ext cx="640080" cy="274320"/>
-          </a:xfrm>
-          <a:prstGeom prst="rect">
-            <a:avLst/>
-          </a:prstGeom>
-          <a:noFill/>
-        </p:spPr>
-        <p:txBody>
-          <a:bodyPr wrap="square">
-            <a:spAutoFit/>
-          </a:bodyPr>
-          <a:lstStyle/>
-          <a:p>
-            <a:pPr algn="r"/>
-            <a:r>
-              <a:rPr sz="1100" b="0" i="0">
-                <a:solidFill>
-                  <a:srgbClr val="666666"/>
-                </a:solidFill>
-                <a:latin typeface="Calibri"/>
-              </a:rPr>
-              <a:t>14</a:t>
-            </a:r>
-          </a:p>
-        </p:txBody>
-      </p:sp>
-    </p:spTree>
-  </p:cSld>
-  <p:clrMapOvr>
-    <a:masterClrMapping/>
-  </p:clrMapOvr>
-</p:sld>
-</file>
-
-<file path=ppt/slides/slide15.xml><?xml version="1.0" encoding="utf-8"?>
-<p:sld xmlns:a="http://schemas.openxmlformats.org/drawingml/2006/main" xmlns:p="http://schemas.openxmlformats.org/presentationml/2006/main" xmlns:r="http://schemas.openxmlformats.org/officeDocument/2006/relationships">
-  <p:cSld>
-    <p:bg>
-      <p:bgPr>
-        <a:solidFill>
-          <a:srgbClr val="FFFFFF"/>
-        </a:solidFill>
-        <a:effectLst/>
-      </p:bgPr>
-    </p:bg>
-    <p:spTree>
-      <p:nvGrpSpPr>
-        <p:cNvPr id="1" name=""/>
-        <p:cNvGrpSpPr/>
-        <p:nvPr/>
-      </p:nvGrpSpPr>
-      <p:grpSpPr/>
-      <p:sp>
-        <p:nvSpPr>
-          <p:cNvPr id="2" name="Rectangle 1"/>
-          <p:cNvSpPr/>
-          <p:nvPr/>
-        </p:nvSpPr>
-        <p:spPr>
-          <a:xfrm>
-            <a:off x="0" y="0"/>
             <a:ext cx="12191695" cy="164592"/>
           </a:xfrm>
           <a:prstGeom prst="rect">
@@ -7284,14 +7480,118 @@
       </p:sp>
       <p:sp>
         <p:nvSpPr>
-          <p:cNvPr id="5" name="TextBox 4"/>
+          <p:cNvPr id="5" name="Rounded Rectangle 4"/>
+          <p:cNvSpPr/>
+          <p:nvPr/>
+        </p:nvSpPr>
+        <p:spPr>
+          <a:xfrm>
+            <a:off x="5797149" y="1573813"/>
+            <a:ext cx="6010497" cy="4057845"/>
+          </a:xfrm>
+          <a:prstGeom prst="roundRect">
+            <a:avLst>
+              <a:gd name="adj" fmla="val 4000"/>
+            </a:avLst>
+          </a:prstGeom>
+          <a:solidFill>
+            <a:srgbClr val="E8EEF4"/>
+          </a:solidFill>
+          <a:ln>
+            <a:noFill/>
+          </a:ln>
+        </p:spPr>
+        <p:style>
+          <a:lnRef idx="1">
+            <a:schemeClr val="accent1"/>
+          </a:lnRef>
+          <a:fillRef idx="3">
+            <a:schemeClr val="accent1"/>
+          </a:fillRef>
+          <a:effectRef idx="2">
+            <a:schemeClr val="accent1"/>
+          </a:effectRef>
+          <a:fontRef idx="minor">
+            <a:schemeClr val="lt1"/>
+          </a:fontRef>
+        </p:style>
+        <p:txBody>
+          <a:bodyPr rtlCol="0" anchor="ctr"/>
+          <a:lstStyle/>
+          <a:p>
+            <a:pPr algn="ctr"/>
+          </a:p>
+        </p:txBody>
+      </p:sp>
+      <p:pic>
+        <p:nvPicPr>
+          <p:cNvPr id="6" name="Picture 5" descr="students-learning-laptops-classroom.jpg"/>
+          <p:cNvPicPr>
+            <a:picLocks noChangeAspect="1"/>
+          </p:cNvPicPr>
+          <p:nvPr/>
+        </p:nvPicPr>
+        <p:blipFill>
+          <a:blip r:embed="rId2"/>
+          <a:stretch>
+            <a:fillRect/>
+          </a:stretch>
+        </p:blipFill>
+        <p:spPr>
+          <a:xfrm>
+            <a:off x="5870301" y="1646965"/>
+            <a:ext cx="5864193" cy="3911541"/>
+          </a:xfrm>
+          <a:prstGeom prst="rect">
+            <a:avLst/>
+          </a:prstGeom>
+        </p:spPr>
+      </p:pic>
+      <p:sp>
+        <p:nvSpPr>
+          <p:cNvPr id="7" name="TextBox 6"/>
           <p:cNvSpPr txBox="1"/>
           <p:nvPr/>
         </p:nvSpPr>
         <p:spPr>
           <a:xfrm>
-            <a:off x="457200" y="1170432"/>
-            <a:ext cx="11277295" cy="5230368"/>
+            <a:off x="5870301" y="5961888"/>
+            <a:ext cx="5864193" cy="320040"/>
+          </a:xfrm>
+          <a:prstGeom prst="rect">
+            <a:avLst/>
+          </a:prstGeom>
+          <a:noFill/>
+        </p:spPr>
+        <p:txBody>
+          <a:bodyPr wrap="square">
+            <a:spAutoFit/>
+          </a:bodyPr>
+          <a:lstStyle/>
+          <a:p>
+            <a:pPr algn="ctr"/>
+            <a:r>
+              <a:rPr sz="1100" b="0" i="1">
+                <a:solidFill>
+                  <a:srgbClr val="666666"/>
+                </a:solidFill>
+                <a:latin typeface="Calibri"/>
+              </a:rPr>
+              <a:t>Foto: Mikhail Nilov · Pexels</a:t>
+            </a:r>
+          </a:p>
+        </p:txBody>
+      </p:sp>
+      <p:sp>
+        <p:nvSpPr>
+          <p:cNvPr id="8" name="TextBox 7"/>
+          <p:cNvSpPr txBox="1"/>
+          <p:nvPr/>
+        </p:nvSpPr>
+        <p:spPr>
+          <a:xfrm>
+            <a:off x="457200" y="1353312"/>
+            <a:ext cx="5093061" cy="5047488"/>
           </a:xfrm>
           <a:prstGeom prst="rect">
             <a:avLst/>
@@ -7355,7 +7655,7 @@
       </p:sp>
       <p:sp>
         <p:nvSpPr>
-          <p:cNvPr id="6" name="TextBox 5"/>
+          <p:cNvPr id="9" name="TextBox 8"/>
           <p:cNvSpPr txBox="1"/>
           <p:nvPr/>
         </p:nvSpPr>
@@ -7529,21 +7829,125 @@
                 </a:solidFill>
                 <a:latin typeface="Calibri"/>
               </a:rPr>
-              <a:t>Errores frecuentes a corregir</a:t>
-            </a:r>
-          </a:p>
-        </p:txBody>
-      </p:sp>
-      <p:sp>
-        <p:nvSpPr>
-          <p:cNvPr id="5" name="TextBox 4"/>
+              <a:t>La teoria propia del dia: que es una revision de arquitectura</a:t>
+            </a:r>
+          </a:p>
+        </p:txBody>
+      </p:sp>
+      <p:sp>
+        <p:nvSpPr>
+          <p:cNvPr id="5" name="Rounded Rectangle 4"/>
+          <p:cNvSpPr/>
+          <p:nvPr/>
+        </p:nvSpPr>
+        <p:spPr>
+          <a:xfrm>
+            <a:off x="5797149" y="1570693"/>
+            <a:ext cx="6010497" cy="4064084"/>
+          </a:xfrm>
+          <a:prstGeom prst="roundRect">
+            <a:avLst>
+              <a:gd name="adj" fmla="val 4000"/>
+            </a:avLst>
+          </a:prstGeom>
+          <a:solidFill>
+            <a:srgbClr val="E8EEF4"/>
+          </a:solidFill>
+          <a:ln>
+            <a:noFill/>
+          </a:ln>
+        </p:spPr>
+        <p:style>
+          <a:lnRef idx="1">
+            <a:schemeClr val="accent1"/>
+          </a:lnRef>
+          <a:fillRef idx="3">
+            <a:schemeClr val="accent1"/>
+          </a:fillRef>
+          <a:effectRef idx="2">
+            <a:schemeClr val="accent1"/>
+          </a:effectRef>
+          <a:fontRef idx="minor">
+            <a:schemeClr val="lt1"/>
+          </a:fontRef>
+        </p:style>
+        <p:txBody>
+          <a:bodyPr rtlCol="0" anchor="ctr"/>
+          <a:lstStyle/>
+          <a:p>
+            <a:pPr algn="ctr"/>
+          </a:p>
+        </p:txBody>
+      </p:sp>
+      <p:pic>
+        <p:nvPicPr>
+          <p:cNvPr id="6" name="Picture 5" descr="whiteboard-diagram-meeting.jpg"/>
+          <p:cNvPicPr>
+            <a:picLocks noChangeAspect="1"/>
+          </p:cNvPicPr>
+          <p:nvPr/>
+        </p:nvPicPr>
+        <p:blipFill>
+          <a:blip r:embed="rId2"/>
+          <a:stretch>
+            <a:fillRect/>
+          </a:stretch>
+        </p:blipFill>
+        <p:spPr>
+          <a:xfrm>
+            <a:off x="5870301" y="1643845"/>
+            <a:ext cx="5864193" cy="3917780"/>
+          </a:xfrm>
+          <a:prstGeom prst="rect">
+            <a:avLst/>
+          </a:prstGeom>
+        </p:spPr>
+      </p:pic>
+      <p:sp>
+        <p:nvSpPr>
+          <p:cNvPr id="7" name="TextBox 6"/>
           <p:cNvSpPr txBox="1"/>
           <p:nvPr/>
         </p:nvSpPr>
         <p:spPr>
           <a:xfrm>
-            <a:off x="457200" y="1170432"/>
-            <a:ext cx="11277295" cy="5230368"/>
+            <a:off x="5870301" y="5961888"/>
+            <a:ext cx="5864193" cy="320040"/>
+          </a:xfrm>
+          <a:prstGeom prst="rect">
+            <a:avLst/>
+          </a:prstGeom>
+          <a:noFill/>
+        </p:spPr>
+        <p:txBody>
+          <a:bodyPr wrap="square">
+            <a:spAutoFit/>
+          </a:bodyPr>
+          <a:lstStyle/>
+          <a:p>
+            <a:pPr algn="ctr"/>
+            <a:r>
+              <a:rPr sz="1100" b="0" i="1">
+                <a:solidFill>
+                  <a:srgbClr val="666666"/>
+                </a:solidFill>
+                <a:latin typeface="Calibri"/>
+              </a:rPr>
+              <a:t>Foto: Christina Morillo · Pexels</a:t>
+            </a:r>
+          </a:p>
+        </p:txBody>
+      </p:sp>
+      <p:sp>
+        <p:nvSpPr>
+          <p:cNvPr id="8" name="TextBox 7"/>
+          <p:cNvSpPr txBox="1"/>
+          <p:nvPr/>
+        </p:nvSpPr>
+        <p:spPr>
+          <a:xfrm>
+            <a:off x="457200" y="1353312"/>
+            <a:ext cx="5093061" cy="5047488"/>
           </a:xfrm>
           <a:prstGeom prst="rect">
             <a:avLst/>
@@ -7568,7 +7972,7 @@
                 </a:solidFill>
                 <a:latin typeface="Calibri"/>
               </a:rPr>
-              <a:t>–   Microservicios teatro · nombres distintos entre diagramas · secretos en imagen.</a:t>
+              <a:t>–   Una revisión de arquitectura es una lectura estructurada de los artefactos, hecha por alguien distinto del autor, antes de implementar.</a:t>
             </a:r>
           </a:p>
           <a:p>
@@ -7584,7 +7988,7 @@
                 </a:solidFill>
                 <a:latin typeface="Calibri"/>
               </a:rPr>
-              <a:t>–   CI sin tests · diagrama sin puertos · dominio infinito.</a:t>
+              <a:t>–   Un riesgo detectado en el diseño cuesta una fracción de lo que cuesta ya implementado.</a:t>
             </a:r>
           </a:p>
           <a:p>
@@ -7600,100 +8004,14 @@
                 </a:solidFill>
                 <a:latin typeface="Calibri"/>
               </a:rPr>
-              <a:t>–   </a:t>
-            </a:r>
-            <a:r>
-              <a:rPr sz="2000" b="1" i="0">
-                <a:solidFill>
-                  <a:srgbClr val="333333"/>
-                </a:solidFill>
-                <a:latin typeface="Calibri"/>
-              </a:rPr>
-              <a:t>Microservicios teatro</a:t>
-            </a:r>
-            <a:r>
-              <a:rPr sz="2000" b="0" i="0">
-                <a:solidFill>
-                  <a:srgbClr val="333333"/>
-                </a:solidFill>
-                <a:latin typeface="Calibri"/>
-              </a:rPr>
-              <a:t>: servicios separados que comparten base de datos y se despliegan siempre juntos.</a:t>
-            </a:r>
-          </a:p>
-          <a:p>
-            <a:pPr>
-              <a:spcAft>
-                <a:spcPts val="800"/>
-              </a:spcAft>
-            </a:pPr>
-            <a:r>
-              <a:rPr sz="2000" b="0" i="0">
-                <a:solidFill>
-                  <a:srgbClr val="333333"/>
-                </a:solidFill>
-                <a:latin typeface="Calibri"/>
-              </a:rPr>
-              <a:t>–   </a:t>
-            </a:r>
-            <a:r>
-              <a:rPr sz="2000" b="1" i="0">
-                <a:solidFill>
-                  <a:srgbClr val="333333"/>
-                </a:solidFill>
-                <a:latin typeface="Calibri"/>
-              </a:rPr>
-              <a:t>Nombres distintos</a:t>
-            </a:r>
-            <a:r>
-              <a:rPr sz="2000" b="0" i="0">
-                <a:solidFill>
-                  <a:srgbClr val="333333"/>
-                </a:solidFill>
-                <a:latin typeface="Calibri"/>
-              </a:rPr>
-              <a:t>: «API de turnos» en el C4 y «backend» en el Despliegue rompen la trazabilidad.</a:t>
-            </a:r>
-          </a:p>
-          <a:p>
-            <a:pPr>
-              <a:spcAft>
-                <a:spcPts val="800"/>
-              </a:spcAft>
-            </a:pPr>
-            <a:r>
-              <a:rPr sz="2000" b="0" i="0">
-                <a:solidFill>
-                  <a:srgbClr val="333333"/>
-                </a:solidFill>
-                <a:latin typeface="Calibri"/>
-              </a:rPr>
-              <a:t>–   </a:t>
-            </a:r>
-            <a:r>
-              <a:rPr sz="2000" b="1" i="0">
-                <a:solidFill>
-                  <a:srgbClr val="333333"/>
-                </a:solidFill>
-                <a:latin typeface="Calibri"/>
-              </a:rPr>
-              <a:t>CI sin tests</a:t>
-            </a:r>
-            <a:r>
-              <a:rPr sz="2000" b="0" i="0">
-                <a:solidFill>
-                  <a:srgbClr val="333333"/>
-                </a:solidFill>
-                <a:latin typeface="Calibri"/>
-              </a:rPr>
-              <a:t>: un pipeline que no puede fallar no verifica nada.</a:t>
-            </a:r>
-          </a:p>
-        </p:txBody>
-      </p:sp>
-      <p:sp>
-        <p:nvSpPr>
-          <p:cNvPr id="6" name="TextBox 5"/>
+              <a:t>–   Busca tres cosas: decisiones sin argumento, incoherencias entre artefactos y riesgos sin nombrar.</a:t>
+            </a:r>
+          </a:p>
+        </p:txBody>
+      </p:sp>
+      <p:sp>
+        <p:nvSpPr>
+          <p:cNvPr id="9" name="TextBox 8"/>
           <p:cNvSpPr txBox="1"/>
           <p:nvPr/>
         </p:nvSpPr>
@@ -7867,21 +8185,173 @@
                 </a:solidFill>
                 <a:latin typeface="Calibri"/>
               </a:rPr>
-              <a:t>La teoria propia del dia: que es una revision de arquitectura (1/2)</a:t>
-            </a:r>
-          </a:p>
-        </p:txBody>
-      </p:sp>
-      <p:sp>
-        <p:nvSpPr>
-          <p:cNvPr id="5" name="TextBox 4"/>
+              <a:t>El insumo: las seis piezas del paquete v1</a:t>
+            </a:r>
+          </a:p>
+        </p:txBody>
+      </p:sp>
+      <p:sp>
+        <p:nvSpPr>
+          <p:cNvPr id="5" name="Rounded Rectangle 4"/>
+          <p:cNvSpPr/>
+          <p:nvPr/>
+        </p:nvSpPr>
+        <p:spPr>
+          <a:xfrm>
+            <a:off x="5803166" y="1188719"/>
+            <a:ext cx="5998464" cy="4828032"/>
+          </a:xfrm>
+          <a:prstGeom prst="roundRect">
+            <a:avLst>
+              <a:gd name="adj" fmla="val 4000"/>
+            </a:avLst>
+          </a:prstGeom>
+          <a:solidFill>
+            <a:srgbClr val="E8EEF4"/>
+          </a:solidFill>
+          <a:ln>
+            <a:noFill/>
+          </a:ln>
+        </p:spPr>
+        <p:style>
+          <a:lnRef idx="1">
+            <a:schemeClr val="accent1"/>
+          </a:lnRef>
+          <a:fillRef idx="3">
+            <a:schemeClr val="accent1"/>
+          </a:fillRef>
+          <a:effectRef idx="2">
+            <a:schemeClr val="accent1"/>
+          </a:effectRef>
+          <a:fontRef idx="minor">
+            <a:schemeClr val="lt1"/>
+          </a:fontRef>
+        </p:style>
+        <p:txBody>
+          <a:bodyPr rtlCol="0" anchor="ctr"/>
+          <a:lstStyle/>
+          <a:p>
+            <a:pPr algn="ctr"/>
+          </a:p>
+        </p:txBody>
+      </p:sp>
+      <p:pic>
+        <p:nvPicPr>
+          <p:cNvPr id="6" name="Picture 5" descr="seis-piezas-paso1.png"/>
+          <p:cNvPicPr>
+            <a:picLocks noChangeAspect="1"/>
+          </p:cNvPicPr>
+          <p:nvPr/>
+        </p:nvPicPr>
+        <p:blipFill>
+          <a:blip r:embed="rId2"/>
+          <a:stretch>
+            <a:fillRect/>
+          </a:stretch>
+        </p:blipFill>
+        <p:spPr>
+          <a:xfrm>
+            <a:off x="5876318" y="1261872"/>
+            <a:ext cx="5852160" cy="4681728"/>
+          </a:xfrm>
+          <a:prstGeom prst="rect">
+            <a:avLst/>
+          </a:prstGeom>
+        </p:spPr>
+      </p:pic>
+      <p:pic>
+        <p:nvPicPr>
+          <p:cNvPr id="7" name="Picture 6" descr="seis-piezas-paso2.png"/>
+          <p:cNvPicPr>
+            <a:picLocks noChangeAspect="1"/>
+          </p:cNvPicPr>
+          <p:nvPr/>
+        </p:nvPicPr>
+        <p:blipFill>
+          <a:blip r:embed="rId3"/>
+          <a:stretch>
+            <a:fillRect/>
+          </a:stretch>
+        </p:blipFill>
+        <p:spPr>
+          <a:xfrm>
+            <a:off x="5876318" y="1261872"/>
+            <a:ext cx="5852160" cy="4681728"/>
+          </a:xfrm>
+          <a:prstGeom prst="rect">
+            <a:avLst/>
+          </a:prstGeom>
+        </p:spPr>
+      </p:pic>
+      <p:pic>
+        <p:nvPicPr>
+          <p:cNvPr id="8" name="Picture 7" descr="seis-piezas-paso3.png"/>
+          <p:cNvPicPr>
+            <a:picLocks noChangeAspect="1"/>
+          </p:cNvPicPr>
+          <p:nvPr/>
+        </p:nvPicPr>
+        <p:blipFill>
+          <a:blip r:embed="rId4"/>
+          <a:stretch>
+            <a:fillRect/>
+          </a:stretch>
+        </p:blipFill>
+        <p:spPr>
+          <a:xfrm>
+            <a:off x="5876318" y="1261872"/>
+            <a:ext cx="5852160" cy="4681728"/>
+          </a:xfrm>
+          <a:prstGeom prst="rect">
+            <a:avLst/>
+          </a:prstGeom>
+        </p:spPr>
+      </p:pic>
+      <p:sp>
+        <p:nvSpPr>
+          <p:cNvPr id="13" name="TextBox 12"/>
           <p:cNvSpPr txBox="1"/>
           <p:nvPr/>
         </p:nvSpPr>
         <p:spPr>
           <a:xfrm>
-            <a:off x="457200" y="1170432"/>
-            <a:ext cx="11277295" cy="5230368"/>
+            <a:off x="5870301" y="5961888"/>
+            <a:ext cx="5864193" cy="320040"/>
+          </a:xfrm>
+          <a:prstGeom prst="rect">
+            <a:avLst/>
+          </a:prstGeom>
+          <a:noFill/>
+        </p:spPr>
+        <p:txBody>
+          <a:bodyPr wrap="square">
+            <a:spAutoFit/>
+          </a:bodyPr>
+          <a:lstStyle/>
+          <a:p>
+            <a:pPr algn="ctr"/>
+            <a:r>
+              <a:rPr sz="1100" b="0" i="1">
+                <a:solidFill>
+                  <a:srgbClr val="666666"/>
+                </a:solidFill>
+                <a:latin typeface="Calibri"/>
+              </a:rPr>
+              <a:t>Clic para avanzar la animación</a:t>
+            </a:r>
+          </a:p>
+        </p:txBody>
+      </p:sp>
+      <p:sp>
+        <p:nvSpPr>
+          <p:cNvPr id="14" name="TextBox 13"/>
+          <p:cNvSpPr txBox="1"/>
+          <p:nvPr/>
+        </p:nvSpPr>
+        <p:spPr>
+          <a:xfrm>
+            <a:off x="457200" y="1353312"/>
+            <a:ext cx="5093061" cy="5047488"/>
           </a:xfrm>
           <a:prstGeom prst="rect">
             <a:avLst/>
@@ -7906,7 +8376,7 @@
                 </a:solidFill>
                 <a:latin typeface="Calibri"/>
               </a:rPr>
-              <a:t>–   Una revision de arquitectura, en ingles architecture review, es una practica profesional formal en la que alguien distinto de quien diseno el sistema examina el diseno antes de que este construido, buscando riesgos y decisiones sin justificar.</a:t>
+              <a:t>–   El criterio central de auditoria se llama trazabilidad: la propiedad de que un elemento se pueda seguir de un artefacto al siguiente sin cambiar de…</a:t>
             </a:r>
           </a:p>
           <a:p>
@@ -7922,46 +8392,14 @@
                 </a:solidFill>
                 <a:latin typeface="Calibri"/>
               </a:rPr>
-              <a:t>–   Existe en la industria con nombres concretos: ATAM en su version academica, design review o RFC review en empresas de producto, comite de arquitectura en organizaciones grandes.</a:t>
-            </a:r>
-          </a:p>
-          <a:p>
-            <a:pPr>
-              <a:spcAft>
-                <a:spcPts val="800"/>
-              </a:spcAft>
-            </a:pPr>
-            <a:r>
-              <a:rPr sz="2000" b="0" i="0">
-                <a:solidFill>
-                  <a:srgbClr val="333333"/>
-                </a:solidFill>
-                <a:latin typeface="Calibri"/>
-              </a:rPr>
-              <a:t>–   Todas comparten la premisa economica que sostiene el curso: un riesgo detectado en el diseno cuesta una fraccion de lo que cuesta cuando ya esta implementado y con usuarios encima.</a:t>
-            </a:r>
-          </a:p>
-          <a:p>
-            <a:pPr>
-              <a:spcAft>
-                <a:spcPts val="800"/>
-              </a:spcAft>
-            </a:pPr>
-            <a:r>
-              <a:rPr sz="2000" b="0" i="0">
-                <a:solidFill>
-                  <a:srgbClr val="333333"/>
-                </a:solidFill>
-                <a:latin typeface="Calibri"/>
-              </a:rPr>
-              <a:t>–   La revision no juzga si el diagrama es bonito; busca tres cosas: decisiones sin argumento, incoherencias entre artefactos y riesgos que nadie ha nombrado.</a:t>
-            </a:r>
-          </a:p>
-        </p:txBody>
-      </p:sp>
-      <p:sp>
-        <p:nvSpPr>
-          <p:cNvPr id="6" name="TextBox 5"/>
+              <a:t>–   Las seis piezas son: diagrama Context, diagrama Containers, diagrama de despliegue, Dockerfile, workflow de Actions e informe.</a:t>
+            </a:r>
+          </a:p>
+        </p:txBody>
+      </p:sp>
+      <p:sp>
+        <p:nvSpPr>
+          <p:cNvPr id="15" name="TextBox 14"/>
           <p:cNvSpPr txBox="1"/>
           <p:nvPr/>
         </p:nvSpPr>
@@ -7999,6 +8437,142 @@
   <p:clrMapOvr>
     <a:masterClrMapping/>
   </p:clrMapOvr>
+  <p:timing>
+    <p:tnLst>
+      <p:par>
+        <p:cTn id="1" dur="indefinite" restart="never" nodeType="tmRoot">
+          <p:childTnLst>
+            <p:seq concurrent="1" nextAc="seek">
+              <p:cTn id="2" dur="indefinite" nodeType="mainSeq">
+                <p:childTnLst>
+                  <p:par>
+                    <p:cTn id="3" fill="hold">
+                      <p:stCondLst>
+                        <p:cond delay="indefinite"/>
+                      </p:stCondLst>
+                      <p:childTnLst>
+                        <p:par>
+                          <p:cTn id="4" fill="hold">
+                            <p:stCondLst>
+                              <p:cond delay="0"/>
+                            </p:stCondLst>
+                            <p:childTnLst>
+                              <p:par>
+                                <p:cTn id="5" presetID="10" presetClass="entr" presetSubtype="0" fill="hold" nodeType="clickEffect">
+                                  <p:stCondLst>
+                                    <p:cond delay="0"/>
+                                  </p:stCondLst>
+                                  <p:childTnLst>
+                                    <p:set>
+                                      <p:cBhvr>
+                                        <p:cTn id="6" dur="1" fill="hold">
+                                          <p:stCondLst>
+                                            <p:cond delay="0"/>
+                                          </p:stCondLst>
+                                        </p:cTn>
+                                        <p:tgtEl>
+                                          <p:spTgt spid="7"/>
+                                        </p:tgtEl>
+                                        <p:attrNameLst>
+                                          <p:attrName>style.visibility</p:attrName>
+                                        </p:attrNameLst>
+                                      </p:cBhvr>
+                                      <p:to>
+                                        <p:strVal val="visible"/>
+                                      </p:to>
+                                    </p:set>
+                                    <p:animEffect transition="in" filter="fade">
+                                      <p:cBhvr>
+                                        <p:cTn id="7" dur="450"/>
+                                        <p:tgtEl>
+                                          <p:spTgt spid="7"/>
+                                        </p:tgtEl>
+                                      </p:cBhvr>
+                                    </p:animEffect>
+                                  </p:childTnLst>
+                                </p:cTn>
+                              </p:par>
+                            </p:childTnLst>
+                          </p:cTn>
+                        </p:par>
+                      </p:childTnLst>
+                    </p:cTn>
+                  </p:par>
+                  <p:par>
+                    <p:cTn id="8" fill="hold">
+                      <p:stCondLst>
+                        <p:cond delay="indefinite"/>
+                      </p:stCondLst>
+                      <p:childTnLst>
+                        <p:par>
+                          <p:cTn id="9" fill="hold">
+                            <p:stCondLst>
+                              <p:cond delay="0"/>
+                            </p:stCondLst>
+                            <p:childTnLst>
+                              <p:par>
+                                <p:cTn id="10" presetID="10" presetClass="entr" presetSubtype="0" fill="hold" nodeType="clickEffect">
+                                  <p:stCondLst>
+                                    <p:cond delay="0"/>
+                                  </p:stCondLst>
+                                  <p:childTnLst>
+                                    <p:set>
+                                      <p:cBhvr>
+                                        <p:cTn id="11" dur="1" fill="hold">
+                                          <p:stCondLst>
+                                            <p:cond delay="0"/>
+                                          </p:stCondLst>
+                                        </p:cTn>
+                                        <p:tgtEl>
+                                          <p:spTgt spid="8"/>
+                                        </p:tgtEl>
+                                        <p:attrNameLst>
+                                          <p:attrName>style.visibility</p:attrName>
+                                        </p:attrNameLst>
+                                      </p:cBhvr>
+                                      <p:to>
+                                        <p:strVal val="visible"/>
+                                      </p:to>
+                                    </p:set>
+                                    <p:animEffect transition="in" filter="fade">
+                                      <p:cBhvr>
+                                        <p:cTn id="12" dur="450"/>
+                                        <p:tgtEl>
+                                          <p:spTgt spid="8"/>
+                                        </p:tgtEl>
+                                      </p:cBhvr>
+                                    </p:animEffect>
+                                  </p:childTnLst>
+                                </p:cTn>
+                              </p:par>
+                            </p:childTnLst>
+                          </p:cTn>
+                        </p:par>
+                      </p:childTnLst>
+                    </p:cTn>
+                  </p:par>
+                </p:childTnLst>
+              </p:cTn>
+              <p:prevCondLst>
+                <p:cond evt="onPrev" delay="0">
+                  <p:tgtEl>
+                    <p:sldTgt/>
+                  </p:tgtEl>
+                </p:cond>
+              </p:prevCondLst>
+              <p:nextCondLst>
+                <p:cond evt="onNext" delay="0">
+                  <p:tgtEl>
+                    <p:sldTgt/>
+                  </p:tgtEl>
+                </p:cond>
+              </p:nextCondLst>
+            </p:seq>
+          </p:childTnLst>
+        </p:cTn>
+      </p:par>
+    </p:tnLst>
+  </p:timing>
 </p:sld>
 </file>
 
@@ -8135,21 +8709,149 @@
                 </a:solidFill>
                 <a:latin typeface="Calibri"/>
               </a:rPr>
-              <a:t>La teoria propia del dia: que es una revision de arquitectura (2/2)</a:t>
-            </a:r>
-          </a:p>
-        </p:txBody>
-      </p:sp>
-      <p:sp>
-        <p:nvSpPr>
-          <p:cNvPr id="5" name="TextBox 4"/>
+              <a:t>Las cinco preguntas de coherencia, en orden</a:t>
+            </a:r>
+          </a:p>
+        </p:txBody>
+      </p:sp>
+      <p:sp>
+        <p:nvSpPr>
+          <p:cNvPr id="5" name="Rounded Rectangle 4"/>
+          <p:cNvSpPr/>
+          <p:nvPr/>
+        </p:nvSpPr>
+        <p:spPr>
+          <a:xfrm>
+            <a:off x="5803166" y="1188719"/>
+            <a:ext cx="5998464" cy="4828032"/>
+          </a:xfrm>
+          <a:prstGeom prst="roundRect">
+            <a:avLst>
+              <a:gd name="adj" fmla="val 4000"/>
+            </a:avLst>
+          </a:prstGeom>
+          <a:solidFill>
+            <a:srgbClr val="E8EEF4"/>
+          </a:solidFill>
+          <a:ln>
+            <a:noFill/>
+          </a:ln>
+        </p:spPr>
+        <p:style>
+          <a:lnRef idx="1">
+            <a:schemeClr val="accent1"/>
+          </a:lnRef>
+          <a:fillRef idx="3">
+            <a:schemeClr val="accent1"/>
+          </a:fillRef>
+          <a:effectRef idx="2">
+            <a:schemeClr val="accent1"/>
+          </a:effectRef>
+          <a:fontRef idx="minor">
+            <a:schemeClr val="lt1"/>
+          </a:fontRef>
+        </p:style>
+        <p:txBody>
+          <a:bodyPr rtlCol="0" anchor="ctr"/>
+          <a:lstStyle/>
+          <a:p>
+            <a:pPr algn="ctr"/>
+          </a:p>
+        </p:txBody>
+      </p:sp>
+      <p:pic>
+        <p:nvPicPr>
+          <p:cNvPr id="6" name="Picture 5" descr="cinco-cadenas-paso1.png"/>
+          <p:cNvPicPr>
+            <a:picLocks noChangeAspect="1"/>
+          </p:cNvPicPr>
+          <p:nvPr/>
+        </p:nvPicPr>
+        <p:blipFill>
+          <a:blip r:embed="rId2"/>
+          <a:stretch>
+            <a:fillRect/>
+          </a:stretch>
+        </p:blipFill>
+        <p:spPr>
+          <a:xfrm>
+            <a:off x="5876318" y="1261872"/>
+            <a:ext cx="5852160" cy="4681728"/>
+          </a:xfrm>
+          <a:prstGeom prst="rect">
+            <a:avLst/>
+          </a:prstGeom>
+        </p:spPr>
+      </p:pic>
+      <p:pic>
+        <p:nvPicPr>
+          <p:cNvPr id="7" name="Picture 6" descr="cinco-cadenas-paso2.png"/>
+          <p:cNvPicPr>
+            <a:picLocks noChangeAspect="1"/>
+          </p:cNvPicPr>
+          <p:nvPr/>
+        </p:nvPicPr>
+        <p:blipFill>
+          <a:blip r:embed="rId3"/>
+          <a:stretch>
+            <a:fillRect/>
+          </a:stretch>
+        </p:blipFill>
+        <p:spPr>
+          <a:xfrm>
+            <a:off x="5876318" y="1261872"/>
+            <a:ext cx="5852160" cy="4681728"/>
+          </a:xfrm>
+          <a:prstGeom prst="rect">
+            <a:avLst/>
+          </a:prstGeom>
+        </p:spPr>
+      </p:pic>
+      <p:sp>
+        <p:nvSpPr>
+          <p:cNvPr id="8" name="TextBox 7"/>
           <p:cNvSpPr txBox="1"/>
           <p:nvPr/>
         </p:nvSpPr>
         <p:spPr>
           <a:xfrm>
-            <a:off x="457200" y="1170432"/>
-            <a:ext cx="11277295" cy="5230368"/>
+            <a:off x="5870301" y="5961888"/>
+            <a:ext cx="5864193" cy="320040"/>
+          </a:xfrm>
+          <a:prstGeom prst="rect">
+            <a:avLst/>
+          </a:prstGeom>
+          <a:noFill/>
+        </p:spPr>
+        <p:txBody>
+          <a:bodyPr wrap="square">
+            <a:spAutoFit/>
+          </a:bodyPr>
+          <a:lstStyle/>
+          <a:p>
+            <a:pPr algn="ctr"/>
+            <a:r>
+              <a:rPr sz="1100" b="0" i="1">
+                <a:solidFill>
+                  <a:srgbClr val="666666"/>
+                </a:solidFill>
+                <a:latin typeface="Calibri"/>
+              </a:rPr>
+              <a:t>Clic para avanzar la animación</a:t>
+            </a:r>
+          </a:p>
+        </p:txBody>
+      </p:sp>
+      <p:sp>
+        <p:nvSpPr>
+          <p:cNvPr id="9" name="TextBox 8"/>
+          <p:cNvSpPr txBox="1"/>
+          <p:nvPr/>
+        </p:nvSpPr>
+        <p:spPr>
+          <a:xfrm>
+            <a:off x="457200" y="1353312"/>
+            <a:ext cx="5093061" cy="5047488"/>
           </a:xfrm>
           <a:prstGeom prst="rect">
             <a:avLst/>
@@ -8174,7 +8876,7 @@
                 </a:solidFill>
                 <a:latin typeface="Calibri"/>
               </a:rPr>
-              <a:t>–   Una revision de arquitectura es una lectura estructurada de los artefactos de diseno, hecha por alguien distinto del autor, antes de implementar o cambiar el diseno.</a:t>
+              <a:t>–   Cada contenedor del C4 aparece en el Despliegue con el mismo nombre; cada actor y sistema externo del Context sigue existiendo.</a:t>
             </a:r>
           </a:p>
           <a:p>
@@ -8190,7 +8892,7 @@
                 </a:solidFill>
                 <a:latin typeface="Calibri"/>
               </a:rPr>
-              <a:t>–   Sus tres salidas son: hallazgos con evidencia, riesgos nombrados y acciones con responsable.</a:t>
+              <a:t>–   Cada amenaza de STRIDE tiene un control visible en el Despliegue.</a:t>
             </a:r>
           </a:p>
           <a:p>
@@ -8206,14 +8908,30 @@
                 </a:solidFill>
                 <a:latin typeface="Calibri"/>
               </a:rPr>
-              <a:t>–   Ejemplo en la app: el Containers nombra «API de turnos» y el Despliegue nombra «backend»; el hallazgo es la incoherencia, la evidencia son los dos diagramas y la accion es unificar el nombre.</a:t>
-            </a:r>
-          </a:p>
-        </p:txBody>
-      </p:sp>
-      <p:sp>
-        <p:nvSpPr>
-          <p:cNvPr id="6" name="TextBox 5"/>
+              <a:t>–   La tabla de costos usa los mismos componentes, y el workflow se ejecutó al menos una vez.</a:t>
+            </a:r>
+          </a:p>
+          <a:p>
+            <a:pPr>
+              <a:spcAft>
+                <a:spcPts val="800"/>
+              </a:spcAft>
+            </a:pPr>
+            <a:r>
+              <a:rPr sz="2000" b="0" i="0">
+                <a:solidFill>
+                  <a:srgbClr val="333333"/>
+                </a:solidFill>
+                <a:latin typeface="Calibri"/>
+              </a:rPr>
+              <a:t>–   El acta no es una nota: dice cuáles de las cinco cadenas están rotas.</a:t>
+            </a:r>
+          </a:p>
+        </p:txBody>
+      </p:sp>
+      <p:sp>
+        <p:nvSpPr>
+          <p:cNvPr id="10" name="TextBox 9"/>
           <p:cNvSpPr txBox="1"/>
           <p:nvPr/>
         </p:nvSpPr>
@@ -8251,6 +8969,89 @@
   <p:clrMapOvr>
     <a:masterClrMapping/>
   </p:clrMapOvr>
+  <p:timing>
+    <p:tnLst>
+      <p:par>
+        <p:cTn id="1" dur="indefinite" restart="never" nodeType="tmRoot">
+          <p:childTnLst>
+            <p:seq concurrent="1" nextAc="seek">
+              <p:cTn id="2" dur="indefinite" nodeType="mainSeq">
+                <p:childTnLst>
+                  <p:par>
+                    <p:cTn id="3" fill="hold">
+                      <p:stCondLst>
+                        <p:cond delay="indefinite"/>
+                      </p:stCondLst>
+                      <p:childTnLst>
+                        <p:par>
+                          <p:cTn id="4" fill="hold">
+                            <p:stCondLst>
+                              <p:cond delay="0"/>
+                            </p:stCondLst>
+                            <p:childTnLst>
+                              <p:par>
+                                <p:cTn id="5" presetID="10" presetClass="entr" presetSubtype="0" fill="hold" nodeType="clickEffect">
+                                  <p:stCondLst>
+                                    <p:cond delay="0"/>
+                                  </p:stCondLst>
+                                  <p:childTnLst>
+                                    <p:set>
+                                      <p:cBhvr>
+                                        <p:cTn id="6" dur="1" fill="hold">
+                                          <p:stCondLst>
+                                            <p:cond delay="0"/>
+                                          </p:stCondLst>
+                                        </p:cTn>
+                                        <p:tgtEl>
+                                          <p:spTgt spid="7"/>
+                                        </p:tgtEl>
+                                        <p:attrNameLst>
+                                          <p:attrName>style.visibility</p:attrName>
+                                        </p:attrNameLst>
+                                      </p:cBhvr>
+                                      <p:to>
+                                        <p:strVal val="visible"/>
+                                      </p:to>
+                                    </p:set>
+                                    <p:animEffect transition="in" filter="fade">
+                                      <p:cBhvr>
+                                        <p:cTn id="7" dur="450"/>
+                                        <p:tgtEl>
+                                          <p:spTgt spid="7"/>
+                                        </p:tgtEl>
+                                      </p:cBhvr>
+                                    </p:animEffect>
+                                  </p:childTnLst>
+                                </p:cTn>
+                              </p:par>
+                            </p:childTnLst>
+                          </p:cTn>
+                        </p:par>
+                      </p:childTnLst>
+                    </p:cTn>
+                  </p:par>
+                </p:childTnLst>
+              </p:cTn>
+              <p:prevCondLst>
+                <p:cond evt="onPrev" delay="0">
+                  <p:tgtEl>
+                    <p:sldTgt/>
+                  </p:tgtEl>
+                </p:cond>
+              </p:prevCondLst>
+              <p:nextCondLst>
+                <p:cond evt="onNext" delay="0">
+                  <p:tgtEl>
+                    <p:sldTgt/>
+                  </p:tgtEl>
+                </p:cond>
+              </p:nextCondLst>
+            </p:seq>
+          </p:childTnLst>
+        </p:cTn>
+      </p:par>
+    </p:tnLst>
+  </p:timing>
 </p:sld>
 </file>
 
@@ -8387,21 +9188,149 @@
                 </a:solidFill>
                 <a:latin typeface="Calibri"/>
               </a:rPr>
-              <a:t>El insumo: las seis piezas del paquete v1</a:t>
-            </a:r>
-          </a:p>
-        </p:txBody>
-      </p:sp>
-      <p:sp>
-        <p:nvSpPr>
-          <p:cNvPr id="5" name="TextBox 4"/>
+              <a:t>Scope creep y arquitectura de papel: las dos patologias con nombre propio</a:t>
+            </a:r>
+          </a:p>
+        </p:txBody>
+      </p:sp>
+      <p:sp>
+        <p:nvSpPr>
+          <p:cNvPr id="5" name="Rounded Rectangle 4"/>
+          <p:cNvSpPr/>
+          <p:nvPr/>
+        </p:nvSpPr>
+        <p:spPr>
+          <a:xfrm>
+            <a:off x="5803166" y="1188719"/>
+            <a:ext cx="5998464" cy="4828032"/>
+          </a:xfrm>
+          <a:prstGeom prst="roundRect">
+            <a:avLst>
+              <a:gd name="adj" fmla="val 4000"/>
+            </a:avLst>
+          </a:prstGeom>
+          <a:solidFill>
+            <a:srgbClr val="E8EEF4"/>
+          </a:solidFill>
+          <a:ln>
+            <a:noFill/>
+          </a:ln>
+        </p:spPr>
+        <p:style>
+          <a:lnRef idx="1">
+            <a:schemeClr val="accent1"/>
+          </a:lnRef>
+          <a:fillRef idx="3">
+            <a:schemeClr val="accent1"/>
+          </a:fillRef>
+          <a:effectRef idx="2">
+            <a:schemeClr val="accent1"/>
+          </a:effectRef>
+          <a:fontRef idx="minor">
+            <a:schemeClr val="lt1"/>
+          </a:fontRef>
+        </p:style>
+        <p:txBody>
+          <a:bodyPr rtlCol="0" anchor="ctr"/>
+          <a:lstStyle/>
+          <a:p>
+            <a:pPr algn="ctr"/>
+          </a:p>
+        </p:txBody>
+      </p:sp>
+      <p:pic>
+        <p:nvPicPr>
+          <p:cNvPr id="6" name="Picture 5" descr="dos-patologias-paso1.png"/>
+          <p:cNvPicPr>
+            <a:picLocks noChangeAspect="1"/>
+          </p:cNvPicPr>
+          <p:nvPr/>
+        </p:nvPicPr>
+        <p:blipFill>
+          <a:blip r:embed="rId2"/>
+          <a:stretch>
+            <a:fillRect/>
+          </a:stretch>
+        </p:blipFill>
+        <p:spPr>
+          <a:xfrm>
+            <a:off x="5876318" y="1261872"/>
+            <a:ext cx="5852160" cy="4681728"/>
+          </a:xfrm>
+          <a:prstGeom prst="rect">
+            <a:avLst/>
+          </a:prstGeom>
+        </p:spPr>
+      </p:pic>
+      <p:pic>
+        <p:nvPicPr>
+          <p:cNvPr id="7" name="Picture 6" descr="dos-patologias-paso2.png"/>
+          <p:cNvPicPr>
+            <a:picLocks noChangeAspect="1"/>
+          </p:cNvPicPr>
+          <p:nvPr/>
+        </p:nvPicPr>
+        <p:blipFill>
+          <a:blip r:embed="rId3"/>
+          <a:stretch>
+            <a:fillRect/>
+          </a:stretch>
+        </p:blipFill>
+        <p:spPr>
+          <a:xfrm>
+            <a:off x="5876318" y="1261872"/>
+            <a:ext cx="5852160" cy="4681728"/>
+          </a:xfrm>
+          <a:prstGeom prst="rect">
+            <a:avLst/>
+          </a:prstGeom>
+        </p:spPr>
+      </p:pic>
+      <p:sp>
+        <p:nvSpPr>
+          <p:cNvPr id="8" name="TextBox 7"/>
           <p:cNvSpPr txBox="1"/>
           <p:nvPr/>
         </p:nvSpPr>
         <p:spPr>
           <a:xfrm>
-            <a:off x="457200" y="1170432"/>
-            <a:ext cx="11277295" cy="5230368"/>
+            <a:off x="5870301" y="5961888"/>
+            <a:ext cx="5864193" cy="320040"/>
+          </a:xfrm>
+          <a:prstGeom prst="rect">
+            <a:avLst/>
+          </a:prstGeom>
+          <a:noFill/>
+        </p:spPr>
+        <p:txBody>
+          <a:bodyPr wrap="square">
+            <a:spAutoFit/>
+          </a:bodyPr>
+          <a:lstStyle/>
+          <a:p>
+            <a:pPr algn="ctr"/>
+            <a:r>
+              <a:rPr sz="1100" b="0" i="1">
+                <a:solidFill>
+                  <a:srgbClr val="666666"/>
+                </a:solidFill>
+                <a:latin typeface="Calibri"/>
+              </a:rPr>
+              <a:t>Clic para avanzar la animación</a:t>
+            </a:r>
+          </a:p>
+        </p:txBody>
+      </p:sp>
+      <p:sp>
+        <p:nvSpPr>
+          <p:cNvPr id="9" name="TextBox 8"/>
+          <p:cNvSpPr txBox="1"/>
+          <p:nvPr/>
+        </p:nvSpPr>
+        <p:spPr>
+          <a:xfrm>
+            <a:off x="457200" y="1353312"/>
+            <a:ext cx="5093061" cy="5047488"/>
           </a:xfrm>
           <a:prstGeom prst="rect">
             <a:avLst/>
@@ -8426,7 +9355,7 @@
                 </a:solidFill>
                 <a:latin typeface="Calibri"/>
               </a:rPr>
-              <a:t>–   El criterio central de auditoria se llama trazabilidad: la propiedad de que un elemento se pueda seguir de un artefacto al siguiente sin cambiar de nombre ni desaparecer.</a:t>
+              <a:t>–   La primera es el scope creep, el crecimiento no controlado del alcance.</a:t>
             </a:r>
           </a:p>
           <a:p>
@@ -8442,7 +9371,7 @@
                 </a:solidFill>
                 <a:latin typeface="Calibri"/>
               </a:rPr>
-              <a:t>–   Las seis piezas son: diagrama Context, diagrama Containers, diagrama de despliegue, Dockerfile, workflow de Actions e informe.</a:t>
+              <a:t>–   La segunda patologia es el teatro de microservicios: servicios separados en el diagrama que en la practica no son unidades independientes.</a:t>
             </a:r>
           </a:p>
           <a:p>
@@ -8458,14 +9387,14 @@
                 </a:solidFill>
                 <a:latin typeface="Calibri"/>
               </a:rPr>
-              <a:t>–   Un ejemplo de trazabilidad rota: el Context dibuja una pasarela de pagos y el Containers ya no la menciona; o salio del alcance y se borra, o se olvido y es un hueco.</a:t>
-            </a:r>
-          </a:p>
-        </p:txBody>
-      </p:sp>
-      <p:sp>
-        <p:nvSpPr>
-          <p:cNvPr id="6" name="TextBox 5"/>
+              <a:t>–   En la app el caso clasico es el "servicio de autenticacion" dibujado como caja aparte que en el repositorio es un modulo dentro de la misma API.</a:t>
+            </a:r>
+          </a:p>
+        </p:txBody>
+      </p:sp>
+      <p:sp>
+        <p:nvSpPr>
+          <p:cNvPr id="10" name="TextBox 9"/>
           <p:cNvSpPr txBox="1"/>
           <p:nvPr/>
         </p:nvSpPr>
@@ -8503,6 +9432,89 @@
   <p:clrMapOvr>
     <a:masterClrMapping/>
   </p:clrMapOvr>
+  <p:timing>
+    <p:tnLst>
+      <p:par>
+        <p:cTn id="1" dur="indefinite" restart="never" nodeType="tmRoot">
+          <p:childTnLst>
+            <p:seq concurrent="1" nextAc="seek">
+              <p:cTn id="2" dur="indefinite" nodeType="mainSeq">
+                <p:childTnLst>
+                  <p:par>
+                    <p:cTn id="3" fill="hold">
+                      <p:stCondLst>
+                        <p:cond delay="indefinite"/>
+                      </p:stCondLst>
+                      <p:childTnLst>
+                        <p:par>
+                          <p:cTn id="4" fill="hold">
+                            <p:stCondLst>
+                              <p:cond delay="0"/>
+                            </p:stCondLst>
+                            <p:childTnLst>
+                              <p:par>
+                                <p:cTn id="5" presetID="10" presetClass="entr" presetSubtype="0" fill="hold" nodeType="clickEffect">
+                                  <p:stCondLst>
+                                    <p:cond delay="0"/>
+                                  </p:stCondLst>
+                                  <p:childTnLst>
+                                    <p:set>
+                                      <p:cBhvr>
+                                        <p:cTn id="6" dur="1" fill="hold">
+                                          <p:stCondLst>
+                                            <p:cond delay="0"/>
+                                          </p:stCondLst>
+                                        </p:cTn>
+                                        <p:tgtEl>
+                                          <p:spTgt spid="7"/>
+                                        </p:tgtEl>
+                                        <p:attrNameLst>
+                                          <p:attrName>style.visibility</p:attrName>
+                                        </p:attrNameLst>
+                                      </p:cBhvr>
+                                      <p:to>
+                                        <p:strVal val="visible"/>
+                                      </p:to>
+                                    </p:set>
+                                    <p:animEffect transition="in" filter="fade">
+                                      <p:cBhvr>
+                                        <p:cTn id="7" dur="450"/>
+                                        <p:tgtEl>
+                                          <p:spTgt spid="7"/>
+                                        </p:tgtEl>
+                                      </p:cBhvr>
+                                    </p:animEffect>
+                                  </p:childTnLst>
+                                </p:cTn>
+                              </p:par>
+                            </p:childTnLst>
+                          </p:cTn>
+                        </p:par>
+                      </p:childTnLst>
+                    </p:cTn>
+                  </p:par>
+                </p:childTnLst>
+              </p:cTn>
+              <p:prevCondLst>
+                <p:cond evt="onPrev" delay="0">
+                  <p:tgtEl>
+                    <p:sldTgt/>
+                  </p:tgtEl>
+                </p:cond>
+              </p:prevCondLst>
+              <p:nextCondLst>
+                <p:cond evt="onNext" delay="0">
+                  <p:tgtEl>
+                    <p:sldTgt/>
+                  </p:tgtEl>
+                </p:cond>
+              </p:nextCondLst>
+            </p:seq>
+          </p:childTnLst>
+        </p:cTn>
+      </p:par>
+    </p:tnLst>
+  </p:timing>
 </p:sld>
 </file>
 
@@ -8639,21 +9651,125 @@
                 </a:solidFill>
                 <a:latin typeface="Calibri"/>
               </a:rPr>
-              <a:t>Las cinco preguntas de coherencia, en orden</a:t>
-            </a:r>
-          </a:p>
-        </p:txBody>
-      </p:sp>
-      <p:sp>
-        <p:nvSpPr>
-          <p:cNvPr id="5" name="TextBox 4"/>
+              <a:t>Errores frecuentes a corregir</a:t>
+            </a:r>
+          </a:p>
+        </p:txBody>
+      </p:sp>
+      <p:sp>
+        <p:nvSpPr>
+          <p:cNvPr id="5" name="Rounded Rectangle 4"/>
+          <p:cNvSpPr/>
+          <p:nvPr/>
+        </p:nvSpPr>
+        <p:spPr>
+          <a:xfrm>
+            <a:off x="5797149" y="1573813"/>
+            <a:ext cx="6010497" cy="4057845"/>
+          </a:xfrm>
+          <a:prstGeom prst="roundRect">
+            <a:avLst>
+              <a:gd name="adj" fmla="val 4000"/>
+            </a:avLst>
+          </a:prstGeom>
+          <a:solidFill>
+            <a:srgbClr val="E8EEF4"/>
+          </a:solidFill>
+          <a:ln>
+            <a:noFill/>
+          </a:ln>
+        </p:spPr>
+        <p:style>
+          <a:lnRef idx="1">
+            <a:schemeClr val="accent1"/>
+          </a:lnRef>
+          <a:fillRef idx="3">
+            <a:schemeClr val="accent1"/>
+          </a:fillRef>
+          <a:effectRef idx="2">
+            <a:schemeClr val="accent1"/>
+          </a:effectRef>
+          <a:fontRef idx="minor">
+            <a:schemeClr val="lt1"/>
+          </a:fontRef>
+        </p:style>
+        <p:txBody>
+          <a:bodyPr rtlCol="0" anchor="ctr"/>
+          <a:lstStyle/>
+          <a:p>
+            <a:pPr algn="ctr"/>
+          </a:p>
+        </p:txBody>
+      </p:sp>
+      <p:pic>
+        <p:nvPicPr>
+          <p:cNvPr id="6" name="Picture 5" descr="red-pen-correction-paper.jpg"/>
+          <p:cNvPicPr>
+            <a:picLocks noChangeAspect="1"/>
+          </p:cNvPicPr>
+          <p:nvPr/>
+        </p:nvPicPr>
+        <p:blipFill>
+          <a:blip r:embed="rId2"/>
+          <a:stretch>
+            <a:fillRect/>
+          </a:stretch>
+        </p:blipFill>
+        <p:spPr>
+          <a:xfrm>
+            <a:off x="5870301" y="1646965"/>
+            <a:ext cx="5864193" cy="3911541"/>
+          </a:xfrm>
+          <a:prstGeom prst="rect">
+            <a:avLst/>
+          </a:prstGeom>
+        </p:spPr>
+      </p:pic>
+      <p:sp>
+        <p:nvSpPr>
+          <p:cNvPr id="7" name="TextBox 6"/>
           <p:cNvSpPr txBox="1"/>
           <p:nvPr/>
         </p:nvSpPr>
         <p:spPr>
           <a:xfrm>
-            <a:off x="457200" y="1170432"/>
-            <a:ext cx="11277295" cy="5230368"/>
+            <a:off x="5870301" y="5961888"/>
+            <a:ext cx="5864193" cy="320040"/>
+          </a:xfrm>
+          <a:prstGeom prst="rect">
+            <a:avLst/>
+          </a:prstGeom>
+          <a:noFill/>
+        </p:spPr>
+        <p:txBody>
+          <a:bodyPr wrap="square">
+            <a:spAutoFit/>
+          </a:bodyPr>
+          <a:lstStyle/>
+          <a:p>
+            <a:pPr algn="ctr"/>
+            <a:r>
+              <a:rPr sz="1100" b="0" i="1">
+                <a:solidFill>
+                  <a:srgbClr val="666666"/>
+                </a:solidFill>
+                <a:latin typeface="Calibri"/>
+              </a:rPr>
+              <a:t>Foto: Andy Barbour · Pexels</a:t>
+            </a:r>
+          </a:p>
+        </p:txBody>
+      </p:sp>
+      <p:sp>
+        <p:nvSpPr>
+          <p:cNvPr id="8" name="TextBox 7"/>
+          <p:cNvSpPr txBox="1"/>
+          <p:nvPr/>
+        </p:nvSpPr>
+        <p:spPr>
+          <a:xfrm>
+            <a:off x="457200" y="1353312"/>
+            <a:ext cx="5093061" cy="5047488"/>
           </a:xfrm>
           <a:prstGeom prst="rect">
             <a:avLst/>
@@ -8678,7 +9794,7 @@
                 </a:solidFill>
                 <a:latin typeface="Calibri"/>
               </a:rPr>
-              <a:t>–   Quinta: el workflow de Actions se ejecuto al menos una vez con resultado visible, porque un archivo YAML que nunca corrio es una intencion, no evidencia.</a:t>
+              <a:t>–   Microservicios teatro · nombres distintos entre diagramas · secretos en imagen.</a:t>
             </a:r>
           </a:p>
           <a:p>
@@ -8694,7 +9810,7 @@
                 </a:solidFill>
                 <a:latin typeface="Calibri"/>
               </a:rPr>
-              <a:t>–   Ese es el nucleo del acta: no una nota, sino cuales de estas cinco cadenas estan rotas en cada proyecto.</a:t>
+              <a:t>–   CI sin tests · diagrama sin puertos · dominio infinito.</a:t>
             </a:r>
           </a:p>
           <a:p>
@@ -8710,14 +9826,66 @@
                 </a:solidFill>
                 <a:latin typeface="Calibri"/>
               </a:rPr>
-              <a:t>–   Un ejemplo de cadena rota: el Containers tiene un worker de avisos, pero el diagrama de despliegue no lo ubica en ninguna zona; la pieza existe en el diseno y no tiene donde correr.</a:t>
-            </a:r>
-          </a:p>
-        </p:txBody>
-      </p:sp>
-      <p:sp>
-        <p:nvSpPr>
-          <p:cNvPr id="6" name="TextBox 5"/>
+              <a:t>–   </a:t>
+            </a:r>
+            <a:r>
+              <a:rPr sz="2000" b="1" i="0">
+                <a:solidFill>
+                  <a:srgbClr val="333333"/>
+                </a:solidFill>
+                <a:latin typeface="Calibri"/>
+              </a:rPr>
+              <a:t>Microservicios teatro</a:t>
+            </a:r>
+            <a:r>
+              <a:rPr sz="2000" b="0" i="0">
+                <a:solidFill>
+                  <a:srgbClr val="333333"/>
+                </a:solidFill>
+                <a:latin typeface="Calibri"/>
+              </a:rPr>
+              <a:t>:</a:t>
+            </a:r>
+          </a:p>
+          <a:p>
+            <a:pPr>
+              <a:spcAft>
+                <a:spcPts val="800"/>
+              </a:spcAft>
+            </a:pPr>
+            <a:r>
+              <a:rPr sz="2000" b="0" i="0">
+                <a:solidFill>
+                  <a:srgbClr val="333333"/>
+                </a:solidFill>
+                <a:latin typeface="Calibri"/>
+              </a:rPr>
+              <a:t>–   </a:t>
+            </a:r>
+            <a:r>
+              <a:rPr sz="2000" b="1" i="0">
+                <a:solidFill>
+                  <a:srgbClr val="333333"/>
+                </a:solidFill>
+                <a:latin typeface="Calibri"/>
+              </a:rPr>
+              <a:t>Nombres distintos</a:t>
+            </a:r>
+            <a:r>
+              <a:rPr sz="2000" b="0" i="0">
+                <a:solidFill>
+                  <a:srgbClr val="333333"/>
+                </a:solidFill>
+                <a:latin typeface="Calibri"/>
+              </a:rPr>
+              <a:t>:</a:t>
+            </a:r>
+          </a:p>
+        </p:txBody>
+      </p:sp>
+      <p:sp>
+        <p:nvSpPr>
+          <p:cNvPr id="9" name="TextBox 8"/>
           <p:cNvSpPr txBox="1"/>
           <p:nvPr/>
         </p:nvSpPr>
@@ -8891,21 +10059,271 @@
                 </a:solidFill>
                 <a:latin typeface="Calibri"/>
               </a:rPr>
-              <a:t>Scope creep y arquitectura de papel: las dos patologias con nombre propio</a:t>
-            </a:r>
-          </a:p>
-        </p:txBody>
-      </p:sp>
-      <p:sp>
-        <p:nvSpPr>
-          <p:cNvPr id="5" name="TextBox 4"/>
+              <a:t>El C4 Component: por dentro de la API</a:t>
+            </a:r>
+          </a:p>
+        </p:txBody>
+      </p:sp>
+      <p:sp>
+        <p:nvSpPr>
+          <p:cNvPr id="5" name="Rounded Rectangle 4"/>
+          <p:cNvSpPr/>
+          <p:nvPr/>
+        </p:nvSpPr>
+        <p:spPr>
+          <a:xfrm>
+            <a:off x="457200" y="1261872"/>
+            <a:ext cx="11277295" cy="5120416"/>
+          </a:xfrm>
+          <a:prstGeom prst="roundRect">
+            <a:avLst>
+              <a:gd name="adj" fmla="val 4000"/>
+            </a:avLst>
+          </a:prstGeom>
+          <a:solidFill>
+            <a:srgbClr val="1E1E1E"/>
+          </a:solidFill>
+          <a:ln>
+            <a:noFill/>
+          </a:ln>
+        </p:spPr>
+        <p:style>
+          <a:lnRef idx="1">
+            <a:schemeClr val="accent1"/>
+          </a:lnRef>
+          <a:fillRef idx="3">
+            <a:schemeClr val="accent1"/>
+          </a:fillRef>
+          <a:effectRef idx="2">
+            <a:schemeClr val="accent1"/>
+          </a:effectRef>
+          <a:fontRef idx="minor">
+            <a:schemeClr val="lt1"/>
+          </a:fontRef>
+        </p:style>
+        <p:txBody>
+          <a:bodyPr rtlCol="0" anchor="ctr"/>
+          <a:lstStyle/>
+          <a:p>
+            <a:pPr algn="ctr"/>
+          </a:p>
+        </p:txBody>
+      </p:sp>
+      <p:sp>
+        <p:nvSpPr>
+          <p:cNvPr id="6" name="Rectangle 5"/>
+          <p:cNvSpPr/>
+          <p:nvPr/>
+        </p:nvSpPr>
+        <p:spPr>
+          <a:xfrm>
+            <a:off x="457200" y="1261872"/>
+            <a:ext cx="11277295" cy="365760"/>
+          </a:xfrm>
+          <a:prstGeom prst="rect">
+            <a:avLst/>
+          </a:prstGeom>
+          <a:solidFill>
+            <a:srgbClr val="2D2D30"/>
+          </a:solidFill>
+          <a:ln>
+            <a:noFill/>
+          </a:ln>
+        </p:spPr>
+        <p:style>
+          <a:lnRef idx="1">
+            <a:schemeClr val="accent1"/>
+          </a:lnRef>
+          <a:fillRef idx="3">
+            <a:schemeClr val="accent1"/>
+          </a:fillRef>
+          <a:effectRef idx="2">
+            <a:schemeClr val="accent1"/>
+          </a:effectRef>
+          <a:fontRef idx="minor">
+            <a:schemeClr val="lt1"/>
+          </a:fontRef>
+        </p:style>
+        <p:txBody>
+          <a:bodyPr rtlCol="0" anchor="ctr"/>
+          <a:lstStyle/>
+          <a:p>
+            <a:pPr algn="ctr"/>
+          </a:p>
+        </p:txBody>
+      </p:sp>
+      <p:sp>
+        <p:nvSpPr>
+          <p:cNvPr id="7" name="Oval 6"/>
+          <p:cNvSpPr/>
+          <p:nvPr/>
+        </p:nvSpPr>
+        <p:spPr>
+          <a:xfrm>
+            <a:off x="658368" y="1380743"/>
+            <a:ext cx="128016" cy="128016"/>
+          </a:xfrm>
+          <a:prstGeom prst="ellipse">
+            <a:avLst/>
+          </a:prstGeom>
+          <a:solidFill>
+            <a:srgbClr val="FF5F56"/>
+          </a:solidFill>
+          <a:ln>
+            <a:noFill/>
+          </a:ln>
+        </p:spPr>
+        <p:style>
+          <a:lnRef idx="1">
+            <a:schemeClr val="accent1"/>
+          </a:lnRef>
+          <a:fillRef idx="3">
+            <a:schemeClr val="accent1"/>
+          </a:fillRef>
+          <a:effectRef idx="2">
+            <a:schemeClr val="accent1"/>
+          </a:effectRef>
+          <a:fontRef idx="minor">
+            <a:schemeClr val="lt1"/>
+          </a:fontRef>
+        </p:style>
+        <p:txBody>
+          <a:bodyPr rtlCol="0" anchor="ctr"/>
+          <a:lstStyle/>
+          <a:p>
+            <a:pPr algn="ctr"/>
+          </a:p>
+        </p:txBody>
+      </p:sp>
+      <p:sp>
+        <p:nvSpPr>
+          <p:cNvPr id="8" name="Oval 7"/>
+          <p:cNvSpPr/>
+          <p:nvPr/>
+        </p:nvSpPr>
+        <p:spPr>
+          <a:xfrm>
+            <a:off x="877824" y="1380743"/>
+            <a:ext cx="128016" cy="128016"/>
+          </a:xfrm>
+          <a:prstGeom prst="ellipse">
+            <a:avLst/>
+          </a:prstGeom>
+          <a:solidFill>
+            <a:srgbClr val="FFBD2E"/>
+          </a:solidFill>
+          <a:ln>
+            <a:noFill/>
+          </a:ln>
+        </p:spPr>
+        <p:style>
+          <a:lnRef idx="1">
+            <a:schemeClr val="accent1"/>
+          </a:lnRef>
+          <a:fillRef idx="3">
+            <a:schemeClr val="accent1"/>
+          </a:fillRef>
+          <a:effectRef idx="2">
+            <a:schemeClr val="accent1"/>
+          </a:effectRef>
+          <a:fontRef idx="minor">
+            <a:schemeClr val="lt1"/>
+          </a:fontRef>
+        </p:style>
+        <p:txBody>
+          <a:bodyPr rtlCol="0" anchor="ctr"/>
+          <a:lstStyle/>
+          <a:p>
+            <a:pPr algn="ctr"/>
+          </a:p>
+        </p:txBody>
+      </p:sp>
+      <p:sp>
+        <p:nvSpPr>
+          <p:cNvPr id="9" name="Oval 8"/>
+          <p:cNvSpPr/>
+          <p:nvPr/>
+        </p:nvSpPr>
+        <p:spPr>
+          <a:xfrm>
+            <a:off x="1097280" y="1380743"/>
+            <a:ext cx="128016" cy="128016"/>
+          </a:xfrm>
+          <a:prstGeom prst="ellipse">
+            <a:avLst/>
+          </a:prstGeom>
+          <a:solidFill>
+            <a:srgbClr val="27C93F"/>
+          </a:solidFill>
+          <a:ln>
+            <a:noFill/>
+          </a:ln>
+        </p:spPr>
+        <p:style>
+          <a:lnRef idx="1">
+            <a:schemeClr val="accent1"/>
+          </a:lnRef>
+          <a:fillRef idx="3">
+            <a:schemeClr val="accent1"/>
+          </a:fillRef>
+          <a:effectRef idx="2">
+            <a:schemeClr val="accent1"/>
+          </a:effectRef>
+          <a:fontRef idx="minor">
+            <a:schemeClr val="lt1"/>
+          </a:fontRef>
+        </p:style>
+        <p:txBody>
+          <a:bodyPr rtlCol="0" anchor="ctr"/>
+          <a:lstStyle/>
+          <a:p>
+            <a:pPr algn="ctr"/>
+          </a:p>
+        </p:txBody>
+      </p:sp>
+      <p:sp>
+        <p:nvSpPr>
+          <p:cNvPr id="10" name="TextBox 9"/>
           <p:cNvSpPr txBox="1"/>
           <p:nvPr/>
         </p:nvSpPr>
         <p:spPr>
           <a:xfrm>
-            <a:off x="457200" y="1170432"/>
-            <a:ext cx="11277295" cy="5230368"/>
+            <a:off x="1371600" y="1298448"/>
+            <a:ext cx="10180015" cy="292608"/>
+          </a:xfrm>
+          <a:prstGeom prst="rect">
+            <a:avLst/>
+          </a:prstGeom>
+          <a:noFill/>
+        </p:spPr>
+        <p:txBody>
+          <a:bodyPr wrap="square" anchor="ctr"/>
+          <a:lstStyle/>
+          <a:p>
+            <a:pPr algn="r"/>
+            <a:r>
+              <a:rPr sz="1100" b="1" i="0">
+                <a:solidFill>
+                  <a:srgbClr val="BBBBBB"/>
+                </a:solidFill>
+                <a:latin typeface="Calibri"/>
+              </a:rPr>
+              <a:t>Mermaid</a:t>
+            </a:r>
+          </a:p>
+        </p:txBody>
+      </p:sp>
+      <p:sp>
+        <p:nvSpPr>
+          <p:cNvPr id="11" name="TextBox 10"/>
+          <p:cNvSpPr txBox="1"/>
+          <p:nvPr/>
+        </p:nvSpPr>
+        <p:spPr>
+          <a:xfrm>
+            <a:off x="685800" y="1719072"/>
+            <a:ext cx="502920" cy="4526056"/>
           </a:xfrm>
           <a:prstGeom prst="rect">
             <a:avLst/>
@@ -8918,74 +10336,2190 @@
           </a:bodyPr>
           <a:lstStyle/>
           <a:p>
+            <a:pPr algn="r">
+              <a:spcAft>
+                <a:spcPts val="235"/>
+              </a:spcAft>
+            </a:pPr>
+            <a:r>
+              <a:rPr sz="1100" i="0" b="0">
+                <a:solidFill>
+                  <a:srgbClr val="858585"/>
+                </a:solidFill>
+                <a:latin typeface="Consolas"/>
+              </a:rPr>
+              <a:t>1</a:t>
+            </a:r>
+          </a:p>
+          <a:p>
+            <a:pPr algn="r">
+              <a:spcAft>
+                <a:spcPts val="235"/>
+              </a:spcAft>
+            </a:pPr>
+            <a:r>
+              <a:rPr sz="1100" i="0" b="0">
+                <a:solidFill>
+                  <a:srgbClr val="858585"/>
+                </a:solidFill>
+                <a:latin typeface="Consolas"/>
+              </a:rPr>
+              <a:t>2</a:t>
+            </a:r>
+          </a:p>
+          <a:p>
+            <a:pPr algn="r">
+              <a:spcAft>
+                <a:spcPts val="235"/>
+              </a:spcAft>
+            </a:pPr>
+            <a:r>
+              <a:rPr sz="1100" i="0" b="0">
+                <a:solidFill>
+                  <a:srgbClr val="858585"/>
+                </a:solidFill>
+                <a:latin typeface="Consolas"/>
+              </a:rPr>
+              <a:t>3</a:t>
+            </a:r>
+          </a:p>
+          <a:p>
+            <a:pPr algn="r">
+              <a:spcAft>
+                <a:spcPts val="235"/>
+              </a:spcAft>
+            </a:pPr>
+            <a:r>
+              <a:rPr sz="1100" i="0" b="0">
+                <a:solidFill>
+                  <a:srgbClr val="858585"/>
+                </a:solidFill>
+                <a:latin typeface="Consolas"/>
+              </a:rPr>
+              <a:t>4</a:t>
+            </a:r>
+          </a:p>
+          <a:p>
+            <a:pPr algn="r">
+              <a:spcAft>
+                <a:spcPts val="235"/>
+              </a:spcAft>
+            </a:pPr>
+            <a:r>
+              <a:rPr sz="1100" i="0" b="0">
+                <a:solidFill>
+                  <a:srgbClr val="858585"/>
+                </a:solidFill>
+                <a:latin typeface="Consolas"/>
+              </a:rPr>
+              <a:t>5</a:t>
+            </a:r>
+          </a:p>
+          <a:p>
+            <a:pPr algn="r">
+              <a:spcAft>
+                <a:spcPts val="235"/>
+              </a:spcAft>
+            </a:pPr>
+            <a:r>
+              <a:rPr sz="1100" i="0" b="0">
+                <a:solidFill>
+                  <a:srgbClr val="858585"/>
+                </a:solidFill>
+                <a:latin typeface="Consolas"/>
+              </a:rPr>
+              <a:t>6</a:t>
+            </a:r>
+          </a:p>
+          <a:p>
+            <a:pPr algn="r">
+              <a:spcAft>
+                <a:spcPts val="235"/>
+              </a:spcAft>
+            </a:pPr>
+            <a:r>
+              <a:rPr sz="1100" i="0" b="0">
+                <a:solidFill>
+                  <a:srgbClr val="858585"/>
+                </a:solidFill>
+                <a:latin typeface="Consolas"/>
+              </a:rPr>
+              <a:t>7</a:t>
+            </a:r>
+          </a:p>
+          <a:p>
+            <a:pPr algn="r">
+              <a:spcAft>
+                <a:spcPts val="235"/>
+              </a:spcAft>
+            </a:pPr>
+            <a:r>
+              <a:rPr sz="1100" i="0" b="0">
+                <a:solidFill>
+                  <a:srgbClr val="858585"/>
+                </a:solidFill>
+                <a:latin typeface="Consolas"/>
+              </a:rPr>
+              <a:t>8</a:t>
+            </a:r>
+          </a:p>
+          <a:p>
+            <a:pPr algn="r">
+              <a:spcAft>
+                <a:spcPts val="235"/>
+              </a:spcAft>
+            </a:pPr>
+            <a:r>
+              <a:rPr sz="1100" i="0" b="0">
+                <a:solidFill>
+                  <a:srgbClr val="858585"/>
+                </a:solidFill>
+                <a:latin typeface="Consolas"/>
+              </a:rPr>
+              <a:t>9</a:t>
+            </a:r>
+          </a:p>
+          <a:p>
+            <a:pPr algn="r">
+              <a:spcAft>
+                <a:spcPts val="235"/>
+              </a:spcAft>
+            </a:pPr>
+            <a:r>
+              <a:rPr sz="1100" i="0" b="0">
+                <a:solidFill>
+                  <a:srgbClr val="858585"/>
+                </a:solidFill>
+                <a:latin typeface="Consolas"/>
+              </a:rPr>
+              <a:t>10</a:t>
+            </a:r>
+          </a:p>
+          <a:p>
+            <a:pPr algn="r">
+              <a:spcAft>
+                <a:spcPts val="235"/>
+              </a:spcAft>
+            </a:pPr>
+            <a:r>
+              <a:rPr sz="1100" i="0" b="0">
+                <a:solidFill>
+                  <a:srgbClr val="858585"/>
+                </a:solidFill>
+                <a:latin typeface="Consolas"/>
+              </a:rPr>
+              <a:t>11</a:t>
+            </a:r>
+          </a:p>
+          <a:p>
+            <a:pPr algn="r">
+              <a:spcAft>
+                <a:spcPts val="235"/>
+              </a:spcAft>
+            </a:pPr>
+            <a:r>
+              <a:rPr sz="1100" i="0" b="0">
+                <a:solidFill>
+                  <a:srgbClr val="858585"/>
+                </a:solidFill>
+                <a:latin typeface="Consolas"/>
+              </a:rPr>
+              <a:t>12</a:t>
+            </a:r>
+          </a:p>
+          <a:p>
+            <a:pPr algn="r">
+              <a:spcAft>
+                <a:spcPts val="235"/>
+              </a:spcAft>
+            </a:pPr>
+            <a:r>
+              <a:rPr sz="1100" i="0" b="0">
+                <a:solidFill>
+                  <a:srgbClr val="858585"/>
+                </a:solidFill>
+                <a:latin typeface="Consolas"/>
+              </a:rPr>
+              <a:t>13</a:t>
+            </a:r>
+          </a:p>
+          <a:p>
+            <a:pPr algn="r">
+              <a:spcAft>
+                <a:spcPts val="235"/>
+              </a:spcAft>
+            </a:pPr>
+            <a:r>
+              <a:rPr sz="1100" i="0" b="0">
+                <a:solidFill>
+                  <a:srgbClr val="858585"/>
+                </a:solidFill>
+                <a:latin typeface="Consolas"/>
+              </a:rPr>
+              <a:t>14</a:t>
+            </a:r>
+          </a:p>
+          <a:p>
+            <a:pPr algn="r">
+              <a:spcAft>
+                <a:spcPts val="235"/>
+              </a:spcAft>
+            </a:pPr>
+            <a:r>
+              <a:rPr sz="1100" i="0" b="0">
+                <a:solidFill>
+                  <a:srgbClr val="858585"/>
+                </a:solidFill>
+                <a:latin typeface="Consolas"/>
+              </a:rPr>
+              <a:t>15</a:t>
+            </a:r>
+          </a:p>
+          <a:p>
+            <a:pPr algn="r">
+              <a:spcAft>
+                <a:spcPts val="235"/>
+              </a:spcAft>
+            </a:pPr>
+            <a:r>
+              <a:rPr sz="1100" i="0" b="0">
+                <a:solidFill>
+                  <a:srgbClr val="858585"/>
+                </a:solidFill>
+                <a:latin typeface="Consolas"/>
+              </a:rPr>
+              <a:t>16</a:t>
+            </a:r>
+          </a:p>
+          <a:p>
+            <a:pPr algn="r">
+              <a:spcAft>
+                <a:spcPts val="235"/>
+              </a:spcAft>
+            </a:pPr>
+            <a:r>
+              <a:rPr sz="1100" i="0" b="0">
+                <a:solidFill>
+                  <a:srgbClr val="858585"/>
+                </a:solidFill>
+                <a:latin typeface="Consolas"/>
+              </a:rPr>
+              <a:t>17</a:t>
+            </a:r>
+          </a:p>
+          <a:p>
+            <a:pPr algn="r">
+              <a:spcAft>
+                <a:spcPts val="235"/>
+              </a:spcAft>
+            </a:pPr>
+            <a:r>
+              <a:rPr sz="1100" i="0" b="0">
+                <a:solidFill>
+                  <a:srgbClr val="858585"/>
+                </a:solidFill>
+                <a:latin typeface="Consolas"/>
+              </a:rPr>
+              <a:t>18</a:t>
+            </a:r>
+          </a:p>
+          <a:p>
+            <a:pPr algn="r">
+              <a:spcAft>
+                <a:spcPts val="235"/>
+              </a:spcAft>
+            </a:pPr>
+            <a:r>
+              <a:rPr sz="1100" i="0" b="0">
+                <a:solidFill>
+                  <a:srgbClr val="858585"/>
+                </a:solidFill>
+                <a:latin typeface="Consolas"/>
+              </a:rPr>
+              <a:t>19</a:t>
+            </a:r>
+          </a:p>
+          <a:p>
+            <a:pPr algn="r">
+              <a:spcAft>
+                <a:spcPts val="235"/>
+              </a:spcAft>
+            </a:pPr>
+            <a:r>
+              <a:rPr sz="1100" i="0" b="0">
+                <a:solidFill>
+                  <a:srgbClr val="858585"/>
+                </a:solidFill>
+                <a:latin typeface="Consolas"/>
+              </a:rPr>
+              <a:t>20</a:t>
+            </a:r>
+          </a:p>
+          <a:p>
+            <a:pPr algn="r">
+              <a:spcAft>
+                <a:spcPts val="235"/>
+              </a:spcAft>
+            </a:pPr>
+            <a:r>
+              <a:rPr sz="1100" i="0" b="0">
+                <a:solidFill>
+                  <a:srgbClr val="858585"/>
+                </a:solidFill>
+                <a:latin typeface="Consolas"/>
+              </a:rPr>
+              <a:t>21</a:t>
+            </a:r>
+          </a:p>
+        </p:txBody>
+      </p:sp>
+      <p:sp>
+        <p:nvSpPr>
+          <p:cNvPr id="12" name="TextBox 11"/>
+          <p:cNvSpPr txBox="1"/>
+          <p:nvPr/>
+        </p:nvSpPr>
+        <p:spPr>
+          <a:xfrm>
+            <a:off x="1188720" y="1719072"/>
+            <a:ext cx="10271455" cy="4526056"/>
+          </a:xfrm>
+          <a:prstGeom prst="rect">
+            <a:avLst/>
+          </a:prstGeom>
+          <a:noFill/>
+        </p:spPr>
+        <p:txBody>
+          <a:bodyPr wrap="square">
+            <a:spAutoFit/>
+          </a:bodyPr>
+          <a:lstStyle/>
+          <a:p>
             <a:pPr>
               <a:spcAft>
-                <a:spcPts val="800"/>
+                <a:spcPts val="235"/>
               </a:spcAft>
             </a:pPr>
             <a:r>
-              <a:rPr sz="2000" b="0" i="0">
-                <a:solidFill>
-                  <a:srgbClr val="333333"/>
-                </a:solidFill>
-                <a:latin typeface="Calibri"/>
-              </a:rPr>
-              <a:t>–   La primera es el scope creep, el crecimiento no controlado del alcance: el sistema suma capacidades clase por clase, cada una razonable por si misma, hasta que el proyecto tiene un alcance que no se puede documentar ni defender en el tiempo restante.</a:t>
+              <a:rPr sz="1100" i="0" b="0">
+                <a:solidFill>
+                  <a:srgbClr val="D4D4D4"/>
+                </a:solidFill>
+                <a:latin typeface="Consolas"/>
+              </a:rPr>
+              <a:t>C4Component</a:t>
             </a:r>
           </a:p>
           <a:p>
             <a:pPr>
               <a:spcAft>
-                <a:spcPts val="800"/>
+                <a:spcPts val="235"/>
               </a:spcAft>
             </a:pPr>
             <a:r>
-              <a:rPr sz="2000" b="0" i="0">
-                <a:solidFill>
-                  <a:srgbClr val="333333"/>
-                </a:solidFill>
-                <a:latin typeface="Calibri"/>
-              </a:rPr>
-              <a:t>–   La segunda patologia es el teatro de microservicios: servicios separados en el diagrama que en la practica no son unidades independientes.</a:t>
+              <a:rPr sz="1100" i="0" b="0">
+                <a:solidFill>
+                  <a:srgbClr val="D4D4D4"/>
+                </a:solidFill>
+                <a:latin typeface="Consolas"/>
+              </a:rPr>
+              <a:t>title</a:t>
+            </a:r>
+            <a:r>
+              <a:rPr sz="1100" i="0" b="0">
+                <a:solidFill>
+                  <a:srgbClr val="D4D4D4"/>
+                </a:solidFill>
+                <a:latin typeface="Consolas"/>
+              </a:rPr>
+              <a:t> </a:t>
+            </a:r>
+            <a:r>
+              <a:rPr sz="1100" i="0" b="0">
+                <a:solidFill>
+                  <a:srgbClr val="D4D4D4"/>
+                </a:solidFill>
+                <a:latin typeface="Consolas"/>
+              </a:rPr>
+              <a:t>Componentes</a:t>
+            </a:r>
+            <a:r>
+              <a:rPr sz="1100" i="0" b="0">
+                <a:solidFill>
+                  <a:srgbClr val="D4D4D4"/>
+                </a:solidFill>
+                <a:latin typeface="Consolas"/>
+              </a:rPr>
+              <a:t> </a:t>
+            </a:r>
+            <a:r>
+              <a:rPr sz="1100" i="0" b="0">
+                <a:solidFill>
+                  <a:srgbClr val="D4D4D4"/>
+                </a:solidFill>
+                <a:latin typeface="Consolas"/>
+              </a:rPr>
+              <a:t>de</a:t>
+            </a:r>
+            <a:r>
+              <a:rPr sz="1100" i="0" b="0">
+                <a:solidFill>
+                  <a:srgbClr val="D4D4D4"/>
+                </a:solidFill>
+                <a:latin typeface="Consolas"/>
+              </a:rPr>
+              <a:t> </a:t>
+            </a:r>
+            <a:r>
+              <a:rPr sz="1100" i="0" b="0">
+                <a:solidFill>
+                  <a:srgbClr val="D4D4D4"/>
+                </a:solidFill>
+                <a:latin typeface="Consolas"/>
+              </a:rPr>
+              <a:t>la</a:t>
+            </a:r>
+            <a:r>
+              <a:rPr sz="1100" i="0" b="0">
+                <a:solidFill>
+                  <a:srgbClr val="D4D4D4"/>
+                </a:solidFill>
+                <a:latin typeface="Consolas"/>
+              </a:rPr>
+              <a:t> </a:t>
+            </a:r>
+            <a:r>
+              <a:rPr sz="1100" i="0" b="0">
+                <a:solidFill>
+                  <a:srgbClr val="D4D4D4"/>
+                </a:solidFill>
+                <a:latin typeface="Consolas"/>
+              </a:rPr>
+              <a:t>API</a:t>
+            </a:r>
+            <a:r>
+              <a:rPr sz="1100" i="0" b="0">
+                <a:solidFill>
+                  <a:srgbClr val="D4D4D4"/>
+                </a:solidFill>
+                <a:latin typeface="Consolas"/>
+              </a:rPr>
+              <a:t> </a:t>
+            </a:r>
+            <a:r>
+              <a:rPr sz="1100" i="0" b="0">
+                <a:solidFill>
+                  <a:srgbClr val="D4D4D4"/>
+                </a:solidFill>
+                <a:latin typeface="Consolas"/>
+              </a:rPr>
+              <a:t>de</a:t>
+            </a:r>
+            <a:r>
+              <a:rPr sz="1100" i="0" b="0">
+                <a:solidFill>
+                  <a:srgbClr val="D4D4D4"/>
+                </a:solidFill>
+                <a:latin typeface="Consolas"/>
+              </a:rPr>
+              <a:t> </a:t>
+            </a:r>
+            <a:r>
+              <a:rPr sz="1100" i="0" b="0">
+                <a:solidFill>
+                  <a:srgbClr val="D4D4D4"/>
+                </a:solidFill>
+                <a:latin typeface="Consolas"/>
+              </a:rPr>
+              <a:t>turnos</a:t>
             </a:r>
           </a:p>
           <a:p>
             <a:pPr>
               <a:spcAft>
-                <a:spcPts val="800"/>
+                <a:spcPts val="235"/>
               </a:spcAft>
             </a:pPr>
             <a:r>
-              <a:rPr sz="2000" b="0" i="0">
-                <a:solidFill>
-                  <a:srgbClr val="333333"/>
-                </a:solidFill>
-                <a:latin typeface="Calibri"/>
-              </a:rPr>
-              <a:t>–   En la app el caso clasico es el "servicio de autenticacion" dibujado como caja aparte que en el repositorio es un modulo dentro de la misma API, escribe en las mismas tablas y se despliega en el mismo contenedor.</a:t>
+              <a:rPr sz="1100" i="0" b="0">
+                <a:solidFill>
+                  <a:srgbClr val="DCDCAA"/>
+                </a:solidFill>
+                <a:latin typeface="Consolas"/>
+              </a:rPr>
+              <a:t>Container</a:t>
+            </a:r>
+            <a:r>
+              <a:rPr sz="1100" i="0" b="0">
+                <a:solidFill>
+                  <a:srgbClr val="D4D4D4"/>
+                </a:solidFill>
+                <a:latin typeface="Consolas"/>
+              </a:rPr>
+              <a:t>(</a:t>
+            </a:r>
+            <a:r>
+              <a:rPr sz="1100" i="0" b="0">
+                <a:solidFill>
+                  <a:srgbClr val="D4D4D4"/>
+                </a:solidFill>
+                <a:latin typeface="Consolas"/>
+              </a:rPr>
+              <a:t>spa</a:t>
+            </a:r>
+            <a:r>
+              <a:rPr sz="1100" i="0" b="0">
+                <a:solidFill>
+                  <a:srgbClr val="D4D4D4"/>
+                </a:solidFill>
+                <a:latin typeface="Consolas"/>
+              </a:rPr>
+              <a:t>, </a:t>
+            </a:r>
+            <a:r>
+              <a:rPr sz="1100" i="0" b="0">
+                <a:solidFill>
+                  <a:srgbClr val="CE9178"/>
+                </a:solidFill>
+                <a:latin typeface="Consolas"/>
+              </a:rPr>
+              <a:t>"App web"</a:t>
+            </a:r>
+            <a:r>
+              <a:rPr sz="1100" i="0" b="0">
+                <a:solidFill>
+                  <a:srgbClr val="D4D4D4"/>
+                </a:solidFill>
+                <a:latin typeface="Consolas"/>
+              </a:rPr>
+              <a:t>, </a:t>
+            </a:r>
+            <a:r>
+              <a:rPr sz="1100" i="0" b="0">
+                <a:solidFill>
+                  <a:srgbClr val="CE9178"/>
+                </a:solidFill>
+                <a:latin typeface="Consolas"/>
+              </a:rPr>
+              <a:t>"React"</a:t>
+            </a:r>
+            <a:r>
+              <a:rPr sz="1100" i="0" b="0">
+                <a:solidFill>
+                  <a:srgbClr val="D4D4D4"/>
+                </a:solidFill>
+                <a:latin typeface="Consolas"/>
+              </a:rPr>
+              <a:t>, </a:t>
+            </a:r>
+            <a:r>
+              <a:rPr sz="1100" i="0" b="0">
+                <a:solidFill>
+                  <a:srgbClr val="CE9178"/>
+                </a:solidFill>
+                <a:latin typeface="Consolas"/>
+              </a:rPr>
+              <a:t>"Muestra franjas y crea la reserva"</a:t>
+            </a:r>
+            <a:r>
+              <a:rPr sz="1100" i="0" b="0">
+                <a:solidFill>
+                  <a:srgbClr val="D4D4D4"/>
+                </a:solidFill>
+                <a:latin typeface="Consolas"/>
+              </a:rPr>
+              <a:t>)</a:t>
             </a:r>
           </a:p>
           <a:p>
             <a:pPr>
               <a:spcAft>
-                <a:spcPts val="800"/>
+                <a:spcPts val="235"/>
               </a:spcAft>
             </a:pPr>
             <a:r>
-              <a:rPr sz="2000" b="0" i="0">
-                <a:solidFill>
-                  <a:srgbClr val="333333"/>
-                </a:solidFill>
-                <a:latin typeface="Calibri"/>
-              </a:rPr>
-              <a:t>–   No es un microservicio, es un modulo, y decirlo no castiga al estudiante: corrige el vocabulario antes del Parcial 3, donde esa distincion se evalua.</a:t>
-            </a:r>
-          </a:p>
-        </p:txBody>
-      </p:sp>
-      <p:sp>
-        <p:nvSpPr>
-          <p:cNvPr id="6" name="TextBox 5"/>
+              <a:rPr sz="1100" i="0" b="0">
+                <a:solidFill>
+                  <a:srgbClr val="DCDCAA"/>
+                </a:solidFill>
+                <a:latin typeface="Consolas"/>
+              </a:rPr>
+              <a:t>Container_Boundary</a:t>
+            </a:r>
+            <a:r>
+              <a:rPr sz="1100" i="0" b="0">
+                <a:solidFill>
+                  <a:srgbClr val="D4D4D4"/>
+                </a:solidFill>
+                <a:latin typeface="Consolas"/>
+              </a:rPr>
+              <a:t>(</a:t>
+            </a:r>
+            <a:r>
+              <a:rPr sz="1100" i="0" b="0">
+                <a:solidFill>
+                  <a:srgbClr val="D4D4D4"/>
+                </a:solidFill>
+                <a:latin typeface="Consolas"/>
+              </a:rPr>
+              <a:t>api</a:t>
+            </a:r>
+            <a:r>
+              <a:rPr sz="1100" i="0" b="0">
+                <a:solidFill>
+                  <a:srgbClr val="D4D4D4"/>
+                </a:solidFill>
+                <a:latin typeface="Consolas"/>
+              </a:rPr>
+              <a:t>, </a:t>
+            </a:r>
+            <a:r>
+              <a:rPr sz="1100" i="0" b="0">
+                <a:solidFill>
+                  <a:srgbClr val="CE9178"/>
+                </a:solidFill>
+                <a:latin typeface="Consolas"/>
+              </a:rPr>
+              <a:t>"API de turnos - Node.js"</a:t>
+            </a:r>
+            <a:r>
+              <a:rPr sz="1100" i="0" b="0">
+                <a:solidFill>
+                  <a:srgbClr val="D4D4D4"/>
+                </a:solidFill>
+                <a:latin typeface="Consolas"/>
+              </a:rPr>
+              <a:t>) {</a:t>
+            </a:r>
+          </a:p>
+          <a:p>
+            <a:pPr>
+              <a:spcAft>
+                <a:spcPts val="235"/>
+              </a:spcAft>
+            </a:pPr>
+            <a:r>
+              <a:rPr sz="1100" i="0" b="0">
+                <a:solidFill>
+                  <a:srgbClr val="D4D4D4"/>
+                </a:solidFill>
+                <a:latin typeface="Consolas"/>
+              </a:rPr>
+              <a:t>  </a:t>
+            </a:r>
+            <a:r>
+              <a:rPr sz="1100" i="0" b="0">
+                <a:solidFill>
+                  <a:srgbClr val="DCDCAA"/>
+                </a:solidFill>
+                <a:latin typeface="Consolas"/>
+              </a:rPr>
+              <a:t>Component</a:t>
+            </a:r>
+            <a:r>
+              <a:rPr sz="1100" i="0" b="0">
+                <a:solidFill>
+                  <a:srgbClr val="D4D4D4"/>
+                </a:solidFill>
+                <a:latin typeface="Consolas"/>
+              </a:rPr>
+              <a:t>(</a:t>
+            </a:r>
+            <a:r>
+              <a:rPr sz="1100" i="0" b="0">
+                <a:solidFill>
+                  <a:srgbClr val="D4D4D4"/>
+                </a:solidFill>
+                <a:latin typeface="Consolas"/>
+              </a:rPr>
+              <a:t>rutas</a:t>
+            </a:r>
+            <a:r>
+              <a:rPr sz="1100" i="0" b="0">
+                <a:solidFill>
+                  <a:srgbClr val="D4D4D4"/>
+                </a:solidFill>
+                <a:latin typeface="Consolas"/>
+              </a:rPr>
+              <a:t>, </a:t>
+            </a:r>
+            <a:r>
+              <a:rPr sz="1100" i="0" b="0">
+                <a:solidFill>
+                  <a:srgbClr val="CE9178"/>
+                </a:solidFill>
+                <a:latin typeface="Consolas"/>
+              </a:rPr>
+              <a:t>"Rutas de /turnos"</a:t>
+            </a:r>
+            <a:r>
+              <a:rPr sz="1100" i="0" b="0">
+                <a:solidFill>
+                  <a:srgbClr val="D4D4D4"/>
+                </a:solidFill>
+                <a:latin typeface="Consolas"/>
+              </a:rPr>
+              <a:t>, </a:t>
+            </a:r>
+            <a:r>
+              <a:rPr sz="1100" i="0" b="0">
+                <a:solidFill>
+                  <a:srgbClr val="CE9178"/>
+                </a:solidFill>
+                <a:latin typeface="Consolas"/>
+              </a:rPr>
+              <a:t>"Express Router"</a:t>
+            </a:r>
+            <a:r>
+              <a:rPr sz="1100" i="0" b="0">
+                <a:solidFill>
+                  <a:srgbClr val="D4D4D4"/>
+                </a:solidFill>
+                <a:latin typeface="Consolas"/>
+              </a:rPr>
+              <a:t>, </a:t>
+            </a:r>
+            <a:r>
+              <a:rPr sz="1100" i="0" b="0">
+                <a:solidFill>
+                  <a:srgbClr val="CE9178"/>
+                </a:solidFill>
+                <a:latin typeface="Consolas"/>
+              </a:rPr>
+              <a:t>"Recibe y valida la peticion"</a:t>
+            </a:r>
+            <a:r>
+              <a:rPr sz="1100" i="0" b="0">
+                <a:solidFill>
+                  <a:srgbClr val="D4D4D4"/>
+                </a:solidFill>
+                <a:latin typeface="Consolas"/>
+              </a:rPr>
+              <a:t>)</a:t>
+            </a:r>
+          </a:p>
+          <a:p>
+            <a:pPr>
+              <a:spcAft>
+                <a:spcPts val="235"/>
+              </a:spcAft>
+            </a:pPr>
+            <a:r>
+              <a:rPr sz="1100" i="0" b="0">
+                <a:solidFill>
+                  <a:srgbClr val="D4D4D4"/>
+                </a:solidFill>
+                <a:latin typeface="Consolas"/>
+              </a:rPr>
+              <a:t>  </a:t>
+            </a:r>
+            <a:r>
+              <a:rPr sz="1100" i="0" b="0">
+                <a:solidFill>
+                  <a:srgbClr val="DCDCAA"/>
+                </a:solidFill>
+                <a:latin typeface="Consolas"/>
+              </a:rPr>
+              <a:t>Component</a:t>
+            </a:r>
+            <a:r>
+              <a:rPr sz="1100" i="0" b="0">
+                <a:solidFill>
+                  <a:srgbClr val="D4D4D4"/>
+                </a:solidFill>
+                <a:latin typeface="Consolas"/>
+              </a:rPr>
+              <a:t>(</a:t>
+            </a:r>
+            <a:r>
+              <a:rPr sz="1100" i="0" b="0">
+                <a:solidFill>
+                  <a:srgbClr val="D4D4D4"/>
+                </a:solidFill>
+                <a:latin typeface="Consolas"/>
+              </a:rPr>
+              <a:t>token</a:t>
+            </a:r>
+            <a:r>
+              <a:rPr sz="1100" i="0" b="0">
+                <a:solidFill>
+                  <a:srgbClr val="D4D4D4"/>
+                </a:solidFill>
+                <a:latin typeface="Consolas"/>
+              </a:rPr>
+              <a:t>, </a:t>
+            </a:r>
+            <a:r>
+              <a:rPr sz="1100" i="0" b="0">
+                <a:solidFill>
+                  <a:srgbClr val="CE9178"/>
+                </a:solidFill>
+                <a:latin typeface="Consolas"/>
+              </a:rPr>
+              <a:t>"Verificador de token"</a:t>
+            </a:r>
+            <a:r>
+              <a:rPr sz="1100" i="0" b="0">
+                <a:solidFill>
+                  <a:srgbClr val="D4D4D4"/>
+                </a:solidFill>
+                <a:latin typeface="Consolas"/>
+              </a:rPr>
+              <a:t>, </a:t>
+            </a:r>
+            <a:r>
+              <a:rPr sz="1100" i="0" b="0">
+                <a:solidFill>
+                  <a:srgbClr val="CE9178"/>
+                </a:solidFill>
+                <a:latin typeface="Consolas"/>
+              </a:rPr>
+              <a:t>"Libreria JWT"</a:t>
+            </a:r>
+            <a:r>
+              <a:rPr sz="1100" i="0" b="0">
+                <a:solidFill>
+                  <a:srgbClr val="D4D4D4"/>
+                </a:solidFill>
+                <a:latin typeface="Consolas"/>
+              </a:rPr>
+              <a:t>, </a:t>
+            </a:r>
+            <a:r>
+              <a:rPr sz="1100" i="0" b="0">
+                <a:solidFill>
+                  <a:srgbClr val="CE9178"/>
+                </a:solidFill>
+                <a:latin typeface="Consolas"/>
+              </a:rPr>
+              <a:t>"Valida firma y expiracion"</a:t>
+            </a:r>
+            <a:r>
+              <a:rPr sz="1100" i="0" b="0">
+                <a:solidFill>
+                  <a:srgbClr val="D4D4D4"/>
+                </a:solidFill>
+                <a:latin typeface="Consolas"/>
+              </a:rPr>
+              <a:t>)</a:t>
+            </a:r>
+          </a:p>
+          <a:p>
+            <a:pPr>
+              <a:spcAft>
+                <a:spcPts val="235"/>
+              </a:spcAft>
+            </a:pPr>
+            <a:r>
+              <a:rPr sz="1100" i="0" b="0">
+                <a:solidFill>
+                  <a:srgbClr val="D4D4D4"/>
+                </a:solidFill>
+                <a:latin typeface="Consolas"/>
+              </a:rPr>
+              <a:t>  </a:t>
+            </a:r>
+            <a:r>
+              <a:rPr sz="1100" i="0" b="0">
+                <a:solidFill>
+                  <a:srgbClr val="DCDCAA"/>
+                </a:solidFill>
+                <a:latin typeface="Consolas"/>
+              </a:rPr>
+              <a:t>Component</a:t>
+            </a:r>
+            <a:r>
+              <a:rPr sz="1100" i="0" b="0">
+                <a:solidFill>
+                  <a:srgbClr val="D4D4D4"/>
+                </a:solidFill>
+                <a:latin typeface="Consolas"/>
+              </a:rPr>
+              <a:t>(</a:t>
+            </a:r>
+            <a:r>
+              <a:rPr sz="1100" i="0" b="0">
+                <a:solidFill>
+                  <a:srgbClr val="D4D4D4"/>
+                </a:solidFill>
+                <a:latin typeface="Consolas"/>
+              </a:rPr>
+              <a:t>reglas</a:t>
+            </a:r>
+            <a:r>
+              <a:rPr sz="1100" i="0" b="0">
+                <a:solidFill>
+                  <a:srgbClr val="D4D4D4"/>
+                </a:solidFill>
+                <a:latin typeface="Consolas"/>
+              </a:rPr>
+              <a:t>, </a:t>
+            </a:r>
+            <a:r>
+              <a:rPr sz="1100" i="0" b="0">
+                <a:solidFill>
+                  <a:srgbClr val="CE9178"/>
+                </a:solidFill>
+                <a:latin typeface="Consolas"/>
+              </a:rPr>
+              <a:t>"Reglas de reserva"</a:t>
+            </a:r>
+            <a:r>
+              <a:rPr sz="1100" i="0" b="0">
+                <a:solidFill>
+                  <a:srgbClr val="D4D4D4"/>
+                </a:solidFill>
+                <a:latin typeface="Consolas"/>
+              </a:rPr>
+              <a:t>, </a:t>
+            </a:r>
+            <a:r>
+              <a:rPr sz="1100" i="0" b="0">
+                <a:solidFill>
+                  <a:srgbClr val="CE9178"/>
+                </a:solidFill>
+                <a:latin typeface="Consolas"/>
+              </a:rPr>
+              <a:t>"Node.js"</a:t>
+            </a:r>
+            <a:r>
+              <a:rPr sz="1100" i="0" b="0">
+                <a:solidFill>
+                  <a:srgbClr val="D4D4D4"/>
+                </a:solidFill>
+                <a:latin typeface="Consolas"/>
+              </a:rPr>
+              <a:t>, </a:t>
+            </a:r>
+            <a:r>
+              <a:rPr sz="1100" i="0" b="0">
+                <a:solidFill>
+                  <a:srgbClr val="CE9178"/>
+                </a:solidFill>
+                <a:latin typeface="Consolas"/>
+              </a:rPr>
+              <a:t>"Impide dos turnos en una franja"</a:t>
+            </a:r>
+            <a:r>
+              <a:rPr sz="1100" i="0" b="0">
+                <a:solidFill>
+                  <a:srgbClr val="D4D4D4"/>
+                </a:solidFill>
+                <a:latin typeface="Consolas"/>
+              </a:rPr>
+              <a:t>)</a:t>
+            </a:r>
+          </a:p>
+          <a:p>
+            <a:pPr>
+              <a:spcAft>
+                <a:spcPts val="235"/>
+              </a:spcAft>
+            </a:pPr>
+            <a:r>
+              <a:rPr sz="1100" i="0" b="0">
+                <a:solidFill>
+                  <a:srgbClr val="D4D4D4"/>
+                </a:solidFill>
+                <a:latin typeface="Consolas"/>
+              </a:rPr>
+              <a:t>  </a:t>
+            </a:r>
+            <a:r>
+              <a:rPr sz="1100" i="0" b="0">
+                <a:solidFill>
+                  <a:srgbClr val="DCDCAA"/>
+                </a:solidFill>
+                <a:latin typeface="Consolas"/>
+              </a:rPr>
+              <a:t>Component</a:t>
+            </a:r>
+            <a:r>
+              <a:rPr sz="1100" i="0" b="0">
+                <a:solidFill>
+                  <a:srgbClr val="D4D4D4"/>
+                </a:solidFill>
+                <a:latin typeface="Consolas"/>
+              </a:rPr>
+              <a:t>(</a:t>
+            </a:r>
+            <a:r>
+              <a:rPr sz="1100" i="0" b="0">
+                <a:solidFill>
+                  <a:srgbClr val="D4D4D4"/>
+                </a:solidFill>
+                <a:latin typeface="Consolas"/>
+              </a:rPr>
+              <a:t>repo</a:t>
+            </a:r>
+            <a:r>
+              <a:rPr sz="1100" i="0" b="0">
+                <a:solidFill>
+                  <a:srgbClr val="D4D4D4"/>
+                </a:solidFill>
+                <a:latin typeface="Consolas"/>
+              </a:rPr>
+              <a:t>, </a:t>
+            </a:r>
+            <a:r>
+              <a:rPr sz="1100" i="0" b="0">
+                <a:solidFill>
+                  <a:srgbClr val="CE9178"/>
+                </a:solidFill>
+                <a:latin typeface="Consolas"/>
+              </a:rPr>
+              <a:t>"Repositorio de turnos"</a:t>
+            </a:r>
+            <a:r>
+              <a:rPr sz="1100" i="0" b="0">
+                <a:solidFill>
+                  <a:srgbClr val="D4D4D4"/>
+                </a:solidFill>
+                <a:latin typeface="Consolas"/>
+              </a:rPr>
+              <a:t>, </a:t>
+            </a:r>
+            <a:r>
+              <a:rPr sz="1100" i="0" b="0">
+                <a:solidFill>
+                  <a:srgbClr val="CE9178"/>
+                </a:solidFill>
+                <a:latin typeface="Consolas"/>
+              </a:rPr>
+              <a:t>"node-postgres"</a:t>
+            </a:r>
+            <a:r>
+              <a:rPr sz="1100" i="0" b="0">
+                <a:solidFill>
+                  <a:srgbClr val="D4D4D4"/>
+                </a:solidFill>
+                <a:latin typeface="Consolas"/>
+              </a:rPr>
+              <a:t>, </a:t>
+            </a:r>
+            <a:r>
+              <a:rPr sz="1100" i="0" b="0">
+                <a:solidFill>
+                  <a:srgbClr val="CE9178"/>
+                </a:solidFill>
+                <a:latin typeface="Consolas"/>
+              </a:rPr>
+              <a:t>"Encapsula el SQL"</a:t>
+            </a:r>
+            <a:r>
+              <a:rPr sz="1100" i="0" b="0">
+                <a:solidFill>
+                  <a:srgbClr val="D4D4D4"/>
+                </a:solidFill>
+                <a:latin typeface="Consolas"/>
+              </a:rPr>
+              <a:t>)</a:t>
+            </a:r>
+          </a:p>
+          <a:p>
+            <a:pPr>
+              <a:spcAft>
+                <a:spcPts val="235"/>
+              </a:spcAft>
+            </a:pPr>
+            <a:r>
+              <a:rPr sz="1100" i="0" b="0">
+                <a:solidFill>
+                  <a:srgbClr val="D4D4D4"/>
+                </a:solidFill>
+                <a:latin typeface="Consolas"/>
+              </a:rPr>
+              <a:t>  </a:t>
+            </a:r>
+            <a:r>
+              <a:rPr sz="1100" i="0" b="0">
+                <a:solidFill>
+                  <a:srgbClr val="DCDCAA"/>
+                </a:solidFill>
+                <a:latin typeface="Consolas"/>
+              </a:rPr>
+              <a:t>Component</a:t>
+            </a:r>
+            <a:r>
+              <a:rPr sz="1100" i="0" b="0">
+                <a:solidFill>
+                  <a:srgbClr val="D4D4D4"/>
+                </a:solidFill>
+                <a:latin typeface="Consolas"/>
+              </a:rPr>
+              <a:t>(</a:t>
+            </a:r>
+            <a:r>
+              <a:rPr sz="1100" i="0" b="0">
+                <a:solidFill>
+                  <a:srgbClr val="D4D4D4"/>
+                </a:solidFill>
+                <a:latin typeface="Consolas"/>
+              </a:rPr>
+              <a:t>pub</a:t>
+            </a:r>
+            <a:r>
+              <a:rPr sz="1100" i="0" b="0">
+                <a:solidFill>
+                  <a:srgbClr val="D4D4D4"/>
+                </a:solidFill>
+                <a:latin typeface="Consolas"/>
+              </a:rPr>
+              <a:t>, </a:t>
+            </a:r>
+            <a:r>
+              <a:rPr sz="1100" i="0" b="0">
+                <a:solidFill>
+                  <a:srgbClr val="CE9178"/>
+                </a:solidFill>
+                <a:latin typeface="Consolas"/>
+              </a:rPr>
+              <a:t>"Publicador de avisos"</a:t>
+            </a:r>
+            <a:r>
+              <a:rPr sz="1100" i="0" b="0">
+                <a:solidFill>
+                  <a:srgbClr val="D4D4D4"/>
+                </a:solidFill>
+                <a:latin typeface="Consolas"/>
+              </a:rPr>
+              <a:t>, </a:t>
+            </a:r>
+            <a:r>
+              <a:rPr sz="1100" i="0" b="0">
+                <a:solidFill>
+                  <a:srgbClr val="CE9178"/>
+                </a:solidFill>
+                <a:latin typeface="Consolas"/>
+              </a:rPr>
+              <a:t>"Cliente AMQP"</a:t>
+            </a:r>
+            <a:r>
+              <a:rPr sz="1100" i="0" b="0">
+                <a:solidFill>
+                  <a:srgbClr val="D4D4D4"/>
+                </a:solidFill>
+                <a:latin typeface="Consolas"/>
+              </a:rPr>
+              <a:t>, </a:t>
+            </a:r>
+            <a:r>
+              <a:rPr sz="1100" i="0" b="0">
+                <a:solidFill>
+                  <a:srgbClr val="CE9178"/>
+                </a:solidFill>
+                <a:latin typeface="Consolas"/>
+              </a:rPr>
+              <a:t>"Publica aviso-de-turno"</a:t>
+            </a:r>
+            <a:r>
+              <a:rPr sz="1100" i="0" b="0">
+                <a:solidFill>
+                  <a:srgbClr val="D4D4D4"/>
+                </a:solidFill>
+                <a:latin typeface="Consolas"/>
+              </a:rPr>
+              <a:t>)</a:t>
+            </a:r>
+          </a:p>
+          <a:p>
+            <a:pPr>
+              <a:spcAft>
+                <a:spcPts val="235"/>
+              </a:spcAft>
+            </a:pPr>
+            <a:r>
+              <a:rPr sz="1100" i="0" b="0">
+                <a:solidFill>
+                  <a:srgbClr val="D4D4D4"/>
+                </a:solidFill>
+                <a:latin typeface="Consolas"/>
+              </a:rPr>
+              <a:t>}</a:t>
+            </a:r>
+          </a:p>
+          <a:p>
+            <a:pPr>
+              <a:spcAft>
+                <a:spcPts val="235"/>
+              </a:spcAft>
+            </a:pPr>
+            <a:r>
+              <a:rPr sz="1100" i="0" b="0">
+                <a:solidFill>
+                  <a:srgbClr val="DCDCAA"/>
+                </a:solidFill>
+                <a:latin typeface="Consolas"/>
+              </a:rPr>
+              <a:t>ContainerDb</a:t>
+            </a:r>
+            <a:r>
+              <a:rPr sz="1100" i="0" b="0">
+                <a:solidFill>
+                  <a:srgbClr val="D4D4D4"/>
+                </a:solidFill>
+                <a:latin typeface="Consolas"/>
+              </a:rPr>
+              <a:t>(</a:t>
+            </a:r>
+            <a:r>
+              <a:rPr sz="1100" i="0" b="0">
+                <a:solidFill>
+                  <a:srgbClr val="D4D4D4"/>
+                </a:solidFill>
+                <a:latin typeface="Consolas"/>
+              </a:rPr>
+              <a:t>db</a:t>
+            </a:r>
+            <a:r>
+              <a:rPr sz="1100" i="0" b="0">
+                <a:solidFill>
+                  <a:srgbClr val="D4D4D4"/>
+                </a:solidFill>
+                <a:latin typeface="Consolas"/>
+              </a:rPr>
+              <a:t>, </a:t>
+            </a:r>
+            <a:r>
+              <a:rPr sz="1100" i="0" b="0">
+                <a:solidFill>
+                  <a:srgbClr val="CE9178"/>
+                </a:solidFill>
+                <a:latin typeface="Consolas"/>
+              </a:rPr>
+              <a:t>"Base de turnos"</a:t>
+            </a:r>
+            <a:r>
+              <a:rPr sz="1100" i="0" b="0">
+                <a:solidFill>
+                  <a:srgbClr val="D4D4D4"/>
+                </a:solidFill>
+                <a:latin typeface="Consolas"/>
+              </a:rPr>
+              <a:t>, </a:t>
+            </a:r>
+            <a:r>
+              <a:rPr sz="1100" i="0" b="0">
+                <a:solidFill>
+                  <a:srgbClr val="CE9178"/>
+                </a:solidFill>
+                <a:latin typeface="Consolas"/>
+              </a:rPr>
+              <a:t>"PostgreSQL"</a:t>
+            </a:r>
+            <a:r>
+              <a:rPr sz="1100" i="0" b="0">
+                <a:solidFill>
+                  <a:srgbClr val="D4D4D4"/>
+                </a:solidFill>
+                <a:latin typeface="Consolas"/>
+              </a:rPr>
+              <a:t>, </a:t>
+            </a:r>
+            <a:r>
+              <a:rPr sz="1100" i="0" b="0">
+                <a:solidFill>
+                  <a:srgbClr val="CE9178"/>
+                </a:solidFill>
+                <a:latin typeface="Consolas"/>
+              </a:rPr>
+              <a:t>"Turnos y horarios"</a:t>
+            </a:r>
+            <a:r>
+              <a:rPr sz="1100" i="0" b="0">
+                <a:solidFill>
+                  <a:srgbClr val="D4D4D4"/>
+                </a:solidFill>
+                <a:latin typeface="Consolas"/>
+              </a:rPr>
+              <a:t>)</a:t>
+            </a:r>
+          </a:p>
+          <a:p>
+            <a:pPr>
+              <a:spcAft>
+                <a:spcPts val="235"/>
+              </a:spcAft>
+            </a:pPr>
+            <a:r>
+              <a:rPr sz="1100" i="0" b="0">
+                <a:solidFill>
+                  <a:srgbClr val="DCDCAA"/>
+                </a:solidFill>
+                <a:latin typeface="Consolas"/>
+              </a:rPr>
+              <a:t>ContainerQueue</a:t>
+            </a:r>
+            <a:r>
+              <a:rPr sz="1100" i="0" b="0">
+                <a:solidFill>
+                  <a:srgbClr val="D4D4D4"/>
+                </a:solidFill>
+                <a:latin typeface="Consolas"/>
+              </a:rPr>
+              <a:t>(</a:t>
+            </a:r>
+            <a:r>
+              <a:rPr sz="1100" i="0" b="0">
+                <a:solidFill>
+                  <a:srgbClr val="D4D4D4"/>
+                </a:solidFill>
+                <a:latin typeface="Consolas"/>
+              </a:rPr>
+              <a:t>cola</a:t>
+            </a:r>
+            <a:r>
+              <a:rPr sz="1100" i="0" b="0">
+                <a:solidFill>
+                  <a:srgbClr val="D4D4D4"/>
+                </a:solidFill>
+                <a:latin typeface="Consolas"/>
+              </a:rPr>
+              <a:t>, </a:t>
+            </a:r>
+            <a:r>
+              <a:rPr sz="1100" i="0" b="0">
+                <a:solidFill>
+                  <a:srgbClr val="CE9178"/>
+                </a:solidFill>
+                <a:latin typeface="Consolas"/>
+              </a:rPr>
+              <a:t>"Cola de avisos"</a:t>
+            </a:r>
+            <a:r>
+              <a:rPr sz="1100" i="0" b="0">
+                <a:solidFill>
+                  <a:srgbClr val="D4D4D4"/>
+                </a:solidFill>
+                <a:latin typeface="Consolas"/>
+              </a:rPr>
+              <a:t>, </a:t>
+            </a:r>
+            <a:r>
+              <a:rPr sz="1100" i="0" b="0">
+                <a:solidFill>
+                  <a:srgbClr val="CE9178"/>
+                </a:solidFill>
+                <a:latin typeface="Consolas"/>
+              </a:rPr>
+              <a:t>"RabbitMQ"</a:t>
+            </a:r>
+            <a:r>
+              <a:rPr sz="1100" i="0" b="0">
+                <a:solidFill>
+                  <a:srgbClr val="D4D4D4"/>
+                </a:solidFill>
+                <a:latin typeface="Consolas"/>
+              </a:rPr>
+              <a:t>, </a:t>
+            </a:r>
+            <a:r>
+              <a:rPr sz="1100" i="0" b="0">
+                <a:solidFill>
+                  <a:srgbClr val="CE9178"/>
+                </a:solidFill>
+                <a:latin typeface="Consolas"/>
+              </a:rPr>
+              <a:t>"Avisos pendientes"</a:t>
+            </a:r>
+            <a:r>
+              <a:rPr sz="1100" i="0" b="0">
+                <a:solidFill>
+                  <a:srgbClr val="D4D4D4"/>
+                </a:solidFill>
+                <a:latin typeface="Consolas"/>
+              </a:rPr>
+              <a:t>)</a:t>
+            </a:r>
+          </a:p>
+          <a:p>
+            <a:pPr>
+              <a:spcAft>
+                <a:spcPts val="235"/>
+              </a:spcAft>
+            </a:pPr>
+            <a:r>
+              <a:rPr sz="1100" i="0" b="0">
+                <a:solidFill>
+                  <a:srgbClr val="DCDCAA"/>
+                </a:solidFill>
+                <a:latin typeface="Consolas"/>
+              </a:rPr>
+              <a:t>System_Ext</a:t>
+            </a:r>
+            <a:r>
+              <a:rPr sz="1100" i="0" b="0">
+                <a:solidFill>
+                  <a:srgbClr val="D4D4D4"/>
+                </a:solidFill>
+                <a:latin typeface="Consolas"/>
+              </a:rPr>
+              <a:t>(</a:t>
+            </a:r>
+            <a:r>
+              <a:rPr sz="1100" i="0" b="0">
+                <a:solidFill>
+                  <a:srgbClr val="D4D4D4"/>
+                </a:solidFill>
+                <a:latin typeface="Consolas"/>
+              </a:rPr>
+              <a:t>idp</a:t>
+            </a:r>
+            <a:r>
+              <a:rPr sz="1100" i="0" b="0">
+                <a:solidFill>
+                  <a:srgbClr val="D4D4D4"/>
+                </a:solidFill>
+                <a:latin typeface="Consolas"/>
+              </a:rPr>
+              <a:t>, </a:t>
+            </a:r>
+            <a:r>
+              <a:rPr sz="1100" i="0" b="0">
+                <a:solidFill>
+                  <a:srgbClr val="CE9178"/>
+                </a:solidFill>
+                <a:latin typeface="Consolas"/>
+              </a:rPr>
+              <a:t>"Proveedor de identidad"</a:t>
+            </a:r>
+            <a:r>
+              <a:rPr sz="1100" i="0" b="0">
+                <a:solidFill>
+                  <a:srgbClr val="D4D4D4"/>
+                </a:solidFill>
+                <a:latin typeface="Consolas"/>
+              </a:rPr>
+              <a:t>, </a:t>
+            </a:r>
+            <a:r>
+              <a:rPr sz="1100" i="0" b="0">
+                <a:solidFill>
+                  <a:srgbClr val="CE9178"/>
+                </a:solidFill>
+                <a:latin typeface="Consolas"/>
+              </a:rPr>
+              <a:t>"Emite los tokens"</a:t>
+            </a:r>
+            <a:r>
+              <a:rPr sz="1100" i="0" b="0">
+                <a:solidFill>
+                  <a:srgbClr val="D4D4D4"/>
+                </a:solidFill>
+                <a:latin typeface="Consolas"/>
+              </a:rPr>
+              <a:t>)</a:t>
+            </a:r>
+          </a:p>
+          <a:p>
+            <a:pPr>
+              <a:spcAft>
+                <a:spcPts val="235"/>
+              </a:spcAft>
+            </a:pPr>
+            <a:r>
+              <a:rPr sz="1100" i="0" b="0">
+                <a:solidFill>
+                  <a:srgbClr val="DCDCAA"/>
+                </a:solidFill>
+                <a:latin typeface="Consolas"/>
+              </a:rPr>
+              <a:t>Rel</a:t>
+            </a:r>
+            <a:r>
+              <a:rPr sz="1100" i="0" b="0">
+                <a:solidFill>
+                  <a:srgbClr val="D4D4D4"/>
+                </a:solidFill>
+                <a:latin typeface="Consolas"/>
+              </a:rPr>
+              <a:t>(</a:t>
+            </a:r>
+            <a:r>
+              <a:rPr sz="1100" i="0" b="0">
+                <a:solidFill>
+                  <a:srgbClr val="D4D4D4"/>
+                </a:solidFill>
+                <a:latin typeface="Consolas"/>
+              </a:rPr>
+              <a:t>spa</a:t>
+            </a:r>
+            <a:r>
+              <a:rPr sz="1100" i="0" b="0">
+                <a:solidFill>
+                  <a:srgbClr val="D4D4D4"/>
+                </a:solidFill>
+                <a:latin typeface="Consolas"/>
+              </a:rPr>
+              <a:t>, </a:t>
+            </a:r>
+            <a:r>
+              <a:rPr sz="1100" i="0" b="0">
+                <a:solidFill>
+                  <a:srgbClr val="D4D4D4"/>
+                </a:solidFill>
+                <a:latin typeface="Consolas"/>
+              </a:rPr>
+              <a:t>rutas</a:t>
+            </a:r>
+            <a:r>
+              <a:rPr sz="1100" i="0" b="0">
+                <a:solidFill>
+                  <a:srgbClr val="D4D4D4"/>
+                </a:solidFill>
+                <a:latin typeface="Consolas"/>
+              </a:rPr>
+              <a:t>, </a:t>
+            </a:r>
+            <a:r>
+              <a:rPr sz="1100" i="0" b="0">
+                <a:solidFill>
+                  <a:srgbClr val="CE9178"/>
+                </a:solidFill>
+                <a:latin typeface="Consolas"/>
+              </a:rPr>
+              <a:t>"POST /turnos"</a:t>
+            </a:r>
+            <a:r>
+              <a:rPr sz="1100" i="0" b="0">
+                <a:solidFill>
+                  <a:srgbClr val="D4D4D4"/>
+                </a:solidFill>
+                <a:latin typeface="Consolas"/>
+              </a:rPr>
+              <a:t>, </a:t>
+            </a:r>
+            <a:r>
+              <a:rPr sz="1100" i="0" b="0">
+                <a:solidFill>
+                  <a:srgbClr val="CE9178"/>
+                </a:solidFill>
+                <a:latin typeface="Consolas"/>
+              </a:rPr>
+              <a:t>"HTTPS/JSON"</a:t>
+            </a:r>
+            <a:r>
+              <a:rPr sz="1100" i="0" b="0">
+                <a:solidFill>
+                  <a:srgbClr val="D4D4D4"/>
+                </a:solidFill>
+                <a:latin typeface="Consolas"/>
+              </a:rPr>
+              <a:t>)</a:t>
+            </a:r>
+          </a:p>
+          <a:p>
+            <a:pPr>
+              <a:spcAft>
+                <a:spcPts val="235"/>
+              </a:spcAft>
+            </a:pPr>
+            <a:r>
+              <a:rPr sz="1100" i="0" b="0">
+                <a:solidFill>
+                  <a:srgbClr val="DCDCAA"/>
+                </a:solidFill>
+                <a:latin typeface="Consolas"/>
+              </a:rPr>
+              <a:t>Rel</a:t>
+            </a:r>
+            <a:r>
+              <a:rPr sz="1100" i="0" b="0">
+                <a:solidFill>
+                  <a:srgbClr val="D4D4D4"/>
+                </a:solidFill>
+                <a:latin typeface="Consolas"/>
+              </a:rPr>
+              <a:t>(</a:t>
+            </a:r>
+            <a:r>
+              <a:rPr sz="1100" i="0" b="0">
+                <a:solidFill>
+                  <a:srgbClr val="D4D4D4"/>
+                </a:solidFill>
+                <a:latin typeface="Consolas"/>
+              </a:rPr>
+              <a:t>rutas</a:t>
+            </a:r>
+            <a:r>
+              <a:rPr sz="1100" i="0" b="0">
+                <a:solidFill>
+                  <a:srgbClr val="D4D4D4"/>
+                </a:solidFill>
+                <a:latin typeface="Consolas"/>
+              </a:rPr>
+              <a:t>, </a:t>
+            </a:r>
+            <a:r>
+              <a:rPr sz="1100" i="0" b="0">
+                <a:solidFill>
+                  <a:srgbClr val="D4D4D4"/>
+                </a:solidFill>
+                <a:latin typeface="Consolas"/>
+              </a:rPr>
+              <a:t>token</a:t>
+            </a:r>
+            <a:r>
+              <a:rPr sz="1100" i="0" b="0">
+                <a:solidFill>
+                  <a:srgbClr val="D4D4D4"/>
+                </a:solidFill>
+                <a:latin typeface="Consolas"/>
+              </a:rPr>
+              <a:t>, </a:t>
+            </a:r>
+            <a:r>
+              <a:rPr sz="1100" i="0" b="0">
+                <a:solidFill>
+                  <a:srgbClr val="CE9178"/>
+                </a:solidFill>
+                <a:latin typeface="Consolas"/>
+              </a:rPr>
+              <a:t>"Verifica el token"</a:t>
+            </a:r>
+            <a:r>
+              <a:rPr sz="1100" i="0" b="0">
+                <a:solidFill>
+                  <a:srgbClr val="D4D4D4"/>
+                </a:solidFill>
+                <a:latin typeface="Consolas"/>
+              </a:rPr>
+              <a:t>)</a:t>
+            </a:r>
+          </a:p>
+          <a:p>
+            <a:pPr>
+              <a:spcAft>
+                <a:spcPts val="235"/>
+              </a:spcAft>
+            </a:pPr>
+            <a:r>
+              <a:rPr sz="1100" i="0" b="0">
+                <a:solidFill>
+                  <a:srgbClr val="DCDCAA"/>
+                </a:solidFill>
+                <a:latin typeface="Consolas"/>
+              </a:rPr>
+              <a:t>Rel</a:t>
+            </a:r>
+            <a:r>
+              <a:rPr sz="1100" i="0" b="0">
+                <a:solidFill>
+                  <a:srgbClr val="D4D4D4"/>
+                </a:solidFill>
+                <a:latin typeface="Consolas"/>
+              </a:rPr>
+              <a:t>(</a:t>
+            </a:r>
+            <a:r>
+              <a:rPr sz="1100" i="0" b="0">
+                <a:solidFill>
+                  <a:srgbClr val="D4D4D4"/>
+                </a:solidFill>
+                <a:latin typeface="Consolas"/>
+              </a:rPr>
+              <a:t>token</a:t>
+            </a:r>
+            <a:r>
+              <a:rPr sz="1100" i="0" b="0">
+                <a:solidFill>
+                  <a:srgbClr val="D4D4D4"/>
+                </a:solidFill>
+                <a:latin typeface="Consolas"/>
+              </a:rPr>
+              <a:t>, </a:t>
+            </a:r>
+            <a:r>
+              <a:rPr sz="1100" i="0" b="0">
+                <a:solidFill>
+                  <a:srgbClr val="D4D4D4"/>
+                </a:solidFill>
+                <a:latin typeface="Consolas"/>
+              </a:rPr>
+              <a:t>idp</a:t>
+            </a:r>
+            <a:r>
+              <a:rPr sz="1100" i="0" b="0">
+                <a:solidFill>
+                  <a:srgbClr val="D4D4D4"/>
+                </a:solidFill>
+                <a:latin typeface="Consolas"/>
+              </a:rPr>
+              <a:t>, </a:t>
+            </a:r>
+            <a:r>
+              <a:rPr sz="1100" i="0" b="0">
+                <a:solidFill>
+                  <a:srgbClr val="CE9178"/>
+                </a:solidFill>
+                <a:latin typeface="Consolas"/>
+              </a:rPr>
+              <a:t>"Obtiene las llaves publicas"</a:t>
+            </a:r>
+            <a:r>
+              <a:rPr sz="1100" i="0" b="0">
+                <a:solidFill>
+                  <a:srgbClr val="D4D4D4"/>
+                </a:solidFill>
+                <a:latin typeface="Consolas"/>
+              </a:rPr>
+              <a:t>, </a:t>
+            </a:r>
+            <a:r>
+              <a:rPr sz="1100" i="0" b="0">
+                <a:solidFill>
+                  <a:srgbClr val="CE9178"/>
+                </a:solidFill>
+                <a:latin typeface="Consolas"/>
+              </a:rPr>
+              <a:t>"HTTPS"</a:t>
+            </a:r>
+            <a:r>
+              <a:rPr sz="1100" i="0" b="0">
+                <a:solidFill>
+                  <a:srgbClr val="D4D4D4"/>
+                </a:solidFill>
+                <a:latin typeface="Consolas"/>
+              </a:rPr>
+              <a:t>)</a:t>
+            </a:r>
+          </a:p>
+          <a:p>
+            <a:pPr>
+              <a:spcAft>
+                <a:spcPts val="235"/>
+              </a:spcAft>
+            </a:pPr>
+            <a:r>
+              <a:rPr sz="1100" i="0" b="0">
+                <a:solidFill>
+                  <a:srgbClr val="DCDCAA"/>
+                </a:solidFill>
+                <a:latin typeface="Consolas"/>
+              </a:rPr>
+              <a:t>Rel</a:t>
+            </a:r>
+            <a:r>
+              <a:rPr sz="1100" i="0" b="0">
+                <a:solidFill>
+                  <a:srgbClr val="D4D4D4"/>
+                </a:solidFill>
+                <a:latin typeface="Consolas"/>
+              </a:rPr>
+              <a:t>(</a:t>
+            </a:r>
+            <a:r>
+              <a:rPr sz="1100" i="0" b="0">
+                <a:solidFill>
+                  <a:srgbClr val="D4D4D4"/>
+                </a:solidFill>
+                <a:latin typeface="Consolas"/>
+              </a:rPr>
+              <a:t>rutas</a:t>
+            </a:r>
+            <a:r>
+              <a:rPr sz="1100" i="0" b="0">
+                <a:solidFill>
+                  <a:srgbClr val="D4D4D4"/>
+                </a:solidFill>
+                <a:latin typeface="Consolas"/>
+              </a:rPr>
+              <a:t>, </a:t>
+            </a:r>
+            <a:r>
+              <a:rPr sz="1100" i="0" b="0">
+                <a:solidFill>
+                  <a:srgbClr val="D4D4D4"/>
+                </a:solidFill>
+                <a:latin typeface="Consolas"/>
+              </a:rPr>
+              <a:t>reglas</a:t>
+            </a:r>
+            <a:r>
+              <a:rPr sz="1100" i="0" b="0">
+                <a:solidFill>
+                  <a:srgbClr val="D4D4D4"/>
+                </a:solidFill>
+                <a:latin typeface="Consolas"/>
+              </a:rPr>
+              <a:t>, </a:t>
+            </a:r>
+            <a:r>
+              <a:rPr sz="1100" i="0" b="0">
+                <a:solidFill>
+                  <a:srgbClr val="CE9178"/>
+                </a:solidFill>
+                <a:latin typeface="Consolas"/>
+              </a:rPr>
+              <a:t>"Pide reservar la franja"</a:t>
+            </a:r>
+            <a:r>
+              <a:rPr sz="1100" i="0" b="0">
+                <a:solidFill>
+                  <a:srgbClr val="D4D4D4"/>
+                </a:solidFill>
+                <a:latin typeface="Consolas"/>
+              </a:rPr>
+              <a:t>)</a:t>
+            </a:r>
+          </a:p>
+          <a:p>
+            <a:pPr>
+              <a:spcAft>
+                <a:spcPts val="235"/>
+              </a:spcAft>
+            </a:pPr>
+            <a:r>
+              <a:rPr sz="1100" i="0" b="0">
+                <a:solidFill>
+                  <a:srgbClr val="DCDCAA"/>
+                </a:solidFill>
+                <a:latin typeface="Consolas"/>
+              </a:rPr>
+              <a:t>Rel</a:t>
+            </a:r>
+            <a:r>
+              <a:rPr sz="1100" i="0" b="0">
+                <a:solidFill>
+                  <a:srgbClr val="D4D4D4"/>
+                </a:solidFill>
+                <a:latin typeface="Consolas"/>
+              </a:rPr>
+              <a:t>(</a:t>
+            </a:r>
+            <a:r>
+              <a:rPr sz="1100" i="0" b="0">
+                <a:solidFill>
+                  <a:srgbClr val="D4D4D4"/>
+                </a:solidFill>
+                <a:latin typeface="Consolas"/>
+              </a:rPr>
+              <a:t>reglas</a:t>
+            </a:r>
+            <a:r>
+              <a:rPr sz="1100" i="0" b="0">
+                <a:solidFill>
+                  <a:srgbClr val="D4D4D4"/>
+                </a:solidFill>
+                <a:latin typeface="Consolas"/>
+              </a:rPr>
+              <a:t>, </a:t>
+            </a:r>
+            <a:r>
+              <a:rPr sz="1100" i="0" b="0">
+                <a:solidFill>
+                  <a:srgbClr val="D4D4D4"/>
+                </a:solidFill>
+                <a:latin typeface="Consolas"/>
+              </a:rPr>
+              <a:t>repo</a:t>
+            </a:r>
+            <a:r>
+              <a:rPr sz="1100" i="0" b="0">
+                <a:solidFill>
+                  <a:srgbClr val="D4D4D4"/>
+                </a:solidFill>
+                <a:latin typeface="Consolas"/>
+              </a:rPr>
+              <a:t>, </a:t>
+            </a:r>
+            <a:r>
+              <a:rPr sz="1100" i="0" b="0">
+                <a:solidFill>
+                  <a:srgbClr val="CE9178"/>
+                </a:solidFill>
+                <a:latin typeface="Consolas"/>
+              </a:rPr>
+              <a:t>"Guarda el turno"</a:t>
+            </a:r>
+            <a:r>
+              <a:rPr sz="1100" i="0" b="0">
+                <a:solidFill>
+                  <a:srgbClr val="D4D4D4"/>
+                </a:solidFill>
+                <a:latin typeface="Consolas"/>
+              </a:rPr>
+              <a:t>)</a:t>
+            </a:r>
+          </a:p>
+          <a:p>
+            <a:pPr>
+              <a:spcAft>
+                <a:spcPts val="235"/>
+              </a:spcAft>
+            </a:pPr>
+            <a:r>
+              <a:rPr sz="1100" i="0" b="0">
+                <a:solidFill>
+                  <a:srgbClr val="DCDCAA"/>
+                </a:solidFill>
+                <a:latin typeface="Consolas"/>
+              </a:rPr>
+              <a:t>Rel</a:t>
+            </a:r>
+            <a:r>
+              <a:rPr sz="1100" i="0" b="0">
+                <a:solidFill>
+                  <a:srgbClr val="D4D4D4"/>
+                </a:solidFill>
+                <a:latin typeface="Consolas"/>
+              </a:rPr>
+              <a:t>(</a:t>
+            </a:r>
+            <a:r>
+              <a:rPr sz="1100" i="0" b="0">
+                <a:solidFill>
+                  <a:srgbClr val="D4D4D4"/>
+                </a:solidFill>
+                <a:latin typeface="Consolas"/>
+              </a:rPr>
+              <a:t>repo</a:t>
+            </a:r>
+            <a:r>
+              <a:rPr sz="1100" i="0" b="0">
+                <a:solidFill>
+                  <a:srgbClr val="D4D4D4"/>
+                </a:solidFill>
+                <a:latin typeface="Consolas"/>
+              </a:rPr>
+              <a:t>, </a:t>
+            </a:r>
+            <a:r>
+              <a:rPr sz="1100" i="0" b="0">
+                <a:solidFill>
+                  <a:srgbClr val="D4D4D4"/>
+                </a:solidFill>
+                <a:latin typeface="Consolas"/>
+              </a:rPr>
+              <a:t>db</a:t>
+            </a:r>
+            <a:r>
+              <a:rPr sz="1100" i="0" b="0">
+                <a:solidFill>
+                  <a:srgbClr val="D4D4D4"/>
+                </a:solidFill>
+                <a:latin typeface="Consolas"/>
+              </a:rPr>
+              <a:t>, </a:t>
+            </a:r>
+            <a:r>
+              <a:rPr sz="1100" i="0" b="0">
+                <a:solidFill>
+                  <a:srgbClr val="CE9178"/>
+                </a:solidFill>
+                <a:latin typeface="Consolas"/>
+              </a:rPr>
+              <a:t>"INSERT del turno"</a:t>
+            </a:r>
+            <a:r>
+              <a:rPr sz="1100" i="0" b="0">
+                <a:solidFill>
+                  <a:srgbClr val="D4D4D4"/>
+                </a:solidFill>
+                <a:latin typeface="Consolas"/>
+              </a:rPr>
+              <a:t>, </a:t>
+            </a:r>
+            <a:r>
+              <a:rPr sz="1100" i="0" b="0">
+                <a:solidFill>
+                  <a:srgbClr val="CE9178"/>
+                </a:solidFill>
+                <a:latin typeface="Consolas"/>
+              </a:rPr>
+              <a:t>"TCP/SQL"</a:t>
+            </a:r>
+            <a:r>
+              <a:rPr sz="1100" i="0" b="0">
+                <a:solidFill>
+                  <a:srgbClr val="D4D4D4"/>
+                </a:solidFill>
+                <a:latin typeface="Consolas"/>
+              </a:rPr>
+              <a:t>)</a:t>
+            </a:r>
+          </a:p>
+          <a:p>
+            <a:pPr>
+              <a:spcAft>
+                <a:spcPts val="235"/>
+              </a:spcAft>
+            </a:pPr>
+            <a:r>
+              <a:rPr sz="1100" i="0" b="0">
+                <a:solidFill>
+                  <a:srgbClr val="DCDCAA"/>
+                </a:solidFill>
+                <a:latin typeface="Consolas"/>
+              </a:rPr>
+              <a:t>Rel</a:t>
+            </a:r>
+            <a:r>
+              <a:rPr sz="1100" i="0" b="0">
+                <a:solidFill>
+                  <a:srgbClr val="D4D4D4"/>
+                </a:solidFill>
+                <a:latin typeface="Consolas"/>
+              </a:rPr>
+              <a:t>(</a:t>
+            </a:r>
+            <a:r>
+              <a:rPr sz="1100" i="0" b="0">
+                <a:solidFill>
+                  <a:srgbClr val="D4D4D4"/>
+                </a:solidFill>
+                <a:latin typeface="Consolas"/>
+              </a:rPr>
+              <a:t>reglas</a:t>
+            </a:r>
+            <a:r>
+              <a:rPr sz="1100" i="0" b="0">
+                <a:solidFill>
+                  <a:srgbClr val="D4D4D4"/>
+                </a:solidFill>
+                <a:latin typeface="Consolas"/>
+              </a:rPr>
+              <a:t>, </a:t>
+            </a:r>
+            <a:r>
+              <a:rPr sz="1100" i="0" b="0">
+                <a:solidFill>
+                  <a:srgbClr val="D4D4D4"/>
+                </a:solidFill>
+                <a:latin typeface="Consolas"/>
+              </a:rPr>
+              <a:t>pub</a:t>
+            </a:r>
+            <a:r>
+              <a:rPr sz="1100" i="0" b="0">
+                <a:solidFill>
+                  <a:srgbClr val="D4D4D4"/>
+                </a:solidFill>
+                <a:latin typeface="Consolas"/>
+              </a:rPr>
+              <a:t>, </a:t>
+            </a:r>
+            <a:r>
+              <a:rPr sz="1100" i="0" b="0">
+                <a:solidFill>
+                  <a:srgbClr val="CE9178"/>
+                </a:solidFill>
+                <a:latin typeface="Consolas"/>
+              </a:rPr>
+              <a:t>"Pide avisar al cliente"</a:t>
+            </a:r>
+            <a:r>
+              <a:rPr sz="1100" i="0" b="0">
+                <a:solidFill>
+                  <a:srgbClr val="D4D4D4"/>
+                </a:solidFill>
+                <a:latin typeface="Consolas"/>
+              </a:rPr>
+              <a:t>)</a:t>
+            </a:r>
+          </a:p>
+          <a:p>
+            <a:pPr>
+              <a:spcAft>
+                <a:spcPts val="235"/>
+              </a:spcAft>
+            </a:pPr>
+            <a:r>
+              <a:rPr sz="1100" i="0" b="0">
+                <a:solidFill>
+                  <a:srgbClr val="DCDCAA"/>
+                </a:solidFill>
+                <a:latin typeface="Consolas"/>
+              </a:rPr>
+              <a:t>Rel</a:t>
+            </a:r>
+            <a:r>
+              <a:rPr sz="1100" i="0" b="0">
+                <a:solidFill>
+                  <a:srgbClr val="D4D4D4"/>
+                </a:solidFill>
+                <a:latin typeface="Consolas"/>
+              </a:rPr>
+              <a:t>(</a:t>
+            </a:r>
+            <a:r>
+              <a:rPr sz="1100" i="0" b="0">
+                <a:solidFill>
+                  <a:srgbClr val="D4D4D4"/>
+                </a:solidFill>
+                <a:latin typeface="Consolas"/>
+              </a:rPr>
+              <a:t>pub</a:t>
+            </a:r>
+            <a:r>
+              <a:rPr sz="1100" i="0" b="0">
+                <a:solidFill>
+                  <a:srgbClr val="D4D4D4"/>
+                </a:solidFill>
+                <a:latin typeface="Consolas"/>
+              </a:rPr>
+              <a:t>, </a:t>
+            </a:r>
+            <a:r>
+              <a:rPr sz="1100" i="0" b="0">
+                <a:solidFill>
+                  <a:srgbClr val="D4D4D4"/>
+                </a:solidFill>
+                <a:latin typeface="Consolas"/>
+              </a:rPr>
+              <a:t>cola</a:t>
+            </a:r>
+            <a:r>
+              <a:rPr sz="1100" i="0" b="0">
+                <a:solidFill>
+                  <a:srgbClr val="D4D4D4"/>
+                </a:solidFill>
+                <a:latin typeface="Consolas"/>
+              </a:rPr>
+              <a:t>, </a:t>
+            </a:r>
+            <a:r>
+              <a:rPr sz="1100" i="0" b="0">
+                <a:solidFill>
+                  <a:srgbClr val="CE9178"/>
+                </a:solidFill>
+                <a:latin typeface="Consolas"/>
+              </a:rPr>
+              <a:t>"Publica aviso-de-turno"</a:t>
+            </a:r>
+            <a:r>
+              <a:rPr sz="1100" i="0" b="0">
+                <a:solidFill>
+                  <a:srgbClr val="D4D4D4"/>
+                </a:solidFill>
+                <a:latin typeface="Consolas"/>
+              </a:rPr>
+              <a:t>, </a:t>
+            </a:r>
+            <a:r>
+              <a:rPr sz="1100" i="0" b="0">
+                <a:solidFill>
+                  <a:srgbClr val="CE9178"/>
+                </a:solidFill>
+                <a:latin typeface="Consolas"/>
+              </a:rPr>
+              <a:t>"AMQP"</a:t>
+            </a:r>
+            <a:r>
+              <a:rPr sz="1100" i="0" b="0">
+                <a:solidFill>
+                  <a:srgbClr val="D4D4D4"/>
+                </a:solidFill>
+                <a:latin typeface="Consolas"/>
+              </a:rPr>
+              <a:t>)</a:t>
+            </a:r>
+          </a:p>
+        </p:txBody>
+      </p:sp>
+      <p:sp>
+        <p:nvSpPr>
+          <p:cNvPr id="13" name="TextBox 12"/>
           <p:cNvSpPr txBox="1"/>
           <p:nvPr/>
         </p:nvSpPr>

--- a/Arquitectura de Sistemas Computacionales/Clases/Clase 11 - Avance del proyecto final/Presentacion.pptx
+++ b/Arquitectura de Sistemas Computacionales/Clases/Clase 11 - Avance del proyecto final/Presentacion.pptx
@@ -992,37 +992,61 @@
           <a:lstStyle/>
           <a:p>
             <a:r>
-              <a:t>TEXTO COMPLETO DE LA LÁMINA (se proyecta resumido):</a:t>
+              <a:t>DESARROLLO (para explicarlo, no se proyecta):</a:t>
             </a:r>
           </a:p>
           <a:p/>
           <a:p>
             <a:r>
-              <a:t>Microservicios teatro · nombres distintos entre diagramas · secretos en imagen.</a:t>
+              <a:t>La retroalimentacion es la mitad del valor del dia y tiene tecnica propia.</a:t>
             </a:r>
           </a:p>
           <a:p/>
           <a:p>
             <a:r>
-              <a:t>CI sin tests · diagrama sin puertos · dominio infinito.</a:t>
+              <a:t>Una observacion accionable tiene cuatro partes: observacion, evidencia, impacto y accion con fecha.</a:t>
             </a:r>
           </a:p>
           <a:p/>
           <a:p>
             <a:r>
-              <a:t>Microservicios teatro: servicios separados que comparten base de datos y se despliegan siempre juntos.</a:t>
+              <a:t>Ejemplo: «el despliegue llama backend a la API de turnos (observacion); se ve en la caja central (evidencia); rompe la trazabilidad con el Containers (impacto); unificar el nombre antes de la proxima revision (accion con fecha)».</a:t>
             </a:r>
           </a:p>
           <a:p/>
           <a:p>
             <a:r>
-              <a:t>Nombres distintos: «API de turnos» en el C4 y «backend» en el Despliegue rompen la trazabilidad.</a:t>
+              <a:t>Un comentario como «mejorar el diagrama» no es accionable: no dice que, ni donde, ni cuando.</a:t>
             </a:r>
           </a:p>
           <a:p/>
           <a:p>
             <a:r>
-              <a:t>CI sin tests: un pipeline que no puede fallar no verifica nada.</a:t>
+              <a:t>(No se proyecta) Una retroalimentacion accionable tiene cuatro partes: observacion, evidencia, impacto y accion con fecha. "Falta seguridad" no cumple ninguna. "En el diagrama de despliegue la base de datos esta en la subred publica, contradice el control que ustedes escribieron para la amenaza de acceso no autorizado; si lo sustentan asi en la Clase 15 el evaluador concluira que el modelo de amenazas se escribio sin mirar el diagrama; muevanla a subred privada y dejen solo la API expuesta, antes de la Clase 12" cumple las cuatro.</a:t>
+            </a:r>
+          </a:p>
+          <a:p/>
+          <a:p>
+            <a:r>
+              <a:t>(No se proyecta) El docente debe apuntar a tres hallazgos por proyecto como maximo y marcar cual es el bloqueante, porque un estudiante que recibe once observaciones no corrige ninguna: se paraliza.</a:t>
+            </a:r>
+          </a:p>
+          <a:p/>
+          <a:p>
+            <a:r>
+              <a:t>(No se proyecta) Conviene nombrar tambien una fortaleza concreta, no por amabilidad sino porque el estudiante necesita saber que conservar; si solo escucha fallas, en la siguiente version cambia todo, incluido lo que estaba bien.</a:t>
+            </a:r>
+          </a:p>
+          <a:p/>
+          <a:p>
+            <a:r>
+              <a:t>(No se proyecta) Y la revision entre pares cumple una funcion que la del docente no puede: explicarle el sistema a otro estudiante obliga a verbalizar decisiones que nunca se dijeron en voz alta, y ahi el propio autor descubre sus huecos.</a:t>
+            </a:r>
+          </a:p>
+          <a:p/>
+          <a:p>
+            <a:r>
+              <a:t>(No se proyecta) El formato eficiente es de siete a ocho minutos por proyecto, con reloj visible, y el revisor asignado (otro estudiante, u otro equipo si el docente los autorizo) entregando por escrito una observacion y una pregunta.</a:t>
             </a:r>
           </a:p>
         </p:txBody>
@@ -1048,130 +1072,6 @@
 </file>
 
 <file path=ppt/notesSlides/notesSlide6.xml><?xml version="1.0" encoding="utf-8"?>
-<p:notes xmlns:a="http://schemas.openxmlformats.org/drawingml/2006/main" xmlns:p="http://schemas.openxmlformats.org/presentationml/2006/main" xmlns:r="http://schemas.openxmlformats.org/officeDocument/2006/relationships">
-  <p:cSld>
-    <p:spTree>
-      <p:nvGrpSpPr>
-        <p:cNvPr id="1" name=""/>
-        <p:cNvGrpSpPr/>
-        <p:nvPr/>
-      </p:nvGrpSpPr>
-      <p:grpSpPr>
-        <a:xfrm>
-          <a:off x="0" y="0"/>
-          <a:ext cx="0" cy="0"/>
-          <a:chOff x="0" y="0"/>
-          <a:chExt cx="0" cy="0"/>
-        </a:xfrm>
-      </p:grpSpPr>
-      <p:sp>
-        <p:nvSpPr>
-          <p:cNvPr id="2" name="Slide Image Placeholder 1"/>
-          <p:cNvSpPr>
-            <a:spLocks noGrp="1"/>
-          </p:cNvSpPr>
-          <p:nvPr>
-            <p:ph type="sldImg" idx="2"/>
-          </p:nvPr>
-        </p:nvSpPr>
-        <p:spPr/>
-      </p:sp>
-      <p:sp>
-        <p:nvSpPr>
-          <p:cNvPr id="3" name="Notes Placeholder 2"/>
-          <p:cNvSpPr>
-            <a:spLocks noGrp="1"/>
-          </p:cNvSpPr>
-          <p:nvPr>
-            <p:ph type="body" idx="3" sz="quarter"/>
-          </p:nvPr>
-        </p:nvSpPr>
-        <p:spPr/>
-        <p:txBody>
-          <a:bodyPr/>
-          <a:lstStyle/>
-          <a:p>
-            <a:r>
-              <a:t>DESARROLLO (para explicarlo, no se proyecta):</a:t>
-            </a:r>
-          </a:p>
-          <a:p/>
-          <a:p>
-            <a:r>
-              <a:t>La retroalimentacion es la mitad del valor del dia y tiene tecnica propia.</a:t>
-            </a:r>
-          </a:p>
-          <a:p/>
-          <a:p>
-            <a:r>
-              <a:t>Una observacion accionable tiene cuatro partes: observacion, evidencia, impacto y accion con fecha.</a:t>
-            </a:r>
-          </a:p>
-          <a:p/>
-          <a:p>
-            <a:r>
-              <a:t>Ejemplo: «el despliegue llama backend a la API de turnos (observacion); se ve en la caja central (evidencia); rompe la trazabilidad con el Containers (impacto); unificar el nombre antes de la proxima revision (accion con fecha)».</a:t>
-            </a:r>
-          </a:p>
-          <a:p/>
-          <a:p>
-            <a:r>
-              <a:t>Un comentario como «mejorar el diagrama» no es accionable: no dice que, ni donde, ni cuando.</a:t>
-            </a:r>
-          </a:p>
-          <a:p/>
-          <a:p>
-            <a:r>
-              <a:t>(No se proyecta) Una retroalimentacion accionable tiene cuatro partes: observacion, evidencia, impacto y accion con fecha. "Falta seguridad" no cumple ninguna. "En el diagrama de despliegue la base de datos esta en la subred publica, contradice el control que ustedes escribieron para la amenaza de acceso no autorizado; si lo sustentan asi en la Clase 15 el evaluador concluira que el modelo de amenazas se escribio sin mirar el diagrama; muevanla a subred privada y dejen solo la API expuesta, antes de la Clase 12" cumple las cuatro.</a:t>
-            </a:r>
-          </a:p>
-          <a:p/>
-          <a:p>
-            <a:r>
-              <a:t>(No se proyecta) El docente debe apuntar a tres hallazgos por proyecto como maximo y marcar cual es el bloqueante, porque un estudiante que recibe once observaciones no corrige ninguna: se paraliza.</a:t>
-            </a:r>
-          </a:p>
-          <a:p/>
-          <a:p>
-            <a:r>
-              <a:t>(No se proyecta) Conviene nombrar tambien una fortaleza concreta, no por amabilidad sino porque el estudiante necesita saber que conservar; si solo escucha fallas, en la siguiente version cambia todo, incluido lo que estaba bien.</a:t>
-            </a:r>
-          </a:p>
-          <a:p/>
-          <a:p>
-            <a:r>
-              <a:t>(No se proyecta) Y la revision entre pares cumple una funcion que la del docente no puede: explicarle el sistema a otro estudiante obliga a verbalizar decisiones que nunca se dijeron en voz alta, y ahi el propio autor descubre sus huecos.</a:t>
-            </a:r>
-          </a:p>
-          <a:p/>
-          <a:p>
-            <a:r>
-              <a:t>(No se proyecta) El formato eficiente es de siete a ocho minutos por proyecto, con reloj visible, y el revisor asignado (otro estudiante, u otro equipo si el docente los autorizo) entregando por escrito una observacion y una pregunta.</a:t>
-            </a:r>
-          </a:p>
-        </p:txBody>
-      </p:sp>
-      <p:sp>
-        <p:nvSpPr>
-          <p:cNvPr id="4" name="Slide Number Placeholder 3"/>
-          <p:cNvSpPr>
-            <a:spLocks noGrp="1"/>
-          </p:cNvSpPr>
-          <p:nvPr>
-            <p:ph type="sldNum" idx="5" sz="quarter"/>
-          </p:nvPr>
-        </p:nvSpPr>
-        <p:spPr/>
-      </p:sp>
-    </p:spTree>
-  </p:cSld>
-  <p:clrMapOvr>
-    <a:masterClrMapping/>
-  </p:clrMapOvr>
-</p:notes>
-</file>
-
-<file path=ppt/notesSlides/notesSlide7.xml><?xml version="1.0" encoding="utf-8"?>
 <p:notes xmlns:a="http://schemas.openxmlformats.org/drawingml/2006/main" xmlns:p="http://schemas.openxmlformats.org/presentationml/2006/main" xmlns:r="http://schemas.openxmlformats.org/officeDocument/2006/relationships">
   <p:cSld>
     <p:spTree>
@@ -7480,118 +7380,14 @@
       </p:sp>
       <p:sp>
         <p:nvSpPr>
-          <p:cNvPr id="5" name="Rounded Rectangle 4"/>
-          <p:cNvSpPr/>
-          <p:nvPr/>
-        </p:nvSpPr>
-        <p:spPr>
-          <a:xfrm>
-            <a:off x="5797149" y="1573813"/>
-            <a:ext cx="6010497" cy="4057845"/>
-          </a:xfrm>
-          <a:prstGeom prst="roundRect">
-            <a:avLst>
-              <a:gd name="adj" fmla="val 4000"/>
-            </a:avLst>
-          </a:prstGeom>
-          <a:solidFill>
-            <a:srgbClr val="E8EEF4"/>
-          </a:solidFill>
-          <a:ln>
-            <a:noFill/>
-          </a:ln>
-        </p:spPr>
-        <p:style>
-          <a:lnRef idx="1">
-            <a:schemeClr val="accent1"/>
-          </a:lnRef>
-          <a:fillRef idx="3">
-            <a:schemeClr val="accent1"/>
-          </a:fillRef>
-          <a:effectRef idx="2">
-            <a:schemeClr val="accent1"/>
-          </a:effectRef>
-          <a:fontRef idx="minor">
-            <a:schemeClr val="lt1"/>
-          </a:fontRef>
-        </p:style>
-        <p:txBody>
-          <a:bodyPr rtlCol="0" anchor="ctr"/>
-          <a:lstStyle/>
-          <a:p>
-            <a:pPr algn="ctr"/>
-          </a:p>
-        </p:txBody>
-      </p:sp>
-      <p:pic>
-        <p:nvPicPr>
-          <p:cNvPr id="6" name="Picture 5" descr="students-learning-laptops-classroom.jpg"/>
-          <p:cNvPicPr>
-            <a:picLocks noChangeAspect="1"/>
-          </p:cNvPicPr>
-          <p:nvPr/>
-        </p:nvPicPr>
-        <p:blipFill>
-          <a:blip r:embed="rId2"/>
-          <a:stretch>
-            <a:fillRect/>
-          </a:stretch>
-        </p:blipFill>
-        <p:spPr>
-          <a:xfrm>
-            <a:off x="5870301" y="1646965"/>
-            <a:ext cx="5864193" cy="3911541"/>
-          </a:xfrm>
-          <a:prstGeom prst="rect">
-            <a:avLst/>
-          </a:prstGeom>
-        </p:spPr>
-      </p:pic>
-      <p:sp>
-        <p:nvSpPr>
-          <p:cNvPr id="7" name="TextBox 6"/>
+          <p:cNvPr id="5" name="TextBox 4"/>
           <p:cNvSpPr txBox="1"/>
           <p:nvPr/>
         </p:nvSpPr>
         <p:spPr>
           <a:xfrm>
-            <a:off x="5870301" y="5961888"/>
-            <a:ext cx="5864193" cy="320040"/>
-          </a:xfrm>
-          <a:prstGeom prst="rect">
-            <a:avLst/>
-          </a:prstGeom>
-          <a:noFill/>
-        </p:spPr>
-        <p:txBody>
-          <a:bodyPr wrap="square">
-            <a:spAutoFit/>
-          </a:bodyPr>
-          <a:lstStyle/>
-          <a:p>
-            <a:pPr algn="ctr"/>
-            <a:r>
-              <a:rPr sz="1100" b="0" i="1">
-                <a:solidFill>
-                  <a:srgbClr val="666666"/>
-                </a:solidFill>
-                <a:latin typeface="Calibri"/>
-              </a:rPr>
-              <a:t>Foto: Mikhail Nilov · Pexels</a:t>
-            </a:r>
-          </a:p>
-        </p:txBody>
-      </p:sp>
-      <p:sp>
-        <p:nvSpPr>
-          <p:cNvPr id="8" name="TextBox 7"/>
-          <p:cNvSpPr txBox="1"/>
-          <p:nvPr/>
-        </p:nvSpPr>
-        <p:spPr>
-          <a:xfrm>
-            <a:off x="457200" y="1353312"/>
-            <a:ext cx="5093061" cy="5047488"/>
+            <a:off x="457200" y="1170432"/>
+            <a:ext cx="11277295" cy="5230368"/>
           </a:xfrm>
           <a:prstGeom prst="rect">
             <a:avLst/>
@@ -7655,7 +7451,7 @@
       </p:sp>
       <p:sp>
         <p:nvSpPr>
-          <p:cNvPr id="9" name="TextBox 8"/>
+          <p:cNvPr id="6" name="TextBox 5"/>
           <p:cNvSpPr txBox="1"/>
           <p:nvPr/>
         </p:nvSpPr>
@@ -7836,118 +7632,14 @@
       </p:sp>
       <p:sp>
         <p:nvSpPr>
-          <p:cNvPr id="5" name="Rounded Rectangle 4"/>
-          <p:cNvSpPr/>
-          <p:nvPr/>
-        </p:nvSpPr>
-        <p:spPr>
-          <a:xfrm>
-            <a:off x="5797149" y="1570693"/>
-            <a:ext cx="6010497" cy="4064084"/>
-          </a:xfrm>
-          <a:prstGeom prst="roundRect">
-            <a:avLst>
-              <a:gd name="adj" fmla="val 4000"/>
-            </a:avLst>
-          </a:prstGeom>
-          <a:solidFill>
-            <a:srgbClr val="E8EEF4"/>
-          </a:solidFill>
-          <a:ln>
-            <a:noFill/>
-          </a:ln>
-        </p:spPr>
-        <p:style>
-          <a:lnRef idx="1">
-            <a:schemeClr val="accent1"/>
-          </a:lnRef>
-          <a:fillRef idx="3">
-            <a:schemeClr val="accent1"/>
-          </a:fillRef>
-          <a:effectRef idx="2">
-            <a:schemeClr val="accent1"/>
-          </a:effectRef>
-          <a:fontRef idx="minor">
-            <a:schemeClr val="lt1"/>
-          </a:fontRef>
-        </p:style>
-        <p:txBody>
-          <a:bodyPr rtlCol="0" anchor="ctr"/>
-          <a:lstStyle/>
-          <a:p>
-            <a:pPr algn="ctr"/>
-          </a:p>
-        </p:txBody>
-      </p:sp>
-      <p:pic>
-        <p:nvPicPr>
-          <p:cNvPr id="6" name="Picture 5" descr="whiteboard-diagram-meeting.jpg"/>
-          <p:cNvPicPr>
-            <a:picLocks noChangeAspect="1"/>
-          </p:cNvPicPr>
-          <p:nvPr/>
-        </p:nvPicPr>
-        <p:blipFill>
-          <a:blip r:embed="rId2"/>
-          <a:stretch>
-            <a:fillRect/>
-          </a:stretch>
-        </p:blipFill>
-        <p:spPr>
-          <a:xfrm>
-            <a:off x="5870301" y="1643845"/>
-            <a:ext cx="5864193" cy="3917780"/>
-          </a:xfrm>
-          <a:prstGeom prst="rect">
-            <a:avLst/>
-          </a:prstGeom>
-        </p:spPr>
-      </p:pic>
-      <p:sp>
-        <p:nvSpPr>
-          <p:cNvPr id="7" name="TextBox 6"/>
+          <p:cNvPr id="5" name="TextBox 4"/>
           <p:cNvSpPr txBox="1"/>
           <p:nvPr/>
         </p:nvSpPr>
         <p:spPr>
           <a:xfrm>
-            <a:off x="5870301" y="5961888"/>
-            <a:ext cx="5864193" cy="320040"/>
-          </a:xfrm>
-          <a:prstGeom prst="rect">
-            <a:avLst/>
-          </a:prstGeom>
-          <a:noFill/>
-        </p:spPr>
-        <p:txBody>
-          <a:bodyPr wrap="square">
-            <a:spAutoFit/>
-          </a:bodyPr>
-          <a:lstStyle/>
-          <a:p>
-            <a:pPr algn="ctr"/>
-            <a:r>
-              <a:rPr sz="1100" b="0" i="1">
-                <a:solidFill>
-                  <a:srgbClr val="666666"/>
-                </a:solidFill>
-                <a:latin typeface="Calibri"/>
-              </a:rPr>
-              <a:t>Foto: Christina Morillo · Pexels</a:t>
-            </a:r>
-          </a:p>
-        </p:txBody>
-      </p:sp>
-      <p:sp>
-        <p:nvSpPr>
-          <p:cNvPr id="8" name="TextBox 7"/>
-          <p:cNvSpPr txBox="1"/>
-          <p:nvPr/>
-        </p:nvSpPr>
-        <p:spPr>
-          <a:xfrm>
-            <a:off x="457200" y="1353312"/>
-            <a:ext cx="5093061" cy="5047488"/>
+            <a:off x="457200" y="1170432"/>
+            <a:ext cx="11277295" cy="5230368"/>
           </a:xfrm>
           <a:prstGeom prst="rect">
             <a:avLst/>
@@ -8011,7 +7703,7 @@
       </p:sp>
       <p:sp>
         <p:nvSpPr>
-          <p:cNvPr id="9" name="TextBox 8"/>
+          <p:cNvPr id="6" name="TextBox 5"/>
           <p:cNvSpPr txBox="1"/>
           <p:nvPr/>
         </p:nvSpPr>
@@ -9658,118 +9350,14 @@
       </p:sp>
       <p:sp>
         <p:nvSpPr>
-          <p:cNvPr id="5" name="Rounded Rectangle 4"/>
-          <p:cNvSpPr/>
-          <p:nvPr/>
-        </p:nvSpPr>
-        <p:spPr>
-          <a:xfrm>
-            <a:off x="5797149" y="1573813"/>
-            <a:ext cx="6010497" cy="4057845"/>
-          </a:xfrm>
-          <a:prstGeom prst="roundRect">
-            <a:avLst>
-              <a:gd name="adj" fmla="val 4000"/>
-            </a:avLst>
-          </a:prstGeom>
-          <a:solidFill>
-            <a:srgbClr val="E8EEF4"/>
-          </a:solidFill>
-          <a:ln>
-            <a:noFill/>
-          </a:ln>
-        </p:spPr>
-        <p:style>
-          <a:lnRef idx="1">
-            <a:schemeClr val="accent1"/>
-          </a:lnRef>
-          <a:fillRef idx="3">
-            <a:schemeClr val="accent1"/>
-          </a:fillRef>
-          <a:effectRef idx="2">
-            <a:schemeClr val="accent1"/>
-          </a:effectRef>
-          <a:fontRef idx="minor">
-            <a:schemeClr val="lt1"/>
-          </a:fontRef>
-        </p:style>
-        <p:txBody>
-          <a:bodyPr rtlCol="0" anchor="ctr"/>
-          <a:lstStyle/>
-          <a:p>
-            <a:pPr algn="ctr"/>
-          </a:p>
-        </p:txBody>
-      </p:sp>
-      <p:pic>
-        <p:nvPicPr>
-          <p:cNvPr id="6" name="Picture 5" descr="red-pen-correction-paper.jpg"/>
-          <p:cNvPicPr>
-            <a:picLocks noChangeAspect="1"/>
-          </p:cNvPicPr>
-          <p:nvPr/>
-        </p:nvPicPr>
-        <p:blipFill>
-          <a:blip r:embed="rId2"/>
-          <a:stretch>
-            <a:fillRect/>
-          </a:stretch>
-        </p:blipFill>
-        <p:spPr>
-          <a:xfrm>
-            <a:off x="5870301" y="1646965"/>
-            <a:ext cx="5864193" cy="3911541"/>
-          </a:xfrm>
-          <a:prstGeom prst="rect">
-            <a:avLst/>
-          </a:prstGeom>
-        </p:spPr>
-      </p:pic>
-      <p:sp>
-        <p:nvSpPr>
-          <p:cNvPr id="7" name="TextBox 6"/>
+          <p:cNvPr id="5" name="TextBox 4"/>
           <p:cNvSpPr txBox="1"/>
           <p:nvPr/>
         </p:nvSpPr>
         <p:spPr>
           <a:xfrm>
-            <a:off x="5870301" y="5961888"/>
-            <a:ext cx="5864193" cy="320040"/>
-          </a:xfrm>
-          <a:prstGeom prst="rect">
-            <a:avLst/>
-          </a:prstGeom>
-          <a:noFill/>
-        </p:spPr>
-        <p:txBody>
-          <a:bodyPr wrap="square">
-            <a:spAutoFit/>
-          </a:bodyPr>
-          <a:lstStyle/>
-          <a:p>
-            <a:pPr algn="ctr"/>
-            <a:r>
-              <a:rPr sz="1100" b="0" i="1">
-                <a:solidFill>
-                  <a:srgbClr val="666666"/>
-                </a:solidFill>
-                <a:latin typeface="Calibri"/>
-              </a:rPr>
-              <a:t>Foto: Andy Barbour · Pexels</a:t>
-            </a:r>
-          </a:p>
-        </p:txBody>
-      </p:sp>
-      <p:sp>
-        <p:nvSpPr>
-          <p:cNvPr id="8" name="TextBox 7"/>
-          <p:cNvSpPr txBox="1"/>
-          <p:nvPr/>
-        </p:nvSpPr>
-        <p:spPr>
-          <a:xfrm>
-            <a:off x="457200" y="1353312"/>
-            <a:ext cx="5093061" cy="5047488"/>
+            <a:off x="457200" y="1170432"/>
+            <a:ext cx="11277295" cy="5230368"/>
           </a:xfrm>
           <a:prstGeom prst="rect">
             <a:avLst/>
@@ -9844,7 +9432,7 @@
                 </a:solidFill>
                 <a:latin typeface="Calibri"/>
               </a:rPr>
-              <a:t>:</a:t>
+              <a:t>: servicios separados que comparten base de datos y se despliegan siempre juntos.</a:t>
             </a:r>
           </a:p>
           <a:p>
@@ -9878,14 +9466,48 @@
                 </a:solidFill>
                 <a:latin typeface="Calibri"/>
               </a:rPr>
-              <a:t>:</a:t>
-            </a:r>
-          </a:p>
-        </p:txBody>
-      </p:sp>
-      <p:sp>
-        <p:nvSpPr>
-          <p:cNvPr id="9" name="TextBox 8"/>
+              <a:t>: «API de turnos» en el C4 y «backend» en el Despliegue rompen la trazabilidad.</a:t>
+            </a:r>
+          </a:p>
+          <a:p>
+            <a:pPr>
+              <a:spcAft>
+                <a:spcPts val="800"/>
+              </a:spcAft>
+            </a:pPr>
+            <a:r>
+              <a:rPr sz="2000" b="0" i="0">
+                <a:solidFill>
+                  <a:srgbClr val="333333"/>
+                </a:solidFill>
+                <a:latin typeface="Calibri"/>
+              </a:rPr>
+              <a:t>–   </a:t>
+            </a:r>
+            <a:r>
+              <a:rPr sz="2000" b="1" i="0">
+                <a:solidFill>
+                  <a:srgbClr val="333333"/>
+                </a:solidFill>
+                <a:latin typeface="Calibri"/>
+              </a:rPr>
+              <a:t>CI sin tests</a:t>
+            </a:r>
+            <a:r>
+              <a:rPr sz="2000" b="0" i="0">
+                <a:solidFill>
+                  <a:srgbClr val="333333"/>
+                </a:solidFill>
+                <a:latin typeface="Calibri"/>
+              </a:rPr>
+              <a:t>: un pipeline que no puede fallar no verifica nada.</a:t>
+            </a:r>
+          </a:p>
+        </p:txBody>
+      </p:sp>
+      <p:sp>
+        <p:nvSpPr>
+          <p:cNvPr id="6" name="TextBox 5"/>
           <p:cNvSpPr txBox="1"/>
           <p:nvPr/>
         </p:nvSpPr>

--- a/Arquitectura de Sistemas Computacionales/Clases/Clase 11 - Avance del proyecto final/Presentacion.pptx
+++ b/Arquitectura de Sistemas Computacionales/Clases/Clase 11 - Avance del proyecto final/Presentacion.pptx
@@ -992,61 +992,37 @@
           <a:lstStyle/>
           <a:p>
             <a:r>
-              <a:t>DESARROLLO (para explicarlo, no se proyecta):</a:t>
+              <a:t>TEXTO COMPLETO DE LA LÁMINA (se proyecta resumido):</a:t>
             </a:r>
           </a:p>
           <a:p/>
           <a:p>
             <a:r>
-              <a:t>La retroalimentacion es la mitad del valor del dia y tiene tecnica propia.</a:t>
+              <a:t>Microservicios teatro · nombres distintos entre diagramas · secretos en imagen.</a:t>
             </a:r>
           </a:p>
           <a:p/>
           <a:p>
             <a:r>
-              <a:t>Una observacion accionable tiene cuatro partes: observacion, evidencia, impacto y accion con fecha.</a:t>
+              <a:t>CI sin tests · diagrama sin puertos · dominio infinito.</a:t>
             </a:r>
           </a:p>
           <a:p/>
           <a:p>
             <a:r>
-              <a:t>Ejemplo: «el despliegue llama backend a la API de turnos (observacion); se ve en la caja central (evidencia); rompe la trazabilidad con el Containers (impacto); unificar el nombre antes de la proxima revision (accion con fecha)».</a:t>
+              <a:t>Microservicios teatro: servicios separados que comparten base de datos y se despliegan siempre juntos.</a:t>
             </a:r>
           </a:p>
           <a:p/>
           <a:p>
             <a:r>
-              <a:t>Un comentario como «mejorar el diagrama» no es accionable: no dice que, ni donde, ni cuando.</a:t>
+              <a:t>Nombres distintos: «API de turnos» en el C4 y «backend» en el Despliegue rompen la trazabilidad.</a:t>
             </a:r>
           </a:p>
           <a:p/>
           <a:p>
             <a:r>
-              <a:t>(No se proyecta) Una retroalimentacion accionable tiene cuatro partes: observacion, evidencia, impacto y accion con fecha. "Falta seguridad" no cumple ninguna. "En el diagrama de despliegue la base de datos esta en la subred publica, contradice el control que ustedes escribieron para la amenaza de acceso no autorizado; si lo sustentan asi en la Clase 15 el evaluador concluira que el modelo de amenazas se escribio sin mirar el diagrama; muevanla a subred privada y dejen solo la API expuesta, antes de la Clase 12" cumple las cuatro.</a:t>
-            </a:r>
-          </a:p>
-          <a:p/>
-          <a:p>
-            <a:r>
-              <a:t>(No se proyecta) El docente debe apuntar a tres hallazgos por proyecto como maximo y marcar cual es el bloqueante, porque un estudiante que recibe once observaciones no corrige ninguna: se paraliza.</a:t>
-            </a:r>
-          </a:p>
-          <a:p/>
-          <a:p>
-            <a:r>
-              <a:t>(No se proyecta) Conviene nombrar tambien una fortaleza concreta, no por amabilidad sino porque el estudiante necesita saber que conservar; si solo escucha fallas, en la siguiente version cambia todo, incluido lo que estaba bien.</a:t>
-            </a:r>
-          </a:p>
-          <a:p/>
-          <a:p>
-            <a:r>
-              <a:t>(No se proyecta) Y la revision entre pares cumple una funcion que la del docente no puede: explicarle el sistema a otro estudiante obliga a verbalizar decisiones que nunca se dijeron en voz alta, y ahi el propio autor descubre sus huecos.</a:t>
-            </a:r>
-          </a:p>
-          <a:p/>
-          <a:p>
-            <a:r>
-              <a:t>(No se proyecta) El formato eficiente es de siete a ocho minutos por proyecto, con reloj visible, y el revisor asignado (otro estudiante, u otro equipo si el docente los autorizo) entregando por escrito una observacion y una pregunta.</a:t>
+              <a:t>CI sin tests: un pipeline que no puede fallar no verifica nada.</a:t>
             </a:r>
           </a:p>
         </p:txBody>
@@ -1072,6 +1048,130 @@
 </file>
 
 <file path=ppt/notesSlides/notesSlide6.xml><?xml version="1.0" encoding="utf-8"?>
+<p:notes xmlns:a="http://schemas.openxmlformats.org/drawingml/2006/main" xmlns:p="http://schemas.openxmlformats.org/presentationml/2006/main" xmlns:r="http://schemas.openxmlformats.org/officeDocument/2006/relationships">
+  <p:cSld>
+    <p:spTree>
+      <p:nvGrpSpPr>
+        <p:cNvPr id="1" name=""/>
+        <p:cNvGrpSpPr/>
+        <p:nvPr/>
+      </p:nvGrpSpPr>
+      <p:grpSpPr>
+        <a:xfrm>
+          <a:off x="0" y="0"/>
+          <a:ext cx="0" cy="0"/>
+          <a:chOff x="0" y="0"/>
+          <a:chExt cx="0" cy="0"/>
+        </a:xfrm>
+      </p:grpSpPr>
+      <p:sp>
+        <p:nvSpPr>
+          <p:cNvPr id="2" name="Slide Image Placeholder 1"/>
+          <p:cNvSpPr>
+            <a:spLocks noGrp="1"/>
+          </p:cNvSpPr>
+          <p:nvPr>
+            <p:ph type="sldImg" idx="2"/>
+          </p:nvPr>
+        </p:nvSpPr>
+        <p:spPr/>
+      </p:sp>
+      <p:sp>
+        <p:nvSpPr>
+          <p:cNvPr id="3" name="Notes Placeholder 2"/>
+          <p:cNvSpPr>
+            <a:spLocks noGrp="1"/>
+          </p:cNvSpPr>
+          <p:nvPr>
+            <p:ph type="body" idx="3" sz="quarter"/>
+          </p:nvPr>
+        </p:nvSpPr>
+        <p:spPr/>
+        <p:txBody>
+          <a:bodyPr/>
+          <a:lstStyle/>
+          <a:p>
+            <a:r>
+              <a:t>DESARROLLO (para explicarlo, no se proyecta):</a:t>
+            </a:r>
+          </a:p>
+          <a:p/>
+          <a:p>
+            <a:r>
+              <a:t>La retroalimentacion es la mitad del valor del dia y tiene tecnica propia.</a:t>
+            </a:r>
+          </a:p>
+          <a:p/>
+          <a:p>
+            <a:r>
+              <a:t>Una observacion accionable tiene cuatro partes: observacion, evidencia, impacto y accion con fecha.</a:t>
+            </a:r>
+          </a:p>
+          <a:p/>
+          <a:p>
+            <a:r>
+              <a:t>Ejemplo: «el despliegue llama backend a la API de turnos (observacion); se ve en la caja central (evidencia); rompe la trazabilidad con el Containers (impacto); unificar el nombre antes de la proxima revision (accion con fecha)».</a:t>
+            </a:r>
+          </a:p>
+          <a:p/>
+          <a:p>
+            <a:r>
+              <a:t>Un comentario como «mejorar el diagrama» no es accionable: no dice que, ni donde, ni cuando.</a:t>
+            </a:r>
+          </a:p>
+          <a:p/>
+          <a:p>
+            <a:r>
+              <a:t>(No se proyecta) Una retroalimentacion accionable tiene cuatro partes: observacion, evidencia, impacto y accion con fecha. "Falta seguridad" no cumple ninguna. "En el diagrama de despliegue la base de datos esta en la subred publica, contradice el control que ustedes escribieron para la amenaza de acceso no autorizado; si lo sustentan asi en la Clase 15 el evaluador concluira que el modelo de amenazas se escribio sin mirar el diagrama; muevanla a subred privada y dejen solo la API expuesta, antes de la Clase 12" cumple las cuatro.</a:t>
+            </a:r>
+          </a:p>
+          <a:p/>
+          <a:p>
+            <a:r>
+              <a:t>(No se proyecta) El docente debe apuntar a tres hallazgos por proyecto como maximo y marcar cual es el bloqueante, porque un estudiante que recibe once observaciones no corrige ninguna: se paraliza.</a:t>
+            </a:r>
+          </a:p>
+          <a:p/>
+          <a:p>
+            <a:r>
+              <a:t>(No se proyecta) Conviene nombrar tambien una fortaleza concreta, no por amabilidad sino porque el estudiante necesita saber que conservar; si solo escucha fallas, en la siguiente version cambia todo, incluido lo que estaba bien.</a:t>
+            </a:r>
+          </a:p>
+          <a:p/>
+          <a:p>
+            <a:r>
+              <a:t>(No se proyecta) Y la revision entre pares cumple una funcion que la del docente no puede: explicarle el sistema a otro estudiante obliga a verbalizar decisiones que nunca se dijeron en voz alta, y ahi el propio autor descubre sus huecos.</a:t>
+            </a:r>
+          </a:p>
+          <a:p/>
+          <a:p>
+            <a:r>
+              <a:t>(No se proyecta) El formato eficiente es de siete a ocho minutos por proyecto, con reloj visible, y el revisor asignado (otro estudiante, u otro equipo si el docente los autorizo) entregando por escrito una observacion y una pregunta.</a:t>
+            </a:r>
+          </a:p>
+        </p:txBody>
+      </p:sp>
+      <p:sp>
+        <p:nvSpPr>
+          <p:cNvPr id="4" name="Slide Number Placeholder 3"/>
+          <p:cNvSpPr>
+            <a:spLocks noGrp="1"/>
+          </p:cNvSpPr>
+          <p:nvPr>
+            <p:ph type="sldNum" idx="5" sz="quarter"/>
+          </p:nvPr>
+        </p:nvSpPr>
+        <p:spPr/>
+      </p:sp>
+    </p:spTree>
+  </p:cSld>
+  <p:clrMapOvr>
+    <a:masterClrMapping/>
+  </p:clrMapOvr>
+</p:notes>
+</file>
+
+<file path=ppt/notesSlides/notesSlide7.xml><?xml version="1.0" encoding="utf-8"?>
 <p:notes xmlns:a="http://schemas.openxmlformats.org/drawingml/2006/main" xmlns:p="http://schemas.openxmlformats.org/presentationml/2006/main" xmlns:r="http://schemas.openxmlformats.org/officeDocument/2006/relationships">
   <p:cSld>
     <p:spTree>
@@ -7632,14 +7732,83 @@
       </p:sp>
       <p:sp>
         <p:nvSpPr>
-          <p:cNvPr id="5" name="TextBox 4"/>
+          <p:cNvPr id="5" name="Rounded Rectangle 4"/>
+          <p:cNvSpPr/>
+          <p:nvPr/>
+        </p:nvSpPr>
+        <p:spPr>
+          <a:xfrm>
+            <a:off x="5797149" y="1343926"/>
+            <a:ext cx="6010497" cy="4837658"/>
+          </a:xfrm>
+          <a:prstGeom prst="roundRect">
+            <a:avLst>
+              <a:gd name="adj" fmla="val 4000"/>
+            </a:avLst>
+          </a:prstGeom>
+          <a:solidFill>
+            <a:srgbClr val="E8EEF4"/>
+          </a:solidFill>
+          <a:ln>
+            <a:noFill/>
+          </a:ln>
+        </p:spPr>
+        <p:style>
+          <a:lnRef idx="1">
+            <a:schemeClr val="accent1"/>
+          </a:lnRef>
+          <a:fillRef idx="3">
+            <a:schemeClr val="accent1"/>
+          </a:fillRef>
+          <a:effectRef idx="2">
+            <a:schemeClr val="accent1"/>
+          </a:effectRef>
+          <a:fontRef idx="minor">
+            <a:schemeClr val="lt1"/>
+          </a:fontRef>
+        </p:style>
+        <p:txBody>
+          <a:bodyPr rtlCol="0" anchor="ctr"/>
+          <a:lstStyle/>
+          <a:p>
+            <a:pPr algn="ctr"/>
+          </a:p>
+        </p:txBody>
+      </p:sp>
+      <p:pic>
+        <p:nvPicPr>
+          <p:cNvPr id="6" name="Picture 5" descr="ilus-revision-paso1.png"/>
+          <p:cNvPicPr>
+            <a:picLocks noChangeAspect="1"/>
+          </p:cNvPicPr>
+          <p:nvPr/>
+        </p:nvPicPr>
+        <p:blipFill>
+          <a:blip r:embed="rId2"/>
+          <a:stretch>
+            <a:fillRect/>
+          </a:stretch>
+        </p:blipFill>
+        <p:spPr>
+          <a:xfrm>
+            <a:off x="5870301" y="1417078"/>
+            <a:ext cx="5864193" cy="4691354"/>
+          </a:xfrm>
+          <a:prstGeom prst="rect">
+            <a:avLst/>
+          </a:prstGeom>
+        </p:spPr>
+      </p:pic>
+      <p:sp>
+        <p:nvSpPr>
+          <p:cNvPr id="7" name="TextBox 6"/>
           <p:cNvSpPr txBox="1"/>
           <p:nvPr/>
         </p:nvSpPr>
         <p:spPr>
           <a:xfrm>
-            <a:off x="457200" y="1170432"/>
-            <a:ext cx="11277295" cy="5230368"/>
+            <a:off x="457200" y="1353312"/>
+            <a:ext cx="5093061" cy="5047488"/>
           </a:xfrm>
           <a:prstGeom prst="rect">
             <a:avLst/>
@@ -7703,7 +7872,7 @@
       </p:sp>
       <p:sp>
         <p:nvSpPr>
-          <p:cNvPr id="6" name="TextBox 5"/>
+          <p:cNvPr id="8" name="TextBox 7"/>
           <p:cNvSpPr txBox="1"/>
           <p:nvPr/>
         </p:nvSpPr>
@@ -8499,9 +8668,33 @@
           </a:prstGeom>
         </p:spPr>
       </p:pic>
-      <p:sp>
-        <p:nvSpPr>
-          <p:cNvPr id="8" name="TextBox 7"/>
+      <p:pic>
+        <p:nvPicPr>
+          <p:cNvPr id="8" name="Picture 7" descr="cinco-cadenas-paso3.png"/>
+          <p:cNvPicPr>
+            <a:picLocks noChangeAspect="1"/>
+          </p:cNvPicPr>
+          <p:nvPr/>
+        </p:nvPicPr>
+        <p:blipFill>
+          <a:blip r:embed="rId4"/>
+          <a:stretch>
+            <a:fillRect/>
+          </a:stretch>
+        </p:blipFill>
+        <p:spPr>
+          <a:xfrm>
+            <a:off x="5876318" y="1261872"/>
+            <a:ext cx="5852160" cy="4681728"/>
+          </a:xfrm>
+          <a:prstGeom prst="rect">
+            <a:avLst/>
+          </a:prstGeom>
+        </p:spPr>
+      </p:pic>
+      <p:sp>
+        <p:nvSpPr>
+          <p:cNvPr id="13" name="TextBox 12"/>
           <p:cNvSpPr txBox="1"/>
           <p:nvPr/>
         </p:nvSpPr>
@@ -8536,7 +8729,7 @@
       </p:sp>
       <p:sp>
         <p:nvSpPr>
-          <p:cNvPr id="9" name="TextBox 8"/>
+          <p:cNvPr id="14" name="TextBox 13"/>
           <p:cNvSpPr txBox="1"/>
           <p:nvPr/>
         </p:nvSpPr>
@@ -8623,7 +8816,7 @@
       </p:sp>
       <p:sp>
         <p:nvSpPr>
-          <p:cNvPr id="10" name="TextBox 9"/>
+          <p:cNvPr id="15" name="TextBox 14"/>
           <p:cNvSpPr txBox="1"/>
           <p:nvPr/>
         </p:nvSpPr>
@@ -8710,6 +8903,59 @@
                                         <p:cTn id="7" dur="450"/>
                                         <p:tgtEl>
                                           <p:spTgt spid="7"/>
+                                        </p:tgtEl>
+                                      </p:cBhvr>
+                                    </p:animEffect>
+                                  </p:childTnLst>
+                                </p:cTn>
+                              </p:par>
+                            </p:childTnLst>
+                          </p:cTn>
+                        </p:par>
+                      </p:childTnLst>
+                    </p:cTn>
+                  </p:par>
+                  <p:par>
+                    <p:cTn id="8" fill="hold">
+                      <p:stCondLst>
+                        <p:cond delay="indefinite"/>
+                      </p:stCondLst>
+                      <p:childTnLst>
+                        <p:par>
+                          <p:cTn id="9" fill="hold">
+                            <p:stCondLst>
+                              <p:cond delay="0"/>
+                            </p:stCondLst>
+                            <p:childTnLst>
+                              <p:par>
+                                <p:cTn id="10" presetID="10" presetClass="entr" presetSubtype="0" fill="hold" nodeType="clickEffect">
+                                  <p:stCondLst>
+                                    <p:cond delay="0"/>
+                                  </p:stCondLst>
+                                  <p:childTnLst>
+                                    <p:set>
+                                      <p:cBhvr>
+                                        <p:cTn id="11" dur="1" fill="hold">
+                                          <p:stCondLst>
+                                            <p:cond delay="0"/>
+                                          </p:stCondLst>
+                                        </p:cTn>
+                                        <p:tgtEl>
+                                          <p:spTgt spid="8"/>
+                                        </p:tgtEl>
+                                        <p:attrNameLst>
+                                          <p:attrName>style.visibility</p:attrName>
+                                        </p:attrNameLst>
+                                      </p:cBhvr>
+                                      <p:to>
+                                        <p:strVal val="visible"/>
+                                      </p:to>
+                                    </p:set>
+                                    <p:animEffect transition="in" filter="fade">
+                                      <p:cBhvr>
+                                        <p:cTn id="12" dur="450"/>
+                                        <p:tgtEl>
+                                          <p:spTgt spid="8"/>
                                         </p:tgtEl>
                                       </p:cBhvr>
                                     </p:animEffect>
@@ -9350,14 +9596,83 @@
       </p:sp>
       <p:sp>
         <p:nvSpPr>
-          <p:cNvPr id="5" name="TextBox 4"/>
+          <p:cNvPr id="5" name="Rounded Rectangle 4"/>
+          <p:cNvSpPr/>
+          <p:nvPr/>
+        </p:nvSpPr>
+        <p:spPr>
+          <a:xfrm>
+            <a:off x="5797149" y="1343926"/>
+            <a:ext cx="6010497" cy="4837658"/>
+          </a:xfrm>
+          <a:prstGeom prst="roundRect">
+            <a:avLst>
+              <a:gd name="adj" fmla="val 4000"/>
+            </a:avLst>
+          </a:prstGeom>
+          <a:solidFill>
+            <a:srgbClr val="E8EEF4"/>
+          </a:solidFill>
+          <a:ln>
+            <a:noFill/>
+          </a:ln>
+        </p:spPr>
+        <p:style>
+          <a:lnRef idx="1">
+            <a:schemeClr val="accent1"/>
+          </a:lnRef>
+          <a:fillRef idx="3">
+            <a:schemeClr val="accent1"/>
+          </a:fillRef>
+          <a:effectRef idx="2">
+            <a:schemeClr val="accent1"/>
+          </a:effectRef>
+          <a:fontRef idx="minor">
+            <a:schemeClr val="lt1"/>
+          </a:fontRef>
+        </p:style>
+        <p:txBody>
+          <a:bodyPr rtlCol="0" anchor="ctr"/>
+          <a:lstStyle/>
+          <a:p>
+            <a:pPr algn="ctr"/>
+          </a:p>
+        </p:txBody>
+      </p:sp>
+      <p:pic>
+        <p:nvPicPr>
+          <p:cNvPr id="6" name="Picture 5" descr="ilus-errores-paso1.png"/>
+          <p:cNvPicPr>
+            <a:picLocks noChangeAspect="1"/>
+          </p:cNvPicPr>
+          <p:nvPr/>
+        </p:nvPicPr>
+        <p:blipFill>
+          <a:blip r:embed="rId2"/>
+          <a:stretch>
+            <a:fillRect/>
+          </a:stretch>
+        </p:blipFill>
+        <p:spPr>
+          <a:xfrm>
+            <a:off x="5870301" y="1417078"/>
+            <a:ext cx="5864193" cy="4691354"/>
+          </a:xfrm>
+          <a:prstGeom prst="rect">
+            <a:avLst/>
+          </a:prstGeom>
+        </p:spPr>
+      </p:pic>
+      <p:sp>
+        <p:nvSpPr>
+          <p:cNvPr id="7" name="TextBox 6"/>
           <p:cNvSpPr txBox="1"/>
           <p:nvPr/>
         </p:nvSpPr>
         <p:spPr>
           <a:xfrm>
-            <a:off x="457200" y="1170432"/>
-            <a:ext cx="11277295" cy="5230368"/>
+            <a:off x="457200" y="1353312"/>
+            <a:ext cx="5093061" cy="5047488"/>
           </a:xfrm>
           <a:prstGeom prst="rect">
             <a:avLst/>
@@ -9469,45 +9784,11 @@
               <a:t>: «API de turnos» en el C4 y «backend» en el Despliegue rompen la trazabilidad.</a:t>
             </a:r>
           </a:p>
-          <a:p>
-            <a:pPr>
-              <a:spcAft>
-                <a:spcPts val="800"/>
-              </a:spcAft>
-            </a:pPr>
-            <a:r>
-              <a:rPr sz="2000" b="0" i="0">
-                <a:solidFill>
-                  <a:srgbClr val="333333"/>
-                </a:solidFill>
-                <a:latin typeface="Calibri"/>
-              </a:rPr>
-              <a:t>–   </a:t>
-            </a:r>
-            <a:r>
-              <a:rPr sz="2000" b="1" i="0">
-                <a:solidFill>
-                  <a:srgbClr val="333333"/>
-                </a:solidFill>
-                <a:latin typeface="Calibri"/>
-              </a:rPr>
-              <a:t>CI sin tests</a:t>
-            </a:r>
-            <a:r>
-              <a:rPr sz="2000" b="0" i="0">
-                <a:solidFill>
-                  <a:srgbClr val="333333"/>
-                </a:solidFill>
-                <a:latin typeface="Calibri"/>
-              </a:rPr>
-              <a:t>: un pipeline que no puede fallar no verifica nada.</a:t>
-            </a:r>
-          </a:p>
-        </p:txBody>
-      </p:sp>
-      <p:sp>
-        <p:nvSpPr>
-          <p:cNvPr id="6" name="TextBox 5"/>
+        </p:txBody>
+      </p:sp>
+      <p:sp>
+        <p:nvSpPr>
+          <p:cNvPr id="8" name="TextBox 7"/>
           <p:cNvSpPr txBox="1"/>
           <p:nvPr/>
         </p:nvSpPr>

--- a/Arquitectura de Sistemas Computacionales/Clases/Clase 11 - Avance del proyecto final/Presentacion.pptx
+++ b/Arquitectura de Sistemas Computacionales/Clases/Clase 11 - Avance del proyecto final/Presentacion.pptx
@@ -9976,7 +9976,7 @@
         <p:spPr>
           <a:xfrm>
             <a:off x="457200" y="1261872"/>
-            <a:ext cx="11277295" cy="5120416"/>
+            <a:ext cx="6991923" cy="5120416"/>
           </a:xfrm>
           <a:prstGeom prst="roundRect">
             <a:avLst>
@@ -10021,7 +10021,7 @@
         <p:spPr>
           <a:xfrm>
             <a:off x="457200" y="1261872"/>
-            <a:ext cx="11277295" cy="365760"/>
+            <a:ext cx="6991923" cy="365760"/>
           </a:xfrm>
           <a:prstGeom prst="rect">
             <a:avLst/>
@@ -10193,7 +10193,7 @@
         <p:spPr>
           <a:xfrm>
             <a:off x="1371600" y="1298448"/>
-            <a:ext cx="10180015" cy="292608"/>
+            <a:ext cx="5894643" cy="292608"/>
           </a:xfrm>
           <a:prstGeom prst="rect">
             <a:avLst/>
@@ -10585,7 +10585,7 @@
         <p:spPr>
           <a:xfrm>
             <a:off x="1188720" y="1719072"/>
-            <a:ext cx="10271455" cy="4526056"/>
+            <a:ext cx="5986083" cy="4526056"/>
           </a:xfrm>
           <a:prstGeom prst="rect">
             <a:avLst/>
@@ -10822,7 +10822,7 @@
                 </a:solidFill>
                 <a:latin typeface="Consolas"/>
               </a:rPr>
-              <a:t>"Muestra franjas y crea la reserva"</a:t>
+              <a:t>"Crea la reserva"</a:t>
             </a:r>
             <a:r>
               <a:rPr sz="1100" i="0" b="0">
@@ -10953,7 +10953,7 @@
                 </a:solidFill>
                 <a:latin typeface="Consolas"/>
               </a:rPr>
-              <a:t>"Rutas de /turnos"</a:t>
+              <a:t>"Rutas"</a:t>
             </a:r>
             <a:r>
               <a:rPr sz="1100" i="0" b="0">
@@ -10971,7 +10971,7 @@
                 </a:solidFill>
                 <a:latin typeface="Consolas"/>
               </a:rPr>
-              <a:t>"Express Router"</a:t>
+              <a:t>"Express"</a:t>
             </a:r>
             <a:r>
               <a:rPr sz="1100" i="0" b="0">
@@ -10989,7 +10989,7 @@
                 </a:solidFill>
                 <a:latin typeface="Consolas"/>
               </a:rPr>
-              <a:t>"Recibe y valida la peticion"</a:t>
+              <a:t>"Valida la peticion"</a:t>
             </a:r>
             <a:r>
               <a:rPr sz="1100" i="0" b="0">
@@ -11059,7 +11059,7 @@
                 </a:solidFill>
                 <a:latin typeface="Consolas"/>
               </a:rPr>
-              <a:t>"Verificador de token"</a:t>
+              <a:t>"Token"</a:t>
             </a:r>
             <a:r>
               <a:rPr sz="1100" i="0" b="0">
@@ -11077,7 +11077,7 @@
                 </a:solidFill>
                 <a:latin typeface="Consolas"/>
               </a:rPr>
-              <a:t>"Libreria JWT"</a:t>
+              <a:t>"JWT"</a:t>
             </a:r>
             <a:r>
               <a:rPr sz="1100" i="0" b="0">
@@ -11095,7 +11095,7 @@
                 </a:solidFill>
                 <a:latin typeface="Consolas"/>
               </a:rPr>
-              <a:t>"Valida firma y expiracion"</a:t>
+              <a:t>"Firma y expiracion"</a:t>
             </a:r>
             <a:r>
               <a:rPr sz="1100" i="0" b="0">
@@ -11165,7 +11165,7 @@
                 </a:solidFill>
                 <a:latin typeface="Consolas"/>
               </a:rPr>
-              <a:t>"Reglas de reserva"</a:t>
+              <a:t>"Reglas"</a:t>
             </a:r>
             <a:r>
               <a:rPr sz="1100" i="0" b="0">
@@ -11201,7 +11201,7 @@
                 </a:solidFill>
                 <a:latin typeface="Consolas"/>
               </a:rPr>
-              <a:t>"Impide dos turnos en una franja"</a:t>
+              <a:t>"Sin doble reserva"</a:t>
             </a:r>
             <a:r>
               <a:rPr sz="1100" i="0" b="0">
@@ -11271,7 +11271,7 @@
                 </a:solidFill>
                 <a:latin typeface="Consolas"/>
               </a:rPr>
-              <a:t>"Repositorio de turnos"</a:t>
+              <a:t>"Repositorio"</a:t>
             </a:r>
             <a:r>
               <a:rPr sz="1100" i="0" b="0">
@@ -11307,7 +11307,7 @@
                 </a:solidFill>
                 <a:latin typeface="Consolas"/>
               </a:rPr>
-              <a:t>"Encapsula el SQL"</a:t>
+              <a:t>"El SQL"</a:t>
             </a:r>
             <a:r>
               <a:rPr sz="1100" i="0" b="0">
@@ -11377,7 +11377,7 @@
                 </a:solidFill>
                 <a:latin typeface="Consolas"/>
               </a:rPr>
-              <a:t>"Publicador de avisos"</a:t>
+              <a:t>"Publicador"</a:t>
             </a:r>
             <a:r>
               <a:rPr sz="1100" i="0" b="0">
@@ -11395,7 +11395,7 @@
                 </a:solidFill>
                 <a:latin typeface="Consolas"/>
               </a:rPr>
-              <a:t>"Cliente AMQP"</a:t>
+              <a:t>"AMQP"</a:t>
             </a:r>
             <a:r>
               <a:rPr sz="1100" i="0" b="0">
@@ -11413,7 +11413,7 @@
                 </a:solidFill>
                 <a:latin typeface="Consolas"/>
               </a:rPr>
-              <a:t>"Publica aviso-de-turno"</a:t>
+              <a:t>"Publica el aviso"</a:t>
             </a:r>
             <a:r>
               <a:rPr sz="1100" i="0" b="0">
@@ -11526,7 +11526,7 @@
                 </a:solidFill>
                 <a:latin typeface="Consolas"/>
               </a:rPr>
-              <a:t>"Turnos y horarios"</a:t>
+              <a:t>"Turnos"</a:t>
             </a:r>
             <a:r>
               <a:rPr sz="1100" i="0" b="0">
@@ -11623,7 +11623,7 @@
                 </a:solidFill>
                 <a:latin typeface="Consolas"/>
               </a:rPr>
-              <a:t>"Avisos pendientes"</a:t>
+              <a:t>"Avisos"</a:t>
             </a:r>
             <a:r>
               <a:rPr sz="1100" i="0" b="0">
@@ -11702,7 +11702,7 @@
                 </a:solidFill>
                 <a:latin typeface="Consolas"/>
               </a:rPr>
-              <a:t>"Emite los tokens"</a:t>
+              <a:t>"Emite tokens"</a:t>
             </a:r>
             <a:r>
               <a:rPr sz="1100" i="0" b="0">
@@ -11957,7 +11957,7 @@
                 </a:solidFill>
                 <a:latin typeface="Consolas"/>
               </a:rPr>
-              <a:t>"Obtiene las llaves publicas"</a:t>
+              <a:t>"Pide llaves publicas"</a:t>
             </a:r>
             <a:r>
               <a:rPr sz="1100" i="0" b="0">
@@ -12422,7 +12422,111 @@
       </p:sp>
       <p:sp>
         <p:nvSpPr>
-          <p:cNvPr id="13" name="TextBox 12"/>
+          <p:cNvPr id="13" name="Rounded Rectangle 12"/>
+          <p:cNvSpPr/>
+          <p:nvPr/>
+        </p:nvSpPr>
+        <p:spPr>
+          <a:xfrm>
+            <a:off x="7668579" y="1261872"/>
+            <a:ext cx="4120780" cy="3318569"/>
+          </a:xfrm>
+          <a:prstGeom prst="roundRect">
+            <a:avLst>
+              <a:gd name="adj" fmla="val 4000"/>
+            </a:avLst>
+          </a:prstGeom>
+          <a:solidFill>
+            <a:srgbClr val="E8EEF4"/>
+          </a:solidFill>
+          <a:ln>
+            <a:noFill/>
+          </a:ln>
+        </p:spPr>
+        <p:style>
+          <a:lnRef idx="1">
+            <a:schemeClr val="accent1"/>
+          </a:lnRef>
+          <a:fillRef idx="3">
+            <a:schemeClr val="accent1"/>
+          </a:fillRef>
+          <a:effectRef idx="2">
+            <a:schemeClr val="accent1"/>
+          </a:effectRef>
+          <a:fontRef idx="minor">
+            <a:schemeClr val="lt1"/>
+          </a:fontRef>
+        </p:style>
+        <p:txBody>
+          <a:bodyPr rtlCol="0" anchor="ctr"/>
+          <a:lstStyle/>
+          <a:p>
+            <a:pPr algn="ctr"/>
+          </a:p>
+        </p:txBody>
+      </p:sp>
+      <p:pic>
+        <p:nvPicPr>
+          <p:cNvPr id="14" name="Picture 13" descr="dg-c4-component-paso1.png"/>
+          <p:cNvPicPr>
+            <a:picLocks noChangeAspect="1"/>
+          </p:cNvPicPr>
+          <p:nvPr/>
+        </p:nvPicPr>
+        <p:blipFill>
+          <a:blip r:embed="rId2"/>
+          <a:stretch>
+            <a:fillRect/>
+          </a:stretch>
+        </p:blipFill>
+        <p:spPr>
+          <a:xfrm>
+            <a:off x="7723443" y="1316736"/>
+            <a:ext cx="4011052" cy="3208841"/>
+          </a:xfrm>
+          <a:prstGeom prst="rect">
+            <a:avLst/>
+          </a:prstGeom>
+        </p:spPr>
+      </p:pic>
+      <p:sp>
+        <p:nvSpPr>
+          <p:cNvPr id="15" name="TextBox 14"/>
+          <p:cNvSpPr txBox="1"/>
+          <p:nvPr/>
+        </p:nvSpPr>
+        <p:spPr>
+          <a:xfrm>
+            <a:off x="7723443" y="4580441"/>
+            <a:ext cx="4011052" cy="320040"/>
+          </a:xfrm>
+          <a:prstGeom prst="rect">
+            <a:avLst/>
+          </a:prstGeom>
+          <a:noFill/>
+        </p:spPr>
+        <p:txBody>
+          <a:bodyPr wrap="square">
+            <a:spAutoFit/>
+          </a:bodyPr>
+          <a:lstStyle/>
+          <a:p>
+            <a:pPr algn="ctr"/>
+            <a:r>
+              <a:rPr sz="1200" b="0" i="1">
+                <a:solidFill>
+                  <a:srgbClr val="666666"/>
+                </a:solidFill>
+                <a:latin typeface="Calibri"/>
+              </a:rPr>
+              <a:t>Lo que dibuja este código</a:t>
+            </a:r>
+          </a:p>
+        </p:txBody>
+      </p:sp>
+      <p:sp>
+        <p:nvSpPr>
+          <p:cNvPr id="16" name="TextBox 15"/>
           <p:cNvSpPr txBox="1"/>
           <p:nvPr/>
         </p:nvSpPr>

--- a/Arquitectura de Sistemas Computacionales/Clases/Clase 11 - Avance del proyecto final/Presentacion.pptx
+++ b/Arquitectura de Sistemas Computacionales/Clases/Clase 11 - Avance del proyecto final/Presentacion.pptx
@@ -922,7 +922,7 @@
           <a:p/>
           <a:p>
             <a:r>
-              <a:t>(No se proyecta) Se detecta con cuatro preguntas de una linea, todas respondibles por el estudiante: se puede desplegar ese servicio sin desplegar los otros, tiene sus propios datos o comparte tablas con el vecino, puede fallar sin tumbar a los demas, y existe una razon de negocio por la que cambiaria en un momento distinto al resto.</a:t>
+              <a:t>(No se proyecta) Se detecta con cuatro preguntas de una linea que el estudiante puede responder: se puede desplegar ese servicio sin desplegar los otros, tiene sus propios datos o comparte tablas con el vecino, puede fallar sin tumbar a los demas, y existe una razon de negocio por la que cambiaria en un momento distinto al resto.</a:t>
             </a:r>
           </a:p>
         </p:txBody>
@@ -1104,7 +1104,7 @@
           <a:p/>
           <a:p>
             <a:r>
-              <a:t>Una observacion accionable tiene cuatro partes: observacion, evidencia, impacto y accion con fecha.</a:t>
+              <a:t>Una observacion util tiene cuatro partes: observacion, evidencia, impacto y accion con fecha.</a:t>
             </a:r>
           </a:p>
           <a:p/>
@@ -1116,13 +1116,13 @@
           <a:p/>
           <a:p>
             <a:r>
-              <a:t>Un comentario como «mejorar el diagrama» no es accionable: no dice que, ni donde, ni cuando.</a:t>
+              <a:t>Un comentario como «mejorar el diagrama» no sirve: no dice que, ni donde, ni cuando.</a:t>
             </a:r>
           </a:p>
           <a:p/>
           <a:p>
             <a:r>
-              <a:t>(No se proyecta) Una retroalimentacion accionable tiene cuatro partes: observacion, evidencia, impacto y accion con fecha. "Falta seguridad" no cumple ninguna. "En el diagrama de despliegue la base de datos esta en la subred publica, contradice el control que ustedes escribieron para la amenaza de acceso no autorizado; si lo sustentan asi en la Clase 15 el evaluador concluira que el modelo de amenazas se escribio sin mirar el diagrama; muevanla a subred privada y dejen solo la API expuesta, antes de la Clase 12" cumple las cuatro.</a:t>
+              <a:t>(No se proyecta) Una retroalimentacion util tiene cuatro partes: observacion, evidencia, impacto y accion con fecha. "Falta seguridad" no cumple ninguna. "En el diagrama de despliegue la base de datos esta en la subred publica, contradice el control que ustedes escribieron para la amenaza de acceso no autorizado; si lo sustentan asi en la Clase 15 el evaluador concluira que el modelo de amenazas se escribio sin mirar el diagrama; muevanla a subred privada y dejen solo la API expuesta, antes de la Clase 12" cumple las cuatro.</a:t>
             </a:r>
           </a:p>
           <a:p/>
@@ -1140,7 +1140,7 @@
           <a:p/>
           <a:p>
             <a:r>
-              <a:t>(No se proyecta) Y la revision entre pares cumple una funcion que la del docente no puede: explicarle el sistema a otro estudiante obliga a verbalizar decisiones que nunca se dijeron en voz alta, y ahi el propio autor descubre sus huecos.</a:t>
+              <a:t>(No se proyecta) Y la revision entre pares cumple una funcion que la del docente no puede: explicarle el sistema a otro estudiante obliga a explicar decisiones que nunca se dijeron en voz alta, y ahi el propio autor descubre sus huecos.</a:t>
             </a:r>
           </a:p>
           <a:p/>
@@ -4745,7 +4745,7 @@
                 </a:solidFill>
                 <a:latin typeface="Calibri"/>
               </a:rPr>
-              <a:t>Retroalimentacion accionable: observacion, evidencia, impacto y accion con fecha</a:t>
+              <a:t>Retroalimentacion util: observacion, evidencia, impacto y accion con fecha</a:t>
             </a:r>
           </a:p>
         </p:txBody>
@@ -4984,7 +4984,7 @@
                 </a:solidFill>
                 <a:latin typeface="Calibri"/>
               </a:rPr>
-              <a:t>–   Una observación accionable tiene cuatro partes: observación, evidencia, impacto y acción con fecha.</a:t>
+              <a:t>–   Una observación útil tiene cuatro partes: observación, evidencia, impacto y acción con fecha.</a:t>
             </a:r>
           </a:p>
           <a:p>
